--- a/docs/reports/latest.pptx
+++ b/docs/reports/latest.pptx
@@ -1876,7 +1876,7 @@
                 <a:ea typeface="Aptos" pitchFamily="34" charset="-122"/>
                 <a:cs typeface="Aptos" pitchFamily="34" charset="-120"/>
               </a:rPr>
-              <a:t>2026-10-08</a:t>
+              <a:t>2026-10-12</a:t>
             </a:r>
             <a:endParaRPr lang="en-US" sz="800" dirty="0"/>
           </a:p>
@@ -2160,7 +2160,7 @@
                 <a:ea typeface="Microsoft YaHei" pitchFamily="34" charset="-122"/>
                 <a:cs typeface="Microsoft YaHei" pitchFamily="34" charset="-120"/>
               </a:rPr>
-              <a:t>今日磷酸铁锂行业信号集中在高压实产品供给偏紧与动力电池回收政策收紧。容百科技磷酸铁锂项目正式量产，四代高压实及五代超高压实材料供给偏紧，头部企业高端产能稀缺；同时超九成动力电池回收企业面临出局，回收端门槛提升可能影响长期原料供给结构。短期关注高压实产品放量节奏与回收政策执行力度，二者分别从供给端和成本端影响行业格局。</a:t>
+              <a:t>今日磷酸铁锂行业信号密集：湖南裕能20万吨纳米磷酸铁锂项目落地，龙蟠科技锁定最高56.78万吨长协，供给端与需求端同步扩张；碳酸锂价格暴跌近90%导致回收行业洗牌，成本端压力与盈利分化加剧；欧盟要求中国自限插混出口，叠加国内19项新质生产力举措，政策博弈升温。整体看，产能扩张与长协锁定并行，但价格下行和贸易壁垒可能压制盈利，需关注项目投产节奏与政策落地细节。</a:t>
             </a:r>
             <a:endParaRPr lang="en-US" sz="1400" dirty="0"/>
           </a:p>
@@ -2898,7 +2898,7 @@
                 <a:ea typeface="Microsoft YaHei" pitchFamily="34" charset="-122"/>
                 <a:cs typeface="Microsoft YaHei" pitchFamily="34" charset="-120"/>
               </a:rPr>
-              <a:t>今日磷酸铁锂行业信号集中在高压实产品供给偏紧与动力电池回收政策收紧。容百科技磷酸铁锂项目正式量产，四代高压实及五代超高压实材料供给偏紧，头部企</a:t>
+              <a:t>今日磷酸铁锂行业信号密集：湖南裕能20万吨纳米磷酸铁锂项目落地，龙蟠科技锁定最高56.78万吨长协，供给端与需求端同步扩张；碳酸锂价格暴跌近9</a:t>
             </a:r>
             <a:endParaRPr lang="en-US" sz="1020" dirty="0"/>
           </a:p>
@@ -3047,7 +3047,7 @@
                 <a:ea typeface="Aptos" pitchFamily="34" charset="-122"/>
                 <a:cs typeface="Aptos" pitchFamily="34" charset="-120"/>
               </a:rPr>
-              <a:t>2026-10-08</a:t>
+              <a:t>2026-10-12</a:t>
             </a:r>
             <a:endParaRPr lang="en-US" sz="800" dirty="0"/>
           </a:p>
@@ -3571,7 +3571,7 @@
                 <a:ea typeface="Microsoft YaHei" pitchFamily="34" charset="-122"/>
                 <a:cs typeface="Microsoft YaHei" pitchFamily="34" charset="-120"/>
               </a:rPr>
-              <a:t>磷酸铁锂材料与电芯公众号广</a:t>
+              <a:t>中国磷酸铁锂行业官方政策与</a:t>
             </a:r>
             <a:endParaRPr lang="en-US" sz="680" dirty="0"/>
           </a:p>
@@ -3612,7 +3612,7 @@
                 <a:ea typeface="Microsoft YaHei" pitchFamily="34" charset="-122"/>
                 <a:cs typeface="Microsoft YaHei" pitchFamily="34" charset="-120"/>
               </a:rPr>
-              <a:t>五大磷酸铁锂项目更新!</a:t>
+              <a:t>投资20亿元！湖南裕能于湖南湘潭加码20万吨纳米磷酸铁锂项目 - 新浪</a:t>
             </a:r>
             <a:endParaRPr lang="en-US" sz="680" dirty="0"/>
           </a:p>
@@ -3653,7 +3653,7 @@
                 <a:ea typeface="Aptos" pitchFamily="34" charset="-122"/>
                 <a:cs typeface="Aptos" pitchFamily="34" charset="-120"/>
               </a:rPr>
-              <a:t>https://weixin.sogou.com/link?url=dn9a_-gY295K0Rci_xozVXfdMkSQTLW6cwJThYulHEtVjXrGTiVgSzMET5g_tS2y_rWINMXuY0pYbqEr7EYmxVqXa8Fplpd9hXi5pLUEopenL42rR9NdNSrznjYv1UF5KdjlnUgKdVv-XZufgbzatjsGeVnUCfr_L3U7EzRQGk1ief2GdREqoX9Rafqsco6SadqA7Cs6zB0WcS0LJkNQKdLg6DlL2eQfZElQnvumonIcvUf4GU8JdAQeplzHbRMqyQ3FzmvlEwgHpHkoPMgL3A..&amp;type=2&amp;query=%E9%93%81%E9%94%82 %E9%AB%98%E5%8E%8B%E5%AE%9E %E6%AD%A3%E6%9E%81%E6%9D%90%E6%96%99 %E9%87%8F%E4%BA%A7&amp;token=E04E7EC8EF37DA5D696F34266CBAF3AA6AD6C1E36AC7113D</a:t>
+              <a:t>https://news.google.com/rss/articles/CBMieEFVX3lxTE5renNSMVJMYldBa2VLd184alVERVRmcTVCWmVhcC1VQ3JkVThycXZ2cGI4YVpsalM5T3BIeE9NM0VtSy1QLVVQVkQ5dF9qSi1qbEVMREc1cGhsbGpXQnJGSFRQWFlMMndGSEljVnF4a0NodndyMk9XRQ?oc=5</a:t>
             </a:r>
             <a:endParaRPr lang="en-US" sz="580" dirty="0"/>
           </a:p>
@@ -3799,7 +3799,7 @@
                 <a:ea typeface="Microsoft YaHei" pitchFamily="34" charset="-122"/>
                 <a:cs typeface="Microsoft YaHei" pitchFamily="34" charset="-120"/>
               </a:rPr>
-              <a:t>超九成动力电池回收企业将出局？从“二手复用”到“回炉重炼”，企业面临核</a:t>
+              <a:t>再拿重磅长协！龙蟠科技锁定最高 56.78 万吨磷酸铁锂供货订单 - </a:t>
             </a:r>
             <a:endParaRPr lang="en-US" sz="680" dirty="0"/>
           </a:p>
@@ -3840,7 +3840,7 @@
                 <a:ea typeface="Aptos" pitchFamily="34" charset="-122"/>
                 <a:cs typeface="Aptos" pitchFamily="34" charset="-120"/>
               </a:rPr>
-              <a:t>https://news.sina.com.cn/c/2026-10-08/doc-iniumumu5545614.shtml</a:t>
+              <a:t>https://news.google.com/rss/articles/CBMiU0FVX3lxTFBjaVMtV3B3d1J1TXF2NDVRc0czZE5KbWYxTmQxb19NRDZ2WTYxRUFzeFAxbThfRkpWSWFETlRUaDNnOUhMWkJFd2VLcDZvUDRxWGFv?oc=5</a:t>
             </a:r>
             <a:endParaRPr lang="en-US" sz="580" dirty="0"/>
           </a:p>
@@ -3945,7 +3945,7 @@
                 <a:ea typeface="Microsoft YaHei" pitchFamily="34" charset="-122"/>
                 <a:cs typeface="Microsoft YaHei" pitchFamily="34" charset="-120"/>
               </a:rPr>
-              <a:t>磷酸铁锂材料与电芯公众号广</a:t>
+              <a:t>中国磷酸铁锂行业官方政策与</a:t>
             </a:r>
             <a:endParaRPr lang="en-US" sz="680" dirty="0"/>
           </a:p>
@@ -3986,7 +3986,7 @@
                 <a:ea typeface="Microsoft YaHei" pitchFamily="34" charset="-122"/>
                 <a:cs typeface="Microsoft YaHei" pitchFamily="34" charset="-120"/>
               </a:rPr>
-              <a:t>LMFP磷酸锰铁锂 VS 磷酸铁锂相比有没有具体优势,有无商用量产可行</a:t>
+              <a:t>碳酸锂价格暴跌近90%，动力电池回收行业进入洗牌深水区 - 虎嗅网</a:t>
             </a:r>
             <a:endParaRPr lang="en-US" sz="680" dirty="0"/>
           </a:p>
@@ -4027,7 +4027,7 @@
                 <a:ea typeface="Aptos" pitchFamily="34" charset="-122"/>
                 <a:cs typeface="Aptos" pitchFamily="34" charset="-120"/>
               </a:rPr>
-              <a:t>https://weixin.sogou.com/link?url=dn9a_-gY295K0Rci_xozVXfdMkSQTLW6cwJThYulHEtVjXrGTiVgSzMET5g_tS2y_rWINMXuY0pYbqEr7EYmxVqXa8Fplpd99RQhbyr0BWIwTse5Rc-BrlHm8XAv8xrolEmys0dQJEDmzvr301MLB7zVXMkU8_ySQybOikrOZ55jLZD5hWP-FDmSVgyk5Nc7CiuEibCfn8EmNz6AHyEwk-IiHk7fKndEr-twBcdWVu2BU9qdSzfq_AoHab8AJz_KLRjSQvyft7ryPfCoem7FzA..&amp;type=2&amp;query=%E9%93%81%E9%94%82 %E9%AB%98%E5%8E%8B%E5%AE%9E %E6%AD%A3%E6%9E%81%E6%9D%90%E6%96%99 %E9%87%8F%E4%BA%A7&amp;token=E04E7EC8EF37DA5D696F34266CBAF3AA6AD6C1E36AC7113D</a:t>
+              <a:t>https://news.google.com/rss/articles/CBMiX0FVX3lxTE9QVERsMUZQTld4RXN4cUNwMkx5c044dEJCcEJqanFrT1hod1hNdzhUVWxXUktSNXZjSW4xOEZ2OWI5N2FJQ1BWY05kMGw2elNWUVQwN0hOMThidzVRY3kw?oc=5</a:t>
             </a:r>
             <a:endParaRPr lang="en-US" sz="580" dirty="0"/>
           </a:p>
@@ -4173,7 +4173,7 @@
                 <a:ea typeface="Microsoft YaHei" pitchFamily="34" charset="-122"/>
                 <a:cs typeface="Microsoft YaHei" pitchFamily="34" charset="-120"/>
               </a:rPr>
-              <a:t>机构：新型电池鼓励政策落地，CoreWeave上线RubinNVL72</a:t>
+              <a:t>欧盟要求中国自限插混出口：让竞争者为政策失误买单 - 新浪网</a:t>
             </a:r>
             <a:endParaRPr lang="en-US" sz="680" dirty="0"/>
           </a:p>
@@ -4214,7 +4214,7 @@
                 <a:ea typeface="Aptos" pitchFamily="34" charset="-122"/>
                 <a:cs typeface="Aptos" pitchFamily="34" charset="-120"/>
               </a:rPr>
-              <a:t>https://m.sohu.com/a/1084922028_121157270?scm=10001.325_13-325_13.0.0-0-0-0-0.5_1334</a:t>
+              <a:t>https://k.sina.com.cn/article_1628609891_61129d63001019rvw.html?</a:t>
             </a:r>
             <a:endParaRPr lang="en-US" sz="580" dirty="0"/>
           </a:p>
@@ -4319,7 +4319,7 @@
                 <a:ea typeface="Microsoft YaHei" pitchFamily="34" charset="-122"/>
                 <a:cs typeface="Microsoft YaHei" pitchFamily="34" charset="-120"/>
               </a:rPr>
-              <a:t>中国电池网</a:t>
+              <a:t>中国磷酸铁锂行业官方政策与</a:t>
             </a:r>
             <a:endParaRPr lang="en-US" sz="680" dirty="0"/>
           </a:p>
@@ -4360,7 +4360,7 @@
                 <a:ea typeface="Microsoft YaHei" pitchFamily="34" charset="-122"/>
                 <a:cs typeface="Microsoft YaHei" pitchFamily="34" charset="-120"/>
               </a:rPr>
-              <a:t>【正极材料周报】湖南裕能再扩海外磷酸铁锂产能！星恒电源于四川广元落地材</a:t>
+              <a:t>吉利开卖电芯 - 新浪网</a:t>
             </a:r>
             <a:endParaRPr lang="en-US" sz="680" dirty="0"/>
           </a:p>
@@ -4401,7 +4401,7 @@
                 <a:ea typeface="Aptos" pitchFamily="34" charset="-122"/>
                 <a:cs typeface="Aptos" pitchFamily="34" charset="-120"/>
               </a:rPr>
-              <a:t>https://www.itdcw.com/news/dczk/092Q5QC2026.html</a:t>
+              <a:t>https://news.google.com/rss/articles/CBMif0FVX3lxTE5ETXppcDA5OTRKVTR0R0kxcEhpei01WmNhNnpvUGxSYmxVdGVSV3BHOGtscmlfN01mVUw1TjBHSWp3bFpiUmZOelFqbzNjR3o1V0ZOV0NlVjFkOEdfNEVnMzVOa3dVbFE2QzEzV3FoU1pLY0tHeFE0QThOREotNHc?oc=5</a:t>
             </a:r>
             <a:endParaRPr lang="en-US" sz="580" dirty="0"/>
           </a:p>
@@ -4506,7 +4506,7 @@
                 <a:ea typeface="Microsoft YaHei" pitchFamily="34" charset="-122"/>
                 <a:cs typeface="Microsoft YaHei" pitchFamily="34" charset="-120"/>
               </a:rPr>
-              <a:t>中国电池网</a:t>
+              <a:t>中国磷酸铁锂行业官方政策与</a:t>
             </a:r>
             <a:endParaRPr lang="en-US" sz="680" dirty="0"/>
           </a:p>
@@ -4547,7 +4547,7 @@
                 <a:ea typeface="Microsoft YaHei" pitchFamily="34" charset="-122"/>
                 <a:cs typeface="Microsoft YaHei" pitchFamily="34" charset="-120"/>
               </a:rPr>
-              <a:t>我国研发新型无钴高镍正极材料 显著提升快充效率与循环寿命_电池网</a:t>
+              <a:t>华盛锂电(688353):国浩律师（南京）事务所关于江苏华盛锂电材料股</a:t>
             </a:r>
             <a:endParaRPr lang="en-US" sz="680" dirty="0"/>
           </a:p>
@@ -4588,7 +4588,7 @@
                 <a:ea typeface="Aptos" pitchFamily="34" charset="-122"/>
                 <a:cs typeface="Aptos" pitchFamily="34" charset="-120"/>
               </a:rPr>
-              <a:t>https://www.itdcw.com/news/focus/100415Rb2026.html</a:t>
+              <a:t>https://news.google.com/rss/articles/CBMiVkFVX3lxTE52dEZqMkQzMXlSOFpsd0Y0ZWlxdXp1anI1VjVVR3ZrcnBlWVBWNFhVemVEamk2YndSYWVHU3pPNldWcWtuZWxfZmh2a0I1MnYtOU5tYkJ3?oc=5</a:t>
             </a:r>
             <a:endParaRPr lang="en-US" sz="580" dirty="0"/>
           </a:p>
@@ -4693,7 +4693,7 @@
                 <a:ea typeface="Microsoft YaHei" pitchFamily="34" charset="-122"/>
                 <a:cs typeface="Microsoft YaHei" pitchFamily="34" charset="-120"/>
               </a:rPr>
-              <a:t>中国电池网</a:t>
+              <a:t>中国磷酸铁锂行业官方政策与</a:t>
             </a:r>
             <a:endParaRPr lang="en-US" sz="680" dirty="0"/>
           </a:p>
@@ -4734,7 +4734,7 @@
                 <a:ea typeface="Microsoft YaHei" pitchFamily="34" charset="-122"/>
                 <a:cs typeface="Microsoft YaHei" pitchFamily="34" charset="-120"/>
               </a:rPr>
-              <a:t>正力新能上半年动力电池收入45.77亿元 储能电池收入增长近8倍_电池网</a:t>
+              <a:t>开盘：三大指数集体低开 电池板块跌幅居前 - 新浪财经</a:t>
             </a:r>
             <a:endParaRPr lang="en-US" sz="680" dirty="0"/>
           </a:p>
@@ -4775,7 +4775,7 @@
                 <a:ea typeface="Aptos" pitchFamily="34" charset="-122"/>
                 <a:cs typeface="Aptos" pitchFamily="34" charset="-120"/>
               </a:rPr>
-              <a:t>https://www.itdcw.com/news/qiye/0Z115L232026.html</a:t>
+              <a:t>https://finance.sina.cn/stock/dpps/2026-10-12/detail-iniuxmtt8586938.d.html</a:t>
             </a:r>
             <a:endParaRPr lang="en-US" sz="580" dirty="0"/>
           </a:p>
@@ -4880,7 +4880,7 @@
                 <a:ea typeface="Microsoft YaHei" pitchFamily="34" charset="-122"/>
                 <a:cs typeface="Microsoft YaHei" pitchFamily="34" charset="-120"/>
               </a:rPr>
-              <a:t>中国电池网</a:t>
+              <a:t>中国磷酸铁锂行业官方政策与</a:t>
             </a:r>
             <a:endParaRPr lang="en-US" sz="680" dirty="0"/>
           </a:p>
@@ -4921,7 +4921,7 @@
                 <a:ea typeface="Microsoft YaHei" pitchFamily="34" charset="-122"/>
                 <a:cs typeface="Microsoft YaHei" pitchFamily="34" charset="-120"/>
               </a:rPr>
-              <a:t>同体积容量击穿行业纪录！多氟多两款大圆柱磷酸铁锂换电方案发布_电池网</a:t>
+              <a:t>我国出台19项举措推进新质生产力发展；龙源电力9月发电量同比增长超7%</a:t>
             </a:r>
             <a:endParaRPr lang="en-US" sz="680" dirty="0"/>
           </a:p>
@@ -4962,7 +4962,7 @@
                 <a:ea typeface="Aptos" pitchFamily="34" charset="-122"/>
                 <a:cs typeface="Aptos" pitchFamily="34" charset="-120"/>
               </a:rPr>
-              <a:t>https://www.itdcw.com/news/chanpinxinwen/06251562M2026.html</a:t>
+              <a:t>https://www.mrjjxw.com/articles/2026-10-11/4601022.html</a:t>
             </a:r>
             <a:endParaRPr lang="en-US" sz="580" dirty="0"/>
           </a:p>
@@ -5067,7 +5067,7 @@
                 <a:ea typeface="Microsoft YaHei" pitchFamily="34" charset="-122"/>
                 <a:cs typeface="Microsoft YaHei" pitchFamily="34" charset="-120"/>
               </a:rPr>
-              <a:t>鑫椤锂电</a:t>
+              <a:t>中国磷酸铁锂行业官方政策与</a:t>
             </a:r>
             <a:endParaRPr lang="en-US" sz="680" dirty="0"/>
           </a:p>
@@ -5108,7 +5108,7 @@
                 <a:ea typeface="Microsoft YaHei" pitchFamily="34" charset="-122"/>
                 <a:cs typeface="Microsoft YaHei" pitchFamily="34" charset="-120"/>
               </a:rPr>
-              <a:t>鑫椤锂电</a:t>
+              <a:t>嘴上支持对华加税，身体却很诚实，法国电池谷为何争抢中国企业？ - 新浪网</a:t>
             </a:r>
             <a:endParaRPr lang="en-US" sz="680" dirty="0"/>
           </a:p>
@@ -5149,7 +5149,7 @@
                 <a:ea typeface="Aptos" pitchFamily="34" charset="-122"/>
                 <a:cs typeface="Aptos" pitchFamily="34" charset="-120"/>
               </a:rPr>
-              <a:t>https://www.icbattery.com/</a:t>
+              <a:t>https://k.sina.com.cn/article_7879996580_1d5af34a402001w6du.html</a:t>
             </a:r>
             <a:endParaRPr lang="en-US" sz="580" dirty="0"/>
           </a:p>
@@ -5254,7 +5254,7 @@
                 <a:ea typeface="Microsoft YaHei" pitchFamily="34" charset="-122"/>
                 <a:cs typeface="Microsoft YaHei" pitchFamily="34" charset="-120"/>
               </a:rPr>
-              <a:t>高工锂电</a:t>
+              <a:t>中国电池网</a:t>
             </a:r>
             <a:endParaRPr lang="en-US" sz="680" dirty="0"/>
           </a:p>
@@ -5295,7 +5295,7 @@
                 <a:ea typeface="Microsoft YaHei" pitchFamily="34" charset="-122"/>
                 <a:cs typeface="Microsoft YaHei" pitchFamily="34" charset="-120"/>
               </a:rPr>
-              <a:t>高工锂电</a:t>
+              <a:t>中国电池网</a:t>
             </a:r>
             <a:endParaRPr lang="en-US" sz="680" dirty="0"/>
           </a:p>
@@ -5336,7 +5336,7 @@
                 <a:ea typeface="Aptos" pitchFamily="34" charset="-122"/>
                 <a:cs typeface="Aptos" pitchFamily="34" charset="-120"/>
               </a:rPr>
-              <a:t>https://www.gg-lb.com/</a:t>
+              <a:t>https://www.itdcw.com/</a:t>
             </a:r>
             <a:endParaRPr lang="en-US" sz="580" dirty="0"/>
           </a:p>
@@ -5441,7 +5441,7 @@
                 <a:ea typeface="Microsoft YaHei" pitchFamily="34" charset="-122"/>
                 <a:cs typeface="Microsoft YaHei" pitchFamily="34" charset="-120"/>
               </a:rPr>
-              <a:t>电池中国</a:t>
+              <a:t>鑫椤锂电</a:t>
             </a:r>
             <a:endParaRPr lang="en-US" sz="680" dirty="0"/>
           </a:p>
@@ -5482,7 +5482,7 @@
                 <a:ea typeface="Microsoft YaHei" pitchFamily="34" charset="-122"/>
                 <a:cs typeface="Microsoft YaHei" pitchFamily="34" charset="-120"/>
               </a:rPr>
-              <a:t>电池中国</a:t>
+              <a:t>鑫椤锂电</a:t>
             </a:r>
             <a:endParaRPr lang="en-US" sz="680" dirty="0"/>
           </a:p>
@@ -5523,7 +5523,7 @@
                 <a:ea typeface="Aptos" pitchFamily="34" charset="-122"/>
                 <a:cs typeface="Aptos" pitchFamily="34" charset="-120"/>
               </a:rPr>
-              <a:t>https://www.cbea.com/</a:t>
+              <a:t>https://www.icbattery.com/</a:t>
             </a:r>
             <a:endParaRPr lang="en-US" sz="580" dirty="0"/>
           </a:p>
@@ -5628,7 +5628,7 @@
                 <a:ea typeface="Microsoft YaHei" pitchFamily="34" charset="-122"/>
                 <a:cs typeface="Microsoft YaHei" pitchFamily="34" charset="-120"/>
               </a:rPr>
-              <a:t>证券时报</a:t>
+              <a:t>高工锂电</a:t>
             </a:r>
             <a:endParaRPr lang="en-US" sz="680" dirty="0"/>
           </a:p>
@@ -5669,7 +5669,7 @@
                 <a:ea typeface="Microsoft YaHei" pitchFamily="34" charset="-122"/>
                 <a:cs typeface="Microsoft YaHei" pitchFamily="34" charset="-120"/>
               </a:rPr>
-              <a:t>证券时报</a:t>
+              <a:t>高工锂电</a:t>
             </a:r>
             <a:endParaRPr lang="en-US" sz="680" dirty="0"/>
           </a:p>
@@ -5710,7 +5710,7 @@
                 <a:ea typeface="Aptos" pitchFamily="34" charset="-122"/>
                 <a:cs typeface="Aptos" pitchFamily="34" charset="-120"/>
               </a:rPr>
-              <a:t>https://www.stcn.com/</a:t>
+              <a:t>https://www.gg-lb.com/</a:t>
             </a:r>
             <a:endParaRPr lang="en-US" sz="580" dirty="0"/>
           </a:p>
@@ -5964,7 +5964,7 @@
                 <a:ea typeface="Aptos" pitchFamily="34" charset="-122"/>
                 <a:cs typeface="Aptos" pitchFamily="34" charset="-120"/>
               </a:rPr>
-              <a:t>2026-10-08</a:t>
+              <a:t>2026-10-12</a:t>
             </a:r>
             <a:endParaRPr lang="en-US" sz="800" dirty="0"/>
           </a:p>
@@ -6488,7 +6488,7 @@
                 <a:ea typeface="Microsoft YaHei" pitchFamily="34" charset="-122"/>
                 <a:cs typeface="Microsoft YaHei" pitchFamily="34" charset="-120"/>
               </a:rPr>
-              <a:t>界面新闻</a:t>
+              <a:t>电池中国</a:t>
             </a:r>
             <a:endParaRPr lang="en-US" sz="680" dirty="0"/>
           </a:p>
@@ -6529,7 +6529,7 @@
                 <a:ea typeface="Microsoft YaHei" pitchFamily="34" charset="-122"/>
                 <a:cs typeface="Microsoft YaHei" pitchFamily="34" charset="-120"/>
               </a:rPr>
-              <a:t>界面新闻</a:t>
+              <a:t>电池中国</a:t>
             </a:r>
             <a:endParaRPr lang="en-US" sz="680" dirty="0"/>
           </a:p>
@@ -6570,7 +6570,7 @@
                 <a:ea typeface="Aptos" pitchFamily="34" charset="-122"/>
                 <a:cs typeface="Aptos" pitchFamily="34" charset="-120"/>
               </a:rPr>
-              <a:t>https://www.jiemian.com/</a:t>
+              <a:t>https://www.cbea.com/</a:t>
             </a:r>
             <a:endParaRPr lang="en-US" sz="580" dirty="0"/>
           </a:p>
@@ -6675,7 +6675,7 @@
                 <a:ea typeface="Microsoft YaHei" pitchFamily="34" charset="-122"/>
                 <a:cs typeface="Microsoft YaHei" pitchFamily="34" charset="-120"/>
               </a:rPr>
-              <a:t>工业和信息化部</a:t>
+              <a:t>证券时报</a:t>
             </a:r>
             <a:endParaRPr lang="en-US" sz="680" dirty="0"/>
           </a:p>
@@ -6716,7 +6716,7 @@
                 <a:ea typeface="Microsoft YaHei" pitchFamily="34" charset="-122"/>
                 <a:cs typeface="Microsoft YaHei" pitchFamily="34" charset="-120"/>
               </a:rPr>
-              <a:t>国新办举行国务院政策例行吹风会 介绍加强中小企业回款难问题治理有关工作</a:t>
+              <a:t>证券时报</a:t>
             </a:r>
             <a:endParaRPr lang="en-US" sz="680" dirty="0"/>
           </a:p>
@@ -6757,7 +6757,7 @@
                 <a:ea typeface="Aptos" pitchFamily="34" charset="-122"/>
                 <a:cs typeface="Aptos" pitchFamily="34" charset="-120"/>
               </a:rPr>
-              <a:t>http://www.miit.gov.cn/xwfb/bldhd/art/2026/art_7285ee48244d4f20b0f127c7f013ec11.html</a:t>
+              <a:t>https://www.stcn.com/</a:t>
             </a:r>
             <a:endParaRPr lang="en-US" sz="580" dirty="0"/>
           </a:p>
@@ -6862,7 +6862,7 @@
                 <a:ea typeface="Microsoft YaHei" pitchFamily="34" charset="-122"/>
                 <a:cs typeface="Microsoft YaHei" pitchFamily="34" charset="-120"/>
               </a:rPr>
-              <a:t>工业和信息化部</a:t>
+              <a:t>界面新闻</a:t>
             </a:r>
             <a:endParaRPr lang="en-US" sz="680" dirty="0"/>
           </a:p>
@@ -6903,7 +6903,7 @@
                 <a:ea typeface="Microsoft YaHei" pitchFamily="34" charset="-122"/>
                 <a:cs typeface="Microsoft YaHei" pitchFamily="34" charset="-120"/>
               </a:rPr>
-              <a:t>四部门关于开展2026年度享受增值税加计抵减政策的集成电路企业清单制定</a:t>
+              <a:t>界面新闻</a:t>
             </a:r>
             <a:endParaRPr lang="en-US" sz="680" dirty="0"/>
           </a:p>
@@ -6944,7 +6944,7 @@
                 <a:ea typeface="Aptos" pitchFamily="34" charset="-122"/>
                 <a:cs typeface="Aptos" pitchFamily="34" charset="-120"/>
               </a:rPr>
-              <a:t>http://www.miit.gov.cn/zwgk/zcwj/wjfb/tz/art/2026/art_7d2e760b4be94217b8f55caec840b30d.html</a:t>
+              <a:t>https://www.jiemian.com/</a:t>
             </a:r>
             <a:endParaRPr lang="en-US" sz="580" dirty="0"/>
           </a:p>
@@ -7090,7 +7090,7 @@
                 <a:ea typeface="Microsoft YaHei" pitchFamily="34" charset="-122"/>
                 <a:cs typeface="Microsoft YaHei" pitchFamily="34" charset="-120"/>
               </a:rPr>
-              <a:t>工业和信息化部政策文件库</a:t>
+              <a:t>国新办举行国务院政策例行吹风会 介绍加强中小企业回款难问题治理有关工作</a:t>
             </a:r>
             <a:endParaRPr lang="en-US" sz="680" dirty="0"/>
           </a:p>
@@ -7131,7 +7131,7 @@
                 <a:ea typeface="Aptos" pitchFamily="34" charset="-122"/>
                 <a:cs typeface="Aptos" pitchFamily="34" charset="-120"/>
               </a:rPr>
-              <a:t>https://www.miit.gov.cn/search/zcwjk.html?websiteid=110000000000000&amp;pg=&amp;p=&amp;tpl=14&amp;category=183&amp;q=</a:t>
+              <a:t>http://www.miit.gov.cn/xwfb/bldhd/art/2026/art_7285ee48244d4f20b0f127c7f013ec11.html</a:t>
             </a:r>
             <a:endParaRPr lang="en-US" sz="580" dirty="0"/>
           </a:p>
@@ -7277,7 +7277,7 @@
                 <a:ea typeface="Microsoft YaHei" pitchFamily="34" charset="-122"/>
                 <a:cs typeface="Microsoft YaHei" pitchFamily="34" charset="-120"/>
               </a:rPr>
-              <a:t>最新政策</a:t>
+              <a:t>四部门关于开展2026年度享受增值税加计抵减政策的集成电路企业清单制定</a:t>
             </a:r>
             <a:endParaRPr lang="en-US" sz="680" dirty="0"/>
           </a:p>
@@ -7318,7 +7318,7 @@
                 <a:ea typeface="Aptos" pitchFamily="34" charset="-122"/>
                 <a:cs typeface="Aptos" pitchFamily="34" charset="-120"/>
               </a:rPr>
-              <a:t>https://www.miit.gov.cn/xwfb/zxzc/index.html</a:t>
+              <a:t>http://www.miit.gov.cn/zwgk/zcwj/wjfb/tz/art/2026/art_7d2e760b4be94217b8f55caec840b30d.html</a:t>
             </a:r>
             <a:endParaRPr lang="en-US" sz="580" dirty="0"/>
           </a:p>
@@ -7423,7 +7423,7 @@
                 <a:ea typeface="Microsoft YaHei" pitchFamily="34" charset="-122"/>
                 <a:cs typeface="Microsoft YaHei" pitchFamily="34" charset="-120"/>
               </a:rPr>
-              <a:t>国家发展改革委</a:t>
+              <a:t>工业和信息化部</a:t>
             </a:r>
             <a:endParaRPr lang="en-US" sz="680" dirty="0"/>
           </a:p>
@@ -7464,7 +7464,7 @@
                 <a:ea typeface="Microsoft YaHei" pitchFamily="34" charset="-122"/>
                 <a:cs typeface="Microsoft YaHei" pitchFamily="34" charset="-120"/>
               </a:rPr>
-              <a:t>国家发展改革委</a:t>
+              <a:t>工业和信息化部政策文件库</a:t>
             </a:r>
             <a:endParaRPr lang="en-US" sz="680" dirty="0"/>
           </a:p>
@@ -7505,7 +7505,7 @@
                 <a:ea typeface="Aptos" pitchFamily="34" charset="-122"/>
                 <a:cs typeface="Aptos" pitchFamily="34" charset="-120"/>
               </a:rPr>
-              <a:t>https://www.ndrc.gov.cn/</a:t>
+              <a:t>https://www.miit.gov.cn/search/zcwjk.html?websiteid=110000000000000&amp;pg=&amp;p=&amp;tpl=14&amp;category=183&amp;q=</a:t>
             </a:r>
             <a:endParaRPr lang="en-US" sz="580" dirty="0"/>
           </a:p>
@@ -7610,7 +7610,7 @@
                 <a:ea typeface="Microsoft YaHei" pitchFamily="34" charset="-122"/>
                 <a:cs typeface="Microsoft YaHei" pitchFamily="34" charset="-120"/>
               </a:rPr>
-              <a:t>中华人民共和国中央人民政府</a:t>
+              <a:t>工业和信息化部</a:t>
             </a:r>
             <a:endParaRPr lang="en-US" sz="680" dirty="0"/>
           </a:p>
@@ -7651,7 +7651,7 @@
                 <a:ea typeface="Microsoft YaHei" pitchFamily="34" charset="-122"/>
                 <a:cs typeface="Microsoft YaHei" pitchFamily="34" charset="-120"/>
               </a:rPr>
-              <a:t>中华人民共和国中央人民政府</a:t>
+              <a:t>宁夏通信管理局举办2026年国家网络安全宣传周“电信日”政策宣贯培训会</a:t>
             </a:r>
             <a:endParaRPr lang="en-US" sz="680" dirty="0"/>
           </a:p>
@@ -7692,7 +7692,7 @@
                 <a:ea typeface="Aptos" pitchFamily="34" charset="-122"/>
                 <a:cs typeface="Aptos" pitchFamily="34" charset="-120"/>
               </a:rPr>
-              <a:t>https://www.gov.cn/</a:t>
+              <a:t>https://www.miit.gov.cn/xwfb/gxdt/dfdt/art/2026/art_e6cc05a7b861405bbd9639e819a13567.html</a:t>
             </a:r>
             <a:endParaRPr lang="en-US" sz="580" dirty="0"/>
           </a:p>
@@ -7797,7 +7797,7 @@
                 <a:ea typeface="Microsoft YaHei" pitchFamily="34" charset="-122"/>
                 <a:cs typeface="Microsoft YaHei" pitchFamily="34" charset="-120"/>
               </a:rPr>
-              <a:t>生态环境部</a:t>
+              <a:t>国家发展改革委</a:t>
             </a:r>
             <a:endParaRPr lang="en-US" sz="680" dirty="0"/>
           </a:p>
@@ -7838,7 +7838,7 @@
                 <a:ea typeface="Microsoft YaHei" pitchFamily="34" charset="-122"/>
                 <a:cs typeface="Microsoft YaHei" pitchFamily="34" charset="-120"/>
               </a:rPr>
-              <a:t>生态环境部</a:t>
+              <a:t>国家发展改革委</a:t>
             </a:r>
             <a:endParaRPr lang="en-US" sz="680" dirty="0"/>
           </a:p>
@@ -7879,7 +7879,7 @@
                 <a:ea typeface="Aptos" pitchFamily="34" charset="-122"/>
                 <a:cs typeface="Aptos" pitchFamily="34" charset="-120"/>
               </a:rPr>
-              <a:t>https://www.mee.gov.cn/</a:t>
+              <a:t>https://www.ndrc.gov.cn/</a:t>
             </a:r>
             <a:endParaRPr lang="en-US" sz="580" dirty="0"/>
           </a:p>
@@ -7984,7 +7984,7 @@
                 <a:ea typeface="Microsoft YaHei" pitchFamily="34" charset="-122"/>
                 <a:cs typeface="Microsoft YaHei" pitchFamily="34" charset="-120"/>
               </a:rPr>
-              <a:t>万润新能源</a:t>
+              <a:t>中华人民共和国中央人民政府</a:t>
             </a:r>
             <a:endParaRPr lang="en-US" sz="680" dirty="0"/>
           </a:p>
@@ -8025,7 +8025,7 @@
                 <a:ea typeface="Microsoft YaHei" pitchFamily="34" charset="-122"/>
                 <a:cs typeface="Microsoft YaHei" pitchFamily="34" charset="-120"/>
               </a:rPr>
-              <a:t>磷酸铁锂-湖北万润新能源科技股份有限公司_动力电池材料_消费电池材料_</a:t>
+              <a:t>中华人民共和国中央人民政府</a:t>
             </a:r>
             <a:endParaRPr lang="en-US" sz="680" dirty="0"/>
           </a:p>
@@ -8066,7 +8066,7 @@
                 <a:ea typeface="Aptos" pitchFamily="34" charset="-122"/>
                 <a:cs typeface="Aptos" pitchFamily="34" charset="-120"/>
               </a:rPr>
-              <a:t>https://www.hbwanrun.com/application_details/1.html</a:t>
+              <a:t>https://www.gov.cn/</a:t>
             </a:r>
             <a:endParaRPr lang="en-US" sz="580" dirty="0"/>
           </a:p>
@@ -8171,7 +8171,7 @@
                 <a:ea typeface="Microsoft YaHei" pitchFamily="34" charset="-122"/>
                 <a:cs typeface="Microsoft YaHei" pitchFamily="34" charset="-120"/>
               </a:rPr>
-              <a:t>湖南裕能</a:t>
+              <a:t>生态环境部</a:t>
             </a:r>
             <a:endParaRPr lang="en-US" sz="680" dirty="0"/>
           </a:p>
@@ -8212,7 +8212,7 @@
                 <a:ea typeface="Microsoft YaHei" pitchFamily="34" charset="-122"/>
                 <a:cs typeface="Microsoft YaHei" pitchFamily="34" charset="-120"/>
               </a:rPr>
-              <a:t>湖南裕能</a:t>
+              <a:t>生态环境部</a:t>
             </a:r>
             <a:endParaRPr lang="en-US" sz="680" dirty="0"/>
           </a:p>
@@ -8253,7 +8253,7 @@
                 <a:ea typeface="Aptos" pitchFamily="34" charset="-122"/>
                 <a:cs typeface="Aptos" pitchFamily="34" charset="-120"/>
               </a:rPr>
-              <a:t>https://www.yunengchem.com/</a:t>
+              <a:t>https://www.mee.gov.cn/</a:t>
             </a:r>
             <a:endParaRPr lang="en-US" sz="580" dirty="0"/>
           </a:p>
@@ -8358,7 +8358,7 @@
                 <a:ea typeface="Microsoft YaHei" pitchFamily="34" charset="-122"/>
                 <a:cs typeface="Microsoft YaHei" pitchFamily="34" charset="-120"/>
               </a:rPr>
-              <a:t>友山科技</a:t>
+              <a:t>万润新能源</a:t>
             </a:r>
             <a:endParaRPr lang="en-US" sz="680" dirty="0"/>
           </a:p>
@@ -8399,7 +8399,7 @@
                 <a:ea typeface="Microsoft YaHei" pitchFamily="34" charset="-122"/>
                 <a:cs typeface="Microsoft YaHei" pitchFamily="34" charset="-120"/>
               </a:rPr>
-              <a:t>友山科技</a:t>
+              <a:t>磷酸铁锂-湖北万润新能源科技股份有限公司_动力电池材料_消费电池材料_</a:t>
             </a:r>
             <a:endParaRPr lang="en-US" sz="680" dirty="0"/>
           </a:p>
@@ -8440,7 +8440,7 @@
                 <a:ea typeface="Aptos" pitchFamily="34" charset="-122"/>
                 <a:cs typeface="Aptos" pitchFamily="34" charset="-120"/>
               </a:rPr>
-              <a:t>https://www.youshan-tech.com/</a:t>
+              <a:t>https://www.hbwanrun.com/application_details/1.html</a:t>
             </a:r>
             <a:endParaRPr lang="en-US" sz="580" dirty="0"/>
           </a:p>
@@ -8545,7 +8545,7 @@
                 <a:ea typeface="Microsoft YaHei" pitchFamily="34" charset="-122"/>
                 <a:cs typeface="Microsoft YaHei" pitchFamily="34" charset="-120"/>
               </a:rPr>
-              <a:t>江西升华</a:t>
+              <a:t>湖南裕能</a:t>
             </a:r>
             <a:endParaRPr lang="en-US" sz="680" dirty="0"/>
           </a:p>
@@ -8586,7 +8586,7 @@
                 <a:ea typeface="Microsoft YaHei" pitchFamily="34" charset="-122"/>
                 <a:cs typeface="Microsoft YaHei" pitchFamily="34" charset="-120"/>
               </a:rPr>
-              <a:t>江西升华</a:t>
+              <a:t>湖南裕能</a:t>
             </a:r>
             <a:endParaRPr lang="en-US" sz="680" dirty="0"/>
           </a:p>
@@ -8627,7 +8627,7 @@
                 <a:ea typeface="Aptos" pitchFamily="34" charset="-122"/>
                 <a:cs typeface="Aptos" pitchFamily="34" charset="-120"/>
               </a:rPr>
-              <a:t>https://www.shenghuaxc.com/</a:t>
+              <a:t>https://www.yunengchem.com/</a:t>
             </a:r>
             <a:endParaRPr lang="en-US" sz="580" dirty="0"/>
           </a:p>
@@ -8881,7 +8881,7 @@
                 <a:ea typeface="Aptos" pitchFamily="34" charset="-122"/>
                 <a:cs typeface="Aptos" pitchFamily="34" charset="-120"/>
               </a:rPr>
-              <a:t>2026-10-08</a:t>
+              <a:t>2026-10-12</a:t>
             </a:r>
             <a:endParaRPr lang="en-US" sz="800" dirty="0"/>
           </a:p>
@@ -9085,7 +9085,7 @@
                 <a:ea typeface="Microsoft YaHei" pitchFamily="34" charset="-122"/>
                 <a:cs typeface="Microsoft YaHei" pitchFamily="34" charset="-120"/>
               </a:rPr>
-              <a:t>今日磷酸铁锂行业信号集中在高压实产品供给偏紧与动力电池回收政策收紧。容百科技磷酸铁锂项目正式量产，四代高压实及五代超高压实材料供给偏紧，头部企</a:t>
+              <a:t>今日磷酸铁锂行业信号密集：湖南裕能20万吨纳米磷酸铁锂项目落地，龙蟠科技锁定最高56.78万吨长协，供给端与需求端同步扩张；碳酸锂价格暴跌近9</a:t>
             </a:r>
             <a:endParaRPr lang="en-US" sz="940" dirty="0"/>
           </a:p>
@@ -9230,7 +9230,7 @@
         <p:spPr>
           <a:xfrm>
             <a:off x="1188720" y="1883664"/>
-            <a:ext cx="1316736" cy="54864"/>
+            <a:ext cx="2194560" cy="54864"/>
           </a:xfrm>
           <a:prstGeom prst="rect">
             <a:avLst/>
@@ -9281,7 +9281,7 @@
                 <a:ea typeface="Microsoft YaHei" pitchFamily="34" charset="-122"/>
                 <a:cs typeface="Microsoft YaHei" pitchFamily="34" charset="-120"/>
               </a:rPr>
-              <a:t>容百科技磷酸铁锂项目正式进入量产阶段，四代高压实产品及五代超高压实材料供给偏紧，头部企业高端产能稀缺；同时动力电池回收政策趋严，超九成回收企业或出局，回收端门槛提升可能影响长</a:t>
+              <a:t>湖南裕能加码20万吨纳米磷酸铁锂项目，龙蟠科技锁定最高56.78万吨长协，供给与需求同步扩张；碳酸锂价格暴跌近90%致回收行业洗牌，成本端压力凸显；欧盟要求中国自限插混出口，</a:t>
             </a:r>
             <a:endParaRPr lang="en-US" sz="920" dirty="0"/>
           </a:p>
@@ -9322,7 +9322,7 @@
                 <a:ea typeface="Aptos" pitchFamily="34" charset="-122"/>
                 <a:cs typeface="Aptos" pitchFamily="34" charset="-120"/>
               </a:rPr>
-              <a:t>[1][2]</a:t>
+              <a:t>[1][2][3][4]</a:t>
             </a:r>
             <a:endParaRPr lang="en-US" sz="750" dirty="0"/>
           </a:p>
@@ -9467,7 +9467,7 @@
         <p:spPr>
           <a:xfrm>
             <a:off x="6766560" y="1883664"/>
-            <a:ext cx="877824" cy="54864"/>
+            <a:ext cx="1316736" cy="54864"/>
           </a:xfrm>
           <a:prstGeom prst="rect">
             <a:avLst/>
@@ -9518,7 +9518,7 @@
                 <a:ea typeface="Microsoft YaHei" pitchFamily="34" charset="-122"/>
                 <a:cs typeface="Microsoft YaHei" pitchFamily="34" charset="-120"/>
               </a:rPr>
-              <a:t>磷酸铁锂量产工艺压实密度可达2.5 g/cm³及以上，四代高压实产品及五代超高压实材料供给偏紧；磷酸锰铁锂（LMFP）暂不适合大面积替代磷酸铁锂，因其正极良率与成本尚未降至接</a:t>
+              <a:t>湖南裕能投资20亿元加码20万吨纳米磷酸铁锂项目，指向纳米化技术路线受重视；吉利开卖电芯，可能推动磷酸铁锂在车企自供体系中的渗透。纳米磷酸铁锂可提升能量密度和倍率性能，但成本</a:t>
             </a:r>
             <a:endParaRPr lang="en-US" sz="920" dirty="0"/>
           </a:p>
@@ -9559,7 +9559,7 @@
                 <a:ea typeface="Aptos" pitchFamily="34" charset="-122"/>
                 <a:cs typeface="Aptos" pitchFamily="34" charset="-120"/>
               </a:rPr>
-              <a:t>[3]</a:t>
+              <a:t>[1][5]</a:t>
             </a:r>
             <a:endParaRPr lang="en-US" sz="750" dirty="0"/>
           </a:p>
@@ -9704,7 +9704,7 @@
         <p:spPr>
           <a:xfrm>
             <a:off x="1188720" y="4005072"/>
-            <a:ext cx="877824" cy="54864"/>
+            <a:ext cx="2194560" cy="54864"/>
           </a:xfrm>
           <a:prstGeom prst="rect">
             <a:avLst/>
@@ -9755,7 +9755,7 @@
                 <a:ea typeface="Microsoft YaHei" pitchFamily="34" charset="-122"/>
                 <a:cs typeface="Microsoft YaHei" pitchFamily="34" charset="-120"/>
               </a:rPr>
-              <a:t>容百科技磷酸铁锂项目正式进入量产阶段，标志着其在磷酸铁锂领域完成从建设到出货的关键跨越；四代高压实产品及五代超高压实材料供给偏紧，头部企业高端产能稀缺。量产落地可能改变现有磷</a:t>
+              <a:t>龙蟠科技锁定最高56.78万吨磷酸铁锂供货长协，湖南裕能20万吨项目落地，产能与订单同步扩张；华盛锂电差异化权益分派法律意见书发布，资本运作活跃。长协锁定反映下游对供应稳定的</a:t>
             </a:r>
             <a:endParaRPr lang="en-US" sz="920" dirty="0"/>
           </a:p>
@@ -9796,7 +9796,7 @@
                 <a:ea typeface="Aptos" pitchFamily="34" charset="-122"/>
                 <a:cs typeface="Aptos" pitchFamily="34" charset="-120"/>
               </a:rPr>
-              <a:t>[1]</a:t>
+              <a:t>[2][1][6]</a:t>
             </a:r>
             <a:endParaRPr lang="en-US" sz="750" dirty="0"/>
           </a:p>
@@ -9941,7 +9941,7 @@
         <p:spPr>
           <a:xfrm>
             <a:off x="6766560" y="4005072"/>
-            <a:ext cx="877824" cy="54864"/>
+            <a:ext cx="1316736" cy="54864"/>
           </a:xfrm>
           <a:prstGeom prst="rect">
             <a:avLst/>
@@ -9992,7 +9992,7 @@
                 <a:ea typeface="Microsoft YaHei" pitchFamily="34" charset="-122"/>
                 <a:cs typeface="Microsoft YaHei" pitchFamily="34" charset="-120"/>
               </a:rPr>
-              <a:t>四代高压实产品及五代超高压实材料供给偏紧，头部企业高端产能稀缺，可能支撑高压实产品价格相对坚挺；但普通磷酸铁锂产品仍面临产能过剩压力，行业盈利分化加剧。高压实产品溢价能否持续</a:t>
+              <a:t>碳酸锂价格暴跌近90%，动力电池回收行业进入洗牌深水区；电池板块跌幅居前，反映价格下行压力。成本端坍塌削弱磷酸铁锂价格支撑，回收企业退出可能加速，但上游材料企业盈利分化。</a:t>
             </a:r>
             <a:endParaRPr lang="en-US" sz="920" dirty="0"/>
           </a:p>
@@ -10033,7 +10033,7 @@
                 <a:ea typeface="Aptos" pitchFamily="34" charset="-122"/>
                 <a:cs typeface="Aptos" pitchFamily="34" charset="-120"/>
               </a:rPr>
-              <a:t>[1]</a:t>
+              <a:t>[3][7]</a:t>
             </a:r>
             <a:endParaRPr lang="en-US" sz="750" dirty="0"/>
           </a:p>
@@ -10138,7 +10138,7 @@
                 <a:ea typeface="Microsoft YaHei" pitchFamily="34" charset="-122"/>
                 <a:cs typeface="Microsoft YaHei" pitchFamily="34" charset="-120"/>
               </a:rPr>
-              <a:t>今日磷酸铁锂行业信号集中在高压实产品供给偏紧与动力电池回收政策收紧。容百科技磷酸铁锂项目正式量产，四代高压实及五代超高压实材料供给偏紧，头部企</a:t>
+              <a:t>今日磷酸铁锂行业信号密集：湖南裕能20万吨纳米磷酸铁锂项目落地，龙蟠科技锁定最高56.78万吨长协，供给端与需求端同步扩张；碳酸锂价格暴跌近9</a:t>
             </a:r>
             <a:endParaRPr lang="en-US" sz="1020" dirty="0"/>
           </a:p>
@@ -10287,7 +10287,7 @@
                 <a:ea typeface="Aptos" pitchFamily="34" charset="-122"/>
                 <a:cs typeface="Aptos" pitchFamily="34" charset="-120"/>
               </a:rPr>
-              <a:t>2026-10-08</a:t>
+              <a:t>2026-10-12</a:t>
             </a:r>
             <a:endParaRPr lang="en-US" sz="800" dirty="0"/>
           </a:p>
@@ -10493,7 +10493,7 @@
                 <a:ea typeface="Microsoft YaHei" pitchFamily="34" charset="-122"/>
                 <a:cs typeface="Microsoft YaHei" pitchFamily="34" charset="-120"/>
               </a:rPr>
-              <a:t>2 条公开来源交叉验证｜事实、影响与后续研判</a:t>
+              <a:t>4 条公开来源交叉验证｜事实、影响与后续研判</a:t>
             </a:r>
             <a:endParaRPr lang="en-US" sz="860" dirty="0"/>
           </a:p>
@@ -10602,7 +10602,7 @@
                 <a:ea typeface="Microsoft YaHei" pitchFamily="34" charset="-122"/>
                 <a:cs typeface="Microsoft YaHei" pitchFamily="34" charset="-120"/>
               </a:rPr>
-              <a:t>容百科技磷酸铁锂项目正式进入量产阶段，四代高压实产品及五代超高压实材料供给偏紧，头部企业高端产能稀缺；同时动力电池回收政策趋严，超九成回收企业或出局，回收端门槛提升可能影响长期锂资源供给结构。高压实产品放量与回收政策收紧分别从供给端和成本端塑造行业格局，短期高端产能仍是竞争焦点。 [1][2]</a:t>
+              <a:t>湖南裕能加码20万吨纳米磷酸铁锂项目，龙蟠科技锁定最高56.78万吨长协，供给与需求同步扩张；碳酸锂价格暴跌近90%致回收行业洗牌，成本端压力凸显；欧盟要求中国自限插混出口，贸易政策风险升温。行业呈现产能扩张与价格下行并存格局，企业盈利分化可能加剧。 [1][2][3][4]</a:t>
             </a:r>
             <a:endParaRPr lang="en-US" sz="960" dirty="0"/>
           </a:p>
@@ -10643,7 +10643,7 @@
                 <a:ea typeface="Aptos" pitchFamily="34" charset="-122"/>
                 <a:cs typeface="Aptos" pitchFamily="34" charset="-120"/>
               </a:rPr>
-              <a:t>依据：[1][2]</a:t>
+              <a:t>依据：[1][2][3][4]</a:t>
             </a:r>
             <a:endParaRPr lang="en-US" sz="740" dirty="0"/>
           </a:p>
@@ -10752,7 +10752,7 @@
                 <a:ea typeface="Microsoft YaHei" pitchFamily="34" charset="-122"/>
                 <a:cs typeface="Microsoft YaHei" pitchFamily="34" charset="-120"/>
               </a:rPr>
-              <a:t>上述信号来自公众号项目更新与政策类新闻，二者共同指向磷酸铁锂行业的结构性变化：高压实产品供给偏紧意味着头部企业在高端市场的定价权可能增强，而回收企业出局则可能推高长期原料成本并加速行业集中。需要验证的是容百科技量产的实际爬坡速度、高压实产品的具体客户导入情况，以及回收政策的具体执行细则和对锂盐供给的实际影响。</a:t>
+              <a:t>湖南裕能扩产与龙蟠科技长协反映磷酸铁锂需求预期仍强，但碳酸锂价格暴跌近90%削弱成本支撑，回收行业洗牌可能向上游传导；欧盟自限出口要求若落地，将影响插混车型对磷酸铁锂的需求。需验证：新项目投产时间、长协实际执行量、欧盟政策具体条款。</a:t>
             </a:r>
             <a:endParaRPr lang="en-US" sz="960" dirty="0"/>
           </a:p>
@@ -10886,7 +10886,7 @@
                 <a:ea typeface="Microsoft YaHei" pitchFamily="34" charset="-122"/>
                 <a:cs typeface="Microsoft YaHei" pitchFamily="34" charset="-120"/>
               </a:rPr>
-              <a:t>若容百科技高压实产品量产顺利且回收政策严格执行，则高端磷酸铁锂供给紧张可能延续，头部企业盈利韧性增强，而回收端出清可能推高长期锂盐成本；跟踪指标包括容百月度出货量、高压实产品报价、回收企业退出数量及锂盐现货价格；证据边界限于当前公开信息，实际执行节奏可能受下游需求和政策落地进度影响。</a:t>
+              <a:t>若碳酸锂价格持续低位，则磷酸铁锂成本支撑进一步弱化，回收企业退出可能加速，行业集中度提升；若欧盟自限出口政策落地，则插混出口受限可能拖累磷酸铁锂需求，需跟踪碳酸锂现货价、欧盟政策细则及龙头开工率。</a:t>
             </a:r>
             <a:endParaRPr lang="en-US" sz="960" dirty="0"/>
           </a:p>
@@ -10954,7 +10954,7 @@
                 <a:ea typeface="Microsoft YaHei" pitchFamily="34" charset="-122"/>
                 <a:cs typeface="Microsoft YaHei" pitchFamily="34" charset="-120"/>
               </a:rPr>
-              <a:t>对比矩阵</a:t>
+              <a:t>关键数据解读</a:t>
             </a:r>
             <a:endParaRPr lang="en-US" sz="1200" dirty="0"/>
           </a:p>
@@ -10968,16 +10968,18 @@
         </p:nvSpPr>
         <p:spPr>
           <a:xfrm>
-            <a:off x="7818120" y="2176272"/>
-            <a:ext cx="2487168" cy="1609344"/>
-          </a:xfrm>
-          <a:prstGeom prst="rect">
-            <a:avLst/>
+            <a:off x="7772400" y="1993392"/>
+            <a:ext cx="2560320" cy="786384"/>
+          </a:xfrm>
+          <a:prstGeom prst="roundRect">
+            <a:avLst>
+              <a:gd name="adj" fmla="val 4651"/>
+            </a:avLst>
           </a:prstGeom>
           <a:solidFill>
-            <a:srgbClr val="FFFFFF"/>
+            <a:srgbClr val="F4FAF6"/>
           </a:solidFill>
-          <a:ln w="10160">
+          <a:ln w="7620">
             <a:solidFill>
               <a:srgbClr val="DADADA"/>
             </a:solidFill>
@@ -10987,20 +10989,147 @@
       </p:sp>
       <p:sp>
         <p:nvSpPr>
-          <p:cNvPr id="25" name="Shape 23"/>
-          <p:cNvSpPr/>
-          <p:nvPr/>
-        </p:nvSpPr>
-        <p:spPr>
-          <a:xfrm>
-            <a:off x="9061704" y="2176272"/>
-            <a:ext cx="0" cy="1609344"/>
-          </a:xfrm>
-          <a:prstGeom prst="line">
-            <a:avLst/>
-          </a:prstGeom>
-          <a:noFill/>
-          <a:ln w="8890">
+          <p:cNvPr id="25" name="Text 23"/>
+          <p:cNvSpPr/>
+          <p:nvPr/>
+        </p:nvSpPr>
+        <p:spPr>
+          <a:xfrm>
+            <a:off x="7918704" y="2103120"/>
+            <a:ext cx="822960" cy="384048"/>
+          </a:xfrm>
+          <a:prstGeom prst="rect">
+            <a:avLst/>
+          </a:prstGeom>
+          <a:noFill/>
+          <a:ln/>
+        </p:spPr>
+        <p:txBody>
+          <a:bodyPr wrap="square" lIns="0" tIns="0" rIns="0" bIns="0" rtlCol="0" anchor="ctr">
+            <a:normAutofit/>
+          </a:bodyPr>
+          <a:lstStyle/>
+          <a:p>
+            <a:pPr indent="0" marL="0">
+              <a:buNone/>
+            </a:pPr>
+            <a:r>
+              <a:rPr lang="en-US" sz="1600" b="1" dirty="0">
+                <a:solidFill>
+                  <a:srgbClr val="487052"/>
+                </a:solidFill>
+                <a:latin typeface="Aptos" pitchFamily="34" charset="0"/>
+                <a:ea typeface="Aptos" pitchFamily="34" charset="-122"/>
+                <a:cs typeface="Aptos" pitchFamily="34" charset="-120"/>
+              </a:rPr>
+              <a:t>90%</a:t>
+            </a:r>
+            <a:endParaRPr lang="en-US" sz="1600" dirty="0"/>
+          </a:p>
+        </p:txBody>
+      </p:sp>
+      <p:sp>
+        <p:nvSpPr>
+          <p:cNvPr id="26" name="Text 24"/>
+          <p:cNvSpPr/>
+          <p:nvPr/>
+        </p:nvSpPr>
+        <p:spPr>
+          <a:xfrm>
+            <a:off x="8759952" y="2167128"/>
+            <a:ext cx="1371600" cy="201168"/>
+          </a:xfrm>
+          <a:prstGeom prst="rect">
+            <a:avLst/>
+          </a:prstGeom>
+          <a:noFill/>
+          <a:ln/>
+        </p:spPr>
+        <p:txBody>
+          <a:bodyPr wrap="square" lIns="0" tIns="0" rIns="0" bIns="0" rtlCol="0" anchor="ctr">
+            <a:normAutofit/>
+          </a:bodyPr>
+          <a:lstStyle/>
+          <a:p>
+            <a:pPr indent="0" marL="0">
+              <a:buNone/>
+            </a:pPr>
+            <a:r>
+              <a:rPr lang="en-US" sz="820" b="1" dirty="0">
+                <a:solidFill>
+                  <a:srgbClr val="121212"/>
+                </a:solidFill>
+                <a:latin typeface="Microsoft YaHei" pitchFamily="34" charset="0"/>
+                <a:ea typeface="Microsoft YaHei" pitchFamily="34" charset="-122"/>
+                <a:cs typeface="Microsoft YaHei" pitchFamily="34" charset="-120"/>
+              </a:rPr>
+              <a:t>致回收行业洗牌</a:t>
+            </a:r>
+            <a:endParaRPr lang="en-US" sz="820" dirty="0"/>
+          </a:p>
+        </p:txBody>
+      </p:sp>
+      <p:sp>
+        <p:nvSpPr>
+          <p:cNvPr id="27" name="Text 25"/>
+          <p:cNvSpPr/>
+          <p:nvPr/>
+        </p:nvSpPr>
+        <p:spPr>
+          <a:xfrm>
+            <a:off x="7918704" y="2578608"/>
+            <a:ext cx="2176272" cy="201168"/>
+          </a:xfrm>
+          <a:prstGeom prst="rect">
+            <a:avLst/>
+          </a:prstGeom>
+          <a:noFill/>
+          <a:ln/>
+        </p:spPr>
+        <p:txBody>
+          <a:bodyPr wrap="square" lIns="0" tIns="0" rIns="0" bIns="0" rtlCol="0" anchor="t">
+            <a:normAutofit/>
+          </a:bodyPr>
+          <a:lstStyle/>
+          <a:p>
+            <a:pPr indent="0" marL="0">
+              <a:buNone/>
+            </a:pPr>
+            <a:r>
+              <a:rPr lang="en-US" sz="840" dirty="0">
+                <a:solidFill>
+                  <a:srgbClr val="121212"/>
+                </a:solidFill>
+                <a:latin typeface="Microsoft YaHei" pitchFamily="34" charset="0"/>
+                <a:ea typeface="Microsoft YaHei" pitchFamily="34" charset="-122"/>
+                <a:cs typeface="Microsoft YaHei" pitchFamily="34" charset="-120"/>
+              </a:rPr>
+              <a:t>公开信息：碳酸锂价格暴跌近90%致回收行业洗牌，成本端压力凸显</a:t>
+            </a:r>
+            <a:endParaRPr lang="en-US" sz="840" dirty="0"/>
+          </a:p>
+        </p:txBody>
+      </p:sp>
+      <p:sp>
+        <p:nvSpPr>
+          <p:cNvPr id="28" name="Shape 26"/>
+          <p:cNvSpPr/>
+          <p:nvPr/>
+        </p:nvSpPr>
+        <p:spPr>
+          <a:xfrm>
+            <a:off x="7772400" y="2926080"/>
+            <a:ext cx="2560320" cy="786384"/>
+          </a:xfrm>
+          <a:prstGeom prst="roundRect">
+            <a:avLst>
+              <a:gd name="adj" fmla="val 4651"/>
+            </a:avLst>
+          </a:prstGeom>
+          <a:solidFill>
+            <a:srgbClr val="FFFFFF"/>
+          </a:solidFill>
+          <a:ln w="7620">
             <a:solidFill>
               <a:srgbClr val="DADADA"/>
             </a:solidFill>
@@ -11010,62 +11139,14 @@
       </p:sp>
       <p:sp>
         <p:nvSpPr>
-          <p:cNvPr id="26" name="Shape 24"/>
-          <p:cNvSpPr/>
-          <p:nvPr/>
-        </p:nvSpPr>
-        <p:spPr>
-          <a:xfrm>
-            <a:off x="7818120" y="2980944"/>
-            <a:ext cx="2487168" cy="0"/>
-          </a:xfrm>
-          <a:prstGeom prst="line">
-            <a:avLst/>
-          </a:prstGeom>
-          <a:noFill/>
-          <a:ln w="8890">
-            <a:solidFill>
-              <a:srgbClr val="DADADA"/>
-            </a:solidFill>
-            <a:prstDash val="solid"/>
-          </a:ln>
-        </p:spPr>
-      </p:sp>
-      <p:sp>
-        <p:nvSpPr>
-          <p:cNvPr id="27" name="Shape 25"/>
-          <p:cNvSpPr/>
-          <p:nvPr/>
-        </p:nvSpPr>
-        <p:spPr>
-          <a:xfrm>
-            <a:off x="7818120" y="2176272"/>
-            <a:ext cx="1243584" cy="804672"/>
-          </a:xfrm>
-          <a:prstGeom prst="rect">
-            <a:avLst/>
-          </a:prstGeom>
-          <a:solidFill>
-            <a:srgbClr val="DDEBE0"/>
-          </a:solidFill>
-          <a:ln w="3810">
-            <a:solidFill>
-              <a:srgbClr val="DADADA"/>
-            </a:solidFill>
-            <a:prstDash val="solid"/>
-          </a:ln>
-        </p:spPr>
-      </p:sp>
-      <p:sp>
-        <p:nvSpPr>
-          <p:cNvPr id="28" name="Text 26"/>
-          <p:cNvSpPr/>
-          <p:nvPr/>
-        </p:nvSpPr>
-        <p:spPr>
-          <a:xfrm>
-            <a:off x="7891272" y="2286000"/>
-            <a:ext cx="438912" cy="109728"/>
+          <p:cNvPr id="29" name="Text 27"/>
+          <p:cNvSpPr/>
+          <p:nvPr/>
+        </p:nvSpPr>
+        <p:spPr>
+          <a:xfrm>
+            <a:off x="7918704" y="3035808"/>
+            <a:ext cx="822960" cy="384048"/>
           </a:xfrm>
           <a:prstGeom prst="rect">
             <a:avLst/>
@@ -11083,30 +11164,71 @@
               <a:buNone/>
             </a:pPr>
             <a:r>
-              <a:rPr lang="en-US" sz="710" b="1" dirty="0">
+              <a:rPr lang="en-US" sz="1600" b="1" dirty="0">
                 <a:solidFill>
                   <a:srgbClr val="487052"/>
                 </a:solidFill>
-                <a:latin typeface="Microsoft YaHei" pitchFamily="34" charset="0"/>
-                <a:ea typeface="Microsoft YaHei" pitchFamily="34" charset="-122"/>
-                <a:cs typeface="Microsoft YaHei" pitchFamily="34" charset="-120"/>
-              </a:rPr>
-              <a:t>路线A</a:t>
-            </a:r>
-            <a:endParaRPr lang="en-US" sz="710" dirty="0"/>
-          </a:p>
-        </p:txBody>
-      </p:sp>
-      <p:sp>
-        <p:nvSpPr>
-          <p:cNvPr id="29" name="Text 27"/>
-          <p:cNvSpPr/>
-          <p:nvPr/>
-        </p:nvSpPr>
-        <p:spPr>
-          <a:xfrm>
-            <a:off x="7891272" y="2505456"/>
-            <a:ext cx="1024128" cy="201168"/>
+                <a:latin typeface="Aptos" pitchFamily="34" charset="0"/>
+                <a:ea typeface="Aptos" pitchFamily="34" charset="-122"/>
+                <a:cs typeface="Aptos" pitchFamily="34" charset="-120"/>
+              </a:rPr>
+              <a:t>90%</a:t>
+            </a:r>
+            <a:endParaRPr lang="en-US" sz="1600" dirty="0"/>
+          </a:p>
+        </p:txBody>
+      </p:sp>
+      <p:sp>
+        <p:nvSpPr>
+          <p:cNvPr id="30" name="Text 28"/>
+          <p:cNvSpPr/>
+          <p:nvPr/>
+        </p:nvSpPr>
+        <p:spPr>
+          <a:xfrm>
+            <a:off x="8759952" y="3099816"/>
+            <a:ext cx="1371600" cy="201168"/>
+          </a:xfrm>
+          <a:prstGeom prst="rect">
+            <a:avLst/>
+          </a:prstGeom>
+          <a:noFill/>
+          <a:ln/>
+        </p:spPr>
+        <p:txBody>
+          <a:bodyPr wrap="square" lIns="0" tIns="0" rIns="0" bIns="0" rtlCol="0" anchor="ctr">
+            <a:normAutofit/>
+          </a:bodyPr>
+          <a:lstStyle/>
+          <a:p>
+            <a:pPr indent="0" marL="0">
+              <a:buNone/>
+            </a:pPr>
+            <a:r>
+              <a:rPr lang="en-US" sz="820" b="1" dirty="0">
+                <a:solidFill>
+                  <a:srgbClr val="121212"/>
+                </a:solidFill>
+                <a:latin typeface="Microsoft YaHei" pitchFamily="34" charset="0"/>
+                <a:ea typeface="Microsoft YaHei" pitchFamily="34" charset="-122"/>
+                <a:cs typeface="Microsoft YaHei" pitchFamily="34" charset="-120"/>
+              </a:rPr>
+              <a:t>削弱成本支撑</a:t>
+            </a:r>
+            <a:endParaRPr lang="en-US" sz="820" dirty="0"/>
+          </a:p>
+        </p:txBody>
+      </p:sp>
+      <p:sp>
+        <p:nvSpPr>
+          <p:cNvPr id="31" name="Text 29"/>
+          <p:cNvSpPr/>
+          <p:nvPr/>
+        </p:nvSpPr>
+        <p:spPr>
+          <a:xfrm>
+            <a:off x="7918704" y="3511296"/>
+            <a:ext cx="2176272" cy="201168"/>
           </a:xfrm>
           <a:prstGeom prst="rect">
             <a:avLst/>
@@ -11124,7 +11246,7 @@
               <a:buNone/>
             </a:pPr>
             <a:r>
-              <a:rPr lang="en-US" sz="670" dirty="0">
+              <a:rPr lang="en-US" sz="840" dirty="0">
                 <a:solidFill>
                   <a:srgbClr val="121212"/>
                 </a:solidFill>
@@ -11132,75 +11254,9 @@
                 <a:ea typeface="Microsoft YaHei" pitchFamily="34" charset="-122"/>
                 <a:cs typeface="Microsoft YaHei" pitchFamily="34" charset="-120"/>
               </a:rPr>
-              <a:t>容百科技磷酸铁锂项目正式进</a:t>
-            </a:r>
-            <a:endParaRPr lang="en-US" sz="670" dirty="0"/>
-          </a:p>
-        </p:txBody>
-      </p:sp>
-      <p:sp>
-        <p:nvSpPr>
-          <p:cNvPr id="30" name="Shape 28"/>
-          <p:cNvSpPr/>
-          <p:nvPr/>
-        </p:nvSpPr>
-        <p:spPr>
-          <a:xfrm>
-            <a:off x="9061704" y="2176272"/>
-            <a:ext cx="1243584" cy="804672"/>
-          </a:xfrm>
-          <a:prstGeom prst="rect">
-            <a:avLst/>
-          </a:prstGeom>
-          <a:solidFill>
-            <a:srgbClr val="FFFFFF"/>
-          </a:solidFill>
-          <a:ln w="3810">
-            <a:solidFill>
-              <a:srgbClr val="DADADA"/>
-            </a:solidFill>
-            <a:prstDash val="solid"/>
-          </a:ln>
-        </p:spPr>
-      </p:sp>
-      <p:sp>
-        <p:nvSpPr>
-          <p:cNvPr id="31" name="Text 29"/>
-          <p:cNvSpPr/>
-          <p:nvPr/>
-        </p:nvSpPr>
-        <p:spPr>
-          <a:xfrm>
-            <a:off x="9134856" y="2286000"/>
-            <a:ext cx="438912" cy="109728"/>
-          </a:xfrm>
-          <a:prstGeom prst="rect">
-            <a:avLst/>
-          </a:prstGeom>
-          <a:noFill/>
-          <a:ln/>
-        </p:spPr>
-        <p:txBody>
-          <a:bodyPr wrap="square" lIns="0" tIns="0" rIns="0" bIns="0" rtlCol="0" anchor="ctr">
-            <a:normAutofit/>
-          </a:bodyPr>
-          <a:lstStyle/>
-          <a:p>
-            <a:pPr indent="0" marL="0">
-              <a:buNone/>
-            </a:pPr>
-            <a:r>
-              <a:rPr lang="en-US" sz="710" b="1" dirty="0">
-                <a:solidFill>
-                  <a:srgbClr val="487052"/>
-                </a:solidFill>
-                <a:latin typeface="Microsoft YaHei" pitchFamily="34" charset="0"/>
-                <a:ea typeface="Microsoft YaHei" pitchFamily="34" charset="-122"/>
-                <a:cs typeface="Microsoft YaHei" pitchFamily="34" charset="-120"/>
-              </a:rPr>
-              <a:t>路线B</a:t>
-            </a:r>
-            <a:endParaRPr lang="en-US" sz="710" dirty="0"/>
+              <a:t>公开信息：[1][2][3][4] 湖南裕能扩产与龙蟠科技长协反映磷</a:t>
+            </a:r>
+            <a:endParaRPr lang="en-US" sz="840" dirty="0"/>
           </a:p>
         </p:txBody>
       </p:sp>
@@ -11212,8 +11268,8 @@
         </p:nvSpPr>
         <p:spPr>
           <a:xfrm>
-            <a:off x="9134856" y="2505456"/>
-            <a:ext cx="1024128" cy="201168"/>
+            <a:off x="7772400" y="4498848"/>
+            <a:ext cx="2560320" cy="384048"/>
           </a:xfrm>
           <a:prstGeom prst="rect">
             <a:avLst/>
@@ -11231,278 +11287,23 @@
               <a:buNone/>
             </a:pPr>
             <a:r>
-              <a:rPr lang="en-US" sz="670" dirty="0">
-                <a:solidFill>
-                  <a:srgbClr val="121212"/>
-                </a:solidFill>
-                <a:latin typeface="Microsoft YaHei" pitchFamily="34" charset="0"/>
-                <a:ea typeface="Microsoft YaHei" pitchFamily="34" charset="-122"/>
-                <a:cs typeface="Microsoft YaHei" pitchFamily="34" charset="-120"/>
-              </a:rPr>
-              <a:t>同时动力电池回收政策趋严，</a:t>
-            </a:r>
-            <a:endParaRPr lang="en-US" sz="670" dirty="0"/>
+              <a:rPr lang="en-US" sz="800" dirty="0">
+                <a:solidFill>
+                  <a:srgbClr val="6D756F"/>
+                </a:solidFill>
+                <a:latin typeface="Microsoft YaHei" pitchFamily="34" charset="0"/>
+                <a:ea typeface="Microsoft YaHei" pitchFamily="34" charset="-122"/>
+                <a:cs typeface="Microsoft YaHei" pitchFamily="34" charset="-120"/>
+              </a:rPr>
+              <a:t>阅读提示：仅按公开报道原文呈现；不同企业、时间和统计范围不可直接横向比较。</a:t>
+            </a:r>
+            <a:endParaRPr lang="en-US" sz="800" dirty="0"/>
           </a:p>
         </p:txBody>
       </p:sp>
       <p:sp>
         <p:nvSpPr>
           <p:cNvPr id="33" name="Shape 31"/>
-          <p:cNvSpPr/>
-          <p:nvPr/>
-        </p:nvSpPr>
-        <p:spPr>
-          <a:xfrm>
-            <a:off x="7818120" y="2980944"/>
-            <a:ext cx="1243584" cy="804672"/>
-          </a:xfrm>
-          <a:prstGeom prst="rect">
-            <a:avLst/>
-          </a:prstGeom>
-          <a:solidFill>
-            <a:srgbClr val="FFFFFF"/>
-          </a:solidFill>
-          <a:ln w="3810">
-            <a:solidFill>
-              <a:srgbClr val="DADADA"/>
-            </a:solidFill>
-            <a:prstDash val="solid"/>
-          </a:ln>
-        </p:spPr>
-      </p:sp>
-      <p:sp>
-        <p:nvSpPr>
-          <p:cNvPr id="34" name="Text 32"/>
-          <p:cNvSpPr/>
-          <p:nvPr/>
-        </p:nvSpPr>
-        <p:spPr>
-          <a:xfrm>
-            <a:off x="7891272" y="3090672"/>
-            <a:ext cx="438912" cy="109728"/>
-          </a:xfrm>
-          <a:prstGeom prst="rect">
-            <a:avLst/>
-          </a:prstGeom>
-          <a:noFill/>
-          <a:ln/>
-        </p:spPr>
-        <p:txBody>
-          <a:bodyPr wrap="square" lIns="0" tIns="0" rIns="0" bIns="0" rtlCol="0" anchor="ctr">
-            <a:normAutofit/>
-          </a:bodyPr>
-          <a:lstStyle/>
-          <a:p>
-            <a:pPr indent="0" marL="0">
-              <a:buNone/>
-            </a:pPr>
-            <a:r>
-              <a:rPr lang="en-US" sz="710" b="1" dirty="0">
-                <a:solidFill>
-                  <a:srgbClr val="487052"/>
-                </a:solidFill>
-                <a:latin typeface="Microsoft YaHei" pitchFamily="34" charset="0"/>
-                <a:ea typeface="Microsoft YaHei" pitchFamily="34" charset="-122"/>
-                <a:cs typeface="Microsoft YaHei" pitchFamily="34" charset="-120"/>
-              </a:rPr>
-              <a:t>机会</a:t>
-            </a:r>
-            <a:endParaRPr lang="en-US" sz="710" dirty="0"/>
-          </a:p>
-        </p:txBody>
-      </p:sp>
-      <p:sp>
-        <p:nvSpPr>
-          <p:cNvPr id="35" name="Text 33"/>
-          <p:cNvSpPr/>
-          <p:nvPr/>
-        </p:nvSpPr>
-        <p:spPr>
-          <a:xfrm>
-            <a:off x="7891272" y="3310128"/>
-            <a:ext cx="1024128" cy="201168"/>
-          </a:xfrm>
-          <a:prstGeom prst="rect">
-            <a:avLst/>
-          </a:prstGeom>
-          <a:noFill/>
-          <a:ln/>
-        </p:spPr>
-        <p:txBody>
-          <a:bodyPr wrap="square" lIns="0" tIns="0" rIns="0" bIns="0" rtlCol="0" anchor="t">
-            <a:normAutofit/>
-          </a:bodyPr>
-          <a:lstStyle/>
-          <a:p>
-            <a:pPr indent="0" marL="0">
-              <a:buNone/>
-            </a:pPr>
-            <a:r>
-              <a:rPr lang="en-US" sz="670" dirty="0">
-                <a:solidFill>
-                  <a:srgbClr val="121212"/>
-                </a:solidFill>
-                <a:latin typeface="Microsoft YaHei" pitchFamily="34" charset="0"/>
-                <a:ea typeface="Microsoft YaHei" pitchFamily="34" charset="-122"/>
-                <a:cs typeface="Microsoft YaHei" pitchFamily="34" charset="-120"/>
-              </a:rPr>
-              <a:t>高压实产品放量与回收政策收</a:t>
-            </a:r>
-            <a:endParaRPr lang="en-US" sz="670" dirty="0"/>
-          </a:p>
-        </p:txBody>
-      </p:sp>
-      <p:sp>
-        <p:nvSpPr>
-          <p:cNvPr id="36" name="Shape 34"/>
-          <p:cNvSpPr/>
-          <p:nvPr/>
-        </p:nvSpPr>
-        <p:spPr>
-          <a:xfrm>
-            <a:off x="9061704" y="2980944"/>
-            <a:ext cx="1243584" cy="804672"/>
-          </a:xfrm>
-          <a:prstGeom prst="rect">
-            <a:avLst/>
-          </a:prstGeom>
-          <a:solidFill>
-            <a:srgbClr val="F4FAF6"/>
-          </a:solidFill>
-          <a:ln w="3810">
-            <a:solidFill>
-              <a:srgbClr val="DADADA"/>
-            </a:solidFill>
-            <a:prstDash val="solid"/>
-          </a:ln>
-        </p:spPr>
-      </p:sp>
-      <p:sp>
-        <p:nvSpPr>
-          <p:cNvPr id="37" name="Text 35"/>
-          <p:cNvSpPr/>
-          <p:nvPr/>
-        </p:nvSpPr>
-        <p:spPr>
-          <a:xfrm>
-            <a:off x="9134856" y="3090672"/>
-            <a:ext cx="438912" cy="109728"/>
-          </a:xfrm>
-          <a:prstGeom prst="rect">
-            <a:avLst/>
-          </a:prstGeom>
-          <a:noFill/>
-          <a:ln/>
-        </p:spPr>
-        <p:txBody>
-          <a:bodyPr wrap="square" lIns="0" tIns="0" rIns="0" bIns="0" rtlCol="0" anchor="ctr">
-            <a:normAutofit/>
-          </a:bodyPr>
-          <a:lstStyle/>
-          <a:p>
-            <a:pPr indent="0" marL="0">
-              <a:buNone/>
-            </a:pPr>
-            <a:r>
-              <a:rPr lang="en-US" sz="710" b="1" dirty="0">
-                <a:solidFill>
-                  <a:srgbClr val="487052"/>
-                </a:solidFill>
-                <a:latin typeface="Microsoft YaHei" pitchFamily="34" charset="0"/>
-                <a:ea typeface="Microsoft YaHei" pitchFamily="34" charset="-122"/>
-                <a:cs typeface="Microsoft YaHei" pitchFamily="34" charset="-120"/>
-              </a:rPr>
-              <a:t>约束</a:t>
-            </a:r>
-            <a:endParaRPr lang="en-US" sz="710" dirty="0"/>
-          </a:p>
-        </p:txBody>
-      </p:sp>
-      <p:sp>
-        <p:nvSpPr>
-          <p:cNvPr id="38" name="Text 36"/>
-          <p:cNvSpPr/>
-          <p:nvPr/>
-        </p:nvSpPr>
-        <p:spPr>
-          <a:xfrm>
-            <a:off x="9134856" y="3310128"/>
-            <a:ext cx="1024128" cy="201168"/>
-          </a:xfrm>
-          <a:prstGeom prst="rect">
-            <a:avLst/>
-          </a:prstGeom>
-          <a:noFill/>
-          <a:ln/>
-        </p:spPr>
-        <p:txBody>
-          <a:bodyPr wrap="square" lIns="0" tIns="0" rIns="0" bIns="0" rtlCol="0" anchor="t">
-            <a:normAutofit/>
-          </a:bodyPr>
-          <a:lstStyle/>
-          <a:p>
-            <a:pPr indent="0" marL="0">
-              <a:buNone/>
-            </a:pPr>
-            <a:r>
-              <a:rPr lang="en-US" sz="670" dirty="0">
-                <a:solidFill>
-                  <a:srgbClr val="121212"/>
-                </a:solidFill>
-                <a:latin typeface="Microsoft YaHei" pitchFamily="34" charset="0"/>
-                <a:ea typeface="Microsoft YaHei" pitchFamily="34" charset="-122"/>
-                <a:cs typeface="Microsoft YaHei" pitchFamily="34" charset="-120"/>
-              </a:rPr>
-              <a:t>容百科技磷酸铁锂项目正式进</a:t>
-            </a:r>
-            <a:endParaRPr lang="en-US" sz="670" dirty="0"/>
-          </a:p>
-        </p:txBody>
-      </p:sp>
-      <p:sp>
-        <p:nvSpPr>
-          <p:cNvPr id="39" name="Text 37"/>
-          <p:cNvSpPr/>
-          <p:nvPr/>
-        </p:nvSpPr>
-        <p:spPr>
-          <a:xfrm>
-            <a:off x="7726680" y="4187952"/>
-            <a:ext cx="2697480" cy="493776"/>
-          </a:xfrm>
-          <a:prstGeom prst="rect">
-            <a:avLst/>
-          </a:prstGeom>
-          <a:noFill/>
-          <a:ln/>
-        </p:spPr>
-        <p:txBody>
-          <a:bodyPr wrap="square" lIns="0" tIns="0" rIns="0" bIns="0" rtlCol="0" anchor="t">
-            <a:normAutofit/>
-          </a:bodyPr>
-          <a:lstStyle/>
-          <a:p>
-            <a:pPr indent="0" marL="0">
-              <a:buNone/>
-            </a:pPr>
-            <a:r>
-              <a:rPr lang="en-US" sz="760" dirty="0">
-                <a:solidFill>
-                  <a:srgbClr val="6D756F"/>
-                </a:solidFill>
-                <a:latin typeface="Microsoft YaHei" pitchFamily="34" charset="0"/>
-                <a:ea typeface="Microsoft YaHei" pitchFamily="34" charset="-122"/>
-                <a:cs typeface="Microsoft YaHei" pitchFamily="34" charset="-120"/>
-              </a:rPr>
-              <a:t>检测到对比/分类信号，用矩阵压缩呈现，不新增外部判断。</a:t>
-            </a:r>
-            <a:endParaRPr lang="en-US" sz="760" dirty="0"/>
-          </a:p>
-        </p:txBody>
-      </p:sp>
-      <p:sp>
-        <p:nvSpPr>
-          <p:cNvPr id="40" name="Shape 38"/>
           <p:cNvSpPr/>
           <p:nvPr/>
         </p:nvSpPr>
@@ -11527,7 +11328,7 @@
       </p:sp>
       <p:sp>
         <p:nvSpPr>
-          <p:cNvPr id="41" name="Text 39"/>
+          <p:cNvPr id="34" name="Text 32"/>
           <p:cNvSpPr/>
           <p:nvPr/>
         </p:nvSpPr>
@@ -11566,7 +11367,7 @@
       </p:sp>
       <p:sp>
         <p:nvSpPr>
-          <p:cNvPr id="42" name="Text 40"/>
+          <p:cNvPr id="35" name="Text 33"/>
           <p:cNvSpPr/>
           <p:nvPr/>
         </p:nvSpPr>
@@ -11599,7 +11400,7 @@
                 <a:ea typeface="Microsoft YaHei" pitchFamily="34" charset="-122"/>
                 <a:cs typeface="Microsoft YaHei" pitchFamily="34" charset="-120"/>
               </a:rPr>
-              <a:t>若容百科技高压实产品量产顺利且回收政策严格执行，则高端磷酸铁锂供给紧张可能延续，头部企业盈利韧性增强，而回收端出清可能推高长期锂盐成本</a:t>
+              <a:t>若碳酸锂价格持续低位，则磷酸铁锂成本支撑进一步弱化，回收企业退出可能加速，行业集中度提升</a:t>
             </a:r>
             <a:endParaRPr lang="en-US" sz="1020" dirty="0"/>
           </a:p>
@@ -11748,7 +11549,7 @@
                 <a:ea typeface="Aptos" pitchFamily="34" charset="-122"/>
                 <a:cs typeface="Aptos" pitchFamily="34" charset="-120"/>
               </a:rPr>
-              <a:t>2026-10-08</a:t>
+              <a:t>2026-10-12</a:t>
             </a:r>
             <a:endParaRPr lang="en-US" sz="800" dirty="0"/>
           </a:p>
@@ -11954,7 +11755,7 @@
                 <a:ea typeface="Microsoft YaHei" pitchFamily="34" charset="-122"/>
                 <a:cs typeface="Microsoft YaHei" pitchFamily="34" charset="-120"/>
               </a:rPr>
-              <a:t>1 条公开来源交叉验证｜事实、影响与后续研判</a:t>
+              <a:t>2 条公开来源交叉验证｜事实、影响与后续研判</a:t>
             </a:r>
             <a:endParaRPr lang="en-US" sz="860" dirty="0"/>
           </a:p>
@@ -12063,7 +11864,7 @@
                 <a:ea typeface="Microsoft YaHei" pitchFamily="34" charset="-122"/>
                 <a:cs typeface="Microsoft YaHei" pitchFamily="34" charset="-120"/>
               </a:rPr>
-              <a:t>磷酸铁锂量产工艺压实密度可达2.5 g/cm³及以上，四代高压实产品及五代超高压实材料供给偏紧；磷酸锰铁锂（LMFP）暂不适合大面积替代磷酸铁锂，因其正极良率与成本尚未降至接近高压实LFP水平。高压实路线仍是当前技术竞争主线，LMFP商业化仍需时间。 [3]</a:t>
+              <a:t>湖南裕能投资20亿元加码20万吨纳米磷酸铁锂项目，指向纳米化技术路线受重视；吉利开卖电芯，可能推动磷酸铁锂在车企自供体系中的渗透。纳米磷酸铁锂可提升能量密度和倍率性能，但成本控制仍是关键。 [1][5]</a:t>
             </a:r>
             <a:endParaRPr lang="en-US" sz="960" dirty="0"/>
           </a:p>
@@ -12104,7 +11905,7 @@
                 <a:ea typeface="Aptos" pitchFamily="34" charset="-122"/>
                 <a:cs typeface="Aptos" pitchFamily="34" charset="-120"/>
               </a:rPr>
-              <a:t>依据：[3]</a:t>
+              <a:t>依据：[1][5]</a:t>
             </a:r>
             <a:endParaRPr lang="en-US" sz="740" dirty="0"/>
           </a:p>
@@ -12213,7 +12014,7 @@
                 <a:ea typeface="Microsoft YaHei" pitchFamily="34" charset="-122"/>
                 <a:cs typeface="Microsoft YaHei" pitchFamily="34" charset="-120"/>
               </a:rPr>
-              <a:t>该信号来自公众号技术讨论，与容百科技量产项目形成呼应：高压实产品供给偏紧说明头部企业技术壁垒正在转化为市场优势，而LMFP替代受限则意味着磷酸铁锂体系在中期内仍将主导中低端市场。需要进一步验证的是高压实产品的具体压实密度分布、下游电池厂接受度，以及LMFP在良率和成本上的改进速度。</a:t>
+              <a:t>湖南裕能扩产纳米磷酸铁锂，反映行业向高性能产品升级；吉利开卖电芯表明车企垂直整合加速，可能改变磷酸铁锂采购格局。需验证：纳米磷酸铁锂量产成本、吉利电芯外供规模及技术参数。</a:t>
             </a:r>
             <a:endParaRPr lang="en-US" sz="960" dirty="0"/>
           </a:p>
@@ -12347,7 +12148,7 @@
                 <a:ea typeface="Microsoft YaHei" pitchFamily="34" charset="-122"/>
                 <a:cs typeface="Microsoft YaHei" pitchFamily="34" charset="-120"/>
               </a:rPr>
-              <a:t>若高压实产品供给持续偏紧且LMFP良率成本改善缓慢，则磷酸铁锂高端产能溢价可能维持，头部材料企业技术护城河加深；跟踪指标包括高压实产品月度报价、LMFP量产良率数据及电池厂技术路线切换公告；证据边界在于当前信息多来自行业讨论，实际技术进展需以企业公告和第三方检测为准。</a:t>
+              <a:t>若纳米磷酸铁锂量产成本下降，则高端车型渗透率可能提升；若吉利电芯外供规模扩大，则第三方磷酸铁锂供应商份额可能受挤压。跟踪指标：纳米产品出货占比、吉利电芯客户名单。</a:t>
             </a:r>
             <a:endParaRPr lang="en-US" sz="960" dirty="0"/>
           </a:p>
@@ -12415,7 +12216,7 @@
                 <a:ea typeface="Microsoft YaHei" pitchFamily="34" charset="-122"/>
                 <a:cs typeface="Microsoft YaHei" pitchFamily="34" charset="-120"/>
               </a:rPr>
-              <a:t>对比矩阵</a:t>
+              <a:t>路线图</a:t>
             </a:r>
             <a:endParaRPr lang="en-US" sz="1200" dirty="0"/>
           </a:p>
@@ -12429,18 +12230,84 @@
         </p:nvSpPr>
         <p:spPr>
           <a:xfrm>
-            <a:off x="7818120" y="2176272"/>
-            <a:ext cx="2487168" cy="1609344"/>
-          </a:xfrm>
-          <a:prstGeom prst="rect">
+            <a:off x="7754112" y="2249424"/>
+            <a:ext cx="612648" cy="402336"/>
+          </a:xfrm>
+          <a:prstGeom prst="chevron">
+            <a:avLst/>
+          </a:prstGeom>
+          <a:solidFill>
+            <a:srgbClr val="DDEBE0"/>
+          </a:solidFill>
+          <a:ln w="13970">
+            <a:solidFill>
+              <a:srgbClr val="487052"/>
+            </a:solidFill>
+            <a:prstDash val="solid"/>
+          </a:ln>
+        </p:spPr>
+      </p:sp>
+      <p:sp>
+        <p:nvSpPr>
+          <p:cNvPr id="25" name="Text 23"/>
+          <p:cNvSpPr/>
+          <p:nvPr/>
+        </p:nvSpPr>
+        <p:spPr>
+          <a:xfrm>
+            <a:off x="7827264" y="2386584"/>
+            <a:ext cx="448056" cy="109728"/>
+          </a:xfrm>
+          <a:prstGeom prst="rect">
+            <a:avLst/>
+          </a:prstGeom>
+          <a:noFill/>
+          <a:ln/>
+        </p:spPr>
+        <p:txBody>
+          <a:bodyPr wrap="square" lIns="0" tIns="0" rIns="0" bIns="0" rtlCol="0" anchor="ctr">
+            <a:normAutofit/>
+          </a:bodyPr>
+          <a:lstStyle/>
+          <a:p>
+            <a:pPr algn="ctr" indent="0" marL="0">
+              <a:buNone/>
+            </a:pPr>
+            <a:r>
+              <a:rPr lang="en-US" sz="670" b="1" dirty="0">
+                <a:solidFill>
+                  <a:srgbClr val="121212"/>
+                </a:solidFill>
+                <a:latin typeface="Microsoft YaHei" pitchFamily="34" charset="0"/>
+                <a:ea typeface="Microsoft YaHei" pitchFamily="34" charset="-122"/>
+                <a:cs typeface="Microsoft YaHei" pitchFamily="34" charset="-120"/>
+              </a:rPr>
+              <a:t>技术</a:t>
+            </a:r>
+            <a:endParaRPr lang="en-US" sz="670" dirty="0"/>
+          </a:p>
+        </p:txBody>
+      </p:sp>
+      <p:sp>
+        <p:nvSpPr>
+          <p:cNvPr id="26" name="Shape 24"/>
+          <p:cNvSpPr/>
+          <p:nvPr/>
+        </p:nvSpPr>
+        <p:spPr>
+          <a:xfrm>
+            <a:off x="8375904" y="2249424"/>
+            <a:ext cx="612648" cy="402336"/>
+          </a:xfrm>
+          <a:prstGeom prst="chevron">
             <a:avLst/>
           </a:prstGeom>
           <a:solidFill>
             <a:srgbClr val="FFFFFF"/>
           </a:solidFill>
-          <a:ln w="10160">
+          <a:ln w="13970">
             <a:solidFill>
-              <a:srgbClr val="DADADA"/>
+              <a:srgbClr val="487052"/>
             </a:solidFill>
             <a:prstDash val="solid"/>
           </a:ln>
@@ -12448,22 +12315,65 @@
       </p:sp>
       <p:sp>
         <p:nvSpPr>
-          <p:cNvPr id="25" name="Shape 23"/>
-          <p:cNvSpPr/>
-          <p:nvPr/>
-        </p:nvSpPr>
-        <p:spPr>
-          <a:xfrm>
-            <a:off x="9061704" y="2176272"/>
-            <a:ext cx="0" cy="1609344"/>
-          </a:xfrm>
-          <a:prstGeom prst="line">
-            <a:avLst/>
-          </a:prstGeom>
-          <a:noFill/>
-          <a:ln w="8890">
+          <p:cNvPr id="27" name="Text 25"/>
+          <p:cNvSpPr/>
+          <p:nvPr/>
+        </p:nvSpPr>
+        <p:spPr>
+          <a:xfrm>
+            <a:off x="8449056" y="2386584"/>
+            <a:ext cx="448056" cy="109728"/>
+          </a:xfrm>
+          <a:prstGeom prst="rect">
+            <a:avLst/>
+          </a:prstGeom>
+          <a:noFill/>
+          <a:ln/>
+        </p:spPr>
+        <p:txBody>
+          <a:bodyPr wrap="square" lIns="0" tIns="0" rIns="0" bIns="0" rtlCol="0" anchor="ctr">
+            <a:normAutofit/>
+          </a:bodyPr>
+          <a:lstStyle/>
+          <a:p>
+            <a:pPr algn="ctr" indent="0" marL="0">
+              <a:buNone/>
+            </a:pPr>
+            <a:r>
+              <a:rPr lang="en-US" sz="670" b="1" dirty="0">
+                <a:solidFill>
+                  <a:srgbClr val="121212"/>
+                </a:solidFill>
+                <a:latin typeface="Microsoft YaHei" pitchFamily="34" charset="0"/>
+                <a:ea typeface="Microsoft YaHei" pitchFamily="34" charset="-122"/>
+                <a:cs typeface="Microsoft YaHei" pitchFamily="34" charset="-120"/>
+              </a:rPr>
+              <a:t>产品</a:t>
+            </a:r>
+            <a:endParaRPr lang="en-US" sz="670" dirty="0"/>
+          </a:p>
+        </p:txBody>
+      </p:sp>
+      <p:sp>
+        <p:nvSpPr>
+          <p:cNvPr id="28" name="Shape 26"/>
+          <p:cNvSpPr/>
+          <p:nvPr/>
+        </p:nvSpPr>
+        <p:spPr>
+          <a:xfrm>
+            <a:off x="8997696" y="2249424"/>
+            <a:ext cx="612648" cy="402336"/>
+          </a:xfrm>
+          <a:prstGeom prst="chevron">
+            <a:avLst/>
+          </a:prstGeom>
+          <a:solidFill>
+            <a:srgbClr val="FFFFFF"/>
+          </a:solidFill>
+          <a:ln w="13970">
             <a:solidFill>
-              <a:srgbClr val="DADADA"/>
+              <a:srgbClr val="487052"/>
             </a:solidFill>
             <a:prstDash val="solid"/>
           </a:ln>
@@ -12471,22 +12381,65 @@
       </p:sp>
       <p:sp>
         <p:nvSpPr>
-          <p:cNvPr id="26" name="Shape 24"/>
-          <p:cNvSpPr/>
-          <p:nvPr/>
-        </p:nvSpPr>
-        <p:spPr>
-          <a:xfrm>
-            <a:off x="7818120" y="2980944"/>
-            <a:ext cx="2487168" cy="0"/>
-          </a:xfrm>
-          <a:prstGeom prst="line">
-            <a:avLst/>
-          </a:prstGeom>
-          <a:noFill/>
-          <a:ln w="8890">
+          <p:cNvPr id="29" name="Text 27"/>
+          <p:cNvSpPr/>
+          <p:nvPr/>
+        </p:nvSpPr>
+        <p:spPr>
+          <a:xfrm>
+            <a:off x="9070848" y="2386584"/>
+            <a:ext cx="448056" cy="109728"/>
+          </a:xfrm>
+          <a:prstGeom prst="rect">
+            <a:avLst/>
+          </a:prstGeom>
+          <a:noFill/>
+          <a:ln/>
+        </p:spPr>
+        <p:txBody>
+          <a:bodyPr wrap="square" lIns="0" tIns="0" rIns="0" bIns="0" rtlCol="0" anchor="ctr">
+            <a:normAutofit/>
+          </a:bodyPr>
+          <a:lstStyle/>
+          <a:p>
+            <a:pPr algn="ctr" indent="0" marL="0">
+              <a:buNone/>
+            </a:pPr>
+            <a:r>
+              <a:rPr lang="en-US" sz="670" b="1" dirty="0">
+                <a:solidFill>
+                  <a:srgbClr val="121212"/>
+                </a:solidFill>
+                <a:latin typeface="Microsoft YaHei" pitchFamily="34" charset="0"/>
+                <a:ea typeface="Microsoft YaHei" pitchFamily="34" charset="-122"/>
+                <a:cs typeface="Microsoft YaHei" pitchFamily="34" charset="-120"/>
+              </a:rPr>
+              <a:t>验证</a:t>
+            </a:r>
+            <a:endParaRPr lang="en-US" sz="670" dirty="0"/>
+          </a:p>
+        </p:txBody>
+      </p:sp>
+      <p:sp>
+        <p:nvSpPr>
+          <p:cNvPr id="30" name="Shape 28"/>
+          <p:cNvSpPr/>
+          <p:nvPr/>
+        </p:nvSpPr>
+        <p:spPr>
+          <a:xfrm>
+            <a:off x="9619488" y="2249424"/>
+            <a:ext cx="612648" cy="402336"/>
+          </a:xfrm>
+          <a:prstGeom prst="chevron">
+            <a:avLst/>
+          </a:prstGeom>
+          <a:solidFill>
+            <a:srgbClr val="FFFFFF"/>
+          </a:solidFill>
+          <a:ln w="13970">
             <a:solidFill>
-              <a:srgbClr val="DADADA"/>
+              <a:srgbClr val="487052"/>
             </a:solidFill>
             <a:prstDash val="solid"/>
           </a:ln>
@@ -12494,24 +12447,63 @@
       </p:sp>
       <p:sp>
         <p:nvSpPr>
-          <p:cNvPr id="27" name="Shape 25"/>
-          <p:cNvSpPr/>
-          <p:nvPr/>
-        </p:nvSpPr>
-        <p:spPr>
-          <a:xfrm>
-            <a:off x="7818120" y="2176272"/>
-            <a:ext cx="1243584" cy="804672"/>
-          </a:xfrm>
-          <a:prstGeom prst="rect">
-            <a:avLst/>
-          </a:prstGeom>
-          <a:solidFill>
-            <a:srgbClr val="DDEBE0"/>
-          </a:solidFill>
-          <a:ln w="3810">
+          <p:cNvPr id="31" name="Text 29"/>
+          <p:cNvSpPr/>
+          <p:nvPr/>
+        </p:nvSpPr>
+        <p:spPr>
+          <a:xfrm>
+            <a:off x="9692640" y="2386584"/>
+            <a:ext cx="448056" cy="109728"/>
+          </a:xfrm>
+          <a:prstGeom prst="rect">
+            <a:avLst/>
+          </a:prstGeom>
+          <a:noFill/>
+          <a:ln/>
+        </p:spPr>
+        <p:txBody>
+          <a:bodyPr wrap="square" lIns="0" tIns="0" rIns="0" bIns="0" rtlCol="0" anchor="ctr">
+            <a:normAutofit/>
+          </a:bodyPr>
+          <a:lstStyle/>
+          <a:p>
+            <a:pPr algn="ctr" indent="0" marL="0">
+              <a:buNone/>
+            </a:pPr>
+            <a:r>
+              <a:rPr lang="en-US" sz="670" b="1" dirty="0">
+                <a:solidFill>
+                  <a:srgbClr val="121212"/>
+                </a:solidFill>
+                <a:latin typeface="Microsoft YaHei" pitchFamily="34" charset="0"/>
+                <a:ea typeface="Microsoft YaHei" pitchFamily="34" charset="-122"/>
+                <a:cs typeface="Microsoft YaHei" pitchFamily="34" charset="-120"/>
+              </a:rPr>
+              <a:t>量产</a:t>
+            </a:r>
+            <a:endParaRPr lang="en-US" sz="670" dirty="0"/>
+          </a:p>
+        </p:txBody>
+      </p:sp>
+      <p:sp>
+        <p:nvSpPr>
+          <p:cNvPr id="32" name="Shape 30"/>
+          <p:cNvSpPr/>
+          <p:nvPr/>
+        </p:nvSpPr>
+        <p:spPr>
+          <a:xfrm>
+            <a:off x="7882128" y="3063240"/>
+            <a:ext cx="2331720" cy="0"/>
+          </a:xfrm>
+          <a:prstGeom prst="line">
+            <a:avLst/>
+          </a:prstGeom>
+          <a:noFill/>
+          <a:ln w="13970">
             <a:solidFill>
-              <a:srgbClr val="DADADA"/>
+              <a:srgbClr val="7F9D84"/>
             </a:solidFill>
             <a:prstDash val="solid"/>
           </a:ln>
@@ -12519,106 +12511,24 @@
       </p:sp>
       <p:sp>
         <p:nvSpPr>
-          <p:cNvPr id="28" name="Text 26"/>
-          <p:cNvSpPr/>
-          <p:nvPr/>
-        </p:nvSpPr>
-        <p:spPr>
-          <a:xfrm>
-            <a:off x="7891272" y="2286000"/>
-            <a:ext cx="438912" cy="109728"/>
-          </a:xfrm>
-          <a:prstGeom prst="rect">
-            <a:avLst/>
-          </a:prstGeom>
-          <a:noFill/>
-          <a:ln/>
-        </p:spPr>
-        <p:txBody>
-          <a:bodyPr wrap="square" lIns="0" tIns="0" rIns="0" bIns="0" rtlCol="0" anchor="ctr">
-            <a:normAutofit/>
-          </a:bodyPr>
-          <a:lstStyle/>
-          <a:p>
-            <a:pPr indent="0" marL="0">
-              <a:buNone/>
-            </a:pPr>
-            <a:r>
-              <a:rPr lang="en-US" sz="710" b="1" dirty="0">
-                <a:solidFill>
-                  <a:srgbClr val="487052"/>
-                </a:solidFill>
-                <a:latin typeface="Microsoft YaHei" pitchFamily="34" charset="0"/>
-                <a:ea typeface="Microsoft YaHei" pitchFamily="34" charset="-122"/>
-                <a:cs typeface="Microsoft YaHei" pitchFamily="34" charset="-120"/>
-              </a:rPr>
-              <a:t>路线A</a:t>
-            </a:r>
-            <a:endParaRPr lang="en-US" sz="710" dirty="0"/>
-          </a:p>
-        </p:txBody>
-      </p:sp>
-      <p:sp>
-        <p:nvSpPr>
-          <p:cNvPr id="29" name="Text 27"/>
-          <p:cNvSpPr/>
-          <p:nvPr/>
-        </p:nvSpPr>
-        <p:spPr>
-          <a:xfrm>
-            <a:off x="7891272" y="2505456"/>
-            <a:ext cx="1024128" cy="201168"/>
-          </a:xfrm>
-          <a:prstGeom prst="rect">
-            <a:avLst/>
-          </a:prstGeom>
-          <a:noFill/>
-          <a:ln/>
-        </p:spPr>
-        <p:txBody>
-          <a:bodyPr wrap="square" lIns="0" tIns="0" rIns="0" bIns="0" rtlCol="0" anchor="t">
-            <a:normAutofit/>
-          </a:bodyPr>
-          <a:lstStyle/>
-          <a:p>
-            <a:pPr indent="0" marL="0">
-              <a:buNone/>
-            </a:pPr>
-            <a:r>
-              <a:rPr lang="en-US" sz="670" dirty="0">
-                <a:solidFill>
-                  <a:srgbClr val="121212"/>
-                </a:solidFill>
-                <a:latin typeface="Microsoft YaHei" pitchFamily="34" charset="0"/>
-                <a:ea typeface="Microsoft YaHei" pitchFamily="34" charset="-122"/>
-                <a:cs typeface="Microsoft YaHei" pitchFamily="34" charset="-120"/>
-              </a:rPr>
-              <a:t>磷酸铁锂量产工艺压实密度可</a:t>
-            </a:r>
-            <a:endParaRPr lang="en-US" sz="670" dirty="0"/>
-          </a:p>
-        </p:txBody>
-      </p:sp>
-      <p:sp>
-        <p:nvSpPr>
-          <p:cNvPr id="30" name="Shape 28"/>
-          <p:cNvSpPr/>
-          <p:nvPr/>
-        </p:nvSpPr>
-        <p:spPr>
-          <a:xfrm>
-            <a:off x="9061704" y="2176272"/>
-            <a:ext cx="1243584" cy="804672"/>
-          </a:xfrm>
-          <a:prstGeom prst="rect">
+          <p:cNvPr id="33" name="Shape 31"/>
+          <p:cNvSpPr/>
+          <p:nvPr/>
+        </p:nvSpPr>
+        <p:spPr>
+          <a:xfrm>
+            <a:off x="7845552" y="2962656"/>
+            <a:ext cx="164592" cy="164592"/>
+          </a:xfrm>
+          <a:prstGeom prst="ellipse">
             <a:avLst/>
           </a:prstGeom>
           <a:solidFill>
-            <a:srgbClr val="FFFFFF"/>
+            <a:srgbClr val="487052"/>
           </a:solidFill>
-          <a:ln w="3810">
+          <a:ln w="12700">
             <a:solidFill>
-              <a:srgbClr val="DADADA"/>
+              <a:srgbClr val="FFFFFF"/>
             </a:solidFill>
             <a:prstDash val="solid"/>
           </a:ln>
@@ -12626,55 +12536,14 @@
       </p:sp>
       <p:sp>
         <p:nvSpPr>
-          <p:cNvPr id="31" name="Text 29"/>
-          <p:cNvSpPr/>
-          <p:nvPr/>
-        </p:nvSpPr>
-        <p:spPr>
-          <a:xfrm>
-            <a:off x="9134856" y="2286000"/>
-            <a:ext cx="438912" cy="109728"/>
-          </a:xfrm>
-          <a:prstGeom prst="rect">
-            <a:avLst/>
-          </a:prstGeom>
-          <a:noFill/>
-          <a:ln/>
-        </p:spPr>
-        <p:txBody>
-          <a:bodyPr wrap="square" lIns="0" tIns="0" rIns="0" bIns="0" rtlCol="0" anchor="ctr">
-            <a:normAutofit/>
-          </a:bodyPr>
-          <a:lstStyle/>
-          <a:p>
-            <a:pPr indent="0" marL="0">
-              <a:buNone/>
-            </a:pPr>
-            <a:r>
-              <a:rPr lang="en-US" sz="710" b="1" dirty="0">
-                <a:solidFill>
-                  <a:srgbClr val="487052"/>
-                </a:solidFill>
-                <a:latin typeface="Microsoft YaHei" pitchFamily="34" charset="0"/>
-                <a:ea typeface="Microsoft YaHei" pitchFamily="34" charset="-122"/>
-                <a:cs typeface="Microsoft YaHei" pitchFamily="34" charset="-120"/>
-              </a:rPr>
-              <a:t>路线B</a:t>
-            </a:r>
-            <a:endParaRPr lang="en-US" sz="710" dirty="0"/>
-          </a:p>
-        </p:txBody>
-      </p:sp>
-      <p:sp>
-        <p:nvSpPr>
-          <p:cNvPr id="32" name="Text 30"/>
-          <p:cNvSpPr/>
-          <p:nvPr/>
-        </p:nvSpPr>
-        <p:spPr>
-          <a:xfrm>
-            <a:off x="9134856" y="2505456"/>
-            <a:ext cx="1024128" cy="201168"/>
+          <p:cNvPr id="34" name="Text 32"/>
+          <p:cNvSpPr/>
+          <p:nvPr/>
+        </p:nvSpPr>
+        <p:spPr>
+          <a:xfrm>
+            <a:off x="7754112" y="3291840"/>
+            <a:ext cx="603504" cy="310896"/>
           </a:xfrm>
           <a:prstGeom prst="rect">
             <a:avLst/>
@@ -12688,7 +12557,7 @@
           </a:bodyPr>
           <a:lstStyle/>
           <a:p>
-            <a:pPr indent="0" marL="0">
+            <a:pPr algn="ctr" indent="0" marL="0">
               <a:buNone/>
             </a:pPr>
             <a:r>
@@ -12700,7 +12569,7 @@
                 <a:ea typeface="Microsoft YaHei" pitchFamily="34" charset="-122"/>
                 <a:cs typeface="Microsoft YaHei" pitchFamily="34" charset="-120"/>
               </a:rPr>
-              <a:t>磷酸锰铁锂（LMFP）暂不</a:t>
+              <a:t>湖南裕能投资20亿元加</a:t>
             </a:r>
             <a:endParaRPr lang="en-US" sz="670" dirty="0"/>
           </a:p>
@@ -12708,24 +12577,24 @@
       </p:sp>
       <p:sp>
         <p:nvSpPr>
-          <p:cNvPr id="33" name="Shape 31"/>
-          <p:cNvSpPr/>
-          <p:nvPr/>
-        </p:nvSpPr>
-        <p:spPr>
-          <a:xfrm>
-            <a:off x="7818120" y="2980944"/>
-            <a:ext cx="1243584" cy="804672"/>
-          </a:xfrm>
-          <a:prstGeom prst="rect">
+          <p:cNvPr id="35" name="Shape 33"/>
+          <p:cNvSpPr/>
+          <p:nvPr/>
+        </p:nvSpPr>
+        <p:spPr>
+          <a:xfrm>
+            <a:off x="8503920" y="2962656"/>
+            <a:ext cx="164592" cy="164592"/>
+          </a:xfrm>
+          <a:prstGeom prst="ellipse">
             <a:avLst/>
           </a:prstGeom>
           <a:solidFill>
-            <a:srgbClr val="FFFFFF"/>
+            <a:srgbClr val="487052"/>
           </a:solidFill>
-          <a:ln w="3810">
+          <a:ln w="12700">
             <a:solidFill>
-              <a:srgbClr val="DADADA"/>
+              <a:srgbClr val="FFFFFF"/>
             </a:solidFill>
             <a:prstDash val="solid"/>
           </a:ln>
@@ -12733,55 +12602,14 @@
       </p:sp>
       <p:sp>
         <p:nvSpPr>
-          <p:cNvPr id="34" name="Text 32"/>
-          <p:cNvSpPr/>
-          <p:nvPr/>
-        </p:nvSpPr>
-        <p:spPr>
-          <a:xfrm>
-            <a:off x="7891272" y="3090672"/>
-            <a:ext cx="438912" cy="109728"/>
-          </a:xfrm>
-          <a:prstGeom prst="rect">
-            <a:avLst/>
-          </a:prstGeom>
-          <a:noFill/>
-          <a:ln/>
-        </p:spPr>
-        <p:txBody>
-          <a:bodyPr wrap="square" lIns="0" tIns="0" rIns="0" bIns="0" rtlCol="0" anchor="ctr">
-            <a:normAutofit/>
-          </a:bodyPr>
-          <a:lstStyle/>
-          <a:p>
-            <a:pPr indent="0" marL="0">
-              <a:buNone/>
-            </a:pPr>
-            <a:r>
-              <a:rPr lang="en-US" sz="710" b="1" dirty="0">
-                <a:solidFill>
-                  <a:srgbClr val="487052"/>
-                </a:solidFill>
-                <a:latin typeface="Microsoft YaHei" pitchFamily="34" charset="0"/>
-                <a:ea typeface="Microsoft YaHei" pitchFamily="34" charset="-122"/>
-                <a:cs typeface="Microsoft YaHei" pitchFamily="34" charset="-120"/>
-              </a:rPr>
-              <a:t>机会</a:t>
-            </a:r>
-            <a:endParaRPr lang="en-US" sz="710" dirty="0"/>
-          </a:p>
-        </p:txBody>
-      </p:sp>
-      <p:sp>
-        <p:nvSpPr>
-          <p:cNvPr id="35" name="Text 33"/>
-          <p:cNvSpPr/>
-          <p:nvPr/>
-        </p:nvSpPr>
-        <p:spPr>
-          <a:xfrm>
-            <a:off x="7891272" y="3310128"/>
-            <a:ext cx="1024128" cy="201168"/>
+          <p:cNvPr id="36" name="Text 34"/>
+          <p:cNvSpPr/>
+          <p:nvPr/>
+        </p:nvSpPr>
+        <p:spPr>
+          <a:xfrm>
+            <a:off x="8412480" y="3291840"/>
+            <a:ext cx="603504" cy="310896"/>
           </a:xfrm>
           <a:prstGeom prst="rect">
             <a:avLst/>
@@ -12795,7 +12623,7 @@
           </a:bodyPr>
           <a:lstStyle/>
           <a:p>
-            <a:pPr indent="0" marL="0">
+            <a:pPr algn="ctr" indent="0" marL="0">
               <a:buNone/>
             </a:pPr>
             <a:r>
@@ -12807,7 +12635,7 @@
                 <a:ea typeface="Microsoft YaHei" pitchFamily="34" charset="-122"/>
                 <a:cs typeface="Microsoft YaHei" pitchFamily="34" charset="-120"/>
               </a:rPr>
-              <a:t>高压实路线仍是当前技术竞争</a:t>
+              <a:t>吉利开卖电芯，可能推动</a:t>
             </a:r>
             <a:endParaRPr lang="en-US" sz="670" dirty="0"/>
           </a:p>
@@ -12815,24 +12643,24 @@
       </p:sp>
       <p:sp>
         <p:nvSpPr>
-          <p:cNvPr id="36" name="Shape 34"/>
-          <p:cNvSpPr/>
-          <p:nvPr/>
-        </p:nvSpPr>
-        <p:spPr>
-          <a:xfrm>
-            <a:off x="9061704" y="2980944"/>
-            <a:ext cx="1243584" cy="804672"/>
-          </a:xfrm>
-          <a:prstGeom prst="rect">
+          <p:cNvPr id="37" name="Shape 35"/>
+          <p:cNvSpPr/>
+          <p:nvPr/>
+        </p:nvSpPr>
+        <p:spPr>
+          <a:xfrm>
+            <a:off x="9162288" y="2962656"/>
+            <a:ext cx="164592" cy="164592"/>
+          </a:xfrm>
+          <a:prstGeom prst="ellipse">
             <a:avLst/>
           </a:prstGeom>
           <a:solidFill>
-            <a:srgbClr val="F4FAF6"/>
+            <a:srgbClr val="487052"/>
           </a:solidFill>
-          <a:ln w="3810">
+          <a:ln w="12700">
             <a:solidFill>
-              <a:srgbClr val="DADADA"/>
+              <a:srgbClr val="FFFFFF"/>
             </a:solidFill>
             <a:prstDash val="solid"/>
           </a:ln>
@@ -12840,55 +12668,14 @@
       </p:sp>
       <p:sp>
         <p:nvSpPr>
-          <p:cNvPr id="37" name="Text 35"/>
-          <p:cNvSpPr/>
-          <p:nvPr/>
-        </p:nvSpPr>
-        <p:spPr>
-          <a:xfrm>
-            <a:off x="9134856" y="3090672"/>
-            <a:ext cx="438912" cy="109728"/>
-          </a:xfrm>
-          <a:prstGeom prst="rect">
-            <a:avLst/>
-          </a:prstGeom>
-          <a:noFill/>
-          <a:ln/>
-        </p:spPr>
-        <p:txBody>
-          <a:bodyPr wrap="square" lIns="0" tIns="0" rIns="0" bIns="0" rtlCol="0" anchor="ctr">
-            <a:normAutofit/>
-          </a:bodyPr>
-          <a:lstStyle/>
-          <a:p>
-            <a:pPr indent="0" marL="0">
-              <a:buNone/>
-            </a:pPr>
-            <a:r>
-              <a:rPr lang="en-US" sz="710" b="1" dirty="0">
-                <a:solidFill>
-                  <a:srgbClr val="487052"/>
-                </a:solidFill>
-                <a:latin typeface="Microsoft YaHei" pitchFamily="34" charset="0"/>
-                <a:ea typeface="Microsoft YaHei" pitchFamily="34" charset="-122"/>
-                <a:cs typeface="Microsoft YaHei" pitchFamily="34" charset="-120"/>
-              </a:rPr>
-              <a:t>约束</a:t>
-            </a:r>
-            <a:endParaRPr lang="en-US" sz="710" dirty="0"/>
-          </a:p>
-        </p:txBody>
-      </p:sp>
-      <p:sp>
-        <p:nvSpPr>
           <p:cNvPr id="38" name="Text 36"/>
           <p:cNvSpPr/>
           <p:nvPr/>
         </p:nvSpPr>
         <p:spPr>
           <a:xfrm>
-            <a:off x="9134856" y="3310128"/>
-            <a:ext cx="1024128" cy="201168"/>
+            <a:off x="9070848" y="3291840"/>
+            <a:ext cx="603504" cy="310896"/>
           </a:xfrm>
           <a:prstGeom prst="rect">
             <a:avLst/>
@@ -12902,7 +12689,7 @@
           </a:bodyPr>
           <a:lstStyle/>
           <a:p>
-            <a:pPr indent="0" marL="0">
+            <a:pPr algn="ctr" indent="0" marL="0">
               <a:buNone/>
             </a:pPr>
             <a:r>
@@ -12914,7 +12701,7 @@
                 <a:ea typeface="Microsoft YaHei" pitchFamily="34" charset="-122"/>
                 <a:cs typeface="Microsoft YaHei" pitchFamily="34" charset="-120"/>
               </a:rPr>
-              <a:t>磷酸铁锂量产工艺压实密度可</a:t>
+              <a:t>纳米磷酸铁锂可提升能量</a:t>
             </a:r>
             <a:endParaRPr lang="en-US" sz="670" dirty="0"/>
           </a:p>
@@ -12922,14 +12709,39 @@
       </p:sp>
       <p:sp>
         <p:nvSpPr>
-          <p:cNvPr id="39" name="Text 37"/>
-          <p:cNvSpPr/>
-          <p:nvPr/>
-        </p:nvSpPr>
-        <p:spPr>
-          <a:xfrm>
-            <a:off x="7726680" y="4187952"/>
-            <a:ext cx="2697480" cy="493776"/>
+          <p:cNvPr id="39" name="Shape 37"/>
+          <p:cNvSpPr/>
+          <p:nvPr/>
+        </p:nvSpPr>
+        <p:spPr>
+          <a:xfrm>
+            <a:off x="9820656" y="2962656"/>
+            <a:ext cx="164592" cy="164592"/>
+          </a:xfrm>
+          <a:prstGeom prst="ellipse">
+            <a:avLst/>
+          </a:prstGeom>
+          <a:solidFill>
+            <a:srgbClr val="B85A4A"/>
+          </a:solidFill>
+          <a:ln w="12700">
+            <a:solidFill>
+              <a:srgbClr val="FFFFFF"/>
+            </a:solidFill>
+            <a:prstDash val="solid"/>
+          </a:ln>
+        </p:spPr>
+      </p:sp>
+      <p:sp>
+        <p:nvSpPr>
+          <p:cNvPr id="40" name="Text 38"/>
+          <p:cNvSpPr/>
+          <p:nvPr/>
+        </p:nvSpPr>
+        <p:spPr>
+          <a:xfrm>
+            <a:off x="9729216" y="3291840"/>
+            <a:ext cx="603504" cy="310896"/>
           </a:xfrm>
           <a:prstGeom prst="rect">
             <a:avLst/>
@@ -12943,6 +12755,47 @@
           </a:bodyPr>
           <a:lstStyle/>
           <a:p>
+            <a:pPr algn="ctr" indent="0" marL="0">
+              <a:buNone/>
+            </a:pPr>
+            <a:r>
+              <a:rPr lang="en-US" sz="670" dirty="0">
+                <a:solidFill>
+                  <a:srgbClr val="121212"/>
+                </a:solidFill>
+                <a:latin typeface="Microsoft YaHei" pitchFamily="34" charset="0"/>
+                <a:ea typeface="Microsoft YaHei" pitchFamily="34" charset="-122"/>
+                <a:cs typeface="Microsoft YaHei" pitchFamily="34" charset="-120"/>
+              </a:rPr>
+              <a:t>纳米磷酸铁锂可提升能量</a:t>
+            </a:r>
+            <a:endParaRPr lang="en-US" sz="670" dirty="0"/>
+          </a:p>
+        </p:txBody>
+      </p:sp>
+      <p:sp>
+        <p:nvSpPr>
+          <p:cNvPr id="41" name="Text 39"/>
+          <p:cNvSpPr/>
+          <p:nvPr/>
+        </p:nvSpPr>
+        <p:spPr>
+          <a:xfrm>
+            <a:off x="7726680" y="4315968"/>
+            <a:ext cx="2697480" cy="384048"/>
+          </a:xfrm>
+          <a:prstGeom prst="rect">
+            <a:avLst/>
+          </a:prstGeom>
+          <a:noFill/>
+          <a:ln/>
+        </p:spPr>
+        <p:txBody>
+          <a:bodyPr wrap="square" lIns="0" tIns="0" rIns="0" bIns="0" rtlCol="0" anchor="t">
+            <a:normAutofit/>
+          </a:bodyPr>
+          <a:lstStyle/>
+          <a:p>
             <a:pPr indent="0" marL="0">
               <a:buNone/>
             </a:pPr>
@@ -12955,7 +12808,7 @@
                 <a:ea typeface="Microsoft YaHei" pitchFamily="34" charset="-122"/>
                 <a:cs typeface="Microsoft YaHei" pitchFamily="34" charset="-120"/>
               </a:rPr>
-              <a:t>检测到对比/分类信号，用矩阵压缩呈现，不新增外部判断。</a:t>
+              <a:t>参考培训 PPT 的阶段路线表达，按事件顺序拆成判断路径。</a:t>
             </a:r>
             <a:endParaRPr lang="en-US" sz="760" dirty="0"/>
           </a:p>
@@ -12963,7 +12816,7 @@
       </p:sp>
       <p:sp>
         <p:nvSpPr>
-          <p:cNvPr id="40" name="Shape 38"/>
+          <p:cNvPr id="42" name="Shape 40"/>
           <p:cNvSpPr/>
           <p:nvPr/>
         </p:nvSpPr>
@@ -12988,7 +12841,7 @@
       </p:sp>
       <p:sp>
         <p:nvSpPr>
-          <p:cNvPr id="41" name="Text 39"/>
+          <p:cNvPr id="43" name="Text 41"/>
           <p:cNvSpPr/>
           <p:nvPr/>
         </p:nvSpPr>
@@ -13027,7 +12880,7 @@
       </p:sp>
       <p:sp>
         <p:nvSpPr>
-          <p:cNvPr id="42" name="Text 40"/>
+          <p:cNvPr id="44" name="Text 42"/>
           <p:cNvSpPr/>
           <p:nvPr/>
         </p:nvSpPr>
@@ -13060,7 +12913,7 @@
                 <a:ea typeface="Microsoft YaHei" pitchFamily="34" charset="-122"/>
                 <a:cs typeface="Microsoft YaHei" pitchFamily="34" charset="-120"/>
               </a:rPr>
-              <a:t>若高压实产品供给持续偏紧且LMFP良率成本改善缓慢，则磷酸铁锂高端产能溢价可能维持，头部材料企业技术护城河加深</a:t>
+              <a:t>若纳米磷酸铁锂量产成本下降，则高端车型渗透率可能提升</a:t>
             </a:r>
             <a:endParaRPr lang="en-US" sz="1020" dirty="0"/>
           </a:p>
@@ -13209,7 +13062,7 @@
                 <a:ea typeface="Aptos" pitchFamily="34" charset="-122"/>
                 <a:cs typeface="Aptos" pitchFamily="34" charset="-120"/>
               </a:rPr>
-              <a:t>2026-10-08</a:t>
+              <a:t>2026-10-12</a:t>
             </a:r>
             <a:endParaRPr lang="en-US" sz="800" dirty="0"/>
           </a:p>
@@ -13415,7 +13268,7 @@
                 <a:ea typeface="Microsoft YaHei" pitchFamily="34" charset="-122"/>
                 <a:cs typeface="Microsoft YaHei" pitchFamily="34" charset="-120"/>
               </a:rPr>
-              <a:t>1 条公开来源交叉验证｜事实、影响与后续研判</a:t>
+              <a:t>3 条公开来源交叉验证｜事实、影响与后续研判</a:t>
             </a:r>
             <a:endParaRPr lang="en-US" sz="860" dirty="0"/>
           </a:p>
@@ -13524,7 +13377,7 @@
                 <a:ea typeface="Microsoft YaHei" pitchFamily="34" charset="-122"/>
                 <a:cs typeface="Microsoft YaHei" pitchFamily="34" charset="-120"/>
               </a:rPr>
-              <a:t>容百科技磷酸铁锂项目正式进入量产阶段，标志着其在磷酸铁锂领域完成从建设到出货的关键跨越；四代高压实产品及五代超高压实材料供给偏紧，头部企业高端产能稀缺。量产落地可能改变现有磷酸铁锂正极材料供应格局，高端产品客户争夺将更激烈。 [1]</a:t>
+              <a:t>龙蟠科技锁定最高56.78万吨磷酸铁锂供货长协，湖南裕能20万吨项目落地，产能与订单同步扩张；华盛锂电差异化权益分派法律意见书发布，资本运作活跃。长协锁定反映下游对供应稳定的需求，但需关注实际执行率。 [2][1][6]</a:t>
             </a:r>
             <a:endParaRPr lang="en-US" sz="960" dirty="0"/>
           </a:p>
@@ -13565,7 +13418,7 @@
                 <a:ea typeface="Aptos" pitchFamily="34" charset="-122"/>
                 <a:cs typeface="Aptos" pitchFamily="34" charset="-120"/>
               </a:rPr>
-              <a:t>依据：[1]</a:t>
+              <a:t>依据：[2][1][6]</a:t>
             </a:r>
             <a:endParaRPr lang="en-US" sz="740" dirty="0"/>
           </a:p>
@@ -13674,7 +13527,7 @@
                 <a:ea typeface="Microsoft YaHei" pitchFamily="34" charset="-122"/>
                 <a:cs typeface="Microsoft YaHei" pitchFamily="34" charset="-120"/>
               </a:rPr>
-              <a:t>该信号与今日结论中的高压实供给偏紧直接相关：容百科技量产意味着高端产能增量有限，短期内供给紧张难以缓解，头部企业可能优先保障战略客户。需要验证的是容百科技量产线的实际产能爬坡计划、已锁定的客户名单及订单规模，以及其产品是否已通过主流电池厂验证。</a:t>
+              <a:t>龙蟠科技长协规模较大，若完全执行将显著提升其市场份额；湖南裕能扩产可能加剧供给过剩风险。华盛锂电法律意见书或预示后续资本动作。需验证：长协定价机制、项目投产时间、华盛锂电分派目的。</a:t>
             </a:r>
             <a:endParaRPr lang="en-US" sz="960" dirty="0"/>
           </a:p>
@@ -13808,7 +13661,7 @@
                 <a:ea typeface="Microsoft YaHei" pitchFamily="34" charset="-122"/>
                 <a:cs typeface="Microsoft YaHei" pitchFamily="34" charset="-120"/>
               </a:rPr>
-              <a:t>若容百科技量产顺利且下游客户导入加速，则磷酸铁锂高端正极材料供给格局可能向头部集中，二线企业获取高端订单难度加大；跟踪指标包括容百月度出货量、客户公告及高压实产品市占率变化；证据边界在于量产初期实际产出可能低于规划，客户验证周期存在不确定性。</a:t>
+              <a:t>若长协执行率高于预期，则龙蟠科技营收确定性增强；若湖南裕能项目按期投产，则行业供给压力可能加大。跟踪指标：龙蟠科技季度出货量、湖南裕能项目进度。</a:t>
             </a:r>
             <a:endParaRPr lang="en-US" sz="960" dirty="0"/>
           </a:p>
@@ -13876,7 +13729,7 @@
                 <a:ea typeface="Microsoft YaHei" pitchFamily="34" charset="-122"/>
                 <a:cs typeface="Microsoft YaHei" pitchFamily="34" charset="-120"/>
               </a:rPr>
-              <a:t>落地链路</a:t>
+              <a:t>对比矩阵</a:t>
             </a:r>
             <a:endParaRPr lang="en-US" sz="1200" dirty="0"/>
           </a:p>
@@ -13890,17 +13743,38 @@
         </p:nvSpPr>
         <p:spPr>
           <a:xfrm>
-            <a:off x="7882128" y="2029968"/>
-            <a:ext cx="2377440" cy="365760"/>
-          </a:xfrm>
-          <a:prstGeom prst="roundRect">
-            <a:avLst>
-              <a:gd name="adj" fmla="val 10000"/>
-            </a:avLst>
+            <a:off x="7818120" y="2176272"/>
+            <a:ext cx="2487168" cy="1609344"/>
+          </a:xfrm>
+          <a:prstGeom prst="rect">
+            <a:avLst/>
           </a:prstGeom>
           <a:solidFill>
-            <a:srgbClr val="F4FAF6"/>
+            <a:srgbClr val="FFFFFF"/>
           </a:solidFill>
+          <a:ln w="10160">
+            <a:solidFill>
+              <a:srgbClr val="DADADA"/>
+            </a:solidFill>
+            <a:prstDash val="solid"/>
+          </a:ln>
+        </p:spPr>
+      </p:sp>
+      <p:sp>
+        <p:nvSpPr>
+          <p:cNvPr id="25" name="Shape 23"/>
+          <p:cNvSpPr/>
+          <p:nvPr/>
+        </p:nvSpPr>
+        <p:spPr>
+          <a:xfrm>
+            <a:off x="9061704" y="2176272"/>
+            <a:ext cx="0" cy="1609344"/>
+          </a:xfrm>
+          <a:prstGeom prst="line">
+            <a:avLst/>
+          </a:prstGeom>
+          <a:noFill/>
           <a:ln w="8890">
             <a:solidFill>
               <a:srgbClr val="DADADA"/>
@@ -13911,130 +13785,19 @@
       </p:sp>
       <p:sp>
         <p:nvSpPr>
-          <p:cNvPr id="25" name="Text 23"/>
-          <p:cNvSpPr/>
-          <p:nvPr/>
-        </p:nvSpPr>
-        <p:spPr>
-          <a:xfrm>
-            <a:off x="8028432" y="2139696"/>
-            <a:ext cx="566928" cy="109728"/>
-          </a:xfrm>
-          <a:prstGeom prst="rect">
-            <a:avLst/>
-          </a:prstGeom>
-          <a:noFill/>
-          <a:ln/>
-        </p:spPr>
-        <p:txBody>
-          <a:bodyPr wrap="square" lIns="0" tIns="0" rIns="0" bIns="0" rtlCol="0" anchor="ctr">
-            <a:normAutofit/>
-          </a:bodyPr>
-          <a:lstStyle/>
-          <a:p>
-            <a:pPr indent="0" marL="0">
-              <a:buNone/>
-            </a:pPr>
-            <a:r>
-              <a:rPr lang="en-US" sz="720" b="1" dirty="0">
-                <a:solidFill>
-                  <a:srgbClr val="487052"/>
-                </a:solidFill>
-                <a:latin typeface="Microsoft YaHei" pitchFamily="34" charset="0"/>
-                <a:ea typeface="Microsoft YaHei" pitchFamily="34" charset="-122"/>
-                <a:cs typeface="Microsoft YaHei" pitchFamily="34" charset="-120"/>
-              </a:rPr>
-              <a:t>产能</a:t>
-            </a:r>
-            <a:endParaRPr lang="en-US" sz="720" dirty="0"/>
-          </a:p>
-        </p:txBody>
-      </p:sp>
-      <p:sp>
-        <p:nvSpPr>
-          <p:cNvPr id="26" name="Text 24"/>
-          <p:cNvSpPr/>
-          <p:nvPr/>
-        </p:nvSpPr>
-        <p:spPr>
-          <a:xfrm>
-            <a:off x="8613648" y="2139696"/>
-            <a:ext cx="1481328" cy="109728"/>
-          </a:xfrm>
-          <a:prstGeom prst="rect">
-            <a:avLst/>
-          </a:prstGeom>
-          <a:noFill/>
-          <a:ln/>
-        </p:spPr>
-        <p:txBody>
-          <a:bodyPr wrap="square" lIns="0" tIns="0" rIns="0" bIns="0" rtlCol="0" anchor="ctr">
-            <a:normAutofit/>
-          </a:bodyPr>
-          <a:lstStyle/>
-          <a:p>
-            <a:pPr indent="0" marL="0">
-              <a:buNone/>
-            </a:pPr>
-            <a:r>
-              <a:rPr lang="en-US" sz="700" dirty="0">
-                <a:solidFill>
-                  <a:srgbClr val="121212"/>
-                </a:solidFill>
-                <a:latin typeface="Microsoft YaHei" pitchFamily="34" charset="0"/>
-                <a:ea typeface="Microsoft YaHei" pitchFamily="34" charset="-122"/>
-                <a:cs typeface="Microsoft YaHei" pitchFamily="34" charset="-120"/>
-              </a:rPr>
-              <a:t>容百科技磷酸铁锂项目正式进入量产阶</a:t>
-            </a:r>
-            <a:endParaRPr lang="en-US" sz="700" dirty="0"/>
-          </a:p>
-        </p:txBody>
-      </p:sp>
-      <p:sp>
-        <p:nvSpPr>
-          <p:cNvPr id="27" name="Shape 25"/>
-          <p:cNvSpPr/>
-          <p:nvPr/>
-        </p:nvSpPr>
-        <p:spPr>
-          <a:xfrm>
-            <a:off x="8979408" y="2441448"/>
-            <a:ext cx="164592" cy="146304"/>
-          </a:xfrm>
-          <a:prstGeom prst="downArrow">
-            <a:avLst/>
-          </a:prstGeom>
-          <a:solidFill>
-            <a:srgbClr val="7F9D84"/>
-          </a:solidFill>
-          <a:ln w="12700">
-            <a:solidFill>
-              <a:srgbClr val="7F9D84"/>
-            </a:solidFill>
-            <a:prstDash val="solid"/>
-          </a:ln>
-        </p:spPr>
-      </p:sp>
-      <p:sp>
-        <p:nvSpPr>
-          <p:cNvPr id="28" name="Shape 26"/>
-          <p:cNvSpPr/>
-          <p:nvPr/>
-        </p:nvSpPr>
-        <p:spPr>
-          <a:xfrm>
-            <a:off x="7882128" y="2596896"/>
-            <a:ext cx="2377440" cy="365760"/>
-          </a:xfrm>
-          <a:prstGeom prst="roundRect">
-            <a:avLst>
-              <a:gd name="adj" fmla="val 10000"/>
-            </a:avLst>
-          </a:prstGeom>
-          <a:solidFill>
-            <a:srgbClr val="FFFFFF"/>
-          </a:solidFill>
+          <p:cNvPr id="26" name="Shape 24"/>
+          <p:cNvSpPr/>
+          <p:nvPr/>
+        </p:nvSpPr>
+        <p:spPr>
+          <a:xfrm>
+            <a:off x="7818120" y="2980944"/>
+            <a:ext cx="2487168" cy="0"/>
+          </a:xfrm>
+          <a:prstGeom prst="line">
+            <a:avLst/>
+          </a:prstGeom>
+          <a:noFill/>
           <a:ln w="8890">
             <a:solidFill>
               <a:srgbClr val="DADADA"/>
@@ -14045,131 +13808,22 @@
       </p:sp>
       <p:sp>
         <p:nvSpPr>
-          <p:cNvPr id="29" name="Text 27"/>
-          <p:cNvSpPr/>
-          <p:nvPr/>
-        </p:nvSpPr>
-        <p:spPr>
-          <a:xfrm>
-            <a:off x="8028432" y="2706624"/>
-            <a:ext cx="566928" cy="109728"/>
-          </a:xfrm>
-          <a:prstGeom prst="rect">
-            <a:avLst/>
-          </a:prstGeom>
-          <a:noFill/>
-          <a:ln/>
-        </p:spPr>
-        <p:txBody>
-          <a:bodyPr wrap="square" lIns="0" tIns="0" rIns="0" bIns="0" rtlCol="0" anchor="ctr">
-            <a:normAutofit/>
-          </a:bodyPr>
-          <a:lstStyle/>
-          <a:p>
-            <a:pPr indent="0" marL="0">
-              <a:buNone/>
-            </a:pPr>
-            <a:r>
-              <a:rPr lang="en-US" sz="720" b="1" dirty="0">
-                <a:solidFill>
-                  <a:srgbClr val="487052"/>
-                </a:solidFill>
-                <a:latin typeface="Microsoft YaHei" pitchFamily="34" charset="0"/>
-                <a:ea typeface="Microsoft YaHei" pitchFamily="34" charset="-122"/>
-                <a:cs typeface="Microsoft YaHei" pitchFamily="34" charset="-120"/>
-              </a:rPr>
-              <a:t>客户</a:t>
-            </a:r>
-            <a:endParaRPr lang="en-US" sz="720" dirty="0"/>
-          </a:p>
-        </p:txBody>
-      </p:sp>
-      <p:sp>
-        <p:nvSpPr>
-          <p:cNvPr id="30" name="Text 28"/>
-          <p:cNvSpPr/>
-          <p:nvPr/>
-        </p:nvSpPr>
-        <p:spPr>
-          <a:xfrm>
-            <a:off x="8613648" y="2706624"/>
-            <a:ext cx="1481328" cy="109728"/>
-          </a:xfrm>
-          <a:prstGeom prst="rect">
-            <a:avLst/>
-          </a:prstGeom>
-          <a:noFill/>
-          <a:ln/>
-        </p:spPr>
-        <p:txBody>
-          <a:bodyPr wrap="square" lIns="0" tIns="0" rIns="0" bIns="0" rtlCol="0" anchor="ctr">
-            <a:normAutofit/>
-          </a:bodyPr>
-          <a:lstStyle/>
-          <a:p>
-            <a:pPr indent="0" marL="0">
-              <a:buNone/>
-            </a:pPr>
-            <a:r>
-              <a:rPr lang="en-US" sz="700" dirty="0">
-                <a:solidFill>
-                  <a:srgbClr val="121212"/>
-                </a:solidFill>
-                <a:latin typeface="Microsoft YaHei" pitchFamily="34" charset="0"/>
-                <a:ea typeface="Microsoft YaHei" pitchFamily="34" charset="-122"/>
-                <a:cs typeface="Microsoft YaHei" pitchFamily="34" charset="-120"/>
-              </a:rPr>
-              <a:t>四代高压实产品及五代超高压实材料供</a:t>
-            </a:r>
-            <a:endParaRPr lang="en-US" sz="700" dirty="0"/>
-          </a:p>
-        </p:txBody>
-      </p:sp>
-      <p:sp>
-        <p:nvSpPr>
-          <p:cNvPr id="31" name="Shape 29"/>
-          <p:cNvSpPr/>
-          <p:nvPr/>
-        </p:nvSpPr>
-        <p:spPr>
-          <a:xfrm>
-            <a:off x="8979408" y="3008376"/>
-            <a:ext cx="164592" cy="146304"/>
-          </a:xfrm>
-          <a:prstGeom prst="downArrow">
+          <p:cNvPr id="27" name="Shape 25"/>
+          <p:cNvSpPr/>
+          <p:nvPr/>
+        </p:nvSpPr>
+        <p:spPr>
+          <a:xfrm>
+            <a:off x="7818120" y="2176272"/>
+            <a:ext cx="1243584" cy="804672"/>
+          </a:xfrm>
+          <a:prstGeom prst="rect">
             <a:avLst/>
           </a:prstGeom>
           <a:solidFill>
-            <a:srgbClr val="7F9D84"/>
+            <a:srgbClr val="DDEBE0"/>
           </a:solidFill>
-          <a:ln w="12700">
-            <a:solidFill>
-              <a:srgbClr val="7F9D84"/>
-            </a:solidFill>
-            <a:prstDash val="solid"/>
-          </a:ln>
-        </p:spPr>
-      </p:sp>
-      <p:sp>
-        <p:nvSpPr>
-          <p:cNvPr id="32" name="Shape 30"/>
-          <p:cNvSpPr/>
-          <p:nvPr/>
-        </p:nvSpPr>
-        <p:spPr>
-          <a:xfrm>
-            <a:off x="7882128" y="3163824"/>
-            <a:ext cx="2377440" cy="365760"/>
-          </a:xfrm>
-          <a:prstGeom prst="roundRect">
-            <a:avLst>
-              <a:gd name="adj" fmla="val 10000"/>
-            </a:avLst>
-          </a:prstGeom>
-          <a:solidFill>
-            <a:srgbClr val="F4FAF6"/>
-          </a:solidFill>
-          <a:ln w="8890">
+          <a:ln w="3810">
             <a:solidFill>
               <a:srgbClr val="DADADA"/>
             </a:solidFill>
@@ -14179,14 +13833,14 @@
       </p:sp>
       <p:sp>
         <p:nvSpPr>
-          <p:cNvPr id="33" name="Text 31"/>
-          <p:cNvSpPr/>
-          <p:nvPr/>
-        </p:nvSpPr>
-        <p:spPr>
-          <a:xfrm>
-            <a:off x="8028432" y="3273552"/>
-            <a:ext cx="566928" cy="109728"/>
+          <p:cNvPr id="28" name="Text 26"/>
+          <p:cNvSpPr/>
+          <p:nvPr/>
+        </p:nvSpPr>
+        <p:spPr>
+          <a:xfrm>
+            <a:off x="7891272" y="2286000"/>
+            <a:ext cx="438912" cy="109728"/>
           </a:xfrm>
           <a:prstGeom prst="rect">
             <a:avLst/>
@@ -14204,7 +13858,7 @@
               <a:buNone/>
             </a:pPr>
             <a:r>
-              <a:rPr lang="en-US" sz="720" b="1" dirty="0">
+              <a:rPr lang="en-US" sz="710" b="1" dirty="0">
                 <a:solidFill>
                   <a:srgbClr val="487052"/>
                 </a:solidFill>
@@ -14212,11 +13866,184 @@
                 <a:ea typeface="Microsoft YaHei" pitchFamily="34" charset="-122"/>
                 <a:cs typeface="Microsoft YaHei" pitchFamily="34" charset="-120"/>
               </a:rPr>
-              <a:t>落地</a:t>
-            </a:r>
-            <a:endParaRPr lang="en-US" sz="720" dirty="0"/>
-          </a:p>
-        </p:txBody>
+              <a:t>路线A</a:t>
+            </a:r>
+            <a:endParaRPr lang="en-US" sz="710" dirty="0"/>
+          </a:p>
+        </p:txBody>
+      </p:sp>
+      <p:sp>
+        <p:nvSpPr>
+          <p:cNvPr id="29" name="Text 27"/>
+          <p:cNvSpPr/>
+          <p:nvPr/>
+        </p:nvSpPr>
+        <p:spPr>
+          <a:xfrm>
+            <a:off x="7891272" y="2505456"/>
+            <a:ext cx="1024128" cy="201168"/>
+          </a:xfrm>
+          <a:prstGeom prst="rect">
+            <a:avLst/>
+          </a:prstGeom>
+          <a:noFill/>
+          <a:ln/>
+        </p:spPr>
+        <p:txBody>
+          <a:bodyPr wrap="square" lIns="0" tIns="0" rIns="0" bIns="0" rtlCol="0" anchor="t">
+            <a:normAutofit/>
+          </a:bodyPr>
+          <a:lstStyle/>
+          <a:p>
+            <a:pPr indent="0" marL="0">
+              <a:buNone/>
+            </a:pPr>
+            <a:r>
+              <a:rPr lang="en-US" sz="670" dirty="0">
+                <a:solidFill>
+                  <a:srgbClr val="121212"/>
+                </a:solidFill>
+                <a:latin typeface="Microsoft YaHei" pitchFamily="34" charset="0"/>
+                <a:ea typeface="Microsoft YaHei" pitchFamily="34" charset="-122"/>
+                <a:cs typeface="Microsoft YaHei" pitchFamily="34" charset="-120"/>
+              </a:rPr>
+              <a:t>龙蟠科技锁定最高56.78</a:t>
+            </a:r>
+            <a:endParaRPr lang="en-US" sz="670" dirty="0"/>
+          </a:p>
+        </p:txBody>
+      </p:sp>
+      <p:sp>
+        <p:nvSpPr>
+          <p:cNvPr id="30" name="Shape 28"/>
+          <p:cNvSpPr/>
+          <p:nvPr/>
+        </p:nvSpPr>
+        <p:spPr>
+          <a:xfrm>
+            <a:off x="9061704" y="2176272"/>
+            <a:ext cx="1243584" cy="804672"/>
+          </a:xfrm>
+          <a:prstGeom prst="rect">
+            <a:avLst/>
+          </a:prstGeom>
+          <a:solidFill>
+            <a:srgbClr val="FFFFFF"/>
+          </a:solidFill>
+          <a:ln w="3810">
+            <a:solidFill>
+              <a:srgbClr val="DADADA"/>
+            </a:solidFill>
+            <a:prstDash val="solid"/>
+          </a:ln>
+        </p:spPr>
+      </p:sp>
+      <p:sp>
+        <p:nvSpPr>
+          <p:cNvPr id="31" name="Text 29"/>
+          <p:cNvSpPr/>
+          <p:nvPr/>
+        </p:nvSpPr>
+        <p:spPr>
+          <a:xfrm>
+            <a:off x="9134856" y="2286000"/>
+            <a:ext cx="438912" cy="109728"/>
+          </a:xfrm>
+          <a:prstGeom prst="rect">
+            <a:avLst/>
+          </a:prstGeom>
+          <a:noFill/>
+          <a:ln/>
+        </p:spPr>
+        <p:txBody>
+          <a:bodyPr wrap="square" lIns="0" tIns="0" rIns="0" bIns="0" rtlCol="0" anchor="ctr">
+            <a:normAutofit/>
+          </a:bodyPr>
+          <a:lstStyle/>
+          <a:p>
+            <a:pPr indent="0" marL="0">
+              <a:buNone/>
+            </a:pPr>
+            <a:r>
+              <a:rPr lang="en-US" sz="710" b="1" dirty="0">
+                <a:solidFill>
+                  <a:srgbClr val="487052"/>
+                </a:solidFill>
+                <a:latin typeface="Microsoft YaHei" pitchFamily="34" charset="0"/>
+                <a:ea typeface="Microsoft YaHei" pitchFamily="34" charset="-122"/>
+                <a:cs typeface="Microsoft YaHei" pitchFamily="34" charset="-120"/>
+              </a:rPr>
+              <a:t>路线B</a:t>
+            </a:r>
+            <a:endParaRPr lang="en-US" sz="710" dirty="0"/>
+          </a:p>
+        </p:txBody>
+      </p:sp>
+      <p:sp>
+        <p:nvSpPr>
+          <p:cNvPr id="32" name="Text 30"/>
+          <p:cNvSpPr/>
+          <p:nvPr/>
+        </p:nvSpPr>
+        <p:spPr>
+          <a:xfrm>
+            <a:off x="9134856" y="2505456"/>
+            <a:ext cx="1024128" cy="201168"/>
+          </a:xfrm>
+          <a:prstGeom prst="rect">
+            <a:avLst/>
+          </a:prstGeom>
+          <a:noFill/>
+          <a:ln/>
+        </p:spPr>
+        <p:txBody>
+          <a:bodyPr wrap="square" lIns="0" tIns="0" rIns="0" bIns="0" rtlCol="0" anchor="t">
+            <a:normAutofit/>
+          </a:bodyPr>
+          <a:lstStyle/>
+          <a:p>
+            <a:pPr indent="0" marL="0">
+              <a:buNone/>
+            </a:pPr>
+            <a:r>
+              <a:rPr lang="en-US" sz="670" dirty="0">
+                <a:solidFill>
+                  <a:srgbClr val="121212"/>
+                </a:solidFill>
+                <a:latin typeface="Microsoft YaHei" pitchFamily="34" charset="0"/>
+                <a:ea typeface="Microsoft YaHei" pitchFamily="34" charset="-122"/>
+                <a:cs typeface="Microsoft YaHei" pitchFamily="34" charset="-120"/>
+              </a:rPr>
+              <a:t>华盛锂电差异化权益分派法律</a:t>
+            </a:r>
+            <a:endParaRPr lang="en-US" sz="670" dirty="0"/>
+          </a:p>
+        </p:txBody>
+      </p:sp>
+      <p:sp>
+        <p:nvSpPr>
+          <p:cNvPr id="33" name="Shape 31"/>
+          <p:cNvSpPr/>
+          <p:nvPr/>
+        </p:nvSpPr>
+        <p:spPr>
+          <a:xfrm>
+            <a:off x="7818120" y="2980944"/>
+            <a:ext cx="1243584" cy="804672"/>
+          </a:xfrm>
+          <a:prstGeom prst="rect">
+            <a:avLst/>
+          </a:prstGeom>
+          <a:solidFill>
+            <a:srgbClr val="FFFFFF"/>
+          </a:solidFill>
+          <a:ln w="3810">
+            <a:solidFill>
+              <a:srgbClr val="DADADA"/>
+            </a:solidFill>
+            <a:prstDash val="solid"/>
+          </a:ln>
+        </p:spPr>
       </p:sp>
       <p:sp>
         <p:nvSpPr>
@@ -14226,8 +14053,8 @@
         </p:nvSpPr>
         <p:spPr>
           <a:xfrm>
-            <a:off x="8613648" y="3273552"/>
-            <a:ext cx="1481328" cy="109728"/>
+            <a:off x="7891272" y="3090672"/>
+            <a:ext cx="438912" cy="109728"/>
           </a:xfrm>
           <a:prstGeom prst="rect">
             <a:avLst/>
@@ -14245,7 +14072,48 @@
               <a:buNone/>
             </a:pPr>
             <a:r>
-              <a:rPr lang="en-US" sz="700" dirty="0">
+              <a:rPr lang="en-US" sz="710" b="1" dirty="0">
+                <a:solidFill>
+                  <a:srgbClr val="487052"/>
+                </a:solidFill>
+                <a:latin typeface="Microsoft YaHei" pitchFamily="34" charset="0"/>
+                <a:ea typeface="Microsoft YaHei" pitchFamily="34" charset="-122"/>
+                <a:cs typeface="Microsoft YaHei" pitchFamily="34" charset="-120"/>
+              </a:rPr>
+              <a:t>机会</a:t>
+            </a:r>
+            <a:endParaRPr lang="en-US" sz="710" dirty="0"/>
+          </a:p>
+        </p:txBody>
+      </p:sp>
+      <p:sp>
+        <p:nvSpPr>
+          <p:cNvPr id="35" name="Text 33"/>
+          <p:cNvSpPr/>
+          <p:nvPr/>
+        </p:nvSpPr>
+        <p:spPr>
+          <a:xfrm>
+            <a:off x="7891272" y="3310128"/>
+            <a:ext cx="1024128" cy="201168"/>
+          </a:xfrm>
+          <a:prstGeom prst="rect">
+            <a:avLst/>
+          </a:prstGeom>
+          <a:noFill/>
+          <a:ln/>
+        </p:spPr>
+        <p:txBody>
+          <a:bodyPr wrap="square" lIns="0" tIns="0" rIns="0" bIns="0" rtlCol="0" anchor="t">
+            <a:normAutofit/>
+          </a:bodyPr>
+          <a:lstStyle/>
+          <a:p>
+            <a:pPr indent="0" marL="0">
+              <a:buNone/>
+            </a:pPr>
+            <a:r>
+              <a:rPr lang="en-US" sz="670" dirty="0">
                 <a:solidFill>
                   <a:srgbClr val="121212"/>
                 </a:solidFill>
@@ -14253,22 +14121,88 @@
                 <a:ea typeface="Microsoft YaHei" pitchFamily="34" charset="-122"/>
                 <a:cs typeface="Microsoft YaHei" pitchFamily="34" charset="-120"/>
               </a:rPr>
-              <a:t>量产落地可能改变现有磷酸铁锂正极材</a:t>
-            </a:r>
-            <a:endParaRPr lang="en-US" sz="700" dirty="0"/>
-          </a:p>
-        </p:txBody>
-      </p:sp>
-      <p:sp>
-        <p:nvSpPr>
-          <p:cNvPr id="35" name="Text 33"/>
-          <p:cNvSpPr/>
-          <p:nvPr/>
-        </p:nvSpPr>
-        <p:spPr>
-          <a:xfrm>
-            <a:off x="7726680" y="4535424"/>
-            <a:ext cx="2697480" cy="310896"/>
+              <a:t>长协锁定反映下游对供应稳定</a:t>
+            </a:r>
+            <a:endParaRPr lang="en-US" sz="670" dirty="0"/>
+          </a:p>
+        </p:txBody>
+      </p:sp>
+      <p:sp>
+        <p:nvSpPr>
+          <p:cNvPr id="36" name="Shape 34"/>
+          <p:cNvSpPr/>
+          <p:nvPr/>
+        </p:nvSpPr>
+        <p:spPr>
+          <a:xfrm>
+            <a:off x="9061704" y="2980944"/>
+            <a:ext cx="1243584" cy="804672"/>
+          </a:xfrm>
+          <a:prstGeom prst="rect">
+            <a:avLst/>
+          </a:prstGeom>
+          <a:solidFill>
+            <a:srgbClr val="F4FAF6"/>
+          </a:solidFill>
+          <a:ln w="3810">
+            <a:solidFill>
+              <a:srgbClr val="DADADA"/>
+            </a:solidFill>
+            <a:prstDash val="solid"/>
+          </a:ln>
+        </p:spPr>
+      </p:sp>
+      <p:sp>
+        <p:nvSpPr>
+          <p:cNvPr id="37" name="Text 35"/>
+          <p:cNvSpPr/>
+          <p:nvPr/>
+        </p:nvSpPr>
+        <p:spPr>
+          <a:xfrm>
+            <a:off x="9134856" y="3090672"/>
+            <a:ext cx="438912" cy="109728"/>
+          </a:xfrm>
+          <a:prstGeom prst="rect">
+            <a:avLst/>
+          </a:prstGeom>
+          <a:noFill/>
+          <a:ln/>
+        </p:spPr>
+        <p:txBody>
+          <a:bodyPr wrap="square" lIns="0" tIns="0" rIns="0" bIns="0" rtlCol="0" anchor="ctr">
+            <a:normAutofit/>
+          </a:bodyPr>
+          <a:lstStyle/>
+          <a:p>
+            <a:pPr indent="0" marL="0">
+              <a:buNone/>
+            </a:pPr>
+            <a:r>
+              <a:rPr lang="en-US" sz="710" b="1" dirty="0">
+                <a:solidFill>
+                  <a:srgbClr val="487052"/>
+                </a:solidFill>
+                <a:latin typeface="Microsoft YaHei" pitchFamily="34" charset="0"/>
+                <a:ea typeface="Microsoft YaHei" pitchFamily="34" charset="-122"/>
+                <a:cs typeface="Microsoft YaHei" pitchFamily="34" charset="-120"/>
+              </a:rPr>
+              <a:t>约束</a:t>
+            </a:r>
+            <a:endParaRPr lang="en-US" sz="710" dirty="0"/>
+          </a:p>
+        </p:txBody>
+      </p:sp>
+      <p:sp>
+        <p:nvSpPr>
+          <p:cNvPr id="38" name="Text 36"/>
+          <p:cNvSpPr/>
+          <p:nvPr/>
+        </p:nvSpPr>
+        <p:spPr>
+          <a:xfrm>
+            <a:off x="9134856" y="3310128"/>
+            <a:ext cx="1024128" cy="201168"/>
           </a:xfrm>
           <a:prstGeom prst="rect">
             <a:avLst/>
@@ -14286,6 +14220,47 @@
               <a:buNone/>
             </a:pPr>
             <a:r>
+              <a:rPr lang="en-US" sz="670" dirty="0">
+                <a:solidFill>
+                  <a:srgbClr val="121212"/>
+                </a:solidFill>
+                <a:latin typeface="Microsoft YaHei" pitchFamily="34" charset="0"/>
+                <a:ea typeface="Microsoft YaHei" pitchFamily="34" charset="-122"/>
+                <a:cs typeface="Microsoft YaHei" pitchFamily="34" charset="-120"/>
+              </a:rPr>
+              <a:t>龙蟠科技锁定最高56.78</a:t>
+            </a:r>
+            <a:endParaRPr lang="en-US" sz="670" dirty="0"/>
+          </a:p>
+        </p:txBody>
+      </p:sp>
+      <p:sp>
+        <p:nvSpPr>
+          <p:cNvPr id="39" name="Text 37"/>
+          <p:cNvSpPr/>
+          <p:nvPr/>
+        </p:nvSpPr>
+        <p:spPr>
+          <a:xfrm>
+            <a:off x="7726680" y="4187952"/>
+            <a:ext cx="2697480" cy="493776"/>
+          </a:xfrm>
+          <a:prstGeom prst="rect">
+            <a:avLst/>
+          </a:prstGeom>
+          <a:noFill/>
+          <a:ln/>
+        </p:spPr>
+        <p:txBody>
+          <a:bodyPr wrap="square" lIns="0" tIns="0" rIns="0" bIns="0" rtlCol="0" anchor="t">
+            <a:normAutofit/>
+          </a:bodyPr>
+          <a:lstStyle/>
+          <a:p>
+            <a:pPr indent="0" marL="0">
+              <a:buNone/>
+            </a:pPr>
+            <a:r>
               <a:rPr lang="en-US" sz="760" dirty="0">
                 <a:solidFill>
                   <a:srgbClr val="6D756F"/>
@@ -14294,7 +14269,7 @@
                 <a:ea typeface="Microsoft YaHei" pitchFamily="34" charset="-122"/>
                 <a:cs typeface="Microsoft YaHei" pitchFamily="34" charset="-120"/>
               </a:rPr>
-              <a:t>用企业、项目、产能、客户的链路承接文字结论。</a:t>
+              <a:t>检测到对比/分类信号，用矩阵压缩呈现，不新增外部判断。</a:t>
             </a:r>
             <a:endParaRPr lang="en-US" sz="760" dirty="0"/>
           </a:p>
@@ -14302,7 +14277,7 @@
       </p:sp>
       <p:sp>
         <p:nvSpPr>
-          <p:cNvPr id="36" name="Shape 34"/>
+          <p:cNvPr id="40" name="Shape 38"/>
           <p:cNvSpPr/>
           <p:nvPr/>
         </p:nvSpPr>
@@ -14327,7 +14302,7 @@
       </p:sp>
       <p:sp>
         <p:nvSpPr>
-          <p:cNvPr id="37" name="Text 35"/>
+          <p:cNvPr id="41" name="Text 39"/>
           <p:cNvSpPr/>
           <p:nvPr/>
         </p:nvSpPr>
@@ -14366,7 +14341,7 @@
       </p:sp>
       <p:sp>
         <p:nvSpPr>
-          <p:cNvPr id="38" name="Text 36"/>
+          <p:cNvPr id="42" name="Text 40"/>
           <p:cNvSpPr/>
           <p:nvPr/>
         </p:nvSpPr>
@@ -14399,7 +14374,7 @@
                 <a:ea typeface="Microsoft YaHei" pitchFamily="34" charset="-122"/>
                 <a:cs typeface="Microsoft YaHei" pitchFamily="34" charset="-120"/>
               </a:rPr>
-              <a:t>若容百科技量产顺利且下游客户导入加速，则磷酸铁锂高端正极材料供给格局可能向头部集中，二线企业获取高端订单难度加大</a:t>
+              <a:t>若长协执行率高于预期，则龙蟠科技营收确定性增强</a:t>
             </a:r>
             <a:endParaRPr lang="en-US" sz="1020" dirty="0"/>
           </a:p>
@@ -14548,7 +14523,7 @@
                 <a:ea typeface="Aptos" pitchFamily="34" charset="-122"/>
                 <a:cs typeface="Aptos" pitchFamily="34" charset="-120"/>
               </a:rPr>
-              <a:t>2026-10-08</a:t>
+              <a:t>2026-10-12</a:t>
             </a:r>
             <a:endParaRPr lang="en-US" sz="800" dirty="0"/>
           </a:p>
@@ -14754,7 +14729,7 @@
                 <a:ea typeface="Microsoft YaHei" pitchFamily="34" charset="-122"/>
                 <a:cs typeface="Microsoft YaHei" pitchFamily="34" charset="-120"/>
               </a:rPr>
-              <a:t>1 条公开来源交叉验证｜事实、影响与后续研判</a:t>
+              <a:t>2 条公开来源交叉验证｜事实、影响与后续研判</a:t>
             </a:r>
             <a:endParaRPr lang="en-US" sz="860" dirty="0"/>
           </a:p>
@@ -14863,7 +14838,7 @@
                 <a:ea typeface="Microsoft YaHei" pitchFamily="34" charset="-122"/>
                 <a:cs typeface="Microsoft YaHei" pitchFamily="34" charset="-120"/>
               </a:rPr>
-              <a:t>四代高压实产品及五代超高压实材料供给偏紧，头部企业高端产能稀缺，可能支撑高压实产品价格相对坚挺；但普通磷酸铁锂产品仍面临产能过剩压力，行业盈利分化加剧。高压实产品溢价能否持续取决于下游需求增速与新增产能释放节奏。 [1]</a:t>
+              <a:t>碳酸锂价格暴跌近90%，动力电池回收行业进入洗牌深水区；电池板块跌幅居前，反映价格下行压力。成本端坍塌削弱磷酸铁锂价格支撑，回收企业退出可能加速，但上游材料企业盈利分化。 [3][7]</a:t>
             </a:r>
             <a:endParaRPr lang="en-US" sz="960" dirty="0"/>
           </a:p>
@@ -14904,7 +14879,7 @@
                 <a:ea typeface="Aptos" pitchFamily="34" charset="-122"/>
                 <a:cs typeface="Aptos" pitchFamily="34" charset="-120"/>
               </a:rPr>
-              <a:t>依据：[1]</a:t>
+              <a:t>依据：[3][7]</a:t>
             </a:r>
             <a:endParaRPr lang="en-US" sz="740" dirty="0"/>
           </a:p>
@@ -15013,7 +14988,7 @@
                 <a:ea typeface="Microsoft YaHei" pitchFamily="34" charset="-122"/>
                 <a:cs typeface="Microsoft YaHei" pitchFamily="34" charset="-120"/>
               </a:rPr>
-              <a:t>该判断基于高压实供给偏紧与行业整体产能过剩并存的背景：高端产品稀缺性可能带来阶段性溢价，但普通产品价格战可能拖累行业整体盈利。需要验证的是高压实产品与普通产品的价差走势、下游电池厂对高压实产品的接受度及采购比例，以及新增高压实产能的投产时间表。</a:t>
+              <a:t>碳酸锂价格暴跌直接降低磷酸铁锂生产成本，但产品价格同步下行，企业盈利取决于成本传导能力；回收行业洗牌可能减少再生碳酸锂供应，长期或影响原料结构。需验证：碳酸锂现货价拐点、回收企业退出规模。</a:t>
             </a:r>
             <a:endParaRPr lang="en-US" sz="960" dirty="0"/>
           </a:p>
@@ -15147,7 +15122,7 @@
                 <a:ea typeface="Microsoft YaHei" pitchFamily="34" charset="-122"/>
                 <a:cs typeface="Microsoft YaHei" pitchFamily="34" charset="-120"/>
               </a:rPr>
-              <a:t>若高压实产品供给紧张延续且下游需求保持增长，则高压实产品价格溢价可能维持，头部企业盈利韧性优于行业平均；跟踪指标包括高压实与普通产品价差、头部企业毛利率及新增产能投产进度；证据边界在于价格数据多来自行业交流，实际成交价可能因客户结构差异而不同。</a:t>
+              <a:t>若碳酸锂价格继续下跌，则磷酸铁锂价格可能进一步承压，高成本产能或退出；若回收行业洗牌导致再生供应减少，则长期碳酸锂供给结构可能变化。跟踪指标：碳酸锂现货价、回收企业开工率。</a:t>
             </a:r>
             <a:endParaRPr lang="en-US" sz="960" dirty="0"/>
           </a:p>
@@ -15215,7 +15190,7 @@
                 <a:ea typeface="Microsoft YaHei" pitchFamily="34" charset="-122"/>
                 <a:cs typeface="Microsoft YaHei" pitchFamily="34" charset="-120"/>
               </a:rPr>
-              <a:t>对比矩阵</a:t>
+              <a:t>关键数据解读</a:t>
             </a:r>
             <a:endParaRPr lang="en-US" sz="1200" dirty="0"/>
           </a:p>
@@ -15229,16 +15204,18 @@
         </p:nvSpPr>
         <p:spPr>
           <a:xfrm>
-            <a:off x="7818120" y="2176272"/>
-            <a:ext cx="2487168" cy="1609344"/>
-          </a:xfrm>
-          <a:prstGeom prst="rect">
-            <a:avLst/>
+            <a:off x="7772400" y="1993392"/>
+            <a:ext cx="2560320" cy="1389888"/>
+          </a:xfrm>
+          <a:prstGeom prst="roundRect">
+            <a:avLst>
+              <a:gd name="adj" fmla="val 2632"/>
+            </a:avLst>
           </a:prstGeom>
           <a:solidFill>
-            <a:srgbClr val="FFFFFF"/>
+            <a:srgbClr val="F4FAF6"/>
           </a:solidFill>
-          <a:ln w="10160">
+          <a:ln w="7620">
             <a:solidFill>
               <a:srgbClr val="DADADA"/>
             </a:solidFill>
@@ -15248,74 +15225,126 @@
       </p:sp>
       <p:sp>
         <p:nvSpPr>
-          <p:cNvPr id="25" name="Shape 23"/>
-          <p:cNvSpPr/>
-          <p:nvPr/>
-        </p:nvSpPr>
-        <p:spPr>
-          <a:xfrm>
-            <a:off x="9061704" y="2176272"/>
-            <a:ext cx="0" cy="1609344"/>
-          </a:xfrm>
-          <a:prstGeom prst="line">
-            <a:avLst/>
-          </a:prstGeom>
-          <a:noFill/>
-          <a:ln w="8890">
-            <a:solidFill>
-              <a:srgbClr val="DADADA"/>
-            </a:solidFill>
-            <a:prstDash val="solid"/>
-          </a:ln>
-        </p:spPr>
-      </p:sp>
-      <p:sp>
-        <p:nvSpPr>
-          <p:cNvPr id="26" name="Shape 24"/>
-          <p:cNvSpPr/>
-          <p:nvPr/>
-        </p:nvSpPr>
-        <p:spPr>
-          <a:xfrm>
-            <a:off x="7818120" y="2980944"/>
-            <a:ext cx="2487168" cy="0"/>
-          </a:xfrm>
-          <a:prstGeom prst="line">
-            <a:avLst/>
-          </a:prstGeom>
-          <a:noFill/>
-          <a:ln w="8890">
-            <a:solidFill>
-              <a:srgbClr val="DADADA"/>
-            </a:solidFill>
-            <a:prstDash val="solid"/>
-          </a:ln>
-        </p:spPr>
-      </p:sp>
-      <p:sp>
-        <p:nvSpPr>
-          <p:cNvPr id="27" name="Shape 25"/>
-          <p:cNvSpPr/>
-          <p:nvPr/>
-        </p:nvSpPr>
-        <p:spPr>
-          <a:xfrm>
-            <a:off x="7818120" y="2176272"/>
-            <a:ext cx="1243584" cy="804672"/>
-          </a:xfrm>
-          <a:prstGeom prst="rect">
-            <a:avLst/>
-          </a:prstGeom>
-          <a:solidFill>
-            <a:srgbClr val="DDEBE0"/>
-          </a:solidFill>
-          <a:ln w="3810">
-            <a:solidFill>
-              <a:srgbClr val="DADADA"/>
-            </a:solidFill>
-            <a:prstDash val="solid"/>
-          </a:ln>
-        </p:spPr>
+          <p:cNvPr id="25" name="Text 23"/>
+          <p:cNvSpPr/>
+          <p:nvPr/>
+        </p:nvSpPr>
+        <p:spPr>
+          <a:xfrm>
+            <a:off x="7918704" y="2103120"/>
+            <a:ext cx="822960" cy="384048"/>
+          </a:xfrm>
+          <a:prstGeom prst="rect">
+            <a:avLst/>
+          </a:prstGeom>
+          <a:noFill/>
+          <a:ln/>
+        </p:spPr>
+        <p:txBody>
+          <a:bodyPr wrap="square" lIns="0" tIns="0" rIns="0" bIns="0" rtlCol="0" anchor="ctr">
+            <a:normAutofit/>
+          </a:bodyPr>
+          <a:lstStyle/>
+          <a:p>
+            <a:pPr indent="0" marL="0">
+              <a:buNone/>
+            </a:pPr>
+            <a:r>
+              <a:rPr lang="en-US" sz="2100" b="1" dirty="0">
+                <a:solidFill>
+                  <a:srgbClr val="487052"/>
+                </a:solidFill>
+                <a:latin typeface="Aptos" pitchFamily="34" charset="0"/>
+                <a:ea typeface="Aptos" pitchFamily="34" charset="-122"/>
+                <a:cs typeface="Aptos" pitchFamily="34" charset="-120"/>
+              </a:rPr>
+              <a:t>90%</a:t>
+            </a:r>
+            <a:endParaRPr lang="en-US" sz="2100" dirty="0"/>
+          </a:p>
+        </p:txBody>
+      </p:sp>
+      <p:sp>
+        <p:nvSpPr>
+          <p:cNvPr id="26" name="Text 24"/>
+          <p:cNvSpPr/>
+          <p:nvPr/>
+        </p:nvSpPr>
+        <p:spPr>
+          <a:xfrm>
+            <a:off x="8759952" y="2167128"/>
+            <a:ext cx="1371600" cy="201168"/>
+          </a:xfrm>
+          <a:prstGeom prst="rect">
+            <a:avLst/>
+          </a:prstGeom>
+          <a:noFill/>
+          <a:ln/>
+        </p:spPr>
+        <p:txBody>
+          <a:bodyPr wrap="square" lIns="0" tIns="0" rIns="0" bIns="0" rtlCol="0" anchor="ctr">
+            <a:normAutofit/>
+          </a:bodyPr>
+          <a:lstStyle/>
+          <a:p>
+            <a:pPr indent="0" marL="0">
+              <a:buNone/>
+            </a:pPr>
+            <a:r>
+              <a:rPr lang="en-US" sz="820" b="1" dirty="0">
+                <a:solidFill>
+                  <a:srgbClr val="121212"/>
+                </a:solidFill>
+                <a:latin typeface="Microsoft YaHei" pitchFamily="34" charset="0"/>
+                <a:ea typeface="Microsoft YaHei" pitchFamily="34" charset="-122"/>
+                <a:cs typeface="Microsoft YaHei" pitchFamily="34" charset="-120"/>
+              </a:rPr>
+              <a:t>碳酸锂价格暴跌</a:t>
+            </a:r>
+            <a:endParaRPr lang="en-US" sz="820" dirty="0"/>
+          </a:p>
+        </p:txBody>
+      </p:sp>
+      <p:sp>
+        <p:nvSpPr>
+          <p:cNvPr id="27" name="Text 25"/>
+          <p:cNvSpPr/>
+          <p:nvPr/>
+        </p:nvSpPr>
+        <p:spPr>
+          <a:xfrm>
+            <a:off x="7918704" y="2578608"/>
+            <a:ext cx="2176272" cy="512064"/>
+          </a:xfrm>
+          <a:prstGeom prst="rect">
+            <a:avLst/>
+          </a:prstGeom>
+          <a:noFill/>
+          <a:ln/>
+        </p:spPr>
+        <p:txBody>
+          <a:bodyPr wrap="square" lIns="0" tIns="0" rIns="0" bIns="0" rtlCol="0" anchor="t">
+            <a:normAutofit/>
+          </a:bodyPr>
+          <a:lstStyle/>
+          <a:p>
+            <a:pPr indent="0" marL="0">
+              <a:buNone/>
+            </a:pPr>
+            <a:r>
+              <a:rPr lang="en-US" sz="840" dirty="0">
+                <a:solidFill>
+                  <a:srgbClr val="121212"/>
+                </a:solidFill>
+                <a:latin typeface="Microsoft YaHei" pitchFamily="34" charset="0"/>
+                <a:ea typeface="Microsoft YaHei" pitchFamily="34" charset="-122"/>
+                <a:cs typeface="Microsoft YaHei" pitchFamily="34" charset="-120"/>
+              </a:rPr>
+              <a:t>公开信息：碳酸锂价格暴跌近90%，动力电池回收行业进入洗牌深水区</a:t>
+            </a:r>
+            <a:endParaRPr lang="en-US" sz="840" dirty="0"/>
+          </a:p>
+        </p:txBody>
       </p:sp>
       <p:sp>
         <p:nvSpPr>
@@ -15325,49 +15354,8 @@
         </p:nvSpPr>
         <p:spPr>
           <a:xfrm>
-            <a:off x="7891272" y="2286000"/>
-            <a:ext cx="438912" cy="109728"/>
-          </a:xfrm>
-          <a:prstGeom prst="rect">
-            <a:avLst/>
-          </a:prstGeom>
-          <a:noFill/>
-          <a:ln/>
-        </p:spPr>
-        <p:txBody>
-          <a:bodyPr wrap="square" lIns="0" tIns="0" rIns="0" bIns="0" rtlCol="0" anchor="ctr">
-            <a:normAutofit/>
-          </a:bodyPr>
-          <a:lstStyle/>
-          <a:p>
-            <a:pPr indent="0" marL="0">
-              <a:buNone/>
-            </a:pPr>
-            <a:r>
-              <a:rPr lang="en-US" sz="710" b="1" dirty="0">
-                <a:solidFill>
-                  <a:srgbClr val="487052"/>
-                </a:solidFill>
-                <a:latin typeface="Microsoft YaHei" pitchFamily="34" charset="0"/>
-                <a:ea typeface="Microsoft YaHei" pitchFamily="34" charset="-122"/>
-                <a:cs typeface="Microsoft YaHei" pitchFamily="34" charset="-120"/>
-              </a:rPr>
-              <a:t>路线A</a:t>
-            </a:r>
-            <a:endParaRPr lang="en-US" sz="710" dirty="0"/>
-          </a:p>
-        </p:txBody>
-      </p:sp>
-      <p:sp>
-        <p:nvSpPr>
-          <p:cNvPr id="29" name="Text 27"/>
-          <p:cNvSpPr/>
-          <p:nvPr/>
-        </p:nvSpPr>
-        <p:spPr>
-          <a:xfrm>
-            <a:off x="7891272" y="2505456"/>
-            <a:ext cx="1024128" cy="201168"/>
+            <a:off x="7772400" y="4498848"/>
+            <a:ext cx="2560320" cy="384048"/>
           </a:xfrm>
           <a:prstGeom prst="rect">
             <a:avLst/>
@@ -15385,369 +15373,7 @@
               <a:buNone/>
             </a:pPr>
             <a:r>
-              <a:rPr lang="en-US" sz="670" dirty="0">
-                <a:solidFill>
-                  <a:srgbClr val="121212"/>
-                </a:solidFill>
-                <a:latin typeface="Microsoft YaHei" pitchFamily="34" charset="0"/>
-                <a:ea typeface="Microsoft YaHei" pitchFamily="34" charset="-122"/>
-                <a:cs typeface="Microsoft YaHei" pitchFamily="34" charset="-120"/>
-              </a:rPr>
-              <a:t>四代高压实产品及五代超高压</a:t>
-            </a:r>
-            <a:endParaRPr lang="en-US" sz="670" dirty="0"/>
-          </a:p>
-        </p:txBody>
-      </p:sp>
-      <p:sp>
-        <p:nvSpPr>
-          <p:cNvPr id="30" name="Shape 28"/>
-          <p:cNvSpPr/>
-          <p:nvPr/>
-        </p:nvSpPr>
-        <p:spPr>
-          <a:xfrm>
-            <a:off x="9061704" y="2176272"/>
-            <a:ext cx="1243584" cy="804672"/>
-          </a:xfrm>
-          <a:prstGeom prst="rect">
-            <a:avLst/>
-          </a:prstGeom>
-          <a:solidFill>
-            <a:srgbClr val="FFFFFF"/>
-          </a:solidFill>
-          <a:ln w="3810">
-            <a:solidFill>
-              <a:srgbClr val="DADADA"/>
-            </a:solidFill>
-            <a:prstDash val="solid"/>
-          </a:ln>
-        </p:spPr>
-      </p:sp>
-      <p:sp>
-        <p:nvSpPr>
-          <p:cNvPr id="31" name="Text 29"/>
-          <p:cNvSpPr/>
-          <p:nvPr/>
-        </p:nvSpPr>
-        <p:spPr>
-          <a:xfrm>
-            <a:off x="9134856" y="2286000"/>
-            <a:ext cx="438912" cy="109728"/>
-          </a:xfrm>
-          <a:prstGeom prst="rect">
-            <a:avLst/>
-          </a:prstGeom>
-          <a:noFill/>
-          <a:ln/>
-        </p:spPr>
-        <p:txBody>
-          <a:bodyPr wrap="square" lIns="0" tIns="0" rIns="0" bIns="0" rtlCol="0" anchor="ctr">
-            <a:normAutofit/>
-          </a:bodyPr>
-          <a:lstStyle/>
-          <a:p>
-            <a:pPr indent="0" marL="0">
-              <a:buNone/>
-            </a:pPr>
-            <a:r>
-              <a:rPr lang="en-US" sz="710" b="1" dirty="0">
-                <a:solidFill>
-                  <a:srgbClr val="487052"/>
-                </a:solidFill>
-                <a:latin typeface="Microsoft YaHei" pitchFamily="34" charset="0"/>
-                <a:ea typeface="Microsoft YaHei" pitchFamily="34" charset="-122"/>
-                <a:cs typeface="Microsoft YaHei" pitchFamily="34" charset="-120"/>
-              </a:rPr>
-              <a:t>路线B</a:t>
-            </a:r>
-            <a:endParaRPr lang="en-US" sz="710" dirty="0"/>
-          </a:p>
-        </p:txBody>
-      </p:sp>
-      <p:sp>
-        <p:nvSpPr>
-          <p:cNvPr id="32" name="Text 30"/>
-          <p:cNvSpPr/>
-          <p:nvPr/>
-        </p:nvSpPr>
-        <p:spPr>
-          <a:xfrm>
-            <a:off x="9134856" y="2505456"/>
-            <a:ext cx="1024128" cy="201168"/>
-          </a:xfrm>
-          <a:prstGeom prst="rect">
-            <a:avLst/>
-          </a:prstGeom>
-          <a:noFill/>
-          <a:ln/>
-        </p:spPr>
-        <p:txBody>
-          <a:bodyPr wrap="square" lIns="0" tIns="0" rIns="0" bIns="0" rtlCol="0" anchor="t">
-            <a:normAutofit/>
-          </a:bodyPr>
-          <a:lstStyle/>
-          <a:p>
-            <a:pPr indent="0" marL="0">
-              <a:buNone/>
-            </a:pPr>
-            <a:r>
-              <a:rPr lang="en-US" sz="670" dirty="0">
-                <a:solidFill>
-                  <a:srgbClr val="121212"/>
-                </a:solidFill>
-                <a:latin typeface="Microsoft YaHei" pitchFamily="34" charset="0"/>
-                <a:ea typeface="Microsoft YaHei" pitchFamily="34" charset="-122"/>
-                <a:cs typeface="Microsoft YaHei" pitchFamily="34" charset="-120"/>
-              </a:rPr>
-              <a:t>但普通磷酸铁锂产品仍面临产</a:t>
-            </a:r>
-            <a:endParaRPr lang="en-US" sz="670" dirty="0"/>
-          </a:p>
-        </p:txBody>
-      </p:sp>
-      <p:sp>
-        <p:nvSpPr>
-          <p:cNvPr id="33" name="Shape 31"/>
-          <p:cNvSpPr/>
-          <p:nvPr/>
-        </p:nvSpPr>
-        <p:spPr>
-          <a:xfrm>
-            <a:off x="7818120" y="2980944"/>
-            <a:ext cx="1243584" cy="804672"/>
-          </a:xfrm>
-          <a:prstGeom prst="rect">
-            <a:avLst/>
-          </a:prstGeom>
-          <a:solidFill>
-            <a:srgbClr val="FFFFFF"/>
-          </a:solidFill>
-          <a:ln w="3810">
-            <a:solidFill>
-              <a:srgbClr val="DADADA"/>
-            </a:solidFill>
-            <a:prstDash val="solid"/>
-          </a:ln>
-        </p:spPr>
-      </p:sp>
-      <p:sp>
-        <p:nvSpPr>
-          <p:cNvPr id="34" name="Text 32"/>
-          <p:cNvSpPr/>
-          <p:nvPr/>
-        </p:nvSpPr>
-        <p:spPr>
-          <a:xfrm>
-            <a:off x="7891272" y="3090672"/>
-            <a:ext cx="438912" cy="109728"/>
-          </a:xfrm>
-          <a:prstGeom prst="rect">
-            <a:avLst/>
-          </a:prstGeom>
-          <a:noFill/>
-          <a:ln/>
-        </p:spPr>
-        <p:txBody>
-          <a:bodyPr wrap="square" lIns="0" tIns="0" rIns="0" bIns="0" rtlCol="0" anchor="ctr">
-            <a:normAutofit/>
-          </a:bodyPr>
-          <a:lstStyle/>
-          <a:p>
-            <a:pPr indent="0" marL="0">
-              <a:buNone/>
-            </a:pPr>
-            <a:r>
-              <a:rPr lang="en-US" sz="710" b="1" dirty="0">
-                <a:solidFill>
-                  <a:srgbClr val="487052"/>
-                </a:solidFill>
-                <a:latin typeface="Microsoft YaHei" pitchFamily="34" charset="0"/>
-                <a:ea typeface="Microsoft YaHei" pitchFamily="34" charset="-122"/>
-                <a:cs typeface="Microsoft YaHei" pitchFamily="34" charset="-120"/>
-              </a:rPr>
-              <a:t>机会</a:t>
-            </a:r>
-            <a:endParaRPr lang="en-US" sz="710" dirty="0"/>
-          </a:p>
-        </p:txBody>
-      </p:sp>
-      <p:sp>
-        <p:nvSpPr>
-          <p:cNvPr id="35" name="Text 33"/>
-          <p:cNvSpPr/>
-          <p:nvPr/>
-        </p:nvSpPr>
-        <p:spPr>
-          <a:xfrm>
-            <a:off x="7891272" y="3310128"/>
-            <a:ext cx="1024128" cy="201168"/>
-          </a:xfrm>
-          <a:prstGeom prst="rect">
-            <a:avLst/>
-          </a:prstGeom>
-          <a:noFill/>
-          <a:ln/>
-        </p:spPr>
-        <p:txBody>
-          <a:bodyPr wrap="square" lIns="0" tIns="0" rIns="0" bIns="0" rtlCol="0" anchor="t">
-            <a:normAutofit/>
-          </a:bodyPr>
-          <a:lstStyle/>
-          <a:p>
-            <a:pPr indent="0" marL="0">
-              <a:buNone/>
-            </a:pPr>
-            <a:r>
-              <a:rPr lang="en-US" sz="670" dirty="0">
-                <a:solidFill>
-                  <a:srgbClr val="121212"/>
-                </a:solidFill>
-                <a:latin typeface="Microsoft YaHei" pitchFamily="34" charset="0"/>
-                <a:ea typeface="Microsoft YaHei" pitchFamily="34" charset="-122"/>
-                <a:cs typeface="Microsoft YaHei" pitchFamily="34" charset="-120"/>
-              </a:rPr>
-              <a:t>高压实产品溢价能否持续取决</a:t>
-            </a:r>
-            <a:endParaRPr lang="en-US" sz="670" dirty="0"/>
-          </a:p>
-        </p:txBody>
-      </p:sp>
-      <p:sp>
-        <p:nvSpPr>
-          <p:cNvPr id="36" name="Shape 34"/>
-          <p:cNvSpPr/>
-          <p:nvPr/>
-        </p:nvSpPr>
-        <p:spPr>
-          <a:xfrm>
-            <a:off x="9061704" y="2980944"/>
-            <a:ext cx="1243584" cy="804672"/>
-          </a:xfrm>
-          <a:prstGeom prst="rect">
-            <a:avLst/>
-          </a:prstGeom>
-          <a:solidFill>
-            <a:srgbClr val="F4FAF6"/>
-          </a:solidFill>
-          <a:ln w="3810">
-            <a:solidFill>
-              <a:srgbClr val="DADADA"/>
-            </a:solidFill>
-            <a:prstDash val="solid"/>
-          </a:ln>
-        </p:spPr>
-      </p:sp>
-      <p:sp>
-        <p:nvSpPr>
-          <p:cNvPr id="37" name="Text 35"/>
-          <p:cNvSpPr/>
-          <p:nvPr/>
-        </p:nvSpPr>
-        <p:spPr>
-          <a:xfrm>
-            <a:off x="9134856" y="3090672"/>
-            <a:ext cx="438912" cy="109728"/>
-          </a:xfrm>
-          <a:prstGeom prst="rect">
-            <a:avLst/>
-          </a:prstGeom>
-          <a:noFill/>
-          <a:ln/>
-        </p:spPr>
-        <p:txBody>
-          <a:bodyPr wrap="square" lIns="0" tIns="0" rIns="0" bIns="0" rtlCol="0" anchor="ctr">
-            <a:normAutofit/>
-          </a:bodyPr>
-          <a:lstStyle/>
-          <a:p>
-            <a:pPr indent="0" marL="0">
-              <a:buNone/>
-            </a:pPr>
-            <a:r>
-              <a:rPr lang="en-US" sz="710" b="1" dirty="0">
-                <a:solidFill>
-                  <a:srgbClr val="487052"/>
-                </a:solidFill>
-                <a:latin typeface="Microsoft YaHei" pitchFamily="34" charset="0"/>
-                <a:ea typeface="Microsoft YaHei" pitchFamily="34" charset="-122"/>
-                <a:cs typeface="Microsoft YaHei" pitchFamily="34" charset="-120"/>
-              </a:rPr>
-              <a:t>约束</a:t>
-            </a:r>
-            <a:endParaRPr lang="en-US" sz="710" dirty="0"/>
-          </a:p>
-        </p:txBody>
-      </p:sp>
-      <p:sp>
-        <p:nvSpPr>
-          <p:cNvPr id="38" name="Text 36"/>
-          <p:cNvSpPr/>
-          <p:nvPr/>
-        </p:nvSpPr>
-        <p:spPr>
-          <a:xfrm>
-            <a:off x="9134856" y="3310128"/>
-            <a:ext cx="1024128" cy="201168"/>
-          </a:xfrm>
-          <a:prstGeom prst="rect">
-            <a:avLst/>
-          </a:prstGeom>
-          <a:noFill/>
-          <a:ln/>
-        </p:spPr>
-        <p:txBody>
-          <a:bodyPr wrap="square" lIns="0" tIns="0" rIns="0" bIns="0" rtlCol="0" anchor="t">
-            <a:normAutofit/>
-          </a:bodyPr>
-          <a:lstStyle/>
-          <a:p>
-            <a:pPr indent="0" marL="0">
-              <a:buNone/>
-            </a:pPr>
-            <a:r>
-              <a:rPr lang="en-US" sz="670" dirty="0">
-                <a:solidFill>
-                  <a:srgbClr val="121212"/>
-                </a:solidFill>
-                <a:latin typeface="Microsoft YaHei" pitchFamily="34" charset="0"/>
-                <a:ea typeface="Microsoft YaHei" pitchFamily="34" charset="-122"/>
-                <a:cs typeface="Microsoft YaHei" pitchFamily="34" charset="-120"/>
-              </a:rPr>
-              <a:t>四代高压实产品及五代超高压</a:t>
-            </a:r>
-            <a:endParaRPr lang="en-US" sz="670" dirty="0"/>
-          </a:p>
-        </p:txBody>
-      </p:sp>
-      <p:sp>
-        <p:nvSpPr>
-          <p:cNvPr id="39" name="Text 37"/>
-          <p:cNvSpPr/>
-          <p:nvPr/>
-        </p:nvSpPr>
-        <p:spPr>
-          <a:xfrm>
-            <a:off x="7726680" y="4187952"/>
-            <a:ext cx="2697480" cy="493776"/>
-          </a:xfrm>
-          <a:prstGeom prst="rect">
-            <a:avLst/>
-          </a:prstGeom>
-          <a:noFill/>
-          <a:ln/>
-        </p:spPr>
-        <p:txBody>
-          <a:bodyPr wrap="square" lIns="0" tIns="0" rIns="0" bIns="0" rtlCol="0" anchor="t">
-            <a:normAutofit/>
-          </a:bodyPr>
-          <a:lstStyle/>
-          <a:p>
-            <a:pPr indent="0" marL="0">
-              <a:buNone/>
-            </a:pPr>
-            <a:r>
-              <a:rPr lang="en-US" sz="760" dirty="0">
+              <a:rPr lang="en-US" sz="800" dirty="0">
                 <a:solidFill>
                   <a:srgbClr val="6D756F"/>
                 </a:solidFill>
@@ -15755,15 +15381,15 @@
                 <a:ea typeface="Microsoft YaHei" pitchFamily="34" charset="-122"/>
                 <a:cs typeface="Microsoft YaHei" pitchFamily="34" charset="-120"/>
               </a:rPr>
-              <a:t>检测到对比/分类信号，用矩阵压缩呈现，不新增外部判断。</a:t>
-            </a:r>
-            <a:endParaRPr lang="en-US" sz="760" dirty="0"/>
-          </a:p>
-        </p:txBody>
-      </p:sp>
-      <p:sp>
-        <p:nvSpPr>
-          <p:cNvPr id="40" name="Shape 38"/>
+              <a:t>阅读提示：仅按公开报道原文呈现；不同企业、时间和统计范围不可直接横向比较。</a:t>
+            </a:r>
+            <a:endParaRPr lang="en-US" sz="800" dirty="0"/>
+          </a:p>
+        </p:txBody>
+      </p:sp>
+      <p:sp>
+        <p:nvSpPr>
+          <p:cNvPr id="29" name="Shape 27"/>
           <p:cNvSpPr/>
           <p:nvPr/>
         </p:nvSpPr>
@@ -15788,7 +15414,7 @@
       </p:sp>
       <p:sp>
         <p:nvSpPr>
-          <p:cNvPr id="41" name="Text 39"/>
+          <p:cNvPr id="30" name="Text 28"/>
           <p:cNvSpPr/>
           <p:nvPr/>
         </p:nvSpPr>
@@ -15827,7 +15453,7 @@
       </p:sp>
       <p:sp>
         <p:nvSpPr>
-          <p:cNvPr id="42" name="Text 40"/>
+          <p:cNvPr id="31" name="Text 29"/>
           <p:cNvSpPr/>
           <p:nvPr/>
         </p:nvSpPr>
@@ -15860,7 +15486,7 @@
                 <a:ea typeface="Microsoft YaHei" pitchFamily="34" charset="-122"/>
                 <a:cs typeface="Microsoft YaHei" pitchFamily="34" charset="-120"/>
               </a:rPr>
-              <a:t>若高压实产品供给紧张延续且下游需求保持增长，则高压实产品价格溢价可能维持，头部企业盈利韧性优于行业平均</a:t>
+              <a:t>若碳酸锂价格继续下跌，则磷酸铁锂价格可能进一步承压，高成本产能或退出</a:t>
             </a:r>
             <a:endParaRPr lang="en-US" sz="1020" dirty="0"/>
           </a:p>
@@ -16009,7 +15635,7 @@
                 <a:ea typeface="Aptos" pitchFamily="34" charset="-122"/>
                 <a:cs typeface="Aptos" pitchFamily="34" charset="-120"/>
               </a:rPr>
-              <a:t>2026-10-08</a:t>
+              <a:t>2026-10-12</a:t>
             </a:r>
             <a:endParaRPr lang="en-US" sz="800" dirty="0"/>
           </a:p>
@@ -16215,7 +15841,7 @@
                 <a:ea typeface="Microsoft YaHei" pitchFamily="34" charset="-122"/>
                 <a:cs typeface="Microsoft YaHei" pitchFamily="34" charset="-120"/>
               </a:rPr>
-              <a:t>2 条公开来源交叉验证｜事实、影响与后续研判</a:t>
+              <a:t>3 条公开来源交叉验证｜事实、影响与后续研判</a:t>
             </a:r>
             <a:endParaRPr lang="en-US" sz="860" dirty="0"/>
           </a:p>
@@ -16324,7 +15950,7 @@
                 <a:ea typeface="Microsoft YaHei" pitchFamily="34" charset="-122"/>
                 <a:cs typeface="Microsoft YaHei" pitchFamily="34" charset="-120"/>
               </a:rPr>
-              <a:t>超九成动力电池回收企业将出局，从“二手复用”到“回炉重炼”面临核心技术和资金门槛；同时新型电池鼓励政策落地，政策端呈现“鼓励先进、淘汰落后”的双向调节。回收端出清可能短期减少锂盐供给，长期提升行业规范度，但中小企业退出可能带来就业和区域经济压力。 [2][4]</a:t>
+              <a:t>欧盟要求中国自限插混出口，贸易政策风险升温；国内出台19项举措推进新质生产力，动力电池政策环境总体支持；法国电池谷争抢中国企业，显示海外本地化需求。政策博弈可能影响磷酸铁锂出口预期。 [4][8][9]</a:t>
             </a:r>
             <a:endParaRPr lang="en-US" sz="960" dirty="0"/>
           </a:p>
@@ -16365,7 +15991,7 @@
                 <a:ea typeface="Aptos" pitchFamily="34" charset="-122"/>
                 <a:cs typeface="Aptos" pitchFamily="34" charset="-120"/>
               </a:rPr>
-              <a:t>依据：[2][4]</a:t>
+              <a:t>依据：[4][8][9]</a:t>
             </a:r>
             <a:endParaRPr lang="en-US" sz="740" dirty="0"/>
           </a:p>
@@ -16474,7 +16100,7 @@
                 <a:ea typeface="Microsoft YaHei" pitchFamily="34" charset="-122"/>
                 <a:cs typeface="Microsoft YaHei" pitchFamily="34" charset="-120"/>
               </a:rPr>
-              <a:t>该信号与今日结论中的回收政策收紧直接相关：回收企业大量出局意味着锂资源循环利用效率短期下降，可能推高锂盐现货价格，进而传导至磷酸铁锂正极材料成本。需要验证的是政策执行的具体时间表、回收企业退出的实际数量及锂盐供给缺口的量化影响，以及新型电池鼓励政策对磷酸铁锂技术路线的具体支持方向。</a:t>
+              <a:t>欧盟自限要求若落地，将直接限制插混车型出口，进而影响配套磷酸铁锂电池需求；国内新质生产力举措可能利好技术升级，但海外本地化生产要求增加合规成本。需验证：欧盟政策具体条款、国内政策落地细节。</a:t>
             </a:r>
             <a:endParaRPr lang="en-US" sz="960" dirty="0"/>
           </a:p>
@@ -16608,7 +16234,7 @@
                 <a:ea typeface="Microsoft YaHei" pitchFamily="34" charset="-122"/>
                 <a:cs typeface="Microsoft YaHei" pitchFamily="34" charset="-120"/>
               </a:rPr>
-              <a:t>若回收企业出清速度超预期且锂盐供给缺口扩大，则磷酸铁锂正极材料成本可能面临上行压力，头部企业凭借规模优势可能进一步巩固地位；跟踪指标包括回收企业退出数量、锂盐现货价格及政策执行细则；证据边界在于政策落地节奏和实际执行力度可能因地方差异而不同。</a:t>
+              <a:t>若欧盟自限政策实施，则插混出口量可能下滑，磷酸铁锂需求受拖累；若国内新质生产力举措加大研发支持，则技术领先企业可能受益。跟踪指标：欧盟政策文本、插混出口数据。</a:t>
             </a:r>
             <a:endParaRPr lang="en-US" sz="960" dirty="0"/>
           </a:p>
@@ -16783,7 +16409,7 @@
                 <a:ea typeface="Microsoft YaHei" pitchFamily="34" charset="-122"/>
                 <a:cs typeface="Microsoft YaHei" pitchFamily="34" charset="-120"/>
               </a:rPr>
-              <a:t>超九成动力电池回收企业将出局，从“</a:t>
+              <a:t>欧盟要求中国自限插混出口，贸易政策</a:t>
             </a:r>
             <a:endParaRPr lang="en-US" sz="660" dirty="0"/>
           </a:p>
@@ -16890,7 +16516,7 @@
                 <a:ea typeface="Microsoft YaHei" pitchFamily="34" charset="-122"/>
                 <a:cs typeface="Microsoft YaHei" pitchFamily="34" charset="-120"/>
               </a:rPr>
-              <a:t>同时新型电池鼓励政策落地，政策端呈</a:t>
+              <a:t>国内出台19项举措推进新质生产力，</a:t>
             </a:r>
             <a:endParaRPr lang="en-US" sz="660" dirty="0"/>
           </a:p>
@@ -16997,7 +16623,7 @@
                 <a:ea typeface="Microsoft YaHei" pitchFamily="34" charset="-122"/>
                 <a:cs typeface="Microsoft YaHei" pitchFamily="34" charset="-120"/>
               </a:rPr>
-              <a:t>回收端出清可能短期减少锂盐供给，长</a:t>
+              <a:t>法国电池谷争抢中国企业，显示海外本</a:t>
             </a:r>
             <a:endParaRPr lang="en-US" sz="660" dirty="0"/>
           </a:p>
@@ -17102,7 +16728,7 @@
                 <a:ea typeface="Microsoft YaHei" pitchFamily="34" charset="-122"/>
                 <a:cs typeface="Microsoft YaHei" pitchFamily="34" charset="-120"/>
               </a:rPr>
-              <a:t>若回收企业出清速度超预期且锂盐供给缺口扩大，则磷酸铁锂正极材料成本可能面临上行压力，头部企业凭借规模优势可能进一步巩固地位</a:t>
+              <a:t>若欧盟自限政策实施，则插混出口量可能下滑，磷酸铁锂需求受拖累</a:t>
             </a:r>
             <a:endParaRPr lang="en-US" sz="1020" dirty="0"/>
           </a:p>
@@ -17251,7 +16877,7 @@
                 <a:ea typeface="Aptos" pitchFamily="34" charset="-122"/>
                 <a:cs typeface="Aptos" pitchFamily="34" charset="-120"/>
               </a:rPr>
-              <a:t>2026-10-08</a:t>
+              <a:t>2026-10-12</a:t>
             </a:r>
             <a:endParaRPr lang="en-US" sz="800" dirty="0"/>
           </a:p>
@@ -17457,7 +17083,7 @@
                 <a:ea typeface="Microsoft YaHei" pitchFamily="34" charset="-122"/>
                 <a:cs typeface="Microsoft YaHei" pitchFamily="34" charset="-120"/>
               </a:rPr>
-              <a:t>1 条公开来源交叉验证｜事实、影响与后续研判</a:t>
+              <a:t>2 条公开来源交叉验证｜事实、影响与后续研判</a:t>
             </a:r>
             <a:endParaRPr lang="en-US" sz="860" dirty="0"/>
           </a:p>
@@ -17566,7 +17192,7 @@
                 <a:ea typeface="Microsoft YaHei" pitchFamily="34" charset="-122"/>
                 <a:cs typeface="Microsoft YaHei" pitchFamily="34" charset="-120"/>
               </a:rPr>
-              <a:t>磷酸锰铁锂（LMFP）暂不适合大面积替代磷酸铁锂，因其正极良率与成本尚未降至接近高压实LFP水平；高压实磷酸铁锂仍是当前主流技术路线，LMFP商业化仍需突破良率和成本瓶颈。竞品替代压力短期有限，但长期需关注LMFP技术进步。 [3]</a:t>
+              <a:t>吉利开卖电芯，车企自供电池趋势增强，可能挤压第三方磷酸铁锂供应商份额；法国电池谷争抢中国企业，海外竞争加剧。竞品动态显示行业垂直整合与全球化布局并行。 [5][9]</a:t>
             </a:r>
             <a:endParaRPr lang="en-US" sz="960" dirty="0"/>
           </a:p>
@@ -17607,7 +17233,7 @@
                 <a:ea typeface="Aptos" pitchFamily="34" charset="-122"/>
                 <a:cs typeface="Aptos" pitchFamily="34" charset="-120"/>
               </a:rPr>
-              <a:t>依据：[3]</a:t>
+              <a:t>依据：[5][9]</a:t>
             </a:r>
             <a:endParaRPr lang="en-US" sz="740" dirty="0"/>
           </a:p>
@@ -17716,7 +17342,7 @@
                 <a:ea typeface="Microsoft YaHei" pitchFamily="34" charset="-122"/>
                 <a:cs typeface="Microsoft YaHei" pitchFamily="34" charset="-120"/>
               </a:rPr>
-              <a:t>该信号与今日技术路线判断一致：LMFP替代受限意味着磷酸铁锂体系在中期内仍将主导，头部磷酸铁锂材料企业的技术投入可能继续聚焦高压实方向。需要验证的是LMFP在良率和成本上的改进速度、是否有头部电池厂启动LMFP量产导入，以及LMFP在特定应用场景（如高能量密度需求）的渗透情况。</a:t>
+              <a:t>吉利作为车企自供电芯，可能优先采购自家产品，影响外部磷酸铁锂订单；法国电池谷招商反映欧洲本地化生产需求，中国企业出海面临竞争与合作。需验证：吉利电芯技术来源、法国电池谷招商政策。</a:t>
             </a:r>
             <a:endParaRPr lang="en-US" sz="960" dirty="0"/>
           </a:p>
@@ -17850,7 +17476,7 @@
                 <a:ea typeface="Microsoft YaHei" pitchFamily="34" charset="-122"/>
                 <a:cs typeface="Microsoft YaHei" pitchFamily="34" charset="-120"/>
               </a:rPr>
-              <a:t>若LMFP良率与成本在未来1-2年内未能显著改善，则磷酸铁锂高压实路线的主导地位可能延续，相关材料企业技术投资回报确定性较高；跟踪指标包括LMFP量产良率、成本对比数据及电池厂技术路线公告；证据边界在于当前LMFP进展信息有限，实际突破可能快于或慢于预期。</a:t>
+              <a:t>若吉利电芯大规模外供，则第三方磷酸铁锂企业客户结构可能恶化；若法国电池谷成功吸引中国企业，则海外产能布局可能加速。跟踪指标：吉利电芯外供量、法国电池谷入驻企业名单。</a:t>
             </a:r>
             <a:endParaRPr lang="en-US" sz="960" dirty="0"/>
           </a:p>
@@ -17918,7 +17544,7 @@
                 <a:ea typeface="Microsoft YaHei" pitchFamily="34" charset="-122"/>
                 <a:cs typeface="Microsoft YaHei" pitchFamily="34" charset="-120"/>
               </a:rPr>
-              <a:t>对比矩阵</a:t>
+              <a:t>路线图</a:t>
             </a:r>
             <a:endParaRPr lang="en-US" sz="1200" dirty="0"/>
           </a:p>
@@ -17932,18 +17558,84 @@
         </p:nvSpPr>
         <p:spPr>
           <a:xfrm>
-            <a:off x="7818120" y="2176272"/>
-            <a:ext cx="2487168" cy="1609344"/>
-          </a:xfrm>
-          <a:prstGeom prst="rect">
+            <a:off x="7754112" y="2249424"/>
+            <a:ext cx="612648" cy="402336"/>
+          </a:xfrm>
+          <a:prstGeom prst="chevron">
+            <a:avLst/>
+          </a:prstGeom>
+          <a:solidFill>
+            <a:srgbClr val="DDEBE0"/>
+          </a:solidFill>
+          <a:ln w="13970">
+            <a:solidFill>
+              <a:srgbClr val="487052"/>
+            </a:solidFill>
+            <a:prstDash val="solid"/>
+          </a:ln>
+        </p:spPr>
+      </p:sp>
+      <p:sp>
+        <p:nvSpPr>
+          <p:cNvPr id="25" name="Text 23"/>
+          <p:cNvSpPr/>
+          <p:nvPr/>
+        </p:nvSpPr>
+        <p:spPr>
+          <a:xfrm>
+            <a:off x="7827264" y="2386584"/>
+            <a:ext cx="448056" cy="109728"/>
+          </a:xfrm>
+          <a:prstGeom prst="rect">
+            <a:avLst/>
+          </a:prstGeom>
+          <a:noFill/>
+          <a:ln/>
+        </p:spPr>
+        <p:txBody>
+          <a:bodyPr wrap="square" lIns="0" tIns="0" rIns="0" bIns="0" rtlCol="0" anchor="ctr">
+            <a:normAutofit/>
+          </a:bodyPr>
+          <a:lstStyle/>
+          <a:p>
+            <a:pPr algn="ctr" indent="0" marL="0">
+              <a:buNone/>
+            </a:pPr>
+            <a:r>
+              <a:rPr lang="en-US" sz="670" b="1" dirty="0">
+                <a:solidFill>
+                  <a:srgbClr val="121212"/>
+                </a:solidFill>
+                <a:latin typeface="Microsoft YaHei" pitchFamily="34" charset="0"/>
+                <a:ea typeface="Microsoft YaHei" pitchFamily="34" charset="-122"/>
+                <a:cs typeface="Microsoft YaHei" pitchFamily="34" charset="-120"/>
+              </a:rPr>
+              <a:t>技术</a:t>
+            </a:r>
+            <a:endParaRPr lang="en-US" sz="670" dirty="0"/>
+          </a:p>
+        </p:txBody>
+      </p:sp>
+      <p:sp>
+        <p:nvSpPr>
+          <p:cNvPr id="26" name="Shape 24"/>
+          <p:cNvSpPr/>
+          <p:nvPr/>
+        </p:nvSpPr>
+        <p:spPr>
+          <a:xfrm>
+            <a:off x="8375904" y="2249424"/>
+            <a:ext cx="612648" cy="402336"/>
+          </a:xfrm>
+          <a:prstGeom prst="chevron">
             <a:avLst/>
           </a:prstGeom>
           <a:solidFill>
             <a:srgbClr val="FFFFFF"/>
           </a:solidFill>
-          <a:ln w="10160">
+          <a:ln w="13970">
             <a:solidFill>
-              <a:srgbClr val="DADADA"/>
+              <a:srgbClr val="487052"/>
             </a:solidFill>
             <a:prstDash val="solid"/>
           </a:ln>
@@ -17951,22 +17643,65 @@
       </p:sp>
       <p:sp>
         <p:nvSpPr>
-          <p:cNvPr id="25" name="Shape 23"/>
-          <p:cNvSpPr/>
-          <p:nvPr/>
-        </p:nvSpPr>
-        <p:spPr>
-          <a:xfrm>
-            <a:off x="9061704" y="2176272"/>
-            <a:ext cx="0" cy="1609344"/>
-          </a:xfrm>
-          <a:prstGeom prst="line">
-            <a:avLst/>
-          </a:prstGeom>
-          <a:noFill/>
-          <a:ln w="8890">
+          <p:cNvPr id="27" name="Text 25"/>
+          <p:cNvSpPr/>
+          <p:nvPr/>
+        </p:nvSpPr>
+        <p:spPr>
+          <a:xfrm>
+            <a:off x="8449056" y="2386584"/>
+            <a:ext cx="448056" cy="109728"/>
+          </a:xfrm>
+          <a:prstGeom prst="rect">
+            <a:avLst/>
+          </a:prstGeom>
+          <a:noFill/>
+          <a:ln/>
+        </p:spPr>
+        <p:txBody>
+          <a:bodyPr wrap="square" lIns="0" tIns="0" rIns="0" bIns="0" rtlCol="0" anchor="ctr">
+            <a:normAutofit/>
+          </a:bodyPr>
+          <a:lstStyle/>
+          <a:p>
+            <a:pPr algn="ctr" indent="0" marL="0">
+              <a:buNone/>
+            </a:pPr>
+            <a:r>
+              <a:rPr lang="en-US" sz="670" b="1" dirty="0">
+                <a:solidFill>
+                  <a:srgbClr val="121212"/>
+                </a:solidFill>
+                <a:latin typeface="Microsoft YaHei" pitchFamily="34" charset="0"/>
+                <a:ea typeface="Microsoft YaHei" pitchFamily="34" charset="-122"/>
+                <a:cs typeface="Microsoft YaHei" pitchFamily="34" charset="-120"/>
+              </a:rPr>
+              <a:t>产品</a:t>
+            </a:r>
+            <a:endParaRPr lang="en-US" sz="670" dirty="0"/>
+          </a:p>
+        </p:txBody>
+      </p:sp>
+      <p:sp>
+        <p:nvSpPr>
+          <p:cNvPr id="28" name="Shape 26"/>
+          <p:cNvSpPr/>
+          <p:nvPr/>
+        </p:nvSpPr>
+        <p:spPr>
+          <a:xfrm>
+            <a:off x="8997696" y="2249424"/>
+            <a:ext cx="612648" cy="402336"/>
+          </a:xfrm>
+          <a:prstGeom prst="chevron">
+            <a:avLst/>
+          </a:prstGeom>
+          <a:solidFill>
+            <a:srgbClr val="FFFFFF"/>
+          </a:solidFill>
+          <a:ln w="13970">
             <a:solidFill>
-              <a:srgbClr val="DADADA"/>
+              <a:srgbClr val="487052"/>
             </a:solidFill>
             <a:prstDash val="solid"/>
           </a:ln>
@@ -17974,22 +17709,65 @@
       </p:sp>
       <p:sp>
         <p:nvSpPr>
-          <p:cNvPr id="26" name="Shape 24"/>
-          <p:cNvSpPr/>
-          <p:nvPr/>
-        </p:nvSpPr>
-        <p:spPr>
-          <a:xfrm>
-            <a:off x="7818120" y="2980944"/>
-            <a:ext cx="2487168" cy="0"/>
-          </a:xfrm>
-          <a:prstGeom prst="line">
-            <a:avLst/>
-          </a:prstGeom>
-          <a:noFill/>
-          <a:ln w="8890">
+          <p:cNvPr id="29" name="Text 27"/>
+          <p:cNvSpPr/>
+          <p:nvPr/>
+        </p:nvSpPr>
+        <p:spPr>
+          <a:xfrm>
+            <a:off x="9070848" y="2386584"/>
+            <a:ext cx="448056" cy="109728"/>
+          </a:xfrm>
+          <a:prstGeom prst="rect">
+            <a:avLst/>
+          </a:prstGeom>
+          <a:noFill/>
+          <a:ln/>
+        </p:spPr>
+        <p:txBody>
+          <a:bodyPr wrap="square" lIns="0" tIns="0" rIns="0" bIns="0" rtlCol="0" anchor="ctr">
+            <a:normAutofit/>
+          </a:bodyPr>
+          <a:lstStyle/>
+          <a:p>
+            <a:pPr algn="ctr" indent="0" marL="0">
+              <a:buNone/>
+            </a:pPr>
+            <a:r>
+              <a:rPr lang="en-US" sz="670" b="1" dirty="0">
+                <a:solidFill>
+                  <a:srgbClr val="121212"/>
+                </a:solidFill>
+                <a:latin typeface="Microsoft YaHei" pitchFamily="34" charset="0"/>
+                <a:ea typeface="Microsoft YaHei" pitchFamily="34" charset="-122"/>
+                <a:cs typeface="Microsoft YaHei" pitchFamily="34" charset="-120"/>
+              </a:rPr>
+              <a:t>验证</a:t>
+            </a:r>
+            <a:endParaRPr lang="en-US" sz="670" dirty="0"/>
+          </a:p>
+        </p:txBody>
+      </p:sp>
+      <p:sp>
+        <p:nvSpPr>
+          <p:cNvPr id="30" name="Shape 28"/>
+          <p:cNvSpPr/>
+          <p:nvPr/>
+        </p:nvSpPr>
+        <p:spPr>
+          <a:xfrm>
+            <a:off x="9619488" y="2249424"/>
+            <a:ext cx="612648" cy="402336"/>
+          </a:xfrm>
+          <a:prstGeom prst="chevron">
+            <a:avLst/>
+          </a:prstGeom>
+          <a:solidFill>
+            <a:srgbClr val="FFFFFF"/>
+          </a:solidFill>
+          <a:ln w="13970">
             <a:solidFill>
-              <a:srgbClr val="DADADA"/>
+              <a:srgbClr val="487052"/>
             </a:solidFill>
             <a:prstDash val="solid"/>
           </a:ln>
@@ -17997,24 +17775,63 @@
       </p:sp>
       <p:sp>
         <p:nvSpPr>
-          <p:cNvPr id="27" name="Shape 25"/>
-          <p:cNvSpPr/>
-          <p:nvPr/>
-        </p:nvSpPr>
-        <p:spPr>
-          <a:xfrm>
-            <a:off x="7818120" y="2176272"/>
-            <a:ext cx="1243584" cy="804672"/>
-          </a:xfrm>
-          <a:prstGeom prst="rect">
-            <a:avLst/>
-          </a:prstGeom>
-          <a:solidFill>
-            <a:srgbClr val="DDEBE0"/>
-          </a:solidFill>
-          <a:ln w="3810">
+          <p:cNvPr id="31" name="Text 29"/>
+          <p:cNvSpPr/>
+          <p:nvPr/>
+        </p:nvSpPr>
+        <p:spPr>
+          <a:xfrm>
+            <a:off x="9692640" y="2386584"/>
+            <a:ext cx="448056" cy="109728"/>
+          </a:xfrm>
+          <a:prstGeom prst="rect">
+            <a:avLst/>
+          </a:prstGeom>
+          <a:noFill/>
+          <a:ln/>
+        </p:spPr>
+        <p:txBody>
+          <a:bodyPr wrap="square" lIns="0" tIns="0" rIns="0" bIns="0" rtlCol="0" anchor="ctr">
+            <a:normAutofit/>
+          </a:bodyPr>
+          <a:lstStyle/>
+          <a:p>
+            <a:pPr algn="ctr" indent="0" marL="0">
+              <a:buNone/>
+            </a:pPr>
+            <a:r>
+              <a:rPr lang="en-US" sz="670" b="1" dirty="0">
+                <a:solidFill>
+                  <a:srgbClr val="121212"/>
+                </a:solidFill>
+                <a:latin typeface="Microsoft YaHei" pitchFamily="34" charset="0"/>
+                <a:ea typeface="Microsoft YaHei" pitchFamily="34" charset="-122"/>
+                <a:cs typeface="Microsoft YaHei" pitchFamily="34" charset="-120"/>
+              </a:rPr>
+              <a:t>量产</a:t>
+            </a:r>
+            <a:endParaRPr lang="en-US" sz="670" dirty="0"/>
+          </a:p>
+        </p:txBody>
+      </p:sp>
+      <p:sp>
+        <p:nvSpPr>
+          <p:cNvPr id="32" name="Shape 30"/>
+          <p:cNvSpPr/>
+          <p:nvPr/>
+        </p:nvSpPr>
+        <p:spPr>
+          <a:xfrm>
+            <a:off x="7882128" y="3063240"/>
+            <a:ext cx="2331720" cy="0"/>
+          </a:xfrm>
+          <a:prstGeom prst="line">
+            <a:avLst/>
+          </a:prstGeom>
+          <a:noFill/>
+          <a:ln w="13970">
             <a:solidFill>
-              <a:srgbClr val="DADADA"/>
+              <a:srgbClr val="7F9D84"/>
             </a:solidFill>
             <a:prstDash val="solid"/>
           </a:ln>
@@ -18022,106 +17839,24 @@
       </p:sp>
       <p:sp>
         <p:nvSpPr>
-          <p:cNvPr id="28" name="Text 26"/>
-          <p:cNvSpPr/>
-          <p:nvPr/>
-        </p:nvSpPr>
-        <p:spPr>
-          <a:xfrm>
-            <a:off x="7891272" y="2286000"/>
-            <a:ext cx="438912" cy="109728"/>
-          </a:xfrm>
-          <a:prstGeom prst="rect">
-            <a:avLst/>
-          </a:prstGeom>
-          <a:noFill/>
-          <a:ln/>
-        </p:spPr>
-        <p:txBody>
-          <a:bodyPr wrap="square" lIns="0" tIns="0" rIns="0" bIns="0" rtlCol="0" anchor="ctr">
-            <a:normAutofit/>
-          </a:bodyPr>
-          <a:lstStyle/>
-          <a:p>
-            <a:pPr indent="0" marL="0">
-              <a:buNone/>
-            </a:pPr>
-            <a:r>
-              <a:rPr lang="en-US" sz="710" b="1" dirty="0">
-                <a:solidFill>
-                  <a:srgbClr val="487052"/>
-                </a:solidFill>
-                <a:latin typeface="Microsoft YaHei" pitchFamily="34" charset="0"/>
-                <a:ea typeface="Microsoft YaHei" pitchFamily="34" charset="-122"/>
-                <a:cs typeface="Microsoft YaHei" pitchFamily="34" charset="-120"/>
-              </a:rPr>
-              <a:t>路线A</a:t>
-            </a:r>
-            <a:endParaRPr lang="en-US" sz="710" dirty="0"/>
-          </a:p>
-        </p:txBody>
-      </p:sp>
-      <p:sp>
-        <p:nvSpPr>
-          <p:cNvPr id="29" name="Text 27"/>
-          <p:cNvSpPr/>
-          <p:nvPr/>
-        </p:nvSpPr>
-        <p:spPr>
-          <a:xfrm>
-            <a:off x="7891272" y="2505456"/>
-            <a:ext cx="1024128" cy="201168"/>
-          </a:xfrm>
-          <a:prstGeom prst="rect">
-            <a:avLst/>
-          </a:prstGeom>
-          <a:noFill/>
-          <a:ln/>
-        </p:spPr>
-        <p:txBody>
-          <a:bodyPr wrap="square" lIns="0" tIns="0" rIns="0" bIns="0" rtlCol="0" anchor="t">
-            <a:normAutofit/>
-          </a:bodyPr>
-          <a:lstStyle/>
-          <a:p>
-            <a:pPr indent="0" marL="0">
-              <a:buNone/>
-            </a:pPr>
-            <a:r>
-              <a:rPr lang="en-US" sz="670" dirty="0">
-                <a:solidFill>
-                  <a:srgbClr val="121212"/>
-                </a:solidFill>
-                <a:latin typeface="Microsoft YaHei" pitchFamily="34" charset="0"/>
-                <a:ea typeface="Microsoft YaHei" pitchFamily="34" charset="-122"/>
-                <a:cs typeface="Microsoft YaHei" pitchFamily="34" charset="-120"/>
-              </a:rPr>
-              <a:t>磷酸锰铁锂（LMFP）暂不</a:t>
-            </a:r>
-            <a:endParaRPr lang="en-US" sz="670" dirty="0"/>
-          </a:p>
-        </p:txBody>
-      </p:sp>
-      <p:sp>
-        <p:nvSpPr>
-          <p:cNvPr id="30" name="Shape 28"/>
-          <p:cNvSpPr/>
-          <p:nvPr/>
-        </p:nvSpPr>
-        <p:spPr>
-          <a:xfrm>
-            <a:off x="9061704" y="2176272"/>
-            <a:ext cx="1243584" cy="804672"/>
-          </a:xfrm>
-          <a:prstGeom prst="rect">
+          <p:cNvPr id="33" name="Shape 31"/>
+          <p:cNvSpPr/>
+          <p:nvPr/>
+        </p:nvSpPr>
+        <p:spPr>
+          <a:xfrm>
+            <a:off x="7845552" y="2962656"/>
+            <a:ext cx="164592" cy="164592"/>
+          </a:xfrm>
+          <a:prstGeom prst="ellipse">
             <a:avLst/>
           </a:prstGeom>
           <a:solidFill>
-            <a:srgbClr val="FFFFFF"/>
+            <a:srgbClr val="487052"/>
           </a:solidFill>
-          <a:ln w="3810">
+          <a:ln w="12700">
             <a:solidFill>
-              <a:srgbClr val="DADADA"/>
+              <a:srgbClr val="FFFFFF"/>
             </a:solidFill>
             <a:prstDash val="solid"/>
           </a:ln>
@@ -18129,55 +17864,14 @@
       </p:sp>
       <p:sp>
         <p:nvSpPr>
-          <p:cNvPr id="31" name="Text 29"/>
-          <p:cNvSpPr/>
-          <p:nvPr/>
-        </p:nvSpPr>
-        <p:spPr>
-          <a:xfrm>
-            <a:off x="9134856" y="2286000"/>
-            <a:ext cx="438912" cy="109728"/>
-          </a:xfrm>
-          <a:prstGeom prst="rect">
-            <a:avLst/>
-          </a:prstGeom>
-          <a:noFill/>
-          <a:ln/>
-        </p:spPr>
-        <p:txBody>
-          <a:bodyPr wrap="square" lIns="0" tIns="0" rIns="0" bIns="0" rtlCol="0" anchor="ctr">
-            <a:normAutofit/>
-          </a:bodyPr>
-          <a:lstStyle/>
-          <a:p>
-            <a:pPr indent="0" marL="0">
-              <a:buNone/>
-            </a:pPr>
-            <a:r>
-              <a:rPr lang="en-US" sz="710" b="1" dirty="0">
-                <a:solidFill>
-                  <a:srgbClr val="487052"/>
-                </a:solidFill>
-                <a:latin typeface="Microsoft YaHei" pitchFamily="34" charset="0"/>
-                <a:ea typeface="Microsoft YaHei" pitchFamily="34" charset="-122"/>
-                <a:cs typeface="Microsoft YaHei" pitchFamily="34" charset="-120"/>
-              </a:rPr>
-              <a:t>路线B</a:t>
-            </a:r>
-            <a:endParaRPr lang="en-US" sz="710" dirty="0"/>
-          </a:p>
-        </p:txBody>
-      </p:sp>
-      <p:sp>
-        <p:nvSpPr>
-          <p:cNvPr id="32" name="Text 30"/>
-          <p:cNvSpPr/>
-          <p:nvPr/>
-        </p:nvSpPr>
-        <p:spPr>
-          <a:xfrm>
-            <a:off x="9134856" y="2505456"/>
-            <a:ext cx="1024128" cy="201168"/>
+          <p:cNvPr id="34" name="Text 32"/>
+          <p:cNvSpPr/>
+          <p:nvPr/>
+        </p:nvSpPr>
+        <p:spPr>
+          <a:xfrm>
+            <a:off x="7754112" y="3291840"/>
+            <a:ext cx="603504" cy="310896"/>
           </a:xfrm>
           <a:prstGeom prst="rect">
             <a:avLst/>
@@ -18191,7 +17885,7 @@
           </a:bodyPr>
           <a:lstStyle/>
           <a:p>
-            <a:pPr indent="0" marL="0">
+            <a:pPr algn="ctr" indent="0" marL="0">
               <a:buNone/>
             </a:pPr>
             <a:r>
@@ -18203,7 +17897,7 @@
                 <a:ea typeface="Microsoft YaHei" pitchFamily="34" charset="-122"/>
                 <a:cs typeface="Microsoft YaHei" pitchFamily="34" charset="-120"/>
               </a:rPr>
-              <a:t>高压实磷酸铁锂仍是当前主流</a:t>
+              <a:t>吉利开卖电芯，车企自供</a:t>
             </a:r>
             <a:endParaRPr lang="en-US" sz="670" dirty="0"/>
           </a:p>
@@ -18211,24 +17905,24 @@
       </p:sp>
       <p:sp>
         <p:nvSpPr>
-          <p:cNvPr id="33" name="Shape 31"/>
-          <p:cNvSpPr/>
-          <p:nvPr/>
-        </p:nvSpPr>
-        <p:spPr>
-          <a:xfrm>
-            <a:off x="7818120" y="2980944"/>
-            <a:ext cx="1243584" cy="804672"/>
-          </a:xfrm>
-          <a:prstGeom prst="rect">
+          <p:cNvPr id="35" name="Shape 33"/>
+          <p:cNvSpPr/>
+          <p:nvPr/>
+        </p:nvSpPr>
+        <p:spPr>
+          <a:xfrm>
+            <a:off x="8503920" y="2962656"/>
+            <a:ext cx="164592" cy="164592"/>
+          </a:xfrm>
+          <a:prstGeom prst="ellipse">
             <a:avLst/>
           </a:prstGeom>
           <a:solidFill>
-            <a:srgbClr val="FFFFFF"/>
+            <a:srgbClr val="487052"/>
           </a:solidFill>
-          <a:ln w="3810">
+          <a:ln w="12700">
             <a:solidFill>
-              <a:srgbClr val="DADADA"/>
+              <a:srgbClr val="FFFFFF"/>
             </a:solidFill>
             <a:prstDash val="solid"/>
           </a:ln>
@@ -18236,55 +17930,14 @@
       </p:sp>
       <p:sp>
         <p:nvSpPr>
-          <p:cNvPr id="34" name="Text 32"/>
-          <p:cNvSpPr/>
-          <p:nvPr/>
-        </p:nvSpPr>
-        <p:spPr>
-          <a:xfrm>
-            <a:off x="7891272" y="3090672"/>
-            <a:ext cx="438912" cy="109728"/>
-          </a:xfrm>
-          <a:prstGeom prst="rect">
-            <a:avLst/>
-          </a:prstGeom>
-          <a:noFill/>
-          <a:ln/>
-        </p:spPr>
-        <p:txBody>
-          <a:bodyPr wrap="square" lIns="0" tIns="0" rIns="0" bIns="0" rtlCol="0" anchor="ctr">
-            <a:normAutofit/>
-          </a:bodyPr>
-          <a:lstStyle/>
-          <a:p>
-            <a:pPr indent="0" marL="0">
-              <a:buNone/>
-            </a:pPr>
-            <a:r>
-              <a:rPr lang="en-US" sz="710" b="1" dirty="0">
-                <a:solidFill>
-                  <a:srgbClr val="487052"/>
-                </a:solidFill>
-                <a:latin typeface="Microsoft YaHei" pitchFamily="34" charset="0"/>
-                <a:ea typeface="Microsoft YaHei" pitchFamily="34" charset="-122"/>
-                <a:cs typeface="Microsoft YaHei" pitchFamily="34" charset="-120"/>
-              </a:rPr>
-              <a:t>机会</a:t>
-            </a:r>
-            <a:endParaRPr lang="en-US" sz="710" dirty="0"/>
-          </a:p>
-        </p:txBody>
-      </p:sp>
-      <p:sp>
-        <p:nvSpPr>
-          <p:cNvPr id="35" name="Text 33"/>
-          <p:cNvSpPr/>
-          <p:nvPr/>
-        </p:nvSpPr>
-        <p:spPr>
-          <a:xfrm>
-            <a:off x="7891272" y="3310128"/>
-            <a:ext cx="1024128" cy="201168"/>
+          <p:cNvPr id="36" name="Text 34"/>
+          <p:cNvSpPr/>
+          <p:nvPr/>
+        </p:nvSpPr>
+        <p:spPr>
+          <a:xfrm>
+            <a:off x="8412480" y="3291840"/>
+            <a:ext cx="603504" cy="310896"/>
           </a:xfrm>
           <a:prstGeom prst="rect">
             <a:avLst/>
@@ -18298,7 +17951,7 @@
           </a:bodyPr>
           <a:lstStyle/>
           <a:p>
-            <a:pPr indent="0" marL="0">
+            <a:pPr algn="ctr" indent="0" marL="0">
               <a:buNone/>
             </a:pPr>
             <a:r>
@@ -18310,7 +17963,7 @@
                 <a:ea typeface="Microsoft YaHei" pitchFamily="34" charset="-122"/>
                 <a:cs typeface="Microsoft YaHei" pitchFamily="34" charset="-120"/>
               </a:rPr>
-              <a:t>竞品替代压力短期有限，但长</a:t>
+              <a:t>法国电池谷争抢中国企业</a:t>
             </a:r>
             <a:endParaRPr lang="en-US" sz="670" dirty="0"/>
           </a:p>
@@ -18318,24 +17971,24 @@
       </p:sp>
       <p:sp>
         <p:nvSpPr>
-          <p:cNvPr id="36" name="Shape 34"/>
-          <p:cNvSpPr/>
-          <p:nvPr/>
-        </p:nvSpPr>
-        <p:spPr>
-          <a:xfrm>
-            <a:off x="9061704" y="2980944"/>
-            <a:ext cx="1243584" cy="804672"/>
-          </a:xfrm>
-          <a:prstGeom prst="rect">
+          <p:cNvPr id="37" name="Shape 35"/>
+          <p:cNvSpPr/>
+          <p:nvPr/>
+        </p:nvSpPr>
+        <p:spPr>
+          <a:xfrm>
+            <a:off x="9162288" y="2962656"/>
+            <a:ext cx="164592" cy="164592"/>
+          </a:xfrm>
+          <a:prstGeom prst="ellipse">
             <a:avLst/>
           </a:prstGeom>
           <a:solidFill>
-            <a:srgbClr val="F4FAF6"/>
+            <a:srgbClr val="487052"/>
           </a:solidFill>
-          <a:ln w="3810">
+          <a:ln w="12700">
             <a:solidFill>
-              <a:srgbClr val="DADADA"/>
+              <a:srgbClr val="FFFFFF"/>
             </a:solidFill>
             <a:prstDash val="solid"/>
           </a:ln>
@@ -18343,55 +17996,14 @@
       </p:sp>
       <p:sp>
         <p:nvSpPr>
-          <p:cNvPr id="37" name="Text 35"/>
-          <p:cNvSpPr/>
-          <p:nvPr/>
-        </p:nvSpPr>
-        <p:spPr>
-          <a:xfrm>
-            <a:off x="9134856" y="3090672"/>
-            <a:ext cx="438912" cy="109728"/>
-          </a:xfrm>
-          <a:prstGeom prst="rect">
-            <a:avLst/>
-          </a:prstGeom>
-          <a:noFill/>
-          <a:ln/>
-        </p:spPr>
-        <p:txBody>
-          <a:bodyPr wrap="square" lIns="0" tIns="0" rIns="0" bIns="0" rtlCol="0" anchor="ctr">
-            <a:normAutofit/>
-          </a:bodyPr>
-          <a:lstStyle/>
-          <a:p>
-            <a:pPr indent="0" marL="0">
-              <a:buNone/>
-            </a:pPr>
-            <a:r>
-              <a:rPr lang="en-US" sz="710" b="1" dirty="0">
-                <a:solidFill>
-                  <a:srgbClr val="487052"/>
-                </a:solidFill>
-                <a:latin typeface="Microsoft YaHei" pitchFamily="34" charset="0"/>
-                <a:ea typeface="Microsoft YaHei" pitchFamily="34" charset="-122"/>
-                <a:cs typeface="Microsoft YaHei" pitchFamily="34" charset="-120"/>
-              </a:rPr>
-              <a:t>约束</a:t>
-            </a:r>
-            <a:endParaRPr lang="en-US" sz="710" dirty="0"/>
-          </a:p>
-        </p:txBody>
-      </p:sp>
-      <p:sp>
-        <p:nvSpPr>
           <p:cNvPr id="38" name="Text 36"/>
           <p:cNvSpPr/>
           <p:nvPr/>
         </p:nvSpPr>
         <p:spPr>
           <a:xfrm>
-            <a:off x="9134856" y="3310128"/>
-            <a:ext cx="1024128" cy="201168"/>
+            <a:off x="9070848" y="3291840"/>
+            <a:ext cx="603504" cy="310896"/>
           </a:xfrm>
           <a:prstGeom prst="rect">
             <a:avLst/>
@@ -18405,7 +18017,7 @@
           </a:bodyPr>
           <a:lstStyle/>
           <a:p>
-            <a:pPr indent="0" marL="0">
+            <a:pPr algn="ctr" indent="0" marL="0">
               <a:buNone/>
             </a:pPr>
             <a:r>
@@ -18417,7 +18029,7 @@
                 <a:ea typeface="Microsoft YaHei" pitchFamily="34" charset="-122"/>
                 <a:cs typeface="Microsoft YaHei" pitchFamily="34" charset="-120"/>
               </a:rPr>
-              <a:t>磷酸锰铁锂（LMFP）暂不</a:t>
+              <a:t>竞品动态显示行业垂直整</a:t>
             </a:r>
             <a:endParaRPr lang="en-US" sz="670" dirty="0"/>
           </a:p>
@@ -18425,14 +18037,39 @@
       </p:sp>
       <p:sp>
         <p:nvSpPr>
-          <p:cNvPr id="39" name="Text 37"/>
-          <p:cNvSpPr/>
-          <p:nvPr/>
-        </p:nvSpPr>
-        <p:spPr>
-          <a:xfrm>
-            <a:off x="7726680" y="4187952"/>
-            <a:ext cx="2697480" cy="493776"/>
+          <p:cNvPr id="39" name="Shape 37"/>
+          <p:cNvSpPr/>
+          <p:nvPr/>
+        </p:nvSpPr>
+        <p:spPr>
+          <a:xfrm>
+            <a:off x="9820656" y="2962656"/>
+            <a:ext cx="164592" cy="164592"/>
+          </a:xfrm>
+          <a:prstGeom prst="ellipse">
+            <a:avLst/>
+          </a:prstGeom>
+          <a:solidFill>
+            <a:srgbClr val="B85A4A"/>
+          </a:solidFill>
+          <a:ln w="12700">
+            <a:solidFill>
+              <a:srgbClr val="FFFFFF"/>
+            </a:solidFill>
+            <a:prstDash val="solid"/>
+          </a:ln>
+        </p:spPr>
+      </p:sp>
+      <p:sp>
+        <p:nvSpPr>
+          <p:cNvPr id="40" name="Text 38"/>
+          <p:cNvSpPr/>
+          <p:nvPr/>
+        </p:nvSpPr>
+        <p:spPr>
+          <a:xfrm>
+            <a:off x="9729216" y="3291840"/>
+            <a:ext cx="603504" cy="310896"/>
           </a:xfrm>
           <a:prstGeom prst="rect">
             <a:avLst/>
@@ -18446,6 +18083,47 @@
           </a:bodyPr>
           <a:lstStyle/>
           <a:p>
+            <a:pPr algn="ctr" indent="0" marL="0">
+              <a:buNone/>
+            </a:pPr>
+            <a:r>
+              <a:rPr lang="en-US" sz="670" dirty="0">
+                <a:solidFill>
+                  <a:srgbClr val="121212"/>
+                </a:solidFill>
+                <a:latin typeface="Microsoft YaHei" pitchFamily="34" charset="0"/>
+                <a:ea typeface="Microsoft YaHei" pitchFamily="34" charset="-122"/>
+                <a:cs typeface="Microsoft YaHei" pitchFamily="34" charset="-120"/>
+              </a:rPr>
+              <a:t>竞品动态显示行业垂直整</a:t>
+            </a:r>
+            <a:endParaRPr lang="en-US" sz="670" dirty="0"/>
+          </a:p>
+        </p:txBody>
+      </p:sp>
+      <p:sp>
+        <p:nvSpPr>
+          <p:cNvPr id="41" name="Text 39"/>
+          <p:cNvSpPr/>
+          <p:nvPr/>
+        </p:nvSpPr>
+        <p:spPr>
+          <a:xfrm>
+            <a:off x="7726680" y="4315968"/>
+            <a:ext cx="2697480" cy="384048"/>
+          </a:xfrm>
+          <a:prstGeom prst="rect">
+            <a:avLst/>
+          </a:prstGeom>
+          <a:noFill/>
+          <a:ln/>
+        </p:spPr>
+        <p:txBody>
+          <a:bodyPr wrap="square" lIns="0" tIns="0" rIns="0" bIns="0" rtlCol="0" anchor="t">
+            <a:normAutofit/>
+          </a:bodyPr>
+          <a:lstStyle/>
+          <a:p>
             <a:pPr indent="0" marL="0">
               <a:buNone/>
             </a:pPr>
@@ -18458,7 +18136,7 @@
                 <a:ea typeface="Microsoft YaHei" pitchFamily="34" charset="-122"/>
                 <a:cs typeface="Microsoft YaHei" pitchFamily="34" charset="-120"/>
               </a:rPr>
-              <a:t>检测到对比/分类信号，用矩阵压缩呈现，不新增外部判断。</a:t>
+              <a:t>参考培训 PPT 的阶段路线表达，按事件顺序拆成判断路径。</a:t>
             </a:r>
             <a:endParaRPr lang="en-US" sz="760" dirty="0"/>
           </a:p>
@@ -18466,7 +18144,7 @@
       </p:sp>
       <p:sp>
         <p:nvSpPr>
-          <p:cNvPr id="40" name="Shape 38"/>
+          <p:cNvPr id="42" name="Shape 40"/>
           <p:cNvSpPr/>
           <p:nvPr/>
         </p:nvSpPr>
@@ -18491,7 +18169,7 @@
       </p:sp>
       <p:sp>
         <p:nvSpPr>
-          <p:cNvPr id="41" name="Text 39"/>
+          <p:cNvPr id="43" name="Text 41"/>
           <p:cNvSpPr/>
           <p:nvPr/>
         </p:nvSpPr>
@@ -18530,7 +18208,7 @@
       </p:sp>
       <p:sp>
         <p:nvSpPr>
-          <p:cNvPr id="42" name="Text 40"/>
+          <p:cNvPr id="44" name="Text 42"/>
           <p:cNvSpPr/>
           <p:nvPr/>
         </p:nvSpPr>
@@ -18563,7 +18241,7 @@
                 <a:ea typeface="Microsoft YaHei" pitchFamily="34" charset="-122"/>
                 <a:cs typeface="Microsoft YaHei" pitchFamily="34" charset="-120"/>
               </a:rPr>
-              <a:t>若LMFP良率与成本在未来1-2年内未能显著改善，则磷酸铁锂高压实路线的主导地位可能延续，相关材料企业技术投资回报确定性较高</a:t>
+              <a:t>若吉利电芯大规模外供，则第三方磷酸铁锂企业客户结构可能恶化</a:t>
             </a:r>
             <a:endParaRPr lang="en-US" sz="1020" dirty="0"/>
           </a:p>
@@ -18712,7 +18390,7 @@
                 <a:ea typeface="Aptos" pitchFamily="34" charset="-122"/>
                 <a:cs typeface="Aptos" pitchFamily="34" charset="-120"/>
               </a:rPr>
-              <a:t>2026-10-08</a:t>
+              <a:t>2026-10-12</a:t>
             </a:r>
             <a:endParaRPr lang="en-US" sz="800" dirty="0"/>
           </a:p>
@@ -18918,7 +18596,7 @@
                 <a:ea typeface="Microsoft YaHei" pitchFamily="34" charset="-122"/>
                 <a:cs typeface="Microsoft YaHei" pitchFamily="34" charset="-120"/>
               </a:rPr>
-              <a:t>2 条公开来源交叉验证｜事实、影响与后续研判</a:t>
+              <a:t>4 条公开来源交叉验证｜事实、影响与后续研判</a:t>
             </a:r>
             <a:endParaRPr lang="en-US" sz="860" dirty="0"/>
           </a:p>
@@ -19027,7 +18705,7 @@
                 <a:ea typeface="Microsoft YaHei" pitchFamily="34" charset="-122"/>
                 <a:cs typeface="Microsoft YaHei" pitchFamily="34" charset="-120"/>
               </a:rPr>
-              <a:t>风险方面，动力电池回收企业大量出清可能短期推高锂盐成本，叠加普通磷酸铁锂产能过剩，行业盈利分化加剧；机会方面，高压实产品供给偏紧为头部企业提供溢价空间，容百科技量产落地可能带来客户导入加速。需持续观察回收政策执行力度、高压实产品放量节奏及LMFP技术进展。 [2][1]</a:t>
+              <a:t>风险：碳酸锂价格暴跌致盈利压力，欧盟自限出口政策压制需求；机会：湖南裕能扩产和龙蟠科技长协显示龙头扩张，国内新质生产力政策支持；观察：华盛锂电资本运作、电池板块股价波动。 [3][4][1][6]</a:t>
             </a:r>
             <a:endParaRPr lang="en-US" sz="960" dirty="0"/>
           </a:p>
@@ -19068,7 +18746,7 @@
                 <a:ea typeface="Aptos" pitchFamily="34" charset="-122"/>
                 <a:cs typeface="Aptos" pitchFamily="34" charset="-120"/>
               </a:rPr>
-              <a:t>依据：[2][1]</a:t>
+              <a:t>依据：[3][4][1][6]</a:t>
             </a:r>
             <a:endParaRPr lang="en-US" sz="740" dirty="0"/>
           </a:p>
@@ -19177,7 +18855,7 @@
                 <a:ea typeface="Microsoft YaHei" pitchFamily="34" charset="-122"/>
                 <a:cs typeface="Microsoft YaHei" pitchFamily="34" charset="-120"/>
               </a:rPr>
-              <a:t>综合今日所有信号，磷酸铁锂行业正处于结构性分化阶段：高端产能稀缺与低端产能过剩并存，回收政策收紧从成本端施加压力，技术路线竞争（高压实vs LMFP）决定中期格局。需要验证的是回收政策对锂盐供给的实际影响量级、高压实产品下游需求增速，以及容百科技等头部企业的客户结构变化。</a:t>
+              <a:t>价格下行与政策风险是主要压制因素，但龙头扩产和长协锁定表明行业仍具成长性；华盛锂电法律意见书可能预示资本动作，电池板块跌幅居前反映市场情绪。需验证：碳酸锂价格拐点、政策落地节奏、企业资本运作意图。</a:t>
             </a:r>
             <a:endParaRPr lang="en-US" sz="960" dirty="0"/>
           </a:p>
@@ -19311,7 +18989,7 @@
                 <a:ea typeface="Microsoft YaHei" pitchFamily="34" charset="-122"/>
                 <a:cs typeface="Microsoft YaHei" pitchFamily="34" charset="-120"/>
               </a:rPr>
-              <a:t>若回收政策严格执行且高压实产品需求持续增长，则磷酸铁锂行业集中度可能进一步提升，头部企业同时受益于高端溢价和回收端出清带来的成本传导；跟踪指标包括锂盐现货价格、高压实产品月度出货量、回收企业退出数量及头部企业毛利率变化；证据边界在于政策执行和需求增长均存在不确定性，需持续跟踪验证。</a:t>
+              <a:t>若碳酸锂价格企稳，则磷酸铁锂盈利可能修复；若欧盟政策放松，则出口需求可能回升。跟踪指标：碳酸锂期货价、欧盟政策动向、华盛锂电公告。</a:t>
             </a:r>
             <a:endParaRPr lang="en-US" sz="960" dirty="0"/>
           </a:p>
@@ -19379,7 +19057,7 @@
                 <a:ea typeface="Microsoft YaHei" pitchFamily="34" charset="-122"/>
                 <a:cs typeface="Microsoft YaHei" pitchFamily="34" charset="-120"/>
               </a:rPr>
-              <a:t>对比矩阵</a:t>
+              <a:t>路线图</a:t>
             </a:r>
             <a:endParaRPr lang="en-US" sz="1200" dirty="0"/>
           </a:p>
@@ -19393,18 +19071,84 @@
         </p:nvSpPr>
         <p:spPr>
           <a:xfrm>
-            <a:off x="7818120" y="2176272"/>
-            <a:ext cx="2487168" cy="1609344"/>
-          </a:xfrm>
-          <a:prstGeom prst="rect">
+            <a:off x="7754112" y="2249424"/>
+            <a:ext cx="612648" cy="402336"/>
+          </a:xfrm>
+          <a:prstGeom prst="chevron">
+            <a:avLst/>
+          </a:prstGeom>
+          <a:solidFill>
+            <a:srgbClr val="DDEBE0"/>
+          </a:solidFill>
+          <a:ln w="13970">
+            <a:solidFill>
+              <a:srgbClr val="487052"/>
+            </a:solidFill>
+            <a:prstDash val="solid"/>
+          </a:ln>
+        </p:spPr>
+      </p:sp>
+      <p:sp>
+        <p:nvSpPr>
+          <p:cNvPr id="25" name="Text 23"/>
+          <p:cNvSpPr/>
+          <p:nvPr/>
+        </p:nvSpPr>
+        <p:spPr>
+          <a:xfrm>
+            <a:off x="7827264" y="2386584"/>
+            <a:ext cx="448056" cy="109728"/>
+          </a:xfrm>
+          <a:prstGeom prst="rect">
+            <a:avLst/>
+          </a:prstGeom>
+          <a:noFill/>
+          <a:ln/>
+        </p:spPr>
+        <p:txBody>
+          <a:bodyPr wrap="square" lIns="0" tIns="0" rIns="0" bIns="0" rtlCol="0" anchor="ctr">
+            <a:normAutofit/>
+          </a:bodyPr>
+          <a:lstStyle/>
+          <a:p>
+            <a:pPr algn="ctr" indent="0" marL="0">
+              <a:buNone/>
+            </a:pPr>
+            <a:r>
+              <a:rPr lang="en-US" sz="670" b="1" dirty="0">
+                <a:solidFill>
+                  <a:srgbClr val="121212"/>
+                </a:solidFill>
+                <a:latin typeface="Microsoft YaHei" pitchFamily="34" charset="0"/>
+                <a:ea typeface="Microsoft YaHei" pitchFamily="34" charset="-122"/>
+                <a:cs typeface="Microsoft YaHei" pitchFamily="34" charset="-120"/>
+              </a:rPr>
+              <a:t>技术</a:t>
+            </a:r>
+            <a:endParaRPr lang="en-US" sz="670" dirty="0"/>
+          </a:p>
+        </p:txBody>
+      </p:sp>
+      <p:sp>
+        <p:nvSpPr>
+          <p:cNvPr id="26" name="Shape 24"/>
+          <p:cNvSpPr/>
+          <p:nvPr/>
+        </p:nvSpPr>
+        <p:spPr>
+          <a:xfrm>
+            <a:off x="8375904" y="2249424"/>
+            <a:ext cx="612648" cy="402336"/>
+          </a:xfrm>
+          <a:prstGeom prst="chevron">
             <a:avLst/>
           </a:prstGeom>
           <a:solidFill>
             <a:srgbClr val="FFFFFF"/>
           </a:solidFill>
-          <a:ln w="10160">
+          <a:ln w="13970">
             <a:solidFill>
-              <a:srgbClr val="DADADA"/>
+              <a:srgbClr val="487052"/>
             </a:solidFill>
             <a:prstDash val="solid"/>
           </a:ln>
@@ -19412,22 +19156,65 @@
       </p:sp>
       <p:sp>
         <p:nvSpPr>
-          <p:cNvPr id="25" name="Shape 23"/>
-          <p:cNvSpPr/>
-          <p:nvPr/>
-        </p:nvSpPr>
-        <p:spPr>
-          <a:xfrm>
-            <a:off x="9061704" y="2176272"/>
-            <a:ext cx="0" cy="1609344"/>
-          </a:xfrm>
-          <a:prstGeom prst="line">
-            <a:avLst/>
-          </a:prstGeom>
-          <a:noFill/>
-          <a:ln w="8890">
+          <p:cNvPr id="27" name="Text 25"/>
+          <p:cNvSpPr/>
+          <p:nvPr/>
+        </p:nvSpPr>
+        <p:spPr>
+          <a:xfrm>
+            <a:off x="8449056" y="2386584"/>
+            <a:ext cx="448056" cy="109728"/>
+          </a:xfrm>
+          <a:prstGeom prst="rect">
+            <a:avLst/>
+          </a:prstGeom>
+          <a:noFill/>
+          <a:ln/>
+        </p:spPr>
+        <p:txBody>
+          <a:bodyPr wrap="square" lIns="0" tIns="0" rIns="0" bIns="0" rtlCol="0" anchor="ctr">
+            <a:normAutofit/>
+          </a:bodyPr>
+          <a:lstStyle/>
+          <a:p>
+            <a:pPr algn="ctr" indent="0" marL="0">
+              <a:buNone/>
+            </a:pPr>
+            <a:r>
+              <a:rPr lang="en-US" sz="670" b="1" dirty="0">
+                <a:solidFill>
+                  <a:srgbClr val="121212"/>
+                </a:solidFill>
+                <a:latin typeface="Microsoft YaHei" pitchFamily="34" charset="0"/>
+                <a:ea typeface="Microsoft YaHei" pitchFamily="34" charset="-122"/>
+                <a:cs typeface="Microsoft YaHei" pitchFamily="34" charset="-120"/>
+              </a:rPr>
+              <a:t>产品</a:t>
+            </a:r>
+            <a:endParaRPr lang="en-US" sz="670" dirty="0"/>
+          </a:p>
+        </p:txBody>
+      </p:sp>
+      <p:sp>
+        <p:nvSpPr>
+          <p:cNvPr id="28" name="Shape 26"/>
+          <p:cNvSpPr/>
+          <p:nvPr/>
+        </p:nvSpPr>
+        <p:spPr>
+          <a:xfrm>
+            <a:off x="8997696" y="2249424"/>
+            <a:ext cx="612648" cy="402336"/>
+          </a:xfrm>
+          <a:prstGeom prst="chevron">
+            <a:avLst/>
+          </a:prstGeom>
+          <a:solidFill>
+            <a:srgbClr val="FFFFFF"/>
+          </a:solidFill>
+          <a:ln w="13970">
             <a:solidFill>
-              <a:srgbClr val="DADADA"/>
+              <a:srgbClr val="487052"/>
             </a:solidFill>
             <a:prstDash val="solid"/>
           </a:ln>
@@ -19435,22 +19222,65 @@
       </p:sp>
       <p:sp>
         <p:nvSpPr>
-          <p:cNvPr id="26" name="Shape 24"/>
-          <p:cNvSpPr/>
-          <p:nvPr/>
-        </p:nvSpPr>
-        <p:spPr>
-          <a:xfrm>
-            <a:off x="7818120" y="2980944"/>
-            <a:ext cx="2487168" cy="0"/>
-          </a:xfrm>
-          <a:prstGeom prst="line">
-            <a:avLst/>
-          </a:prstGeom>
-          <a:noFill/>
-          <a:ln w="8890">
+          <p:cNvPr id="29" name="Text 27"/>
+          <p:cNvSpPr/>
+          <p:nvPr/>
+        </p:nvSpPr>
+        <p:spPr>
+          <a:xfrm>
+            <a:off x="9070848" y="2386584"/>
+            <a:ext cx="448056" cy="109728"/>
+          </a:xfrm>
+          <a:prstGeom prst="rect">
+            <a:avLst/>
+          </a:prstGeom>
+          <a:noFill/>
+          <a:ln/>
+        </p:spPr>
+        <p:txBody>
+          <a:bodyPr wrap="square" lIns="0" tIns="0" rIns="0" bIns="0" rtlCol="0" anchor="ctr">
+            <a:normAutofit/>
+          </a:bodyPr>
+          <a:lstStyle/>
+          <a:p>
+            <a:pPr algn="ctr" indent="0" marL="0">
+              <a:buNone/>
+            </a:pPr>
+            <a:r>
+              <a:rPr lang="en-US" sz="670" b="1" dirty="0">
+                <a:solidFill>
+                  <a:srgbClr val="121212"/>
+                </a:solidFill>
+                <a:latin typeface="Microsoft YaHei" pitchFamily="34" charset="0"/>
+                <a:ea typeface="Microsoft YaHei" pitchFamily="34" charset="-122"/>
+                <a:cs typeface="Microsoft YaHei" pitchFamily="34" charset="-120"/>
+              </a:rPr>
+              <a:t>验证</a:t>
+            </a:r>
+            <a:endParaRPr lang="en-US" sz="670" dirty="0"/>
+          </a:p>
+        </p:txBody>
+      </p:sp>
+      <p:sp>
+        <p:nvSpPr>
+          <p:cNvPr id="30" name="Shape 28"/>
+          <p:cNvSpPr/>
+          <p:nvPr/>
+        </p:nvSpPr>
+        <p:spPr>
+          <a:xfrm>
+            <a:off x="9619488" y="2249424"/>
+            <a:ext cx="612648" cy="402336"/>
+          </a:xfrm>
+          <a:prstGeom prst="chevron">
+            <a:avLst/>
+          </a:prstGeom>
+          <a:solidFill>
+            <a:srgbClr val="FFFFFF"/>
+          </a:solidFill>
+          <a:ln w="13970">
             <a:solidFill>
-              <a:srgbClr val="DADADA"/>
+              <a:srgbClr val="487052"/>
             </a:solidFill>
             <a:prstDash val="solid"/>
           </a:ln>
@@ -19458,24 +19288,63 @@
       </p:sp>
       <p:sp>
         <p:nvSpPr>
-          <p:cNvPr id="27" name="Shape 25"/>
-          <p:cNvSpPr/>
-          <p:nvPr/>
-        </p:nvSpPr>
-        <p:spPr>
-          <a:xfrm>
-            <a:off x="7818120" y="2176272"/>
-            <a:ext cx="1243584" cy="804672"/>
-          </a:xfrm>
-          <a:prstGeom prst="rect">
-            <a:avLst/>
-          </a:prstGeom>
-          <a:solidFill>
-            <a:srgbClr val="DDEBE0"/>
-          </a:solidFill>
-          <a:ln w="3810">
+          <p:cNvPr id="31" name="Text 29"/>
+          <p:cNvSpPr/>
+          <p:nvPr/>
+        </p:nvSpPr>
+        <p:spPr>
+          <a:xfrm>
+            <a:off x="9692640" y="2386584"/>
+            <a:ext cx="448056" cy="109728"/>
+          </a:xfrm>
+          <a:prstGeom prst="rect">
+            <a:avLst/>
+          </a:prstGeom>
+          <a:noFill/>
+          <a:ln/>
+        </p:spPr>
+        <p:txBody>
+          <a:bodyPr wrap="square" lIns="0" tIns="0" rIns="0" bIns="0" rtlCol="0" anchor="ctr">
+            <a:normAutofit/>
+          </a:bodyPr>
+          <a:lstStyle/>
+          <a:p>
+            <a:pPr algn="ctr" indent="0" marL="0">
+              <a:buNone/>
+            </a:pPr>
+            <a:r>
+              <a:rPr lang="en-US" sz="670" b="1" dirty="0">
+                <a:solidFill>
+                  <a:srgbClr val="121212"/>
+                </a:solidFill>
+                <a:latin typeface="Microsoft YaHei" pitchFamily="34" charset="0"/>
+                <a:ea typeface="Microsoft YaHei" pitchFamily="34" charset="-122"/>
+                <a:cs typeface="Microsoft YaHei" pitchFamily="34" charset="-120"/>
+              </a:rPr>
+              <a:t>量产</a:t>
+            </a:r>
+            <a:endParaRPr lang="en-US" sz="670" dirty="0"/>
+          </a:p>
+        </p:txBody>
+      </p:sp>
+      <p:sp>
+        <p:nvSpPr>
+          <p:cNvPr id="32" name="Shape 30"/>
+          <p:cNvSpPr/>
+          <p:nvPr/>
+        </p:nvSpPr>
+        <p:spPr>
+          <a:xfrm>
+            <a:off x="7882128" y="3063240"/>
+            <a:ext cx="2331720" cy="0"/>
+          </a:xfrm>
+          <a:prstGeom prst="line">
+            <a:avLst/>
+          </a:prstGeom>
+          <a:noFill/>
+          <a:ln w="13970">
             <a:solidFill>
-              <a:srgbClr val="DADADA"/>
+              <a:srgbClr val="7F9D84"/>
             </a:solidFill>
             <a:prstDash val="solid"/>
           </a:ln>
@@ -19483,106 +19352,24 @@
       </p:sp>
       <p:sp>
         <p:nvSpPr>
-          <p:cNvPr id="28" name="Text 26"/>
-          <p:cNvSpPr/>
-          <p:nvPr/>
-        </p:nvSpPr>
-        <p:spPr>
-          <a:xfrm>
-            <a:off x="7891272" y="2286000"/>
-            <a:ext cx="438912" cy="109728"/>
-          </a:xfrm>
-          <a:prstGeom prst="rect">
-            <a:avLst/>
-          </a:prstGeom>
-          <a:noFill/>
-          <a:ln/>
-        </p:spPr>
-        <p:txBody>
-          <a:bodyPr wrap="square" lIns="0" tIns="0" rIns="0" bIns="0" rtlCol="0" anchor="ctr">
-            <a:normAutofit/>
-          </a:bodyPr>
-          <a:lstStyle/>
-          <a:p>
-            <a:pPr indent="0" marL="0">
-              <a:buNone/>
-            </a:pPr>
-            <a:r>
-              <a:rPr lang="en-US" sz="710" b="1" dirty="0">
-                <a:solidFill>
-                  <a:srgbClr val="487052"/>
-                </a:solidFill>
-                <a:latin typeface="Microsoft YaHei" pitchFamily="34" charset="0"/>
-                <a:ea typeface="Microsoft YaHei" pitchFamily="34" charset="-122"/>
-                <a:cs typeface="Microsoft YaHei" pitchFamily="34" charset="-120"/>
-              </a:rPr>
-              <a:t>路线A</a:t>
-            </a:r>
-            <a:endParaRPr lang="en-US" sz="710" dirty="0"/>
-          </a:p>
-        </p:txBody>
-      </p:sp>
-      <p:sp>
-        <p:nvSpPr>
-          <p:cNvPr id="29" name="Text 27"/>
-          <p:cNvSpPr/>
-          <p:nvPr/>
-        </p:nvSpPr>
-        <p:spPr>
-          <a:xfrm>
-            <a:off x="7891272" y="2505456"/>
-            <a:ext cx="1024128" cy="201168"/>
-          </a:xfrm>
-          <a:prstGeom prst="rect">
-            <a:avLst/>
-          </a:prstGeom>
-          <a:noFill/>
-          <a:ln/>
-        </p:spPr>
-        <p:txBody>
-          <a:bodyPr wrap="square" lIns="0" tIns="0" rIns="0" bIns="0" rtlCol="0" anchor="t">
-            <a:normAutofit/>
-          </a:bodyPr>
-          <a:lstStyle/>
-          <a:p>
-            <a:pPr indent="0" marL="0">
-              <a:buNone/>
-            </a:pPr>
-            <a:r>
-              <a:rPr lang="en-US" sz="670" dirty="0">
-                <a:solidFill>
-                  <a:srgbClr val="121212"/>
-                </a:solidFill>
-                <a:latin typeface="Microsoft YaHei" pitchFamily="34" charset="0"/>
-                <a:ea typeface="Microsoft YaHei" pitchFamily="34" charset="-122"/>
-                <a:cs typeface="Microsoft YaHei" pitchFamily="34" charset="-120"/>
-              </a:rPr>
-              <a:t>风险方面，动力电池回收企业</a:t>
-            </a:r>
-            <a:endParaRPr lang="en-US" sz="670" dirty="0"/>
-          </a:p>
-        </p:txBody>
-      </p:sp>
-      <p:sp>
-        <p:nvSpPr>
-          <p:cNvPr id="30" name="Shape 28"/>
-          <p:cNvSpPr/>
-          <p:nvPr/>
-        </p:nvSpPr>
-        <p:spPr>
-          <a:xfrm>
-            <a:off x="9061704" y="2176272"/>
-            <a:ext cx="1243584" cy="804672"/>
-          </a:xfrm>
-          <a:prstGeom prst="rect">
+          <p:cNvPr id="33" name="Shape 31"/>
+          <p:cNvSpPr/>
+          <p:nvPr/>
+        </p:nvSpPr>
+        <p:spPr>
+          <a:xfrm>
+            <a:off x="7845552" y="2962656"/>
+            <a:ext cx="164592" cy="164592"/>
+          </a:xfrm>
+          <a:prstGeom prst="ellipse">
             <a:avLst/>
           </a:prstGeom>
           <a:solidFill>
-            <a:srgbClr val="FFFFFF"/>
+            <a:srgbClr val="487052"/>
           </a:solidFill>
-          <a:ln w="3810">
+          <a:ln w="12700">
             <a:solidFill>
-              <a:srgbClr val="DADADA"/>
+              <a:srgbClr val="FFFFFF"/>
             </a:solidFill>
             <a:prstDash val="solid"/>
           </a:ln>
@@ -19590,55 +19377,14 @@
       </p:sp>
       <p:sp>
         <p:nvSpPr>
-          <p:cNvPr id="31" name="Text 29"/>
-          <p:cNvSpPr/>
-          <p:nvPr/>
-        </p:nvSpPr>
-        <p:spPr>
-          <a:xfrm>
-            <a:off x="9134856" y="2286000"/>
-            <a:ext cx="438912" cy="109728"/>
-          </a:xfrm>
-          <a:prstGeom prst="rect">
-            <a:avLst/>
-          </a:prstGeom>
-          <a:noFill/>
-          <a:ln/>
-        </p:spPr>
-        <p:txBody>
-          <a:bodyPr wrap="square" lIns="0" tIns="0" rIns="0" bIns="0" rtlCol="0" anchor="ctr">
-            <a:normAutofit/>
-          </a:bodyPr>
-          <a:lstStyle/>
-          <a:p>
-            <a:pPr indent="0" marL="0">
-              <a:buNone/>
-            </a:pPr>
-            <a:r>
-              <a:rPr lang="en-US" sz="710" b="1" dirty="0">
-                <a:solidFill>
-                  <a:srgbClr val="487052"/>
-                </a:solidFill>
-                <a:latin typeface="Microsoft YaHei" pitchFamily="34" charset="0"/>
-                <a:ea typeface="Microsoft YaHei" pitchFamily="34" charset="-122"/>
-                <a:cs typeface="Microsoft YaHei" pitchFamily="34" charset="-120"/>
-              </a:rPr>
-              <a:t>路线B</a:t>
-            </a:r>
-            <a:endParaRPr lang="en-US" sz="710" dirty="0"/>
-          </a:p>
-        </p:txBody>
-      </p:sp>
-      <p:sp>
-        <p:nvSpPr>
-          <p:cNvPr id="32" name="Text 30"/>
-          <p:cNvSpPr/>
-          <p:nvPr/>
-        </p:nvSpPr>
-        <p:spPr>
-          <a:xfrm>
-            <a:off x="9134856" y="2505456"/>
-            <a:ext cx="1024128" cy="201168"/>
+          <p:cNvPr id="34" name="Text 32"/>
+          <p:cNvSpPr/>
+          <p:nvPr/>
+        </p:nvSpPr>
+        <p:spPr>
+          <a:xfrm>
+            <a:off x="7754112" y="3291840"/>
+            <a:ext cx="603504" cy="310896"/>
           </a:xfrm>
           <a:prstGeom prst="rect">
             <a:avLst/>
@@ -19652,7 +19398,7 @@
           </a:bodyPr>
           <a:lstStyle/>
           <a:p>
-            <a:pPr indent="0" marL="0">
+            <a:pPr algn="ctr" indent="0" marL="0">
               <a:buNone/>
             </a:pPr>
             <a:r>
@@ -19664,7 +19410,7 @@
                 <a:ea typeface="Microsoft YaHei" pitchFamily="34" charset="-122"/>
                 <a:cs typeface="Microsoft YaHei" pitchFamily="34" charset="-120"/>
               </a:rPr>
-              <a:t>机会方面，高压实产品供给偏</a:t>
+              <a:t>风险：碳酸锂价格暴跌致</a:t>
             </a:r>
             <a:endParaRPr lang="en-US" sz="670" dirty="0"/>
           </a:p>
@@ -19672,24 +19418,24 @@
       </p:sp>
       <p:sp>
         <p:nvSpPr>
-          <p:cNvPr id="33" name="Shape 31"/>
-          <p:cNvSpPr/>
-          <p:nvPr/>
-        </p:nvSpPr>
-        <p:spPr>
-          <a:xfrm>
-            <a:off x="7818120" y="2980944"/>
-            <a:ext cx="1243584" cy="804672"/>
-          </a:xfrm>
-          <a:prstGeom prst="rect">
+          <p:cNvPr id="35" name="Shape 33"/>
+          <p:cNvSpPr/>
+          <p:nvPr/>
+        </p:nvSpPr>
+        <p:spPr>
+          <a:xfrm>
+            <a:off x="8503920" y="2962656"/>
+            <a:ext cx="164592" cy="164592"/>
+          </a:xfrm>
+          <a:prstGeom prst="ellipse">
             <a:avLst/>
           </a:prstGeom>
           <a:solidFill>
-            <a:srgbClr val="FFFFFF"/>
+            <a:srgbClr val="487052"/>
           </a:solidFill>
-          <a:ln w="3810">
+          <a:ln w="12700">
             <a:solidFill>
-              <a:srgbClr val="DADADA"/>
+              <a:srgbClr val="FFFFFF"/>
             </a:solidFill>
             <a:prstDash val="solid"/>
           </a:ln>
@@ -19697,55 +19443,14 @@
       </p:sp>
       <p:sp>
         <p:nvSpPr>
-          <p:cNvPr id="34" name="Text 32"/>
-          <p:cNvSpPr/>
-          <p:nvPr/>
-        </p:nvSpPr>
-        <p:spPr>
-          <a:xfrm>
-            <a:off x="7891272" y="3090672"/>
-            <a:ext cx="438912" cy="109728"/>
-          </a:xfrm>
-          <a:prstGeom prst="rect">
-            <a:avLst/>
-          </a:prstGeom>
-          <a:noFill/>
-          <a:ln/>
-        </p:spPr>
-        <p:txBody>
-          <a:bodyPr wrap="square" lIns="0" tIns="0" rIns="0" bIns="0" rtlCol="0" anchor="ctr">
-            <a:normAutofit/>
-          </a:bodyPr>
-          <a:lstStyle/>
-          <a:p>
-            <a:pPr indent="0" marL="0">
-              <a:buNone/>
-            </a:pPr>
-            <a:r>
-              <a:rPr lang="en-US" sz="710" b="1" dirty="0">
-                <a:solidFill>
-                  <a:srgbClr val="487052"/>
-                </a:solidFill>
-                <a:latin typeface="Microsoft YaHei" pitchFamily="34" charset="0"/>
-                <a:ea typeface="Microsoft YaHei" pitchFamily="34" charset="-122"/>
-                <a:cs typeface="Microsoft YaHei" pitchFamily="34" charset="-120"/>
-              </a:rPr>
-              <a:t>机会</a:t>
-            </a:r>
-            <a:endParaRPr lang="en-US" sz="710" dirty="0"/>
-          </a:p>
-        </p:txBody>
-      </p:sp>
-      <p:sp>
-        <p:nvSpPr>
-          <p:cNvPr id="35" name="Text 33"/>
-          <p:cNvSpPr/>
-          <p:nvPr/>
-        </p:nvSpPr>
-        <p:spPr>
-          <a:xfrm>
-            <a:off x="7891272" y="3310128"/>
-            <a:ext cx="1024128" cy="201168"/>
+          <p:cNvPr id="36" name="Text 34"/>
+          <p:cNvSpPr/>
+          <p:nvPr/>
+        </p:nvSpPr>
+        <p:spPr>
+          <a:xfrm>
+            <a:off x="8412480" y="3291840"/>
+            <a:ext cx="603504" cy="310896"/>
           </a:xfrm>
           <a:prstGeom prst="rect">
             <a:avLst/>
@@ -19759,7 +19464,7 @@
           </a:bodyPr>
           <a:lstStyle/>
           <a:p>
-            <a:pPr indent="0" marL="0">
+            <a:pPr algn="ctr" indent="0" marL="0">
               <a:buNone/>
             </a:pPr>
             <a:r>
@@ -19771,7 +19476,7 @@
                 <a:ea typeface="Microsoft YaHei" pitchFamily="34" charset="-122"/>
                 <a:cs typeface="Microsoft YaHei" pitchFamily="34" charset="-120"/>
               </a:rPr>
-              <a:t>需持续观察回收政策执行力度</a:t>
+              <a:t>机会：湖南裕能扩产和龙</a:t>
             </a:r>
             <a:endParaRPr lang="en-US" sz="670" dirty="0"/>
           </a:p>
@@ -19779,24 +19484,24 @@
       </p:sp>
       <p:sp>
         <p:nvSpPr>
-          <p:cNvPr id="36" name="Shape 34"/>
-          <p:cNvSpPr/>
-          <p:nvPr/>
-        </p:nvSpPr>
-        <p:spPr>
-          <a:xfrm>
-            <a:off x="9061704" y="2980944"/>
-            <a:ext cx="1243584" cy="804672"/>
-          </a:xfrm>
-          <a:prstGeom prst="rect">
+          <p:cNvPr id="37" name="Shape 35"/>
+          <p:cNvSpPr/>
+          <p:nvPr/>
+        </p:nvSpPr>
+        <p:spPr>
+          <a:xfrm>
+            <a:off x="9162288" y="2962656"/>
+            <a:ext cx="164592" cy="164592"/>
+          </a:xfrm>
+          <a:prstGeom prst="ellipse">
             <a:avLst/>
           </a:prstGeom>
           <a:solidFill>
-            <a:srgbClr val="F4FAF6"/>
+            <a:srgbClr val="487052"/>
           </a:solidFill>
-          <a:ln w="3810">
+          <a:ln w="12700">
             <a:solidFill>
-              <a:srgbClr val="DADADA"/>
+              <a:srgbClr val="FFFFFF"/>
             </a:solidFill>
             <a:prstDash val="solid"/>
           </a:ln>
@@ -19804,55 +19509,14 @@
       </p:sp>
       <p:sp>
         <p:nvSpPr>
-          <p:cNvPr id="37" name="Text 35"/>
-          <p:cNvSpPr/>
-          <p:nvPr/>
-        </p:nvSpPr>
-        <p:spPr>
-          <a:xfrm>
-            <a:off x="9134856" y="3090672"/>
-            <a:ext cx="438912" cy="109728"/>
-          </a:xfrm>
-          <a:prstGeom prst="rect">
-            <a:avLst/>
-          </a:prstGeom>
-          <a:noFill/>
-          <a:ln/>
-        </p:spPr>
-        <p:txBody>
-          <a:bodyPr wrap="square" lIns="0" tIns="0" rIns="0" bIns="0" rtlCol="0" anchor="ctr">
-            <a:normAutofit/>
-          </a:bodyPr>
-          <a:lstStyle/>
-          <a:p>
-            <a:pPr indent="0" marL="0">
-              <a:buNone/>
-            </a:pPr>
-            <a:r>
-              <a:rPr lang="en-US" sz="710" b="1" dirty="0">
-                <a:solidFill>
-                  <a:srgbClr val="487052"/>
-                </a:solidFill>
-                <a:latin typeface="Microsoft YaHei" pitchFamily="34" charset="0"/>
-                <a:ea typeface="Microsoft YaHei" pitchFamily="34" charset="-122"/>
-                <a:cs typeface="Microsoft YaHei" pitchFamily="34" charset="-120"/>
-              </a:rPr>
-              <a:t>约束</a:t>
-            </a:r>
-            <a:endParaRPr lang="en-US" sz="710" dirty="0"/>
-          </a:p>
-        </p:txBody>
-      </p:sp>
-      <p:sp>
-        <p:nvSpPr>
           <p:cNvPr id="38" name="Text 36"/>
           <p:cNvSpPr/>
           <p:nvPr/>
         </p:nvSpPr>
         <p:spPr>
           <a:xfrm>
-            <a:off x="9134856" y="3310128"/>
-            <a:ext cx="1024128" cy="201168"/>
+            <a:off x="9070848" y="3291840"/>
+            <a:ext cx="603504" cy="310896"/>
           </a:xfrm>
           <a:prstGeom prst="rect">
             <a:avLst/>
@@ -19866,7 +19530,7 @@
           </a:bodyPr>
           <a:lstStyle/>
           <a:p>
-            <a:pPr indent="0" marL="0">
+            <a:pPr algn="ctr" indent="0" marL="0">
               <a:buNone/>
             </a:pPr>
             <a:r>
@@ -19878,7 +19542,7 @@
                 <a:ea typeface="Microsoft YaHei" pitchFamily="34" charset="-122"/>
                 <a:cs typeface="Microsoft YaHei" pitchFamily="34" charset="-120"/>
               </a:rPr>
-              <a:t>风险方面，动力电池回收企业</a:t>
+              <a:t>观察：华盛锂电资本运作</a:t>
             </a:r>
             <a:endParaRPr lang="en-US" sz="670" dirty="0"/>
           </a:p>
@@ -19886,14 +19550,39 @@
       </p:sp>
       <p:sp>
         <p:nvSpPr>
-          <p:cNvPr id="39" name="Text 37"/>
-          <p:cNvSpPr/>
-          <p:nvPr/>
-        </p:nvSpPr>
-        <p:spPr>
-          <a:xfrm>
-            <a:off x="7726680" y="4187952"/>
-            <a:ext cx="2697480" cy="493776"/>
+          <p:cNvPr id="39" name="Shape 37"/>
+          <p:cNvSpPr/>
+          <p:nvPr/>
+        </p:nvSpPr>
+        <p:spPr>
+          <a:xfrm>
+            <a:off x="9820656" y="2962656"/>
+            <a:ext cx="164592" cy="164592"/>
+          </a:xfrm>
+          <a:prstGeom prst="ellipse">
+            <a:avLst/>
+          </a:prstGeom>
+          <a:solidFill>
+            <a:srgbClr val="B85A4A"/>
+          </a:solidFill>
+          <a:ln w="12700">
+            <a:solidFill>
+              <a:srgbClr val="FFFFFF"/>
+            </a:solidFill>
+            <a:prstDash val="solid"/>
+          </a:ln>
+        </p:spPr>
+      </p:sp>
+      <p:sp>
+        <p:nvSpPr>
+          <p:cNvPr id="40" name="Text 38"/>
+          <p:cNvSpPr/>
+          <p:nvPr/>
+        </p:nvSpPr>
+        <p:spPr>
+          <a:xfrm>
+            <a:off x="9729216" y="3291840"/>
+            <a:ext cx="603504" cy="310896"/>
           </a:xfrm>
           <a:prstGeom prst="rect">
             <a:avLst/>
@@ -19907,6 +19596,47 @@
           </a:bodyPr>
           <a:lstStyle/>
           <a:p>
+            <a:pPr algn="ctr" indent="0" marL="0">
+              <a:buNone/>
+            </a:pPr>
+            <a:r>
+              <a:rPr lang="en-US" sz="670" dirty="0">
+                <a:solidFill>
+                  <a:srgbClr val="121212"/>
+                </a:solidFill>
+                <a:latin typeface="Microsoft YaHei" pitchFamily="34" charset="0"/>
+                <a:ea typeface="Microsoft YaHei" pitchFamily="34" charset="-122"/>
+                <a:cs typeface="Microsoft YaHei" pitchFamily="34" charset="-120"/>
+              </a:rPr>
+              <a:t>观察：华盛锂电资本运作</a:t>
+            </a:r>
+            <a:endParaRPr lang="en-US" sz="670" dirty="0"/>
+          </a:p>
+        </p:txBody>
+      </p:sp>
+      <p:sp>
+        <p:nvSpPr>
+          <p:cNvPr id="41" name="Text 39"/>
+          <p:cNvSpPr/>
+          <p:nvPr/>
+        </p:nvSpPr>
+        <p:spPr>
+          <a:xfrm>
+            <a:off x="7726680" y="4315968"/>
+            <a:ext cx="2697480" cy="384048"/>
+          </a:xfrm>
+          <a:prstGeom prst="rect">
+            <a:avLst/>
+          </a:prstGeom>
+          <a:noFill/>
+          <a:ln/>
+        </p:spPr>
+        <p:txBody>
+          <a:bodyPr wrap="square" lIns="0" tIns="0" rIns="0" bIns="0" rtlCol="0" anchor="t">
+            <a:normAutofit/>
+          </a:bodyPr>
+          <a:lstStyle/>
+          <a:p>
             <a:pPr indent="0" marL="0">
               <a:buNone/>
             </a:pPr>
@@ -19919,7 +19649,7 @@
                 <a:ea typeface="Microsoft YaHei" pitchFamily="34" charset="-122"/>
                 <a:cs typeface="Microsoft YaHei" pitchFamily="34" charset="-120"/>
               </a:rPr>
-              <a:t>检测到对比/分类信号，用矩阵压缩呈现，不新增外部判断。</a:t>
+              <a:t>参考培训 PPT 的阶段路线表达，按事件顺序拆成判断路径。</a:t>
             </a:r>
             <a:endParaRPr lang="en-US" sz="760" dirty="0"/>
           </a:p>
@@ -19927,7 +19657,7 @@
       </p:sp>
       <p:sp>
         <p:nvSpPr>
-          <p:cNvPr id="40" name="Shape 38"/>
+          <p:cNvPr id="42" name="Shape 40"/>
           <p:cNvSpPr/>
           <p:nvPr/>
         </p:nvSpPr>
@@ -19952,7 +19682,7 @@
       </p:sp>
       <p:sp>
         <p:nvSpPr>
-          <p:cNvPr id="41" name="Text 39"/>
+          <p:cNvPr id="43" name="Text 41"/>
           <p:cNvSpPr/>
           <p:nvPr/>
         </p:nvSpPr>
@@ -19991,7 +19721,7 @@
       </p:sp>
       <p:sp>
         <p:nvSpPr>
-          <p:cNvPr id="42" name="Text 40"/>
+          <p:cNvPr id="44" name="Text 42"/>
           <p:cNvSpPr/>
           <p:nvPr/>
         </p:nvSpPr>
@@ -20024,7 +19754,7 @@
                 <a:ea typeface="Microsoft YaHei" pitchFamily="34" charset="-122"/>
                 <a:cs typeface="Microsoft YaHei" pitchFamily="34" charset="-120"/>
               </a:rPr>
-              <a:t>若回收政策严格执行且高压实产品需求持续增长，则磷酸铁锂行业集中度可能进一步提升，头部企业同时受益于高端溢价和回收端出清带来的成本传导</a:t>
+              <a:t>若碳酸锂价格企稳，则磷酸铁锂盈利可能修复</a:t>
             </a:r>
             <a:endParaRPr lang="en-US" sz="1020" dirty="0"/>
           </a:p>

--- a/docs/reports/latest.pptx
+++ b/docs/reports/latest.pptx
@@ -1876,7 +1876,7 @@
                 <a:ea typeface="Aptos" pitchFamily="34" charset="-122"/>
                 <a:cs typeface="Aptos" pitchFamily="34" charset="-120"/>
               </a:rPr>
-              <a:t>2026-10-12</a:t>
+              <a:t>2026-10-19</a:t>
             </a:r>
             <a:endParaRPr lang="en-US" sz="800" dirty="0"/>
           </a:p>
@@ -2160,7 +2160,7 @@
                 <a:ea typeface="Microsoft YaHei" pitchFamily="34" charset="-122"/>
                 <a:cs typeface="Microsoft YaHei" pitchFamily="34" charset="-120"/>
               </a:rPr>
-              <a:t>今日磷酸铁锂行业信号密集：湖南裕能20万吨纳米磷酸铁锂项目落地，龙蟠科技锁定最高56.78万吨长协，供给端与需求端同步扩张；碳酸锂价格暴跌近90%导致回收行业洗牌，成本端压力与盈利分化加剧；欧盟要求中国自限插混出口，叠加国内19项新质生产力举措，政策博弈升温。整体看，产能扩张与长协锁定并行，但价格下行和贸易壁垒可能压制盈利，需关注项目投产节奏与政策落地细节。</a:t>
+              <a:t>今日磷酸铁锂行业信号集中在技术路线与产能扩张：宝马第六代动力电池量产，强调制造韧性，可能加速高端车型对磷酸铁锂体系的结构性采用；中国储能电池产能激增110%，全球市场同步增长，显示储能端对磷酸铁锂需求形成支撑；电动摩托车锂电池强制性国标发布，明年7月实施，将提高小动力电池安全门槛，利好合规产能。需关注产能扩张与需求增速的匹配度，以及政策对低端产能的挤出效应。</a:t>
             </a:r>
             <a:endParaRPr lang="en-US" sz="1400" dirty="0"/>
           </a:p>
@@ -2898,7 +2898,7 @@
                 <a:ea typeface="Microsoft YaHei" pitchFamily="34" charset="-122"/>
                 <a:cs typeface="Microsoft YaHei" pitchFamily="34" charset="-120"/>
               </a:rPr>
-              <a:t>今日磷酸铁锂行业信号密集：湖南裕能20万吨纳米磷酸铁锂项目落地，龙蟠科技锁定最高56.78万吨长协，供给端与需求端同步扩张；碳酸锂价格暴跌近9</a:t>
+              <a:t>今日磷酸铁锂行业信号集中在技术路线与产能扩张：宝马第六代动力电池量产，强调制造韧性，可能加速高端车型对磷酸铁锂体系的结构性采用；中国储能电池产</a:t>
             </a:r>
             <a:endParaRPr lang="en-US" sz="1020" dirty="0"/>
           </a:p>
@@ -3047,7 +3047,7 @@
                 <a:ea typeface="Aptos" pitchFamily="34" charset="-122"/>
                 <a:cs typeface="Aptos" pitchFamily="34" charset="-120"/>
               </a:rPr>
-              <a:t>2026-10-12</a:t>
+              <a:t>2026-10-19</a:t>
             </a:r>
             <a:endParaRPr lang="en-US" sz="800" dirty="0"/>
           </a:p>
@@ -3612,7 +3612,7 @@
                 <a:ea typeface="Microsoft YaHei" pitchFamily="34" charset="-122"/>
                 <a:cs typeface="Microsoft YaHei" pitchFamily="34" charset="-120"/>
               </a:rPr>
-              <a:t>投资20亿元！湖南裕能于湖南湘潭加码20万吨纳米磷酸铁锂项目 - 新浪</a:t>
+              <a:t>宝马第六代动力电池量产，新世代的底牌藏在制造的韧性里 - 搜狐网</a:t>
             </a:r>
             <a:endParaRPr lang="en-US" sz="680" dirty="0"/>
           </a:p>
@@ -3653,7 +3653,7 @@
                 <a:ea typeface="Aptos" pitchFamily="34" charset="-122"/>
                 <a:cs typeface="Aptos" pitchFamily="34" charset="-120"/>
               </a:rPr>
-              <a:t>https://news.google.com/rss/articles/CBMieEFVX3lxTE5renNSMVJMYldBa2VLd184alVERVRmcTVCWmVhcC1VQ3JkVThycXZ2cGI4YVpsalM5T3BIeE9NM0VtSy1QLVVQVkQ5dF9qSi1qbEVMREc1cGhsbGpXQnJGSFRQWFlMMndGSEljVnF4a0NodndyMk9XRQ?oc=5</a:t>
+              <a:t>https://www.sohu.com/a/1089530167_126781</a:t>
             </a:r>
             <a:endParaRPr lang="en-US" sz="580" dirty="0"/>
           </a:p>
@@ -3799,7 +3799,7 @@
                 <a:ea typeface="Microsoft YaHei" pitchFamily="34" charset="-122"/>
                 <a:cs typeface="Microsoft YaHei" pitchFamily="34" charset="-120"/>
               </a:rPr>
-              <a:t>再拿重磅长协！龙蟠科技锁定最高 56.78 万吨磷酸铁锂供货订单 - </a:t>
+              <a:t>中国储能电池产能激增110%，全球市场也随之增长 - VOI.ID</a:t>
             </a:r>
             <a:endParaRPr lang="en-US" sz="680" dirty="0"/>
           </a:p>
@@ -3840,7 +3840,7 @@
                 <a:ea typeface="Aptos" pitchFamily="34" charset="-122"/>
                 <a:cs typeface="Aptos" pitchFamily="34" charset="-120"/>
               </a:rPr>
-              <a:t>https://news.google.com/rss/articles/CBMiU0FVX3lxTFBjaVMtV3B3d1J1TXF2NDVRc0czZE5KbWYxTmQxb19NRDZ2WTYxRUFzeFAxbThfRkpWSWFETlRUaDNnOUhMWkJFd2VLcDZvUDRxWGFv?oc=5</a:t>
+              <a:t>https://news.google.com/rss/articles/CBMiQkFVX3lxTE9QeV8xZG04REVrOV93OERzNGNlNFdmUmtfYkxzSWUtay1zX2UxWXZJQ2R3TFRmQ0c3eFhtcWp5M3hQd9IBQkFVX3lxTE9QeV8xZG04REVrOV93OERzNGNlNFdmUmtfYkxzSWUtay1zX2UxWXZJQ2R3TFRmQ0c3eFhtcWp5M3hQdw?oc=5</a:t>
             </a:r>
             <a:endParaRPr lang="en-US" sz="580" dirty="0"/>
           </a:p>
@@ -3986,7 +3986,7 @@
                 <a:ea typeface="Microsoft YaHei" pitchFamily="34" charset="-122"/>
                 <a:cs typeface="Microsoft YaHei" pitchFamily="34" charset="-120"/>
               </a:rPr>
-              <a:t>碳酸锂价格暴跌近90%，动力电池回收行业进入洗牌深水区 - 虎嗅网</a:t>
+              <a:t>明年7月起实施！电动摩托车锂电池强制性国标发布 - 温州新闻</a:t>
             </a:r>
             <a:endParaRPr lang="en-US" sz="680" dirty="0"/>
           </a:p>
@@ -4027,7 +4027,7 @@
                 <a:ea typeface="Aptos" pitchFamily="34" charset="-122"/>
                 <a:cs typeface="Aptos" pitchFamily="34" charset="-120"/>
               </a:rPr>
-              <a:t>https://news.google.com/rss/articles/CBMiX0FVX3lxTE9QVERsMUZQTld4RXN4cUNwMkx5c044dEJCcEJqanFrT1hod1hNdzhUVWxXUktSNXZjSW4xOEZ2OWI5N2FJQ1BWY05kMGw2elNWUVQwN0hOMThidzVRY3kw?oc=5</a:t>
+              <a:t>https://auto.66wz.com/system/2026/10/19/105856160.shtml</a:t>
             </a:r>
             <a:endParaRPr lang="en-US" sz="580" dirty="0"/>
           </a:p>
@@ -4173,7 +4173,7 @@
                 <a:ea typeface="Microsoft YaHei" pitchFamily="34" charset="-122"/>
                 <a:cs typeface="Microsoft YaHei" pitchFamily="34" charset="-120"/>
               </a:rPr>
-              <a:t>欧盟要求中国自限插混出口：让竞争者为政策失误买单 - 新浪网</a:t>
+              <a:t>专访中国工程院外籍院士张久俊：还要加大研发力度，使固态电池的优势发挥出</a:t>
             </a:r>
             <a:endParaRPr lang="en-US" sz="680" dirty="0"/>
           </a:p>
@@ -4214,7 +4214,7 @@
                 <a:ea typeface="Aptos" pitchFamily="34" charset="-122"/>
                 <a:cs typeface="Aptos" pitchFamily="34" charset="-120"/>
               </a:rPr>
-              <a:t>https://k.sina.com.cn/article_1628609891_61129d63001019rvw.html?</a:t>
+              <a:t>https://www.nbd.com.cn/articles/2026-10-18/4607644.html</a:t>
             </a:r>
             <a:endParaRPr lang="en-US" sz="580" dirty="0"/>
           </a:p>
@@ -4360,7 +4360,7 @@
                 <a:ea typeface="Microsoft YaHei" pitchFamily="34" charset="-122"/>
                 <a:cs typeface="Microsoft YaHei" pitchFamily="34" charset="-120"/>
               </a:rPr>
-              <a:t>吉利开卖电芯 - 新浪网</a:t>
+              <a:t>“任丘样本”给行业上了一课：全国首批锂+钠示范落地河北，大电芯为何看远</a:t>
             </a:r>
             <a:endParaRPr lang="en-US" sz="680" dirty="0"/>
           </a:p>
@@ -4401,7 +4401,7 @@
                 <a:ea typeface="Aptos" pitchFamily="34" charset="-122"/>
                 <a:cs typeface="Aptos" pitchFamily="34" charset="-120"/>
               </a:rPr>
-              <a:t>https://news.google.com/rss/articles/CBMif0FVX3lxTE5ETXppcDA5OTRKVTR0R0kxcEhpei01WmNhNnpvUGxSYmxVdGVSV3BHOGtscmlfN01mVUw1TjBHSWp3bFpiUmZOelFqbzNjR3o1V0ZOV0NlVjFkOEdfNEVnMzVOa3dVbFE2QzEzV3FoU1pLY0tHeFE0QThOREotNHc?oc=5</a:t>
+              <a:t>https://news.google.com/rss/articles/CBMiiAFBVV95cUxNV202anJVUnowYVNVcUxvaVRqdEJUQ2tCOTEyRnE4ZW1NR3N5MWUxV2JNcFFTRGlxeGg2OUJXYUc4dEhhXzctU1Jaa2Q2eDFyTTRBTS1RZ2RySTFYVUQ2NTczMmcxMEtmSGQwc3J1UDZTM2h4MUc4bEtTVXZ2S2x5cm5kZVZRc2lJ?oc=5</a:t>
             </a:r>
             <a:endParaRPr lang="en-US" sz="580" dirty="0"/>
           </a:p>
@@ -4547,7 +4547,7 @@
                 <a:ea typeface="Microsoft YaHei" pitchFamily="34" charset="-122"/>
                 <a:cs typeface="Microsoft YaHei" pitchFamily="34" charset="-120"/>
               </a:rPr>
-              <a:t>华盛锂电(688353):国浩律师（南京）事务所关于江苏华盛锂电材料股</a:t>
+              <a:t>商务部：12项光伏技术列入禁止、限制出口名单 - 国际新能源网</a:t>
             </a:r>
             <a:endParaRPr lang="en-US" sz="680" dirty="0"/>
           </a:p>
@@ -4588,7 +4588,7 @@
                 <a:ea typeface="Aptos" pitchFamily="34" charset="-122"/>
                 <a:cs typeface="Aptos" pitchFamily="34" charset="-120"/>
               </a:rPr>
-              <a:t>https://news.google.com/rss/articles/CBMiVkFVX3lxTE52dEZqMkQzMXlSOFpsd0Y0ZWlxdXp1anI1VjVVR3ZrcnBlWVBWNFhVemVEamk2YndSYWVHU3pPNldWcWtuZWxfZmh2a0I1MnYtOU5tYkJ3?oc=5</a:t>
+              <a:t>https://mnewenergy.in-en.com/html/newenergy-2457963.shtml</a:t>
             </a:r>
             <a:endParaRPr lang="en-US" sz="580" dirty="0"/>
           </a:p>
@@ -4693,7 +4693,7 @@
                 <a:ea typeface="Microsoft YaHei" pitchFamily="34" charset="-122"/>
                 <a:cs typeface="Microsoft YaHei" pitchFamily="34" charset="-120"/>
               </a:rPr>
-              <a:t>中国磷酸铁锂行业官方政策与</a:t>
+              <a:t>中国电池网</a:t>
             </a:r>
             <a:endParaRPr lang="en-US" sz="680" dirty="0"/>
           </a:p>
@@ -4734,7 +4734,7 @@
                 <a:ea typeface="Microsoft YaHei" pitchFamily="34" charset="-122"/>
                 <a:cs typeface="Microsoft YaHei" pitchFamily="34" charset="-120"/>
               </a:rPr>
-              <a:t>开盘：三大指数集体低开 电池板块跌幅居前 - 新浪财经</a:t>
+              <a:t>【正极材料周报】全球第三大动力电池巨头锁单碳酸锂！万华化学再扩磷酸铁锂</a:t>
             </a:r>
             <a:endParaRPr lang="en-US" sz="680" dirty="0"/>
           </a:p>
@@ -4775,7 +4775,7 @@
                 <a:ea typeface="Aptos" pitchFamily="34" charset="-122"/>
                 <a:cs typeface="Aptos" pitchFamily="34" charset="-120"/>
               </a:rPr>
-              <a:t>https://finance.sina.cn/stock/dpps/2026-10-12/detail-iniuxmtt8586938.d.html</a:t>
+              <a:t>https://www.itdcw.com/news/dczk/101215T3H026.html</a:t>
             </a:r>
             <a:endParaRPr lang="en-US" sz="580" dirty="0"/>
           </a:p>
@@ -4880,7 +4880,7 @@
                 <a:ea typeface="Microsoft YaHei" pitchFamily="34" charset="-122"/>
                 <a:cs typeface="Microsoft YaHei" pitchFamily="34" charset="-120"/>
               </a:rPr>
-              <a:t>中国磷酸铁锂行业官方政策与</a:t>
+              <a:t>中国电池网</a:t>
             </a:r>
             <a:endParaRPr lang="en-US" sz="680" dirty="0"/>
           </a:p>
@@ -4921,7 +4921,7 @@
                 <a:ea typeface="Microsoft YaHei" pitchFamily="34" charset="-122"/>
                 <a:cs typeface="Microsoft YaHei" pitchFamily="34" charset="-120"/>
               </a:rPr>
-              <a:t>我国出台19项举措推进新质生产力发展；龙源电力9月发电量同比增长超7%</a:t>
+              <a:t>我国研发新型无钴高镍正极材料 显著提升快充效率与循环寿命_电池网</a:t>
             </a:r>
             <a:endParaRPr lang="en-US" sz="680" dirty="0"/>
           </a:p>
@@ -4962,7 +4962,7 @@
                 <a:ea typeface="Aptos" pitchFamily="34" charset="-122"/>
                 <a:cs typeface="Aptos" pitchFamily="34" charset="-120"/>
               </a:rPr>
-              <a:t>https://www.mrjjxw.com/articles/2026-10-11/4601022.html</a:t>
+              <a:t>https://www.itdcw.com/news/focus/100415Rb2026.html</a:t>
             </a:r>
             <a:endParaRPr lang="en-US" sz="580" dirty="0"/>
           </a:p>
@@ -5067,7 +5067,7 @@
                 <a:ea typeface="Microsoft YaHei" pitchFamily="34" charset="-122"/>
                 <a:cs typeface="Microsoft YaHei" pitchFamily="34" charset="-120"/>
               </a:rPr>
-              <a:t>中国磷酸铁锂行业官方政策与</a:t>
+              <a:t>中国电池网</a:t>
             </a:r>
             <a:endParaRPr lang="en-US" sz="680" dirty="0"/>
           </a:p>
@@ -5108,7 +5108,7 @@
                 <a:ea typeface="Microsoft YaHei" pitchFamily="34" charset="-122"/>
                 <a:cs typeface="Microsoft YaHei" pitchFamily="34" charset="-120"/>
               </a:rPr>
-              <a:t>嘴上支持对华加税，身体却很诚实，法国电池谷为何争抢中国企业？ - 新浪网</a:t>
+              <a:t>正力新能上半年动力电池收入45.77亿元 储能电池收入增长近8倍_电池网</a:t>
             </a:r>
             <a:endParaRPr lang="en-US" sz="680" dirty="0"/>
           </a:p>
@@ -5149,7 +5149,7 @@
                 <a:ea typeface="Aptos" pitchFamily="34" charset="-122"/>
                 <a:cs typeface="Aptos" pitchFamily="34" charset="-120"/>
               </a:rPr>
-              <a:t>https://k.sina.com.cn/article_7879996580_1d5af34a402001w6du.html</a:t>
+              <a:t>https://www.itdcw.com/news/qiye/0Z115L232026.html</a:t>
             </a:r>
             <a:endParaRPr lang="en-US" sz="580" dirty="0"/>
           </a:p>
@@ -5295,7 +5295,7 @@
                 <a:ea typeface="Microsoft YaHei" pitchFamily="34" charset="-122"/>
                 <a:cs typeface="Microsoft YaHei" pitchFamily="34" charset="-120"/>
               </a:rPr>
-              <a:t>中国电池网</a:t>
+              <a:t>同体积容量击穿行业纪录！多氟多两款大圆柱磷酸铁锂换电方案发布_电池网</a:t>
             </a:r>
             <a:endParaRPr lang="en-US" sz="680" dirty="0"/>
           </a:p>
@@ -5336,7 +5336,7 @@
                 <a:ea typeface="Aptos" pitchFamily="34" charset="-122"/>
                 <a:cs typeface="Aptos" pitchFamily="34" charset="-120"/>
               </a:rPr>
-              <a:t>https://www.itdcw.com/</a:t>
+              <a:t>https://www.itdcw.com/news/chanpinxinwen/06251562M2026.html</a:t>
             </a:r>
             <a:endParaRPr lang="en-US" sz="580" dirty="0"/>
           </a:p>
@@ -5964,7 +5964,7 @@
                 <a:ea typeface="Aptos" pitchFamily="34" charset="-122"/>
                 <a:cs typeface="Aptos" pitchFamily="34" charset="-120"/>
               </a:rPr>
-              <a:t>2026-10-12</a:t>
+              <a:t>2026-10-19</a:t>
             </a:r>
             <a:endParaRPr lang="en-US" sz="800" dirty="0"/>
           </a:p>
@@ -6903,7 +6903,7 @@
                 <a:ea typeface="Microsoft YaHei" pitchFamily="34" charset="-122"/>
                 <a:cs typeface="Microsoft YaHei" pitchFamily="34" charset="-120"/>
               </a:rPr>
-              <a:t>界面新闻</a:t>
+              <a:t>锂电产业链周记 | 前三季度国内动力和储能电池出口量增超50% 赛力斯</a:t>
             </a:r>
             <a:endParaRPr lang="en-US" sz="680" dirty="0"/>
           </a:p>
@@ -6944,7 +6944,7 @@
                 <a:ea typeface="Aptos" pitchFamily="34" charset="-122"/>
                 <a:cs typeface="Aptos" pitchFamily="34" charset="-120"/>
               </a:rPr>
-              <a:t>https://www.jiemian.com/</a:t>
+              <a:t>https://www.jiemian.com/article/15201129.html</a:t>
             </a:r>
             <a:endParaRPr lang="en-US" sz="580" dirty="0"/>
           </a:p>
@@ -7464,7 +7464,7 @@
                 <a:ea typeface="Microsoft YaHei" pitchFamily="34" charset="-122"/>
                 <a:cs typeface="Microsoft YaHei" pitchFamily="34" charset="-120"/>
               </a:rPr>
-              <a:t>工业和信息化部政策文件库</a:t>
+              <a:t>公开征求对光伏制造行业规范条件及公告管理办法（征求意见稿）的意见</a:t>
             </a:r>
             <a:endParaRPr lang="en-US" sz="680" dirty="0"/>
           </a:p>
@@ -7505,7 +7505,7 @@
                 <a:ea typeface="Aptos" pitchFamily="34" charset="-122"/>
                 <a:cs typeface="Aptos" pitchFamily="34" charset="-120"/>
               </a:rPr>
-              <a:t>https://www.miit.gov.cn/search/zcwjk.html?websiteid=110000000000000&amp;pg=&amp;p=&amp;tpl=14&amp;category=183&amp;q=</a:t>
+              <a:t>https://www.miit.gov.cn/gzcy/yjzj/art/2026/art_fcf91636ca1c480b9382f48f6fe22f23.html</a:t>
             </a:r>
             <a:endParaRPr lang="en-US" sz="580" dirty="0"/>
           </a:p>
@@ -7651,7 +7651,7 @@
                 <a:ea typeface="Microsoft YaHei" pitchFamily="34" charset="-122"/>
                 <a:cs typeface="Microsoft YaHei" pitchFamily="34" charset="-120"/>
               </a:rPr>
-              <a:t>宁夏通信管理局举办2026年国家网络安全宣传周“电信日”政策宣贯培训会</a:t>
+              <a:t>工业和信息化部政策文件库</a:t>
             </a:r>
             <a:endParaRPr lang="en-US" sz="680" dirty="0"/>
           </a:p>
@@ -7692,7 +7692,7 @@
                 <a:ea typeface="Aptos" pitchFamily="34" charset="-122"/>
                 <a:cs typeface="Aptos" pitchFamily="34" charset="-120"/>
               </a:rPr>
-              <a:t>https://www.miit.gov.cn/xwfb/gxdt/dfdt/art/2026/art_e6cc05a7b861405bbd9639e819a13567.html</a:t>
+              <a:t>https://www.miit.gov.cn/search/zcwjk.html?websiteid=110000000000000&amp;pg=&amp;p=&amp;tpl=14&amp;category=183&amp;q=</a:t>
             </a:r>
             <a:endParaRPr lang="en-US" sz="580" dirty="0"/>
           </a:p>
@@ -8881,7 +8881,7 @@
                 <a:ea typeface="Aptos" pitchFamily="34" charset="-122"/>
                 <a:cs typeface="Aptos" pitchFamily="34" charset="-120"/>
               </a:rPr>
-              <a:t>2026-10-12</a:t>
+              <a:t>2026-10-19</a:t>
             </a:r>
             <a:endParaRPr lang="en-US" sz="800" dirty="0"/>
           </a:p>
@@ -9085,7 +9085,7 @@
                 <a:ea typeface="Microsoft YaHei" pitchFamily="34" charset="-122"/>
                 <a:cs typeface="Microsoft YaHei" pitchFamily="34" charset="-120"/>
               </a:rPr>
-              <a:t>今日磷酸铁锂行业信号密集：湖南裕能20万吨纳米磷酸铁锂项目落地，龙蟠科技锁定最高56.78万吨长协，供给端与需求端同步扩张；碳酸锂价格暴跌近9</a:t>
+              <a:t>今日磷酸铁锂行业信号集中在技术路线与产能扩张：宝马第六代动力电池量产，强调制造韧性，可能加速高端车型对磷酸铁锂体系的结构性采用；中国储能电池产</a:t>
             </a:r>
             <a:endParaRPr lang="en-US" sz="940" dirty="0"/>
           </a:p>
@@ -9281,7 +9281,7 @@
                 <a:ea typeface="Microsoft YaHei" pitchFamily="34" charset="-122"/>
                 <a:cs typeface="Microsoft YaHei" pitchFamily="34" charset="-120"/>
               </a:rPr>
-              <a:t>湖南裕能加码20万吨纳米磷酸铁锂项目，龙蟠科技锁定最高56.78万吨长协，供给与需求同步扩张；碳酸锂价格暴跌近90%致回收行业洗牌，成本端压力凸显；欧盟要求中国自限插混出口，</a:t>
+              <a:t>宝马第六代动力电池量产，强调制造韧性，可能推动磷酸铁锂在高端车型渗透；中国储能电池产能激增110%，全球市场同步增长，储能端对磷酸铁锂需求形成支撑；电动摩托车锂电池强制性国标</a:t>
             </a:r>
             <a:endParaRPr lang="en-US" sz="920" dirty="0"/>
           </a:p>
@@ -9322,7 +9322,7 @@
                 <a:ea typeface="Aptos" pitchFamily="34" charset="-122"/>
                 <a:cs typeface="Aptos" pitchFamily="34" charset="-120"/>
               </a:rPr>
-              <a:t>[1][2][3][4]</a:t>
+              <a:t>[1][2][3]</a:t>
             </a:r>
             <a:endParaRPr lang="en-US" sz="750" dirty="0"/>
           </a:p>
@@ -9518,7 +9518,7 @@
                 <a:ea typeface="Microsoft YaHei" pitchFamily="34" charset="-122"/>
                 <a:cs typeface="Microsoft YaHei" pitchFamily="34" charset="-120"/>
               </a:rPr>
-              <a:t>湖南裕能投资20亿元加码20万吨纳米磷酸铁锂项目，指向纳米化技术路线受重视；吉利开卖电芯，可能推动磷酸铁锂在车企自供体系中的渗透。纳米磷酸铁锂可提升能量密度和倍率性能，但成本</a:t>
+              <a:t>宝马第六代动力电池量产，强调制造韧性，可能加速高端车型对磷酸铁锂体系的结构性采用；固态电池专家提出2030年实用化量产目标，短期对磷酸铁锂替代威胁有限，但长期技术路线竞争需持</a:t>
             </a:r>
             <a:endParaRPr lang="en-US" sz="920" dirty="0"/>
           </a:p>
@@ -9559,7 +9559,7 @@
                 <a:ea typeface="Aptos" pitchFamily="34" charset="-122"/>
                 <a:cs typeface="Aptos" pitchFamily="34" charset="-120"/>
               </a:rPr>
-              <a:t>[1][5]</a:t>
+              <a:t>[1][4]</a:t>
             </a:r>
             <a:endParaRPr lang="en-US" sz="750" dirty="0"/>
           </a:p>
@@ -9704,7 +9704,7 @@
         <p:spPr>
           <a:xfrm>
             <a:off x="1188720" y="4005072"/>
-            <a:ext cx="2194560" cy="54864"/>
+            <a:ext cx="1316736" cy="54864"/>
           </a:xfrm>
           <a:prstGeom prst="rect">
             <a:avLst/>
@@ -9755,7 +9755,7 @@
                 <a:ea typeface="Microsoft YaHei" pitchFamily="34" charset="-122"/>
                 <a:cs typeface="Microsoft YaHei" pitchFamily="34" charset="-120"/>
               </a:rPr>
-              <a:t>龙蟠科技锁定最高56.78万吨磷酸铁锂供货长协，湖南裕能20万吨项目落地，产能与订单同步扩张；华盛锂电差异化权益分派法律意见书发布，资本运作活跃。长协锁定反映下游对供应稳定的</a:t>
+              <a:t>中国储能电池产能激增110%，全球市场同步增长，显示储能端对磷酸铁锂需求形成支撑；全国首批锂+钠示范落地河北，大电芯路线推进，可能加剧储能电池技术路线竞争，磷酸铁锂需关注在储</a:t>
             </a:r>
             <a:endParaRPr lang="en-US" sz="920" dirty="0"/>
           </a:p>
@@ -9796,7 +9796,7 @@
                 <a:ea typeface="Aptos" pitchFamily="34" charset="-122"/>
                 <a:cs typeface="Aptos" pitchFamily="34" charset="-120"/>
               </a:rPr>
-              <a:t>[2][1][6]</a:t>
+              <a:t>[2][5]</a:t>
             </a:r>
             <a:endParaRPr lang="en-US" sz="750" dirty="0"/>
           </a:p>
@@ -9992,7 +9992,7 @@
                 <a:ea typeface="Microsoft YaHei" pitchFamily="34" charset="-122"/>
                 <a:cs typeface="Microsoft YaHei" pitchFamily="34" charset="-120"/>
               </a:rPr>
-              <a:t>碳酸锂价格暴跌近90%，动力电池回收行业进入洗牌深水区；电池板块跌幅居前，反映价格下行压力。成本端坍塌削弱磷酸铁锂价格支撑，回收企业退出可能加速，但上游材料企业盈利分化。</a:t>
+              <a:t>储能电池产能激增110%可能加剧行业供给竞争，对磷酸铁锂正极材料价格形成压制；电动摩托车锂电池强制性国标发布，可能提高小动力电池合规成本，推动低端产能出清，短期对磷酸铁锂价格</a:t>
             </a:r>
             <a:endParaRPr lang="en-US" sz="920" dirty="0"/>
           </a:p>
@@ -10033,7 +10033,7 @@
                 <a:ea typeface="Aptos" pitchFamily="34" charset="-122"/>
                 <a:cs typeface="Aptos" pitchFamily="34" charset="-120"/>
               </a:rPr>
-              <a:t>[3][7]</a:t>
+              <a:t>[2][3]</a:t>
             </a:r>
             <a:endParaRPr lang="en-US" sz="750" dirty="0"/>
           </a:p>
@@ -10138,7 +10138,7 @@
                 <a:ea typeface="Microsoft YaHei" pitchFamily="34" charset="-122"/>
                 <a:cs typeface="Microsoft YaHei" pitchFamily="34" charset="-120"/>
               </a:rPr>
-              <a:t>今日磷酸铁锂行业信号密集：湖南裕能20万吨纳米磷酸铁锂项目落地，龙蟠科技锁定最高56.78万吨长协，供给端与需求端同步扩张；碳酸锂价格暴跌近9</a:t>
+              <a:t>今日磷酸铁锂行业信号集中在技术路线与产能扩张：宝马第六代动力电池量产，强调制造韧性，可能加速高端车型对磷酸铁锂体系的结构性采用；中国储能电池产</a:t>
             </a:r>
             <a:endParaRPr lang="en-US" sz="1020" dirty="0"/>
           </a:p>
@@ -10287,7 +10287,7 @@
                 <a:ea typeface="Aptos" pitchFamily="34" charset="-122"/>
                 <a:cs typeface="Aptos" pitchFamily="34" charset="-120"/>
               </a:rPr>
-              <a:t>2026-10-12</a:t>
+              <a:t>2026-10-19</a:t>
             </a:r>
             <a:endParaRPr lang="en-US" sz="800" dirty="0"/>
           </a:p>
@@ -10493,7 +10493,7 @@
                 <a:ea typeface="Microsoft YaHei" pitchFamily="34" charset="-122"/>
                 <a:cs typeface="Microsoft YaHei" pitchFamily="34" charset="-120"/>
               </a:rPr>
-              <a:t>4 条公开来源交叉验证｜事实、影响与后续研判</a:t>
+              <a:t>3 条公开来源交叉验证｜事实、影响与后续研判</a:t>
             </a:r>
             <a:endParaRPr lang="en-US" sz="860" dirty="0"/>
           </a:p>
@@ -10602,7 +10602,7 @@
                 <a:ea typeface="Microsoft YaHei" pitchFamily="34" charset="-122"/>
                 <a:cs typeface="Microsoft YaHei" pitchFamily="34" charset="-120"/>
               </a:rPr>
-              <a:t>湖南裕能加码20万吨纳米磷酸铁锂项目，龙蟠科技锁定最高56.78万吨长协，供给与需求同步扩张；碳酸锂价格暴跌近90%致回收行业洗牌，成本端压力凸显；欧盟要求中国自限插混出口，贸易政策风险升温。行业呈现产能扩张与价格下行并存格局，企业盈利分化可能加剧。 [1][2][3][4]</a:t>
+              <a:t>宝马第六代动力电池量产，强调制造韧性，可能推动磷酸铁锂在高端车型渗透；中国储能电池产能激增110%，全球市场同步增长，储能端对磷酸铁锂需求形成支撑；电动摩托车锂电池强制性国标发布，明年7月实施，将提高小动力电池安全门槛，利好合规产能。 [1][2][3]</a:t>
             </a:r>
             <a:endParaRPr lang="en-US" sz="960" dirty="0"/>
           </a:p>
@@ -10643,7 +10643,7 @@
                 <a:ea typeface="Aptos" pitchFamily="34" charset="-122"/>
                 <a:cs typeface="Aptos" pitchFamily="34" charset="-120"/>
               </a:rPr>
-              <a:t>依据：[1][2][3][4]</a:t>
+              <a:t>依据：[1][2][3]</a:t>
             </a:r>
             <a:endParaRPr lang="en-US" sz="740" dirty="0"/>
           </a:p>
@@ -10752,7 +10752,7 @@
                 <a:ea typeface="Microsoft YaHei" pitchFamily="34" charset="-122"/>
                 <a:cs typeface="Microsoft YaHei" pitchFamily="34" charset="-120"/>
               </a:rPr>
-              <a:t>湖南裕能扩产与龙蟠科技长协反映磷酸铁锂需求预期仍强，但碳酸锂价格暴跌近90%削弱成本支撑，回收行业洗牌可能向上游传导；欧盟自限出口要求若落地，将影响插混车型对磷酸铁锂的需求。需验证：新项目投产时间、长协实际执行量、欧盟政策具体条款。</a:t>
+              <a:t>宝马量产信息与储能产能激增共同指向磷酸铁锂需求端扩张，但前者侧重技术路线验证，后者侧重产能供给；电摩国标则从合规端抬升小动力电池门槛。三者叠加可能加剧行业分化：具备技术储备和合规产能的企业受益，低端产能面临出清。需验证宝马第六代电池是否明确采用磷酸铁锂体系，以及储能产能激增是否伴随实际订单落地。</a:t>
             </a:r>
             <a:endParaRPr lang="en-US" sz="960" dirty="0"/>
           </a:p>
@@ -10886,7 +10886,7 @@
                 <a:ea typeface="Microsoft YaHei" pitchFamily="34" charset="-122"/>
                 <a:cs typeface="Microsoft YaHei" pitchFamily="34" charset="-120"/>
               </a:rPr>
-              <a:t>若碳酸锂价格持续低位，则磷酸铁锂成本支撑进一步弱化，回收企业退出可能加速，行业集中度提升；若欧盟自限出口政策落地，则插混出口受限可能拖累磷酸铁锂需求，需跟踪碳酸锂现货价、欧盟政策细则及龙头开工率。</a:t>
+              <a:t>若宝马第六代电池明确采用磷酸铁锂体系并逐步放量，则可能带动高端车型对磷酸铁锂的认可度提升，跟踪指标包括宝马官方技术参数披露和配套电池供应商名单；若储能产能激增伴随开工率维持高位，则可能支撑磷酸铁锂正极材料需求，跟踪指标为储能电池月度产量和出口数据；若电摩国标执行严格，则可能加速小动力电池行业集中度提升，跟踪指标为合规电池企业认证进度。证据边界限于公开报道，未覆盖企业实际订单和产能利用率。</a:t>
             </a:r>
             <a:endParaRPr lang="en-US" sz="960" dirty="0"/>
           </a:p>
@@ -10969,11 +10969,11 @@
         <p:spPr>
           <a:xfrm>
             <a:off x="7772400" y="1993392"/>
-            <a:ext cx="2560320" cy="786384"/>
+            <a:ext cx="2560320" cy="1389888"/>
           </a:xfrm>
           <a:prstGeom prst="roundRect">
             <a:avLst>
-              <a:gd name="adj" fmla="val 4651"/>
+              <a:gd name="adj" fmla="val 2632"/>
             </a:avLst>
           </a:prstGeom>
           <a:solidFill>
@@ -11014,7 +11014,7 @@
               <a:buNone/>
             </a:pPr>
             <a:r>
-              <a:rPr lang="en-US" sz="1600" b="1" dirty="0">
+              <a:rPr lang="en-US" sz="2100" b="1" dirty="0">
                 <a:solidFill>
                   <a:srgbClr val="487052"/>
                 </a:solidFill>
@@ -11022,9 +11022,9 @@
                 <a:ea typeface="Aptos" pitchFamily="34" charset="-122"/>
                 <a:cs typeface="Aptos" pitchFamily="34" charset="-120"/>
               </a:rPr>
-              <a:t>90%</a:t>
-            </a:r>
-            <a:endParaRPr lang="en-US" sz="1600" dirty="0"/>
+              <a:t>10%</a:t>
+            </a:r>
+            <a:endParaRPr lang="en-US" sz="2100" dirty="0"/>
           </a:p>
         </p:txBody>
       </p:sp>
@@ -11063,7 +11063,7 @@
                 <a:ea typeface="Microsoft YaHei" pitchFamily="34" charset="-122"/>
                 <a:cs typeface="Microsoft YaHei" pitchFamily="34" charset="-120"/>
               </a:rPr>
-              <a:t>致回收行业洗牌</a:t>
+              <a:t>中国储能电池产能激增1</a:t>
             </a:r>
             <a:endParaRPr lang="en-US" sz="820" dirty="0"/>
           </a:p>
@@ -11078,7 +11078,7 @@
         <p:spPr>
           <a:xfrm>
             <a:off x="7918704" y="2578608"/>
-            <a:ext cx="2176272" cy="201168"/>
+            <a:ext cx="2176272" cy="512064"/>
           </a:xfrm>
           <a:prstGeom prst="rect">
             <a:avLst/>
@@ -11104,7 +11104,7 @@
                 <a:ea typeface="Microsoft YaHei" pitchFamily="34" charset="-122"/>
                 <a:cs typeface="Microsoft YaHei" pitchFamily="34" charset="-120"/>
               </a:rPr>
-              <a:t>公开信息：碳酸锂价格暴跌近90%致回收行业洗牌，成本端压力凸显</a:t>
+              <a:t>公开信息：中国储能电池产能激增110%，全球市场同步增长，储能端对磷酸铁锂需求形成支撑</a:t>
             </a:r>
             <a:endParaRPr lang="en-US" sz="840" dirty="0"/>
           </a:p>
@@ -11112,157 +11112,7 @@
       </p:sp>
       <p:sp>
         <p:nvSpPr>
-          <p:cNvPr id="28" name="Shape 26"/>
-          <p:cNvSpPr/>
-          <p:nvPr/>
-        </p:nvSpPr>
-        <p:spPr>
-          <a:xfrm>
-            <a:off x="7772400" y="2926080"/>
-            <a:ext cx="2560320" cy="786384"/>
-          </a:xfrm>
-          <a:prstGeom prst="roundRect">
-            <a:avLst>
-              <a:gd name="adj" fmla="val 4651"/>
-            </a:avLst>
-          </a:prstGeom>
-          <a:solidFill>
-            <a:srgbClr val="FFFFFF"/>
-          </a:solidFill>
-          <a:ln w="7620">
-            <a:solidFill>
-              <a:srgbClr val="DADADA"/>
-            </a:solidFill>
-            <a:prstDash val="solid"/>
-          </a:ln>
-        </p:spPr>
-      </p:sp>
-      <p:sp>
-        <p:nvSpPr>
-          <p:cNvPr id="29" name="Text 27"/>
-          <p:cNvSpPr/>
-          <p:nvPr/>
-        </p:nvSpPr>
-        <p:spPr>
-          <a:xfrm>
-            <a:off x="7918704" y="3035808"/>
-            <a:ext cx="822960" cy="384048"/>
-          </a:xfrm>
-          <a:prstGeom prst="rect">
-            <a:avLst/>
-          </a:prstGeom>
-          <a:noFill/>
-          <a:ln/>
-        </p:spPr>
-        <p:txBody>
-          <a:bodyPr wrap="square" lIns="0" tIns="0" rIns="0" bIns="0" rtlCol="0" anchor="ctr">
-            <a:normAutofit/>
-          </a:bodyPr>
-          <a:lstStyle/>
-          <a:p>
-            <a:pPr indent="0" marL="0">
-              <a:buNone/>
-            </a:pPr>
-            <a:r>
-              <a:rPr lang="en-US" sz="1600" b="1" dirty="0">
-                <a:solidFill>
-                  <a:srgbClr val="487052"/>
-                </a:solidFill>
-                <a:latin typeface="Aptos" pitchFamily="34" charset="0"/>
-                <a:ea typeface="Aptos" pitchFamily="34" charset="-122"/>
-                <a:cs typeface="Aptos" pitchFamily="34" charset="-120"/>
-              </a:rPr>
-              <a:t>90%</a:t>
-            </a:r>
-            <a:endParaRPr lang="en-US" sz="1600" dirty="0"/>
-          </a:p>
-        </p:txBody>
-      </p:sp>
-      <p:sp>
-        <p:nvSpPr>
-          <p:cNvPr id="30" name="Text 28"/>
-          <p:cNvSpPr/>
-          <p:nvPr/>
-        </p:nvSpPr>
-        <p:spPr>
-          <a:xfrm>
-            <a:off x="8759952" y="3099816"/>
-            <a:ext cx="1371600" cy="201168"/>
-          </a:xfrm>
-          <a:prstGeom prst="rect">
-            <a:avLst/>
-          </a:prstGeom>
-          <a:noFill/>
-          <a:ln/>
-        </p:spPr>
-        <p:txBody>
-          <a:bodyPr wrap="square" lIns="0" tIns="0" rIns="0" bIns="0" rtlCol="0" anchor="ctr">
-            <a:normAutofit/>
-          </a:bodyPr>
-          <a:lstStyle/>
-          <a:p>
-            <a:pPr indent="0" marL="0">
-              <a:buNone/>
-            </a:pPr>
-            <a:r>
-              <a:rPr lang="en-US" sz="820" b="1" dirty="0">
-                <a:solidFill>
-                  <a:srgbClr val="121212"/>
-                </a:solidFill>
-                <a:latin typeface="Microsoft YaHei" pitchFamily="34" charset="0"/>
-                <a:ea typeface="Microsoft YaHei" pitchFamily="34" charset="-122"/>
-                <a:cs typeface="Microsoft YaHei" pitchFamily="34" charset="-120"/>
-              </a:rPr>
-              <a:t>削弱成本支撑</a:t>
-            </a:r>
-            <a:endParaRPr lang="en-US" sz="820" dirty="0"/>
-          </a:p>
-        </p:txBody>
-      </p:sp>
-      <p:sp>
-        <p:nvSpPr>
-          <p:cNvPr id="31" name="Text 29"/>
-          <p:cNvSpPr/>
-          <p:nvPr/>
-        </p:nvSpPr>
-        <p:spPr>
-          <a:xfrm>
-            <a:off x="7918704" y="3511296"/>
-            <a:ext cx="2176272" cy="201168"/>
-          </a:xfrm>
-          <a:prstGeom prst="rect">
-            <a:avLst/>
-          </a:prstGeom>
-          <a:noFill/>
-          <a:ln/>
-        </p:spPr>
-        <p:txBody>
-          <a:bodyPr wrap="square" lIns="0" tIns="0" rIns="0" bIns="0" rtlCol="0" anchor="t">
-            <a:normAutofit/>
-          </a:bodyPr>
-          <a:lstStyle/>
-          <a:p>
-            <a:pPr indent="0" marL="0">
-              <a:buNone/>
-            </a:pPr>
-            <a:r>
-              <a:rPr lang="en-US" sz="840" dirty="0">
-                <a:solidFill>
-                  <a:srgbClr val="121212"/>
-                </a:solidFill>
-                <a:latin typeface="Microsoft YaHei" pitchFamily="34" charset="0"/>
-                <a:ea typeface="Microsoft YaHei" pitchFamily="34" charset="-122"/>
-                <a:cs typeface="Microsoft YaHei" pitchFamily="34" charset="-120"/>
-              </a:rPr>
-              <a:t>公开信息：[1][2][3][4] 湖南裕能扩产与龙蟠科技长协反映磷</a:t>
-            </a:r>
-            <a:endParaRPr lang="en-US" sz="840" dirty="0"/>
-          </a:p>
-        </p:txBody>
-      </p:sp>
-      <p:sp>
-        <p:nvSpPr>
-          <p:cNvPr id="32" name="Text 30"/>
+          <p:cNvPr id="28" name="Text 26"/>
           <p:cNvSpPr/>
           <p:nvPr/>
         </p:nvSpPr>
@@ -11303,7 +11153,7 @@
       </p:sp>
       <p:sp>
         <p:nvSpPr>
-          <p:cNvPr id="33" name="Shape 31"/>
+          <p:cNvPr id="29" name="Shape 27"/>
           <p:cNvSpPr/>
           <p:nvPr/>
         </p:nvSpPr>
@@ -11328,7 +11178,7 @@
       </p:sp>
       <p:sp>
         <p:nvSpPr>
-          <p:cNvPr id="34" name="Text 32"/>
+          <p:cNvPr id="30" name="Text 28"/>
           <p:cNvSpPr/>
           <p:nvPr/>
         </p:nvSpPr>
@@ -11367,7 +11217,7 @@
       </p:sp>
       <p:sp>
         <p:nvSpPr>
-          <p:cNvPr id="35" name="Text 33"/>
+          <p:cNvPr id="31" name="Text 29"/>
           <p:cNvSpPr/>
           <p:nvPr/>
         </p:nvSpPr>
@@ -11400,7 +11250,7 @@
                 <a:ea typeface="Microsoft YaHei" pitchFamily="34" charset="-122"/>
                 <a:cs typeface="Microsoft YaHei" pitchFamily="34" charset="-120"/>
               </a:rPr>
-              <a:t>若碳酸锂价格持续低位，则磷酸铁锂成本支撑进一步弱化，回收企业退出可能加速，行业集中度提升</a:t>
+              <a:t>若宝马第六代电池明确采用磷酸铁锂体系并逐步放量，则可能带动高端车型对磷酸铁锂的认可度提升，跟踪指标包括宝马官方技术参数披露和配套电池供应商名单</a:t>
             </a:r>
             <a:endParaRPr lang="en-US" sz="1020" dirty="0"/>
           </a:p>
@@ -11549,7 +11399,7 @@
                 <a:ea typeface="Aptos" pitchFamily="34" charset="-122"/>
                 <a:cs typeface="Aptos" pitchFamily="34" charset="-120"/>
               </a:rPr>
-              <a:t>2026-10-12</a:t>
+              <a:t>2026-10-19</a:t>
             </a:r>
             <a:endParaRPr lang="en-US" sz="800" dirty="0"/>
           </a:p>
@@ -11864,7 +11714,7 @@
                 <a:ea typeface="Microsoft YaHei" pitchFamily="34" charset="-122"/>
                 <a:cs typeface="Microsoft YaHei" pitchFamily="34" charset="-120"/>
               </a:rPr>
-              <a:t>湖南裕能投资20亿元加码20万吨纳米磷酸铁锂项目，指向纳米化技术路线受重视；吉利开卖电芯，可能推动磷酸铁锂在车企自供体系中的渗透。纳米磷酸铁锂可提升能量密度和倍率性能，但成本控制仍是关键。 [1][5]</a:t>
+              <a:t>宝马第六代动力电池量产，强调制造韧性，可能加速高端车型对磷酸铁锂体系的结构性采用；固态电池专家提出2030年实用化量产目标，短期对磷酸铁锂替代威胁有限，但长期技术路线竞争需持续跟踪。 [1][4]</a:t>
             </a:r>
             <a:endParaRPr lang="en-US" sz="960" dirty="0"/>
           </a:p>
@@ -11905,7 +11755,7 @@
                 <a:ea typeface="Aptos" pitchFamily="34" charset="-122"/>
                 <a:cs typeface="Aptos" pitchFamily="34" charset="-120"/>
               </a:rPr>
-              <a:t>依据：[1][5]</a:t>
+              <a:t>依据：[1][4]</a:t>
             </a:r>
             <a:endParaRPr lang="en-US" sz="740" dirty="0"/>
           </a:p>
@@ -12014,7 +11864,7 @@
                 <a:ea typeface="Microsoft YaHei" pitchFamily="34" charset="-122"/>
                 <a:cs typeface="Microsoft YaHei" pitchFamily="34" charset="-120"/>
               </a:rPr>
-              <a:t>湖南裕能扩产纳米磷酸铁锂，反映行业向高性能产品升级；吉利开卖电芯表明车企垂直整合加速，可能改变磷酸铁锂采购格局。需验证：纳米磷酸铁锂量产成本、吉利电芯外供规模及技术参数。</a:t>
+              <a:t>宝马量产信息来自搜狐网，固态电池观点来自每日经济新闻专访，两者均涉及动力电池技术路线。宝马量产若采用磷酸铁锂体系，将强化磷酸铁锂在中高端车型的渗透逻辑；固态电池量产目标在2030年，短期不构成替代压力，但提醒行业关注技术迭代风险。需验证宝马第六代电池的具体化学体系，以及固态电池量产时间表是否有企业级进展。</a:t>
             </a:r>
             <a:endParaRPr lang="en-US" sz="960" dirty="0"/>
           </a:p>
@@ -12148,7 +11998,7 @@
                 <a:ea typeface="Microsoft YaHei" pitchFamily="34" charset="-122"/>
                 <a:cs typeface="Microsoft YaHei" pitchFamily="34" charset="-120"/>
               </a:rPr>
-              <a:t>若纳米磷酸铁锂量产成本下降，则高端车型渗透率可能提升；若吉利电芯外供规模扩大，则第三方磷酸铁锂供应商份额可能受挤压。跟踪指标：纳米产品出货占比、吉利电芯客户名单。</a:t>
+              <a:t>若宝马第六代电池确认采用磷酸铁锂或磷酸铁锰锂体系，则可能提升磷酸铁锂在高端乘用车市场的份额，跟踪指标为宝马新车型电池供应商公告和材料体系披露；若固态电池在2030年前实现小批量装车，则可能对磷酸铁锂长期需求预期形成扰动，跟踪指标为固态电池装车验证进度和成本下降曲线。证据边界限于公开报道，未覆盖宝马电池采购合同细节。</a:t>
             </a:r>
             <a:endParaRPr lang="en-US" sz="960" dirty="0"/>
           </a:p>
@@ -12216,7 +12066,7 @@
                 <a:ea typeface="Microsoft YaHei" pitchFamily="34" charset="-122"/>
                 <a:cs typeface="Microsoft YaHei" pitchFamily="34" charset="-120"/>
               </a:rPr>
-              <a:t>路线图</a:t>
+              <a:t>对比矩阵</a:t>
             </a:r>
             <a:endParaRPr lang="en-US" sz="1200" dirty="0"/>
           </a:p>
@@ -12230,18 +12080,89 @@
         </p:nvSpPr>
         <p:spPr>
           <a:xfrm>
-            <a:off x="7754112" y="2249424"/>
-            <a:ext cx="612648" cy="402336"/>
-          </a:xfrm>
-          <a:prstGeom prst="chevron">
+            <a:off x="7818120" y="2176272"/>
+            <a:ext cx="2487168" cy="1609344"/>
+          </a:xfrm>
+          <a:prstGeom prst="rect">
+            <a:avLst/>
+          </a:prstGeom>
+          <a:solidFill>
+            <a:srgbClr val="FFFFFF"/>
+          </a:solidFill>
+          <a:ln w="10160">
+            <a:solidFill>
+              <a:srgbClr val="DADADA"/>
+            </a:solidFill>
+            <a:prstDash val="solid"/>
+          </a:ln>
+        </p:spPr>
+      </p:sp>
+      <p:sp>
+        <p:nvSpPr>
+          <p:cNvPr id="25" name="Shape 23"/>
+          <p:cNvSpPr/>
+          <p:nvPr/>
+        </p:nvSpPr>
+        <p:spPr>
+          <a:xfrm>
+            <a:off x="9061704" y="2176272"/>
+            <a:ext cx="0" cy="1609344"/>
+          </a:xfrm>
+          <a:prstGeom prst="line">
+            <a:avLst/>
+          </a:prstGeom>
+          <a:noFill/>
+          <a:ln w="8890">
+            <a:solidFill>
+              <a:srgbClr val="DADADA"/>
+            </a:solidFill>
+            <a:prstDash val="solid"/>
+          </a:ln>
+        </p:spPr>
+      </p:sp>
+      <p:sp>
+        <p:nvSpPr>
+          <p:cNvPr id="26" name="Shape 24"/>
+          <p:cNvSpPr/>
+          <p:nvPr/>
+        </p:nvSpPr>
+        <p:spPr>
+          <a:xfrm>
+            <a:off x="7818120" y="2980944"/>
+            <a:ext cx="2487168" cy="0"/>
+          </a:xfrm>
+          <a:prstGeom prst="line">
+            <a:avLst/>
+          </a:prstGeom>
+          <a:noFill/>
+          <a:ln w="8890">
+            <a:solidFill>
+              <a:srgbClr val="DADADA"/>
+            </a:solidFill>
+            <a:prstDash val="solid"/>
+          </a:ln>
+        </p:spPr>
+      </p:sp>
+      <p:sp>
+        <p:nvSpPr>
+          <p:cNvPr id="27" name="Shape 25"/>
+          <p:cNvSpPr/>
+          <p:nvPr/>
+        </p:nvSpPr>
+        <p:spPr>
+          <a:xfrm>
+            <a:off x="7818120" y="2176272"/>
+            <a:ext cx="1243584" cy="804672"/>
+          </a:xfrm>
+          <a:prstGeom prst="rect">
             <a:avLst/>
           </a:prstGeom>
           <a:solidFill>
             <a:srgbClr val="DDEBE0"/>
           </a:solidFill>
-          <a:ln w="13970">
+          <a:ln w="3810">
             <a:solidFill>
-              <a:srgbClr val="487052"/>
+              <a:srgbClr val="DADADA"/>
             </a:solidFill>
             <a:prstDash val="solid"/>
           </a:ln>
@@ -12249,14 +12170,14 @@
       </p:sp>
       <p:sp>
         <p:nvSpPr>
-          <p:cNvPr id="25" name="Text 23"/>
-          <p:cNvSpPr/>
-          <p:nvPr/>
-        </p:nvSpPr>
-        <p:spPr>
-          <a:xfrm>
-            <a:off x="7827264" y="2386584"/>
-            <a:ext cx="448056" cy="109728"/>
+          <p:cNvPr id="28" name="Text 26"/>
+          <p:cNvSpPr/>
+          <p:nvPr/>
+        </p:nvSpPr>
+        <p:spPr>
+          <a:xfrm>
+            <a:off x="7891272" y="2286000"/>
+            <a:ext cx="438912" cy="109728"/>
           </a:xfrm>
           <a:prstGeom prst="rect">
             <a:avLst/>
@@ -12270,11 +12191,52 @@
           </a:bodyPr>
           <a:lstStyle/>
           <a:p>
-            <a:pPr algn="ctr" indent="0" marL="0">
-              <a:buNone/>
-            </a:pPr>
-            <a:r>
-              <a:rPr lang="en-US" sz="670" b="1" dirty="0">
+            <a:pPr indent="0" marL="0">
+              <a:buNone/>
+            </a:pPr>
+            <a:r>
+              <a:rPr lang="en-US" sz="710" b="1" dirty="0">
+                <a:solidFill>
+                  <a:srgbClr val="487052"/>
+                </a:solidFill>
+                <a:latin typeface="Microsoft YaHei" pitchFamily="34" charset="0"/>
+                <a:ea typeface="Microsoft YaHei" pitchFamily="34" charset="-122"/>
+                <a:cs typeface="Microsoft YaHei" pitchFamily="34" charset="-120"/>
+              </a:rPr>
+              <a:t>路线A</a:t>
+            </a:r>
+            <a:endParaRPr lang="en-US" sz="710" dirty="0"/>
+          </a:p>
+        </p:txBody>
+      </p:sp>
+      <p:sp>
+        <p:nvSpPr>
+          <p:cNvPr id="29" name="Text 27"/>
+          <p:cNvSpPr/>
+          <p:nvPr/>
+        </p:nvSpPr>
+        <p:spPr>
+          <a:xfrm>
+            <a:off x="7891272" y="2505456"/>
+            <a:ext cx="1024128" cy="201168"/>
+          </a:xfrm>
+          <a:prstGeom prst="rect">
+            <a:avLst/>
+          </a:prstGeom>
+          <a:noFill/>
+          <a:ln/>
+        </p:spPr>
+        <p:txBody>
+          <a:bodyPr wrap="square" lIns="0" tIns="0" rIns="0" bIns="0" rtlCol="0" anchor="t">
+            <a:normAutofit/>
+          </a:bodyPr>
+          <a:lstStyle/>
+          <a:p>
+            <a:pPr indent="0" marL="0">
+              <a:buNone/>
+            </a:pPr>
+            <a:r>
+              <a:rPr lang="en-US" sz="670" dirty="0">
                 <a:solidFill>
                   <a:srgbClr val="121212"/>
                 </a:solidFill>
@@ -12282,7 +12244,7 @@
                 <a:ea typeface="Microsoft YaHei" pitchFamily="34" charset="-122"/>
                 <a:cs typeface="Microsoft YaHei" pitchFamily="34" charset="-120"/>
               </a:rPr>
-              <a:t>技术</a:t>
+              <a:t>宝马第六代动力电池量产，强</a:t>
             </a:r>
             <a:endParaRPr lang="en-US" sz="670" dirty="0"/>
           </a:p>
@@ -12290,24 +12252,24 @@
       </p:sp>
       <p:sp>
         <p:nvSpPr>
-          <p:cNvPr id="26" name="Shape 24"/>
-          <p:cNvSpPr/>
-          <p:nvPr/>
-        </p:nvSpPr>
-        <p:spPr>
-          <a:xfrm>
-            <a:off x="8375904" y="2249424"/>
-            <a:ext cx="612648" cy="402336"/>
-          </a:xfrm>
-          <a:prstGeom prst="chevron">
+          <p:cNvPr id="30" name="Shape 28"/>
+          <p:cNvSpPr/>
+          <p:nvPr/>
+        </p:nvSpPr>
+        <p:spPr>
+          <a:xfrm>
+            <a:off x="9061704" y="2176272"/>
+            <a:ext cx="1243584" cy="804672"/>
+          </a:xfrm>
+          <a:prstGeom prst="rect">
             <a:avLst/>
           </a:prstGeom>
           <a:solidFill>
             <a:srgbClr val="FFFFFF"/>
           </a:solidFill>
-          <a:ln w="13970">
+          <a:ln w="3810">
             <a:solidFill>
-              <a:srgbClr val="487052"/>
+              <a:srgbClr val="DADADA"/>
             </a:solidFill>
             <a:prstDash val="solid"/>
           </a:ln>
@@ -12315,14 +12277,14 @@
       </p:sp>
       <p:sp>
         <p:nvSpPr>
-          <p:cNvPr id="27" name="Text 25"/>
-          <p:cNvSpPr/>
-          <p:nvPr/>
-        </p:nvSpPr>
-        <p:spPr>
-          <a:xfrm>
-            <a:off x="8449056" y="2386584"/>
-            <a:ext cx="448056" cy="109728"/>
+          <p:cNvPr id="31" name="Text 29"/>
+          <p:cNvSpPr/>
+          <p:nvPr/>
+        </p:nvSpPr>
+        <p:spPr>
+          <a:xfrm>
+            <a:off x="9134856" y="2286000"/>
+            <a:ext cx="438912" cy="109728"/>
           </a:xfrm>
           <a:prstGeom prst="rect">
             <a:avLst/>
@@ -12336,11 +12298,52 @@
           </a:bodyPr>
           <a:lstStyle/>
           <a:p>
-            <a:pPr algn="ctr" indent="0" marL="0">
-              <a:buNone/>
-            </a:pPr>
-            <a:r>
-              <a:rPr lang="en-US" sz="670" b="1" dirty="0">
+            <a:pPr indent="0" marL="0">
+              <a:buNone/>
+            </a:pPr>
+            <a:r>
+              <a:rPr lang="en-US" sz="710" b="1" dirty="0">
+                <a:solidFill>
+                  <a:srgbClr val="487052"/>
+                </a:solidFill>
+                <a:latin typeface="Microsoft YaHei" pitchFamily="34" charset="0"/>
+                <a:ea typeface="Microsoft YaHei" pitchFamily="34" charset="-122"/>
+                <a:cs typeface="Microsoft YaHei" pitchFamily="34" charset="-120"/>
+              </a:rPr>
+              <a:t>路线B</a:t>
+            </a:r>
+            <a:endParaRPr lang="en-US" sz="710" dirty="0"/>
+          </a:p>
+        </p:txBody>
+      </p:sp>
+      <p:sp>
+        <p:nvSpPr>
+          <p:cNvPr id="32" name="Text 30"/>
+          <p:cNvSpPr/>
+          <p:nvPr/>
+        </p:nvSpPr>
+        <p:spPr>
+          <a:xfrm>
+            <a:off x="9134856" y="2505456"/>
+            <a:ext cx="1024128" cy="201168"/>
+          </a:xfrm>
+          <a:prstGeom prst="rect">
+            <a:avLst/>
+          </a:prstGeom>
+          <a:noFill/>
+          <a:ln/>
+        </p:spPr>
+        <p:txBody>
+          <a:bodyPr wrap="square" lIns="0" tIns="0" rIns="0" bIns="0" rtlCol="0" anchor="t">
+            <a:normAutofit/>
+          </a:bodyPr>
+          <a:lstStyle/>
+          <a:p>
+            <a:pPr indent="0" marL="0">
+              <a:buNone/>
+            </a:pPr>
+            <a:r>
+              <a:rPr lang="en-US" sz="670" dirty="0">
                 <a:solidFill>
                   <a:srgbClr val="121212"/>
                 </a:solidFill>
@@ -12348,7 +12351,7 @@
                 <a:ea typeface="Microsoft YaHei" pitchFamily="34" charset="-122"/>
                 <a:cs typeface="Microsoft YaHei" pitchFamily="34" charset="-120"/>
               </a:rPr>
-              <a:t>产品</a:t>
+              <a:t>固态电池专家提出2030年</a:t>
             </a:r>
             <a:endParaRPr lang="en-US" sz="670" dirty="0"/>
           </a:p>
@@ -12356,24 +12359,24 @@
       </p:sp>
       <p:sp>
         <p:nvSpPr>
-          <p:cNvPr id="28" name="Shape 26"/>
-          <p:cNvSpPr/>
-          <p:nvPr/>
-        </p:nvSpPr>
-        <p:spPr>
-          <a:xfrm>
-            <a:off x="8997696" y="2249424"/>
-            <a:ext cx="612648" cy="402336"/>
-          </a:xfrm>
-          <a:prstGeom prst="chevron">
+          <p:cNvPr id="33" name="Shape 31"/>
+          <p:cNvSpPr/>
+          <p:nvPr/>
+        </p:nvSpPr>
+        <p:spPr>
+          <a:xfrm>
+            <a:off x="7818120" y="2980944"/>
+            <a:ext cx="1243584" cy="804672"/>
+          </a:xfrm>
+          <a:prstGeom prst="rect">
             <a:avLst/>
           </a:prstGeom>
           <a:solidFill>
             <a:srgbClr val="FFFFFF"/>
           </a:solidFill>
-          <a:ln w="13970">
+          <a:ln w="3810">
             <a:solidFill>
-              <a:srgbClr val="487052"/>
+              <a:srgbClr val="DADADA"/>
             </a:solidFill>
             <a:prstDash val="solid"/>
           </a:ln>
@@ -12381,14 +12384,14 @@
       </p:sp>
       <p:sp>
         <p:nvSpPr>
-          <p:cNvPr id="29" name="Text 27"/>
-          <p:cNvSpPr/>
-          <p:nvPr/>
-        </p:nvSpPr>
-        <p:spPr>
-          <a:xfrm>
-            <a:off x="9070848" y="2386584"/>
-            <a:ext cx="448056" cy="109728"/>
+          <p:cNvPr id="34" name="Text 32"/>
+          <p:cNvSpPr/>
+          <p:nvPr/>
+        </p:nvSpPr>
+        <p:spPr>
+          <a:xfrm>
+            <a:off x="7891272" y="3090672"/>
+            <a:ext cx="438912" cy="109728"/>
           </a:xfrm>
           <a:prstGeom prst="rect">
             <a:avLst/>
@@ -12402,11 +12405,52 @@
           </a:bodyPr>
           <a:lstStyle/>
           <a:p>
-            <a:pPr algn="ctr" indent="0" marL="0">
-              <a:buNone/>
-            </a:pPr>
-            <a:r>
-              <a:rPr lang="en-US" sz="670" b="1" dirty="0">
+            <a:pPr indent="0" marL="0">
+              <a:buNone/>
+            </a:pPr>
+            <a:r>
+              <a:rPr lang="en-US" sz="710" b="1" dirty="0">
+                <a:solidFill>
+                  <a:srgbClr val="487052"/>
+                </a:solidFill>
+                <a:latin typeface="Microsoft YaHei" pitchFamily="34" charset="0"/>
+                <a:ea typeface="Microsoft YaHei" pitchFamily="34" charset="-122"/>
+                <a:cs typeface="Microsoft YaHei" pitchFamily="34" charset="-120"/>
+              </a:rPr>
+              <a:t>机会</a:t>
+            </a:r>
+            <a:endParaRPr lang="en-US" sz="710" dirty="0"/>
+          </a:p>
+        </p:txBody>
+      </p:sp>
+      <p:sp>
+        <p:nvSpPr>
+          <p:cNvPr id="35" name="Text 33"/>
+          <p:cNvSpPr/>
+          <p:nvPr/>
+        </p:nvSpPr>
+        <p:spPr>
+          <a:xfrm>
+            <a:off x="7891272" y="3310128"/>
+            <a:ext cx="1024128" cy="201168"/>
+          </a:xfrm>
+          <a:prstGeom prst="rect">
+            <a:avLst/>
+          </a:prstGeom>
+          <a:noFill/>
+          <a:ln/>
+        </p:spPr>
+        <p:txBody>
+          <a:bodyPr wrap="square" lIns="0" tIns="0" rIns="0" bIns="0" rtlCol="0" anchor="t">
+            <a:normAutofit/>
+          </a:bodyPr>
+          <a:lstStyle/>
+          <a:p>
+            <a:pPr indent="0" marL="0">
+              <a:buNone/>
+            </a:pPr>
+            <a:r>
+              <a:rPr lang="en-US" sz="670" dirty="0">
                 <a:solidFill>
                   <a:srgbClr val="121212"/>
                 </a:solidFill>
@@ -12414,7 +12458,7 @@
                 <a:ea typeface="Microsoft YaHei" pitchFamily="34" charset="-122"/>
                 <a:cs typeface="Microsoft YaHei" pitchFamily="34" charset="-120"/>
               </a:rPr>
-              <a:t>验证</a:t>
+              <a:t>[1][4] 宝马量产信息</a:t>
             </a:r>
             <a:endParaRPr lang="en-US" sz="670" dirty="0"/>
           </a:p>
@@ -12422,24 +12466,24 @@
       </p:sp>
       <p:sp>
         <p:nvSpPr>
-          <p:cNvPr id="30" name="Shape 28"/>
-          <p:cNvSpPr/>
-          <p:nvPr/>
-        </p:nvSpPr>
-        <p:spPr>
-          <a:xfrm>
-            <a:off x="9619488" y="2249424"/>
-            <a:ext cx="612648" cy="402336"/>
-          </a:xfrm>
-          <a:prstGeom prst="chevron">
+          <p:cNvPr id="36" name="Shape 34"/>
+          <p:cNvSpPr/>
+          <p:nvPr/>
+        </p:nvSpPr>
+        <p:spPr>
+          <a:xfrm>
+            <a:off x="9061704" y="2980944"/>
+            <a:ext cx="1243584" cy="804672"/>
+          </a:xfrm>
+          <a:prstGeom prst="rect">
             <a:avLst/>
           </a:prstGeom>
           <a:solidFill>
-            <a:srgbClr val="FFFFFF"/>
+            <a:srgbClr val="F4FAF6"/>
           </a:solidFill>
-          <a:ln w="13970">
+          <a:ln w="3810">
             <a:solidFill>
-              <a:srgbClr val="487052"/>
+              <a:srgbClr val="DADADA"/>
             </a:solidFill>
             <a:prstDash val="solid"/>
           </a:ln>
@@ -12447,14 +12491,14 @@
       </p:sp>
       <p:sp>
         <p:nvSpPr>
-          <p:cNvPr id="31" name="Text 29"/>
-          <p:cNvSpPr/>
-          <p:nvPr/>
-        </p:nvSpPr>
-        <p:spPr>
-          <a:xfrm>
-            <a:off x="9692640" y="2386584"/>
-            <a:ext cx="448056" cy="109728"/>
+          <p:cNvPr id="37" name="Text 35"/>
+          <p:cNvSpPr/>
+          <p:nvPr/>
+        </p:nvSpPr>
+        <p:spPr>
+          <a:xfrm>
+            <a:off x="9134856" y="3090672"/>
+            <a:ext cx="438912" cy="109728"/>
           </a:xfrm>
           <a:prstGeom prst="rect">
             <a:avLst/>
@@ -12468,11 +12512,52 @@
           </a:bodyPr>
           <a:lstStyle/>
           <a:p>
-            <a:pPr algn="ctr" indent="0" marL="0">
-              <a:buNone/>
-            </a:pPr>
-            <a:r>
-              <a:rPr lang="en-US" sz="670" b="1" dirty="0">
+            <a:pPr indent="0" marL="0">
+              <a:buNone/>
+            </a:pPr>
+            <a:r>
+              <a:rPr lang="en-US" sz="710" b="1" dirty="0">
+                <a:solidFill>
+                  <a:srgbClr val="487052"/>
+                </a:solidFill>
+                <a:latin typeface="Microsoft YaHei" pitchFamily="34" charset="0"/>
+                <a:ea typeface="Microsoft YaHei" pitchFamily="34" charset="-122"/>
+                <a:cs typeface="Microsoft YaHei" pitchFamily="34" charset="-120"/>
+              </a:rPr>
+              <a:t>约束</a:t>
+            </a:r>
+            <a:endParaRPr lang="en-US" sz="710" dirty="0"/>
+          </a:p>
+        </p:txBody>
+      </p:sp>
+      <p:sp>
+        <p:nvSpPr>
+          <p:cNvPr id="38" name="Text 36"/>
+          <p:cNvSpPr/>
+          <p:nvPr/>
+        </p:nvSpPr>
+        <p:spPr>
+          <a:xfrm>
+            <a:off x="9134856" y="3310128"/>
+            <a:ext cx="1024128" cy="201168"/>
+          </a:xfrm>
+          <a:prstGeom prst="rect">
+            <a:avLst/>
+          </a:prstGeom>
+          <a:noFill/>
+          <a:ln/>
+        </p:spPr>
+        <p:txBody>
+          <a:bodyPr wrap="square" lIns="0" tIns="0" rIns="0" bIns="0" rtlCol="0" anchor="t">
+            <a:normAutofit/>
+          </a:bodyPr>
+          <a:lstStyle/>
+          <a:p>
+            <a:pPr indent="0" marL="0">
+              <a:buNone/>
+            </a:pPr>
+            <a:r>
+              <a:rPr lang="en-US" sz="670" dirty="0">
                 <a:solidFill>
                   <a:srgbClr val="121212"/>
                 </a:solidFill>
@@ -12480,7 +12565,7 @@
                 <a:ea typeface="Microsoft YaHei" pitchFamily="34" charset="-122"/>
                 <a:cs typeface="Microsoft YaHei" pitchFamily="34" charset="-120"/>
               </a:rPr>
-              <a:t>量产</a:t>
+              <a:t>宝马第六代动力电池量产，强</a:t>
             </a:r>
             <a:endParaRPr lang="en-US" sz="670" dirty="0"/>
           </a:p>
@@ -12488,62 +12573,14 @@
       </p:sp>
       <p:sp>
         <p:nvSpPr>
-          <p:cNvPr id="32" name="Shape 30"/>
-          <p:cNvSpPr/>
-          <p:nvPr/>
-        </p:nvSpPr>
-        <p:spPr>
-          <a:xfrm>
-            <a:off x="7882128" y="3063240"/>
-            <a:ext cx="2331720" cy="0"/>
-          </a:xfrm>
-          <a:prstGeom prst="line">
-            <a:avLst/>
-          </a:prstGeom>
-          <a:noFill/>
-          <a:ln w="13970">
-            <a:solidFill>
-              <a:srgbClr val="7F9D84"/>
-            </a:solidFill>
-            <a:prstDash val="solid"/>
-          </a:ln>
-        </p:spPr>
-      </p:sp>
-      <p:sp>
-        <p:nvSpPr>
-          <p:cNvPr id="33" name="Shape 31"/>
-          <p:cNvSpPr/>
-          <p:nvPr/>
-        </p:nvSpPr>
-        <p:spPr>
-          <a:xfrm>
-            <a:off x="7845552" y="2962656"/>
-            <a:ext cx="164592" cy="164592"/>
-          </a:xfrm>
-          <a:prstGeom prst="ellipse">
-            <a:avLst/>
-          </a:prstGeom>
-          <a:solidFill>
-            <a:srgbClr val="487052"/>
-          </a:solidFill>
-          <a:ln w="12700">
-            <a:solidFill>
-              <a:srgbClr val="FFFFFF"/>
-            </a:solidFill>
-            <a:prstDash val="solid"/>
-          </a:ln>
-        </p:spPr>
-      </p:sp>
-      <p:sp>
-        <p:nvSpPr>
-          <p:cNvPr id="34" name="Text 32"/>
-          <p:cNvSpPr/>
-          <p:nvPr/>
-        </p:nvSpPr>
-        <p:spPr>
-          <a:xfrm>
-            <a:off x="7754112" y="3291840"/>
-            <a:ext cx="603504" cy="310896"/>
+          <p:cNvPr id="39" name="Text 37"/>
+          <p:cNvSpPr/>
+          <p:nvPr/>
+        </p:nvSpPr>
+        <p:spPr>
+          <a:xfrm>
+            <a:off x="7726680" y="4187952"/>
+            <a:ext cx="2697480" cy="493776"/>
           </a:xfrm>
           <a:prstGeom prst="rect">
             <a:avLst/>
@@ -12557,245 +12594,6 @@
           </a:bodyPr>
           <a:lstStyle/>
           <a:p>
-            <a:pPr algn="ctr" indent="0" marL="0">
-              <a:buNone/>
-            </a:pPr>
-            <a:r>
-              <a:rPr lang="en-US" sz="670" dirty="0">
-                <a:solidFill>
-                  <a:srgbClr val="121212"/>
-                </a:solidFill>
-                <a:latin typeface="Microsoft YaHei" pitchFamily="34" charset="0"/>
-                <a:ea typeface="Microsoft YaHei" pitchFamily="34" charset="-122"/>
-                <a:cs typeface="Microsoft YaHei" pitchFamily="34" charset="-120"/>
-              </a:rPr>
-              <a:t>湖南裕能投资20亿元加</a:t>
-            </a:r>
-            <a:endParaRPr lang="en-US" sz="670" dirty="0"/>
-          </a:p>
-        </p:txBody>
-      </p:sp>
-      <p:sp>
-        <p:nvSpPr>
-          <p:cNvPr id="35" name="Shape 33"/>
-          <p:cNvSpPr/>
-          <p:nvPr/>
-        </p:nvSpPr>
-        <p:spPr>
-          <a:xfrm>
-            <a:off x="8503920" y="2962656"/>
-            <a:ext cx="164592" cy="164592"/>
-          </a:xfrm>
-          <a:prstGeom prst="ellipse">
-            <a:avLst/>
-          </a:prstGeom>
-          <a:solidFill>
-            <a:srgbClr val="487052"/>
-          </a:solidFill>
-          <a:ln w="12700">
-            <a:solidFill>
-              <a:srgbClr val="FFFFFF"/>
-            </a:solidFill>
-            <a:prstDash val="solid"/>
-          </a:ln>
-        </p:spPr>
-      </p:sp>
-      <p:sp>
-        <p:nvSpPr>
-          <p:cNvPr id="36" name="Text 34"/>
-          <p:cNvSpPr/>
-          <p:nvPr/>
-        </p:nvSpPr>
-        <p:spPr>
-          <a:xfrm>
-            <a:off x="8412480" y="3291840"/>
-            <a:ext cx="603504" cy="310896"/>
-          </a:xfrm>
-          <a:prstGeom prst="rect">
-            <a:avLst/>
-          </a:prstGeom>
-          <a:noFill/>
-          <a:ln/>
-        </p:spPr>
-        <p:txBody>
-          <a:bodyPr wrap="square" lIns="0" tIns="0" rIns="0" bIns="0" rtlCol="0" anchor="t">
-            <a:normAutofit/>
-          </a:bodyPr>
-          <a:lstStyle/>
-          <a:p>
-            <a:pPr algn="ctr" indent="0" marL="0">
-              <a:buNone/>
-            </a:pPr>
-            <a:r>
-              <a:rPr lang="en-US" sz="670" dirty="0">
-                <a:solidFill>
-                  <a:srgbClr val="121212"/>
-                </a:solidFill>
-                <a:latin typeface="Microsoft YaHei" pitchFamily="34" charset="0"/>
-                <a:ea typeface="Microsoft YaHei" pitchFamily="34" charset="-122"/>
-                <a:cs typeface="Microsoft YaHei" pitchFamily="34" charset="-120"/>
-              </a:rPr>
-              <a:t>吉利开卖电芯，可能推动</a:t>
-            </a:r>
-            <a:endParaRPr lang="en-US" sz="670" dirty="0"/>
-          </a:p>
-        </p:txBody>
-      </p:sp>
-      <p:sp>
-        <p:nvSpPr>
-          <p:cNvPr id="37" name="Shape 35"/>
-          <p:cNvSpPr/>
-          <p:nvPr/>
-        </p:nvSpPr>
-        <p:spPr>
-          <a:xfrm>
-            <a:off x="9162288" y="2962656"/>
-            <a:ext cx="164592" cy="164592"/>
-          </a:xfrm>
-          <a:prstGeom prst="ellipse">
-            <a:avLst/>
-          </a:prstGeom>
-          <a:solidFill>
-            <a:srgbClr val="487052"/>
-          </a:solidFill>
-          <a:ln w="12700">
-            <a:solidFill>
-              <a:srgbClr val="FFFFFF"/>
-            </a:solidFill>
-            <a:prstDash val="solid"/>
-          </a:ln>
-        </p:spPr>
-      </p:sp>
-      <p:sp>
-        <p:nvSpPr>
-          <p:cNvPr id="38" name="Text 36"/>
-          <p:cNvSpPr/>
-          <p:nvPr/>
-        </p:nvSpPr>
-        <p:spPr>
-          <a:xfrm>
-            <a:off x="9070848" y="3291840"/>
-            <a:ext cx="603504" cy="310896"/>
-          </a:xfrm>
-          <a:prstGeom prst="rect">
-            <a:avLst/>
-          </a:prstGeom>
-          <a:noFill/>
-          <a:ln/>
-        </p:spPr>
-        <p:txBody>
-          <a:bodyPr wrap="square" lIns="0" tIns="0" rIns="0" bIns="0" rtlCol="0" anchor="t">
-            <a:normAutofit/>
-          </a:bodyPr>
-          <a:lstStyle/>
-          <a:p>
-            <a:pPr algn="ctr" indent="0" marL="0">
-              <a:buNone/>
-            </a:pPr>
-            <a:r>
-              <a:rPr lang="en-US" sz="670" dirty="0">
-                <a:solidFill>
-                  <a:srgbClr val="121212"/>
-                </a:solidFill>
-                <a:latin typeface="Microsoft YaHei" pitchFamily="34" charset="0"/>
-                <a:ea typeface="Microsoft YaHei" pitchFamily="34" charset="-122"/>
-                <a:cs typeface="Microsoft YaHei" pitchFamily="34" charset="-120"/>
-              </a:rPr>
-              <a:t>纳米磷酸铁锂可提升能量</a:t>
-            </a:r>
-            <a:endParaRPr lang="en-US" sz="670" dirty="0"/>
-          </a:p>
-        </p:txBody>
-      </p:sp>
-      <p:sp>
-        <p:nvSpPr>
-          <p:cNvPr id="39" name="Shape 37"/>
-          <p:cNvSpPr/>
-          <p:nvPr/>
-        </p:nvSpPr>
-        <p:spPr>
-          <a:xfrm>
-            <a:off x="9820656" y="2962656"/>
-            <a:ext cx="164592" cy="164592"/>
-          </a:xfrm>
-          <a:prstGeom prst="ellipse">
-            <a:avLst/>
-          </a:prstGeom>
-          <a:solidFill>
-            <a:srgbClr val="B85A4A"/>
-          </a:solidFill>
-          <a:ln w="12700">
-            <a:solidFill>
-              <a:srgbClr val="FFFFFF"/>
-            </a:solidFill>
-            <a:prstDash val="solid"/>
-          </a:ln>
-        </p:spPr>
-      </p:sp>
-      <p:sp>
-        <p:nvSpPr>
-          <p:cNvPr id="40" name="Text 38"/>
-          <p:cNvSpPr/>
-          <p:nvPr/>
-        </p:nvSpPr>
-        <p:spPr>
-          <a:xfrm>
-            <a:off x="9729216" y="3291840"/>
-            <a:ext cx="603504" cy="310896"/>
-          </a:xfrm>
-          <a:prstGeom prst="rect">
-            <a:avLst/>
-          </a:prstGeom>
-          <a:noFill/>
-          <a:ln/>
-        </p:spPr>
-        <p:txBody>
-          <a:bodyPr wrap="square" lIns="0" tIns="0" rIns="0" bIns="0" rtlCol="0" anchor="t">
-            <a:normAutofit/>
-          </a:bodyPr>
-          <a:lstStyle/>
-          <a:p>
-            <a:pPr algn="ctr" indent="0" marL="0">
-              <a:buNone/>
-            </a:pPr>
-            <a:r>
-              <a:rPr lang="en-US" sz="670" dirty="0">
-                <a:solidFill>
-                  <a:srgbClr val="121212"/>
-                </a:solidFill>
-                <a:latin typeface="Microsoft YaHei" pitchFamily="34" charset="0"/>
-                <a:ea typeface="Microsoft YaHei" pitchFamily="34" charset="-122"/>
-                <a:cs typeface="Microsoft YaHei" pitchFamily="34" charset="-120"/>
-              </a:rPr>
-              <a:t>纳米磷酸铁锂可提升能量</a:t>
-            </a:r>
-            <a:endParaRPr lang="en-US" sz="670" dirty="0"/>
-          </a:p>
-        </p:txBody>
-      </p:sp>
-      <p:sp>
-        <p:nvSpPr>
-          <p:cNvPr id="41" name="Text 39"/>
-          <p:cNvSpPr/>
-          <p:nvPr/>
-        </p:nvSpPr>
-        <p:spPr>
-          <a:xfrm>
-            <a:off x="7726680" y="4315968"/>
-            <a:ext cx="2697480" cy="384048"/>
-          </a:xfrm>
-          <a:prstGeom prst="rect">
-            <a:avLst/>
-          </a:prstGeom>
-          <a:noFill/>
-          <a:ln/>
-        </p:spPr>
-        <p:txBody>
-          <a:bodyPr wrap="square" lIns="0" tIns="0" rIns="0" bIns="0" rtlCol="0" anchor="t">
-            <a:normAutofit/>
-          </a:bodyPr>
-          <a:lstStyle/>
-          <a:p>
             <a:pPr indent="0" marL="0">
               <a:buNone/>
             </a:pPr>
@@ -12808,7 +12606,7 @@
                 <a:ea typeface="Microsoft YaHei" pitchFamily="34" charset="-122"/>
                 <a:cs typeface="Microsoft YaHei" pitchFamily="34" charset="-120"/>
               </a:rPr>
-              <a:t>参考培训 PPT 的阶段路线表达，按事件顺序拆成判断路径。</a:t>
+              <a:t>检测到对比/分类信号，用矩阵压缩呈现，不新增外部判断。</a:t>
             </a:r>
             <a:endParaRPr lang="en-US" sz="760" dirty="0"/>
           </a:p>
@@ -12816,7 +12614,7 @@
       </p:sp>
       <p:sp>
         <p:nvSpPr>
-          <p:cNvPr id="42" name="Shape 40"/>
+          <p:cNvPr id="40" name="Shape 38"/>
           <p:cNvSpPr/>
           <p:nvPr/>
         </p:nvSpPr>
@@ -12841,7 +12639,7 @@
       </p:sp>
       <p:sp>
         <p:nvSpPr>
-          <p:cNvPr id="43" name="Text 41"/>
+          <p:cNvPr id="41" name="Text 39"/>
           <p:cNvSpPr/>
           <p:nvPr/>
         </p:nvSpPr>
@@ -12880,7 +12678,7 @@
       </p:sp>
       <p:sp>
         <p:nvSpPr>
-          <p:cNvPr id="44" name="Text 42"/>
+          <p:cNvPr id="42" name="Text 40"/>
           <p:cNvSpPr/>
           <p:nvPr/>
         </p:nvSpPr>
@@ -12913,7 +12711,7 @@
                 <a:ea typeface="Microsoft YaHei" pitchFamily="34" charset="-122"/>
                 <a:cs typeface="Microsoft YaHei" pitchFamily="34" charset="-120"/>
               </a:rPr>
-              <a:t>若纳米磷酸铁锂量产成本下降，则高端车型渗透率可能提升</a:t>
+              <a:t>若宝马第六代电池确认采用磷酸铁锂或磷酸铁锰锂体系，则可能提升磷酸铁锂在高端乘用车市场的份额，跟踪指标为宝马新车型电池供应商公告和材料体系披露</a:t>
             </a:r>
             <a:endParaRPr lang="en-US" sz="1020" dirty="0"/>
           </a:p>
@@ -13062,7 +12860,7 @@
                 <a:ea typeface="Aptos" pitchFamily="34" charset="-122"/>
                 <a:cs typeface="Aptos" pitchFamily="34" charset="-120"/>
               </a:rPr>
-              <a:t>2026-10-12</a:t>
+              <a:t>2026-10-19</a:t>
             </a:r>
             <a:endParaRPr lang="en-US" sz="800" dirty="0"/>
           </a:p>
@@ -13268,7 +13066,7 @@
                 <a:ea typeface="Microsoft YaHei" pitchFamily="34" charset="-122"/>
                 <a:cs typeface="Microsoft YaHei" pitchFamily="34" charset="-120"/>
               </a:rPr>
-              <a:t>3 条公开来源交叉验证｜事实、影响与后续研判</a:t>
+              <a:t>2 条公开来源交叉验证｜事实、影响与后续研判</a:t>
             </a:r>
             <a:endParaRPr lang="en-US" sz="860" dirty="0"/>
           </a:p>
@@ -13377,7 +13175,7 @@
                 <a:ea typeface="Microsoft YaHei" pitchFamily="34" charset="-122"/>
                 <a:cs typeface="Microsoft YaHei" pitchFamily="34" charset="-120"/>
               </a:rPr>
-              <a:t>龙蟠科技锁定最高56.78万吨磷酸铁锂供货长协，湖南裕能20万吨项目落地，产能与订单同步扩张；华盛锂电差异化权益分派法律意见书发布，资本运作活跃。长协锁定反映下游对供应稳定的需求，但需关注实际执行率。 [2][1][6]</a:t>
+              <a:t>中国储能电池产能激增110%，全球市场同步增长，显示储能端对磷酸铁锂需求形成支撑；全国首批锂+钠示范落地河北，大电芯路线推进，可能加剧储能电池技术路线竞争，磷酸铁锂需关注在储能场景的份额变化。 [2][5]</a:t>
             </a:r>
             <a:endParaRPr lang="en-US" sz="960" dirty="0"/>
           </a:p>
@@ -13418,7 +13216,7 @@
                 <a:ea typeface="Aptos" pitchFamily="34" charset="-122"/>
                 <a:cs typeface="Aptos" pitchFamily="34" charset="-120"/>
               </a:rPr>
-              <a:t>依据：[2][1][6]</a:t>
+              <a:t>依据：[2][5]</a:t>
             </a:r>
             <a:endParaRPr lang="en-US" sz="740" dirty="0"/>
           </a:p>
@@ -13527,7 +13325,7 @@
                 <a:ea typeface="Microsoft YaHei" pitchFamily="34" charset="-122"/>
                 <a:cs typeface="Microsoft YaHei" pitchFamily="34" charset="-120"/>
               </a:rPr>
-              <a:t>龙蟠科技长协规模较大，若完全执行将显著提升其市场份额；湖南裕能扩产可能加剧供给过剩风险。华盛锂电法律意见书或预示后续资本动作。需验证：长协定价机制、项目投产时间、华盛锂电分派目的。</a:t>
+              <a:t>储能电池产能激增信息来自VOI.ID，锂+钠示范项目来自搜狐，两者均涉及储能电池供给格局。产能激增可能带动磷酸铁锂正极材料需求，但锂+钠示范项目意味着钠离子电池在储能场景的替代尝试，可能分流部分低端储能需求。需验证储能电池产能激增的实际开工率和订单来源，以及锂+钠示范项目的规模和商业化时间表。</a:t>
             </a:r>
             <a:endParaRPr lang="en-US" sz="960" dirty="0"/>
           </a:p>
@@ -13661,7 +13459,7 @@
                 <a:ea typeface="Microsoft YaHei" pitchFamily="34" charset="-122"/>
                 <a:cs typeface="Microsoft YaHei" pitchFamily="34" charset="-120"/>
               </a:rPr>
-              <a:t>若长协执行率高于预期，则龙蟠科技营收确定性增强；若湖南裕能项目按期投产，则行业供给压力可能加大。跟踪指标：龙蟠科技季度出货量、湖南裕能项目进度。</a:t>
+              <a:t>若储能电池产能激增伴随开工率维持高位，则可能持续拉动磷酸铁锂正极材料需求，跟踪指标为储能电池月度产量、出口数据和磷酸铁锂正极材料开工率；若锂+钠示范项目在储能场景实现规模化应用，则可能对磷酸铁锂在低端储能市场的份额形成挤压，跟踪指标为钠离子电池储能项目招标规模和成本对比。证据边界限于公开报道，未覆盖具体企业订单和产能利用率数据。</a:t>
             </a:r>
             <a:endParaRPr lang="en-US" sz="960" dirty="0"/>
           </a:p>
@@ -13729,7 +13527,7 @@
                 <a:ea typeface="Microsoft YaHei" pitchFamily="34" charset="-122"/>
                 <a:cs typeface="Microsoft YaHei" pitchFamily="34" charset="-120"/>
               </a:rPr>
-              <a:t>对比矩阵</a:t>
+              <a:t>关键数据解读</a:t>
             </a:r>
             <a:endParaRPr lang="en-US" sz="1200" dirty="0"/>
           </a:p>
@@ -13743,16 +13541,18 @@
         </p:nvSpPr>
         <p:spPr>
           <a:xfrm>
-            <a:off x="7818120" y="2176272"/>
-            <a:ext cx="2487168" cy="1609344"/>
-          </a:xfrm>
-          <a:prstGeom prst="rect">
-            <a:avLst/>
+            <a:off x="7772400" y="1993392"/>
+            <a:ext cx="2560320" cy="1389888"/>
+          </a:xfrm>
+          <a:prstGeom prst="roundRect">
+            <a:avLst>
+              <a:gd name="adj" fmla="val 2632"/>
+            </a:avLst>
           </a:prstGeom>
           <a:solidFill>
-            <a:srgbClr val="FFFFFF"/>
+            <a:srgbClr val="F4FAF6"/>
           </a:solidFill>
-          <a:ln w="10160">
+          <a:ln w="7620">
             <a:solidFill>
               <a:srgbClr val="DADADA"/>
             </a:solidFill>
@@ -13762,74 +13562,126 @@
       </p:sp>
       <p:sp>
         <p:nvSpPr>
-          <p:cNvPr id="25" name="Shape 23"/>
-          <p:cNvSpPr/>
-          <p:nvPr/>
-        </p:nvSpPr>
-        <p:spPr>
-          <a:xfrm>
-            <a:off x="9061704" y="2176272"/>
-            <a:ext cx="0" cy="1609344"/>
-          </a:xfrm>
-          <a:prstGeom prst="line">
-            <a:avLst/>
-          </a:prstGeom>
-          <a:noFill/>
-          <a:ln w="8890">
-            <a:solidFill>
-              <a:srgbClr val="DADADA"/>
-            </a:solidFill>
-            <a:prstDash val="solid"/>
-          </a:ln>
-        </p:spPr>
-      </p:sp>
-      <p:sp>
-        <p:nvSpPr>
-          <p:cNvPr id="26" name="Shape 24"/>
-          <p:cNvSpPr/>
-          <p:nvPr/>
-        </p:nvSpPr>
-        <p:spPr>
-          <a:xfrm>
-            <a:off x="7818120" y="2980944"/>
-            <a:ext cx="2487168" cy="0"/>
-          </a:xfrm>
-          <a:prstGeom prst="line">
-            <a:avLst/>
-          </a:prstGeom>
-          <a:noFill/>
-          <a:ln w="8890">
-            <a:solidFill>
-              <a:srgbClr val="DADADA"/>
-            </a:solidFill>
-            <a:prstDash val="solid"/>
-          </a:ln>
-        </p:spPr>
-      </p:sp>
-      <p:sp>
-        <p:nvSpPr>
-          <p:cNvPr id="27" name="Shape 25"/>
-          <p:cNvSpPr/>
-          <p:nvPr/>
-        </p:nvSpPr>
-        <p:spPr>
-          <a:xfrm>
-            <a:off x="7818120" y="2176272"/>
-            <a:ext cx="1243584" cy="804672"/>
-          </a:xfrm>
-          <a:prstGeom prst="rect">
-            <a:avLst/>
-          </a:prstGeom>
-          <a:solidFill>
-            <a:srgbClr val="DDEBE0"/>
-          </a:solidFill>
-          <a:ln w="3810">
-            <a:solidFill>
-              <a:srgbClr val="DADADA"/>
-            </a:solidFill>
-            <a:prstDash val="solid"/>
-          </a:ln>
-        </p:spPr>
+          <p:cNvPr id="25" name="Text 23"/>
+          <p:cNvSpPr/>
+          <p:nvPr/>
+        </p:nvSpPr>
+        <p:spPr>
+          <a:xfrm>
+            <a:off x="7918704" y="2103120"/>
+            <a:ext cx="822960" cy="384048"/>
+          </a:xfrm>
+          <a:prstGeom prst="rect">
+            <a:avLst/>
+          </a:prstGeom>
+          <a:noFill/>
+          <a:ln/>
+        </p:spPr>
+        <p:txBody>
+          <a:bodyPr wrap="square" lIns="0" tIns="0" rIns="0" bIns="0" rtlCol="0" anchor="ctr">
+            <a:normAutofit/>
+          </a:bodyPr>
+          <a:lstStyle/>
+          <a:p>
+            <a:pPr indent="0" marL="0">
+              <a:buNone/>
+            </a:pPr>
+            <a:r>
+              <a:rPr lang="en-US" sz="2100" b="1" dirty="0">
+                <a:solidFill>
+                  <a:srgbClr val="487052"/>
+                </a:solidFill>
+                <a:latin typeface="Aptos" pitchFamily="34" charset="0"/>
+                <a:ea typeface="Aptos" pitchFamily="34" charset="-122"/>
+                <a:cs typeface="Aptos" pitchFamily="34" charset="-120"/>
+              </a:rPr>
+              <a:t>10%</a:t>
+            </a:r>
+            <a:endParaRPr lang="en-US" sz="2100" dirty="0"/>
+          </a:p>
+        </p:txBody>
+      </p:sp>
+      <p:sp>
+        <p:nvSpPr>
+          <p:cNvPr id="26" name="Text 24"/>
+          <p:cNvSpPr/>
+          <p:nvPr/>
+        </p:nvSpPr>
+        <p:spPr>
+          <a:xfrm>
+            <a:off x="8759952" y="2167128"/>
+            <a:ext cx="1371600" cy="201168"/>
+          </a:xfrm>
+          <a:prstGeom prst="rect">
+            <a:avLst/>
+          </a:prstGeom>
+          <a:noFill/>
+          <a:ln/>
+        </p:spPr>
+        <p:txBody>
+          <a:bodyPr wrap="square" lIns="0" tIns="0" rIns="0" bIns="0" rtlCol="0" anchor="ctr">
+            <a:normAutofit/>
+          </a:bodyPr>
+          <a:lstStyle/>
+          <a:p>
+            <a:pPr indent="0" marL="0">
+              <a:buNone/>
+            </a:pPr>
+            <a:r>
+              <a:rPr lang="en-US" sz="820" b="1" dirty="0">
+                <a:solidFill>
+                  <a:srgbClr val="121212"/>
+                </a:solidFill>
+                <a:latin typeface="Microsoft YaHei" pitchFamily="34" charset="0"/>
+                <a:ea typeface="Microsoft YaHei" pitchFamily="34" charset="-122"/>
+                <a:cs typeface="Microsoft YaHei" pitchFamily="34" charset="-120"/>
+              </a:rPr>
+              <a:t>中国储能电池产能激增1</a:t>
+            </a:r>
+            <a:endParaRPr lang="en-US" sz="820" dirty="0"/>
+          </a:p>
+        </p:txBody>
+      </p:sp>
+      <p:sp>
+        <p:nvSpPr>
+          <p:cNvPr id="27" name="Text 25"/>
+          <p:cNvSpPr/>
+          <p:nvPr/>
+        </p:nvSpPr>
+        <p:spPr>
+          <a:xfrm>
+            <a:off x="7918704" y="2578608"/>
+            <a:ext cx="2176272" cy="512064"/>
+          </a:xfrm>
+          <a:prstGeom prst="rect">
+            <a:avLst/>
+          </a:prstGeom>
+          <a:noFill/>
+          <a:ln/>
+        </p:spPr>
+        <p:txBody>
+          <a:bodyPr wrap="square" lIns="0" tIns="0" rIns="0" bIns="0" rtlCol="0" anchor="t">
+            <a:normAutofit/>
+          </a:bodyPr>
+          <a:lstStyle/>
+          <a:p>
+            <a:pPr indent="0" marL="0">
+              <a:buNone/>
+            </a:pPr>
+            <a:r>
+              <a:rPr lang="en-US" sz="840" dirty="0">
+                <a:solidFill>
+                  <a:srgbClr val="121212"/>
+                </a:solidFill>
+                <a:latin typeface="Microsoft YaHei" pitchFamily="34" charset="0"/>
+                <a:ea typeface="Microsoft YaHei" pitchFamily="34" charset="-122"/>
+                <a:cs typeface="Microsoft YaHei" pitchFamily="34" charset="-120"/>
+              </a:rPr>
+              <a:t>公开信息：中国储能电池产能激增110%，全球市场同步增长，显示储能端对磷酸铁锂需求形成支撑</a:t>
+            </a:r>
+            <a:endParaRPr lang="en-US" sz="840" dirty="0"/>
+          </a:p>
+        </p:txBody>
       </p:sp>
       <p:sp>
         <p:nvSpPr>
@@ -13839,49 +13691,8 @@
         </p:nvSpPr>
         <p:spPr>
           <a:xfrm>
-            <a:off x="7891272" y="2286000"/>
-            <a:ext cx="438912" cy="109728"/>
-          </a:xfrm>
-          <a:prstGeom prst="rect">
-            <a:avLst/>
-          </a:prstGeom>
-          <a:noFill/>
-          <a:ln/>
-        </p:spPr>
-        <p:txBody>
-          <a:bodyPr wrap="square" lIns="0" tIns="0" rIns="0" bIns="0" rtlCol="0" anchor="ctr">
-            <a:normAutofit/>
-          </a:bodyPr>
-          <a:lstStyle/>
-          <a:p>
-            <a:pPr indent="0" marL="0">
-              <a:buNone/>
-            </a:pPr>
-            <a:r>
-              <a:rPr lang="en-US" sz="710" b="1" dirty="0">
-                <a:solidFill>
-                  <a:srgbClr val="487052"/>
-                </a:solidFill>
-                <a:latin typeface="Microsoft YaHei" pitchFamily="34" charset="0"/>
-                <a:ea typeface="Microsoft YaHei" pitchFamily="34" charset="-122"/>
-                <a:cs typeface="Microsoft YaHei" pitchFamily="34" charset="-120"/>
-              </a:rPr>
-              <a:t>路线A</a:t>
-            </a:r>
-            <a:endParaRPr lang="en-US" sz="710" dirty="0"/>
-          </a:p>
-        </p:txBody>
-      </p:sp>
-      <p:sp>
-        <p:nvSpPr>
-          <p:cNvPr id="29" name="Text 27"/>
-          <p:cNvSpPr/>
-          <p:nvPr/>
-        </p:nvSpPr>
-        <p:spPr>
-          <a:xfrm>
-            <a:off x="7891272" y="2505456"/>
-            <a:ext cx="1024128" cy="201168"/>
+            <a:off x="7772400" y="4498848"/>
+            <a:ext cx="2560320" cy="384048"/>
           </a:xfrm>
           <a:prstGeom prst="rect">
             <a:avLst/>
@@ -13899,369 +13710,7 @@
               <a:buNone/>
             </a:pPr>
             <a:r>
-              <a:rPr lang="en-US" sz="670" dirty="0">
-                <a:solidFill>
-                  <a:srgbClr val="121212"/>
-                </a:solidFill>
-                <a:latin typeface="Microsoft YaHei" pitchFamily="34" charset="0"/>
-                <a:ea typeface="Microsoft YaHei" pitchFamily="34" charset="-122"/>
-                <a:cs typeface="Microsoft YaHei" pitchFamily="34" charset="-120"/>
-              </a:rPr>
-              <a:t>龙蟠科技锁定最高56.78</a:t>
-            </a:r>
-            <a:endParaRPr lang="en-US" sz="670" dirty="0"/>
-          </a:p>
-        </p:txBody>
-      </p:sp>
-      <p:sp>
-        <p:nvSpPr>
-          <p:cNvPr id="30" name="Shape 28"/>
-          <p:cNvSpPr/>
-          <p:nvPr/>
-        </p:nvSpPr>
-        <p:spPr>
-          <a:xfrm>
-            <a:off x="9061704" y="2176272"/>
-            <a:ext cx="1243584" cy="804672"/>
-          </a:xfrm>
-          <a:prstGeom prst="rect">
-            <a:avLst/>
-          </a:prstGeom>
-          <a:solidFill>
-            <a:srgbClr val="FFFFFF"/>
-          </a:solidFill>
-          <a:ln w="3810">
-            <a:solidFill>
-              <a:srgbClr val="DADADA"/>
-            </a:solidFill>
-            <a:prstDash val="solid"/>
-          </a:ln>
-        </p:spPr>
-      </p:sp>
-      <p:sp>
-        <p:nvSpPr>
-          <p:cNvPr id="31" name="Text 29"/>
-          <p:cNvSpPr/>
-          <p:nvPr/>
-        </p:nvSpPr>
-        <p:spPr>
-          <a:xfrm>
-            <a:off x="9134856" y="2286000"/>
-            <a:ext cx="438912" cy="109728"/>
-          </a:xfrm>
-          <a:prstGeom prst="rect">
-            <a:avLst/>
-          </a:prstGeom>
-          <a:noFill/>
-          <a:ln/>
-        </p:spPr>
-        <p:txBody>
-          <a:bodyPr wrap="square" lIns="0" tIns="0" rIns="0" bIns="0" rtlCol="0" anchor="ctr">
-            <a:normAutofit/>
-          </a:bodyPr>
-          <a:lstStyle/>
-          <a:p>
-            <a:pPr indent="0" marL="0">
-              <a:buNone/>
-            </a:pPr>
-            <a:r>
-              <a:rPr lang="en-US" sz="710" b="1" dirty="0">
-                <a:solidFill>
-                  <a:srgbClr val="487052"/>
-                </a:solidFill>
-                <a:latin typeface="Microsoft YaHei" pitchFamily="34" charset="0"/>
-                <a:ea typeface="Microsoft YaHei" pitchFamily="34" charset="-122"/>
-                <a:cs typeface="Microsoft YaHei" pitchFamily="34" charset="-120"/>
-              </a:rPr>
-              <a:t>路线B</a:t>
-            </a:r>
-            <a:endParaRPr lang="en-US" sz="710" dirty="0"/>
-          </a:p>
-        </p:txBody>
-      </p:sp>
-      <p:sp>
-        <p:nvSpPr>
-          <p:cNvPr id="32" name="Text 30"/>
-          <p:cNvSpPr/>
-          <p:nvPr/>
-        </p:nvSpPr>
-        <p:spPr>
-          <a:xfrm>
-            <a:off x="9134856" y="2505456"/>
-            <a:ext cx="1024128" cy="201168"/>
-          </a:xfrm>
-          <a:prstGeom prst="rect">
-            <a:avLst/>
-          </a:prstGeom>
-          <a:noFill/>
-          <a:ln/>
-        </p:spPr>
-        <p:txBody>
-          <a:bodyPr wrap="square" lIns="0" tIns="0" rIns="0" bIns="0" rtlCol="0" anchor="t">
-            <a:normAutofit/>
-          </a:bodyPr>
-          <a:lstStyle/>
-          <a:p>
-            <a:pPr indent="0" marL="0">
-              <a:buNone/>
-            </a:pPr>
-            <a:r>
-              <a:rPr lang="en-US" sz="670" dirty="0">
-                <a:solidFill>
-                  <a:srgbClr val="121212"/>
-                </a:solidFill>
-                <a:latin typeface="Microsoft YaHei" pitchFamily="34" charset="0"/>
-                <a:ea typeface="Microsoft YaHei" pitchFamily="34" charset="-122"/>
-                <a:cs typeface="Microsoft YaHei" pitchFamily="34" charset="-120"/>
-              </a:rPr>
-              <a:t>华盛锂电差异化权益分派法律</a:t>
-            </a:r>
-            <a:endParaRPr lang="en-US" sz="670" dirty="0"/>
-          </a:p>
-        </p:txBody>
-      </p:sp>
-      <p:sp>
-        <p:nvSpPr>
-          <p:cNvPr id="33" name="Shape 31"/>
-          <p:cNvSpPr/>
-          <p:nvPr/>
-        </p:nvSpPr>
-        <p:spPr>
-          <a:xfrm>
-            <a:off x="7818120" y="2980944"/>
-            <a:ext cx="1243584" cy="804672"/>
-          </a:xfrm>
-          <a:prstGeom prst="rect">
-            <a:avLst/>
-          </a:prstGeom>
-          <a:solidFill>
-            <a:srgbClr val="FFFFFF"/>
-          </a:solidFill>
-          <a:ln w="3810">
-            <a:solidFill>
-              <a:srgbClr val="DADADA"/>
-            </a:solidFill>
-            <a:prstDash val="solid"/>
-          </a:ln>
-        </p:spPr>
-      </p:sp>
-      <p:sp>
-        <p:nvSpPr>
-          <p:cNvPr id="34" name="Text 32"/>
-          <p:cNvSpPr/>
-          <p:nvPr/>
-        </p:nvSpPr>
-        <p:spPr>
-          <a:xfrm>
-            <a:off x="7891272" y="3090672"/>
-            <a:ext cx="438912" cy="109728"/>
-          </a:xfrm>
-          <a:prstGeom prst="rect">
-            <a:avLst/>
-          </a:prstGeom>
-          <a:noFill/>
-          <a:ln/>
-        </p:spPr>
-        <p:txBody>
-          <a:bodyPr wrap="square" lIns="0" tIns="0" rIns="0" bIns="0" rtlCol="0" anchor="ctr">
-            <a:normAutofit/>
-          </a:bodyPr>
-          <a:lstStyle/>
-          <a:p>
-            <a:pPr indent="0" marL="0">
-              <a:buNone/>
-            </a:pPr>
-            <a:r>
-              <a:rPr lang="en-US" sz="710" b="1" dirty="0">
-                <a:solidFill>
-                  <a:srgbClr val="487052"/>
-                </a:solidFill>
-                <a:latin typeface="Microsoft YaHei" pitchFamily="34" charset="0"/>
-                <a:ea typeface="Microsoft YaHei" pitchFamily="34" charset="-122"/>
-                <a:cs typeface="Microsoft YaHei" pitchFamily="34" charset="-120"/>
-              </a:rPr>
-              <a:t>机会</a:t>
-            </a:r>
-            <a:endParaRPr lang="en-US" sz="710" dirty="0"/>
-          </a:p>
-        </p:txBody>
-      </p:sp>
-      <p:sp>
-        <p:nvSpPr>
-          <p:cNvPr id="35" name="Text 33"/>
-          <p:cNvSpPr/>
-          <p:nvPr/>
-        </p:nvSpPr>
-        <p:spPr>
-          <a:xfrm>
-            <a:off x="7891272" y="3310128"/>
-            <a:ext cx="1024128" cy="201168"/>
-          </a:xfrm>
-          <a:prstGeom prst="rect">
-            <a:avLst/>
-          </a:prstGeom>
-          <a:noFill/>
-          <a:ln/>
-        </p:spPr>
-        <p:txBody>
-          <a:bodyPr wrap="square" lIns="0" tIns="0" rIns="0" bIns="0" rtlCol="0" anchor="t">
-            <a:normAutofit/>
-          </a:bodyPr>
-          <a:lstStyle/>
-          <a:p>
-            <a:pPr indent="0" marL="0">
-              <a:buNone/>
-            </a:pPr>
-            <a:r>
-              <a:rPr lang="en-US" sz="670" dirty="0">
-                <a:solidFill>
-                  <a:srgbClr val="121212"/>
-                </a:solidFill>
-                <a:latin typeface="Microsoft YaHei" pitchFamily="34" charset="0"/>
-                <a:ea typeface="Microsoft YaHei" pitchFamily="34" charset="-122"/>
-                <a:cs typeface="Microsoft YaHei" pitchFamily="34" charset="-120"/>
-              </a:rPr>
-              <a:t>长协锁定反映下游对供应稳定</a:t>
-            </a:r>
-            <a:endParaRPr lang="en-US" sz="670" dirty="0"/>
-          </a:p>
-        </p:txBody>
-      </p:sp>
-      <p:sp>
-        <p:nvSpPr>
-          <p:cNvPr id="36" name="Shape 34"/>
-          <p:cNvSpPr/>
-          <p:nvPr/>
-        </p:nvSpPr>
-        <p:spPr>
-          <a:xfrm>
-            <a:off x="9061704" y="2980944"/>
-            <a:ext cx="1243584" cy="804672"/>
-          </a:xfrm>
-          <a:prstGeom prst="rect">
-            <a:avLst/>
-          </a:prstGeom>
-          <a:solidFill>
-            <a:srgbClr val="F4FAF6"/>
-          </a:solidFill>
-          <a:ln w="3810">
-            <a:solidFill>
-              <a:srgbClr val="DADADA"/>
-            </a:solidFill>
-            <a:prstDash val="solid"/>
-          </a:ln>
-        </p:spPr>
-      </p:sp>
-      <p:sp>
-        <p:nvSpPr>
-          <p:cNvPr id="37" name="Text 35"/>
-          <p:cNvSpPr/>
-          <p:nvPr/>
-        </p:nvSpPr>
-        <p:spPr>
-          <a:xfrm>
-            <a:off x="9134856" y="3090672"/>
-            <a:ext cx="438912" cy="109728"/>
-          </a:xfrm>
-          <a:prstGeom prst="rect">
-            <a:avLst/>
-          </a:prstGeom>
-          <a:noFill/>
-          <a:ln/>
-        </p:spPr>
-        <p:txBody>
-          <a:bodyPr wrap="square" lIns="0" tIns="0" rIns="0" bIns="0" rtlCol="0" anchor="ctr">
-            <a:normAutofit/>
-          </a:bodyPr>
-          <a:lstStyle/>
-          <a:p>
-            <a:pPr indent="0" marL="0">
-              <a:buNone/>
-            </a:pPr>
-            <a:r>
-              <a:rPr lang="en-US" sz="710" b="1" dirty="0">
-                <a:solidFill>
-                  <a:srgbClr val="487052"/>
-                </a:solidFill>
-                <a:latin typeface="Microsoft YaHei" pitchFamily="34" charset="0"/>
-                <a:ea typeface="Microsoft YaHei" pitchFamily="34" charset="-122"/>
-                <a:cs typeface="Microsoft YaHei" pitchFamily="34" charset="-120"/>
-              </a:rPr>
-              <a:t>约束</a:t>
-            </a:r>
-            <a:endParaRPr lang="en-US" sz="710" dirty="0"/>
-          </a:p>
-        </p:txBody>
-      </p:sp>
-      <p:sp>
-        <p:nvSpPr>
-          <p:cNvPr id="38" name="Text 36"/>
-          <p:cNvSpPr/>
-          <p:nvPr/>
-        </p:nvSpPr>
-        <p:spPr>
-          <a:xfrm>
-            <a:off x="9134856" y="3310128"/>
-            <a:ext cx="1024128" cy="201168"/>
-          </a:xfrm>
-          <a:prstGeom prst="rect">
-            <a:avLst/>
-          </a:prstGeom>
-          <a:noFill/>
-          <a:ln/>
-        </p:spPr>
-        <p:txBody>
-          <a:bodyPr wrap="square" lIns="0" tIns="0" rIns="0" bIns="0" rtlCol="0" anchor="t">
-            <a:normAutofit/>
-          </a:bodyPr>
-          <a:lstStyle/>
-          <a:p>
-            <a:pPr indent="0" marL="0">
-              <a:buNone/>
-            </a:pPr>
-            <a:r>
-              <a:rPr lang="en-US" sz="670" dirty="0">
-                <a:solidFill>
-                  <a:srgbClr val="121212"/>
-                </a:solidFill>
-                <a:latin typeface="Microsoft YaHei" pitchFamily="34" charset="0"/>
-                <a:ea typeface="Microsoft YaHei" pitchFamily="34" charset="-122"/>
-                <a:cs typeface="Microsoft YaHei" pitchFamily="34" charset="-120"/>
-              </a:rPr>
-              <a:t>龙蟠科技锁定最高56.78</a:t>
-            </a:r>
-            <a:endParaRPr lang="en-US" sz="670" dirty="0"/>
-          </a:p>
-        </p:txBody>
-      </p:sp>
-      <p:sp>
-        <p:nvSpPr>
-          <p:cNvPr id="39" name="Text 37"/>
-          <p:cNvSpPr/>
-          <p:nvPr/>
-        </p:nvSpPr>
-        <p:spPr>
-          <a:xfrm>
-            <a:off x="7726680" y="4187952"/>
-            <a:ext cx="2697480" cy="493776"/>
-          </a:xfrm>
-          <a:prstGeom prst="rect">
-            <a:avLst/>
-          </a:prstGeom>
-          <a:noFill/>
-          <a:ln/>
-        </p:spPr>
-        <p:txBody>
-          <a:bodyPr wrap="square" lIns="0" tIns="0" rIns="0" bIns="0" rtlCol="0" anchor="t">
-            <a:normAutofit/>
-          </a:bodyPr>
-          <a:lstStyle/>
-          <a:p>
-            <a:pPr indent="0" marL="0">
-              <a:buNone/>
-            </a:pPr>
-            <a:r>
-              <a:rPr lang="en-US" sz="760" dirty="0">
+              <a:rPr lang="en-US" sz="800" dirty="0">
                 <a:solidFill>
                   <a:srgbClr val="6D756F"/>
                 </a:solidFill>
@@ -14269,15 +13718,15 @@
                 <a:ea typeface="Microsoft YaHei" pitchFamily="34" charset="-122"/>
                 <a:cs typeface="Microsoft YaHei" pitchFamily="34" charset="-120"/>
               </a:rPr>
-              <a:t>检测到对比/分类信号，用矩阵压缩呈现，不新增外部判断。</a:t>
-            </a:r>
-            <a:endParaRPr lang="en-US" sz="760" dirty="0"/>
-          </a:p>
-        </p:txBody>
-      </p:sp>
-      <p:sp>
-        <p:nvSpPr>
-          <p:cNvPr id="40" name="Shape 38"/>
+              <a:t>阅读提示：仅按公开报道原文呈现；不同企业、时间和统计范围不可直接横向比较。</a:t>
+            </a:r>
+            <a:endParaRPr lang="en-US" sz="800" dirty="0"/>
+          </a:p>
+        </p:txBody>
+      </p:sp>
+      <p:sp>
+        <p:nvSpPr>
+          <p:cNvPr id="29" name="Shape 27"/>
           <p:cNvSpPr/>
           <p:nvPr/>
         </p:nvSpPr>
@@ -14302,7 +13751,7 @@
       </p:sp>
       <p:sp>
         <p:nvSpPr>
-          <p:cNvPr id="41" name="Text 39"/>
+          <p:cNvPr id="30" name="Text 28"/>
           <p:cNvSpPr/>
           <p:nvPr/>
         </p:nvSpPr>
@@ -14341,7 +13790,7 @@
       </p:sp>
       <p:sp>
         <p:nvSpPr>
-          <p:cNvPr id="42" name="Text 40"/>
+          <p:cNvPr id="31" name="Text 29"/>
           <p:cNvSpPr/>
           <p:nvPr/>
         </p:nvSpPr>
@@ -14374,7 +13823,7 @@
                 <a:ea typeface="Microsoft YaHei" pitchFamily="34" charset="-122"/>
                 <a:cs typeface="Microsoft YaHei" pitchFamily="34" charset="-120"/>
               </a:rPr>
-              <a:t>若长协执行率高于预期，则龙蟠科技营收确定性增强</a:t>
+              <a:t>若储能电池产能激增伴随开工率维持高位，则可能持续拉动磷酸铁锂正极材料需求，跟踪指标为储能电池月度产量、出口数据和磷酸铁锂正极材料开工率</a:t>
             </a:r>
             <a:endParaRPr lang="en-US" sz="1020" dirty="0"/>
           </a:p>
@@ -14523,7 +13972,7 @@
                 <a:ea typeface="Aptos" pitchFamily="34" charset="-122"/>
                 <a:cs typeface="Aptos" pitchFamily="34" charset="-120"/>
               </a:rPr>
-              <a:t>2026-10-12</a:t>
+              <a:t>2026-10-19</a:t>
             </a:r>
             <a:endParaRPr lang="en-US" sz="800" dirty="0"/>
           </a:p>
@@ -14838,7 +14287,7 @@
                 <a:ea typeface="Microsoft YaHei" pitchFamily="34" charset="-122"/>
                 <a:cs typeface="Microsoft YaHei" pitchFamily="34" charset="-120"/>
               </a:rPr>
-              <a:t>碳酸锂价格暴跌近90%，动力电池回收行业进入洗牌深水区；电池板块跌幅居前，反映价格下行压力。成本端坍塌削弱磷酸铁锂价格支撑，回收企业退出可能加速，但上游材料企业盈利分化。 [3][7]</a:t>
+              <a:t>储能电池产能激增110%可能加剧行业供给竞争，对磷酸铁锂正极材料价格形成压制；电动摩托车锂电池强制性国标发布，可能提高小动力电池合规成本，推动低端产能出清，短期对磷酸铁锂价格影响有限。 [2][3]</a:t>
             </a:r>
             <a:endParaRPr lang="en-US" sz="960" dirty="0"/>
           </a:p>
@@ -14879,7 +14328,7 @@
                 <a:ea typeface="Aptos" pitchFamily="34" charset="-122"/>
                 <a:cs typeface="Aptos" pitchFamily="34" charset="-120"/>
               </a:rPr>
-              <a:t>依据：[3][7]</a:t>
+              <a:t>依据：[2][3]</a:t>
             </a:r>
             <a:endParaRPr lang="en-US" sz="740" dirty="0"/>
           </a:p>
@@ -14988,7 +14437,7 @@
                 <a:ea typeface="Microsoft YaHei" pitchFamily="34" charset="-122"/>
                 <a:cs typeface="Microsoft YaHei" pitchFamily="34" charset="-120"/>
               </a:rPr>
-              <a:t>碳酸锂价格暴跌直接降低磷酸铁锂生产成本，但产品价格同步下行，企业盈利取决于成本传导能力；回收行业洗牌可能减少再生碳酸锂供应，长期或影响原料结构。需验证：碳酸锂现货价拐点、回收企业退出规模。</a:t>
+              <a:t>储能产能激增信息来自VOI.ID，电摩国标信息来自温州新闻，两者分别从供给扩张和合规成本角度影响盈利。储能产能快速扩张可能导致电池环节价格竞争加剧，向上传导至磷酸铁锂正极材料价格；电摩国标提高安全门槛，可能增加小动力电池企业合规成本，加速低端产能退出。需验证储能电池实际价格走势和电摩国标执行力度。</a:t>
             </a:r>
             <a:endParaRPr lang="en-US" sz="960" dirty="0"/>
           </a:p>
@@ -15122,7 +14571,7 @@
                 <a:ea typeface="Microsoft YaHei" pitchFamily="34" charset="-122"/>
                 <a:cs typeface="Microsoft YaHei" pitchFamily="34" charset="-120"/>
               </a:rPr>
-              <a:t>若碳酸锂价格继续下跌，则磷酸铁锂价格可能进一步承压，高成本产能或退出；若回收行业洗牌导致再生供应减少，则长期碳酸锂供给结构可能变化。跟踪指标：碳酸锂现货价、回收企业开工率。</a:t>
+              <a:t>若储能电池产能利用率不足且价格竞争加剧，则可能传导至磷酸铁锂正极材料价格承压，跟踪指标为储能电池月度均价和磷酸铁锂正极材料报价；若电摩国标执行严格且合规成本上升，则可能加速小动力电池行业集中度提升，跟踪指标为电摩电池企业认证通过率和退出数量。证据边界限于公开报道，未覆盖具体价格数据和成本测算。</a:t>
             </a:r>
             <a:endParaRPr lang="en-US" sz="960" dirty="0"/>
           </a:p>
@@ -15258,7 +14707,7 @@
                 <a:ea typeface="Aptos" pitchFamily="34" charset="-122"/>
                 <a:cs typeface="Aptos" pitchFamily="34" charset="-120"/>
               </a:rPr>
-              <a:t>90%</a:t>
+              <a:t>10%</a:t>
             </a:r>
             <a:endParaRPr lang="en-US" sz="2100" dirty="0"/>
           </a:p>
@@ -15299,7 +14748,7 @@
                 <a:ea typeface="Microsoft YaHei" pitchFamily="34" charset="-122"/>
                 <a:cs typeface="Microsoft YaHei" pitchFamily="34" charset="-120"/>
               </a:rPr>
-              <a:t>碳酸锂价格暴跌</a:t>
+              <a:t>可能加剧行业供给竞争</a:t>
             </a:r>
             <a:endParaRPr lang="en-US" sz="820" dirty="0"/>
           </a:p>
@@ -15340,7 +14789,7 @@
                 <a:ea typeface="Microsoft YaHei" pitchFamily="34" charset="-122"/>
                 <a:cs typeface="Microsoft YaHei" pitchFamily="34" charset="-120"/>
               </a:rPr>
-              <a:t>公开信息：碳酸锂价格暴跌近90%，动力电池回收行业进入洗牌深水区</a:t>
+              <a:t>公开信息：储能电池产能激增110%可能加剧行业供给竞争，对磷酸铁锂正极材料价格形成压制</a:t>
             </a:r>
             <a:endParaRPr lang="en-US" sz="840" dirty="0"/>
           </a:p>
@@ -15486,7 +14935,7 @@
                 <a:ea typeface="Microsoft YaHei" pitchFamily="34" charset="-122"/>
                 <a:cs typeface="Microsoft YaHei" pitchFamily="34" charset="-120"/>
               </a:rPr>
-              <a:t>若碳酸锂价格继续下跌，则磷酸铁锂价格可能进一步承压，高成本产能或退出</a:t>
+              <a:t>若储能电池产能利用率不足且价格竞争加剧，则可能传导至磷酸铁锂正极材料价格承压，跟踪指标为储能电池月度均价和磷酸铁锂正极材料报价</a:t>
             </a:r>
             <a:endParaRPr lang="en-US" sz="1020" dirty="0"/>
           </a:p>
@@ -15635,7 +15084,7 @@
                 <a:ea typeface="Aptos" pitchFamily="34" charset="-122"/>
                 <a:cs typeface="Aptos" pitchFamily="34" charset="-120"/>
               </a:rPr>
-              <a:t>2026-10-12</a:t>
+              <a:t>2026-10-19</a:t>
             </a:r>
             <a:endParaRPr lang="en-US" sz="800" dirty="0"/>
           </a:p>
@@ -15841,7 +15290,7 @@
                 <a:ea typeface="Microsoft YaHei" pitchFamily="34" charset="-122"/>
                 <a:cs typeface="Microsoft YaHei" pitchFamily="34" charset="-120"/>
               </a:rPr>
-              <a:t>3 条公开来源交叉验证｜事实、影响与后续研判</a:t>
+              <a:t>2 条公开来源交叉验证｜事实、影响与后续研判</a:t>
             </a:r>
             <a:endParaRPr lang="en-US" sz="860" dirty="0"/>
           </a:p>
@@ -15950,7 +15399,7 @@
                 <a:ea typeface="Microsoft YaHei" pitchFamily="34" charset="-122"/>
                 <a:cs typeface="Microsoft YaHei" pitchFamily="34" charset="-120"/>
               </a:rPr>
-              <a:t>欧盟要求中国自限插混出口，贸易政策风险升温；国内出台19项举措推进新质生产力，动力电池政策环境总体支持；法国电池谷争抢中国企业，显示海外本地化需求。政策博弈可能影响磷酸铁锂出口预期。 [4][8][9]</a:t>
+              <a:t>电动摩托车锂电池强制性国标发布，明年7月实施，将提高小动力电池安全门槛，利好合规产能；商务部将12项光伏技术列入禁止、限制出口名单，虽不直接涉及磷酸铁锂，但反映新能源领域出口管制趋严，需关注电池材料出口政策变化。 [3][6]</a:t>
             </a:r>
             <a:endParaRPr lang="en-US" sz="960" dirty="0"/>
           </a:p>
@@ -15991,7 +15440,7 @@
                 <a:ea typeface="Aptos" pitchFamily="34" charset="-122"/>
                 <a:cs typeface="Aptos" pitchFamily="34" charset="-120"/>
               </a:rPr>
-              <a:t>依据：[4][8][9]</a:t>
+              <a:t>依据：[3][6]</a:t>
             </a:r>
             <a:endParaRPr lang="en-US" sz="740" dirty="0"/>
           </a:p>
@@ -16100,7 +15549,7 @@
                 <a:ea typeface="Microsoft YaHei" pitchFamily="34" charset="-122"/>
                 <a:cs typeface="Microsoft YaHei" pitchFamily="34" charset="-120"/>
               </a:rPr>
-              <a:t>欧盟自限要求若落地，将直接限制插混车型出口，进而影响配套磷酸铁锂电池需求；国内新质生产力举措可能利好技术升级，但海外本地化生产要求增加合规成本。需验证：欧盟政策具体条款、国内政策落地细节。</a:t>
+              <a:t>电摩国标信息来自温州新闻，光伏出口管制信息来自国际新能源网，两者均涉及新能源领域政策合规。电摩国标直接提高小动力锂电池安全要求，可能加速低端产能出清；光伏出口管制虽不直接涉及磷酸铁锂，但显示新能源技术出口管理趋严，可能对电池材料出口预期产生间接影响。需验证电摩国标的具体技术指标和过渡期安排，以及电池材料出口政策是否有联动调整。</a:t>
             </a:r>
             <a:endParaRPr lang="en-US" sz="960" dirty="0"/>
           </a:p>
@@ -16234,7 +15683,7 @@
                 <a:ea typeface="Microsoft YaHei" pitchFamily="34" charset="-122"/>
                 <a:cs typeface="Microsoft YaHei" pitchFamily="34" charset="-120"/>
               </a:rPr>
-              <a:t>若欧盟自限政策实施，则插混出口量可能下滑，磷酸铁锂需求受拖累；若国内新质生产力举措加大研发支持，则技术领先企业可能受益。跟踪指标：欧盟政策文本、插混出口数据。</a:t>
+              <a:t>若电摩国标执行严格且过渡期较短，则可能加速小动力电池行业洗牌，跟踪指标为电摩电池企业认证进度和行业集中度变化；若新能源领域出口管制范围扩大至电池材料，则可能影响磷酸铁锂出口预期，跟踪指标为商务部出口管制清单更新和电池材料出口数据。证据边界限于公开报道，未覆盖政策执行细则和行业反馈。</a:t>
             </a:r>
             <a:endParaRPr lang="en-US" sz="960" dirty="0"/>
           </a:p>
@@ -16409,7 +15858,7 @@
                 <a:ea typeface="Microsoft YaHei" pitchFamily="34" charset="-122"/>
                 <a:cs typeface="Microsoft YaHei" pitchFamily="34" charset="-120"/>
               </a:rPr>
-              <a:t>欧盟要求中国自限插混出口，贸易政策</a:t>
+              <a:t>电动摩托车锂电池强制性国标发布，明</a:t>
             </a:r>
             <a:endParaRPr lang="en-US" sz="660" dirty="0"/>
           </a:p>
@@ -16516,7 +15965,7 @@
                 <a:ea typeface="Microsoft YaHei" pitchFamily="34" charset="-122"/>
                 <a:cs typeface="Microsoft YaHei" pitchFamily="34" charset="-120"/>
               </a:rPr>
-              <a:t>国内出台19项举措推进新质生产力，</a:t>
+              <a:t>商务部将12项光伏技术列入禁止、限</a:t>
             </a:r>
             <a:endParaRPr lang="en-US" sz="660" dirty="0"/>
           </a:p>
@@ -16623,7 +16072,7 @@
                 <a:ea typeface="Microsoft YaHei" pitchFamily="34" charset="-122"/>
                 <a:cs typeface="Microsoft YaHei" pitchFamily="34" charset="-120"/>
               </a:rPr>
-              <a:t>法国电池谷争抢中国企业，显示海外本</a:t>
+              <a:t>[3][6] 电摩国标信息来自温州</a:t>
             </a:r>
             <a:endParaRPr lang="en-US" sz="660" dirty="0"/>
           </a:p>
@@ -16728,7 +16177,7 @@
                 <a:ea typeface="Microsoft YaHei" pitchFamily="34" charset="-122"/>
                 <a:cs typeface="Microsoft YaHei" pitchFamily="34" charset="-120"/>
               </a:rPr>
-              <a:t>若欧盟自限政策实施，则插混出口量可能下滑，磷酸铁锂需求受拖累</a:t>
+              <a:t>若电摩国标执行严格且过渡期较短，则可能加速小动力电池行业洗牌，跟踪指标为电摩电池企业认证进度和行业集中度变化</a:t>
             </a:r>
             <a:endParaRPr lang="en-US" sz="1020" dirty="0"/>
           </a:p>
@@ -16877,7 +16326,7 @@
                 <a:ea typeface="Aptos" pitchFamily="34" charset="-122"/>
                 <a:cs typeface="Aptos" pitchFamily="34" charset="-120"/>
               </a:rPr>
-              <a:t>2026-10-12</a:t>
+              <a:t>2026-10-19</a:t>
             </a:r>
             <a:endParaRPr lang="en-US" sz="800" dirty="0"/>
           </a:p>
@@ -17192,7 +16641,7 @@
                 <a:ea typeface="Microsoft YaHei" pitchFamily="34" charset="-122"/>
                 <a:cs typeface="Microsoft YaHei" pitchFamily="34" charset="-120"/>
               </a:rPr>
-              <a:t>吉利开卖电芯，车企自供电池趋势增强，可能挤压第三方磷酸铁锂供应商份额；法国电池谷争抢中国企业，海外竞争加剧。竞品动态显示行业垂直整合与全球化布局并行。 [5][9]</a:t>
+              <a:t>全国首批锂+钠示范落地河北，大电芯路线推进，钠离子电池在储能场景的替代尝试可能对磷酸铁锂形成潜在竞争；固态电池专家提出2030年实用化量产目标，长期技术路线竞争需持续跟踪。 [5][4]</a:t>
             </a:r>
             <a:endParaRPr lang="en-US" sz="960" dirty="0"/>
           </a:p>
@@ -17233,7 +16682,7 @@
                 <a:ea typeface="Aptos" pitchFamily="34" charset="-122"/>
                 <a:cs typeface="Aptos" pitchFamily="34" charset="-120"/>
               </a:rPr>
-              <a:t>依据：[5][9]</a:t>
+              <a:t>依据：[5][4]</a:t>
             </a:r>
             <a:endParaRPr lang="en-US" sz="740" dirty="0"/>
           </a:p>
@@ -17342,7 +16791,7 @@
                 <a:ea typeface="Microsoft YaHei" pitchFamily="34" charset="-122"/>
                 <a:cs typeface="Microsoft YaHei" pitchFamily="34" charset="-120"/>
               </a:rPr>
-              <a:t>吉利作为车企自供电芯，可能优先采购自家产品，影响外部磷酸铁锂订单；法国电池谷招商反映欧洲本地化生产需求，中国企业出海面临竞争与合作。需验证：吉利电芯技术来源、法国电池谷招商政策。</a:t>
+              <a:t>锂+钠示范项目来自搜狐，固态电池观点来自每日经济新闻，两者分别代表钠离子电池和固态电池对磷酸铁锂的潜在替代。钠离子电池在储能场景的成本优势可能分流部分低端需求；固态电池量产目标在2030年，短期不构成威胁，但长期可能改变动力电池技术格局。需验证钠离子电池储能项目的实际规模和成本，以及固态电池量产时间表的可信度。</a:t>
             </a:r>
             <a:endParaRPr lang="en-US" sz="960" dirty="0"/>
           </a:p>
@@ -17476,7 +16925,7 @@
                 <a:ea typeface="Microsoft YaHei" pitchFamily="34" charset="-122"/>
                 <a:cs typeface="Microsoft YaHei" pitchFamily="34" charset="-120"/>
               </a:rPr>
-              <a:t>若吉利电芯大规模外供，则第三方磷酸铁锂企业客户结构可能恶化；若法国电池谷成功吸引中国企业，则海外产能布局可能加速。跟踪指标：吉利电芯外供量、法国电池谷入驻企业名单。</a:t>
+              <a:t>若钠离子电池在储能场景实现规模化应用且成本低于磷酸铁锂，则可能对磷酸铁锂在低端储能市场的份额形成挤压，跟踪指标为钠离子电池储能项目招标规模和度电成本对比；若固态电池在2030年前实现小批量装车，则可能对磷酸铁锂长期需求预期形成扰动，跟踪指标为固态电池装车验证进度和成本下降曲线。证据边界限于公开报道，未覆盖具体项目经济性数据。</a:t>
             </a:r>
             <a:endParaRPr lang="en-US" sz="960" dirty="0"/>
           </a:p>
@@ -17544,7 +16993,7 @@
                 <a:ea typeface="Microsoft YaHei" pitchFamily="34" charset="-122"/>
                 <a:cs typeface="Microsoft YaHei" pitchFamily="34" charset="-120"/>
               </a:rPr>
-              <a:t>路线图</a:t>
+              <a:t>对比矩阵</a:t>
             </a:r>
             <a:endParaRPr lang="en-US" sz="1200" dirty="0"/>
           </a:p>
@@ -17558,18 +17007,89 @@
         </p:nvSpPr>
         <p:spPr>
           <a:xfrm>
-            <a:off x="7754112" y="2249424"/>
-            <a:ext cx="612648" cy="402336"/>
-          </a:xfrm>
-          <a:prstGeom prst="chevron">
+            <a:off x="7818120" y="2176272"/>
+            <a:ext cx="2487168" cy="1609344"/>
+          </a:xfrm>
+          <a:prstGeom prst="rect">
+            <a:avLst/>
+          </a:prstGeom>
+          <a:solidFill>
+            <a:srgbClr val="FFFFFF"/>
+          </a:solidFill>
+          <a:ln w="10160">
+            <a:solidFill>
+              <a:srgbClr val="DADADA"/>
+            </a:solidFill>
+            <a:prstDash val="solid"/>
+          </a:ln>
+        </p:spPr>
+      </p:sp>
+      <p:sp>
+        <p:nvSpPr>
+          <p:cNvPr id="25" name="Shape 23"/>
+          <p:cNvSpPr/>
+          <p:nvPr/>
+        </p:nvSpPr>
+        <p:spPr>
+          <a:xfrm>
+            <a:off x="9061704" y="2176272"/>
+            <a:ext cx="0" cy="1609344"/>
+          </a:xfrm>
+          <a:prstGeom prst="line">
+            <a:avLst/>
+          </a:prstGeom>
+          <a:noFill/>
+          <a:ln w="8890">
+            <a:solidFill>
+              <a:srgbClr val="DADADA"/>
+            </a:solidFill>
+            <a:prstDash val="solid"/>
+          </a:ln>
+        </p:spPr>
+      </p:sp>
+      <p:sp>
+        <p:nvSpPr>
+          <p:cNvPr id="26" name="Shape 24"/>
+          <p:cNvSpPr/>
+          <p:nvPr/>
+        </p:nvSpPr>
+        <p:spPr>
+          <a:xfrm>
+            <a:off x="7818120" y="2980944"/>
+            <a:ext cx="2487168" cy="0"/>
+          </a:xfrm>
+          <a:prstGeom prst="line">
+            <a:avLst/>
+          </a:prstGeom>
+          <a:noFill/>
+          <a:ln w="8890">
+            <a:solidFill>
+              <a:srgbClr val="DADADA"/>
+            </a:solidFill>
+            <a:prstDash val="solid"/>
+          </a:ln>
+        </p:spPr>
+      </p:sp>
+      <p:sp>
+        <p:nvSpPr>
+          <p:cNvPr id="27" name="Shape 25"/>
+          <p:cNvSpPr/>
+          <p:nvPr/>
+        </p:nvSpPr>
+        <p:spPr>
+          <a:xfrm>
+            <a:off x="7818120" y="2176272"/>
+            <a:ext cx="1243584" cy="804672"/>
+          </a:xfrm>
+          <a:prstGeom prst="rect">
             <a:avLst/>
           </a:prstGeom>
           <a:solidFill>
             <a:srgbClr val="DDEBE0"/>
           </a:solidFill>
-          <a:ln w="13970">
+          <a:ln w="3810">
             <a:solidFill>
-              <a:srgbClr val="487052"/>
+              <a:srgbClr val="DADADA"/>
             </a:solidFill>
             <a:prstDash val="solid"/>
           </a:ln>
@@ -17577,14 +17097,14 @@
       </p:sp>
       <p:sp>
         <p:nvSpPr>
-          <p:cNvPr id="25" name="Text 23"/>
-          <p:cNvSpPr/>
-          <p:nvPr/>
-        </p:nvSpPr>
-        <p:spPr>
-          <a:xfrm>
-            <a:off x="7827264" y="2386584"/>
-            <a:ext cx="448056" cy="109728"/>
+          <p:cNvPr id="28" name="Text 26"/>
+          <p:cNvSpPr/>
+          <p:nvPr/>
+        </p:nvSpPr>
+        <p:spPr>
+          <a:xfrm>
+            <a:off x="7891272" y="2286000"/>
+            <a:ext cx="438912" cy="109728"/>
           </a:xfrm>
           <a:prstGeom prst="rect">
             <a:avLst/>
@@ -17598,11 +17118,52 @@
           </a:bodyPr>
           <a:lstStyle/>
           <a:p>
-            <a:pPr algn="ctr" indent="0" marL="0">
-              <a:buNone/>
-            </a:pPr>
-            <a:r>
-              <a:rPr lang="en-US" sz="670" b="1" dirty="0">
+            <a:pPr indent="0" marL="0">
+              <a:buNone/>
+            </a:pPr>
+            <a:r>
+              <a:rPr lang="en-US" sz="710" b="1" dirty="0">
+                <a:solidFill>
+                  <a:srgbClr val="487052"/>
+                </a:solidFill>
+                <a:latin typeface="Microsoft YaHei" pitchFamily="34" charset="0"/>
+                <a:ea typeface="Microsoft YaHei" pitchFamily="34" charset="-122"/>
+                <a:cs typeface="Microsoft YaHei" pitchFamily="34" charset="-120"/>
+              </a:rPr>
+              <a:t>路线A</a:t>
+            </a:r>
+            <a:endParaRPr lang="en-US" sz="710" dirty="0"/>
+          </a:p>
+        </p:txBody>
+      </p:sp>
+      <p:sp>
+        <p:nvSpPr>
+          <p:cNvPr id="29" name="Text 27"/>
+          <p:cNvSpPr/>
+          <p:nvPr/>
+        </p:nvSpPr>
+        <p:spPr>
+          <a:xfrm>
+            <a:off x="7891272" y="2505456"/>
+            <a:ext cx="1024128" cy="201168"/>
+          </a:xfrm>
+          <a:prstGeom prst="rect">
+            <a:avLst/>
+          </a:prstGeom>
+          <a:noFill/>
+          <a:ln/>
+        </p:spPr>
+        <p:txBody>
+          <a:bodyPr wrap="square" lIns="0" tIns="0" rIns="0" bIns="0" rtlCol="0" anchor="t">
+            <a:normAutofit/>
+          </a:bodyPr>
+          <a:lstStyle/>
+          <a:p>
+            <a:pPr indent="0" marL="0">
+              <a:buNone/>
+            </a:pPr>
+            <a:r>
+              <a:rPr lang="en-US" sz="670" dirty="0">
                 <a:solidFill>
                   <a:srgbClr val="121212"/>
                 </a:solidFill>
@@ -17610,7 +17171,7 @@
                 <a:ea typeface="Microsoft YaHei" pitchFamily="34" charset="-122"/>
                 <a:cs typeface="Microsoft YaHei" pitchFamily="34" charset="-120"/>
               </a:rPr>
-              <a:t>技术</a:t>
+              <a:t>全国首批锂+钠示范落地河北</a:t>
             </a:r>
             <a:endParaRPr lang="en-US" sz="670" dirty="0"/>
           </a:p>
@@ -17618,24 +17179,24 @@
       </p:sp>
       <p:sp>
         <p:nvSpPr>
-          <p:cNvPr id="26" name="Shape 24"/>
-          <p:cNvSpPr/>
-          <p:nvPr/>
-        </p:nvSpPr>
-        <p:spPr>
-          <a:xfrm>
-            <a:off x="8375904" y="2249424"/>
-            <a:ext cx="612648" cy="402336"/>
-          </a:xfrm>
-          <a:prstGeom prst="chevron">
+          <p:cNvPr id="30" name="Shape 28"/>
+          <p:cNvSpPr/>
+          <p:nvPr/>
+        </p:nvSpPr>
+        <p:spPr>
+          <a:xfrm>
+            <a:off x="9061704" y="2176272"/>
+            <a:ext cx="1243584" cy="804672"/>
+          </a:xfrm>
+          <a:prstGeom prst="rect">
             <a:avLst/>
           </a:prstGeom>
           <a:solidFill>
             <a:srgbClr val="FFFFFF"/>
           </a:solidFill>
-          <a:ln w="13970">
+          <a:ln w="3810">
             <a:solidFill>
-              <a:srgbClr val="487052"/>
+              <a:srgbClr val="DADADA"/>
             </a:solidFill>
             <a:prstDash val="solid"/>
           </a:ln>
@@ -17643,14 +17204,14 @@
       </p:sp>
       <p:sp>
         <p:nvSpPr>
-          <p:cNvPr id="27" name="Text 25"/>
-          <p:cNvSpPr/>
-          <p:nvPr/>
-        </p:nvSpPr>
-        <p:spPr>
-          <a:xfrm>
-            <a:off x="8449056" y="2386584"/>
-            <a:ext cx="448056" cy="109728"/>
+          <p:cNvPr id="31" name="Text 29"/>
+          <p:cNvSpPr/>
+          <p:nvPr/>
+        </p:nvSpPr>
+        <p:spPr>
+          <a:xfrm>
+            <a:off x="9134856" y="2286000"/>
+            <a:ext cx="438912" cy="109728"/>
           </a:xfrm>
           <a:prstGeom prst="rect">
             <a:avLst/>
@@ -17664,11 +17225,52 @@
           </a:bodyPr>
           <a:lstStyle/>
           <a:p>
-            <a:pPr algn="ctr" indent="0" marL="0">
-              <a:buNone/>
-            </a:pPr>
-            <a:r>
-              <a:rPr lang="en-US" sz="670" b="1" dirty="0">
+            <a:pPr indent="0" marL="0">
+              <a:buNone/>
+            </a:pPr>
+            <a:r>
+              <a:rPr lang="en-US" sz="710" b="1" dirty="0">
+                <a:solidFill>
+                  <a:srgbClr val="487052"/>
+                </a:solidFill>
+                <a:latin typeface="Microsoft YaHei" pitchFamily="34" charset="0"/>
+                <a:ea typeface="Microsoft YaHei" pitchFamily="34" charset="-122"/>
+                <a:cs typeface="Microsoft YaHei" pitchFamily="34" charset="-120"/>
+              </a:rPr>
+              <a:t>路线B</a:t>
+            </a:r>
+            <a:endParaRPr lang="en-US" sz="710" dirty="0"/>
+          </a:p>
+        </p:txBody>
+      </p:sp>
+      <p:sp>
+        <p:nvSpPr>
+          <p:cNvPr id="32" name="Text 30"/>
+          <p:cNvSpPr/>
+          <p:nvPr/>
+        </p:nvSpPr>
+        <p:spPr>
+          <a:xfrm>
+            <a:off x="9134856" y="2505456"/>
+            <a:ext cx="1024128" cy="201168"/>
+          </a:xfrm>
+          <a:prstGeom prst="rect">
+            <a:avLst/>
+          </a:prstGeom>
+          <a:noFill/>
+          <a:ln/>
+        </p:spPr>
+        <p:txBody>
+          <a:bodyPr wrap="square" lIns="0" tIns="0" rIns="0" bIns="0" rtlCol="0" anchor="t">
+            <a:normAutofit/>
+          </a:bodyPr>
+          <a:lstStyle/>
+          <a:p>
+            <a:pPr indent="0" marL="0">
+              <a:buNone/>
+            </a:pPr>
+            <a:r>
+              <a:rPr lang="en-US" sz="670" dirty="0">
                 <a:solidFill>
                   <a:srgbClr val="121212"/>
                 </a:solidFill>
@@ -17676,7 +17278,7 @@
                 <a:ea typeface="Microsoft YaHei" pitchFamily="34" charset="-122"/>
                 <a:cs typeface="Microsoft YaHei" pitchFamily="34" charset="-120"/>
               </a:rPr>
-              <a:t>产品</a:t>
+              <a:t>固态电池专家提出2030年</a:t>
             </a:r>
             <a:endParaRPr lang="en-US" sz="670" dirty="0"/>
           </a:p>
@@ -17684,24 +17286,24 @@
       </p:sp>
       <p:sp>
         <p:nvSpPr>
-          <p:cNvPr id="28" name="Shape 26"/>
-          <p:cNvSpPr/>
-          <p:nvPr/>
-        </p:nvSpPr>
-        <p:spPr>
-          <a:xfrm>
-            <a:off x="8997696" y="2249424"/>
-            <a:ext cx="612648" cy="402336"/>
-          </a:xfrm>
-          <a:prstGeom prst="chevron">
+          <p:cNvPr id="33" name="Shape 31"/>
+          <p:cNvSpPr/>
+          <p:nvPr/>
+        </p:nvSpPr>
+        <p:spPr>
+          <a:xfrm>
+            <a:off x="7818120" y="2980944"/>
+            <a:ext cx="1243584" cy="804672"/>
+          </a:xfrm>
+          <a:prstGeom prst="rect">
             <a:avLst/>
           </a:prstGeom>
           <a:solidFill>
             <a:srgbClr val="FFFFFF"/>
           </a:solidFill>
-          <a:ln w="13970">
+          <a:ln w="3810">
             <a:solidFill>
-              <a:srgbClr val="487052"/>
+              <a:srgbClr val="DADADA"/>
             </a:solidFill>
             <a:prstDash val="solid"/>
           </a:ln>
@@ -17709,14 +17311,14 @@
       </p:sp>
       <p:sp>
         <p:nvSpPr>
-          <p:cNvPr id="29" name="Text 27"/>
-          <p:cNvSpPr/>
-          <p:nvPr/>
-        </p:nvSpPr>
-        <p:spPr>
-          <a:xfrm>
-            <a:off x="9070848" y="2386584"/>
-            <a:ext cx="448056" cy="109728"/>
+          <p:cNvPr id="34" name="Text 32"/>
+          <p:cNvSpPr/>
+          <p:nvPr/>
+        </p:nvSpPr>
+        <p:spPr>
+          <a:xfrm>
+            <a:off x="7891272" y="3090672"/>
+            <a:ext cx="438912" cy="109728"/>
           </a:xfrm>
           <a:prstGeom prst="rect">
             <a:avLst/>
@@ -17730,11 +17332,52 @@
           </a:bodyPr>
           <a:lstStyle/>
           <a:p>
-            <a:pPr algn="ctr" indent="0" marL="0">
-              <a:buNone/>
-            </a:pPr>
-            <a:r>
-              <a:rPr lang="en-US" sz="670" b="1" dirty="0">
+            <a:pPr indent="0" marL="0">
+              <a:buNone/>
+            </a:pPr>
+            <a:r>
+              <a:rPr lang="en-US" sz="710" b="1" dirty="0">
+                <a:solidFill>
+                  <a:srgbClr val="487052"/>
+                </a:solidFill>
+                <a:latin typeface="Microsoft YaHei" pitchFamily="34" charset="0"/>
+                <a:ea typeface="Microsoft YaHei" pitchFamily="34" charset="-122"/>
+                <a:cs typeface="Microsoft YaHei" pitchFamily="34" charset="-120"/>
+              </a:rPr>
+              <a:t>机会</a:t>
+            </a:r>
+            <a:endParaRPr lang="en-US" sz="710" dirty="0"/>
+          </a:p>
+        </p:txBody>
+      </p:sp>
+      <p:sp>
+        <p:nvSpPr>
+          <p:cNvPr id="35" name="Text 33"/>
+          <p:cNvSpPr/>
+          <p:nvPr/>
+        </p:nvSpPr>
+        <p:spPr>
+          <a:xfrm>
+            <a:off x="7891272" y="3310128"/>
+            <a:ext cx="1024128" cy="201168"/>
+          </a:xfrm>
+          <a:prstGeom prst="rect">
+            <a:avLst/>
+          </a:prstGeom>
+          <a:noFill/>
+          <a:ln/>
+        </p:spPr>
+        <p:txBody>
+          <a:bodyPr wrap="square" lIns="0" tIns="0" rIns="0" bIns="0" rtlCol="0" anchor="t">
+            <a:normAutofit/>
+          </a:bodyPr>
+          <a:lstStyle/>
+          <a:p>
+            <a:pPr indent="0" marL="0">
+              <a:buNone/>
+            </a:pPr>
+            <a:r>
+              <a:rPr lang="en-US" sz="670" dirty="0">
                 <a:solidFill>
                   <a:srgbClr val="121212"/>
                 </a:solidFill>
@@ -17742,7 +17385,7 @@
                 <a:ea typeface="Microsoft YaHei" pitchFamily="34" charset="-122"/>
                 <a:cs typeface="Microsoft YaHei" pitchFamily="34" charset="-120"/>
               </a:rPr>
-              <a:t>验证</a:t>
+              <a:t>[5][4] 锂+钠示范项</a:t>
             </a:r>
             <a:endParaRPr lang="en-US" sz="670" dirty="0"/>
           </a:p>
@@ -17750,24 +17393,24 @@
       </p:sp>
       <p:sp>
         <p:nvSpPr>
-          <p:cNvPr id="30" name="Shape 28"/>
-          <p:cNvSpPr/>
-          <p:nvPr/>
-        </p:nvSpPr>
-        <p:spPr>
-          <a:xfrm>
-            <a:off x="9619488" y="2249424"/>
-            <a:ext cx="612648" cy="402336"/>
-          </a:xfrm>
-          <a:prstGeom prst="chevron">
+          <p:cNvPr id="36" name="Shape 34"/>
+          <p:cNvSpPr/>
+          <p:nvPr/>
+        </p:nvSpPr>
+        <p:spPr>
+          <a:xfrm>
+            <a:off x="9061704" y="2980944"/>
+            <a:ext cx="1243584" cy="804672"/>
+          </a:xfrm>
+          <a:prstGeom prst="rect">
             <a:avLst/>
           </a:prstGeom>
           <a:solidFill>
-            <a:srgbClr val="FFFFFF"/>
+            <a:srgbClr val="F4FAF6"/>
           </a:solidFill>
-          <a:ln w="13970">
+          <a:ln w="3810">
             <a:solidFill>
-              <a:srgbClr val="487052"/>
+              <a:srgbClr val="DADADA"/>
             </a:solidFill>
             <a:prstDash val="solid"/>
           </a:ln>
@@ -17775,14 +17418,14 @@
       </p:sp>
       <p:sp>
         <p:nvSpPr>
-          <p:cNvPr id="31" name="Text 29"/>
-          <p:cNvSpPr/>
-          <p:nvPr/>
-        </p:nvSpPr>
-        <p:spPr>
-          <a:xfrm>
-            <a:off x="9692640" y="2386584"/>
-            <a:ext cx="448056" cy="109728"/>
+          <p:cNvPr id="37" name="Text 35"/>
+          <p:cNvSpPr/>
+          <p:nvPr/>
+        </p:nvSpPr>
+        <p:spPr>
+          <a:xfrm>
+            <a:off x="9134856" y="3090672"/>
+            <a:ext cx="438912" cy="109728"/>
           </a:xfrm>
           <a:prstGeom prst="rect">
             <a:avLst/>
@@ -17796,11 +17439,52 @@
           </a:bodyPr>
           <a:lstStyle/>
           <a:p>
-            <a:pPr algn="ctr" indent="0" marL="0">
-              <a:buNone/>
-            </a:pPr>
-            <a:r>
-              <a:rPr lang="en-US" sz="670" b="1" dirty="0">
+            <a:pPr indent="0" marL="0">
+              <a:buNone/>
+            </a:pPr>
+            <a:r>
+              <a:rPr lang="en-US" sz="710" b="1" dirty="0">
+                <a:solidFill>
+                  <a:srgbClr val="487052"/>
+                </a:solidFill>
+                <a:latin typeface="Microsoft YaHei" pitchFamily="34" charset="0"/>
+                <a:ea typeface="Microsoft YaHei" pitchFamily="34" charset="-122"/>
+                <a:cs typeface="Microsoft YaHei" pitchFamily="34" charset="-120"/>
+              </a:rPr>
+              <a:t>约束</a:t>
+            </a:r>
+            <a:endParaRPr lang="en-US" sz="710" dirty="0"/>
+          </a:p>
+        </p:txBody>
+      </p:sp>
+      <p:sp>
+        <p:nvSpPr>
+          <p:cNvPr id="38" name="Text 36"/>
+          <p:cNvSpPr/>
+          <p:nvPr/>
+        </p:nvSpPr>
+        <p:spPr>
+          <a:xfrm>
+            <a:off x="9134856" y="3310128"/>
+            <a:ext cx="1024128" cy="201168"/>
+          </a:xfrm>
+          <a:prstGeom prst="rect">
+            <a:avLst/>
+          </a:prstGeom>
+          <a:noFill/>
+          <a:ln/>
+        </p:spPr>
+        <p:txBody>
+          <a:bodyPr wrap="square" lIns="0" tIns="0" rIns="0" bIns="0" rtlCol="0" anchor="t">
+            <a:normAutofit/>
+          </a:bodyPr>
+          <a:lstStyle/>
+          <a:p>
+            <a:pPr indent="0" marL="0">
+              <a:buNone/>
+            </a:pPr>
+            <a:r>
+              <a:rPr lang="en-US" sz="670" dirty="0">
                 <a:solidFill>
                   <a:srgbClr val="121212"/>
                 </a:solidFill>
@@ -17808,7 +17492,7 @@
                 <a:ea typeface="Microsoft YaHei" pitchFamily="34" charset="-122"/>
                 <a:cs typeface="Microsoft YaHei" pitchFamily="34" charset="-120"/>
               </a:rPr>
-              <a:t>量产</a:t>
+              <a:t>全国首批锂+钠示范落地河北</a:t>
             </a:r>
             <a:endParaRPr lang="en-US" sz="670" dirty="0"/>
           </a:p>
@@ -17816,62 +17500,14 @@
       </p:sp>
       <p:sp>
         <p:nvSpPr>
-          <p:cNvPr id="32" name="Shape 30"/>
-          <p:cNvSpPr/>
-          <p:nvPr/>
-        </p:nvSpPr>
-        <p:spPr>
-          <a:xfrm>
-            <a:off x="7882128" y="3063240"/>
-            <a:ext cx="2331720" cy="0"/>
-          </a:xfrm>
-          <a:prstGeom prst="line">
-            <a:avLst/>
-          </a:prstGeom>
-          <a:noFill/>
-          <a:ln w="13970">
-            <a:solidFill>
-              <a:srgbClr val="7F9D84"/>
-            </a:solidFill>
-            <a:prstDash val="solid"/>
-          </a:ln>
-        </p:spPr>
-      </p:sp>
-      <p:sp>
-        <p:nvSpPr>
-          <p:cNvPr id="33" name="Shape 31"/>
-          <p:cNvSpPr/>
-          <p:nvPr/>
-        </p:nvSpPr>
-        <p:spPr>
-          <a:xfrm>
-            <a:off x="7845552" y="2962656"/>
-            <a:ext cx="164592" cy="164592"/>
-          </a:xfrm>
-          <a:prstGeom prst="ellipse">
-            <a:avLst/>
-          </a:prstGeom>
-          <a:solidFill>
-            <a:srgbClr val="487052"/>
-          </a:solidFill>
-          <a:ln w="12700">
-            <a:solidFill>
-              <a:srgbClr val="FFFFFF"/>
-            </a:solidFill>
-            <a:prstDash val="solid"/>
-          </a:ln>
-        </p:spPr>
-      </p:sp>
-      <p:sp>
-        <p:nvSpPr>
-          <p:cNvPr id="34" name="Text 32"/>
-          <p:cNvSpPr/>
-          <p:nvPr/>
-        </p:nvSpPr>
-        <p:spPr>
-          <a:xfrm>
-            <a:off x="7754112" y="3291840"/>
-            <a:ext cx="603504" cy="310896"/>
+          <p:cNvPr id="39" name="Text 37"/>
+          <p:cNvSpPr/>
+          <p:nvPr/>
+        </p:nvSpPr>
+        <p:spPr>
+          <a:xfrm>
+            <a:off x="7726680" y="4187952"/>
+            <a:ext cx="2697480" cy="493776"/>
           </a:xfrm>
           <a:prstGeom prst="rect">
             <a:avLst/>
@@ -17885,245 +17521,6 @@
           </a:bodyPr>
           <a:lstStyle/>
           <a:p>
-            <a:pPr algn="ctr" indent="0" marL="0">
-              <a:buNone/>
-            </a:pPr>
-            <a:r>
-              <a:rPr lang="en-US" sz="670" dirty="0">
-                <a:solidFill>
-                  <a:srgbClr val="121212"/>
-                </a:solidFill>
-                <a:latin typeface="Microsoft YaHei" pitchFamily="34" charset="0"/>
-                <a:ea typeface="Microsoft YaHei" pitchFamily="34" charset="-122"/>
-                <a:cs typeface="Microsoft YaHei" pitchFamily="34" charset="-120"/>
-              </a:rPr>
-              <a:t>吉利开卖电芯，车企自供</a:t>
-            </a:r>
-            <a:endParaRPr lang="en-US" sz="670" dirty="0"/>
-          </a:p>
-        </p:txBody>
-      </p:sp>
-      <p:sp>
-        <p:nvSpPr>
-          <p:cNvPr id="35" name="Shape 33"/>
-          <p:cNvSpPr/>
-          <p:nvPr/>
-        </p:nvSpPr>
-        <p:spPr>
-          <a:xfrm>
-            <a:off x="8503920" y="2962656"/>
-            <a:ext cx="164592" cy="164592"/>
-          </a:xfrm>
-          <a:prstGeom prst="ellipse">
-            <a:avLst/>
-          </a:prstGeom>
-          <a:solidFill>
-            <a:srgbClr val="487052"/>
-          </a:solidFill>
-          <a:ln w="12700">
-            <a:solidFill>
-              <a:srgbClr val="FFFFFF"/>
-            </a:solidFill>
-            <a:prstDash val="solid"/>
-          </a:ln>
-        </p:spPr>
-      </p:sp>
-      <p:sp>
-        <p:nvSpPr>
-          <p:cNvPr id="36" name="Text 34"/>
-          <p:cNvSpPr/>
-          <p:nvPr/>
-        </p:nvSpPr>
-        <p:spPr>
-          <a:xfrm>
-            <a:off x="8412480" y="3291840"/>
-            <a:ext cx="603504" cy="310896"/>
-          </a:xfrm>
-          <a:prstGeom prst="rect">
-            <a:avLst/>
-          </a:prstGeom>
-          <a:noFill/>
-          <a:ln/>
-        </p:spPr>
-        <p:txBody>
-          <a:bodyPr wrap="square" lIns="0" tIns="0" rIns="0" bIns="0" rtlCol="0" anchor="t">
-            <a:normAutofit/>
-          </a:bodyPr>
-          <a:lstStyle/>
-          <a:p>
-            <a:pPr algn="ctr" indent="0" marL="0">
-              <a:buNone/>
-            </a:pPr>
-            <a:r>
-              <a:rPr lang="en-US" sz="670" dirty="0">
-                <a:solidFill>
-                  <a:srgbClr val="121212"/>
-                </a:solidFill>
-                <a:latin typeface="Microsoft YaHei" pitchFamily="34" charset="0"/>
-                <a:ea typeface="Microsoft YaHei" pitchFamily="34" charset="-122"/>
-                <a:cs typeface="Microsoft YaHei" pitchFamily="34" charset="-120"/>
-              </a:rPr>
-              <a:t>法国电池谷争抢中国企业</a:t>
-            </a:r>
-            <a:endParaRPr lang="en-US" sz="670" dirty="0"/>
-          </a:p>
-        </p:txBody>
-      </p:sp>
-      <p:sp>
-        <p:nvSpPr>
-          <p:cNvPr id="37" name="Shape 35"/>
-          <p:cNvSpPr/>
-          <p:nvPr/>
-        </p:nvSpPr>
-        <p:spPr>
-          <a:xfrm>
-            <a:off x="9162288" y="2962656"/>
-            <a:ext cx="164592" cy="164592"/>
-          </a:xfrm>
-          <a:prstGeom prst="ellipse">
-            <a:avLst/>
-          </a:prstGeom>
-          <a:solidFill>
-            <a:srgbClr val="487052"/>
-          </a:solidFill>
-          <a:ln w="12700">
-            <a:solidFill>
-              <a:srgbClr val="FFFFFF"/>
-            </a:solidFill>
-            <a:prstDash val="solid"/>
-          </a:ln>
-        </p:spPr>
-      </p:sp>
-      <p:sp>
-        <p:nvSpPr>
-          <p:cNvPr id="38" name="Text 36"/>
-          <p:cNvSpPr/>
-          <p:nvPr/>
-        </p:nvSpPr>
-        <p:spPr>
-          <a:xfrm>
-            <a:off x="9070848" y="3291840"/>
-            <a:ext cx="603504" cy="310896"/>
-          </a:xfrm>
-          <a:prstGeom prst="rect">
-            <a:avLst/>
-          </a:prstGeom>
-          <a:noFill/>
-          <a:ln/>
-        </p:spPr>
-        <p:txBody>
-          <a:bodyPr wrap="square" lIns="0" tIns="0" rIns="0" bIns="0" rtlCol="0" anchor="t">
-            <a:normAutofit/>
-          </a:bodyPr>
-          <a:lstStyle/>
-          <a:p>
-            <a:pPr algn="ctr" indent="0" marL="0">
-              <a:buNone/>
-            </a:pPr>
-            <a:r>
-              <a:rPr lang="en-US" sz="670" dirty="0">
-                <a:solidFill>
-                  <a:srgbClr val="121212"/>
-                </a:solidFill>
-                <a:latin typeface="Microsoft YaHei" pitchFamily="34" charset="0"/>
-                <a:ea typeface="Microsoft YaHei" pitchFamily="34" charset="-122"/>
-                <a:cs typeface="Microsoft YaHei" pitchFamily="34" charset="-120"/>
-              </a:rPr>
-              <a:t>竞品动态显示行业垂直整</a:t>
-            </a:r>
-            <a:endParaRPr lang="en-US" sz="670" dirty="0"/>
-          </a:p>
-        </p:txBody>
-      </p:sp>
-      <p:sp>
-        <p:nvSpPr>
-          <p:cNvPr id="39" name="Shape 37"/>
-          <p:cNvSpPr/>
-          <p:nvPr/>
-        </p:nvSpPr>
-        <p:spPr>
-          <a:xfrm>
-            <a:off x="9820656" y="2962656"/>
-            <a:ext cx="164592" cy="164592"/>
-          </a:xfrm>
-          <a:prstGeom prst="ellipse">
-            <a:avLst/>
-          </a:prstGeom>
-          <a:solidFill>
-            <a:srgbClr val="B85A4A"/>
-          </a:solidFill>
-          <a:ln w="12700">
-            <a:solidFill>
-              <a:srgbClr val="FFFFFF"/>
-            </a:solidFill>
-            <a:prstDash val="solid"/>
-          </a:ln>
-        </p:spPr>
-      </p:sp>
-      <p:sp>
-        <p:nvSpPr>
-          <p:cNvPr id="40" name="Text 38"/>
-          <p:cNvSpPr/>
-          <p:nvPr/>
-        </p:nvSpPr>
-        <p:spPr>
-          <a:xfrm>
-            <a:off x="9729216" y="3291840"/>
-            <a:ext cx="603504" cy="310896"/>
-          </a:xfrm>
-          <a:prstGeom prst="rect">
-            <a:avLst/>
-          </a:prstGeom>
-          <a:noFill/>
-          <a:ln/>
-        </p:spPr>
-        <p:txBody>
-          <a:bodyPr wrap="square" lIns="0" tIns="0" rIns="0" bIns="0" rtlCol="0" anchor="t">
-            <a:normAutofit/>
-          </a:bodyPr>
-          <a:lstStyle/>
-          <a:p>
-            <a:pPr algn="ctr" indent="0" marL="0">
-              <a:buNone/>
-            </a:pPr>
-            <a:r>
-              <a:rPr lang="en-US" sz="670" dirty="0">
-                <a:solidFill>
-                  <a:srgbClr val="121212"/>
-                </a:solidFill>
-                <a:latin typeface="Microsoft YaHei" pitchFamily="34" charset="0"/>
-                <a:ea typeface="Microsoft YaHei" pitchFamily="34" charset="-122"/>
-                <a:cs typeface="Microsoft YaHei" pitchFamily="34" charset="-120"/>
-              </a:rPr>
-              <a:t>竞品动态显示行业垂直整</a:t>
-            </a:r>
-            <a:endParaRPr lang="en-US" sz="670" dirty="0"/>
-          </a:p>
-        </p:txBody>
-      </p:sp>
-      <p:sp>
-        <p:nvSpPr>
-          <p:cNvPr id="41" name="Text 39"/>
-          <p:cNvSpPr/>
-          <p:nvPr/>
-        </p:nvSpPr>
-        <p:spPr>
-          <a:xfrm>
-            <a:off x="7726680" y="4315968"/>
-            <a:ext cx="2697480" cy="384048"/>
-          </a:xfrm>
-          <a:prstGeom prst="rect">
-            <a:avLst/>
-          </a:prstGeom>
-          <a:noFill/>
-          <a:ln/>
-        </p:spPr>
-        <p:txBody>
-          <a:bodyPr wrap="square" lIns="0" tIns="0" rIns="0" bIns="0" rtlCol="0" anchor="t">
-            <a:normAutofit/>
-          </a:bodyPr>
-          <a:lstStyle/>
-          <a:p>
             <a:pPr indent="0" marL="0">
               <a:buNone/>
             </a:pPr>
@@ -18136,7 +17533,7 @@
                 <a:ea typeface="Microsoft YaHei" pitchFamily="34" charset="-122"/>
                 <a:cs typeface="Microsoft YaHei" pitchFamily="34" charset="-120"/>
               </a:rPr>
-              <a:t>参考培训 PPT 的阶段路线表达，按事件顺序拆成判断路径。</a:t>
+              <a:t>检测到对比/分类信号，用矩阵压缩呈现，不新增外部判断。</a:t>
             </a:r>
             <a:endParaRPr lang="en-US" sz="760" dirty="0"/>
           </a:p>
@@ -18144,7 +17541,7 @@
       </p:sp>
       <p:sp>
         <p:nvSpPr>
-          <p:cNvPr id="42" name="Shape 40"/>
+          <p:cNvPr id="40" name="Shape 38"/>
           <p:cNvSpPr/>
           <p:nvPr/>
         </p:nvSpPr>
@@ -18169,7 +17566,7 @@
       </p:sp>
       <p:sp>
         <p:nvSpPr>
-          <p:cNvPr id="43" name="Text 41"/>
+          <p:cNvPr id="41" name="Text 39"/>
           <p:cNvSpPr/>
           <p:nvPr/>
         </p:nvSpPr>
@@ -18208,7 +17605,7 @@
       </p:sp>
       <p:sp>
         <p:nvSpPr>
-          <p:cNvPr id="44" name="Text 42"/>
+          <p:cNvPr id="42" name="Text 40"/>
           <p:cNvSpPr/>
           <p:nvPr/>
         </p:nvSpPr>
@@ -18241,7 +17638,7 @@
                 <a:ea typeface="Microsoft YaHei" pitchFamily="34" charset="-122"/>
                 <a:cs typeface="Microsoft YaHei" pitchFamily="34" charset="-120"/>
               </a:rPr>
-              <a:t>若吉利电芯大规模外供，则第三方磷酸铁锂企业客户结构可能恶化</a:t>
+              <a:t>若钠离子电池在储能场景实现规模化应用且成本低于磷酸铁锂，则可能对磷酸铁锂在低端储能市场的份额形成挤压，跟踪指标为钠离子电池储能项目招标规模和度电成本对比</a:t>
             </a:r>
             <a:endParaRPr lang="en-US" sz="1020" dirty="0"/>
           </a:p>
@@ -18390,7 +17787,7 @@
                 <a:ea typeface="Aptos" pitchFamily="34" charset="-122"/>
                 <a:cs typeface="Aptos" pitchFamily="34" charset="-120"/>
               </a:rPr>
-              <a:t>2026-10-12</a:t>
+              <a:t>2026-10-19</a:t>
             </a:r>
             <a:endParaRPr lang="en-US" sz="800" dirty="0"/>
           </a:p>
@@ -18596,7 +17993,7 @@
                 <a:ea typeface="Microsoft YaHei" pitchFamily="34" charset="-122"/>
                 <a:cs typeface="Microsoft YaHei" pitchFamily="34" charset="-120"/>
               </a:rPr>
-              <a:t>4 条公开来源交叉验证｜事实、影响与后续研判</a:t>
+              <a:t>3 条公开来源交叉验证｜事实、影响与后续研判</a:t>
             </a:r>
             <a:endParaRPr lang="en-US" sz="860" dirty="0"/>
           </a:p>
@@ -18705,7 +18102,7 @@
                 <a:ea typeface="Microsoft YaHei" pitchFamily="34" charset="-122"/>
                 <a:cs typeface="Microsoft YaHei" pitchFamily="34" charset="-120"/>
               </a:rPr>
-              <a:t>风险：碳酸锂价格暴跌致盈利压力，欧盟自限出口政策压制需求；机会：湖南裕能扩产和龙蟠科技长协显示龙头扩张，国内新质生产力政策支持；观察：华盛锂电资本运作、电池板块股价波动。 [3][4][1][6]</a:t>
+              <a:t>机会方面，宝马第六代电池量产和储能产能激增可能支撑磷酸铁锂需求；风险方面，储能产能快速扩张可能加剧价格竞争，钠离子电池和固态电池长期替代威胁需跟踪；观察电摩国标执行对小动力电池行业集中度的影响。 [1][2][3]</a:t>
             </a:r>
             <a:endParaRPr lang="en-US" sz="960" dirty="0"/>
           </a:p>
@@ -18746,7 +18143,7 @@
                 <a:ea typeface="Aptos" pitchFamily="34" charset="-122"/>
                 <a:cs typeface="Aptos" pitchFamily="34" charset="-120"/>
               </a:rPr>
-              <a:t>依据：[3][4][1][6]</a:t>
+              <a:t>依据：[1][2][3]</a:t>
             </a:r>
             <a:endParaRPr lang="en-US" sz="740" dirty="0"/>
           </a:p>
@@ -18855,7 +18252,7 @@
                 <a:ea typeface="Microsoft YaHei" pitchFamily="34" charset="-122"/>
                 <a:cs typeface="Microsoft YaHei" pitchFamily="34" charset="-120"/>
               </a:rPr>
-              <a:t>价格下行与政策风险是主要压制因素，但龙头扩产和长协锁定表明行业仍具成长性；华盛锂电法律意见书可能预示资本动作，电池板块跌幅居前反映市场情绪。需验证：碳酸锂价格拐点、政策落地节奏、企业资本运作意图。</a:t>
+              <a:t>综合今日信息，需求端有宝马量产和储能扩张支撑，但供给端储能产能激增可能带来价格压力，技术路线端钠离子电池和固态电池构成长期竞争。电摩国标从合规端加速小动力电池行业出清。需持续跟踪宝马电池技术路线确认、储能电池开工率和价格走势、钠离子电池储能项目经济性、固态电池量产进展以及电摩国标执行效果。</a:t>
             </a:r>
             <a:endParaRPr lang="en-US" sz="960" dirty="0"/>
           </a:p>
@@ -18989,7 +18386,7 @@
                 <a:ea typeface="Microsoft YaHei" pitchFamily="34" charset="-122"/>
                 <a:cs typeface="Microsoft YaHei" pitchFamily="34" charset="-120"/>
               </a:rPr>
-              <a:t>若碳酸锂价格企稳，则磷酸铁锂盈利可能修复；若欧盟政策放松，则出口需求可能回升。跟踪指标：碳酸锂期货价、欧盟政策动向、华盛锂电公告。</a:t>
+              <a:t>若宝马第六代电池放量且储能电池开工率维持高位，则磷酸铁锂需求端可能获得双重支撑，跟踪指标为宝马新车型电池供应商公告和储能电池月度产量；若储能电池价格竞争加剧且钠离子电池储能项目规模化落地，则磷酸铁锂盈利压力可能上升，跟踪指标为储能电池均价和钠离子电池招标规模；若电摩国标执行严格，则小动力电池行业集中度可能提升，跟踪指标为合规企业认证进度。证据边界限于公开报道，未覆盖企业实际订单和成本数据。</a:t>
             </a:r>
             <a:endParaRPr lang="en-US" sz="960" dirty="0"/>
           </a:p>
@@ -19057,7 +18454,7 @@
                 <a:ea typeface="Microsoft YaHei" pitchFamily="34" charset="-122"/>
                 <a:cs typeface="Microsoft YaHei" pitchFamily="34" charset="-120"/>
               </a:rPr>
-              <a:t>路线图</a:t>
+              <a:t>对比矩阵</a:t>
             </a:r>
             <a:endParaRPr lang="en-US" sz="1200" dirty="0"/>
           </a:p>
@@ -19071,18 +18468,89 @@
         </p:nvSpPr>
         <p:spPr>
           <a:xfrm>
-            <a:off x="7754112" y="2249424"/>
-            <a:ext cx="612648" cy="402336"/>
-          </a:xfrm>
-          <a:prstGeom prst="chevron">
+            <a:off x="7818120" y="2176272"/>
+            <a:ext cx="2487168" cy="1609344"/>
+          </a:xfrm>
+          <a:prstGeom prst="rect">
+            <a:avLst/>
+          </a:prstGeom>
+          <a:solidFill>
+            <a:srgbClr val="FFFFFF"/>
+          </a:solidFill>
+          <a:ln w="10160">
+            <a:solidFill>
+              <a:srgbClr val="DADADA"/>
+            </a:solidFill>
+            <a:prstDash val="solid"/>
+          </a:ln>
+        </p:spPr>
+      </p:sp>
+      <p:sp>
+        <p:nvSpPr>
+          <p:cNvPr id="25" name="Shape 23"/>
+          <p:cNvSpPr/>
+          <p:nvPr/>
+        </p:nvSpPr>
+        <p:spPr>
+          <a:xfrm>
+            <a:off x="9061704" y="2176272"/>
+            <a:ext cx="0" cy="1609344"/>
+          </a:xfrm>
+          <a:prstGeom prst="line">
+            <a:avLst/>
+          </a:prstGeom>
+          <a:noFill/>
+          <a:ln w="8890">
+            <a:solidFill>
+              <a:srgbClr val="DADADA"/>
+            </a:solidFill>
+            <a:prstDash val="solid"/>
+          </a:ln>
+        </p:spPr>
+      </p:sp>
+      <p:sp>
+        <p:nvSpPr>
+          <p:cNvPr id="26" name="Shape 24"/>
+          <p:cNvSpPr/>
+          <p:nvPr/>
+        </p:nvSpPr>
+        <p:spPr>
+          <a:xfrm>
+            <a:off x="7818120" y="2980944"/>
+            <a:ext cx="2487168" cy="0"/>
+          </a:xfrm>
+          <a:prstGeom prst="line">
+            <a:avLst/>
+          </a:prstGeom>
+          <a:noFill/>
+          <a:ln w="8890">
+            <a:solidFill>
+              <a:srgbClr val="DADADA"/>
+            </a:solidFill>
+            <a:prstDash val="solid"/>
+          </a:ln>
+        </p:spPr>
+      </p:sp>
+      <p:sp>
+        <p:nvSpPr>
+          <p:cNvPr id="27" name="Shape 25"/>
+          <p:cNvSpPr/>
+          <p:nvPr/>
+        </p:nvSpPr>
+        <p:spPr>
+          <a:xfrm>
+            <a:off x="7818120" y="2176272"/>
+            <a:ext cx="1243584" cy="804672"/>
+          </a:xfrm>
+          <a:prstGeom prst="rect">
             <a:avLst/>
           </a:prstGeom>
           <a:solidFill>
             <a:srgbClr val="DDEBE0"/>
           </a:solidFill>
-          <a:ln w="13970">
+          <a:ln w="3810">
             <a:solidFill>
-              <a:srgbClr val="487052"/>
+              <a:srgbClr val="DADADA"/>
             </a:solidFill>
             <a:prstDash val="solid"/>
           </a:ln>
@@ -19090,14 +18558,14 @@
       </p:sp>
       <p:sp>
         <p:nvSpPr>
-          <p:cNvPr id="25" name="Text 23"/>
-          <p:cNvSpPr/>
-          <p:nvPr/>
-        </p:nvSpPr>
-        <p:spPr>
-          <a:xfrm>
-            <a:off x="7827264" y="2386584"/>
-            <a:ext cx="448056" cy="109728"/>
+          <p:cNvPr id="28" name="Text 26"/>
+          <p:cNvSpPr/>
+          <p:nvPr/>
+        </p:nvSpPr>
+        <p:spPr>
+          <a:xfrm>
+            <a:off x="7891272" y="2286000"/>
+            <a:ext cx="438912" cy="109728"/>
           </a:xfrm>
           <a:prstGeom prst="rect">
             <a:avLst/>
@@ -19111,11 +18579,52 @@
           </a:bodyPr>
           <a:lstStyle/>
           <a:p>
-            <a:pPr algn="ctr" indent="0" marL="0">
-              <a:buNone/>
-            </a:pPr>
-            <a:r>
-              <a:rPr lang="en-US" sz="670" b="1" dirty="0">
+            <a:pPr indent="0" marL="0">
+              <a:buNone/>
+            </a:pPr>
+            <a:r>
+              <a:rPr lang="en-US" sz="710" b="1" dirty="0">
+                <a:solidFill>
+                  <a:srgbClr val="487052"/>
+                </a:solidFill>
+                <a:latin typeface="Microsoft YaHei" pitchFamily="34" charset="0"/>
+                <a:ea typeface="Microsoft YaHei" pitchFamily="34" charset="-122"/>
+                <a:cs typeface="Microsoft YaHei" pitchFamily="34" charset="-120"/>
+              </a:rPr>
+              <a:t>路线A</a:t>
+            </a:r>
+            <a:endParaRPr lang="en-US" sz="710" dirty="0"/>
+          </a:p>
+        </p:txBody>
+      </p:sp>
+      <p:sp>
+        <p:nvSpPr>
+          <p:cNvPr id="29" name="Text 27"/>
+          <p:cNvSpPr/>
+          <p:nvPr/>
+        </p:nvSpPr>
+        <p:spPr>
+          <a:xfrm>
+            <a:off x="7891272" y="2505456"/>
+            <a:ext cx="1024128" cy="201168"/>
+          </a:xfrm>
+          <a:prstGeom prst="rect">
+            <a:avLst/>
+          </a:prstGeom>
+          <a:noFill/>
+          <a:ln/>
+        </p:spPr>
+        <p:txBody>
+          <a:bodyPr wrap="square" lIns="0" tIns="0" rIns="0" bIns="0" rtlCol="0" anchor="t">
+            <a:normAutofit/>
+          </a:bodyPr>
+          <a:lstStyle/>
+          <a:p>
+            <a:pPr indent="0" marL="0">
+              <a:buNone/>
+            </a:pPr>
+            <a:r>
+              <a:rPr lang="en-US" sz="670" dirty="0">
                 <a:solidFill>
                   <a:srgbClr val="121212"/>
                 </a:solidFill>
@@ -19123,7 +18632,7 @@
                 <a:ea typeface="Microsoft YaHei" pitchFamily="34" charset="-122"/>
                 <a:cs typeface="Microsoft YaHei" pitchFamily="34" charset="-120"/>
               </a:rPr>
-              <a:t>技术</a:t>
+              <a:t>机会方面，宝马第六代电池量</a:t>
             </a:r>
             <a:endParaRPr lang="en-US" sz="670" dirty="0"/>
           </a:p>
@@ -19131,24 +18640,24 @@
       </p:sp>
       <p:sp>
         <p:nvSpPr>
-          <p:cNvPr id="26" name="Shape 24"/>
-          <p:cNvSpPr/>
-          <p:nvPr/>
-        </p:nvSpPr>
-        <p:spPr>
-          <a:xfrm>
-            <a:off x="8375904" y="2249424"/>
-            <a:ext cx="612648" cy="402336"/>
-          </a:xfrm>
-          <a:prstGeom prst="chevron">
+          <p:cNvPr id="30" name="Shape 28"/>
+          <p:cNvSpPr/>
+          <p:nvPr/>
+        </p:nvSpPr>
+        <p:spPr>
+          <a:xfrm>
+            <a:off x="9061704" y="2176272"/>
+            <a:ext cx="1243584" cy="804672"/>
+          </a:xfrm>
+          <a:prstGeom prst="rect">
             <a:avLst/>
           </a:prstGeom>
           <a:solidFill>
             <a:srgbClr val="FFFFFF"/>
           </a:solidFill>
-          <a:ln w="13970">
+          <a:ln w="3810">
             <a:solidFill>
-              <a:srgbClr val="487052"/>
+              <a:srgbClr val="DADADA"/>
             </a:solidFill>
             <a:prstDash val="solid"/>
           </a:ln>
@@ -19156,14 +18665,14 @@
       </p:sp>
       <p:sp>
         <p:nvSpPr>
-          <p:cNvPr id="27" name="Text 25"/>
-          <p:cNvSpPr/>
-          <p:nvPr/>
-        </p:nvSpPr>
-        <p:spPr>
-          <a:xfrm>
-            <a:off x="8449056" y="2386584"/>
-            <a:ext cx="448056" cy="109728"/>
+          <p:cNvPr id="31" name="Text 29"/>
+          <p:cNvSpPr/>
+          <p:nvPr/>
+        </p:nvSpPr>
+        <p:spPr>
+          <a:xfrm>
+            <a:off x="9134856" y="2286000"/>
+            <a:ext cx="438912" cy="109728"/>
           </a:xfrm>
           <a:prstGeom prst="rect">
             <a:avLst/>
@@ -19177,11 +18686,52 @@
           </a:bodyPr>
           <a:lstStyle/>
           <a:p>
-            <a:pPr algn="ctr" indent="0" marL="0">
-              <a:buNone/>
-            </a:pPr>
-            <a:r>
-              <a:rPr lang="en-US" sz="670" b="1" dirty="0">
+            <a:pPr indent="0" marL="0">
+              <a:buNone/>
+            </a:pPr>
+            <a:r>
+              <a:rPr lang="en-US" sz="710" b="1" dirty="0">
+                <a:solidFill>
+                  <a:srgbClr val="487052"/>
+                </a:solidFill>
+                <a:latin typeface="Microsoft YaHei" pitchFamily="34" charset="0"/>
+                <a:ea typeface="Microsoft YaHei" pitchFamily="34" charset="-122"/>
+                <a:cs typeface="Microsoft YaHei" pitchFamily="34" charset="-120"/>
+              </a:rPr>
+              <a:t>路线B</a:t>
+            </a:r>
+            <a:endParaRPr lang="en-US" sz="710" dirty="0"/>
+          </a:p>
+        </p:txBody>
+      </p:sp>
+      <p:sp>
+        <p:nvSpPr>
+          <p:cNvPr id="32" name="Text 30"/>
+          <p:cNvSpPr/>
+          <p:nvPr/>
+        </p:nvSpPr>
+        <p:spPr>
+          <a:xfrm>
+            <a:off x="9134856" y="2505456"/>
+            <a:ext cx="1024128" cy="201168"/>
+          </a:xfrm>
+          <a:prstGeom prst="rect">
+            <a:avLst/>
+          </a:prstGeom>
+          <a:noFill/>
+          <a:ln/>
+        </p:spPr>
+        <p:txBody>
+          <a:bodyPr wrap="square" lIns="0" tIns="0" rIns="0" bIns="0" rtlCol="0" anchor="t">
+            <a:normAutofit/>
+          </a:bodyPr>
+          <a:lstStyle/>
+          <a:p>
+            <a:pPr indent="0" marL="0">
+              <a:buNone/>
+            </a:pPr>
+            <a:r>
+              <a:rPr lang="en-US" sz="670" dirty="0">
                 <a:solidFill>
                   <a:srgbClr val="121212"/>
                 </a:solidFill>
@@ -19189,7 +18739,7 @@
                 <a:ea typeface="Microsoft YaHei" pitchFamily="34" charset="-122"/>
                 <a:cs typeface="Microsoft YaHei" pitchFamily="34" charset="-120"/>
               </a:rPr>
-              <a:t>产品</a:t>
+              <a:t>风险方面，储能产能快速扩张</a:t>
             </a:r>
             <a:endParaRPr lang="en-US" sz="670" dirty="0"/>
           </a:p>
@@ -19197,24 +18747,24 @@
       </p:sp>
       <p:sp>
         <p:nvSpPr>
-          <p:cNvPr id="28" name="Shape 26"/>
-          <p:cNvSpPr/>
-          <p:nvPr/>
-        </p:nvSpPr>
-        <p:spPr>
-          <a:xfrm>
-            <a:off x="8997696" y="2249424"/>
-            <a:ext cx="612648" cy="402336"/>
-          </a:xfrm>
-          <a:prstGeom prst="chevron">
+          <p:cNvPr id="33" name="Shape 31"/>
+          <p:cNvSpPr/>
+          <p:nvPr/>
+        </p:nvSpPr>
+        <p:spPr>
+          <a:xfrm>
+            <a:off x="7818120" y="2980944"/>
+            <a:ext cx="1243584" cy="804672"/>
+          </a:xfrm>
+          <a:prstGeom prst="rect">
             <a:avLst/>
           </a:prstGeom>
           <a:solidFill>
             <a:srgbClr val="FFFFFF"/>
           </a:solidFill>
-          <a:ln w="13970">
+          <a:ln w="3810">
             <a:solidFill>
-              <a:srgbClr val="487052"/>
+              <a:srgbClr val="DADADA"/>
             </a:solidFill>
             <a:prstDash val="solid"/>
           </a:ln>
@@ -19222,14 +18772,14 @@
       </p:sp>
       <p:sp>
         <p:nvSpPr>
-          <p:cNvPr id="29" name="Text 27"/>
-          <p:cNvSpPr/>
-          <p:nvPr/>
-        </p:nvSpPr>
-        <p:spPr>
-          <a:xfrm>
-            <a:off x="9070848" y="2386584"/>
-            <a:ext cx="448056" cy="109728"/>
+          <p:cNvPr id="34" name="Text 32"/>
+          <p:cNvSpPr/>
+          <p:nvPr/>
+        </p:nvSpPr>
+        <p:spPr>
+          <a:xfrm>
+            <a:off x="7891272" y="3090672"/>
+            <a:ext cx="438912" cy="109728"/>
           </a:xfrm>
           <a:prstGeom prst="rect">
             <a:avLst/>
@@ -19243,11 +18793,52 @@
           </a:bodyPr>
           <a:lstStyle/>
           <a:p>
-            <a:pPr algn="ctr" indent="0" marL="0">
-              <a:buNone/>
-            </a:pPr>
-            <a:r>
-              <a:rPr lang="en-US" sz="670" b="1" dirty="0">
+            <a:pPr indent="0" marL="0">
+              <a:buNone/>
+            </a:pPr>
+            <a:r>
+              <a:rPr lang="en-US" sz="710" b="1" dirty="0">
+                <a:solidFill>
+                  <a:srgbClr val="487052"/>
+                </a:solidFill>
+                <a:latin typeface="Microsoft YaHei" pitchFamily="34" charset="0"/>
+                <a:ea typeface="Microsoft YaHei" pitchFamily="34" charset="-122"/>
+                <a:cs typeface="Microsoft YaHei" pitchFamily="34" charset="-120"/>
+              </a:rPr>
+              <a:t>机会</a:t>
+            </a:r>
+            <a:endParaRPr lang="en-US" sz="710" dirty="0"/>
+          </a:p>
+        </p:txBody>
+      </p:sp>
+      <p:sp>
+        <p:nvSpPr>
+          <p:cNvPr id="35" name="Text 33"/>
+          <p:cNvSpPr/>
+          <p:nvPr/>
+        </p:nvSpPr>
+        <p:spPr>
+          <a:xfrm>
+            <a:off x="7891272" y="3310128"/>
+            <a:ext cx="1024128" cy="201168"/>
+          </a:xfrm>
+          <a:prstGeom prst="rect">
+            <a:avLst/>
+          </a:prstGeom>
+          <a:noFill/>
+          <a:ln/>
+        </p:spPr>
+        <p:txBody>
+          <a:bodyPr wrap="square" lIns="0" tIns="0" rIns="0" bIns="0" rtlCol="0" anchor="t">
+            <a:normAutofit/>
+          </a:bodyPr>
+          <a:lstStyle/>
+          <a:p>
+            <a:pPr indent="0" marL="0">
+              <a:buNone/>
+            </a:pPr>
+            <a:r>
+              <a:rPr lang="en-US" sz="670" dirty="0">
                 <a:solidFill>
                   <a:srgbClr val="121212"/>
                 </a:solidFill>
@@ -19255,7 +18846,7 @@
                 <a:ea typeface="Microsoft YaHei" pitchFamily="34" charset="-122"/>
                 <a:cs typeface="Microsoft YaHei" pitchFamily="34" charset="-120"/>
               </a:rPr>
-              <a:t>验证</a:t>
+              <a:t>观察电摩国标执行对小动力电</a:t>
             </a:r>
             <a:endParaRPr lang="en-US" sz="670" dirty="0"/>
           </a:p>
@@ -19263,24 +18854,24 @@
       </p:sp>
       <p:sp>
         <p:nvSpPr>
-          <p:cNvPr id="30" name="Shape 28"/>
-          <p:cNvSpPr/>
-          <p:nvPr/>
-        </p:nvSpPr>
-        <p:spPr>
-          <a:xfrm>
-            <a:off x="9619488" y="2249424"/>
-            <a:ext cx="612648" cy="402336"/>
-          </a:xfrm>
-          <a:prstGeom prst="chevron">
+          <p:cNvPr id="36" name="Shape 34"/>
+          <p:cNvSpPr/>
+          <p:nvPr/>
+        </p:nvSpPr>
+        <p:spPr>
+          <a:xfrm>
+            <a:off x="9061704" y="2980944"/>
+            <a:ext cx="1243584" cy="804672"/>
+          </a:xfrm>
+          <a:prstGeom prst="rect">
             <a:avLst/>
           </a:prstGeom>
           <a:solidFill>
-            <a:srgbClr val="FFFFFF"/>
+            <a:srgbClr val="F4FAF6"/>
           </a:solidFill>
-          <a:ln w="13970">
+          <a:ln w="3810">
             <a:solidFill>
-              <a:srgbClr val="487052"/>
+              <a:srgbClr val="DADADA"/>
             </a:solidFill>
             <a:prstDash val="solid"/>
           </a:ln>
@@ -19288,14 +18879,14 @@
       </p:sp>
       <p:sp>
         <p:nvSpPr>
-          <p:cNvPr id="31" name="Text 29"/>
-          <p:cNvSpPr/>
-          <p:nvPr/>
-        </p:nvSpPr>
-        <p:spPr>
-          <a:xfrm>
-            <a:off x="9692640" y="2386584"/>
-            <a:ext cx="448056" cy="109728"/>
+          <p:cNvPr id="37" name="Text 35"/>
+          <p:cNvSpPr/>
+          <p:nvPr/>
+        </p:nvSpPr>
+        <p:spPr>
+          <a:xfrm>
+            <a:off x="9134856" y="3090672"/>
+            <a:ext cx="438912" cy="109728"/>
           </a:xfrm>
           <a:prstGeom prst="rect">
             <a:avLst/>
@@ -19309,11 +18900,52 @@
           </a:bodyPr>
           <a:lstStyle/>
           <a:p>
-            <a:pPr algn="ctr" indent="0" marL="0">
-              <a:buNone/>
-            </a:pPr>
-            <a:r>
-              <a:rPr lang="en-US" sz="670" b="1" dirty="0">
+            <a:pPr indent="0" marL="0">
+              <a:buNone/>
+            </a:pPr>
+            <a:r>
+              <a:rPr lang="en-US" sz="710" b="1" dirty="0">
+                <a:solidFill>
+                  <a:srgbClr val="487052"/>
+                </a:solidFill>
+                <a:latin typeface="Microsoft YaHei" pitchFamily="34" charset="0"/>
+                <a:ea typeface="Microsoft YaHei" pitchFamily="34" charset="-122"/>
+                <a:cs typeface="Microsoft YaHei" pitchFamily="34" charset="-120"/>
+              </a:rPr>
+              <a:t>约束</a:t>
+            </a:r>
+            <a:endParaRPr lang="en-US" sz="710" dirty="0"/>
+          </a:p>
+        </p:txBody>
+      </p:sp>
+      <p:sp>
+        <p:nvSpPr>
+          <p:cNvPr id="38" name="Text 36"/>
+          <p:cNvSpPr/>
+          <p:nvPr/>
+        </p:nvSpPr>
+        <p:spPr>
+          <a:xfrm>
+            <a:off x="9134856" y="3310128"/>
+            <a:ext cx="1024128" cy="201168"/>
+          </a:xfrm>
+          <a:prstGeom prst="rect">
+            <a:avLst/>
+          </a:prstGeom>
+          <a:noFill/>
+          <a:ln/>
+        </p:spPr>
+        <p:txBody>
+          <a:bodyPr wrap="square" lIns="0" tIns="0" rIns="0" bIns="0" rtlCol="0" anchor="t">
+            <a:normAutofit/>
+          </a:bodyPr>
+          <a:lstStyle/>
+          <a:p>
+            <a:pPr indent="0" marL="0">
+              <a:buNone/>
+            </a:pPr>
+            <a:r>
+              <a:rPr lang="en-US" sz="670" dirty="0">
                 <a:solidFill>
                   <a:srgbClr val="121212"/>
                 </a:solidFill>
@@ -19321,7 +18953,7 @@
                 <a:ea typeface="Microsoft YaHei" pitchFamily="34" charset="-122"/>
                 <a:cs typeface="Microsoft YaHei" pitchFamily="34" charset="-120"/>
               </a:rPr>
-              <a:t>量产</a:t>
+              <a:t>机会方面，宝马第六代电池量</a:t>
             </a:r>
             <a:endParaRPr lang="en-US" sz="670" dirty="0"/>
           </a:p>
@@ -19329,62 +18961,14 @@
       </p:sp>
       <p:sp>
         <p:nvSpPr>
-          <p:cNvPr id="32" name="Shape 30"/>
-          <p:cNvSpPr/>
-          <p:nvPr/>
-        </p:nvSpPr>
-        <p:spPr>
-          <a:xfrm>
-            <a:off x="7882128" y="3063240"/>
-            <a:ext cx="2331720" cy="0"/>
-          </a:xfrm>
-          <a:prstGeom prst="line">
-            <a:avLst/>
-          </a:prstGeom>
-          <a:noFill/>
-          <a:ln w="13970">
-            <a:solidFill>
-              <a:srgbClr val="7F9D84"/>
-            </a:solidFill>
-            <a:prstDash val="solid"/>
-          </a:ln>
-        </p:spPr>
-      </p:sp>
-      <p:sp>
-        <p:nvSpPr>
-          <p:cNvPr id="33" name="Shape 31"/>
-          <p:cNvSpPr/>
-          <p:nvPr/>
-        </p:nvSpPr>
-        <p:spPr>
-          <a:xfrm>
-            <a:off x="7845552" y="2962656"/>
-            <a:ext cx="164592" cy="164592"/>
-          </a:xfrm>
-          <a:prstGeom prst="ellipse">
-            <a:avLst/>
-          </a:prstGeom>
-          <a:solidFill>
-            <a:srgbClr val="487052"/>
-          </a:solidFill>
-          <a:ln w="12700">
-            <a:solidFill>
-              <a:srgbClr val="FFFFFF"/>
-            </a:solidFill>
-            <a:prstDash val="solid"/>
-          </a:ln>
-        </p:spPr>
-      </p:sp>
-      <p:sp>
-        <p:nvSpPr>
-          <p:cNvPr id="34" name="Text 32"/>
-          <p:cNvSpPr/>
-          <p:nvPr/>
-        </p:nvSpPr>
-        <p:spPr>
-          <a:xfrm>
-            <a:off x="7754112" y="3291840"/>
-            <a:ext cx="603504" cy="310896"/>
+          <p:cNvPr id="39" name="Text 37"/>
+          <p:cNvSpPr/>
+          <p:nvPr/>
+        </p:nvSpPr>
+        <p:spPr>
+          <a:xfrm>
+            <a:off x="7726680" y="4187952"/>
+            <a:ext cx="2697480" cy="493776"/>
           </a:xfrm>
           <a:prstGeom prst="rect">
             <a:avLst/>
@@ -19398,245 +18982,6 @@
           </a:bodyPr>
           <a:lstStyle/>
           <a:p>
-            <a:pPr algn="ctr" indent="0" marL="0">
-              <a:buNone/>
-            </a:pPr>
-            <a:r>
-              <a:rPr lang="en-US" sz="670" dirty="0">
-                <a:solidFill>
-                  <a:srgbClr val="121212"/>
-                </a:solidFill>
-                <a:latin typeface="Microsoft YaHei" pitchFamily="34" charset="0"/>
-                <a:ea typeface="Microsoft YaHei" pitchFamily="34" charset="-122"/>
-                <a:cs typeface="Microsoft YaHei" pitchFamily="34" charset="-120"/>
-              </a:rPr>
-              <a:t>风险：碳酸锂价格暴跌致</a:t>
-            </a:r>
-            <a:endParaRPr lang="en-US" sz="670" dirty="0"/>
-          </a:p>
-        </p:txBody>
-      </p:sp>
-      <p:sp>
-        <p:nvSpPr>
-          <p:cNvPr id="35" name="Shape 33"/>
-          <p:cNvSpPr/>
-          <p:nvPr/>
-        </p:nvSpPr>
-        <p:spPr>
-          <a:xfrm>
-            <a:off x="8503920" y="2962656"/>
-            <a:ext cx="164592" cy="164592"/>
-          </a:xfrm>
-          <a:prstGeom prst="ellipse">
-            <a:avLst/>
-          </a:prstGeom>
-          <a:solidFill>
-            <a:srgbClr val="487052"/>
-          </a:solidFill>
-          <a:ln w="12700">
-            <a:solidFill>
-              <a:srgbClr val="FFFFFF"/>
-            </a:solidFill>
-            <a:prstDash val="solid"/>
-          </a:ln>
-        </p:spPr>
-      </p:sp>
-      <p:sp>
-        <p:nvSpPr>
-          <p:cNvPr id="36" name="Text 34"/>
-          <p:cNvSpPr/>
-          <p:nvPr/>
-        </p:nvSpPr>
-        <p:spPr>
-          <a:xfrm>
-            <a:off x="8412480" y="3291840"/>
-            <a:ext cx="603504" cy="310896"/>
-          </a:xfrm>
-          <a:prstGeom prst="rect">
-            <a:avLst/>
-          </a:prstGeom>
-          <a:noFill/>
-          <a:ln/>
-        </p:spPr>
-        <p:txBody>
-          <a:bodyPr wrap="square" lIns="0" tIns="0" rIns="0" bIns="0" rtlCol="0" anchor="t">
-            <a:normAutofit/>
-          </a:bodyPr>
-          <a:lstStyle/>
-          <a:p>
-            <a:pPr algn="ctr" indent="0" marL="0">
-              <a:buNone/>
-            </a:pPr>
-            <a:r>
-              <a:rPr lang="en-US" sz="670" dirty="0">
-                <a:solidFill>
-                  <a:srgbClr val="121212"/>
-                </a:solidFill>
-                <a:latin typeface="Microsoft YaHei" pitchFamily="34" charset="0"/>
-                <a:ea typeface="Microsoft YaHei" pitchFamily="34" charset="-122"/>
-                <a:cs typeface="Microsoft YaHei" pitchFamily="34" charset="-120"/>
-              </a:rPr>
-              <a:t>机会：湖南裕能扩产和龙</a:t>
-            </a:r>
-            <a:endParaRPr lang="en-US" sz="670" dirty="0"/>
-          </a:p>
-        </p:txBody>
-      </p:sp>
-      <p:sp>
-        <p:nvSpPr>
-          <p:cNvPr id="37" name="Shape 35"/>
-          <p:cNvSpPr/>
-          <p:nvPr/>
-        </p:nvSpPr>
-        <p:spPr>
-          <a:xfrm>
-            <a:off x="9162288" y="2962656"/>
-            <a:ext cx="164592" cy="164592"/>
-          </a:xfrm>
-          <a:prstGeom prst="ellipse">
-            <a:avLst/>
-          </a:prstGeom>
-          <a:solidFill>
-            <a:srgbClr val="487052"/>
-          </a:solidFill>
-          <a:ln w="12700">
-            <a:solidFill>
-              <a:srgbClr val="FFFFFF"/>
-            </a:solidFill>
-            <a:prstDash val="solid"/>
-          </a:ln>
-        </p:spPr>
-      </p:sp>
-      <p:sp>
-        <p:nvSpPr>
-          <p:cNvPr id="38" name="Text 36"/>
-          <p:cNvSpPr/>
-          <p:nvPr/>
-        </p:nvSpPr>
-        <p:spPr>
-          <a:xfrm>
-            <a:off x="9070848" y="3291840"/>
-            <a:ext cx="603504" cy="310896"/>
-          </a:xfrm>
-          <a:prstGeom prst="rect">
-            <a:avLst/>
-          </a:prstGeom>
-          <a:noFill/>
-          <a:ln/>
-        </p:spPr>
-        <p:txBody>
-          <a:bodyPr wrap="square" lIns="0" tIns="0" rIns="0" bIns="0" rtlCol="0" anchor="t">
-            <a:normAutofit/>
-          </a:bodyPr>
-          <a:lstStyle/>
-          <a:p>
-            <a:pPr algn="ctr" indent="0" marL="0">
-              <a:buNone/>
-            </a:pPr>
-            <a:r>
-              <a:rPr lang="en-US" sz="670" dirty="0">
-                <a:solidFill>
-                  <a:srgbClr val="121212"/>
-                </a:solidFill>
-                <a:latin typeface="Microsoft YaHei" pitchFamily="34" charset="0"/>
-                <a:ea typeface="Microsoft YaHei" pitchFamily="34" charset="-122"/>
-                <a:cs typeface="Microsoft YaHei" pitchFamily="34" charset="-120"/>
-              </a:rPr>
-              <a:t>观察：华盛锂电资本运作</a:t>
-            </a:r>
-            <a:endParaRPr lang="en-US" sz="670" dirty="0"/>
-          </a:p>
-        </p:txBody>
-      </p:sp>
-      <p:sp>
-        <p:nvSpPr>
-          <p:cNvPr id="39" name="Shape 37"/>
-          <p:cNvSpPr/>
-          <p:nvPr/>
-        </p:nvSpPr>
-        <p:spPr>
-          <a:xfrm>
-            <a:off x="9820656" y="2962656"/>
-            <a:ext cx="164592" cy="164592"/>
-          </a:xfrm>
-          <a:prstGeom prst="ellipse">
-            <a:avLst/>
-          </a:prstGeom>
-          <a:solidFill>
-            <a:srgbClr val="B85A4A"/>
-          </a:solidFill>
-          <a:ln w="12700">
-            <a:solidFill>
-              <a:srgbClr val="FFFFFF"/>
-            </a:solidFill>
-            <a:prstDash val="solid"/>
-          </a:ln>
-        </p:spPr>
-      </p:sp>
-      <p:sp>
-        <p:nvSpPr>
-          <p:cNvPr id="40" name="Text 38"/>
-          <p:cNvSpPr/>
-          <p:nvPr/>
-        </p:nvSpPr>
-        <p:spPr>
-          <a:xfrm>
-            <a:off x="9729216" y="3291840"/>
-            <a:ext cx="603504" cy="310896"/>
-          </a:xfrm>
-          <a:prstGeom prst="rect">
-            <a:avLst/>
-          </a:prstGeom>
-          <a:noFill/>
-          <a:ln/>
-        </p:spPr>
-        <p:txBody>
-          <a:bodyPr wrap="square" lIns="0" tIns="0" rIns="0" bIns="0" rtlCol="0" anchor="t">
-            <a:normAutofit/>
-          </a:bodyPr>
-          <a:lstStyle/>
-          <a:p>
-            <a:pPr algn="ctr" indent="0" marL="0">
-              <a:buNone/>
-            </a:pPr>
-            <a:r>
-              <a:rPr lang="en-US" sz="670" dirty="0">
-                <a:solidFill>
-                  <a:srgbClr val="121212"/>
-                </a:solidFill>
-                <a:latin typeface="Microsoft YaHei" pitchFamily="34" charset="0"/>
-                <a:ea typeface="Microsoft YaHei" pitchFamily="34" charset="-122"/>
-                <a:cs typeface="Microsoft YaHei" pitchFamily="34" charset="-120"/>
-              </a:rPr>
-              <a:t>观察：华盛锂电资本运作</a:t>
-            </a:r>
-            <a:endParaRPr lang="en-US" sz="670" dirty="0"/>
-          </a:p>
-        </p:txBody>
-      </p:sp>
-      <p:sp>
-        <p:nvSpPr>
-          <p:cNvPr id="41" name="Text 39"/>
-          <p:cNvSpPr/>
-          <p:nvPr/>
-        </p:nvSpPr>
-        <p:spPr>
-          <a:xfrm>
-            <a:off x="7726680" y="4315968"/>
-            <a:ext cx="2697480" cy="384048"/>
-          </a:xfrm>
-          <a:prstGeom prst="rect">
-            <a:avLst/>
-          </a:prstGeom>
-          <a:noFill/>
-          <a:ln/>
-        </p:spPr>
-        <p:txBody>
-          <a:bodyPr wrap="square" lIns="0" tIns="0" rIns="0" bIns="0" rtlCol="0" anchor="t">
-            <a:normAutofit/>
-          </a:bodyPr>
-          <a:lstStyle/>
-          <a:p>
             <a:pPr indent="0" marL="0">
               <a:buNone/>
             </a:pPr>
@@ -19649,7 +18994,7 @@
                 <a:ea typeface="Microsoft YaHei" pitchFamily="34" charset="-122"/>
                 <a:cs typeface="Microsoft YaHei" pitchFamily="34" charset="-120"/>
               </a:rPr>
-              <a:t>参考培训 PPT 的阶段路线表达，按事件顺序拆成判断路径。</a:t>
+              <a:t>检测到对比/分类信号，用矩阵压缩呈现，不新增外部判断。</a:t>
             </a:r>
             <a:endParaRPr lang="en-US" sz="760" dirty="0"/>
           </a:p>
@@ -19657,7 +19002,7 @@
       </p:sp>
       <p:sp>
         <p:nvSpPr>
-          <p:cNvPr id="42" name="Shape 40"/>
+          <p:cNvPr id="40" name="Shape 38"/>
           <p:cNvSpPr/>
           <p:nvPr/>
         </p:nvSpPr>
@@ -19682,7 +19027,7 @@
       </p:sp>
       <p:sp>
         <p:nvSpPr>
-          <p:cNvPr id="43" name="Text 41"/>
+          <p:cNvPr id="41" name="Text 39"/>
           <p:cNvSpPr/>
           <p:nvPr/>
         </p:nvSpPr>
@@ -19721,7 +19066,7 @@
       </p:sp>
       <p:sp>
         <p:nvSpPr>
-          <p:cNvPr id="44" name="Text 42"/>
+          <p:cNvPr id="42" name="Text 40"/>
           <p:cNvSpPr/>
           <p:nvPr/>
         </p:nvSpPr>
@@ -19754,7 +19099,7 @@
                 <a:ea typeface="Microsoft YaHei" pitchFamily="34" charset="-122"/>
                 <a:cs typeface="Microsoft YaHei" pitchFamily="34" charset="-120"/>
               </a:rPr>
-              <a:t>若碳酸锂价格企稳，则磷酸铁锂盈利可能修复</a:t>
+              <a:t>若宝马第六代电池放量且储能电池开工率维持高位，则磷酸铁锂需求端可能获得双重支撑，跟踪指标为宝马新车型电池供应商公告和储能电池月度产量</a:t>
             </a:r>
             <a:endParaRPr lang="en-US" sz="1020" dirty="0"/>
           </a:p>

--- a/docs/reports/latest.pptx
+++ b/docs/reports/latest.pptx
@@ -1876,7 +1876,7 @@
                 <a:ea typeface="Aptos" pitchFamily="34" charset="-122"/>
                 <a:cs typeface="Aptos" pitchFamily="34" charset="-120"/>
               </a:rPr>
-              <a:t>2026-10-19</a:t>
+              <a:t>2026-10-23</a:t>
             </a:r>
             <a:endParaRPr lang="en-US" sz="800" dirty="0"/>
           </a:p>
@@ -2160,7 +2160,7 @@
                 <a:ea typeface="Microsoft YaHei" pitchFamily="34" charset="-122"/>
                 <a:cs typeface="Microsoft YaHei" pitchFamily="34" charset="-120"/>
               </a:rPr>
-              <a:t>今日磷酸铁锂行业信号集中在技术路线与产能扩张：宝马第六代动力电池量产，强调制造韧性，可能加速高端车型对磷酸铁锂体系的结构性采用；中国储能电池产能激增110%，全球市场同步增长，显示储能端对磷酸铁锂需求形成支撑；电动摩托车锂电池强制性国标发布，明年7月实施，将提高小动力电池安全门槛，利好合规产能。需关注产能扩张与需求增速的匹配度，以及政策对低端产能的挤出效应。</a:t>
+              <a:t>今日磷酸铁锂行业信号集中在高压实产品量产推进与海外项目股权调整。天原第五代高压实完成吨试并宣称具备供货能力，龙蟠科技常州锂源第四代高压实稳定量产，技术迭代加速但需验证实际出货。龙蟠拟出售印尼二期项目76%股权，或反映海外扩产策略收缩。锂矿三季报业绩高增但预期分歧显现，成本端压力与盈利分化并存。政策端电池出海合规与回收体系建设成为新考题。整体看，产品升级与产能布局调整并行，需跟踪高压实订单落地及海外项目股权变动对供给格局的影响。</a:t>
             </a:r>
             <a:endParaRPr lang="en-US" sz="1400" dirty="0"/>
           </a:p>
@@ -2898,7 +2898,7 @@
                 <a:ea typeface="Microsoft YaHei" pitchFamily="34" charset="-122"/>
                 <a:cs typeface="Microsoft YaHei" pitchFamily="34" charset="-120"/>
               </a:rPr>
-              <a:t>今日磷酸铁锂行业信号集中在技术路线与产能扩张：宝马第六代动力电池量产，强调制造韧性，可能加速高端车型对磷酸铁锂体系的结构性采用；中国储能电池产</a:t>
+              <a:t>今日磷酸铁锂行业信号集中在高压实产品量产推进与海外项目股权调整。天原第五代高压实完成吨试并宣称具备供货能力，龙蟠科技常州锂源第四代高压实稳定量</a:t>
             </a:r>
             <a:endParaRPr lang="en-US" sz="1020" dirty="0"/>
           </a:p>
@@ -3047,7 +3047,7 @@
                 <a:ea typeface="Aptos" pitchFamily="34" charset="-122"/>
                 <a:cs typeface="Aptos" pitchFamily="34" charset="-120"/>
               </a:rPr>
-              <a:t>2026-10-19</a:t>
+              <a:t>2026-10-23</a:t>
             </a:r>
             <a:endParaRPr lang="en-US" sz="800" dirty="0"/>
           </a:p>
@@ -3571,7 +3571,7 @@
                 <a:ea typeface="Microsoft YaHei" pitchFamily="34" charset="-122"/>
                 <a:cs typeface="Microsoft YaHei" pitchFamily="34" charset="-120"/>
               </a:rPr>
-              <a:t>中国磷酸铁锂行业官方政策与</a:t>
+              <a:t>磷酸铁锂材料与电芯公众号广</a:t>
             </a:r>
             <a:endParaRPr lang="en-US" sz="680" dirty="0"/>
           </a:p>
@@ -3612,7 +3612,7 @@
                 <a:ea typeface="Microsoft YaHei" pitchFamily="34" charset="-122"/>
                 <a:cs typeface="Microsoft YaHei" pitchFamily="34" charset="-120"/>
               </a:rPr>
-              <a:t>宝马第六代动力电池量产，新世代的底牌藏在制造的韧性里 - 搜狐网</a:t>
+              <a:t>磷酸铁锂主流生产工艺梳理 之二</a:t>
             </a:r>
             <a:endParaRPr lang="en-US" sz="680" dirty="0"/>
           </a:p>
@@ -3653,7 +3653,7 @@
                 <a:ea typeface="Aptos" pitchFamily="34" charset="-122"/>
                 <a:cs typeface="Aptos" pitchFamily="34" charset="-120"/>
               </a:rPr>
-              <a:t>https://www.sohu.com/a/1089530167_126781</a:t>
+              <a:t>https://weixin.sogou.com/link?url=dn9a_-gY295K0Rci_xozVXfdMkSQTLW6cwJThYulHEtVjXrGTiVgS-97vPXyxte7uM5rDmP7WkV_noKynmHQB1qXa8Fplpd90TqV8jv6YjYB4QZF1nOYMaMFBnO-wmCUDTumpn16YKBM7vXuwH1NdEvZ5MitpcfgN82Jx3anVbdBCCzgJHNYq27SKrHaSe9pIQd9G-UwJFBpE4SMUD25ka5Yh8iOOSaBCWALqYtui3ILobZVHXt4LhuASc_q7H2X2nwR-qqXEYp535pjGOOjYg..&amp;type=2&amp;query=%E9%93%81%E9%94%82 %E9%AB%98%E5%8E%8B%E5%AE%9E %E6%AD%A3%E6%9E%81%E6%9D%90%E6%96%99 %E9%87%8F%E4%BA%A7&amp;token=6D774C44AAEA699B8E89D0F66640099E8FE1D4CD6ADAC948</a:t>
             </a:r>
             <a:endParaRPr lang="en-US" sz="580" dirty="0"/>
           </a:p>
@@ -3758,7 +3758,7 @@
                 <a:ea typeface="Microsoft YaHei" pitchFamily="34" charset="-122"/>
                 <a:cs typeface="Microsoft YaHei" pitchFamily="34" charset="-120"/>
               </a:rPr>
-              <a:t>中国磷酸铁锂行业官方政策与</a:t>
+              <a:t>磷酸铁锂材料与电芯公众号广</a:t>
             </a:r>
             <a:endParaRPr lang="en-US" sz="680" dirty="0"/>
           </a:p>
@@ -3799,7 +3799,7 @@
                 <a:ea typeface="Microsoft YaHei" pitchFamily="34" charset="-122"/>
                 <a:cs typeface="Microsoft YaHei" pitchFamily="34" charset="-120"/>
               </a:rPr>
-              <a:t>中国储能电池产能激增110%，全球市场也随之增长 - VOI.ID</a:t>
+              <a:t>“吨试”之后,天原的第五代高压实还差什么?</a:t>
             </a:r>
             <a:endParaRPr lang="en-US" sz="680" dirty="0"/>
           </a:p>
@@ -3840,7 +3840,7 @@
                 <a:ea typeface="Aptos" pitchFamily="34" charset="-122"/>
                 <a:cs typeface="Aptos" pitchFamily="34" charset="-120"/>
               </a:rPr>
-              <a:t>https://news.google.com/rss/articles/CBMiQkFVX3lxTE9QeV8xZG04REVrOV93OERzNGNlNFdmUmtfYkxzSWUtay1zX2UxWXZJQ2R3TFRmQ0c3eFhtcWp5M3hQd9IBQkFVX3lxTE9QeV8xZG04REVrOV93OERzNGNlNFdmUmtfYkxzSWUtay1zX2UxWXZJQ2R3TFRmQ0c3eFhtcWp5M3hQdw?oc=5</a:t>
+              <a:t>https://weixin.sogou.com/link?url=dn9a_-gY295K0Rci_xozVXfdMkSQTLW6cwJThYulHEtVjXrGTiVgS-97vPXyxte7HyTUUmlOQah_noKynmHQB1qXa8Fplpd99PIgwt4dzGMVW95fliAPtTzTF22IHPUM9umWY2Itg7keiYdZaTwjokbsyDvwdOcucX33KrP_1ezj0wEgszWX2DzOIjK1OtzowWcouYWyYnu7dIYf_IdVM5tZkQxXFD4MzUO15KXxYdHqdGoqAELlUTGJ-KASco7nZUyvLvI5Q47RtmyIGw2VAg..&amp;type=2&amp;query=%E9%93%81%E9%94%82 %E9%AB%98%E5%8E%8B%E5%AE%9E %E6%AD%A3%E6%9E%81%E6%9D%90%E6%96%99 %E9%87%8F%E4%BA%A7&amp;token=6D775C000949CB3F2C2D7553C5C76E5C2C96E8DA6ADAC949</a:t>
             </a:r>
             <a:endParaRPr lang="en-US" sz="580" dirty="0"/>
           </a:p>
@@ -3986,7 +3986,7 @@
                 <a:ea typeface="Microsoft YaHei" pitchFamily="34" charset="-122"/>
                 <a:cs typeface="Microsoft YaHei" pitchFamily="34" charset="-120"/>
               </a:rPr>
-              <a:t>明年7月起实施！电动摩托车锂电池强制性国标发布 - 温州新闻</a:t>
+              <a:t>龙蟠科技附属拟出售印尼二期磷酸铁锂正极材料项目76%股权 - 新浪财经</a:t>
             </a:r>
             <a:endParaRPr lang="en-US" sz="680" dirty="0"/>
           </a:p>
@@ -4027,7 +4027,7 @@
                 <a:ea typeface="Aptos" pitchFamily="34" charset="-122"/>
                 <a:cs typeface="Aptos" pitchFamily="34" charset="-120"/>
               </a:rPr>
-              <a:t>https://auto.66wz.com/system/2026/10/19/105856160.shtml</a:t>
+              <a:t>https://finance.sina.com.cn/stock/hkstock/ggscyd/2026-10-23/doc-iniweiyr4927932.shtml?cre=tianyi&amp;mod=pchp&amp;loc=8&amp;r=0&amp;rfunc=88&amp;tj=cxvertical_pc_hp&amp;tr=12</a:t>
             </a:r>
             <a:endParaRPr lang="en-US" sz="580" dirty="0"/>
           </a:p>
@@ -4173,7 +4173,7 @@
                 <a:ea typeface="Microsoft YaHei" pitchFamily="34" charset="-122"/>
                 <a:cs typeface="Microsoft YaHei" pitchFamily="34" charset="-120"/>
               </a:rPr>
-              <a:t>专访中国工程院外籍院士张久俊：还要加大研发力度，使固态电池的优势发挥出</a:t>
+              <a:t>总投资80亿元！清陶动力固态电池项目一期在江苏苏州投产 - https</a:t>
             </a:r>
             <a:endParaRPr lang="en-US" sz="680" dirty="0"/>
           </a:p>
@@ -4214,7 +4214,7 @@
                 <a:ea typeface="Aptos" pitchFamily="34" charset="-122"/>
                 <a:cs typeface="Aptos" pitchFamily="34" charset="-120"/>
               </a:rPr>
-              <a:t>https://www.nbd.com.cn/articles/2026-10-18/4607644.html</a:t>
+              <a:t>https://www.itdcw.com/news/ycnews/102215W542026.html</a:t>
             </a:r>
             <a:endParaRPr lang="en-US" sz="580" dirty="0"/>
           </a:p>
@@ -4360,7 +4360,7 @@
                 <a:ea typeface="Microsoft YaHei" pitchFamily="34" charset="-122"/>
                 <a:cs typeface="Microsoft YaHei" pitchFamily="34" charset="-120"/>
               </a:rPr>
-              <a:t>“任丘样本”给行业上了一课：全国首批锂+钠示范落地河北，大电芯为何看远</a:t>
+              <a:t>锂矿三季报业绩高增背后隐现预期分歧 - 上海证券报电子版</a:t>
             </a:r>
             <a:endParaRPr lang="en-US" sz="680" dirty="0"/>
           </a:p>
@@ -4401,7 +4401,7 @@
                 <a:ea typeface="Aptos" pitchFamily="34" charset="-122"/>
                 <a:cs typeface="Aptos" pitchFamily="34" charset="-120"/>
               </a:rPr>
-              <a:t>https://news.google.com/rss/articles/CBMiiAFBVV95cUxNV202anJVUnowYVNVcUxvaVRqdEJUQ2tCOTEyRnE4ZW1NR3N5MWUxV2JNcFFTRGlxeGg2OUJXYUc4dEhhXzctU1Jaa2Q2eDFyTTRBTS1RZ2RySTFYVUQ2NTczMmcxMEtmSGQwc3J1UDZTM2h4MUc4bEtTVXZ2S2x5cm5kZVZRc2lJ?oc=5</a:t>
+              <a:t>https://paper.cnstock.com/html/2026-10/23/content_2280325.htm</a:t>
             </a:r>
             <a:endParaRPr lang="en-US" sz="580" dirty="0"/>
           </a:p>
@@ -4547,7 +4547,7 @@
                 <a:ea typeface="Microsoft YaHei" pitchFamily="34" charset="-122"/>
                 <a:cs typeface="Microsoft YaHei" pitchFamily="34" charset="-120"/>
               </a:rPr>
-              <a:t>商务部：12项光伏技术列入禁止、限制出口名单 - 国际新能源网</a:t>
+              <a:t>合规、本土化成动力电池出海新考题 海外回收产业体系建设成关键 - 中国</a:t>
             </a:r>
             <a:endParaRPr lang="en-US" sz="680" dirty="0"/>
           </a:p>
@@ -4588,7 +4588,7 @@
                 <a:ea typeface="Aptos" pitchFamily="34" charset="-122"/>
                 <a:cs typeface="Aptos" pitchFamily="34" charset="-120"/>
               </a:rPr>
-              <a:t>https://mnewenergy.in-en.com/html/newenergy-2457963.shtml</a:t>
+              <a:t>https://auto.youth.cn/xw/202610/t20261022_16927958.htm</a:t>
             </a:r>
             <a:endParaRPr lang="en-US" sz="580" dirty="0"/>
           </a:p>
@@ -4693,7 +4693,7 @@
                 <a:ea typeface="Microsoft YaHei" pitchFamily="34" charset="-122"/>
                 <a:cs typeface="Microsoft YaHei" pitchFamily="34" charset="-120"/>
               </a:rPr>
-              <a:t>中国电池网</a:t>
+              <a:t>中国磷酸铁锂行业官方政策与</a:t>
             </a:r>
             <a:endParaRPr lang="en-US" sz="680" dirty="0"/>
           </a:p>
@@ -4734,7 +4734,7 @@
                 <a:ea typeface="Microsoft YaHei" pitchFamily="34" charset="-122"/>
                 <a:cs typeface="Microsoft YaHei" pitchFamily="34" charset="-120"/>
               </a:rPr>
-              <a:t>【正极材料周报】全球第三大动力电池巨头锁单碳酸锂！万华化学再扩磷酸铁锂</a:t>
+              <a:t>城市矿山来了！电池生产、运营、回收巨头齐聚陕西 - https://w</a:t>
             </a:r>
             <a:endParaRPr lang="en-US" sz="680" dirty="0"/>
           </a:p>
@@ -4775,7 +4775,7 @@
                 <a:ea typeface="Aptos" pitchFamily="34" charset="-122"/>
                 <a:cs typeface="Aptos" pitchFamily="34" charset="-120"/>
               </a:rPr>
-              <a:t>https://www.itdcw.com/news/dczk/101215T3H026.html</a:t>
+              <a:t>https://www.itdcw.com/news/qiye/102215WF2026.html</a:t>
             </a:r>
             <a:endParaRPr lang="en-US" sz="580" dirty="0"/>
           </a:p>
@@ -4880,7 +4880,7 @@
                 <a:ea typeface="Microsoft YaHei" pitchFamily="34" charset="-122"/>
                 <a:cs typeface="Microsoft YaHei" pitchFamily="34" charset="-120"/>
               </a:rPr>
-              <a:t>中国电池网</a:t>
+              <a:t>中国磷酸铁锂行业官方政策与</a:t>
             </a:r>
             <a:endParaRPr lang="en-US" sz="680" dirty="0"/>
           </a:p>
@@ -4921,7 +4921,7 @@
                 <a:ea typeface="Microsoft YaHei" pitchFamily="34" charset="-122"/>
                 <a:cs typeface="Microsoft YaHei" pitchFamily="34" charset="-120"/>
               </a:rPr>
-              <a:t>我国研发新型无钴高镍正极材料 显著提升快充效率与循环寿命_电池网</a:t>
+              <a:t>宝马第六代动力电池在沈阳下线 - 搜狐</a:t>
             </a:r>
             <a:endParaRPr lang="en-US" sz="680" dirty="0"/>
           </a:p>
@@ -4962,7 +4962,7 @@
                 <a:ea typeface="Aptos" pitchFamily="34" charset="-122"/>
                 <a:cs typeface="Aptos" pitchFamily="34" charset="-120"/>
               </a:rPr>
-              <a:t>https://www.itdcw.com/news/focus/100415Rb2026.html</a:t>
+              <a:t>https://news.google.com/rss/articles/CBMijAFBVV95cUxNUURqaXpHaXJXTkhMWm1FVTRKck8zX29BakMtekI3bWlOQm53SU5Pbkh6OTg3NjVKS2w4VEl2eVVzZEhibGZFbGtEbnFyb2VNVmk4dWVXSW1XZWkxcGJ1RG5JUk4xZXpuMGl3aDZBYmthX0RySHF0VExFXzdKTTNmOF8tWmd2UHJiUGkyTQ?oc=5</a:t>
             </a:r>
             <a:endParaRPr lang="en-US" sz="580" dirty="0"/>
           </a:p>
@@ -5067,7 +5067,7 @@
                 <a:ea typeface="Microsoft YaHei" pitchFamily="34" charset="-122"/>
                 <a:cs typeface="Microsoft YaHei" pitchFamily="34" charset="-120"/>
               </a:rPr>
-              <a:t>中国电池网</a:t>
+              <a:t>中国磷酸铁锂行业官方政策与</a:t>
             </a:r>
             <a:endParaRPr lang="en-US" sz="680" dirty="0"/>
           </a:p>
@@ -5108,7 +5108,7 @@
                 <a:ea typeface="Microsoft YaHei" pitchFamily="34" charset="-122"/>
                 <a:cs typeface="Microsoft YaHei" pitchFamily="34" charset="-120"/>
               </a:rPr>
-              <a:t>正力新能上半年动力电池收入45.77亿元 储能电池收入增长近8倍_电池网</a:t>
+              <a:t>选电芯更要看兜底，极狐阿尔法T7电池什么品牌 - 新浪网</a:t>
             </a:r>
             <a:endParaRPr lang="en-US" sz="680" dirty="0"/>
           </a:p>
@@ -5149,7 +5149,7 @@
                 <a:ea typeface="Aptos" pitchFamily="34" charset="-122"/>
                 <a:cs typeface="Aptos" pitchFamily="34" charset="-120"/>
               </a:rPr>
-              <a:t>https://www.itdcw.com/news/qiye/0Z115L232026.html</a:t>
+              <a:t>https://news.google.com/rss/articles/CBMif0FVX3lxTE9RalhvVWFTbzNJbE5NVHluQ09jbXJHaHZPYndYaGt1VnpTV01IbEU5ZHkydnRfSUpQYUI0eWNjcVY3VjkzRjlBRTJnc1JaRlQ1NGlIajJISFVONzhUTTFMTm81dGFwT09wVmN1LXBSak9uekJsWFV2OHo5dTktVlk?oc=5</a:t>
             </a:r>
             <a:endParaRPr lang="en-US" sz="580" dirty="0"/>
           </a:p>
@@ -5254,7 +5254,7 @@
                 <a:ea typeface="Microsoft YaHei" pitchFamily="34" charset="-122"/>
                 <a:cs typeface="Microsoft YaHei" pitchFamily="34" charset="-120"/>
               </a:rPr>
-              <a:t>中国电池网</a:t>
+              <a:t>中国磷酸铁锂行业官方政策与</a:t>
             </a:r>
             <a:endParaRPr lang="en-US" sz="680" dirty="0"/>
           </a:p>
@@ -5295,7 +5295,7 @@
                 <a:ea typeface="Microsoft YaHei" pitchFamily="34" charset="-122"/>
                 <a:cs typeface="Microsoft YaHei" pitchFamily="34" charset="-120"/>
               </a:rPr>
-              <a:t>同体积容量击穿行业纪录！多氟多两款大圆柱磷酸铁锂换电方案发布_电池网</a:t>
+              <a:t>长虹：一块高倍率锂电池的“新长征” - 川观新闻</a:t>
             </a:r>
             <a:endParaRPr lang="en-US" sz="680" dirty="0"/>
           </a:p>
@@ -5336,7 +5336,7 @@
                 <a:ea typeface="Aptos" pitchFamily="34" charset="-122"/>
                 <a:cs typeface="Aptos" pitchFamily="34" charset="-120"/>
               </a:rPr>
-              <a:t>https://www.itdcw.com/news/chanpinxinwen/06251562M2026.html</a:t>
+              <a:t>https://cbgc.scol.com.cn/news/8081041</a:t>
             </a:r>
             <a:endParaRPr lang="en-US" sz="580" dirty="0"/>
           </a:p>
@@ -5441,7 +5441,7 @@
                 <a:ea typeface="Microsoft YaHei" pitchFamily="34" charset="-122"/>
                 <a:cs typeface="Microsoft YaHei" pitchFamily="34" charset="-120"/>
               </a:rPr>
-              <a:t>鑫椤锂电</a:t>
+              <a:t>中国电池网</a:t>
             </a:r>
             <a:endParaRPr lang="en-US" sz="680" dirty="0"/>
           </a:p>
@@ -5482,7 +5482,7 @@
                 <a:ea typeface="Microsoft YaHei" pitchFamily="34" charset="-122"/>
                 <a:cs typeface="Microsoft YaHei" pitchFamily="34" charset="-120"/>
               </a:rPr>
-              <a:t>鑫椤锂电</a:t>
+              <a:t>中国电池网</a:t>
             </a:r>
             <a:endParaRPr lang="en-US" sz="680" dirty="0"/>
           </a:p>
@@ -5523,7 +5523,7 @@
                 <a:ea typeface="Aptos" pitchFamily="34" charset="-122"/>
                 <a:cs typeface="Aptos" pitchFamily="34" charset="-120"/>
               </a:rPr>
-              <a:t>https://www.icbattery.com/</a:t>
+              <a:t>https://www.itdcw.com/</a:t>
             </a:r>
             <a:endParaRPr lang="en-US" sz="580" dirty="0"/>
           </a:p>
@@ -5628,7 +5628,7 @@
                 <a:ea typeface="Microsoft YaHei" pitchFamily="34" charset="-122"/>
                 <a:cs typeface="Microsoft YaHei" pitchFamily="34" charset="-120"/>
               </a:rPr>
-              <a:t>高工锂电</a:t>
+              <a:t>鑫椤锂电</a:t>
             </a:r>
             <a:endParaRPr lang="en-US" sz="680" dirty="0"/>
           </a:p>
@@ -5669,7 +5669,7 @@
                 <a:ea typeface="Microsoft YaHei" pitchFamily="34" charset="-122"/>
                 <a:cs typeface="Microsoft YaHei" pitchFamily="34" charset="-120"/>
               </a:rPr>
-              <a:t>高工锂电</a:t>
+              <a:t>鑫椤锂电</a:t>
             </a:r>
             <a:endParaRPr lang="en-US" sz="680" dirty="0"/>
           </a:p>
@@ -5710,7 +5710,7 @@
                 <a:ea typeface="Aptos" pitchFamily="34" charset="-122"/>
                 <a:cs typeface="Aptos" pitchFamily="34" charset="-120"/>
               </a:rPr>
-              <a:t>https://www.gg-lb.com/</a:t>
+              <a:t>https://www.icbattery.com/</a:t>
             </a:r>
             <a:endParaRPr lang="en-US" sz="580" dirty="0"/>
           </a:p>
@@ -5964,7 +5964,7 @@
                 <a:ea typeface="Aptos" pitchFamily="34" charset="-122"/>
                 <a:cs typeface="Aptos" pitchFamily="34" charset="-120"/>
               </a:rPr>
-              <a:t>2026-10-19</a:t>
+              <a:t>2026-10-23</a:t>
             </a:r>
             <a:endParaRPr lang="en-US" sz="800" dirty="0"/>
           </a:p>
@@ -6488,7 +6488,7 @@
                 <a:ea typeface="Microsoft YaHei" pitchFamily="34" charset="-122"/>
                 <a:cs typeface="Microsoft YaHei" pitchFamily="34" charset="-120"/>
               </a:rPr>
-              <a:t>电池中国</a:t>
+              <a:t>高工锂电</a:t>
             </a:r>
             <a:endParaRPr lang="en-US" sz="680" dirty="0"/>
           </a:p>
@@ -6529,7 +6529,7 @@
                 <a:ea typeface="Microsoft YaHei" pitchFamily="34" charset="-122"/>
                 <a:cs typeface="Microsoft YaHei" pitchFamily="34" charset="-120"/>
               </a:rPr>
-              <a:t>电池中国</a:t>
+              <a:t>高工锂电</a:t>
             </a:r>
             <a:endParaRPr lang="en-US" sz="680" dirty="0"/>
           </a:p>
@@ -6570,7 +6570,7 @@
                 <a:ea typeface="Aptos" pitchFamily="34" charset="-122"/>
                 <a:cs typeface="Aptos" pitchFamily="34" charset="-120"/>
               </a:rPr>
-              <a:t>https://www.cbea.com/</a:t>
+              <a:t>https://www.gg-lb.com/</a:t>
             </a:r>
             <a:endParaRPr lang="en-US" sz="580" dirty="0"/>
           </a:p>
@@ -6675,7 +6675,7 @@
                 <a:ea typeface="Microsoft YaHei" pitchFamily="34" charset="-122"/>
                 <a:cs typeface="Microsoft YaHei" pitchFamily="34" charset="-120"/>
               </a:rPr>
-              <a:t>证券时报</a:t>
+              <a:t>电池中国</a:t>
             </a:r>
             <a:endParaRPr lang="en-US" sz="680" dirty="0"/>
           </a:p>
@@ -6716,7 +6716,7 @@
                 <a:ea typeface="Microsoft YaHei" pitchFamily="34" charset="-122"/>
                 <a:cs typeface="Microsoft YaHei" pitchFamily="34" charset="-120"/>
               </a:rPr>
-              <a:t>证券时报</a:t>
+              <a:t>电池中国</a:t>
             </a:r>
             <a:endParaRPr lang="en-US" sz="680" dirty="0"/>
           </a:p>
@@ -6757,7 +6757,7 @@
                 <a:ea typeface="Aptos" pitchFamily="34" charset="-122"/>
                 <a:cs typeface="Aptos" pitchFamily="34" charset="-120"/>
               </a:rPr>
-              <a:t>https://www.stcn.com/</a:t>
+              <a:t>https://www.cbea.com/</a:t>
             </a:r>
             <a:endParaRPr lang="en-US" sz="580" dirty="0"/>
           </a:p>
@@ -6862,7 +6862,7 @@
                 <a:ea typeface="Microsoft YaHei" pitchFamily="34" charset="-122"/>
                 <a:cs typeface="Microsoft YaHei" pitchFamily="34" charset="-120"/>
               </a:rPr>
-              <a:t>界面新闻</a:t>
+              <a:t>证券时报</a:t>
             </a:r>
             <a:endParaRPr lang="en-US" sz="680" dirty="0"/>
           </a:p>
@@ -6903,7 +6903,7 @@
                 <a:ea typeface="Microsoft YaHei" pitchFamily="34" charset="-122"/>
                 <a:cs typeface="Microsoft YaHei" pitchFamily="34" charset="-120"/>
               </a:rPr>
-              <a:t>锂电产业链周记 | 前三季度国内动力和储能电池出口量增超50% 赛力斯</a:t>
+              <a:t>证券时报</a:t>
             </a:r>
             <a:endParaRPr lang="en-US" sz="680" dirty="0"/>
           </a:p>
@@ -6944,7 +6944,7 @@
                 <a:ea typeface="Aptos" pitchFamily="34" charset="-122"/>
                 <a:cs typeface="Aptos" pitchFamily="34" charset="-120"/>
               </a:rPr>
-              <a:t>https://www.jiemian.com/article/15201129.html</a:t>
+              <a:t>https://www.stcn.com/</a:t>
             </a:r>
             <a:endParaRPr lang="en-US" sz="580" dirty="0"/>
           </a:p>
@@ -7049,7 +7049,7 @@
                 <a:ea typeface="Microsoft YaHei" pitchFamily="34" charset="-122"/>
                 <a:cs typeface="Microsoft YaHei" pitchFamily="34" charset="-120"/>
               </a:rPr>
-              <a:t>工业和信息化部</a:t>
+              <a:t>界面新闻</a:t>
             </a:r>
             <a:endParaRPr lang="en-US" sz="680" dirty="0"/>
           </a:p>
@@ -7090,7 +7090,7 @@
                 <a:ea typeface="Microsoft YaHei" pitchFamily="34" charset="-122"/>
                 <a:cs typeface="Microsoft YaHei" pitchFamily="34" charset="-120"/>
               </a:rPr>
-              <a:t>国新办举行国务院政策例行吹风会 介绍加强中小企业回款难问题治理有关工作</a:t>
+              <a:t>锂电产业链周记 | 前三季度国内动力和储能电池出口量增超50% 赛力斯</a:t>
             </a:r>
             <a:endParaRPr lang="en-US" sz="680" dirty="0"/>
           </a:p>
@@ -7131,7 +7131,7 @@
                 <a:ea typeface="Aptos" pitchFamily="34" charset="-122"/>
                 <a:cs typeface="Aptos" pitchFamily="34" charset="-120"/>
               </a:rPr>
-              <a:t>http://www.miit.gov.cn/xwfb/bldhd/art/2026/art_7285ee48244d4f20b0f127c7f013ec11.html</a:t>
+              <a:t>https://www.jiemian.com/article/15201129.html</a:t>
             </a:r>
             <a:endParaRPr lang="en-US" sz="580" dirty="0"/>
           </a:p>
@@ -7277,7 +7277,7 @@
                 <a:ea typeface="Microsoft YaHei" pitchFamily="34" charset="-122"/>
                 <a:cs typeface="Microsoft YaHei" pitchFamily="34" charset="-120"/>
               </a:rPr>
-              <a:t>四部门关于开展2026年度享受增值税加计抵减政策的集成电路企业清单制定</a:t>
+              <a:t>国新办举行国务院政策例行吹风会 介绍加强中小企业回款难问题治理有关工作</a:t>
             </a:r>
             <a:endParaRPr lang="en-US" sz="680" dirty="0"/>
           </a:p>
@@ -7318,7 +7318,7 @@
                 <a:ea typeface="Aptos" pitchFamily="34" charset="-122"/>
                 <a:cs typeface="Aptos" pitchFamily="34" charset="-120"/>
               </a:rPr>
-              <a:t>http://www.miit.gov.cn/zwgk/zcwj/wjfb/tz/art/2026/art_7d2e760b4be94217b8f55caec840b30d.html</a:t>
+              <a:t>http://www.miit.gov.cn/xwfb/bldhd/art/2026/art_7285ee48244d4f20b0f127c7f013ec11.html</a:t>
             </a:r>
             <a:endParaRPr lang="en-US" sz="580" dirty="0"/>
           </a:p>
@@ -7464,7 +7464,7 @@
                 <a:ea typeface="Microsoft YaHei" pitchFamily="34" charset="-122"/>
                 <a:cs typeface="Microsoft YaHei" pitchFamily="34" charset="-120"/>
               </a:rPr>
-              <a:t>公开征求对光伏制造行业规范条件及公告管理办法（征求意见稿）的意见</a:t>
+              <a:t>四部门关于开展2026年度享受增值税加计抵减政策的集成电路企业清单制定</a:t>
             </a:r>
             <a:endParaRPr lang="en-US" sz="680" dirty="0"/>
           </a:p>
@@ -7505,7 +7505,7 @@
                 <a:ea typeface="Aptos" pitchFamily="34" charset="-122"/>
                 <a:cs typeface="Aptos" pitchFamily="34" charset="-120"/>
               </a:rPr>
-              <a:t>https://www.miit.gov.cn/gzcy/yjzj/art/2026/art_fcf91636ca1c480b9382f48f6fe22f23.html</a:t>
+              <a:t>http://www.miit.gov.cn/zwgk/zcwj/wjfb/tz/art/2026/art_7d2e760b4be94217b8f55caec840b30d.html</a:t>
             </a:r>
             <a:endParaRPr lang="en-US" sz="580" dirty="0"/>
           </a:p>
@@ -7797,7 +7797,7 @@
                 <a:ea typeface="Microsoft YaHei" pitchFamily="34" charset="-122"/>
                 <a:cs typeface="Microsoft YaHei" pitchFamily="34" charset="-120"/>
               </a:rPr>
-              <a:t>国家发展改革委</a:t>
+              <a:t>工业和信息化部</a:t>
             </a:r>
             <a:endParaRPr lang="en-US" sz="680" dirty="0"/>
           </a:p>
@@ -7838,7 +7838,7 @@
                 <a:ea typeface="Microsoft YaHei" pitchFamily="34" charset="-122"/>
                 <a:cs typeface="Microsoft YaHei" pitchFamily="34" charset="-120"/>
               </a:rPr>
-              <a:t>国家发展改革委</a:t>
+              <a:t>最新政策</a:t>
             </a:r>
             <a:endParaRPr lang="en-US" sz="680" dirty="0"/>
           </a:p>
@@ -7879,7 +7879,7 @@
                 <a:ea typeface="Aptos" pitchFamily="34" charset="-122"/>
                 <a:cs typeface="Aptos" pitchFamily="34" charset="-120"/>
               </a:rPr>
-              <a:t>https://www.ndrc.gov.cn/</a:t>
+              <a:t>https://www.miit.gov.cn/xwfb/zxzc/index.html</a:t>
             </a:r>
             <a:endParaRPr lang="en-US" sz="580" dirty="0"/>
           </a:p>
@@ -7984,7 +7984,7 @@
                 <a:ea typeface="Microsoft YaHei" pitchFamily="34" charset="-122"/>
                 <a:cs typeface="Microsoft YaHei" pitchFamily="34" charset="-120"/>
               </a:rPr>
-              <a:t>中华人民共和国中央人民政府</a:t>
+              <a:t>国家发展改革委</a:t>
             </a:r>
             <a:endParaRPr lang="en-US" sz="680" dirty="0"/>
           </a:p>
@@ -8025,7 +8025,7 @@
                 <a:ea typeface="Microsoft YaHei" pitchFamily="34" charset="-122"/>
                 <a:cs typeface="Microsoft YaHei" pitchFamily="34" charset="-120"/>
               </a:rPr>
-              <a:t>中华人民共和国中央人民政府</a:t>
+              <a:t>国家发展改革委</a:t>
             </a:r>
             <a:endParaRPr lang="en-US" sz="680" dirty="0"/>
           </a:p>
@@ -8066,7 +8066,7 @@
                 <a:ea typeface="Aptos" pitchFamily="34" charset="-122"/>
                 <a:cs typeface="Aptos" pitchFamily="34" charset="-120"/>
               </a:rPr>
-              <a:t>https://www.gov.cn/</a:t>
+              <a:t>https://www.ndrc.gov.cn/</a:t>
             </a:r>
             <a:endParaRPr lang="en-US" sz="580" dirty="0"/>
           </a:p>
@@ -8171,7 +8171,7 @@
                 <a:ea typeface="Microsoft YaHei" pitchFamily="34" charset="-122"/>
                 <a:cs typeface="Microsoft YaHei" pitchFamily="34" charset="-120"/>
               </a:rPr>
-              <a:t>生态环境部</a:t>
+              <a:t>中华人民共和国中央人民政府</a:t>
             </a:r>
             <a:endParaRPr lang="en-US" sz="680" dirty="0"/>
           </a:p>
@@ -8212,7 +8212,7 @@
                 <a:ea typeface="Microsoft YaHei" pitchFamily="34" charset="-122"/>
                 <a:cs typeface="Microsoft YaHei" pitchFamily="34" charset="-120"/>
               </a:rPr>
-              <a:t>生态环境部</a:t>
+              <a:t>中华人民共和国中央人民政府</a:t>
             </a:r>
             <a:endParaRPr lang="en-US" sz="680" dirty="0"/>
           </a:p>
@@ -8253,7 +8253,7 @@
                 <a:ea typeface="Aptos" pitchFamily="34" charset="-122"/>
                 <a:cs typeface="Aptos" pitchFamily="34" charset="-120"/>
               </a:rPr>
-              <a:t>https://www.mee.gov.cn/</a:t>
+              <a:t>https://www.gov.cn/</a:t>
             </a:r>
             <a:endParaRPr lang="en-US" sz="580" dirty="0"/>
           </a:p>
@@ -8358,7 +8358,7 @@
                 <a:ea typeface="Microsoft YaHei" pitchFamily="34" charset="-122"/>
                 <a:cs typeface="Microsoft YaHei" pitchFamily="34" charset="-120"/>
               </a:rPr>
-              <a:t>万润新能源</a:t>
+              <a:t>生态环境部</a:t>
             </a:r>
             <a:endParaRPr lang="en-US" sz="680" dirty="0"/>
           </a:p>
@@ -8399,7 +8399,7 @@
                 <a:ea typeface="Microsoft YaHei" pitchFamily="34" charset="-122"/>
                 <a:cs typeface="Microsoft YaHei" pitchFamily="34" charset="-120"/>
               </a:rPr>
-              <a:t>磷酸铁锂-湖北万润新能源科技股份有限公司_动力电池材料_消费电池材料_</a:t>
+              <a:t>生态环境部</a:t>
             </a:r>
             <a:endParaRPr lang="en-US" sz="680" dirty="0"/>
           </a:p>
@@ -8440,7 +8440,7 @@
                 <a:ea typeface="Aptos" pitchFamily="34" charset="-122"/>
                 <a:cs typeface="Aptos" pitchFamily="34" charset="-120"/>
               </a:rPr>
-              <a:t>https://www.hbwanrun.com/application_details/1.html</a:t>
+              <a:t>https://www.mee.gov.cn/</a:t>
             </a:r>
             <a:endParaRPr lang="en-US" sz="580" dirty="0"/>
           </a:p>
@@ -8545,7 +8545,7 @@
                 <a:ea typeface="Microsoft YaHei" pitchFamily="34" charset="-122"/>
                 <a:cs typeface="Microsoft YaHei" pitchFamily="34" charset="-120"/>
               </a:rPr>
-              <a:t>湖南裕能</a:t>
+              <a:t>万润新能源</a:t>
             </a:r>
             <a:endParaRPr lang="en-US" sz="680" dirty="0"/>
           </a:p>
@@ -8586,7 +8586,7 @@
                 <a:ea typeface="Microsoft YaHei" pitchFamily="34" charset="-122"/>
                 <a:cs typeface="Microsoft YaHei" pitchFamily="34" charset="-120"/>
               </a:rPr>
-              <a:t>湖南裕能</a:t>
+              <a:t>磷酸铁锂-湖北万润新能源科技股份有限公司_动力电池材料_消费电池材料_</a:t>
             </a:r>
             <a:endParaRPr lang="en-US" sz="680" dirty="0"/>
           </a:p>
@@ -8627,7 +8627,7 @@
                 <a:ea typeface="Aptos" pitchFamily="34" charset="-122"/>
                 <a:cs typeface="Aptos" pitchFamily="34" charset="-120"/>
               </a:rPr>
-              <a:t>https://www.yunengchem.com/</a:t>
+              <a:t>https://www.hbwanrun.com/application_details/1.html</a:t>
             </a:r>
             <a:endParaRPr lang="en-US" sz="580" dirty="0"/>
           </a:p>
@@ -8881,7 +8881,7 @@
                 <a:ea typeface="Aptos" pitchFamily="34" charset="-122"/>
                 <a:cs typeface="Aptos" pitchFamily="34" charset="-120"/>
               </a:rPr>
-              <a:t>2026-10-19</a:t>
+              <a:t>2026-10-23</a:t>
             </a:r>
             <a:endParaRPr lang="en-US" sz="800" dirty="0"/>
           </a:p>
@@ -9085,7 +9085,7 @@
                 <a:ea typeface="Microsoft YaHei" pitchFamily="34" charset="-122"/>
                 <a:cs typeface="Microsoft YaHei" pitchFamily="34" charset="-120"/>
               </a:rPr>
-              <a:t>今日磷酸铁锂行业信号集中在技术路线与产能扩张：宝马第六代动力电池量产，强调制造韧性，可能加速高端车型对磷酸铁锂体系的结构性采用；中国储能电池产</a:t>
+              <a:t>今日磷酸铁锂行业信号集中在高压实产品量产推进与海外项目股权调整。天原第五代高压实完成吨试并宣称具备供货能力，龙蟠科技常州锂源第四代高压实稳定量</a:t>
             </a:r>
             <a:endParaRPr lang="en-US" sz="940" dirty="0"/>
           </a:p>
@@ -9281,7 +9281,7 @@
                 <a:ea typeface="Microsoft YaHei" pitchFamily="34" charset="-122"/>
                 <a:cs typeface="Microsoft YaHei" pitchFamily="34" charset="-120"/>
               </a:rPr>
-              <a:t>宝马第六代动力电池量产，强调制造韧性，可能推动磷酸铁锂在高端车型渗透；中国储能电池产能激增110%，全球市场同步增长，储能端对磷酸铁锂需求形成支撑；电动摩托车锂电池强制性国标</a:t>
+              <a:t>高压实磷酸铁锂技术迭代加速，天原第五代完成吨试并宣称具备供货能力，龙蟠常州锂源第四代已稳定量产；同时龙蟠拟出售印尼二期项目76%股权，海外扩产策略出现调整；锂矿三季报业绩高增</a:t>
             </a:r>
             <a:endParaRPr lang="en-US" sz="920" dirty="0"/>
           </a:p>
@@ -9518,7 +9518,7 @@
                 <a:ea typeface="Microsoft YaHei" pitchFamily="34" charset="-122"/>
                 <a:cs typeface="Microsoft YaHei" pitchFamily="34" charset="-120"/>
               </a:rPr>
-              <a:t>宝马第六代动力电池量产，强调制造韧性，可能加速高端车型对磷酸铁锂体系的结构性采用；固态电池专家提出2030年实用化量产目标，短期对磷酸铁锂替代威胁有限，但长期技术路线竞争需持</a:t>
+              <a:t>天原第五代高压实磷酸铁锂完成吨试并宣称具备供货能力，龙蟠科技常州锂源第四代高压实产品已稳定量产，行业高压实技术从第四代向第五代演进；液相法德方纳米规划纳米磷酸铁锂34.5万吨</a:t>
             </a:r>
             <a:endParaRPr lang="en-US" sz="920" dirty="0"/>
           </a:p>
@@ -9559,7 +9559,7 @@
                 <a:ea typeface="Aptos" pitchFamily="34" charset="-122"/>
                 <a:cs typeface="Aptos" pitchFamily="34" charset="-120"/>
               </a:rPr>
-              <a:t>[1][4]</a:t>
+              <a:t>[2][1]</a:t>
             </a:r>
             <a:endParaRPr lang="en-US" sz="750" dirty="0"/>
           </a:p>
@@ -9755,7 +9755,7 @@
                 <a:ea typeface="Microsoft YaHei" pitchFamily="34" charset="-122"/>
                 <a:cs typeface="Microsoft YaHei" pitchFamily="34" charset="-120"/>
               </a:rPr>
-              <a:t>中国储能电池产能激增110%，全球市场同步增长，显示储能端对磷酸铁锂需求形成支撑；全国首批锂+钠示范落地河北，大电芯路线推进，可能加剧储能电池技术路线竞争，磷酸铁锂需关注在储</a:t>
+              <a:t>龙蟠科技附属拟出售印尼二期磷酸铁锂正极材料项目76%股权，海外扩产策略出现调整；德方纳米规划纳米磷酸铁锂34.5万吨/年，国内产能扩张仍在推进；清陶动力固态电池项目一期在苏州</a:t>
             </a:r>
             <a:endParaRPr lang="en-US" sz="920" dirty="0"/>
           </a:p>
@@ -9796,7 +9796,7 @@
                 <a:ea typeface="Aptos" pitchFamily="34" charset="-122"/>
                 <a:cs typeface="Aptos" pitchFamily="34" charset="-120"/>
               </a:rPr>
-              <a:t>[2][5]</a:t>
+              <a:t>[3][4]</a:t>
             </a:r>
             <a:endParaRPr lang="en-US" sz="750" dirty="0"/>
           </a:p>
@@ -9941,7 +9941,7 @@
         <p:spPr>
           <a:xfrm>
             <a:off x="6766560" y="4005072"/>
-            <a:ext cx="1316736" cy="54864"/>
+            <a:ext cx="877824" cy="54864"/>
           </a:xfrm>
           <a:prstGeom prst="rect">
             <a:avLst/>
@@ -9992,7 +9992,7 @@
                 <a:ea typeface="Microsoft YaHei" pitchFamily="34" charset="-122"/>
                 <a:cs typeface="Microsoft YaHei" pitchFamily="34" charset="-120"/>
               </a:rPr>
-              <a:t>储能电池产能激增110%可能加剧行业供给竞争，对磷酸铁锂正极材料价格形成压制；电动摩托车锂电池强制性国标发布，可能提高小动力电池合规成本，推动低端产能出清，短期对磷酸铁锂价格</a:t>
+              <a:t>锂矿三季报业绩高增背后隐现预期分歧，上游锂矿盈利改善但中下游正极材料成本传导不畅；高压实产品迭代可能带来结构性溢价，但普通磷酸铁锂产品盈利压力仍存。</a:t>
             </a:r>
             <a:endParaRPr lang="en-US" sz="920" dirty="0"/>
           </a:p>
@@ -10033,7 +10033,7 @@
                 <a:ea typeface="Aptos" pitchFamily="34" charset="-122"/>
                 <a:cs typeface="Aptos" pitchFamily="34" charset="-120"/>
               </a:rPr>
-              <a:t>[2][3]</a:t>
+              <a:t>[5]</a:t>
             </a:r>
             <a:endParaRPr lang="en-US" sz="750" dirty="0"/>
           </a:p>
@@ -10138,7 +10138,7 @@
                 <a:ea typeface="Microsoft YaHei" pitchFamily="34" charset="-122"/>
                 <a:cs typeface="Microsoft YaHei" pitchFamily="34" charset="-120"/>
               </a:rPr>
-              <a:t>今日磷酸铁锂行业信号集中在技术路线与产能扩张：宝马第六代动力电池量产，强调制造韧性，可能加速高端车型对磷酸铁锂体系的结构性采用；中国储能电池产</a:t>
+              <a:t>今日磷酸铁锂行业信号集中在高压实产品量产推进与海外项目股权调整。天原第五代高压实完成吨试并宣称具备供货能力，龙蟠科技常州锂源第四代高压实稳定量</a:t>
             </a:r>
             <a:endParaRPr lang="en-US" sz="1020" dirty="0"/>
           </a:p>
@@ -10287,7 +10287,7 @@
                 <a:ea typeface="Aptos" pitchFamily="34" charset="-122"/>
                 <a:cs typeface="Aptos" pitchFamily="34" charset="-120"/>
               </a:rPr>
-              <a:t>2026-10-19</a:t>
+              <a:t>2026-10-23</a:t>
             </a:r>
             <a:endParaRPr lang="en-US" sz="800" dirty="0"/>
           </a:p>
@@ -10602,7 +10602,7 @@
                 <a:ea typeface="Microsoft YaHei" pitchFamily="34" charset="-122"/>
                 <a:cs typeface="Microsoft YaHei" pitchFamily="34" charset="-120"/>
               </a:rPr>
-              <a:t>宝马第六代动力电池量产，强调制造韧性，可能推动磷酸铁锂在高端车型渗透；中国储能电池产能激增110%，全球市场同步增长，储能端对磷酸铁锂需求形成支撑；电动摩托车锂电池强制性国标发布，明年7月实施，将提高小动力电池安全门槛，利好合规产能。 [1][2][3]</a:t>
+              <a:t>高压实磷酸铁锂技术迭代加速，天原第五代完成吨试并宣称具备供货能力，龙蟠常州锂源第四代已稳定量产；同时龙蟠拟出售印尼二期项目76%股权，海外扩产策略出现调整；锂矿三季报业绩高增但预期分歧隐现，成本与盈利压力并存。行业呈现产品升级与产能布局优化并行的特征。 [1][2][3]</a:t>
             </a:r>
             <a:endParaRPr lang="en-US" sz="960" dirty="0"/>
           </a:p>
@@ -10752,7 +10752,7 @@
                 <a:ea typeface="Microsoft YaHei" pitchFamily="34" charset="-122"/>
                 <a:cs typeface="Microsoft YaHei" pitchFamily="34" charset="-120"/>
               </a:rPr>
-              <a:t>宝马量产信息与储能产能激增共同指向磷酸铁锂需求端扩张，但前者侧重技术路线验证，后者侧重产能供给；电摩国标则从合规端抬升小动力电池门槛。三者叠加可能加剧行业分化：具备技术储备和合规产能的企业受益，低端产能面临出清。需验证宝马第六代电池是否明确采用磷酸铁锂体系，以及储能产能激增是否伴随实际订单落地。</a:t>
+              <a:t>公众号信息显示高压实产品从第四代向第五代推进，技术领先者可能获得溢价，但吨试到量产仍有距离；龙蟠出售印尼项目股权或反映海外建设成本与运营风险上升，需关注其资金回笼用途及对海外供给的影响；锂矿业绩高增与预期分歧并存，说明上游盈利改善但中下游成本传导不畅，需验证碳酸锂价格走势与正极材料企业毛利率变化。</a:t>
             </a:r>
             <a:endParaRPr lang="en-US" sz="960" dirty="0"/>
           </a:p>
@@ -10886,7 +10886,7 @@
                 <a:ea typeface="Microsoft YaHei" pitchFamily="34" charset="-122"/>
                 <a:cs typeface="Microsoft YaHei" pitchFamily="34" charset="-120"/>
               </a:rPr>
-              <a:t>若宝马第六代电池明确采用磷酸铁锂体系并逐步放量，则可能带动高端车型对磷酸铁锂的认可度提升，跟踪指标包括宝马官方技术参数披露和配套电池供应商名单；若储能产能激增伴随开工率维持高位，则可能支撑磷酸铁锂正极材料需求，跟踪指标为储能电池月度产量和出口数据；若电摩国标执行严格，则可能加速小动力电池行业集中度提升，跟踪指标为合规电池企业认证进度。证据边界限于公开报道，未覆盖企业实际订单和产能利用率。</a:t>
+              <a:t>若天原第五代高压实产品后续获得客户批量订单并稳定出货，则可能推动高压实产品价格带分化，具备技术储备的企业议价能力增强；若龙蟠印尼项目股权出售完成，则可能降低其海外资本开支压力，但需跟踪印尼二期项目后续建设进度及买方背景。跟踪指标：高压实产品月度出货量、印尼项目股权交割公告、碳酸锂现货价格。</a:t>
             </a:r>
             <a:endParaRPr lang="en-US" sz="960" dirty="0"/>
           </a:p>
@@ -11022,7 +11022,7 @@
                 <a:ea typeface="Aptos" pitchFamily="34" charset="-122"/>
                 <a:cs typeface="Aptos" pitchFamily="34" charset="-120"/>
               </a:rPr>
-              <a:t>10%</a:t>
+              <a:t>76%</a:t>
             </a:r>
             <a:endParaRPr lang="en-US" sz="2100" dirty="0"/>
           </a:p>
@@ -11063,7 +11063,7 @@
                 <a:ea typeface="Microsoft YaHei" pitchFamily="34" charset="-122"/>
                 <a:cs typeface="Microsoft YaHei" pitchFamily="34" charset="-120"/>
               </a:rPr>
-              <a:t>中国储能电池产能激增1</a:t>
+              <a:t>股权</a:t>
             </a:r>
             <a:endParaRPr lang="en-US" sz="820" dirty="0"/>
           </a:p>
@@ -11104,7 +11104,7 @@
                 <a:ea typeface="Microsoft YaHei" pitchFamily="34" charset="-122"/>
                 <a:cs typeface="Microsoft YaHei" pitchFamily="34" charset="-120"/>
               </a:rPr>
-              <a:t>公开信息：中国储能电池产能激增110%，全球市场同步增长，储能端对磷酸铁锂需求形成支撑</a:t>
+              <a:t>公开信息：同时龙蟠拟出售印尼二期项目76%股权，海外扩产策略出现调整</a:t>
             </a:r>
             <a:endParaRPr lang="en-US" sz="840" dirty="0"/>
           </a:p>
@@ -11250,7 +11250,7 @@
                 <a:ea typeface="Microsoft YaHei" pitchFamily="34" charset="-122"/>
                 <a:cs typeface="Microsoft YaHei" pitchFamily="34" charset="-120"/>
               </a:rPr>
-              <a:t>若宝马第六代电池明确采用磷酸铁锂体系并逐步放量，则可能带动高端车型对磷酸铁锂的认可度提升，跟踪指标包括宝马官方技术参数披露和配套电池供应商名单</a:t>
+              <a:t>若天原第五代高压实产品后续获得客户批量订单并稳定出货，则可能推动高压实产品价格带分化，具备技术储备的企业议价能力增强</a:t>
             </a:r>
             <a:endParaRPr lang="en-US" sz="1020" dirty="0"/>
           </a:p>
@@ -11399,7 +11399,7 @@
                 <a:ea typeface="Aptos" pitchFamily="34" charset="-122"/>
                 <a:cs typeface="Aptos" pitchFamily="34" charset="-120"/>
               </a:rPr>
-              <a:t>2026-10-19</a:t>
+              <a:t>2026-10-23</a:t>
             </a:r>
             <a:endParaRPr lang="en-US" sz="800" dirty="0"/>
           </a:p>
@@ -11714,7 +11714,7 @@
                 <a:ea typeface="Microsoft YaHei" pitchFamily="34" charset="-122"/>
                 <a:cs typeface="Microsoft YaHei" pitchFamily="34" charset="-120"/>
               </a:rPr>
-              <a:t>宝马第六代动力电池量产，强调制造韧性，可能加速高端车型对磷酸铁锂体系的结构性采用；固态电池专家提出2030年实用化量产目标，短期对磷酸铁锂替代威胁有限，但长期技术路线竞争需持续跟踪。 [1][4]</a:t>
+              <a:t>天原第五代高压实磷酸铁锂完成吨试并宣称具备供货能力，龙蟠科技常州锂源第四代高压实产品已稳定量产，行业高压实技术从第四代向第五代演进；液相法德方纳米规划纳米磷酸铁锂34.5万吨/年，技术路线多元化并行。 [2][1]</a:t>
             </a:r>
             <a:endParaRPr lang="en-US" sz="960" dirty="0"/>
           </a:p>
@@ -11755,7 +11755,7 @@
                 <a:ea typeface="Aptos" pitchFamily="34" charset="-122"/>
                 <a:cs typeface="Aptos" pitchFamily="34" charset="-120"/>
               </a:rPr>
-              <a:t>依据：[1][4]</a:t>
+              <a:t>依据：[2][1]</a:t>
             </a:r>
             <a:endParaRPr lang="en-US" sz="740" dirty="0"/>
           </a:p>
@@ -11864,7 +11864,7 @@
                 <a:ea typeface="Microsoft YaHei" pitchFamily="34" charset="-122"/>
                 <a:cs typeface="Microsoft YaHei" pitchFamily="34" charset="-120"/>
               </a:rPr>
-              <a:t>宝马量产信息来自搜狐网，固态电池观点来自每日经济新闻专访，两者均涉及动力电池技术路线。宝马量产若采用磷酸铁锂体系，将强化磷酸铁锂在中高端车型的渗透逻辑；固态电池量产目标在2030年，短期不构成替代压力，但提醒行业关注技术迭代风险。需验证宝马第六代电池的具体化学体系，以及固态电池量产时间表是否有企业级进展。</a:t>
+              <a:t>公众号信息显示高压实产品迭代速度加快，吨试到量产仍需客户验证周期，天原宣称具备供货能力但实际订单落地情况不明；龙蟠第四代稳定量产表明其工艺成熟度较高，可能占据先发优势；德方纳米液相法规划产能较大，但液相法产品压实密度提升难度与成本控制需进一步验证。技术路线分化可能影响不同企业的客户绑定与盈利水平。</a:t>
             </a:r>
             <a:endParaRPr lang="en-US" sz="960" dirty="0"/>
           </a:p>
@@ -11998,7 +11998,7 @@
                 <a:ea typeface="Microsoft YaHei" pitchFamily="34" charset="-122"/>
                 <a:cs typeface="Microsoft YaHei" pitchFamily="34" charset="-120"/>
               </a:rPr>
-              <a:t>若宝马第六代电池确认采用磷酸铁锂或磷酸铁锰锂体系，则可能提升磷酸铁锂在高端乘用车市场的份额，跟踪指标为宝马新车型电池供应商公告和材料体系披露；若固态电池在2030年前实现小批量装车，则可能对磷酸铁锂长期需求预期形成扰动，跟踪指标为固态电池装车验证进度和成本下降曲线。证据边界限于公开报道，未覆盖宝马电池采购合同细节。</a:t>
+              <a:t>若天原第五代产品在2026年四季度获得头部电芯厂批量订单，则可能带动高压实产品价格溢价扩大，第四代产品价格承压；若德方纳米液相法产能如期释放且压实密度达标，则可能加剧高压实赛道竞争。跟踪指标：天原客户验证公告、德方纳米液相法产品压实密度参数、高压实产品与普通产品价差。</a:t>
             </a:r>
             <a:endParaRPr lang="en-US" sz="960" dirty="0"/>
           </a:p>
@@ -12244,7 +12244,7 @@
                 <a:ea typeface="Microsoft YaHei" pitchFamily="34" charset="-122"/>
                 <a:cs typeface="Microsoft YaHei" pitchFamily="34" charset="-120"/>
               </a:rPr>
-              <a:t>宝马第六代动力电池量产，强</a:t>
+              <a:t>天原第五代高压实磷酸铁锂完</a:t>
             </a:r>
             <a:endParaRPr lang="en-US" sz="670" dirty="0"/>
           </a:p>
@@ -12351,7 +12351,7 @@
                 <a:ea typeface="Microsoft YaHei" pitchFamily="34" charset="-122"/>
                 <a:cs typeface="Microsoft YaHei" pitchFamily="34" charset="-120"/>
               </a:rPr>
-              <a:t>固态电池专家提出2030年</a:t>
+              <a:t>液相法德方纳米规划纳米磷酸</a:t>
             </a:r>
             <a:endParaRPr lang="en-US" sz="670" dirty="0"/>
           </a:p>
@@ -12458,7 +12458,7 @@
                 <a:ea typeface="Microsoft YaHei" pitchFamily="34" charset="-122"/>
                 <a:cs typeface="Microsoft YaHei" pitchFamily="34" charset="-120"/>
               </a:rPr>
-              <a:t>[1][4] 宝马量产信息</a:t>
+              <a:t>[2][1] 公众号信息显</a:t>
             </a:r>
             <a:endParaRPr lang="en-US" sz="670" dirty="0"/>
           </a:p>
@@ -12565,7 +12565,7 @@
                 <a:ea typeface="Microsoft YaHei" pitchFamily="34" charset="-122"/>
                 <a:cs typeface="Microsoft YaHei" pitchFamily="34" charset="-120"/>
               </a:rPr>
-              <a:t>宝马第六代动力电池量产，强</a:t>
+              <a:t>天原第五代高压实磷酸铁锂完</a:t>
             </a:r>
             <a:endParaRPr lang="en-US" sz="670" dirty="0"/>
           </a:p>
@@ -12711,7 +12711,7 @@
                 <a:ea typeface="Microsoft YaHei" pitchFamily="34" charset="-122"/>
                 <a:cs typeface="Microsoft YaHei" pitchFamily="34" charset="-120"/>
               </a:rPr>
-              <a:t>若宝马第六代电池确认采用磷酸铁锂或磷酸铁锰锂体系，则可能提升磷酸铁锂在高端乘用车市场的份额，跟踪指标为宝马新车型电池供应商公告和材料体系披露</a:t>
+              <a:t>若天原第五代产品在2026年四季度获得头部电芯厂批量订单，则可能带动高压实产品价格溢价扩大，第四代产品价格承压</a:t>
             </a:r>
             <a:endParaRPr lang="en-US" sz="1020" dirty="0"/>
           </a:p>
@@ -12860,7 +12860,7 @@
                 <a:ea typeface="Aptos" pitchFamily="34" charset="-122"/>
                 <a:cs typeface="Aptos" pitchFamily="34" charset="-120"/>
               </a:rPr>
-              <a:t>2026-10-19</a:t>
+              <a:t>2026-10-23</a:t>
             </a:r>
             <a:endParaRPr lang="en-US" sz="800" dirty="0"/>
           </a:p>
@@ -13175,7 +13175,7 @@
                 <a:ea typeface="Microsoft YaHei" pitchFamily="34" charset="-122"/>
                 <a:cs typeface="Microsoft YaHei" pitchFamily="34" charset="-120"/>
               </a:rPr>
-              <a:t>中国储能电池产能激增110%，全球市场同步增长，显示储能端对磷酸铁锂需求形成支撑；全国首批锂+钠示范落地河北，大电芯路线推进，可能加剧储能电池技术路线竞争，磷酸铁锂需关注在储能场景的份额变化。 [2][5]</a:t>
+              <a:t>龙蟠科技附属拟出售印尼二期磷酸铁锂正极材料项目76%股权，海外扩产策略出现调整；德方纳米规划纳米磷酸铁锂34.5万吨/年，国内产能扩张仍在推进；清陶动力固态电池项目一期在苏州投产，技术路线竞争加剧。 [3][4]</a:t>
             </a:r>
             <a:endParaRPr lang="en-US" sz="960" dirty="0"/>
           </a:p>
@@ -13216,7 +13216,7 @@
                 <a:ea typeface="Aptos" pitchFamily="34" charset="-122"/>
                 <a:cs typeface="Aptos" pitchFamily="34" charset="-120"/>
               </a:rPr>
-              <a:t>依据：[2][5]</a:t>
+              <a:t>依据：[3][4]</a:t>
             </a:r>
             <a:endParaRPr lang="en-US" sz="740" dirty="0"/>
           </a:p>
@@ -13325,7 +13325,7 @@
                 <a:ea typeface="Microsoft YaHei" pitchFamily="34" charset="-122"/>
                 <a:cs typeface="Microsoft YaHei" pitchFamily="34" charset="-120"/>
               </a:rPr>
-              <a:t>储能电池产能激增信息来自VOI.ID，锂+钠示范项目来自搜狐，两者均涉及储能电池供给格局。产能激增可能带动磷酸铁锂正极材料需求，但锂+钠示范项目意味着钠离子电池在储能场景的替代尝试，可能分流部分低端储能需求。需验证储能电池产能激增的实际开工率和订单来源，以及锂+钠示范项目的规模和商业化时间表。</a:t>
+              <a:t>龙蟠出售印尼二期项目控股权可能反映海外建设运营成本高企或战略重心回撤，需关注买方身份及项目后续建设是否延期；德方纳米液相法产能规划较大，但分期建设进度与客户绑定情况需跟踪；固态电池项目投产对磷酸铁锂长期需求替代风险有限，但可能分流部分高端应用场景关注度。海外项目股权变动可能影响印尼磷酸铁锂供给增量预期。</a:t>
             </a:r>
             <a:endParaRPr lang="en-US" sz="960" dirty="0"/>
           </a:p>
@@ -13459,7 +13459,7 @@
                 <a:ea typeface="Microsoft YaHei" pitchFamily="34" charset="-122"/>
                 <a:cs typeface="Microsoft YaHei" pitchFamily="34" charset="-120"/>
               </a:rPr>
-              <a:t>若储能电池产能激增伴随开工率维持高位，则可能持续拉动磷酸铁锂正极材料需求，跟踪指标为储能电池月度产量、出口数据和磷酸铁锂正极材料开工率；若锂+钠示范项目在储能场景实现规模化应用，则可能对磷酸铁锂在低端储能市场的份额形成挤压，跟踪指标为钠离子电池储能项目招标规模和成本对比。证据边界限于公开报道，未覆盖具体企业订单和产能利用率数据。</a:t>
+              <a:t>若龙蟠印尼二期项目股权出售后建设进度放缓，则2027年印尼磷酸铁锂供给增量可能低于预期，对海外正极材料供应格局产生影响；若德方纳米34.5万吨产能按期投产，则国内液相法磷酸铁锂供给增加，可能加剧中低端产品价格竞争。跟踪指标：印尼二期项目股权交割及建设进度公告、德方纳米产能投产时间表、海外磷酸铁锂进口数据。</a:t>
             </a:r>
             <a:endParaRPr lang="en-US" sz="960" dirty="0"/>
           </a:p>
@@ -13595,7 +13595,7 @@
                 <a:ea typeface="Aptos" pitchFamily="34" charset="-122"/>
                 <a:cs typeface="Aptos" pitchFamily="34" charset="-120"/>
               </a:rPr>
-              <a:t>10%</a:t>
+              <a:t>76%</a:t>
             </a:r>
             <a:endParaRPr lang="en-US" sz="2100" dirty="0"/>
           </a:p>
@@ -13636,7 +13636,7 @@
                 <a:ea typeface="Microsoft YaHei" pitchFamily="34" charset="-122"/>
                 <a:cs typeface="Microsoft YaHei" pitchFamily="34" charset="-120"/>
               </a:rPr>
-              <a:t>中国储能电池产能激增1</a:t>
+              <a:t>股权</a:t>
             </a:r>
             <a:endParaRPr lang="en-US" sz="820" dirty="0"/>
           </a:p>
@@ -13677,7 +13677,7 @@
                 <a:ea typeface="Microsoft YaHei" pitchFamily="34" charset="-122"/>
                 <a:cs typeface="Microsoft YaHei" pitchFamily="34" charset="-120"/>
               </a:rPr>
-              <a:t>公开信息：中国储能电池产能激增110%，全球市场同步增长，显示储能端对磷酸铁锂需求形成支撑</a:t>
+              <a:t>公开信息：龙蟠科技附属拟出售印尼二期磷酸铁锂正极材料项目76%股权，海外扩产策略出现调整</a:t>
             </a:r>
             <a:endParaRPr lang="en-US" sz="840" dirty="0"/>
           </a:p>
@@ -13823,7 +13823,7 @@
                 <a:ea typeface="Microsoft YaHei" pitchFamily="34" charset="-122"/>
                 <a:cs typeface="Microsoft YaHei" pitchFamily="34" charset="-120"/>
               </a:rPr>
-              <a:t>若储能电池产能激增伴随开工率维持高位，则可能持续拉动磷酸铁锂正极材料需求，跟踪指标为储能电池月度产量、出口数据和磷酸铁锂正极材料开工率</a:t>
+              <a:t>若龙蟠印尼二期项目股权出售后建设进度放缓，则2027年印尼磷酸铁锂供给增量可能低于预期，对海外正极材料供应格局产生影响</a:t>
             </a:r>
             <a:endParaRPr lang="en-US" sz="1020" dirty="0"/>
           </a:p>
@@ -13972,7 +13972,7 @@
                 <a:ea typeface="Aptos" pitchFamily="34" charset="-122"/>
                 <a:cs typeface="Aptos" pitchFamily="34" charset="-120"/>
               </a:rPr>
-              <a:t>2026-10-19</a:t>
+              <a:t>2026-10-23</a:t>
             </a:r>
             <a:endParaRPr lang="en-US" sz="800" dirty="0"/>
           </a:p>
@@ -14178,7 +14178,7 @@
                 <a:ea typeface="Microsoft YaHei" pitchFamily="34" charset="-122"/>
                 <a:cs typeface="Microsoft YaHei" pitchFamily="34" charset="-120"/>
               </a:rPr>
-              <a:t>2 条公开来源交叉验证｜事实、影响与后续研判</a:t>
+              <a:t>1 条公开来源交叉验证｜事实、影响与后续研判</a:t>
             </a:r>
             <a:endParaRPr lang="en-US" sz="860" dirty="0"/>
           </a:p>
@@ -14287,7 +14287,7 @@
                 <a:ea typeface="Microsoft YaHei" pitchFamily="34" charset="-122"/>
                 <a:cs typeface="Microsoft YaHei" pitchFamily="34" charset="-120"/>
               </a:rPr>
-              <a:t>储能电池产能激增110%可能加剧行业供给竞争，对磷酸铁锂正极材料价格形成压制；电动摩托车锂电池强制性国标发布，可能提高小动力电池合规成本，推动低端产能出清，短期对磷酸铁锂价格影响有限。 [2][3]</a:t>
+              <a:t>锂矿三季报业绩高增背后隐现预期分歧，上游锂矿盈利改善但中下游正极材料成本传导不畅；高压实产品迭代可能带来结构性溢价，但普通磷酸铁锂产品盈利压力仍存。 [5]</a:t>
             </a:r>
             <a:endParaRPr lang="en-US" sz="960" dirty="0"/>
           </a:p>
@@ -14328,7 +14328,7 @@
                 <a:ea typeface="Aptos" pitchFamily="34" charset="-122"/>
                 <a:cs typeface="Aptos" pitchFamily="34" charset="-120"/>
               </a:rPr>
-              <a:t>依据：[2][3]</a:t>
+              <a:t>依据：[5]</a:t>
             </a:r>
             <a:endParaRPr lang="en-US" sz="740" dirty="0"/>
           </a:p>
@@ -14437,7 +14437,7 @@
                 <a:ea typeface="Microsoft YaHei" pitchFamily="34" charset="-122"/>
                 <a:cs typeface="Microsoft YaHei" pitchFamily="34" charset="-120"/>
               </a:rPr>
-              <a:t>储能产能激增信息来自VOI.ID，电摩国标信息来自温州新闻，两者分别从供给扩张和合规成本角度影响盈利。储能产能快速扩张可能导致电池环节价格竞争加剧，向上传导至磷酸铁锂正极材料价格；电摩国标提高安全门槛，可能增加小动力电池企业合规成本，加速低端产能退出。需验证储能电池实际价格走势和电摩国标执行力度。</a:t>
+              <a:t>上海证券报报道锂矿三季报业绩高增但市场预期分歧显现，反映碳酸锂价格波动对上游盈利的弹性与中下游成本压力的矛盾；高压实产品若获得溢价，具备技术优势的企业盈利可能改善，但多数企业仍面临普通产品同质化竞争；需验证碳酸锂价格走势与正极材料企业毛利率变化，以及高压实产品溢价能否覆盖研发与产线升级成本。</a:t>
             </a:r>
             <a:endParaRPr lang="en-US" sz="960" dirty="0"/>
           </a:p>
@@ -14571,7 +14571,7 @@
                 <a:ea typeface="Microsoft YaHei" pitchFamily="34" charset="-122"/>
                 <a:cs typeface="Microsoft YaHei" pitchFamily="34" charset="-120"/>
               </a:rPr>
-              <a:t>若储能电池产能利用率不足且价格竞争加剧，则可能传导至磷酸铁锂正极材料价格承压，跟踪指标为储能电池月度均价和磷酸铁锂正极材料报价；若电摩国标执行严格且合规成本上升，则可能加速小动力电池行业集中度提升，跟踪指标为电摩电池企业认证通过率和退出数量。证据边界限于公开报道，未覆盖具体价格数据和成本测算。</a:t>
+              <a:t>若碳酸锂价格维持高位且高压实产品溢价扩大，则具备高压实量产能力的企业毛利率可能环比改善，普通产品企业盈利继续承压；若碳酸锂价格回落，则正极材料成本压力缓解但上游锂矿盈利收缩。跟踪指标：碳酸锂现货均价、磷酸铁锂正极材料月度均价、高压实与普通产品价差、正极材料企业季度毛利率。</a:t>
             </a:r>
             <a:endParaRPr lang="en-US" sz="960" dirty="0"/>
           </a:p>
@@ -14639,7 +14639,7 @@
                 <a:ea typeface="Microsoft YaHei" pitchFamily="34" charset="-122"/>
                 <a:cs typeface="Microsoft YaHei" pitchFamily="34" charset="-120"/>
               </a:rPr>
-              <a:t>关键数据解读</a:t>
+              <a:t>因果图</a:t>
             </a:r>
             <a:endParaRPr lang="en-US" sz="1200" dirty="0"/>
           </a:p>
@@ -14653,12 +14653,122 @@
         </p:nvSpPr>
         <p:spPr>
           <a:xfrm>
-            <a:off x="7772400" y="1993392"/>
-            <a:ext cx="2560320" cy="1389888"/>
+            <a:off x="7845552" y="3063240"/>
+            <a:ext cx="2432304" cy="0"/>
+          </a:xfrm>
+          <a:prstGeom prst="line">
+            <a:avLst/>
+          </a:prstGeom>
+          <a:noFill/>
+          <a:ln w="15240">
+            <a:solidFill>
+              <a:srgbClr val="487052"/>
+            </a:solidFill>
+            <a:prstDash val="solid"/>
+          </a:ln>
+        </p:spPr>
+      </p:sp>
+      <p:sp>
+        <p:nvSpPr>
+          <p:cNvPr id="25" name="Shape 23"/>
+          <p:cNvSpPr/>
+          <p:nvPr/>
+        </p:nvSpPr>
+        <p:spPr>
+          <a:xfrm>
+            <a:off x="10012680" y="2889504"/>
+            <a:ext cx="384048" cy="347472"/>
+          </a:xfrm>
+          <a:prstGeom prst="rightArrow">
+            <a:avLst/>
+          </a:prstGeom>
+          <a:solidFill>
+            <a:srgbClr val="487052"/>
+          </a:solidFill>
+          <a:ln w="12700">
+            <a:solidFill>
+              <a:srgbClr val="487052"/>
+            </a:solidFill>
+            <a:prstDash val="solid"/>
+          </a:ln>
+        </p:spPr>
+      </p:sp>
+      <p:sp>
+        <p:nvSpPr>
+          <p:cNvPr id="26" name="Text 24"/>
+          <p:cNvSpPr/>
+          <p:nvPr/>
+        </p:nvSpPr>
+        <p:spPr>
+          <a:xfrm>
+            <a:off x="9893808" y="3310128"/>
+            <a:ext cx="475488" cy="146304"/>
+          </a:xfrm>
+          <a:prstGeom prst="rect">
+            <a:avLst/>
+          </a:prstGeom>
+          <a:noFill/>
+          <a:ln/>
+        </p:spPr>
+        <p:txBody>
+          <a:bodyPr wrap="square" lIns="0" tIns="0" rIns="0" bIns="0" rtlCol="0" anchor="ctr"/>
+          <a:lstStyle/>
+          <a:p>
+            <a:pPr algn="ctr" indent="0" marL="0">
+              <a:buNone/>
+            </a:pPr>
+            <a:r>
+              <a:rPr lang="en-US" sz="740" b="1" dirty="0">
+                <a:solidFill>
+                  <a:srgbClr val="487052"/>
+                </a:solidFill>
+                <a:latin typeface="Microsoft YaHei" pitchFamily="34" charset="0"/>
+                <a:ea typeface="Microsoft YaHei" pitchFamily="34" charset="-122"/>
+                <a:cs typeface="Microsoft YaHei" pitchFamily="34" charset="-120"/>
+              </a:rPr>
+              <a:t>影响</a:t>
+            </a:r>
+            <a:endParaRPr lang="en-US" sz="740" dirty="0"/>
+          </a:p>
+        </p:txBody>
+      </p:sp>
+      <p:sp>
+        <p:nvSpPr>
+          <p:cNvPr id="27" name="Shape 25"/>
+          <p:cNvSpPr/>
+          <p:nvPr/>
+        </p:nvSpPr>
+        <p:spPr>
+          <a:xfrm>
+            <a:off x="8028432" y="2359152"/>
+            <a:ext cx="402336" cy="704088"/>
+          </a:xfrm>
+          <a:prstGeom prst="line">
+            <a:avLst/>
+          </a:prstGeom>
+          <a:noFill/>
+          <a:ln w="11430">
+            <a:solidFill>
+              <a:srgbClr val="7F9D84"/>
+            </a:solidFill>
+            <a:prstDash val="solid"/>
+          </a:ln>
+        </p:spPr>
+      </p:sp>
+      <p:sp>
+        <p:nvSpPr>
+          <p:cNvPr id="28" name="Shape 26"/>
+          <p:cNvSpPr/>
+          <p:nvPr/>
+        </p:nvSpPr>
+        <p:spPr>
+          <a:xfrm>
+            <a:off x="7882128" y="2249424"/>
+            <a:ext cx="786384" cy="310896"/>
           </a:xfrm>
           <a:prstGeom prst="roundRect">
             <a:avLst>
-              <a:gd name="adj" fmla="val 2632"/>
+              <a:gd name="adj" fmla="val 11765"/>
             </a:avLst>
           </a:prstGeom>
           <a:solidFill>
@@ -14674,14 +14784,14 @@
       </p:sp>
       <p:sp>
         <p:nvSpPr>
-          <p:cNvPr id="25" name="Text 23"/>
-          <p:cNvSpPr/>
-          <p:nvPr/>
-        </p:nvSpPr>
-        <p:spPr>
-          <a:xfrm>
-            <a:off x="7918704" y="2103120"/>
-            <a:ext cx="822960" cy="384048"/>
+          <p:cNvPr id="29" name="Text 27"/>
+          <p:cNvSpPr/>
+          <p:nvPr/>
+        </p:nvSpPr>
+        <p:spPr>
+          <a:xfrm>
+            <a:off x="7973568" y="2350008"/>
+            <a:ext cx="603504" cy="91440"/>
           </a:xfrm>
           <a:prstGeom prst="rect">
             <a:avLst/>
@@ -14695,34 +14805,125 @@
           </a:bodyPr>
           <a:lstStyle/>
           <a:p>
-            <a:pPr indent="0" marL="0">
-              <a:buNone/>
-            </a:pPr>
-            <a:r>
-              <a:rPr lang="en-US" sz="2100" b="1" dirty="0">
+            <a:pPr algn="ctr" indent="0" marL="0">
+              <a:buNone/>
+            </a:pPr>
+            <a:r>
+              <a:rPr lang="en-US" sz="680" b="1" dirty="0">
                 <a:solidFill>
                   <a:srgbClr val="487052"/>
                 </a:solidFill>
-                <a:latin typeface="Aptos" pitchFamily="34" charset="0"/>
-                <a:ea typeface="Aptos" pitchFamily="34" charset="-122"/>
-                <a:cs typeface="Aptos" pitchFamily="34" charset="-120"/>
-              </a:rPr>
-              <a:t>10%</a:t>
-            </a:r>
-            <a:endParaRPr lang="en-US" sz="2100" dirty="0"/>
-          </a:p>
-        </p:txBody>
-      </p:sp>
-      <p:sp>
-        <p:nvSpPr>
-          <p:cNvPr id="26" name="Text 24"/>
-          <p:cNvSpPr/>
-          <p:nvPr/>
-        </p:nvSpPr>
-        <p:spPr>
-          <a:xfrm>
-            <a:off x="8759952" y="2167128"/>
-            <a:ext cx="1371600" cy="201168"/>
+                <a:latin typeface="Microsoft YaHei" pitchFamily="34" charset="0"/>
+                <a:ea typeface="Microsoft YaHei" pitchFamily="34" charset="-122"/>
+                <a:cs typeface="Microsoft YaHei" pitchFamily="34" charset="-120"/>
+              </a:rPr>
+              <a:t>价格</a:t>
+            </a:r>
+            <a:endParaRPr lang="en-US" sz="680" dirty="0"/>
+          </a:p>
+        </p:txBody>
+      </p:sp>
+      <p:sp>
+        <p:nvSpPr>
+          <p:cNvPr id="30" name="Text 28"/>
+          <p:cNvSpPr/>
+          <p:nvPr/>
+        </p:nvSpPr>
+        <p:spPr>
+          <a:xfrm>
+            <a:off x="7863840" y="1956816"/>
+            <a:ext cx="822960" cy="219456"/>
+          </a:xfrm>
+          <a:prstGeom prst="rect">
+            <a:avLst/>
+          </a:prstGeom>
+          <a:noFill/>
+          <a:ln/>
+        </p:spPr>
+        <p:txBody>
+          <a:bodyPr wrap="square" lIns="0" tIns="0" rIns="0" bIns="0" rtlCol="0" anchor="t">
+            <a:normAutofit/>
+          </a:bodyPr>
+          <a:lstStyle/>
+          <a:p>
+            <a:pPr algn="ctr" indent="0" marL="0">
+              <a:buNone/>
+            </a:pPr>
+            <a:r>
+              <a:rPr lang="en-US" sz="640" dirty="0">
+                <a:solidFill>
+                  <a:srgbClr val="121212"/>
+                </a:solidFill>
+                <a:latin typeface="Microsoft YaHei" pitchFamily="34" charset="0"/>
+                <a:ea typeface="Microsoft YaHei" pitchFamily="34" charset="-122"/>
+                <a:cs typeface="Microsoft YaHei" pitchFamily="34" charset="-120"/>
+              </a:rPr>
+              <a:t>锂矿三季报业绩高增</a:t>
+            </a:r>
+            <a:endParaRPr lang="en-US" sz="640" dirty="0"/>
+          </a:p>
+        </p:txBody>
+      </p:sp>
+      <p:sp>
+        <p:nvSpPr>
+          <p:cNvPr id="31" name="Shape 29"/>
+          <p:cNvSpPr/>
+          <p:nvPr/>
+        </p:nvSpPr>
+        <p:spPr>
+          <a:xfrm>
+            <a:off x="8686800" y="3063240"/>
+            <a:ext cx="402336" cy="685800"/>
+          </a:xfrm>
+          <a:prstGeom prst="line">
+            <a:avLst/>
+          </a:prstGeom>
+          <a:noFill/>
+          <a:ln w="11430">
+            <a:solidFill>
+              <a:srgbClr val="7F9D84"/>
+            </a:solidFill>
+            <a:prstDash val="solid"/>
+          </a:ln>
+        </p:spPr>
+      </p:sp>
+      <p:sp>
+        <p:nvSpPr>
+          <p:cNvPr id="32" name="Shape 30"/>
+          <p:cNvSpPr/>
+          <p:nvPr/>
+        </p:nvSpPr>
+        <p:spPr>
+          <a:xfrm>
+            <a:off x="8540496" y="3639312"/>
+            <a:ext cx="786384" cy="310896"/>
+          </a:xfrm>
+          <a:prstGeom prst="roundRect">
+            <a:avLst>
+              <a:gd name="adj" fmla="val 11765"/>
+            </a:avLst>
+          </a:prstGeom>
+          <a:solidFill>
+            <a:srgbClr val="F4FAF6"/>
+          </a:solidFill>
+          <a:ln w="7620">
+            <a:solidFill>
+              <a:srgbClr val="DADADA"/>
+            </a:solidFill>
+            <a:prstDash val="solid"/>
+          </a:ln>
+        </p:spPr>
+      </p:sp>
+      <p:sp>
+        <p:nvSpPr>
+          <p:cNvPr id="33" name="Text 31"/>
+          <p:cNvSpPr/>
+          <p:nvPr/>
+        </p:nvSpPr>
+        <p:spPr>
+          <a:xfrm>
+            <a:off x="8631936" y="3739896"/>
+            <a:ext cx="603504" cy="91440"/>
           </a:xfrm>
           <a:prstGeom prst="rect">
             <a:avLst/>
@@ -14736,11 +14937,52 @@
           </a:bodyPr>
           <a:lstStyle/>
           <a:p>
-            <a:pPr indent="0" marL="0">
-              <a:buNone/>
-            </a:pPr>
-            <a:r>
-              <a:rPr lang="en-US" sz="820" b="1" dirty="0">
+            <a:pPr algn="ctr" indent="0" marL="0">
+              <a:buNone/>
+            </a:pPr>
+            <a:r>
+              <a:rPr lang="en-US" sz="680" b="1" dirty="0">
+                <a:solidFill>
+                  <a:srgbClr val="487052"/>
+                </a:solidFill>
+                <a:latin typeface="Microsoft YaHei" pitchFamily="34" charset="0"/>
+                <a:ea typeface="Microsoft YaHei" pitchFamily="34" charset="-122"/>
+                <a:cs typeface="Microsoft YaHei" pitchFamily="34" charset="-120"/>
+              </a:rPr>
+              <a:t>成本</a:t>
+            </a:r>
+            <a:endParaRPr lang="en-US" sz="680" dirty="0"/>
+          </a:p>
+        </p:txBody>
+      </p:sp>
+      <p:sp>
+        <p:nvSpPr>
+          <p:cNvPr id="34" name="Text 32"/>
+          <p:cNvSpPr/>
+          <p:nvPr/>
+        </p:nvSpPr>
+        <p:spPr>
+          <a:xfrm>
+            <a:off x="8522208" y="4005072"/>
+            <a:ext cx="822960" cy="219456"/>
+          </a:xfrm>
+          <a:prstGeom prst="rect">
+            <a:avLst/>
+          </a:prstGeom>
+          <a:noFill/>
+          <a:ln/>
+        </p:spPr>
+        <p:txBody>
+          <a:bodyPr wrap="square" lIns="0" tIns="0" rIns="0" bIns="0" rtlCol="0" anchor="t">
+            <a:normAutofit/>
+          </a:bodyPr>
+          <a:lstStyle/>
+          <a:p>
+            <a:pPr algn="ctr" indent="0" marL="0">
+              <a:buNone/>
+            </a:pPr>
+            <a:r>
+              <a:rPr lang="en-US" sz="640" dirty="0">
                 <a:solidFill>
                   <a:srgbClr val="121212"/>
                 </a:solidFill>
@@ -14748,22 +14990,113 @@
                 <a:ea typeface="Microsoft YaHei" pitchFamily="34" charset="-122"/>
                 <a:cs typeface="Microsoft YaHei" pitchFamily="34" charset="-120"/>
               </a:rPr>
-              <a:t>可能加剧行业供给竞争</a:t>
-            </a:r>
-            <a:endParaRPr lang="en-US" sz="820" dirty="0"/>
-          </a:p>
-        </p:txBody>
-      </p:sp>
-      <p:sp>
-        <p:nvSpPr>
-          <p:cNvPr id="27" name="Text 25"/>
-          <p:cNvSpPr/>
-          <p:nvPr/>
-        </p:nvSpPr>
-        <p:spPr>
-          <a:xfrm>
-            <a:off x="7918704" y="2578608"/>
-            <a:ext cx="2176272" cy="512064"/>
+              <a:t>高压实产品迭代可能</a:t>
+            </a:r>
+            <a:endParaRPr lang="en-US" sz="640" dirty="0"/>
+          </a:p>
+        </p:txBody>
+      </p:sp>
+      <p:sp>
+        <p:nvSpPr>
+          <p:cNvPr id="35" name="Shape 33"/>
+          <p:cNvSpPr/>
+          <p:nvPr/>
+        </p:nvSpPr>
+        <p:spPr>
+          <a:xfrm>
+            <a:off x="9345168" y="2359152"/>
+            <a:ext cx="402336" cy="704088"/>
+          </a:xfrm>
+          <a:prstGeom prst="line">
+            <a:avLst/>
+          </a:prstGeom>
+          <a:noFill/>
+          <a:ln w="11430">
+            <a:solidFill>
+              <a:srgbClr val="7F9D84"/>
+            </a:solidFill>
+            <a:prstDash val="solid"/>
+          </a:ln>
+        </p:spPr>
+      </p:sp>
+      <p:sp>
+        <p:nvSpPr>
+          <p:cNvPr id="36" name="Shape 34"/>
+          <p:cNvSpPr/>
+          <p:nvPr/>
+        </p:nvSpPr>
+        <p:spPr>
+          <a:xfrm>
+            <a:off x="9198864" y="2249424"/>
+            <a:ext cx="786384" cy="310896"/>
+          </a:xfrm>
+          <a:prstGeom prst="roundRect">
+            <a:avLst>
+              <a:gd name="adj" fmla="val 11765"/>
+            </a:avLst>
+          </a:prstGeom>
+          <a:solidFill>
+            <a:srgbClr val="F4FAF6"/>
+          </a:solidFill>
+          <a:ln w="7620">
+            <a:solidFill>
+              <a:srgbClr val="DADADA"/>
+            </a:solidFill>
+            <a:prstDash val="solid"/>
+          </a:ln>
+        </p:spPr>
+      </p:sp>
+      <p:sp>
+        <p:nvSpPr>
+          <p:cNvPr id="37" name="Text 35"/>
+          <p:cNvSpPr/>
+          <p:nvPr/>
+        </p:nvSpPr>
+        <p:spPr>
+          <a:xfrm>
+            <a:off x="9290304" y="2350008"/>
+            <a:ext cx="603504" cy="91440"/>
+          </a:xfrm>
+          <a:prstGeom prst="rect">
+            <a:avLst/>
+          </a:prstGeom>
+          <a:noFill/>
+          <a:ln/>
+        </p:spPr>
+        <p:txBody>
+          <a:bodyPr wrap="square" lIns="0" tIns="0" rIns="0" bIns="0" rtlCol="0" anchor="ctr">
+            <a:normAutofit/>
+          </a:bodyPr>
+          <a:lstStyle/>
+          <a:p>
+            <a:pPr algn="ctr" indent="0" marL="0">
+              <a:buNone/>
+            </a:pPr>
+            <a:r>
+              <a:rPr lang="en-US" sz="680" b="1" dirty="0">
+                <a:solidFill>
+                  <a:srgbClr val="487052"/>
+                </a:solidFill>
+                <a:latin typeface="Microsoft YaHei" pitchFamily="34" charset="0"/>
+                <a:ea typeface="Microsoft YaHei" pitchFamily="34" charset="-122"/>
+                <a:cs typeface="Microsoft YaHei" pitchFamily="34" charset="-120"/>
+              </a:rPr>
+              <a:t>利润</a:t>
+            </a:r>
+            <a:endParaRPr lang="en-US" sz="680" dirty="0"/>
+          </a:p>
+        </p:txBody>
+      </p:sp>
+      <p:sp>
+        <p:nvSpPr>
+          <p:cNvPr id="38" name="Text 36"/>
+          <p:cNvSpPr/>
+          <p:nvPr/>
+        </p:nvSpPr>
+        <p:spPr>
+          <a:xfrm>
+            <a:off x="9180576" y="1956816"/>
+            <a:ext cx="822960" cy="219456"/>
           </a:xfrm>
           <a:prstGeom prst="rect">
             <a:avLst/>
@@ -14777,11 +15110,11 @@
           </a:bodyPr>
           <a:lstStyle/>
           <a:p>
-            <a:pPr indent="0" marL="0">
-              <a:buNone/>
-            </a:pPr>
-            <a:r>
-              <a:rPr lang="en-US" sz="840" dirty="0">
+            <a:pPr algn="ctr" indent="0" marL="0">
+              <a:buNone/>
+            </a:pPr>
+            <a:r>
+              <a:rPr lang="en-US" sz="640" dirty="0">
                 <a:solidFill>
                   <a:srgbClr val="121212"/>
                 </a:solidFill>
@@ -14789,22 +15122,22 @@
                 <a:ea typeface="Microsoft YaHei" pitchFamily="34" charset="-122"/>
                 <a:cs typeface="Microsoft YaHei" pitchFamily="34" charset="-120"/>
               </a:rPr>
-              <a:t>公开信息：储能电池产能激增110%可能加剧行业供给竞争，对磷酸铁锂正极材料价格形成压制</a:t>
-            </a:r>
-            <a:endParaRPr lang="en-US" sz="840" dirty="0"/>
-          </a:p>
-        </p:txBody>
-      </p:sp>
-      <p:sp>
-        <p:nvSpPr>
-          <p:cNvPr id="28" name="Text 26"/>
-          <p:cNvSpPr/>
-          <p:nvPr/>
-        </p:nvSpPr>
-        <p:spPr>
-          <a:xfrm>
-            <a:off x="7772400" y="4498848"/>
-            <a:ext cx="2560320" cy="384048"/>
+              <a:t>[5] 上海证券报</a:t>
+            </a:r>
+            <a:endParaRPr lang="en-US" sz="640" dirty="0"/>
+          </a:p>
+        </p:txBody>
+      </p:sp>
+      <p:sp>
+        <p:nvSpPr>
+          <p:cNvPr id="39" name="Text 37"/>
+          <p:cNvSpPr/>
+          <p:nvPr/>
+        </p:nvSpPr>
+        <p:spPr>
+          <a:xfrm>
+            <a:off x="7726680" y="4517136"/>
+            <a:ext cx="2697480" cy="310896"/>
           </a:xfrm>
           <a:prstGeom prst="rect">
             <a:avLst/>
@@ -14822,7 +15155,7 @@
               <a:buNone/>
             </a:pPr>
             <a:r>
-              <a:rPr lang="en-US" sz="800" dirty="0">
+              <a:rPr lang="en-US" sz="760" dirty="0">
                 <a:solidFill>
                   <a:srgbClr val="6D756F"/>
                 </a:solidFill>
@@ -14830,15 +15163,15 @@
                 <a:ea typeface="Microsoft YaHei" pitchFamily="34" charset="-122"/>
                 <a:cs typeface="Microsoft YaHei" pitchFamily="34" charset="-120"/>
               </a:rPr>
-              <a:t>阅读提示：仅按公开报道原文呈现；不同企业、时间和统计范围不可直接横向比较。</a:t>
-            </a:r>
-            <a:endParaRPr lang="en-US" sz="800" dirty="0"/>
-          </a:p>
-        </p:txBody>
-      </p:sp>
-      <p:sp>
-        <p:nvSpPr>
-          <p:cNvPr id="29" name="Shape 27"/>
+              <a:t>参考鱼骨图逻辑，只表达来源文本中的原因和影响。</a:t>
+            </a:r>
+            <a:endParaRPr lang="en-US" sz="760" dirty="0"/>
+          </a:p>
+        </p:txBody>
+      </p:sp>
+      <p:sp>
+        <p:nvSpPr>
+          <p:cNvPr id="40" name="Shape 38"/>
           <p:cNvSpPr/>
           <p:nvPr/>
         </p:nvSpPr>
@@ -14863,7 +15196,7 @@
       </p:sp>
       <p:sp>
         <p:nvSpPr>
-          <p:cNvPr id="30" name="Text 28"/>
+          <p:cNvPr id="41" name="Text 39"/>
           <p:cNvSpPr/>
           <p:nvPr/>
         </p:nvSpPr>
@@ -14902,7 +15235,7 @@
       </p:sp>
       <p:sp>
         <p:nvSpPr>
-          <p:cNvPr id="31" name="Text 29"/>
+          <p:cNvPr id="42" name="Text 40"/>
           <p:cNvSpPr/>
           <p:nvPr/>
         </p:nvSpPr>
@@ -14935,7 +15268,7 @@
                 <a:ea typeface="Microsoft YaHei" pitchFamily="34" charset="-122"/>
                 <a:cs typeface="Microsoft YaHei" pitchFamily="34" charset="-120"/>
               </a:rPr>
-              <a:t>若储能电池产能利用率不足且价格竞争加剧，则可能传导至磷酸铁锂正极材料价格承压，跟踪指标为储能电池月度均价和磷酸铁锂正极材料报价</a:t>
+              <a:t>若碳酸锂价格维持高位且高压实产品溢价扩大，则具备高压实量产能力的企业毛利率可能环比改善，普通产品企业盈利继续承压</a:t>
             </a:r>
             <a:endParaRPr lang="en-US" sz="1020" dirty="0"/>
           </a:p>
@@ -15084,7 +15417,7 @@
                 <a:ea typeface="Aptos" pitchFamily="34" charset="-122"/>
                 <a:cs typeface="Aptos" pitchFamily="34" charset="-120"/>
               </a:rPr>
-              <a:t>2026-10-19</a:t>
+              <a:t>2026-10-23</a:t>
             </a:r>
             <a:endParaRPr lang="en-US" sz="800" dirty="0"/>
           </a:p>
@@ -15399,7 +15732,7 @@
                 <a:ea typeface="Microsoft YaHei" pitchFamily="34" charset="-122"/>
                 <a:cs typeface="Microsoft YaHei" pitchFamily="34" charset="-120"/>
               </a:rPr>
-              <a:t>电动摩托车锂电池强制性国标发布，明年7月实施，将提高小动力电池安全门槛，利好合规产能；商务部将12项光伏技术列入禁止、限制出口名单，虽不直接涉及磷酸铁锂，但反映新能源领域出口管制趋严，需关注电池材料出口政策变化。 [3][6]</a:t>
+              <a:t>动力电池出海面临合规与本土化新考题，海外回收产业体系建设成为关键；电池回收政策关注度提升，城市矿山与回收巨头齐聚陕西，回收体系建设加速。 [6][7]</a:t>
             </a:r>
             <a:endParaRPr lang="en-US" sz="960" dirty="0"/>
           </a:p>
@@ -15440,7 +15773,7 @@
                 <a:ea typeface="Aptos" pitchFamily="34" charset="-122"/>
                 <a:cs typeface="Aptos" pitchFamily="34" charset="-120"/>
               </a:rPr>
-              <a:t>依据：[3][6]</a:t>
+              <a:t>依据：[6][7]</a:t>
             </a:r>
             <a:endParaRPr lang="en-US" sz="740" dirty="0"/>
           </a:p>
@@ -15549,7 +15882,7 @@
                 <a:ea typeface="Microsoft YaHei" pitchFamily="34" charset="-122"/>
                 <a:cs typeface="Microsoft YaHei" pitchFamily="34" charset="-120"/>
               </a:rPr>
-              <a:t>电摩国标信息来自温州新闻，光伏出口管制信息来自国际新能源网，两者均涉及新能源领域政策合规。电摩国标直接提高小动力锂电池安全要求，可能加速低端产能出清；光伏出口管制虽不直接涉及磷酸铁锂，但显示新能源技术出口管理趋严，可能对电池材料出口预期产生间接影响。需验证电摩国标的具体技术指标和过渡期安排，以及电池材料出口政策是否有联动调整。</a:t>
+              <a:t>中国青年网报道合规与本土化成为动力电池出海新考题，海外回收产业体系建设成关键，意味着磷酸铁锂正极材料出口可能面临更严格的碳足迹与回收要求；电池回收产业会议显示回收体系建设加速，但政策具体细则与执行力度需跟踪；出海合规成本可能增加正极材料企业海外布局的复杂性，影响印尼等海外项目经济性。</a:t>
             </a:r>
             <a:endParaRPr lang="en-US" sz="960" dirty="0"/>
           </a:p>
@@ -15683,7 +16016,7 @@
                 <a:ea typeface="Microsoft YaHei" pitchFamily="34" charset="-122"/>
                 <a:cs typeface="Microsoft YaHei" pitchFamily="34" charset="-120"/>
               </a:rPr>
-              <a:t>若电摩国标执行严格且过渡期较短，则可能加速小动力电池行业洗牌，跟踪指标为电摩电池企业认证进度和行业集中度变化；若新能源领域出口管制范围扩大至电池材料，则可能影响磷酸铁锂出口预期，跟踪指标为商务部出口管制清单更新和电池材料出口数据。证据边界限于公开报道，未覆盖政策执行细则和行业反馈。</a:t>
+              <a:t>若海外回收合规要求进一步细化并提高准入门槛，则磷酸铁锂正极材料出海企业需增加回收配套投入，海外项目成本可能上升；若国内电池回收政策加码，则退役电池回收供给增加，可能对原生磷酸铁锂需求形成部分替代。跟踪指标：海外电池回收法规细则、国内电池回收白名单企业数量、退役电池回收量月度数据。</a:t>
             </a:r>
             <a:endParaRPr lang="en-US" sz="960" dirty="0"/>
           </a:p>
@@ -15858,7 +16191,7 @@
                 <a:ea typeface="Microsoft YaHei" pitchFamily="34" charset="-122"/>
                 <a:cs typeface="Microsoft YaHei" pitchFamily="34" charset="-120"/>
               </a:rPr>
-              <a:t>电动摩托车锂电池强制性国标发布，明</a:t>
+              <a:t>动力电池出海面临合规与本土化新考题</a:t>
             </a:r>
             <a:endParaRPr lang="en-US" sz="660" dirty="0"/>
           </a:p>
@@ -15965,7 +16298,7 @@
                 <a:ea typeface="Microsoft YaHei" pitchFamily="34" charset="-122"/>
                 <a:cs typeface="Microsoft YaHei" pitchFamily="34" charset="-120"/>
               </a:rPr>
-              <a:t>商务部将12项光伏技术列入禁止、限</a:t>
+              <a:t>电池回收政策关注度提升，城市矿山与</a:t>
             </a:r>
             <a:endParaRPr lang="en-US" sz="660" dirty="0"/>
           </a:p>
@@ -16072,7 +16405,7 @@
                 <a:ea typeface="Microsoft YaHei" pitchFamily="34" charset="-122"/>
                 <a:cs typeface="Microsoft YaHei" pitchFamily="34" charset="-120"/>
               </a:rPr>
-              <a:t>[3][6] 电摩国标信息来自温州</a:t>
+              <a:t>[6][7] 中国青年网报道合规与</a:t>
             </a:r>
             <a:endParaRPr lang="en-US" sz="660" dirty="0"/>
           </a:p>
@@ -16177,7 +16510,7 @@
                 <a:ea typeface="Microsoft YaHei" pitchFamily="34" charset="-122"/>
                 <a:cs typeface="Microsoft YaHei" pitchFamily="34" charset="-120"/>
               </a:rPr>
-              <a:t>若电摩国标执行严格且过渡期较短，则可能加速小动力电池行业洗牌，跟踪指标为电摩电池企业认证进度和行业集中度变化</a:t>
+              <a:t>若海外回收合规要求进一步细化并提高准入门槛，则磷酸铁锂正极材料出海企业需增加回收配套投入，海外项目成本可能上升</a:t>
             </a:r>
             <a:endParaRPr lang="en-US" sz="1020" dirty="0"/>
           </a:p>
@@ -16326,7 +16659,7 @@
                 <a:ea typeface="Aptos" pitchFamily="34" charset="-122"/>
                 <a:cs typeface="Aptos" pitchFamily="34" charset="-120"/>
               </a:rPr>
-              <a:t>2026-10-19</a:t>
+              <a:t>2026-10-23</a:t>
             </a:r>
             <a:endParaRPr lang="en-US" sz="800" dirty="0"/>
           </a:p>
@@ -16532,7 +16865,7 @@
                 <a:ea typeface="Microsoft YaHei" pitchFamily="34" charset="-122"/>
                 <a:cs typeface="Microsoft YaHei" pitchFamily="34" charset="-120"/>
               </a:rPr>
-              <a:t>2 条公开来源交叉验证｜事实、影响与后续研判</a:t>
+              <a:t>4 条公开来源交叉验证｜事实、影响与后续研判</a:t>
             </a:r>
             <a:endParaRPr lang="en-US" sz="860" dirty="0"/>
           </a:p>
@@ -16641,7 +16974,7 @@
                 <a:ea typeface="Microsoft YaHei" pitchFamily="34" charset="-122"/>
                 <a:cs typeface="Microsoft YaHei" pitchFamily="34" charset="-120"/>
               </a:rPr>
-              <a:t>全国首批锂+钠示范落地河北，大电芯路线推进，钠离子电池在储能场景的替代尝试可能对磷酸铁锂形成潜在竞争；固态电池专家提出2030年实用化量产目标，长期技术路线竞争需持续跟踪。 [5][4]</a:t>
+              <a:t>宝马第六代动力电池在沈阳下线，极狐阿尔法T7电池品牌受关注，长虹高倍率锂电池推进，固态电池项目投产，竞品技术路线多元化对磷酸铁锂需求结构产生影响。 [8][9][10][4]</a:t>
             </a:r>
             <a:endParaRPr lang="en-US" sz="960" dirty="0"/>
           </a:p>
@@ -16682,7 +17015,7 @@
                 <a:ea typeface="Aptos" pitchFamily="34" charset="-122"/>
                 <a:cs typeface="Aptos" pitchFamily="34" charset="-120"/>
               </a:rPr>
-              <a:t>依据：[5][4]</a:t>
+              <a:t>依据：[8][9][10][4]</a:t>
             </a:r>
             <a:endParaRPr lang="en-US" sz="740" dirty="0"/>
           </a:p>
@@ -16791,7 +17124,7 @@
                 <a:ea typeface="Microsoft YaHei" pitchFamily="34" charset="-122"/>
                 <a:cs typeface="Microsoft YaHei" pitchFamily="34" charset="-120"/>
               </a:rPr>
-              <a:t>锂+钠示范项目来自搜狐，固态电池观点来自每日经济新闻，两者分别代表钠离子电池和固态电池对磷酸铁锂的潜在替代。钠离子电池在储能场景的成本优势可能分流部分低端需求；固态电池量产目标在2030年，短期不构成威胁，但长期可能改变动力电池技术格局。需验证钠离子电池储能项目的实际规模和成本，以及固态电池量产时间表的可信度。</a:t>
+              <a:t>宝马第六代动力电池下线可能采用更高能量密度体系，对磷酸铁锂在高端车型的应用份额形成竞争；极狐阿尔法T7电池品牌选择反映车企对电池兜底能力的关注，磷酸铁锂安全性优势仍存；长虹高倍率锂电池与清陶固态电池项目推进，表明细分场景技术路线分化，磷酸铁锂需在成本与安全之间保持平衡。竞品技术进展可能影响磷酸铁锂在动力与储能市场的渗透节奏。</a:t>
             </a:r>
             <a:endParaRPr lang="en-US" sz="960" dirty="0"/>
           </a:p>
@@ -16925,7 +17258,7 @@
                 <a:ea typeface="Microsoft YaHei" pitchFamily="34" charset="-122"/>
                 <a:cs typeface="Microsoft YaHei" pitchFamily="34" charset="-120"/>
               </a:rPr>
-              <a:t>若钠离子电池在储能场景实现规模化应用且成本低于磷酸铁锂，则可能对磷酸铁锂在低端储能市场的份额形成挤压，跟踪指标为钠离子电池储能项目招标规模和度电成本对比；若固态电池在2030年前实现小批量装车，则可能对磷酸铁锂长期需求预期形成扰动，跟踪指标为固态电池装车验证进度和成本下降曲线。证据边界限于公开报道，未覆盖具体项目经济性数据。</a:t>
+              <a:t>若宝马第六代电池等高端竞品加速放量，则磷酸铁锂在高端乘用车市场份额可能受挤压，但在中低端车型与储能领域需求韧性仍存；若固态电池商业化进度超预期，则磷酸铁锂长期需求预期可能下修。跟踪指标：宝马第六代电池配套车型销量、固态电池装车量、磷酸铁锂在动力电池装机占比月度变化。</a:t>
             </a:r>
             <a:endParaRPr lang="en-US" sz="960" dirty="0"/>
           </a:p>
@@ -17171,7 +17504,7 @@
                 <a:ea typeface="Microsoft YaHei" pitchFamily="34" charset="-122"/>
                 <a:cs typeface="Microsoft YaHei" pitchFamily="34" charset="-120"/>
               </a:rPr>
-              <a:t>全国首批锂+钠示范落地河北</a:t>
+              <a:t>宝马第六代动力电池在沈阳下</a:t>
             </a:r>
             <a:endParaRPr lang="en-US" sz="670" dirty="0"/>
           </a:p>
@@ -17278,7 +17611,7 @@
                 <a:ea typeface="Microsoft YaHei" pitchFamily="34" charset="-122"/>
                 <a:cs typeface="Microsoft YaHei" pitchFamily="34" charset="-120"/>
               </a:rPr>
-              <a:t>固态电池专家提出2030年</a:t>
+              <a:t>[8][9][10][4]</a:t>
             </a:r>
             <a:endParaRPr lang="en-US" sz="670" dirty="0"/>
           </a:p>
@@ -17385,7 +17718,7 @@
                 <a:ea typeface="Microsoft YaHei" pitchFamily="34" charset="-122"/>
                 <a:cs typeface="Microsoft YaHei" pitchFamily="34" charset="-120"/>
               </a:rPr>
-              <a:t>[5][4] 锂+钠示范项</a:t>
+              <a:t>极狐阿尔法T7电池品牌选择</a:t>
             </a:r>
             <a:endParaRPr lang="en-US" sz="670" dirty="0"/>
           </a:p>
@@ -17492,7 +17825,7 @@
                 <a:ea typeface="Microsoft YaHei" pitchFamily="34" charset="-122"/>
                 <a:cs typeface="Microsoft YaHei" pitchFamily="34" charset="-120"/>
               </a:rPr>
-              <a:t>全国首批锂+钠示范落地河北</a:t>
+              <a:t>宝马第六代动力电池在沈阳下</a:t>
             </a:r>
             <a:endParaRPr lang="en-US" sz="670" dirty="0"/>
           </a:p>
@@ -17638,7 +17971,7 @@
                 <a:ea typeface="Microsoft YaHei" pitchFamily="34" charset="-122"/>
                 <a:cs typeface="Microsoft YaHei" pitchFamily="34" charset="-120"/>
               </a:rPr>
-              <a:t>若钠离子电池在储能场景实现规模化应用且成本低于磷酸铁锂，则可能对磷酸铁锂在低端储能市场的份额形成挤压，跟踪指标为钠离子电池储能项目招标规模和度电成本对比</a:t>
+              <a:t>若宝马第六代电池等高端竞品加速放量，则磷酸铁锂在高端乘用车市场份额可能受挤压，但在中低端车型与储能领域需求韧性仍存</a:t>
             </a:r>
             <a:endParaRPr lang="en-US" sz="1020" dirty="0"/>
           </a:p>
@@ -17787,7 +18120,7 @@
                 <a:ea typeface="Aptos" pitchFamily="34" charset="-122"/>
                 <a:cs typeface="Aptos" pitchFamily="34" charset="-120"/>
               </a:rPr>
-              <a:t>2026-10-19</a:t>
+              <a:t>2026-10-23</a:t>
             </a:r>
             <a:endParaRPr lang="en-US" sz="800" dirty="0"/>
           </a:p>
@@ -18102,7 +18435,7 @@
                 <a:ea typeface="Microsoft YaHei" pitchFamily="34" charset="-122"/>
                 <a:cs typeface="Microsoft YaHei" pitchFamily="34" charset="-120"/>
               </a:rPr>
-              <a:t>机会方面，宝马第六代电池量产和储能产能激增可能支撑磷酸铁锂需求；风险方面，储能产能快速扩张可能加剧价格竞争，钠离子电池和固态电池长期替代威胁需跟踪；观察电摩国标执行对小动力电池行业集中度的影响。 [1][2][3]</a:t>
+              <a:t>风险方面，高压实产品吨试到量产验证周期不确定，龙蟠印尼项目股权出售或影响海外供给节奏，锂矿业绩分歧反映成本传导不畅；机会方面，高压实技术领先者可能获得结构性溢价，电池回收体系建设加速带来回收料供给增量；需观察高压实订单落地、海外项目股权交割及碳酸锂价格走势。 [2][3][5]</a:t>
             </a:r>
             <a:endParaRPr lang="en-US" sz="960" dirty="0"/>
           </a:p>
@@ -18143,7 +18476,7 @@
                 <a:ea typeface="Aptos" pitchFamily="34" charset="-122"/>
                 <a:cs typeface="Aptos" pitchFamily="34" charset="-120"/>
               </a:rPr>
-              <a:t>依据：[1][2][3]</a:t>
+              <a:t>依据：[2][3][5]</a:t>
             </a:r>
             <a:endParaRPr lang="en-US" sz="740" dirty="0"/>
           </a:p>
@@ -18252,7 +18585,7 @@
                 <a:ea typeface="Microsoft YaHei" pitchFamily="34" charset="-122"/>
                 <a:cs typeface="Microsoft YaHei" pitchFamily="34" charset="-120"/>
               </a:rPr>
-              <a:t>综合今日信息，需求端有宝马量产和储能扩张支撑，但供给端储能产能激增可能带来价格压力，技术路线端钠离子电池和固态电池构成长期竞争。电摩国标从合规端加速小动力电池行业出清。需持续跟踪宝马电池技术路线确认、储能电池开工率和价格走势、钠离子电池储能项目经济性、固态电池量产进展以及电摩国标执行效果。</a:t>
+              <a:t>高压实技术迭代带来产品分化机会，但天原第五代从吨试到批量供货仍需客户验证，存在不及预期风险；龙蟠印尼项目股权出售可能降低其海外资本开支压力，但买方背景与后续建设进度不明，影响海外供给增量判断；锂矿业绩高增与预期分歧并存，中下游盈利压力可能持续；电池回收体系建设加速，长期可能改变原料供给结构。需综合跟踪订单、价格与政策信号。</a:t>
             </a:r>
             <a:endParaRPr lang="en-US" sz="960" dirty="0"/>
           </a:p>
@@ -18386,7 +18719,7 @@
                 <a:ea typeface="Microsoft YaHei" pitchFamily="34" charset="-122"/>
                 <a:cs typeface="Microsoft YaHei" pitchFamily="34" charset="-120"/>
               </a:rPr>
-              <a:t>若宝马第六代电池放量且储能电池开工率维持高位，则磷酸铁锂需求端可能获得双重支撑，跟踪指标为宝马新车型电池供应商公告和储能电池月度产量；若储能电池价格竞争加剧且钠离子电池储能项目规模化落地，则磷酸铁锂盈利压力可能上升，跟踪指标为储能电池均价和钠离子电池招标规模；若电摩国标执行严格，则小动力电池行业集中度可能提升，跟踪指标为合规企业认证进度。证据边界限于公开报道，未覆盖企业实际订单和成本数据。</a:t>
+              <a:t>若天原第五代高压实产品在2026年底前未获批量订单，则市场对其技术兑现预期可能下修，高压实赛道估值分化；若龙蟠印尼项目股权出售后建设进度明确，则海外供给增量预期可重新评估；若碳酸锂价格持续高位，则中下游正极材料企业盈利压力难以缓解。跟踪指标：天原高压实订单公告、印尼项目股权交割及建设进度、碳酸锂现货价格、磷酸铁锂正极材料月度均价。</a:t>
             </a:r>
             <a:endParaRPr lang="en-US" sz="960" dirty="0"/>
           </a:p>
@@ -18632,7 +18965,7 @@
                 <a:ea typeface="Microsoft YaHei" pitchFamily="34" charset="-122"/>
                 <a:cs typeface="Microsoft YaHei" pitchFamily="34" charset="-120"/>
               </a:rPr>
-              <a:t>机会方面，宝马第六代电池量</a:t>
+              <a:t>风险方面，高压实产品吨试到</a:t>
             </a:r>
             <a:endParaRPr lang="en-US" sz="670" dirty="0"/>
           </a:p>
@@ -18739,7 +19072,7 @@
                 <a:ea typeface="Microsoft YaHei" pitchFamily="34" charset="-122"/>
                 <a:cs typeface="Microsoft YaHei" pitchFamily="34" charset="-120"/>
               </a:rPr>
-              <a:t>风险方面，储能产能快速扩张</a:t>
+              <a:t>机会方面，高压实技术领先者</a:t>
             </a:r>
             <a:endParaRPr lang="en-US" sz="670" dirty="0"/>
           </a:p>
@@ -18846,7 +19179,7 @@
                 <a:ea typeface="Microsoft YaHei" pitchFamily="34" charset="-122"/>
                 <a:cs typeface="Microsoft YaHei" pitchFamily="34" charset="-120"/>
               </a:rPr>
-              <a:t>观察电摩国标执行对小动力电</a:t>
+              <a:t>需观察高压实订单落地、海外</a:t>
             </a:r>
             <a:endParaRPr lang="en-US" sz="670" dirty="0"/>
           </a:p>
@@ -18953,7 +19286,7 @@
                 <a:ea typeface="Microsoft YaHei" pitchFamily="34" charset="-122"/>
                 <a:cs typeface="Microsoft YaHei" pitchFamily="34" charset="-120"/>
               </a:rPr>
-              <a:t>机会方面，宝马第六代电池量</a:t>
+              <a:t>风险方面，高压实产品吨试到</a:t>
             </a:r>
             <a:endParaRPr lang="en-US" sz="670" dirty="0"/>
           </a:p>
@@ -19099,7 +19432,7 @@
                 <a:ea typeface="Microsoft YaHei" pitchFamily="34" charset="-122"/>
                 <a:cs typeface="Microsoft YaHei" pitchFamily="34" charset="-120"/>
               </a:rPr>
-              <a:t>若宝马第六代电池放量且储能电池开工率维持高位，则磷酸铁锂需求端可能获得双重支撑，跟踪指标为宝马新车型电池供应商公告和储能电池月度产量</a:t>
+              <a:t>若天原第五代高压实产品在2026年底前未获批量订单，则市场对其技术兑现预期可能下修，高压实赛道估值分化</a:t>
             </a:r>
             <a:endParaRPr lang="en-US" sz="1020" dirty="0"/>
           </a:p>

--- a/docs/reports/latest.pptx
+++ b/docs/reports/latest.pptx
@@ -1876,7 +1876,7 @@
                 <a:ea typeface="Aptos" pitchFamily="34" charset="-122"/>
                 <a:cs typeface="Aptos" pitchFamily="34" charset="-120"/>
               </a:rPr>
-              <a:t>2026-10-23</a:t>
+              <a:t>2026-10-26</a:t>
             </a:r>
             <a:endParaRPr lang="en-US" sz="800" dirty="0"/>
           </a:p>
@@ -2160,7 +2160,7 @@
                 <a:ea typeface="Microsoft YaHei" pitchFamily="34" charset="-122"/>
                 <a:cs typeface="Microsoft YaHei" pitchFamily="34" charset="-120"/>
               </a:rPr>
-              <a:t>今日磷酸铁锂行业信号集中在高压实产品量产推进与海外项目股权调整。天原第五代高压实完成吨试并宣称具备供货能力，龙蟠科技常州锂源第四代高压实稳定量产，技术迭代加速但需验证实际出货。龙蟠拟出售印尼二期项目76%股权，或反映海外扩产策略收缩。锂矿三季报业绩高增但预期分歧显现，成本端压力与盈利分化并存。政策端电池出海合规与回收体系建设成为新考题。整体看，产品升级与产能布局调整并行，需跟踪高压实订单落地及海外项目股权变动对供给格局的影响。</a:t>
+              <a:t>今日磷酸铁锂行业信息以扩产和出海政策变化为主。湖南裕能、万华化学再度扩产磷酸铁锂，显示龙头对需求预期仍偏乐观；新能源汽车出口退税率从13%降至9%，可能抬高出海成本并倒逼电池环节降本。宁德时代三季报高增，机构关注盈利拐点，但需区分其磷酸铁锂业务贡献。整体看，供给扩张与出口政策收紧并存，行业盈利修复仍需观察产能消化和海外需求弹性。</a:t>
             </a:r>
             <a:endParaRPr lang="en-US" sz="1400" dirty="0"/>
           </a:p>
@@ -2898,7 +2898,7 @@
                 <a:ea typeface="Microsoft YaHei" pitchFamily="34" charset="-122"/>
                 <a:cs typeface="Microsoft YaHei" pitchFamily="34" charset="-120"/>
               </a:rPr>
-              <a:t>今日磷酸铁锂行业信号集中在高压实产品量产推进与海外项目股权调整。天原第五代高压实完成吨试并宣称具备供货能力，龙蟠科技常州锂源第四代高压实稳定量</a:t>
+              <a:t>今日磷酸铁锂行业信息以扩产和出海政策变化为主。湖南裕能、万华化学再度扩产磷酸铁锂，显示龙头对需求预期仍偏乐观；新能源汽车出口退税率从13%降至</a:t>
             </a:r>
             <a:endParaRPr lang="en-US" sz="1020" dirty="0"/>
           </a:p>
@@ -3047,7 +3047,7 @@
                 <a:ea typeface="Aptos" pitchFamily="34" charset="-122"/>
                 <a:cs typeface="Aptos" pitchFamily="34" charset="-120"/>
               </a:rPr>
-              <a:t>2026-10-23</a:t>
+              <a:t>2026-10-26</a:t>
             </a:r>
             <a:endParaRPr lang="en-US" sz="800" dirty="0"/>
           </a:p>
@@ -3571,7 +3571,7 @@
                 <a:ea typeface="Microsoft YaHei" pitchFamily="34" charset="-122"/>
                 <a:cs typeface="Microsoft YaHei" pitchFamily="34" charset="-120"/>
               </a:rPr>
-              <a:t>磷酸铁锂材料与电芯公众号广</a:t>
+              <a:t>中国磷酸铁锂行业官方政策与</a:t>
             </a:r>
             <a:endParaRPr lang="en-US" sz="680" dirty="0"/>
           </a:p>
@@ -3612,7 +3612,7 @@
                 <a:ea typeface="Microsoft YaHei" pitchFamily="34" charset="-122"/>
                 <a:cs typeface="Microsoft YaHei" pitchFamily="34" charset="-120"/>
               </a:rPr>
-              <a:t>磷酸铁锂主流生产工艺梳理 之二</a:t>
+              <a:t>【一周投资热点】湖南裕能/万华化学再扩磷酸铁锂！清陶能源80亿元固态电</a:t>
             </a:r>
             <a:endParaRPr lang="en-US" sz="680" dirty="0"/>
           </a:p>
@@ -3653,7 +3653,7 @@
                 <a:ea typeface="Aptos" pitchFamily="34" charset="-122"/>
                 <a:cs typeface="Aptos" pitchFamily="34" charset="-120"/>
               </a:rPr>
-              <a:t>https://weixin.sogou.com/link?url=dn9a_-gY295K0Rci_xozVXfdMkSQTLW6cwJThYulHEtVjXrGTiVgS-97vPXyxte7uM5rDmP7WkV_noKynmHQB1qXa8Fplpd90TqV8jv6YjYB4QZF1nOYMaMFBnO-wmCUDTumpn16YKBM7vXuwH1NdEvZ5MitpcfgN82Jx3anVbdBCCzgJHNYq27SKrHaSe9pIQd9G-UwJFBpE4SMUD25ka5Yh8iOOSaBCWALqYtui3ILobZVHXt4LhuASc_q7H2X2nwR-qqXEYp535pjGOOjYg..&amp;type=2&amp;query=%E9%93%81%E9%94%82 %E9%AB%98%E5%8E%8B%E5%AE%9E %E6%AD%A3%E6%9E%81%E6%9D%90%E6%96%99 %E9%87%8F%E4%BA%A7&amp;token=6D774C44AAEA699B8E89D0F66640099E8FE1D4CD6ADAC948</a:t>
+              <a:t>https://news.google.com/rss/articles/CBMiY0FVX3lxTE9kOGZ3VUJ5X0ZwWFF4QlNQUklDRndUZlBEQXVHZTludjJ3TlEzeHFkd2E5Nk9TdDMwQUFzcDFnQTdyRUhHaUhKUnR0YkFQUzRDeVlTQ3lYeGJSRFozaGxSTlFwbw?oc=5</a:t>
             </a:r>
             <a:endParaRPr lang="en-US" sz="580" dirty="0"/>
           </a:p>
@@ -3758,7 +3758,7 @@
                 <a:ea typeface="Microsoft YaHei" pitchFamily="34" charset="-122"/>
                 <a:cs typeface="Microsoft YaHei" pitchFamily="34" charset="-120"/>
               </a:rPr>
-              <a:t>磷酸铁锂材料与电芯公众号广</a:t>
+              <a:t>中国磷酸铁锂行业官方政策与</a:t>
             </a:r>
             <a:endParaRPr lang="en-US" sz="680" dirty="0"/>
           </a:p>
@@ -3799,7 +3799,7 @@
                 <a:ea typeface="Microsoft YaHei" pitchFamily="34" charset="-122"/>
                 <a:cs typeface="Microsoft YaHei" pitchFamily="34" charset="-120"/>
               </a:rPr>
-              <a:t>“吨试”之后,天原的第五代高压实还差什么?</a:t>
+              <a:t>从13%到9%，新能源汽车出海告别千亿退税红利_车市动态 - 中金在线</a:t>
             </a:r>
             <a:endParaRPr lang="en-US" sz="680" dirty="0"/>
           </a:p>
@@ -3840,7 +3840,7 @@
                 <a:ea typeface="Aptos" pitchFamily="34" charset="-122"/>
                 <a:cs typeface="Aptos" pitchFamily="34" charset="-120"/>
               </a:rPr>
-              <a:t>https://weixin.sogou.com/link?url=dn9a_-gY295K0Rci_xozVXfdMkSQTLW6cwJThYulHEtVjXrGTiVgS-97vPXyxte7HyTUUmlOQah_noKynmHQB1qXa8Fplpd99PIgwt4dzGMVW95fliAPtTzTF22IHPUM9umWY2Itg7keiYdZaTwjokbsyDvwdOcucX33KrP_1ezj0wEgszWX2DzOIjK1OtzowWcouYWyYnu7dIYf_IdVM5tZkQxXFD4MzUO15KXxYdHqdGoqAELlUTGJ-KASco7nZUyvLvI5Q47RtmyIGw2VAg..&amp;type=2&amp;query=%E9%93%81%E9%94%82 %E9%AB%98%E5%8E%8B%E5%AE%9E %E6%AD%A3%E6%9E%81%E6%9D%90%E6%96%99 %E9%87%8F%E4%BA%A7&amp;token=6D775C000949CB3F2C2D7553C5C76E5C2C96E8DA6ADAC949</a:t>
+              <a:t>http://auto.cnfol.com/cheshidongtai/20261026/32407513.shtml</a:t>
             </a:r>
             <a:endParaRPr lang="en-US" sz="580" dirty="0"/>
           </a:p>
@@ -3986,7 +3986,7 @@
                 <a:ea typeface="Microsoft YaHei" pitchFamily="34" charset="-122"/>
                 <a:cs typeface="Microsoft YaHei" pitchFamily="34" charset="-120"/>
               </a:rPr>
-              <a:t>龙蟠科技附属拟出售印尼二期磷酸铁锂正极材料项目76%股权 - 新浪财经</a:t>
+              <a:t>宁德时代三季报业绩高增 机构看好盈利拐点显现 - 手机新浪网</a:t>
             </a:r>
             <a:endParaRPr lang="en-US" sz="680" dirty="0"/>
           </a:p>
@@ -4027,7 +4027,7 @@
                 <a:ea typeface="Aptos" pitchFamily="34" charset="-122"/>
                 <a:cs typeface="Aptos" pitchFamily="34" charset="-120"/>
               </a:rPr>
-              <a:t>https://finance.sina.com.cn/stock/hkstock/ggscyd/2026-10-23/doc-iniweiyr4927932.shtml?cre=tianyi&amp;mod=pchp&amp;loc=8&amp;r=0&amp;rfunc=88&amp;tj=cxvertical_pc_hp&amp;tr=12</a:t>
+              <a:t>https://k.sina.com.cn/article_5953740931_162dee0830670435tw.html</a:t>
             </a:r>
             <a:endParaRPr lang="en-US" sz="580" dirty="0"/>
           </a:p>
@@ -4173,7 +4173,7 @@
                 <a:ea typeface="Microsoft YaHei" pitchFamily="34" charset="-122"/>
                 <a:cs typeface="Microsoft YaHei" pitchFamily="34" charset="-120"/>
               </a:rPr>
-              <a:t>总投资80亿元！清陶动力固态电池项目一期在江苏苏州投产 - https</a:t>
+              <a:t>锂电化成为电摩起飞关键，但谁更值得渠道“押注”？ - 手机搜狐网</a:t>
             </a:r>
             <a:endParaRPr lang="en-US" sz="680" dirty="0"/>
           </a:p>
@@ -4214,7 +4214,7 @@
                 <a:ea typeface="Aptos" pitchFamily="34" charset="-122"/>
                 <a:cs typeface="Aptos" pitchFamily="34" charset="-120"/>
               </a:rPr>
-              <a:t>https://www.itdcw.com/news/ycnews/102215W542026.html</a:t>
+              <a:t>https://m.sohu.com/a/1092685047_121017563?scm=10001.325_13-325_13.0.0-0-0-0-0.5_1334</a:t>
             </a:r>
             <a:endParaRPr lang="en-US" sz="580" dirty="0"/>
           </a:p>
@@ -4360,7 +4360,7 @@
                 <a:ea typeface="Microsoft YaHei" pitchFamily="34" charset="-122"/>
                 <a:cs typeface="Microsoft YaHei" pitchFamily="34" charset="-120"/>
               </a:rPr>
-              <a:t>锂矿三季报业绩高增背后隐现预期分歧 - 上海证券报电子版</a:t>
+              <a:t>吉尔吉斯斯坦将设立超850个废旧电池环保回收箱 - TV BRICS</a:t>
             </a:r>
             <a:endParaRPr lang="en-US" sz="680" dirty="0"/>
           </a:p>
@@ -4401,7 +4401,7 @@
                 <a:ea typeface="Aptos" pitchFamily="34" charset="-122"/>
                 <a:cs typeface="Aptos" pitchFamily="34" charset="-120"/>
               </a:rPr>
-              <a:t>https://paper.cnstock.com/html/2026-10/23/content_2280325.htm</a:t>
+              <a:t>https://tvbrics.com/cn/news/kyrgyzstan-to-install-over-850-eco-boxes-for-used-battery-collection/</a:t>
             </a:r>
             <a:endParaRPr lang="en-US" sz="580" dirty="0"/>
           </a:p>
@@ -4547,7 +4547,7 @@
                 <a:ea typeface="Microsoft YaHei" pitchFamily="34" charset="-122"/>
                 <a:cs typeface="Microsoft YaHei" pitchFamily="34" charset="-120"/>
               </a:rPr>
-              <a:t>合规、本土化成动力电池出海新考题 海外回收产业体系建设成关键 - 中国</a:t>
+              <a:t>废旧锂电池如何变废为宝一套完整破碎分选设备全流程揭秘 - 手机网易网</a:t>
             </a:r>
             <a:endParaRPr lang="en-US" sz="680" dirty="0"/>
           </a:p>
@@ -4588,7 +4588,7 @@
                 <a:ea typeface="Aptos" pitchFamily="34" charset="-122"/>
                 <a:cs typeface="Aptos" pitchFamily="34" charset="-120"/>
               </a:rPr>
-              <a:t>https://auto.youth.cn/xw/202610/t20261022_16927958.htm</a:t>
+              <a:t>https://www.163.com/dy/article/LA34VCMF0553NYPG.html</a:t>
             </a:r>
             <a:endParaRPr lang="en-US" sz="580" dirty="0"/>
           </a:p>
@@ -4693,7 +4693,7 @@
                 <a:ea typeface="Microsoft YaHei" pitchFamily="34" charset="-122"/>
                 <a:cs typeface="Microsoft YaHei" pitchFamily="34" charset="-120"/>
               </a:rPr>
-              <a:t>中国磷酸铁锂行业官方政策与</a:t>
+              <a:t>中国电池网</a:t>
             </a:r>
             <a:endParaRPr lang="en-US" sz="680" dirty="0"/>
           </a:p>
@@ -4734,7 +4734,7 @@
                 <a:ea typeface="Microsoft YaHei" pitchFamily="34" charset="-122"/>
                 <a:cs typeface="Microsoft YaHei" pitchFamily="34" charset="-120"/>
               </a:rPr>
-              <a:t>城市矿山来了！电池生产、运营、回收巨头齐聚陕西 - https://w</a:t>
+              <a:t>【正极材料周报】贵州一含60万吨磷酸铁锂项目传新进展！锂业巨头前三季度</a:t>
             </a:r>
             <a:endParaRPr lang="en-US" sz="680" dirty="0"/>
           </a:p>
@@ -4775,7 +4775,7 @@
                 <a:ea typeface="Aptos" pitchFamily="34" charset="-122"/>
                 <a:cs typeface="Aptos" pitchFamily="34" charset="-120"/>
               </a:rPr>
-              <a:t>https://www.itdcw.com/news/qiye/102215WF2026.html</a:t>
+              <a:t>https://www.itdcw.com/news/dczk/101915V592026.html</a:t>
             </a:r>
             <a:endParaRPr lang="en-US" sz="580" dirty="0"/>
           </a:p>
@@ -4880,7 +4880,7 @@
                 <a:ea typeface="Microsoft YaHei" pitchFamily="34" charset="-122"/>
                 <a:cs typeface="Microsoft YaHei" pitchFamily="34" charset="-120"/>
               </a:rPr>
-              <a:t>中国磷酸铁锂行业官方政策与</a:t>
+              <a:t>中国电池网</a:t>
             </a:r>
             <a:endParaRPr lang="en-US" sz="680" dirty="0"/>
           </a:p>
@@ -4921,7 +4921,7 @@
                 <a:ea typeface="Microsoft YaHei" pitchFamily="34" charset="-122"/>
                 <a:cs typeface="Microsoft YaHei" pitchFamily="34" charset="-120"/>
               </a:rPr>
-              <a:t>宝马第六代动力电池在沈阳下线 - 搜狐</a:t>
+              <a:t>我国研发新型无钴高镍正极材料 显著提升快充效率与循环寿命_电池网</a:t>
             </a:r>
             <a:endParaRPr lang="en-US" sz="680" dirty="0"/>
           </a:p>
@@ -4962,7 +4962,7 @@
                 <a:ea typeface="Aptos" pitchFamily="34" charset="-122"/>
                 <a:cs typeface="Aptos" pitchFamily="34" charset="-120"/>
               </a:rPr>
-              <a:t>https://news.google.com/rss/articles/CBMijAFBVV95cUxNUURqaXpHaXJXTkhMWm1FVTRKck8zX29BakMtekI3bWlOQm53SU5Pbkh6OTg3NjVKS2w4VEl2eVVzZEhibGZFbGtEbnFyb2VNVmk4dWVXSW1XZWkxcGJ1RG5JUk4xZXpuMGl3aDZBYmthX0RySHF0VExFXzdKTTNmOF8tWmd2UHJiUGkyTQ?oc=5</a:t>
+              <a:t>https://www.itdcw.com/news/focus/100415Rb2026.html</a:t>
             </a:r>
             <a:endParaRPr lang="en-US" sz="580" dirty="0"/>
           </a:p>
@@ -5067,7 +5067,7 @@
                 <a:ea typeface="Microsoft YaHei" pitchFamily="34" charset="-122"/>
                 <a:cs typeface="Microsoft YaHei" pitchFamily="34" charset="-120"/>
               </a:rPr>
-              <a:t>中国磷酸铁锂行业官方政策与</a:t>
+              <a:t>中国电池网</a:t>
             </a:r>
             <a:endParaRPr lang="en-US" sz="680" dirty="0"/>
           </a:p>
@@ -5108,7 +5108,7 @@
                 <a:ea typeface="Microsoft YaHei" pitchFamily="34" charset="-122"/>
                 <a:cs typeface="Microsoft YaHei" pitchFamily="34" charset="-120"/>
               </a:rPr>
-              <a:t>选电芯更要看兜底，极狐阿尔法T7电池什么品牌 - 新浪网</a:t>
+              <a:t>同体积容量击穿行业纪录！多氟多两款大圆柱磷酸铁锂换电方案发布_电池网</a:t>
             </a:r>
             <a:endParaRPr lang="en-US" sz="680" dirty="0"/>
           </a:p>
@@ -5149,7 +5149,7 @@
                 <a:ea typeface="Aptos" pitchFamily="34" charset="-122"/>
                 <a:cs typeface="Aptos" pitchFamily="34" charset="-120"/>
               </a:rPr>
-              <a:t>https://news.google.com/rss/articles/CBMif0FVX3lxTE9RalhvVWFTbzNJbE5NVHluQ09jbXJHaHZPYndYaGt1VnpTV01IbEU5ZHkydnRfSUpQYUI0eWNjcVY3VjkzRjlBRTJnc1JaRlQ1NGlIajJISFVONzhUTTFMTm81dGFwT09wVmN1LXBSak9uekJsWFV2OHo5dTktVlk?oc=5</a:t>
+              <a:t>https://www.itdcw.com/news/chanpinxinwen/06251562M2026.html</a:t>
             </a:r>
             <a:endParaRPr lang="en-US" sz="580" dirty="0"/>
           </a:p>
@@ -5254,7 +5254,7 @@
                 <a:ea typeface="Microsoft YaHei" pitchFamily="34" charset="-122"/>
                 <a:cs typeface="Microsoft YaHei" pitchFamily="34" charset="-120"/>
               </a:rPr>
-              <a:t>中国磷酸铁锂行业官方政策与</a:t>
+              <a:t>中国电池网</a:t>
             </a:r>
             <a:endParaRPr lang="en-US" sz="680" dirty="0"/>
           </a:p>
@@ -5295,7 +5295,7 @@
                 <a:ea typeface="Microsoft YaHei" pitchFamily="34" charset="-122"/>
                 <a:cs typeface="Microsoft YaHei" pitchFamily="34" charset="-120"/>
               </a:rPr>
-              <a:t>长虹：一块高倍率锂电池的“新长征” - 川观新闻</a:t>
+              <a:t>磷酸铁锂动力型电池与磷酸铁锂储能型电池的区别分析_电池网</a:t>
             </a:r>
             <a:endParaRPr lang="en-US" sz="680" dirty="0"/>
           </a:p>
@@ -5336,7 +5336,7 @@
                 <a:ea typeface="Aptos" pitchFamily="34" charset="-122"/>
                 <a:cs typeface="Aptos" pitchFamily="34" charset="-120"/>
               </a:rPr>
-              <a:t>https://cbgc.scol.com.cn/news/8081041</a:t>
+              <a:t>https://www.itdcw.com/news/dianchibaike/06301359262023.html</a:t>
             </a:r>
             <a:endParaRPr lang="en-US" sz="580" dirty="0"/>
           </a:p>
@@ -5441,7 +5441,7 @@
                 <a:ea typeface="Microsoft YaHei" pitchFamily="34" charset="-122"/>
                 <a:cs typeface="Microsoft YaHei" pitchFamily="34" charset="-120"/>
               </a:rPr>
-              <a:t>中国电池网</a:t>
+              <a:t>鑫椤锂电</a:t>
             </a:r>
             <a:endParaRPr lang="en-US" sz="680" dirty="0"/>
           </a:p>
@@ -5482,7 +5482,7 @@
                 <a:ea typeface="Microsoft YaHei" pitchFamily="34" charset="-122"/>
                 <a:cs typeface="Microsoft YaHei" pitchFamily="34" charset="-120"/>
               </a:rPr>
-              <a:t>中国电池网</a:t>
+              <a:t>鑫椤锂电</a:t>
             </a:r>
             <a:endParaRPr lang="en-US" sz="680" dirty="0"/>
           </a:p>
@@ -5523,7 +5523,7 @@
                 <a:ea typeface="Aptos" pitchFamily="34" charset="-122"/>
                 <a:cs typeface="Aptos" pitchFamily="34" charset="-120"/>
               </a:rPr>
-              <a:t>https://www.itdcw.com/</a:t>
+              <a:t>https://www.icbattery.com/</a:t>
             </a:r>
             <a:endParaRPr lang="en-US" sz="580" dirty="0"/>
           </a:p>
@@ -5628,7 +5628,7 @@
                 <a:ea typeface="Microsoft YaHei" pitchFamily="34" charset="-122"/>
                 <a:cs typeface="Microsoft YaHei" pitchFamily="34" charset="-120"/>
               </a:rPr>
-              <a:t>鑫椤锂电</a:t>
+              <a:t>高工锂电</a:t>
             </a:r>
             <a:endParaRPr lang="en-US" sz="680" dirty="0"/>
           </a:p>
@@ -5669,7 +5669,7 @@
                 <a:ea typeface="Microsoft YaHei" pitchFamily="34" charset="-122"/>
                 <a:cs typeface="Microsoft YaHei" pitchFamily="34" charset="-120"/>
               </a:rPr>
-              <a:t>鑫椤锂电</a:t>
+              <a:t>高工锂电</a:t>
             </a:r>
             <a:endParaRPr lang="en-US" sz="680" dirty="0"/>
           </a:p>
@@ -5710,7 +5710,7 @@
                 <a:ea typeface="Aptos" pitchFamily="34" charset="-122"/>
                 <a:cs typeface="Aptos" pitchFamily="34" charset="-120"/>
               </a:rPr>
-              <a:t>https://www.icbattery.com/</a:t>
+              <a:t>https://www.gg-lb.com/</a:t>
             </a:r>
             <a:endParaRPr lang="en-US" sz="580" dirty="0"/>
           </a:p>
@@ -5964,7 +5964,7 @@
                 <a:ea typeface="Aptos" pitchFamily="34" charset="-122"/>
                 <a:cs typeface="Aptos" pitchFamily="34" charset="-120"/>
               </a:rPr>
-              <a:t>2026-10-23</a:t>
+              <a:t>2026-10-26</a:t>
             </a:r>
             <a:endParaRPr lang="en-US" sz="800" dirty="0"/>
           </a:p>
@@ -6488,7 +6488,7 @@
                 <a:ea typeface="Microsoft YaHei" pitchFamily="34" charset="-122"/>
                 <a:cs typeface="Microsoft YaHei" pitchFamily="34" charset="-120"/>
               </a:rPr>
-              <a:t>高工锂电</a:t>
+              <a:t>电池中国</a:t>
             </a:r>
             <a:endParaRPr lang="en-US" sz="680" dirty="0"/>
           </a:p>
@@ -6529,7 +6529,7 @@
                 <a:ea typeface="Microsoft YaHei" pitchFamily="34" charset="-122"/>
                 <a:cs typeface="Microsoft YaHei" pitchFamily="34" charset="-120"/>
               </a:rPr>
-              <a:t>高工锂电</a:t>
+              <a:t>电池中国</a:t>
             </a:r>
             <a:endParaRPr lang="en-US" sz="680" dirty="0"/>
           </a:p>
@@ -6570,7 +6570,7 @@
                 <a:ea typeface="Aptos" pitchFamily="34" charset="-122"/>
                 <a:cs typeface="Aptos" pitchFamily="34" charset="-120"/>
               </a:rPr>
-              <a:t>https://www.gg-lb.com/</a:t>
+              <a:t>https://www.cbea.com/</a:t>
             </a:r>
             <a:endParaRPr lang="en-US" sz="580" dirty="0"/>
           </a:p>
@@ -6675,7 +6675,7 @@
                 <a:ea typeface="Microsoft YaHei" pitchFamily="34" charset="-122"/>
                 <a:cs typeface="Microsoft YaHei" pitchFamily="34" charset="-120"/>
               </a:rPr>
-              <a:t>电池中国</a:t>
+              <a:t>证券时报</a:t>
             </a:r>
             <a:endParaRPr lang="en-US" sz="680" dirty="0"/>
           </a:p>
@@ -6716,7 +6716,7 @@
                 <a:ea typeface="Microsoft YaHei" pitchFamily="34" charset="-122"/>
                 <a:cs typeface="Microsoft YaHei" pitchFamily="34" charset="-120"/>
               </a:rPr>
-              <a:t>电池中国</a:t>
+              <a:t>证券时报</a:t>
             </a:r>
             <a:endParaRPr lang="en-US" sz="680" dirty="0"/>
           </a:p>
@@ -6757,7 +6757,7 @@
                 <a:ea typeface="Aptos" pitchFamily="34" charset="-122"/>
                 <a:cs typeface="Aptos" pitchFamily="34" charset="-120"/>
               </a:rPr>
-              <a:t>https://www.cbea.com/</a:t>
+              <a:t>https://www.stcn.com/</a:t>
             </a:r>
             <a:endParaRPr lang="en-US" sz="580" dirty="0"/>
           </a:p>
@@ -6862,7 +6862,7 @@
                 <a:ea typeface="Microsoft YaHei" pitchFamily="34" charset="-122"/>
                 <a:cs typeface="Microsoft YaHei" pitchFamily="34" charset="-120"/>
               </a:rPr>
-              <a:t>证券时报</a:t>
+              <a:t>界面新闻</a:t>
             </a:r>
             <a:endParaRPr lang="en-US" sz="680" dirty="0"/>
           </a:p>
@@ -6903,7 +6903,7 @@
                 <a:ea typeface="Microsoft YaHei" pitchFamily="34" charset="-122"/>
                 <a:cs typeface="Microsoft YaHei" pitchFamily="34" charset="-120"/>
               </a:rPr>
-              <a:t>证券时报</a:t>
+              <a:t>界面新闻</a:t>
             </a:r>
             <a:endParaRPr lang="en-US" sz="680" dirty="0"/>
           </a:p>
@@ -6944,7 +6944,7 @@
                 <a:ea typeface="Aptos" pitchFamily="34" charset="-122"/>
                 <a:cs typeface="Aptos" pitchFamily="34" charset="-120"/>
               </a:rPr>
-              <a:t>https://www.stcn.com/</a:t>
+              <a:t>https://www.jiemian.com/</a:t>
             </a:r>
             <a:endParaRPr lang="en-US" sz="580" dirty="0"/>
           </a:p>
@@ -7049,7 +7049,7 @@
                 <a:ea typeface="Microsoft YaHei" pitchFamily="34" charset="-122"/>
                 <a:cs typeface="Microsoft YaHei" pitchFamily="34" charset="-120"/>
               </a:rPr>
-              <a:t>界面新闻</a:t>
+              <a:t>工业和信息化部</a:t>
             </a:r>
             <a:endParaRPr lang="en-US" sz="680" dirty="0"/>
           </a:p>
@@ -7090,7 +7090,7 @@
                 <a:ea typeface="Microsoft YaHei" pitchFamily="34" charset="-122"/>
                 <a:cs typeface="Microsoft YaHei" pitchFamily="34" charset="-120"/>
               </a:rPr>
-              <a:t>锂电产业链周记 | 前三季度国内动力和储能电池出口量增超50% 赛力斯</a:t>
+              <a:t>国新办举行国务院政策例行吹风会 介绍加强中小企业回款难问题治理有关工作</a:t>
             </a:r>
             <a:endParaRPr lang="en-US" sz="680" dirty="0"/>
           </a:p>
@@ -7131,7 +7131,7 @@
                 <a:ea typeface="Aptos" pitchFamily="34" charset="-122"/>
                 <a:cs typeface="Aptos" pitchFamily="34" charset="-120"/>
               </a:rPr>
-              <a:t>https://www.jiemian.com/article/15201129.html</a:t>
+              <a:t>http://www.miit.gov.cn/xwfb/bldhd/art/2026/art_7285ee48244d4f20b0f127c7f013ec11.html</a:t>
             </a:r>
             <a:endParaRPr lang="en-US" sz="580" dirty="0"/>
           </a:p>
@@ -7277,7 +7277,7 @@
                 <a:ea typeface="Microsoft YaHei" pitchFamily="34" charset="-122"/>
                 <a:cs typeface="Microsoft YaHei" pitchFamily="34" charset="-120"/>
               </a:rPr>
-              <a:t>国新办举行国务院政策例行吹风会 介绍加强中小企业回款难问题治理有关工作</a:t>
+              <a:t>四部门关于开展2026年度享受增值税加计抵减政策的集成电路企业清单制定</a:t>
             </a:r>
             <a:endParaRPr lang="en-US" sz="680" dirty="0"/>
           </a:p>
@@ -7318,7 +7318,7 @@
                 <a:ea typeface="Aptos" pitchFamily="34" charset="-122"/>
                 <a:cs typeface="Aptos" pitchFamily="34" charset="-120"/>
               </a:rPr>
-              <a:t>http://www.miit.gov.cn/xwfb/bldhd/art/2026/art_7285ee48244d4f20b0f127c7f013ec11.html</a:t>
+              <a:t>http://www.miit.gov.cn/zwgk/zcwj/wjfb/tz/art/2026/art_7d2e760b4be94217b8f55caec840b30d.html</a:t>
             </a:r>
             <a:endParaRPr lang="en-US" sz="580" dirty="0"/>
           </a:p>
@@ -7464,7 +7464,7 @@
                 <a:ea typeface="Microsoft YaHei" pitchFamily="34" charset="-122"/>
                 <a:cs typeface="Microsoft YaHei" pitchFamily="34" charset="-120"/>
               </a:rPr>
-              <a:t>四部门关于开展2026年度享受增值税加计抵减政策的集成电路企业清单制定</a:t>
+              <a:t>工业和信息化部政策文件库</a:t>
             </a:r>
             <a:endParaRPr lang="en-US" sz="680" dirty="0"/>
           </a:p>
@@ -7505,7 +7505,7 @@
                 <a:ea typeface="Aptos" pitchFamily="34" charset="-122"/>
                 <a:cs typeface="Aptos" pitchFamily="34" charset="-120"/>
               </a:rPr>
-              <a:t>http://www.miit.gov.cn/zwgk/zcwj/wjfb/tz/art/2026/art_7d2e760b4be94217b8f55caec840b30d.html</a:t>
+              <a:t>https://www.miit.gov.cn/search/zcwjk.html?websiteid=110000000000000&amp;pg=&amp;p=&amp;tpl=14&amp;category=183&amp;q=</a:t>
             </a:r>
             <a:endParaRPr lang="en-US" sz="580" dirty="0"/>
           </a:p>
@@ -7651,7 +7651,7 @@
                 <a:ea typeface="Microsoft YaHei" pitchFamily="34" charset="-122"/>
                 <a:cs typeface="Microsoft YaHei" pitchFamily="34" charset="-120"/>
               </a:rPr>
-              <a:t>工业和信息化部政策文件库</a:t>
+              <a:t>最新政策</a:t>
             </a:r>
             <a:endParaRPr lang="en-US" sz="680" dirty="0"/>
           </a:p>
@@ -7692,7 +7692,7 @@
                 <a:ea typeface="Aptos" pitchFamily="34" charset="-122"/>
                 <a:cs typeface="Aptos" pitchFamily="34" charset="-120"/>
               </a:rPr>
-              <a:t>https://www.miit.gov.cn/search/zcwjk.html?websiteid=110000000000000&amp;pg=&amp;p=&amp;tpl=14&amp;category=183&amp;q=</a:t>
+              <a:t>https://www.miit.gov.cn/xwfb/zxzc/index.html</a:t>
             </a:r>
             <a:endParaRPr lang="en-US" sz="580" dirty="0"/>
           </a:p>
@@ -7797,7 +7797,7 @@
                 <a:ea typeface="Microsoft YaHei" pitchFamily="34" charset="-122"/>
                 <a:cs typeface="Microsoft YaHei" pitchFamily="34" charset="-120"/>
               </a:rPr>
-              <a:t>工业和信息化部</a:t>
+              <a:t>国家发展改革委</a:t>
             </a:r>
             <a:endParaRPr lang="en-US" sz="680" dirty="0"/>
           </a:p>
@@ -7838,7 +7838,7 @@
                 <a:ea typeface="Microsoft YaHei" pitchFamily="34" charset="-122"/>
                 <a:cs typeface="Microsoft YaHei" pitchFamily="34" charset="-120"/>
               </a:rPr>
-              <a:t>最新政策</a:t>
+              <a:t>国家发展改革委</a:t>
             </a:r>
             <a:endParaRPr lang="en-US" sz="680" dirty="0"/>
           </a:p>
@@ -7879,7 +7879,7 @@
                 <a:ea typeface="Aptos" pitchFamily="34" charset="-122"/>
                 <a:cs typeface="Aptos" pitchFamily="34" charset="-120"/>
               </a:rPr>
-              <a:t>https://www.miit.gov.cn/xwfb/zxzc/index.html</a:t>
+              <a:t>https://www.ndrc.gov.cn/</a:t>
             </a:r>
             <a:endParaRPr lang="en-US" sz="580" dirty="0"/>
           </a:p>
@@ -7984,7 +7984,7 @@
                 <a:ea typeface="Microsoft YaHei" pitchFamily="34" charset="-122"/>
                 <a:cs typeface="Microsoft YaHei" pitchFamily="34" charset="-120"/>
               </a:rPr>
-              <a:t>国家发展改革委</a:t>
+              <a:t>中华人民共和国中央人民政府</a:t>
             </a:r>
             <a:endParaRPr lang="en-US" sz="680" dirty="0"/>
           </a:p>
@@ -8025,7 +8025,7 @@
                 <a:ea typeface="Microsoft YaHei" pitchFamily="34" charset="-122"/>
                 <a:cs typeface="Microsoft YaHei" pitchFamily="34" charset="-120"/>
               </a:rPr>
-              <a:t>国家发展改革委</a:t>
+              <a:t>中华人民共和国中央人民政府</a:t>
             </a:r>
             <a:endParaRPr lang="en-US" sz="680" dirty="0"/>
           </a:p>
@@ -8066,7 +8066,7 @@
                 <a:ea typeface="Aptos" pitchFamily="34" charset="-122"/>
                 <a:cs typeface="Aptos" pitchFamily="34" charset="-120"/>
               </a:rPr>
-              <a:t>https://www.ndrc.gov.cn/</a:t>
+              <a:t>https://www.gov.cn/</a:t>
             </a:r>
             <a:endParaRPr lang="en-US" sz="580" dirty="0"/>
           </a:p>
@@ -8171,7 +8171,7 @@
                 <a:ea typeface="Microsoft YaHei" pitchFamily="34" charset="-122"/>
                 <a:cs typeface="Microsoft YaHei" pitchFamily="34" charset="-120"/>
               </a:rPr>
-              <a:t>中华人民共和国中央人民政府</a:t>
+              <a:t>生态环境部</a:t>
             </a:r>
             <a:endParaRPr lang="en-US" sz="680" dirty="0"/>
           </a:p>
@@ -8212,7 +8212,7 @@
                 <a:ea typeface="Microsoft YaHei" pitchFamily="34" charset="-122"/>
                 <a:cs typeface="Microsoft YaHei" pitchFamily="34" charset="-120"/>
               </a:rPr>
-              <a:t>中华人民共和国中央人民政府</a:t>
+              <a:t>生态环境部</a:t>
             </a:r>
             <a:endParaRPr lang="en-US" sz="680" dirty="0"/>
           </a:p>
@@ -8253,7 +8253,7 @@
                 <a:ea typeface="Aptos" pitchFamily="34" charset="-122"/>
                 <a:cs typeface="Aptos" pitchFamily="34" charset="-120"/>
               </a:rPr>
-              <a:t>https://www.gov.cn/</a:t>
+              <a:t>https://www.mee.gov.cn/</a:t>
             </a:r>
             <a:endParaRPr lang="en-US" sz="580" dirty="0"/>
           </a:p>
@@ -8358,7 +8358,7 @@
                 <a:ea typeface="Microsoft YaHei" pitchFamily="34" charset="-122"/>
                 <a:cs typeface="Microsoft YaHei" pitchFamily="34" charset="-120"/>
               </a:rPr>
-              <a:t>生态环境部</a:t>
+              <a:t>万润新能源</a:t>
             </a:r>
             <a:endParaRPr lang="en-US" sz="680" dirty="0"/>
           </a:p>
@@ -8399,7 +8399,7 @@
                 <a:ea typeface="Microsoft YaHei" pitchFamily="34" charset="-122"/>
                 <a:cs typeface="Microsoft YaHei" pitchFamily="34" charset="-120"/>
               </a:rPr>
-              <a:t>生态环境部</a:t>
+              <a:t>磷酸铁锂-湖北万润新能源科技股份有限公司_动力电池材料_消费电池材料_</a:t>
             </a:r>
             <a:endParaRPr lang="en-US" sz="680" dirty="0"/>
           </a:p>
@@ -8440,7 +8440,7 @@
                 <a:ea typeface="Aptos" pitchFamily="34" charset="-122"/>
                 <a:cs typeface="Aptos" pitchFamily="34" charset="-120"/>
               </a:rPr>
-              <a:t>https://www.mee.gov.cn/</a:t>
+              <a:t>https://www.hbwanrun.com/application_details/1.html</a:t>
             </a:r>
             <a:endParaRPr lang="en-US" sz="580" dirty="0"/>
           </a:p>
@@ -8545,7 +8545,7 @@
                 <a:ea typeface="Microsoft YaHei" pitchFamily="34" charset="-122"/>
                 <a:cs typeface="Microsoft YaHei" pitchFamily="34" charset="-120"/>
               </a:rPr>
-              <a:t>万润新能源</a:t>
+              <a:t>湖南裕能</a:t>
             </a:r>
             <a:endParaRPr lang="en-US" sz="680" dirty="0"/>
           </a:p>
@@ -8586,7 +8586,7 @@
                 <a:ea typeface="Microsoft YaHei" pitchFamily="34" charset="-122"/>
                 <a:cs typeface="Microsoft YaHei" pitchFamily="34" charset="-120"/>
               </a:rPr>
-              <a:t>磷酸铁锂-湖北万润新能源科技股份有限公司_动力电池材料_消费电池材料_</a:t>
+              <a:t>湖南裕能</a:t>
             </a:r>
             <a:endParaRPr lang="en-US" sz="680" dirty="0"/>
           </a:p>
@@ -8627,7 +8627,7 @@
                 <a:ea typeface="Aptos" pitchFamily="34" charset="-122"/>
                 <a:cs typeface="Aptos" pitchFamily="34" charset="-120"/>
               </a:rPr>
-              <a:t>https://www.hbwanrun.com/application_details/1.html</a:t>
+              <a:t>https://www.yunengchem.com/</a:t>
             </a:r>
             <a:endParaRPr lang="en-US" sz="580" dirty="0"/>
           </a:p>
@@ -8881,7 +8881,7 @@
                 <a:ea typeface="Aptos" pitchFamily="34" charset="-122"/>
                 <a:cs typeface="Aptos" pitchFamily="34" charset="-120"/>
               </a:rPr>
-              <a:t>2026-10-23</a:t>
+              <a:t>2026-10-26</a:t>
             </a:r>
             <a:endParaRPr lang="en-US" sz="800" dirty="0"/>
           </a:p>
@@ -9085,7 +9085,7 @@
                 <a:ea typeface="Microsoft YaHei" pitchFamily="34" charset="-122"/>
                 <a:cs typeface="Microsoft YaHei" pitchFamily="34" charset="-120"/>
               </a:rPr>
-              <a:t>今日磷酸铁锂行业信号集中在高压实产品量产推进与海外项目股权调整。天原第五代高压实完成吨试并宣称具备供货能力，龙蟠科技常州锂源第四代高压实稳定量</a:t>
+              <a:t>今日磷酸铁锂行业信息以扩产和出海政策变化为主。湖南裕能、万华化学再度扩产磷酸铁锂，显示龙头对需求预期仍偏乐观；新能源汽车出口退税率从13%降至</a:t>
             </a:r>
             <a:endParaRPr lang="en-US" sz="940" dirty="0"/>
           </a:p>
@@ -9281,7 +9281,7 @@
                 <a:ea typeface="Microsoft YaHei" pitchFamily="34" charset="-122"/>
                 <a:cs typeface="Microsoft YaHei" pitchFamily="34" charset="-120"/>
               </a:rPr>
-              <a:t>高压实磷酸铁锂技术迭代加速，天原第五代完成吨试并宣称具备供货能力，龙蟠常州锂源第四代已稳定量产；同时龙蟠拟出售印尼二期项目76%股权，海外扩产策略出现调整；锂矿三季报业绩高增</a:t>
+              <a:t>湖南裕能、万华化学再扩磷酸铁锂产能，龙头扩产延续，供给端压力预期未消；新能源汽车出口退税率由13%降至9%，出海成本上升可能向上游电池材料传导；宁德时代三季报高增但机构对盈利</a:t>
             </a:r>
             <a:endParaRPr lang="en-US" sz="920" dirty="0"/>
           </a:p>
@@ -9518,7 +9518,7 @@
                 <a:ea typeface="Microsoft YaHei" pitchFamily="34" charset="-122"/>
                 <a:cs typeface="Microsoft YaHei" pitchFamily="34" charset="-120"/>
               </a:rPr>
-              <a:t>天原第五代高压实磷酸铁锂完成吨试并宣称具备供货能力，龙蟠科技常州锂源第四代高压实产品已稳定量产，行业高压实技术从第四代向第五代演进；液相法德方纳米规划纳米磷酸铁锂34.5万吨</a:t>
+              <a:t>今日信息未出现磷酸铁锂技术路线的直接突破，但清陶能源80亿元固态电池项目一期投产的新闻与磷酸铁锂扩产同周出现，显示固态电池产业化推进对磷酸铁锂长期技术路线构成潜在竞争；电摩锂</a:t>
             </a:r>
             <a:endParaRPr lang="en-US" sz="920" dirty="0"/>
           </a:p>
@@ -9559,7 +9559,7 @@
                 <a:ea typeface="Aptos" pitchFamily="34" charset="-122"/>
                 <a:cs typeface="Aptos" pitchFamily="34" charset="-120"/>
               </a:rPr>
-              <a:t>[2][1]</a:t>
+              <a:t>[1][4]</a:t>
             </a:r>
             <a:endParaRPr lang="en-US" sz="750" dirty="0"/>
           </a:p>
@@ -9755,7 +9755,7 @@
                 <a:ea typeface="Microsoft YaHei" pitchFamily="34" charset="-122"/>
                 <a:cs typeface="Microsoft YaHei" pitchFamily="34" charset="-120"/>
               </a:rPr>
-              <a:t>龙蟠科技附属拟出售印尼二期磷酸铁锂正极材料项目76%股权，海外扩产策略出现调整；德方纳米规划纳米磷酸铁锂34.5万吨/年，国内产能扩张仍在推进；清陶动力固态电池项目一期在苏州</a:t>
+              <a:t>湖南裕能、万华化学再度扩产磷酸铁锂，龙头产能扩张延续，行业供给端压力预期不减；宁德时代三季报业绩高增，作为磷酸铁锂主要客户之一，其排产增长可能对正极材料订单形成支撑，但具体磷</a:t>
             </a:r>
             <a:endParaRPr lang="en-US" sz="920" dirty="0"/>
           </a:p>
@@ -9796,7 +9796,7 @@
                 <a:ea typeface="Aptos" pitchFamily="34" charset="-122"/>
                 <a:cs typeface="Aptos" pitchFamily="34" charset="-120"/>
               </a:rPr>
-              <a:t>[3][4]</a:t>
+              <a:t>[1][3]</a:t>
             </a:r>
             <a:endParaRPr lang="en-US" sz="750" dirty="0"/>
           </a:p>
@@ -9941,7 +9941,7 @@
         <p:spPr>
           <a:xfrm>
             <a:off x="6766560" y="4005072"/>
-            <a:ext cx="877824" cy="54864"/>
+            <a:ext cx="1316736" cy="54864"/>
           </a:xfrm>
           <a:prstGeom prst="rect">
             <a:avLst/>
@@ -9992,7 +9992,7 @@
                 <a:ea typeface="Microsoft YaHei" pitchFamily="34" charset="-122"/>
                 <a:cs typeface="Microsoft YaHei" pitchFamily="34" charset="-120"/>
               </a:rPr>
-              <a:t>锂矿三季报业绩高增背后隐现预期分歧，上游锂矿盈利改善但中下游正极材料成本传导不畅；高压实产品迭代可能带来结构性溢价，但普通磷酸铁锂产品盈利压力仍存。</a:t>
+              <a:t>新能源汽车出口退税率从13%降至9%，可能抬高出海成本并压缩电池厂利润，进而向上游磷酸铁锂正极材料传导降价压力；宁德时代三季报业绩高增，机构看好盈利拐点，但磷酸铁锂环节盈利是</a:t>
             </a:r>
             <a:endParaRPr lang="en-US" sz="920" dirty="0"/>
           </a:p>
@@ -10033,7 +10033,7 @@
                 <a:ea typeface="Aptos" pitchFamily="34" charset="-122"/>
                 <a:cs typeface="Aptos" pitchFamily="34" charset="-120"/>
               </a:rPr>
-              <a:t>[5]</a:t>
+              <a:t>[2][3]</a:t>
             </a:r>
             <a:endParaRPr lang="en-US" sz="750" dirty="0"/>
           </a:p>
@@ -10138,7 +10138,7 @@
                 <a:ea typeface="Microsoft YaHei" pitchFamily="34" charset="-122"/>
                 <a:cs typeface="Microsoft YaHei" pitchFamily="34" charset="-120"/>
               </a:rPr>
-              <a:t>今日磷酸铁锂行业信号集中在高压实产品量产推进与海外项目股权调整。天原第五代高压实完成吨试并宣称具备供货能力，龙蟠科技常州锂源第四代高压实稳定量</a:t>
+              <a:t>今日磷酸铁锂行业信息以扩产和出海政策变化为主。湖南裕能、万华化学再度扩产磷酸铁锂，显示龙头对需求预期仍偏乐观；新能源汽车出口退税率从13%降至</a:t>
             </a:r>
             <a:endParaRPr lang="en-US" sz="1020" dirty="0"/>
           </a:p>
@@ -10287,7 +10287,7 @@
                 <a:ea typeface="Aptos" pitchFamily="34" charset="-122"/>
                 <a:cs typeface="Aptos" pitchFamily="34" charset="-120"/>
               </a:rPr>
-              <a:t>2026-10-23</a:t>
+              <a:t>2026-10-26</a:t>
             </a:r>
             <a:endParaRPr lang="en-US" sz="800" dirty="0"/>
           </a:p>
@@ -10602,7 +10602,7 @@
                 <a:ea typeface="Microsoft YaHei" pitchFamily="34" charset="-122"/>
                 <a:cs typeface="Microsoft YaHei" pitchFamily="34" charset="-120"/>
               </a:rPr>
-              <a:t>高压实磷酸铁锂技术迭代加速，天原第五代完成吨试并宣称具备供货能力，龙蟠常州锂源第四代已稳定量产；同时龙蟠拟出售印尼二期项目76%股权，海外扩产策略出现调整；锂矿三季报业绩高增但预期分歧隐现，成本与盈利压力并存。行业呈现产品升级与产能布局优化并行的特征。 [1][2][3]</a:t>
+              <a:t>湖南裕能、万华化学再扩磷酸铁锂产能，龙头扩产延续，供给端压力预期未消；新能源汽车出口退税率由13%降至9%，出海成本上升可能向上游电池材料传导；宁德时代三季报高增但机构对盈利拐点的判断仍需磷酸铁锂细分数据验证。短期行业核心矛盾仍是产能扩张与需求增速的匹配度。 [1][2][3]</a:t>
             </a:r>
             <a:endParaRPr lang="en-US" sz="960" dirty="0"/>
           </a:p>
@@ -10752,7 +10752,7 @@
                 <a:ea typeface="Microsoft YaHei" pitchFamily="34" charset="-122"/>
                 <a:cs typeface="Microsoft YaHei" pitchFamily="34" charset="-120"/>
               </a:rPr>
-              <a:t>公众号信息显示高压实产品从第四代向第五代推进，技术领先者可能获得溢价，但吨试到量产仍有距离；龙蟠出售印尼项目股权或反映海外建设成本与运营风险上升，需关注其资金回笼用途及对海外供给的影响；锂矿业绩高增与预期分歧并存，说明上游盈利改善但中下游成本传导不畅，需验证碳酸锂价格走势与正极材料企业毛利率变化。</a:t>
+              <a:t>扩产新闻与出口退税下调形成对冲信号：一方面龙头扩产表明对中期需求有信心，另一方面出口政策收紧可能抑制海外新能源汽车增速，进而影响磷酸铁锂正极材料需求。宁德时代业绩高增更多反映其综合竞争力，不能直接等同于磷酸铁锂环节盈利改善。需继续调研：扩产项目的具体投产时间和产能规模；出口退税下调对电池厂海外定价和订单的实际影响；磷酸铁锂正极材料价格和加工费的最新走势。</a:t>
             </a:r>
             <a:endParaRPr lang="en-US" sz="960" dirty="0"/>
           </a:p>
@@ -10886,7 +10886,7 @@
                 <a:ea typeface="Microsoft YaHei" pitchFamily="34" charset="-122"/>
                 <a:cs typeface="Microsoft YaHei" pitchFamily="34" charset="-120"/>
               </a:rPr>
-              <a:t>若天原第五代高压实产品后续获得客户批量订单并稳定出货，则可能推动高压实产品价格带分化，具备技术储备的企业议价能力增强；若龙蟠印尼项目股权出售完成，则可能降低其海外资本开支压力，但需跟踪印尼二期项目后续建设进度及买方背景。跟踪指标：高压实产品月度出货量、印尼项目股权交割公告、碳酸锂现货价格。</a:t>
+              <a:t>若后续披露的扩产项目投产进度快于需求增速，则磷酸铁锂正极材料加工费可能继续承压；若出口退税下调导致新能源汽车海外销量增速放缓，则电池厂可能向上游压价。跟踪指标：磷酸铁锂正极材料周度价格、龙头扩产项目投产公告、新能源汽车月度出口数据。证据边界：当前仅有扩产和退税政策新闻，尚无具体产能释放和订单变化数据。</a:t>
             </a:r>
             <a:endParaRPr lang="en-US" sz="960" dirty="0"/>
           </a:p>
@@ -10969,11 +10969,11 @@
         <p:spPr>
           <a:xfrm>
             <a:off x="7772400" y="1993392"/>
-            <a:ext cx="2560320" cy="1389888"/>
+            <a:ext cx="2560320" cy="786384"/>
           </a:xfrm>
           <a:prstGeom prst="roundRect">
             <a:avLst>
-              <a:gd name="adj" fmla="val 2632"/>
+              <a:gd name="adj" fmla="val 4651"/>
             </a:avLst>
           </a:prstGeom>
           <a:solidFill>
@@ -11014,7 +11014,7 @@
               <a:buNone/>
             </a:pPr>
             <a:r>
-              <a:rPr lang="en-US" sz="2100" b="1" dirty="0">
+              <a:rPr lang="en-US" sz="1600" b="1" dirty="0">
                 <a:solidFill>
                   <a:srgbClr val="487052"/>
                 </a:solidFill>
@@ -11022,9 +11022,9 @@
                 <a:ea typeface="Aptos" pitchFamily="34" charset="-122"/>
                 <a:cs typeface="Aptos" pitchFamily="34" charset="-120"/>
               </a:rPr>
-              <a:t>76%</a:t>
-            </a:r>
-            <a:endParaRPr lang="en-US" sz="2100" dirty="0"/>
+              <a:t>13%</a:t>
+            </a:r>
+            <a:endParaRPr lang="en-US" sz="1600" dirty="0"/>
           </a:p>
         </p:txBody>
       </p:sp>
@@ -11063,7 +11063,7 @@
                 <a:ea typeface="Microsoft YaHei" pitchFamily="34" charset="-122"/>
                 <a:cs typeface="Microsoft YaHei" pitchFamily="34" charset="-120"/>
               </a:rPr>
-              <a:t>股权</a:t>
+              <a:t>降至</a:t>
             </a:r>
             <a:endParaRPr lang="en-US" sz="820" dirty="0"/>
           </a:p>
@@ -11078,7 +11078,7 @@
         <p:spPr>
           <a:xfrm>
             <a:off x="7918704" y="2578608"/>
-            <a:ext cx="2176272" cy="512064"/>
+            <a:ext cx="2176272" cy="201168"/>
           </a:xfrm>
           <a:prstGeom prst="rect">
             <a:avLst/>
@@ -11104,7 +11104,7 @@
                 <a:ea typeface="Microsoft YaHei" pitchFamily="34" charset="-122"/>
                 <a:cs typeface="Microsoft YaHei" pitchFamily="34" charset="-120"/>
               </a:rPr>
-              <a:t>公开信息：同时龙蟠拟出售印尼二期项目76%股权，海外扩产策略出现调整</a:t>
+              <a:t>公开信息：新能源汽车出口退税率由13%降至9%，出海成本上升可能向上</a:t>
             </a:r>
             <a:endParaRPr lang="en-US" sz="840" dirty="0"/>
           </a:p>
@@ -11112,7 +11112,157 @@
       </p:sp>
       <p:sp>
         <p:nvSpPr>
-          <p:cNvPr id="28" name="Text 26"/>
+          <p:cNvPr id="28" name="Shape 26"/>
+          <p:cNvSpPr/>
+          <p:nvPr/>
+        </p:nvSpPr>
+        <p:spPr>
+          <a:xfrm>
+            <a:off x="7772400" y="2926080"/>
+            <a:ext cx="2560320" cy="786384"/>
+          </a:xfrm>
+          <a:prstGeom prst="roundRect">
+            <a:avLst>
+              <a:gd name="adj" fmla="val 4651"/>
+            </a:avLst>
+          </a:prstGeom>
+          <a:solidFill>
+            <a:srgbClr val="FFFFFF"/>
+          </a:solidFill>
+          <a:ln w="7620">
+            <a:solidFill>
+              <a:srgbClr val="DADADA"/>
+            </a:solidFill>
+            <a:prstDash val="solid"/>
+          </a:ln>
+        </p:spPr>
+      </p:sp>
+      <p:sp>
+        <p:nvSpPr>
+          <p:cNvPr id="29" name="Text 27"/>
+          <p:cNvSpPr/>
+          <p:nvPr/>
+        </p:nvSpPr>
+        <p:spPr>
+          <a:xfrm>
+            <a:off x="7918704" y="3035808"/>
+            <a:ext cx="822960" cy="384048"/>
+          </a:xfrm>
+          <a:prstGeom prst="rect">
+            <a:avLst/>
+          </a:prstGeom>
+          <a:noFill/>
+          <a:ln/>
+        </p:spPr>
+        <p:txBody>
+          <a:bodyPr wrap="square" lIns="0" tIns="0" rIns="0" bIns="0" rtlCol="0" anchor="ctr">
+            <a:normAutofit/>
+          </a:bodyPr>
+          <a:lstStyle/>
+          <a:p>
+            <a:pPr indent="0" marL="0">
+              <a:buNone/>
+            </a:pPr>
+            <a:r>
+              <a:rPr lang="en-US" sz="1600" b="1" dirty="0">
+                <a:solidFill>
+                  <a:srgbClr val="487052"/>
+                </a:solidFill>
+                <a:latin typeface="Aptos" pitchFamily="34" charset="0"/>
+                <a:ea typeface="Aptos" pitchFamily="34" charset="-122"/>
+                <a:cs typeface="Aptos" pitchFamily="34" charset="-120"/>
+              </a:rPr>
+              <a:t>9%</a:t>
+            </a:r>
+            <a:endParaRPr lang="en-US" sz="1600" dirty="0"/>
+          </a:p>
+        </p:txBody>
+      </p:sp>
+      <p:sp>
+        <p:nvSpPr>
+          <p:cNvPr id="30" name="Text 28"/>
+          <p:cNvSpPr/>
+          <p:nvPr/>
+        </p:nvSpPr>
+        <p:spPr>
+          <a:xfrm>
+            <a:off x="8759952" y="3099816"/>
+            <a:ext cx="1371600" cy="201168"/>
+          </a:xfrm>
+          <a:prstGeom prst="rect">
+            <a:avLst/>
+          </a:prstGeom>
+          <a:noFill/>
+          <a:ln/>
+        </p:spPr>
+        <p:txBody>
+          <a:bodyPr wrap="square" lIns="0" tIns="0" rIns="0" bIns="0" rtlCol="0" anchor="ctr">
+            <a:normAutofit/>
+          </a:bodyPr>
+          <a:lstStyle/>
+          <a:p>
+            <a:pPr indent="0" marL="0">
+              <a:buNone/>
+            </a:pPr>
+            <a:r>
+              <a:rPr lang="en-US" sz="820" b="1" dirty="0">
+                <a:solidFill>
+                  <a:srgbClr val="121212"/>
+                </a:solidFill>
+                <a:latin typeface="Microsoft YaHei" pitchFamily="34" charset="0"/>
+                <a:ea typeface="Microsoft YaHei" pitchFamily="34" charset="-122"/>
+                <a:cs typeface="Microsoft YaHei" pitchFamily="34" charset="-120"/>
+              </a:rPr>
+              <a:t>源汽车出口退税率由13%降至</a:t>
+            </a:r>
+            <a:endParaRPr lang="en-US" sz="820" dirty="0"/>
+          </a:p>
+        </p:txBody>
+      </p:sp>
+      <p:sp>
+        <p:nvSpPr>
+          <p:cNvPr id="31" name="Text 29"/>
+          <p:cNvSpPr/>
+          <p:nvPr/>
+        </p:nvSpPr>
+        <p:spPr>
+          <a:xfrm>
+            <a:off x="7918704" y="3511296"/>
+            <a:ext cx="2176272" cy="201168"/>
+          </a:xfrm>
+          <a:prstGeom prst="rect">
+            <a:avLst/>
+          </a:prstGeom>
+          <a:noFill/>
+          <a:ln/>
+        </p:spPr>
+        <p:txBody>
+          <a:bodyPr wrap="square" lIns="0" tIns="0" rIns="0" bIns="0" rtlCol="0" anchor="t">
+            <a:normAutofit/>
+          </a:bodyPr>
+          <a:lstStyle/>
+          <a:p>
+            <a:pPr indent="0" marL="0">
+              <a:buNone/>
+            </a:pPr>
+            <a:r>
+              <a:rPr lang="en-US" sz="840" dirty="0">
+                <a:solidFill>
+                  <a:srgbClr val="121212"/>
+                </a:solidFill>
+                <a:latin typeface="Microsoft YaHei" pitchFamily="34" charset="0"/>
+                <a:ea typeface="Microsoft YaHei" pitchFamily="34" charset="-122"/>
+                <a:cs typeface="Microsoft YaHei" pitchFamily="34" charset="-120"/>
+              </a:rPr>
+              <a:t>公开信息：新能源汽车出口退税率由13%降至9%，出海成本上升可能向上</a:t>
+            </a:r>
+            <a:endParaRPr lang="en-US" sz="840" dirty="0"/>
+          </a:p>
+        </p:txBody>
+      </p:sp>
+      <p:sp>
+        <p:nvSpPr>
+          <p:cNvPr id="32" name="Text 30"/>
           <p:cNvSpPr/>
           <p:nvPr/>
         </p:nvSpPr>
@@ -11153,7 +11303,7 @@
       </p:sp>
       <p:sp>
         <p:nvSpPr>
-          <p:cNvPr id="29" name="Shape 27"/>
+          <p:cNvPr id="33" name="Shape 31"/>
           <p:cNvSpPr/>
           <p:nvPr/>
         </p:nvSpPr>
@@ -11178,7 +11328,7 @@
       </p:sp>
       <p:sp>
         <p:nvSpPr>
-          <p:cNvPr id="30" name="Text 28"/>
+          <p:cNvPr id="34" name="Text 32"/>
           <p:cNvSpPr/>
           <p:nvPr/>
         </p:nvSpPr>
@@ -11217,7 +11367,7 @@
       </p:sp>
       <p:sp>
         <p:nvSpPr>
-          <p:cNvPr id="31" name="Text 29"/>
+          <p:cNvPr id="35" name="Text 33"/>
           <p:cNvSpPr/>
           <p:nvPr/>
         </p:nvSpPr>
@@ -11250,7 +11400,7 @@
                 <a:ea typeface="Microsoft YaHei" pitchFamily="34" charset="-122"/>
                 <a:cs typeface="Microsoft YaHei" pitchFamily="34" charset="-120"/>
               </a:rPr>
-              <a:t>若天原第五代高压实产品后续获得客户批量订单并稳定出货，则可能推动高压实产品价格带分化，具备技术储备的企业议价能力增强</a:t>
+              <a:t>若后续披露的扩产项目投产进度快于需求增速，则磷酸铁锂正极材料加工费可能继续承压</a:t>
             </a:r>
             <a:endParaRPr lang="en-US" sz="1020" dirty="0"/>
           </a:p>
@@ -11399,7 +11549,7 @@
                 <a:ea typeface="Aptos" pitchFamily="34" charset="-122"/>
                 <a:cs typeface="Aptos" pitchFamily="34" charset="-120"/>
               </a:rPr>
-              <a:t>2026-10-23</a:t>
+              <a:t>2026-10-26</a:t>
             </a:r>
             <a:endParaRPr lang="en-US" sz="800" dirty="0"/>
           </a:p>
@@ -11714,7 +11864,7 @@
                 <a:ea typeface="Microsoft YaHei" pitchFamily="34" charset="-122"/>
                 <a:cs typeface="Microsoft YaHei" pitchFamily="34" charset="-120"/>
               </a:rPr>
-              <a:t>天原第五代高压实磷酸铁锂完成吨试并宣称具备供货能力，龙蟠科技常州锂源第四代高压实产品已稳定量产，行业高压实技术从第四代向第五代演进；液相法德方纳米规划纳米磷酸铁锂34.5万吨/年，技术路线多元化并行。 [2][1]</a:t>
+              <a:t>今日信息未出现磷酸铁锂技术路线的直接突破，但清陶能源80亿元固态电池项目一期投产的新闻与磷酸铁锂扩产同周出现，显示固态电池产业化推进对磷酸铁锂长期技术路线构成潜在竞争；电摩锂电化趋势则可能为磷酸铁锂在轻型动力领域打开增量应用场景。 [1][4]</a:t>
             </a:r>
             <a:endParaRPr lang="en-US" sz="960" dirty="0"/>
           </a:p>
@@ -11755,7 +11905,7 @@
                 <a:ea typeface="Aptos" pitchFamily="34" charset="-122"/>
                 <a:cs typeface="Aptos" pitchFamily="34" charset="-120"/>
               </a:rPr>
-              <a:t>依据：[2][1]</a:t>
+              <a:t>依据：[1][4]</a:t>
             </a:r>
             <a:endParaRPr lang="en-US" sz="740" dirty="0"/>
           </a:p>
@@ -11864,7 +12014,7 @@
                 <a:ea typeface="Microsoft YaHei" pitchFamily="34" charset="-122"/>
                 <a:cs typeface="Microsoft YaHei" pitchFamily="34" charset="-120"/>
               </a:rPr>
-              <a:t>公众号信息显示高压实产品迭代速度加快，吨试到量产仍需客户验证周期，天原宣称具备供货能力但实际订单落地情况不明；龙蟠第四代稳定量产表明其工艺成熟度较高，可能占据先发优势；德方纳米液相法规划产能较大，但液相法产品压实密度提升难度与成本控制需进一步验证。技术路线分化可能影响不同企业的客户绑定与盈利水平。</a:t>
+              <a:t>固态电池项目投产与磷酸铁锂扩产并存，反映电池技术路线多元化：短期磷酸铁锂仍是主流，但固态电池若加速量产可能分流高端需求。电摩锂电化新闻提到锂电化成为电摩起飞关键，磷酸铁锂因成本和安全优势可能受益于电摩市场增长。需验证：清陶固态电池项目的实际产能和客户导入情况；电摩用磷酸铁锂电池的渗透率和订单规模。</a:t>
             </a:r>
             <a:endParaRPr lang="en-US" sz="960" dirty="0"/>
           </a:p>
@@ -11998,7 +12148,7 @@
                 <a:ea typeface="Microsoft YaHei" pitchFamily="34" charset="-122"/>
                 <a:cs typeface="Microsoft YaHei" pitchFamily="34" charset="-120"/>
               </a:rPr>
-              <a:t>若天原第五代产品在2026年四季度获得头部电芯厂批量订单，则可能带动高压实产品价格溢价扩大，第四代产品价格承压；若德方纳米液相法产能如期释放且压实密度达标，则可能加剧高压实赛道竞争。跟踪指标：天原客户验证公告、德方纳米液相法产品压实密度参数、高压实产品与普通产品价差。</a:t>
+              <a:t>若固态电池项目投产进度超预期且成本快速下降，则磷酸铁锂在高端电动汽车领域的份额可能受到挤压；若电摩锂电化加速且磷酸铁锂成为主流选择，则轻型动力领域可能贡献新增需求。跟踪指标：清陶能源固态电池装车公告、电摩用锂电池出货量及正极材料类型占比。证据边界：固态电池项目刚投产，实际性能和成本数据尚未公开；电摩锂电化新闻未披露具体电池路线占比。</a:t>
             </a:r>
             <a:endParaRPr lang="en-US" sz="960" dirty="0"/>
           </a:p>
@@ -12244,7 +12394,7 @@
                 <a:ea typeface="Microsoft YaHei" pitchFamily="34" charset="-122"/>
                 <a:cs typeface="Microsoft YaHei" pitchFamily="34" charset="-120"/>
               </a:rPr>
-              <a:t>天原第五代高压实磷酸铁锂完</a:t>
+              <a:t>今日信息未出现磷酸铁锂技术</a:t>
             </a:r>
             <a:endParaRPr lang="en-US" sz="670" dirty="0"/>
           </a:p>
@@ -12351,7 +12501,7 @@
                 <a:ea typeface="Microsoft YaHei" pitchFamily="34" charset="-122"/>
                 <a:cs typeface="Microsoft YaHei" pitchFamily="34" charset="-120"/>
               </a:rPr>
-              <a:t>液相法德方纳米规划纳米磷酸</a:t>
+              <a:t>电摩锂电化趋势则可能为磷酸</a:t>
             </a:r>
             <a:endParaRPr lang="en-US" sz="670" dirty="0"/>
           </a:p>
@@ -12458,7 +12608,7 @@
                 <a:ea typeface="Microsoft YaHei" pitchFamily="34" charset="-122"/>
                 <a:cs typeface="Microsoft YaHei" pitchFamily="34" charset="-120"/>
               </a:rPr>
-              <a:t>[2][1] 公众号信息显</a:t>
+              <a:t>[1][4] 固态电池项目</a:t>
             </a:r>
             <a:endParaRPr lang="en-US" sz="670" dirty="0"/>
           </a:p>
@@ -12565,7 +12715,7 @@
                 <a:ea typeface="Microsoft YaHei" pitchFamily="34" charset="-122"/>
                 <a:cs typeface="Microsoft YaHei" pitchFamily="34" charset="-120"/>
               </a:rPr>
-              <a:t>天原第五代高压实磷酸铁锂完</a:t>
+              <a:t>今日信息未出现磷酸铁锂技术</a:t>
             </a:r>
             <a:endParaRPr lang="en-US" sz="670" dirty="0"/>
           </a:p>
@@ -12711,7 +12861,7 @@
                 <a:ea typeface="Microsoft YaHei" pitchFamily="34" charset="-122"/>
                 <a:cs typeface="Microsoft YaHei" pitchFamily="34" charset="-120"/>
               </a:rPr>
-              <a:t>若天原第五代产品在2026年四季度获得头部电芯厂批量订单，则可能带动高压实产品价格溢价扩大，第四代产品价格承压</a:t>
+              <a:t>若固态电池项目投产进度超预期且成本快速下降，则磷酸铁锂在高端电动汽车领域的份额可能受到挤压</a:t>
             </a:r>
             <a:endParaRPr lang="en-US" sz="1020" dirty="0"/>
           </a:p>
@@ -12860,7 +13010,7 @@
                 <a:ea typeface="Aptos" pitchFamily="34" charset="-122"/>
                 <a:cs typeface="Aptos" pitchFamily="34" charset="-120"/>
               </a:rPr>
-              <a:t>2026-10-23</a:t>
+              <a:t>2026-10-26</a:t>
             </a:r>
             <a:endParaRPr lang="en-US" sz="800" dirty="0"/>
           </a:p>
@@ -13175,7 +13325,7 @@
                 <a:ea typeface="Microsoft YaHei" pitchFamily="34" charset="-122"/>
                 <a:cs typeface="Microsoft YaHei" pitchFamily="34" charset="-120"/>
               </a:rPr>
-              <a:t>龙蟠科技附属拟出售印尼二期磷酸铁锂正极材料项目76%股权，海外扩产策略出现调整；德方纳米规划纳米磷酸铁锂34.5万吨/年，国内产能扩张仍在推进；清陶动力固态电池项目一期在苏州投产，技术路线竞争加剧。 [3][4]</a:t>
+              <a:t>湖南裕能、万华化学再度扩产磷酸铁锂，龙头产能扩张延续，行业供给端压力预期不减；宁德时代三季报业绩高增，作为磷酸铁锂主要客户之一，其排产增长可能对正极材料订单形成支撑，但具体磷酸铁锂采购量未披露。 [1][3]</a:t>
             </a:r>
             <a:endParaRPr lang="en-US" sz="960" dirty="0"/>
           </a:p>
@@ -13216,7 +13366,7 @@
                 <a:ea typeface="Aptos" pitchFamily="34" charset="-122"/>
                 <a:cs typeface="Aptos" pitchFamily="34" charset="-120"/>
               </a:rPr>
-              <a:t>依据：[3][4]</a:t>
+              <a:t>依据：[1][3]</a:t>
             </a:r>
             <a:endParaRPr lang="en-US" sz="740" dirty="0"/>
           </a:p>
@@ -13325,7 +13475,7 @@
                 <a:ea typeface="Microsoft YaHei" pitchFamily="34" charset="-122"/>
                 <a:cs typeface="Microsoft YaHei" pitchFamily="34" charset="-120"/>
               </a:rPr>
-              <a:t>龙蟠出售印尼二期项目控股权可能反映海外建设运营成本高企或战略重心回撤，需关注买方身份及项目后续建设是否延期；德方纳米液相法产能规划较大，但分期建设进度与客户绑定情况需跟踪；固态电池项目投产对磷酸铁锂长期需求替代风险有限，但可能分流部分高端应用场景关注度。海外项目股权变动可能影响印尼磷酸铁锂供给增量预期。</a:t>
+              <a:t>扩产新闻与宁德时代业绩高增形成供需两端信号：龙头扩产表明对中期需求乐观，宁德时代业绩高增则暗示电池排产可能维持高位，对磷酸铁锂正极材料订单有支撑。但扩产项目从公告到投产有时滞，若多家企业同步扩产，未来供给集中释放可能加剧竞争。需调研：湖南裕能、万华化学扩产项目的具体产能规模和投产时间；宁德时代磷酸铁锂电池产量占比及供应商结构。</a:t>
             </a:r>
             <a:endParaRPr lang="en-US" sz="960" dirty="0"/>
           </a:p>
@@ -13459,7 +13609,7 @@
                 <a:ea typeface="Microsoft YaHei" pitchFamily="34" charset="-122"/>
                 <a:cs typeface="Microsoft YaHei" pitchFamily="34" charset="-120"/>
               </a:rPr>
-              <a:t>若龙蟠印尼二期项目股权出售后建设进度放缓，则2027年印尼磷酸铁锂供给增量可能低于预期，对海外正极材料供应格局产生影响；若德方纳米34.5万吨产能按期投产，则国内液相法磷酸铁锂供给增加，可能加剧中低端产品价格竞争。跟踪指标：印尼二期项目股权交割及建设进度公告、德方纳米产能投产时间表、海外磷酸铁锂进口数据。</a:t>
+              <a:t>若湖南裕能、万华化学扩产项目在2027年集中投产，而需求增速未能同步匹配，则磷酸铁锂正极材料加工费可能进一步下行；若宁德时代等电池厂排产持续高增，则短期订单可能消化部分新增产能。跟踪指标：扩产项目环评和投产公告、宁德时代季度电池产量及磷酸铁锂采购比例、正极材料企业产能利用率。证据边界：扩产新闻未披露具体产能数字和投产时间；宁德时代财报未拆分磷酸铁锂采购数据。</a:t>
             </a:r>
             <a:endParaRPr lang="en-US" sz="960" dirty="0"/>
           </a:p>
@@ -13527,7 +13677,7 @@
                 <a:ea typeface="Microsoft YaHei" pitchFamily="34" charset="-122"/>
                 <a:cs typeface="Microsoft YaHei" pitchFamily="34" charset="-120"/>
               </a:rPr>
-              <a:t>关键数据解读</a:t>
+              <a:t>落地链路</a:t>
             </a:r>
             <a:endParaRPr lang="en-US" sz="1200" dirty="0"/>
           </a:p>
@@ -13541,18 +13691,18 @@
         </p:nvSpPr>
         <p:spPr>
           <a:xfrm>
-            <a:off x="7772400" y="1993392"/>
-            <a:ext cx="2560320" cy="1389888"/>
+            <a:off x="7882128" y="2029968"/>
+            <a:ext cx="2377440" cy="365760"/>
           </a:xfrm>
           <a:prstGeom prst="roundRect">
             <a:avLst>
-              <a:gd name="adj" fmla="val 2632"/>
+              <a:gd name="adj" fmla="val 10000"/>
             </a:avLst>
           </a:prstGeom>
           <a:solidFill>
             <a:srgbClr val="F4FAF6"/>
           </a:solidFill>
-          <a:ln w="7620">
+          <a:ln w="8890">
             <a:solidFill>
               <a:srgbClr val="DADADA"/>
             </a:solidFill>
@@ -13568,8 +13718,8 @@
         </p:nvSpPr>
         <p:spPr>
           <a:xfrm>
-            <a:off x="7918704" y="2103120"/>
-            <a:ext cx="822960" cy="384048"/>
+            <a:off x="8028432" y="2139696"/>
+            <a:ext cx="566928" cy="109728"/>
           </a:xfrm>
           <a:prstGeom prst="rect">
             <a:avLst/>
@@ -13587,17 +13737,17 @@
               <a:buNone/>
             </a:pPr>
             <a:r>
-              <a:rPr lang="en-US" sz="2100" b="1" dirty="0">
+              <a:rPr lang="en-US" sz="720" b="1" dirty="0">
                 <a:solidFill>
                   <a:srgbClr val="487052"/>
                 </a:solidFill>
-                <a:latin typeface="Aptos" pitchFamily="34" charset="0"/>
-                <a:ea typeface="Aptos" pitchFamily="34" charset="-122"/>
-                <a:cs typeface="Aptos" pitchFamily="34" charset="-120"/>
-              </a:rPr>
-              <a:t>76%</a:t>
-            </a:r>
-            <a:endParaRPr lang="en-US" sz="2100" dirty="0"/>
+                <a:latin typeface="Microsoft YaHei" pitchFamily="34" charset="0"/>
+                <a:ea typeface="Microsoft YaHei" pitchFamily="34" charset="-122"/>
+                <a:cs typeface="Microsoft YaHei" pitchFamily="34" charset="-120"/>
+              </a:rPr>
+              <a:t>产能</a:t>
+            </a:r>
+            <a:endParaRPr lang="en-US" sz="720" dirty="0"/>
           </a:p>
         </p:txBody>
       </p:sp>
@@ -13609,8 +13759,8 @@
         </p:nvSpPr>
         <p:spPr>
           <a:xfrm>
-            <a:off x="8759952" y="2167128"/>
-            <a:ext cx="1371600" cy="201168"/>
+            <a:off x="8613648" y="2139696"/>
+            <a:ext cx="1481328" cy="109728"/>
           </a:xfrm>
           <a:prstGeom prst="rect">
             <a:avLst/>
@@ -13628,7 +13778,7 @@
               <a:buNone/>
             </a:pPr>
             <a:r>
-              <a:rPr lang="en-US" sz="820" b="1" dirty="0">
+              <a:rPr lang="en-US" sz="700" dirty="0">
                 <a:solidFill>
                   <a:srgbClr val="121212"/>
                 </a:solidFill>
@@ -13636,22 +13786,290 @@
                 <a:ea typeface="Microsoft YaHei" pitchFamily="34" charset="-122"/>
                 <a:cs typeface="Microsoft YaHei" pitchFamily="34" charset="-120"/>
               </a:rPr>
-              <a:t>股权</a:t>
-            </a:r>
-            <a:endParaRPr lang="en-US" sz="820" dirty="0"/>
-          </a:p>
-        </p:txBody>
-      </p:sp>
-      <p:sp>
-        <p:nvSpPr>
-          <p:cNvPr id="27" name="Text 25"/>
-          <p:cNvSpPr/>
-          <p:nvPr/>
-        </p:nvSpPr>
-        <p:spPr>
-          <a:xfrm>
-            <a:off x="7918704" y="2578608"/>
-            <a:ext cx="2176272" cy="512064"/>
+              <a:t>湖南裕能、万华化学再度扩产磷酸铁锂</a:t>
+            </a:r>
+            <a:endParaRPr lang="en-US" sz="700" dirty="0"/>
+          </a:p>
+        </p:txBody>
+      </p:sp>
+      <p:sp>
+        <p:nvSpPr>
+          <p:cNvPr id="27" name="Shape 25"/>
+          <p:cNvSpPr/>
+          <p:nvPr/>
+        </p:nvSpPr>
+        <p:spPr>
+          <a:xfrm>
+            <a:off x="8979408" y="2441448"/>
+            <a:ext cx="164592" cy="146304"/>
+          </a:xfrm>
+          <a:prstGeom prst="downArrow">
+            <a:avLst/>
+          </a:prstGeom>
+          <a:solidFill>
+            <a:srgbClr val="7F9D84"/>
+          </a:solidFill>
+          <a:ln w="12700">
+            <a:solidFill>
+              <a:srgbClr val="7F9D84"/>
+            </a:solidFill>
+            <a:prstDash val="solid"/>
+          </a:ln>
+        </p:spPr>
+      </p:sp>
+      <p:sp>
+        <p:nvSpPr>
+          <p:cNvPr id="28" name="Shape 26"/>
+          <p:cNvSpPr/>
+          <p:nvPr/>
+        </p:nvSpPr>
+        <p:spPr>
+          <a:xfrm>
+            <a:off x="7882128" y="2596896"/>
+            <a:ext cx="2377440" cy="365760"/>
+          </a:xfrm>
+          <a:prstGeom prst="roundRect">
+            <a:avLst>
+              <a:gd name="adj" fmla="val 10000"/>
+            </a:avLst>
+          </a:prstGeom>
+          <a:solidFill>
+            <a:srgbClr val="FFFFFF"/>
+          </a:solidFill>
+          <a:ln w="8890">
+            <a:solidFill>
+              <a:srgbClr val="DADADA"/>
+            </a:solidFill>
+            <a:prstDash val="solid"/>
+          </a:ln>
+        </p:spPr>
+      </p:sp>
+      <p:sp>
+        <p:nvSpPr>
+          <p:cNvPr id="29" name="Text 27"/>
+          <p:cNvSpPr/>
+          <p:nvPr/>
+        </p:nvSpPr>
+        <p:spPr>
+          <a:xfrm>
+            <a:off x="8028432" y="2706624"/>
+            <a:ext cx="566928" cy="109728"/>
+          </a:xfrm>
+          <a:prstGeom prst="rect">
+            <a:avLst/>
+          </a:prstGeom>
+          <a:noFill/>
+          <a:ln/>
+        </p:spPr>
+        <p:txBody>
+          <a:bodyPr wrap="square" lIns="0" tIns="0" rIns="0" bIns="0" rtlCol="0" anchor="ctr">
+            <a:normAutofit/>
+          </a:bodyPr>
+          <a:lstStyle/>
+          <a:p>
+            <a:pPr indent="0" marL="0">
+              <a:buNone/>
+            </a:pPr>
+            <a:r>
+              <a:rPr lang="en-US" sz="720" b="1" dirty="0">
+                <a:solidFill>
+                  <a:srgbClr val="487052"/>
+                </a:solidFill>
+                <a:latin typeface="Microsoft YaHei" pitchFamily="34" charset="0"/>
+                <a:ea typeface="Microsoft YaHei" pitchFamily="34" charset="-122"/>
+                <a:cs typeface="Microsoft YaHei" pitchFamily="34" charset="-120"/>
+              </a:rPr>
+              <a:t>客户</a:t>
+            </a:r>
+            <a:endParaRPr lang="en-US" sz="720" dirty="0"/>
+          </a:p>
+        </p:txBody>
+      </p:sp>
+      <p:sp>
+        <p:nvSpPr>
+          <p:cNvPr id="30" name="Text 28"/>
+          <p:cNvSpPr/>
+          <p:nvPr/>
+        </p:nvSpPr>
+        <p:spPr>
+          <a:xfrm>
+            <a:off x="8613648" y="2706624"/>
+            <a:ext cx="1481328" cy="109728"/>
+          </a:xfrm>
+          <a:prstGeom prst="rect">
+            <a:avLst/>
+          </a:prstGeom>
+          <a:noFill/>
+          <a:ln/>
+        </p:spPr>
+        <p:txBody>
+          <a:bodyPr wrap="square" lIns="0" tIns="0" rIns="0" bIns="0" rtlCol="0" anchor="ctr">
+            <a:normAutofit/>
+          </a:bodyPr>
+          <a:lstStyle/>
+          <a:p>
+            <a:pPr indent="0" marL="0">
+              <a:buNone/>
+            </a:pPr>
+            <a:r>
+              <a:rPr lang="en-US" sz="700" dirty="0">
+                <a:solidFill>
+                  <a:srgbClr val="121212"/>
+                </a:solidFill>
+                <a:latin typeface="Microsoft YaHei" pitchFamily="34" charset="0"/>
+                <a:ea typeface="Microsoft YaHei" pitchFamily="34" charset="-122"/>
+                <a:cs typeface="Microsoft YaHei" pitchFamily="34" charset="-120"/>
+              </a:rPr>
+              <a:t>宁德时代三季报业绩高增，作为磷酸铁</a:t>
+            </a:r>
+            <a:endParaRPr lang="en-US" sz="700" dirty="0"/>
+          </a:p>
+        </p:txBody>
+      </p:sp>
+      <p:sp>
+        <p:nvSpPr>
+          <p:cNvPr id="31" name="Shape 29"/>
+          <p:cNvSpPr/>
+          <p:nvPr/>
+        </p:nvSpPr>
+        <p:spPr>
+          <a:xfrm>
+            <a:off x="8979408" y="3008376"/>
+            <a:ext cx="164592" cy="146304"/>
+          </a:xfrm>
+          <a:prstGeom prst="downArrow">
+            <a:avLst/>
+          </a:prstGeom>
+          <a:solidFill>
+            <a:srgbClr val="7F9D84"/>
+          </a:solidFill>
+          <a:ln w="12700">
+            <a:solidFill>
+              <a:srgbClr val="7F9D84"/>
+            </a:solidFill>
+            <a:prstDash val="solid"/>
+          </a:ln>
+        </p:spPr>
+      </p:sp>
+      <p:sp>
+        <p:nvSpPr>
+          <p:cNvPr id="32" name="Shape 30"/>
+          <p:cNvSpPr/>
+          <p:nvPr/>
+        </p:nvSpPr>
+        <p:spPr>
+          <a:xfrm>
+            <a:off x="7882128" y="3163824"/>
+            <a:ext cx="2377440" cy="365760"/>
+          </a:xfrm>
+          <a:prstGeom prst="roundRect">
+            <a:avLst>
+              <a:gd name="adj" fmla="val 10000"/>
+            </a:avLst>
+          </a:prstGeom>
+          <a:solidFill>
+            <a:srgbClr val="F4FAF6"/>
+          </a:solidFill>
+          <a:ln w="8890">
+            <a:solidFill>
+              <a:srgbClr val="DADADA"/>
+            </a:solidFill>
+            <a:prstDash val="solid"/>
+          </a:ln>
+        </p:spPr>
+      </p:sp>
+      <p:sp>
+        <p:nvSpPr>
+          <p:cNvPr id="33" name="Text 31"/>
+          <p:cNvSpPr/>
+          <p:nvPr/>
+        </p:nvSpPr>
+        <p:spPr>
+          <a:xfrm>
+            <a:off x="8028432" y="3273552"/>
+            <a:ext cx="566928" cy="109728"/>
+          </a:xfrm>
+          <a:prstGeom prst="rect">
+            <a:avLst/>
+          </a:prstGeom>
+          <a:noFill/>
+          <a:ln/>
+        </p:spPr>
+        <p:txBody>
+          <a:bodyPr wrap="square" lIns="0" tIns="0" rIns="0" bIns="0" rtlCol="0" anchor="ctr">
+            <a:normAutofit/>
+          </a:bodyPr>
+          <a:lstStyle/>
+          <a:p>
+            <a:pPr indent="0" marL="0">
+              <a:buNone/>
+            </a:pPr>
+            <a:r>
+              <a:rPr lang="en-US" sz="720" b="1" dirty="0">
+                <a:solidFill>
+                  <a:srgbClr val="487052"/>
+                </a:solidFill>
+                <a:latin typeface="Microsoft YaHei" pitchFamily="34" charset="0"/>
+                <a:ea typeface="Microsoft YaHei" pitchFamily="34" charset="-122"/>
+                <a:cs typeface="Microsoft YaHei" pitchFamily="34" charset="-120"/>
+              </a:rPr>
+              <a:t>落地</a:t>
+            </a:r>
+            <a:endParaRPr lang="en-US" sz="720" dirty="0"/>
+          </a:p>
+        </p:txBody>
+      </p:sp>
+      <p:sp>
+        <p:nvSpPr>
+          <p:cNvPr id="34" name="Text 32"/>
+          <p:cNvSpPr/>
+          <p:nvPr/>
+        </p:nvSpPr>
+        <p:spPr>
+          <a:xfrm>
+            <a:off x="8613648" y="3273552"/>
+            <a:ext cx="1481328" cy="109728"/>
+          </a:xfrm>
+          <a:prstGeom prst="rect">
+            <a:avLst/>
+          </a:prstGeom>
+          <a:noFill/>
+          <a:ln/>
+        </p:spPr>
+        <p:txBody>
+          <a:bodyPr wrap="square" lIns="0" tIns="0" rIns="0" bIns="0" rtlCol="0" anchor="ctr">
+            <a:normAutofit/>
+          </a:bodyPr>
+          <a:lstStyle/>
+          <a:p>
+            <a:pPr indent="0" marL="0">
+              <a:buNone/>
+            </a:pPr>
+            <a:r>
+              <a:rPr lang="en-US" sz="700" dirty="0">
+                <a:solidFill>
+                  <a:srgbClr val="121212"/>
+                </a:solidFill>
+                <a:latin typeface="Microsoft YaHei" pitchFamily="34" charset="0"/>
+                <a:ea typeface="Microsoft YaHei" pitchFamily="34" charset="-122"/>
+                <a:cs typeface="Microsoft YaHei" pitchFamily="34" charset="-120"/>
+              </a:rPr>
+              <a:t>[1][3] 扩产新闻与宁德时代业</a:t>
+            </a:r>
+            <a:endParaRPr lang="en-US" sz="700" dirty="0"/>
+          </a:p>
+        </p:txBody>
+      </p:sp>
+      <p:sp>
+        <p:nvSpPr>
+          <p:cNvPr id="35" name="Text 33"/>
+          <p:cNvSpPr/>
+          <p:nvPr/>
+        </p:nvSpPr>
+        <p:spPr>
+          <a:xfrm>
+            <a:off x="7726680" y="4535424"/>
+            <a:ext cx="2697480" cy="310896"/>
           </a:xfrm>
           <a:prstGeom prst="rect">
             <a:avLst/>
@@ -13669,48 +14087,7 @@
               <a:buNone/>
             </a:pPr>
             <a:r>
-              <a:rPr lang="en-US" sz="840" dirty="0">
-                <a:solidFill>
-                  <a:srgbClr val="121212"/>
-                </a:solidFill>
-                <a:latin typeface="Microsoft YaHei" pitchFamily="34" charset="0"/>
-                <a:ea typeface="Microsoft YaHei" pitchFamily="34" charset="-122"/>
-                <a:cs typeface="Microsoft YaHei" pitchFamily="34" charset="-120"/>
-              </a:rPr>
-              <a:t>公开信息：龙蟠科技附属拟出售印尼二期磷酸铁锂正极材料项目76%股权，海外扩产策略出现调整</a:t>
-            </a:r>
-            <a:endParaRPr lang="en-US" sz="840" dirty="0"/>
-          </a:p>
-        </p:txBody>
-      </p:sp>
-      <p:sp>
-        <p:nvSpPr>
-          <p:cNvPr id="28" name="Text 26"/>
-          <p:cNvSpPr/>
-          <p:nvPr/>
-        </p:nvSpPr>
-        <p:spPr>
-          <a:xfrm>
-            <a:off x="7772400" y="4498848"/>
-            <a:ext cx="2560320" cy="384048"/>
-          </a:xfrm>
-          <a:prstGeom prst="rect">
-            <a:avLst/>
-          </a:prstGeom>
-          <a:noFill/>
-          <a:ln/>
-        </p:spPr>
-        <p:txBody>
-          <a:bodyPr wrap="square" lIns="0" tIns="0" rIns="0" bIns="0" rtlCol="0" anchor="t">
-            <a:normAutofit/>
-          </a:bodyPr>
-          <a:lstStyle/>
-          <a:p>
-            <a:pPr indent="0" marL="0">
-              <a:buNone/>
-            </a:pPr>
-            <a:r>
-              <a:rPr lang="en-US" sz="800" dirty="0">
+              <a:rPr lang="en-US" sz="760" dirty="0">
                 <a:solidFill>
                   <a:srgbClr val="6D756F"/>
                 </a:solidFill>
@@ -13718,15 +14095,15 @@
                 <a:ea typeface="Microsoft YaHei" pitchFamily="34" charset="-122"/>
                 <a:cs typeface="Microsoft YaHei" pitchFamily="34" charset="-120"/>
               </a:rPr>
-              <a:t>阅读提示：仅按公开报道原文呈现；不同企业、时间和统计范围不可直接横向比较。</a:t>
-            </a:r>
-            <a:endParaRPr lang="en-US" sz="800" dirty="0"/>
-          </a:p>
-        </p:txBody>
-      </p:sp>
-      <p:sp>
-        <p:nvSpPr>
-          <p:cNvPr id="29" name="Shape 27"/>
+              <a:t>用企业、项目、产能、客户的链路承接文字结论。</a:t>
+            </a:r>
+            <a:endParaRPr lang="en-US" sz="760" dirty="0"/>
+          </a:p>
+        </p:txBody>
+      </p:sp>
+      <p:sp>
+        <p:nvSpPr>
+          <p:cNvPr id="36" name="Shape 34"/>
           <p:cNvSpPr/>
           <p:nvPr/>
         </p:nvSpPr>
@@ -13751,7 +14128,7 @@
       </p:sp>
       <p:sp>
         <p:nvSpPr>
-          <p:cNvPr id="30" name="Text 28"/>
+          <p:cNvPr id="37" name="Text 35"/>
           <p:cNvSpPr/>
           <p:nvPr/>
         </p:nvSpPr>
@@ -13790,7 +14167,7 @@
       </p:sp>
       <p:sp>
         <p:nvSpPr>
-          <p:cNvPr id="31" name="Text 29"/>
+          <p:cNvPr id="38" name="Text 36"/>
           <p:cNvSpPr/>
           <p:nvPr/>
         </p:nvSpPr>
@@ -13823,7 +14200,7 @@
                 <a:ea typeface="Microsoft YaHei" pitchFamily="34" charset="-122"/>
                 <a:cs typeface="Microsoft YaHei" pitchFamily="34" charset="-120"/>
               </a:rPr>
-              <a:t>若龙蟠印尼二期项目股权出售后建设进度放缓，则2027年印尼磷酸铁锂供给增量可能低于预期，对海外正极材料供应格局产生影响</a:t>
+              <a:t>若湖南裕能、万华化学扩产项目在2027年集中投产，而需求增速未能同步匹配，则磷酸铁锂正极材料加工费可能进一步下行</a:t>
             </a:r>
             <a:endParaRPr lang="en-US" sz="1020" dirty="0"/>
           </a:p>
@@ -13972,7 +14349,7 @@
                 <a:ea typeface="Aptos" pitchFamily="34" charset="-122"/>
                 <a:cs typeface="Aptos" pitchFamily="34" charset="-120"/>
               </a:rPr>
-              <a:t>2026-10-23</a:t>
+              <a:t>2026-10-26</a:t>
             </a:r>
             <a:endParaRPr lang="en-US" sz="800" dirty="0"/>
           </a:p>
@@ -14178,7 +14555,7 @@
                 <a:ea typeface="Microsoft YaHei" pitchFamily="34" charset="-122"/>
                 <a:cs typeface="Microsoft YaHei" pitchFamily="34" charset="-120"/>
               </a:rPr>
-              <a:t>1 条公开来源交叉验证｜事实、影响与后续研判</a:t>
+              <a:t>2 条公开来源交叉验证｜事实、影响与后续研判</a:t>
             </a:r>
             <a:endParaRPr lang="en-US" sz="860" dirty="0"/>
           </a:p>
@@ -14287,7 +14664,7 @@
                 <a:ea typeface="Microsoft YaHei" pitchFamily="34" charset="-122"/>
                 <a:cs typeface="Microsoft YaHei" pitchFamily="34" charset="-120"/>
               </a:rPr>
-              <a:t>锂矿三季报业绩高增背后隐现预期分歧，上游锂矿盈利改善但中下游正极材料成本传导不畅；高压实产品迭代可能带来结构性溢价，但普通磷酸铁锂产品盈利压力仍存。 [5]</a:t>
+              <a:t>新能源汽车出口退税率从13%降至9%，可能抬高出海成本并压缩电池厂利润，进而向上游磷酸铁锂正极材料传导降价压力；宁德时代三季报业绩高增，机构看好盈利拐点，但磷酸铁锂环节盈利是否同步改善尚缺乏直接证据。 [2][3]</a:t>
             </a:r>
             <a:endParaRPr lang="en-US" sz="960" dirty="0"/>
           </a:p>
@@ -14328,7 +14705,7 @@
                 <a:ea typeface="Aptos" pitchFamily="34" charset="-122"/>
                 <a:cs typeface="Aptos" pitchFamily="34" charset="-120"/>
               </a:rPr>
-              <a:t>依据：[5]</a:t>
+              <a:t>依据：[2][3]</a:t>
             </a:r>
             <a:endParaRPr lang="en-US" sz="740" dirty="0"/>
           </a:p>
@@ -14437,7 +14814,7 @@
                 <a:ea typeface="Microsoft YaHei" pitchFamily="34" charset="-122"/>
                 <a:cs typeface="Microsoft YaHei" pitchFamily="34" charset="-120"/>
               </a:rPr>
-              <a:t>上海证券报报道锂矿三季报业绩高增但市场预期分歧显现，反映碳酸锂价格波动对上游盈利的弹性与中下游成本压力的矛盾；高压实产品若获得溢价，具备技术优势的企业盈利可能改善，但多数企业仍面临普通产品同质化竞争；需验证碳酸锂价格走势与正极材料企业毛利率变化，以及高压实产品溢价能否覆盖研发与产线升级成本。</a:t>
+              <a:t>出口退税下调直接增加新能源汽车出口成本，电池厂可能通过压低上游材料采购价格来对冲，磷酸铁锂正极材料加工费面临压力。宁德时代业绩高增更多体现其规模和技术优势，不能简单推断磷酸铁锂环节盈利改善。需验证：出口退税下调后电池厂对正极材料采购价的调整幅度；磷酸铁锂正极材料行业平均毛利率变化；宁德时代磷酸铁锂电池的单位盈利趋势。</a:t>
             </a:r>
             <a:endParaRPr lang="en-US" sz="960" dirty="0"/>
           </a:p>
@@ -14571,7 +14948,7 @@
                 <a:ea typeface="Microsoft YaHei" pitchFamily="34" charset="-122"/>
                 <a:cs typeface="Microsoft YaHei" pitchFamily="34" charset="-120"/>
               </a:rPr>
-              <a:t>若碳酸锂价格维持高位且高压实产品溢价扩大，则具备高压实量产能力的企业毛利率可能环比改善，普通产品企业盈利继续承压；若碳酸锂价格回落，则正极材料成本压力缓解但上游锂矿盈利收缩。跟踪指标：碳酸锂现货均价、磷酸铁锂正极材料月度均价、高压实与普通产品价差、正极材料企业季度毛利率。</a:t>
+              <a:t>若出口退税下调导致新能源汽车出口增速放缓，则电池厂可能进一步压降磷酸铁锂采购价格，正极材料企业盈利承压；若电池厂通过技术降本消化退税影响，则磷酸铁锂价格压力可能小于预期。跟踪指标：磷酸铁锂正极材料周度价格、新能源汽车月度出口量、电池厂季度毛利率。证据边界：退税政策刚发布，实际影响需等待出口数据和采购合同变化验证；宁德时代财报未单独披露磷酸铁锂业务盈利。</a:t>
             </a:r>
             <a:endParaRPr lang="en-US" sz="960" dirty="0"/>
           </a:p>
@@ -14639,7 +15016,7 @@
                 <a:ea typeface="Microsoft YaHei" pitchFamily="34" charset="-122"/>
                 <a:cs typeface="Microsoft YaHei" pitchFamily="34" charset="-120"/>
               </a:rPr>
-              <a:t>因果图</a:t>
+              <a:t>关键数据解读</a:t>
             </a:r>
             <a:endParaRPr lang="en-US" sz="1200" dirty="0"/>
           </a:p>
@@ -14653,122 +15030,12 @@
         </p:nvSpPr>
         <p:spPr>
           <a:xfrm>
-            <a:off x="7845552" y="3063240"/>
-            <a:ext cx="2432304" cy="0"/>
-          </a:xfrm>
-          <a:prstGeom prst="line">
-            <a:avLst/>
-          </a:prstGeom>
-          <a:noFill/>
-          <a:ln w="15240">
-            <a:solidFill>
-              <a:srgbClr val="487052"/>
-            </a:solidFill>
-            <a:prstDash val="solid"/>
-          </a:ln>
-        </p:spPr>
-      </p:sp>
-      <p:sp>
-        <p:nvSpPr>
-          <p:cNvPr id="25" name="Shape 23"/>
-          <p:cNvSpPr/>
-          <p:nvPr/>
-        </p:nvSpPr>
-        <p:spPr>
-          <a:xfrm>
-            <a:off x="10012680" y="2889504"/>
-            <a:ext cx="384048" cy="347472"/>
-          </a:xfrm>
-          <a:prstGeom prst="rightArrow">
-            <a:avLst/>
-          </a:prstGeom>
-          <a:solidFill>
-            <a:srgbClr val="487052"/>
-          </a:solidFill>
-          <a:ln w="12700">
-            <a:solidFill>
-              <a:srgbClr val="487052"/>
-            </a:solidFill>
-            <a:prstDash val="solid"/>
-          </a:ln>
-        </p:spPr>
-      </p:sp>
-      <p:sp>
-        <p:nvSpPr>
-          <p:cNvPr id="26" name="Text 24"/>
-          <p:cNvSpPr/>
-          <p:nvPr/>
-        </p:nvSpPr>
-        <p:spPr>
-          <a:xfrm>
-            <a:off x="9893808" y="3310128"/>
-            <a:ext cx="475488" cy="146304"/>
-          </a:xfrm>
-          <a:prstGeom prst="rect">
-            <a:avLst/>
-          </a:prstGeom>
-          <a:noFill/>
-          <a:ln/>
-        </p:spPr>
-        <p:txBody>
-          <a:bodyPr wrap="square" lIns="0" tIns="0" rIns="0" bIns="0" rtlCol="0" anchor="ctr"/>
-          <a:lstStyle/>
-          <a:p>
-            <a:pPr algn="ctr" indent="0" marL="0">
-              <a:buNone/>
-            </a:pPr>
-            <a:r>
-              <a:rPr lang="en-US" sz="740" b="1" dirty="0">
-                <a:solidFill>
-                  <a:srgbClr val="487052"/>
-                </a:solidFill>
-                <a:latin typeface="Microsoft YaHei" pitchFamily="34" charset="0"/>
-                <a:ea typeface="Microsoft YaHei" pitchFamily="34" charset="-122"/>
-                <a:cs typeface="Microsoft YaHei" pitchFamily="34" charset="-120"/>
-              </a:rPr>
-              <a:t>影响</a:t>
-            </a:r>
-            <a:endParaRPr lang="en-US" sz="740" dirty="0"/>
-          </a:p>
-        </p:txBody>
-      </p:sp>
-      <p:sp>
-        <p:nvSpPr>
-          <p:cNvPr id="27" name="Shape 25"/>
-          <p:cNvSpPr/>
-          <p:nvPr/>
-        </p:nvSpPr>
-        <p:spPr>
-          <a:xfrm>
-            <a:off x="8028432" y="2359152"/>
-            <a:ext cx="402336" cy="704088"/>
-          </a:xfrm>
-          <a:prstGeom prst="line">
-            <a:avLst/>
-          </a:prstGeom>
-          <a:noFill/>
-          <a:ln w="11430">
-            <a:solidFill>
-              <a:srgbClr val="7F9D84"/>
-            </a:solidFill>
-            <a:prstDash val="solid"/>
-          </a:ln>
-        </p:spPr>
-      </p:sp>
-      <p:sp>
-        <p:nvSpPr>
-          <p:cNvPr id="28" name="Shape 26"/>
-          <p:cNvSpPr/>
-          <p:nvPr/>
-        </p:nvSpPr>
-        <p:spPr>
-          <a:xfrm>
-            <a:off x="7882128" y="2249424"/>
-            <a:ext cx="786384" cy="310896"/>
+            <a:off x="7772400" y="1993392"/>
+            <a:ext cx="2560320" cy="786384"/>
           </a:xfrm>
           <a:prstGeom prst="roundRect">
             <a:avLst>
-              <a:gd name="adj" fmla="val 11765"/>
+              <a:gd name="adj" fmla="val 4651"/>
             </a:avLst>
           </a:prstGeom>
           <a:solidFill>
@@ -14784,14 +15051,14 @@
       </p:sp>
       <p:sp>
         <p:nvSpPr>
-          <p:cNvPr id="29" name="Text 27"/>
-          <p:cNvSpPr/>
-          <p:nvPr/>
-        </p:nvSpPr>
-        <p:spPr>
-          <a:xfrm>
-            <a:off x="7973568" y="2350008"/>
-            <a:ext cx="603504" cy="91440"/>
+          <p:cNvPr id="25" name="Text 23"/>
+          <p:cNvSpPr/>
+          <p:nvPr/>
+        </p:nvSpPr>
+        <p:spPr>
+          <a:xfrm>
+            <a:off x="7918704" y="2103120"/>
+            <a:ext cx="822960" cy="384048"/>
           </a:xfrm>
           <a:prstGeom prst="rect">
             <a:avLst/>
@@ -14805,34 +15072,75 @@
           </a:bodyPr>
           <a:lstStyle/>
           <a:p>
-            <a:pPr algn="ctr" indent="0" marL="0">
-              <a:buNone/>
-            </a:pPr>
-            <a:r>
-              <a:rPr lang="en-US" sz="680" b="1" dirty="0">
+            <a:pPr indent="0" marL="0">
+              <a:buNone/>
+            </a:pPr>
+            <a:r>
+              <a:rPr lang="en-US" sz="1600" b="1" dirty="0">
                 <a:solidFill>
                   <a:srgbClr val="487052"/>
                 </a:solidFill>
-                <a:latin typeface="Microsoft YaHei" pitchFamily="34" charset="0"/>
-                <a:ea typeface="Microsoft YaHei" pitchFamily="34" charset="-122"/>
-                <a:cs typeface="Microsoft YaHei" pitchFamily="34" charset="-120"/>
-              </a:rPr>
-              <a:t>价格</a:t>
-            </a:r>
-            <a:endParaRPr lang="en-US" sz="680" dirty="0"/>
-          </a:p>
-        </p:txBody>
-      </p:sp>
-      <p:sp>
-        <p:nvSpPr>
-          <p:cNvPr id="30" name="Text 28"/>
-          <p:cNvSpPr/>
-          <p:nvPr/>
-        </p:nvSpPr>
-        <p:spPr>
-          <a:xfrm>
-            <a:off x="7863840" y="1956816"/>
-            <a:ext cx="822960" cy="219456"/>
+                <a:latin typeface="Aptos" pitchFamily="34" charset="0"/>
+                <a:ea typeface="Aptos" pitchFamily="34" charset="-122"/>
+                <a:cs typeface="Aptos" pitchFamily="34" charset="-120"/>
+              </a:rPr>
+              <a:t>13%</a:t>
+            </a:r>
+            <a:endParaRPr lang="en-US" sz="1600" dirty="0"/>
+          </a:p>
+        </p:txBody>
+      </p:sp>
+      <p:sp>
+        <p:nvSpPr>
+          <p:cNvPr id="26" name="Text 24"/>
+          <p:cNvSpPr/>
+          <p:nvPr/>
+        </p:nvSpPr>
+        <p:spPr>
+          <a:xfrm>
+            <a:off x="8759952" y="2167128"/>
+            <a:ext cx="1371600" cy="201168"/>
+          </a:xfrm>
+          <a:prstGeom prst="rect">
+            <a:avLst/>
+          </a:prstGeom>
+          <a:noFill/>
+          <a:ln/>
+        </p:spPr>
+        <p:txBody>
+          <a:bodyPr wrap="square" lIns="0" tIns="0" rIns="0" bIns="0" rtlCol="0" anchor="ctr">
+            <a:normAutofit/>
+          </a:bodyPr>
+          <a:lstStyle/>
+          <a:p>
+            <a:pPr indent="0" marL="0">
+              <a:buNone/>
+            </a:pPr>
+            <a:r>
+              <a:rPr lang="en-US" sz="820" b="1" dirty="0">
+                <a:solidFill>
+                  <a:srgbClr val="121212"/>
+                </a:solidFill>
+                <a:latin typeface="Microsoft YaHei" pitchFamily="34" charset="0"/>
+                <a:ea typeface="Microsoft YaHei" pitchFamily="34" charset="-122"/>
+                <a:cs typeface="Microsoft YaHei" pitchFamily="34" charset="-120"/>
+              </a:rPr>
+              <a:t>降至</a:t>
+            </a:r>
+            <a:endParaRPr lang="en-US" sz="820" dirty="0"/>
+          </a:p>
+        </p:txBody>
+      </p:sp>
+      <p:sp>
+        <p:nvSpPr>
+          <p:cNvPr id="27" name="Text 25"/>
+          <p:cNvSpPr/>
+          <p:nvPr/>
+        </p:nvSpPr>
+        <p:spPr>
+          <a:xfrm>
+            <a:off x="7918704" y="2578608"/>
+            <a:ext cx="2176272" cy="201168"/>
           </a:xfrm>
           <a:prstGeom prst="rect">
             <a:avLst/>
@@ -14846,11 +15154,11 @@
           </a:bodyPr>
           <a:lstStyle/>
           <a:p>
-            <a:pPr algn="ctr" indent="0" marL="0">
-              <a:buNone/>
-            </a:pPr>
-            <a:r>
-              <a:rPr lang="en-US" sz="640" dirty="0">
+            <a:pPr indent="0" marL="0">
+              <a:buNone/>
+            </a:pPr>
+            <a:r>
+              <a:rPr lang="en-US" sz="840" dirty="0">
                 <a:solidFill>
                   <a:srgbClr val="121212"/>
                 </a:solidFill>
@@ -14858,53 +15166,30 @@
                 <a:ea typeface="Microsoft YaHei" pitchFamily="34" charset="-122"/>
                 <a:cs typeface="Microsoft YaHei" pitchFamily="34" charset="-120"/>
               </a:rPr>
-              <a:t>锂矿三季报业绩高增</a:t>
-            </a:r>
-            <a:endParaRPr lang="en-US" sz="640" dirty="0"/>
-          </a:p>
-        </p:txBody>
-      </p:sp>
-      <p:sp>
-        <p:nvSpPr>
-          <p:cNvPr id="31" name="Shape 29"/>
-          <p:cNvSpPr/>
-          <p:nvPr/>
-        </p:nvSpPr>
-        <p:spPr>
-          <a:xfrm>
-            <a:off x="8686800" y="3063240"/>
-            <a:ext cx="402336" cy="685800"/>
-          </a:xfrm>
-          <a:prstGeom prst="line">
-            <a:avLst/>
-          </a:prstGeom>
-          <a:noFill/>
-          <a:ln w="11430">
-            <a:solidFill>
-              <a:srgbClr val="7F9D84"/>
-            </a:solidFill>
-            <a:prstDash val="solid"/>
-          </a:ln>
-        </p:spPr>
-      </p:sp>
-      <p:sp>
-        <p:nvSpPr>
-          <p:cNvPr id="32" name="Shape 30"/>
-          <p:cNvSpPr/>
-          <p:nvPr/>
-        </p:nvSpPr>
-        <p:spPr>
-          <a:xfrm>
-            <a:off x="8540496" y="3639312"/>
-            <a:ext cx="786384" cy="310896"/>
+              <a:t>公开信息：新能源汽车出口退税率从13%降至9%，可能抬高出海成本并压</a:t>
+            </a:r>
+            <a:endParaRPr lang="en-US" sz="840" dirty="0"/>
+          </a:p>
+        </p:txBody>
+      </p:sp>
+      <p:sp>
+        <p:nvSpPr>
+          <p:cNvPr id="28" name="Shape 26"/>
+          <p:cNvSpPr/>
+          <p:nvPr/>
+        </p:nvSpPr>
+        <p:spPr>
+          <a:xfrm>
+            <a:off x="7772400" y="2926080"/>
+            <a:ext cx="2560320" cy="786384"/>
           </a:xfrm>
           <a:prstGeom prst="roundRect">
             <a:avLst>
-              <a:gd name="adj" fmla="val 11765"/>
+              <a:gd name="adj" fmla="val 4651"/>
             </a:avLst>
           </a:prstGeom>
           <a:solidFill>
-            <a:srgbClr val="F4FAF6"/>
+            <a:srgbClr val="FFFFFF"/>
           </a:solidFill>
           <a:ln w="7620">
             <a:solidFill>
@@ -14916,14 +15201,14 @@
       </p:sp>
       <p:sp>
         <p:nvSpPr>
-          <p:cNvPr id="33" name="Text 31"/>
-          <p:cNvSpPr/>
-          <p:nvPr/>
-        </p:nvSpPr>
-        <p:spPr>
-          <a:xfrm>
-            <a:off x="8631936" y="3739896"/>
-            <a:ext cx="603504" cy="91440"/>
+          <p:cNvPr id="29" name="Text 27"/>
+          <p:cNvSpPr/>
+          <p:nvPr/>
+        </p:nvSpPr>
+        <p:spPr>
+          <a:xfrm>
+            <a:off x="7918704" y="3035808"/>
+            <a:ext cx="822960" cy="384048"/>
           </a:xfrm>
           <a:prstGeom prst="rect">
             <a:avLst/>
@@ -14937,34 +15222,75 @@
           </a:bodyPr>
           <a:lstStyle/>
           <a:p>
-            <a:pPr algn="ctr" indent="0" marL="0">
-              <a:buNone/>
-            </a:pPr>
-            <a:r>
-              <a:rPr lang="en-US" sz="680" b="1" dirty="0">
+            <a:pPr indent="0" marL="0">
+              <a:buNone/>
+            </a:pPr>
+            <a:r>
+              <a:rPr lang="en-US" sz="1600" b="1" dirty="0">
                 <a:solidFill>
                   <a:srgbClr val="487052"/>
                 </a:solidFill>
-                <a:latin typeface="Microsoft YaHei" pitchFamily="34" charset="0"/>
-                <a:ea typeface="Microsoft YaHei" pitchFamily="34" charset="-122"/>
-                <a:cs typeface="Microsoft YaHei" pitchFamily="34" charset="-120"/>
-              </a:rPr>
-              <a:t>成本</a:t>
-            </a:r>
-            <a:endParaRPr lang="en-US" sz="680" dirty="0"/>
-          </a:p>
-        </p:txBody>
-      </p:sp>
-      <p:sp>
-        <p:nvSpPr>
-          <p:cNvPr id="34" name="Text 32"/>
-          <p:cNvSpPr/>
-          <p:nvPr/>
-        </p:nvSpPr>
-        <p:spPr>
-          <a:xfrm>
-            <a:off x="8522208" y="4005072"/>
-            <a:ext cx="822960" cy="219456"/>
+                <a:latin typeface="Aptos" pitchFamily="34" charset="0"/>
+                <a:ea typeface="Aptos" pitchFamily="34" charset="-122"/>
+                <a:cs typeface="Aptos" pitchFamily="34" charset="-120"/>
+              </a:rPr>
+              <a:t>9%</a:t>
+            </a:r>
+            <a:endParaRPr lang="en-US" sz="1600" dirty="0"/>
+          </a:p>
+        </p:txBody>
+      </p:sp>
+      <p:sp>
+        <p:nvSpPr>
+          <p:cNvPr id="30" name="Text 28"/>
+          <p:cNvSpPr/>
+          <p:nvPr/>
+        </p:nvSpPr>
+        <p:spPr>
+          <a:xfrm>
+            <a:off x="8759952" y="3099816"/>
+            <a:ext cx="1371600" cy="201168"/>
+          </a:xfrm>
+          <a:prstGeom prst="rect">
+            <a:avLst/>
+          </a:prstGeom>
+          <a:noFill/>
+          <a:ln/>
+        </p:spPr>
+        <p:txBody>
+          <a:bodyPr wrap="square" lIns="0" tIns="0" rIns="0" bIns="0" rtlCol="0" anchor="ctr">
+            <a:normAutofit/>
+          </a:bodyPr>
+          <a:lstStyle/>
+          <a:p>
+            <a:pPr indent="0" marL="0">
+              <a:buNone/>
+            </a:pPr>
+            <a:r>
+              <a:rPr lang="en-US" sz="820" b="1" dirty="0">
+                <a:solidFill>
+                  <a:srgbClr val="121212"/>
+                </a:solidFill>
+                <a:latin typeface="Microsoft YaHei" pitchFamily="34" charset="0"/>
+                <a:ea typeface="Microsoft YaHei" pitchFamily="34" charset="-122"/>
+                <a:cs typeface="Microsoft YaHei" pitchFamily="34" charset="-120"/>
+              </a:rPr>
+              <a:t>源汽车出口退税率从13%降至</a:t>
+            </a:r>
+            <a:endParaRPr lang="en-US" sz="820" dirty="0"/>
+          </a:p>
+        </p:txBody>
+      </p:sp>
+      <p:sp>
+        <p:nvSpPr>
+          <p:cNvPr id="31" name="Text 29"/>
+          <p:cNvSpPr/>
+          <p:nvPr/>
+        </p:nvSpPr>
+        <p:spPr>
+          <a:xfrm>
+            <a:off x="7918704" y="3511296"/>
+            <a:ext cx="2176272" cy="201168"/>
           </a:xfrm>
           <a:prstGeom prst="rect">
             <a:avLst/>
@@ -14978,11 +15304,11 @@
           </a:bodyPr>
           <a:lstStyle/>
           <a:p>
-            <a:pPr algn="ctr" indent="0" marL="0">
-              <a:buNone/>
-            </a:pPr>
-            <a:r>
-              <a:rPr lang="en-US" sz="640" dirty="0">
+            <a:pPr indent="0" marL="0">
+              <a:buNone/>
+            </a:pPr>
+            <a:r>
+              <a:rPr lang="en-US" sz="840" dirty="0">
                 <a:solidFill>
                   <a:srgbClr val="121212"/>
                 </a:solidFill>
@@ -14990,113 +15316,22 @@
                 <a:ea typeface="Microsoft YaHei" pitchFamily="34" charset="-122"/>
                 <a:cs typeface="Microsoft YaHei" pitchFamily="34" charset="-120"/>
               </a:rPr>
-              <a:t>高压实产品迭代可能</a:t>
-            </a:r>
-            <a:endParaRPr lang="en-US" sz="640" dirty="0"/>
-          </a:p>
-        </p:txBody>
-      </p:sp>
-      <p:sp>
-        <p:nvSpPr>
-          <p:cNvPr id="35" name="Shape 33"/>
-          <p:cNvSpPr/>
-          <p:nvPr/>
-        </p:nvSpPr>
-        <p:spPr>
-          <a:xfrm>
-            <a:off x="9345168" y="2359152"/>
-            <a:ext cx="402336" cy="704088"/>
-          </a:xfrm>
-          <a:prstGeom prst="line">
-            <a:avLst/>
-          </a:prstGeom>
-          <a:noFill/>
-          <a:ln w="11430">
-            <a:solidFill>
-              <a:srgbClr val="7F9D84"/>
-            </a:solidFill>
-            <a:prstDash val="solid"/>
-          </a:ln>
-        </p:spPr>
-      </p:sp>
-      <p:sp>
-        <p:nvSpPr>
-          <p:cNvPr id="36" name="Shape 34"/>
-          <p:cNvSpPr/>
-          <p:nvPr/>
-        </p:nvSpPr>
-        <p:spPr>
-          <a:xfrm>
-            <a:off x="9198864" y="2249424"/>
-            <a:ext cx="786384" cy="310896"/>
-          </a:xfrm>
-          <a:prstGeom prst="roundRect">
-            <a:avLst>
-              <a:gd name="adj" fmla="val 11765"/>
-            </a:avLst>
-          </a:prstGeom>
-          <a:solidFill>
-            <a:srgbClr val="F4FAF6"/>
-          </a:solidFill>
-          <a:ln w="7620">
-            <a:solidFill>
-              <a:srgbClr val="DADADA"/>
-            </a:solidFill>
-            <a:prstDash val="solid"/>
-          </a:ln>
-        </p:spPr>
-      </p:sp>
-      <p:sp>
-        <p:nvSpPr>
-          <p:cNvPr id="37" name="Text 35"/>
-          <p:cNvSpPr/>
-          <p:nvPr/>
-        </p:nvSpPr>
-        <p:spPr>
-          <a:xfrm>
-            <a:off x="9290304" y="2350008"/>
-            <a:ext cx="603504" cy="91440"/>
-          </a:xfrm>
-          <a:prstGeom prst="rect">
-            <a:avLst/>
-          </a:prstGeom>
-          <a:noFill/>
-          <a:ln/>
-        </p:spPr>
-        <p:txBody>
-          <a:bodyPr wrap="square" lIns="0" tIns="0" rIns="0" bIns="0" rtlCol="0" anchor="ctr">
-            <a:normAutofit/>
-          </a:bodyPr>
-          <a:lstStyle/>
-          <a:p>
-            <a:pPr algn="ctr" indent="0" marL="0">
-              <a:buNone/>
-            </a:pPr>
-            <a:r>
-              <a:rPr lang="en-US" sz="680" b="1" dirty="0">
-                <a:solidFill>
-                  <a:srgbClr val="487052"/>
-                </a:solidFill>
-                <a:latin typeface="Microsoft YaHei" pitchFamily="34" charset="0"/>
-                <a:ea typeface="Microsoft YaHei" pitchFamily="34" charset="-122"/>
-                <a:cs typeface="Microsoft YaHei" pitchFamily="34" charset="-120"/>
-              </a:rPr>
-              <a:t>利润</a:t>
-            </a:r>
-            <a:endParaRPr lang="en-US" sz="680" dirty="0"/>
-          </a:p>
-        </p:txBody>
-      </p:sp>
-      <p:sp>
-        <p:nvSpPr>
-          <p:cNvPr id="38" name="Text 36"/>
-          <p:cNvSpPr/>
-          <p:nvPr/>
-        </p:nvSpPr>
-        <p:spPr>
-          <a:xfrm>
-            <a:off x="9180576" y="1956816"/>
-            <a:ext cx="822960" cy="219456"/>
+              <a:t>公开信息：新能源汽车出口退税率从13%降至9%，可能抬高出海成本并压</a:t>
+            </a:r>
+            <a:endParaRPr lang="en-US" sz="840" dirty="0"/>
+          </a:p>
+        </p:txBody>
+      </p:sp>
+      <p:sp>
+        <p:nvSpPr>
+          <p:cNvPr id="32" name="Text 30"/>
+          <p:cNvSpPr/>
+          <p:nvPr/>
+        </p:nvSpPr>
+        <p:spPr>
+          <a:xfrm>
+            <a:off x="7772400" y="4498848"/>
+            <a:ext cx="2560320" cy="384048"/>
           </a:xfrm>
           <a:prstGeom prst="rect">
             <a:avLst/>
@@ -15110,52 +15345,11 @@
           </a:bodyPr>
           <a:lstStyle/>
           <a:p>
-            <a:pPr algn="ctr" indent="0" marL="0">
-              <a:buNone/>
-            </a:pPr>
-            <a:r>
-              <a:rPr lang="en-US" sz="640" dirty="0">
-                <a:solidFill>
-                  <a:srgbClr val="121212"/>
-                </a:solidFill>
-                <a:latin typeface="Microsoft YaHei" pitchFamily="34" charset="0"/>
-                <a:ea typeface="Microsoft YaHei" pitchFamily="34" charset="-122"/>
-                <a:cs typeface="Microsoft YaHei" pitchFamily="34" charset="-120"/>
-              </a:rPr>
-              <a:t>[5] 上海证券报</a:t>
-            </a:r>
-            <a:endParaRPr lang="en-US" sz="640" dirty="0"/>
-          </a:p>
-        </p:txBody>
-      </p:sp>
-      <p:sp>
-        <p:nvSpPr>
-          <p:cNvPr id="39" name="Text 37"/>
-          <p:cNvSpPr/>
-          <p:nvPr/>
-        </p:nvSpPr>
-        <p:spPr>
-          <a:xfrm>
-            <a:off x="7726680" y="4517136"/>
-            <a:ext cx="2697480" cy="310896"/>
-          </a:xfrm>
-          <a:prstGeom prst="rect">
-            <a:avLst/>
-          </a:prstGeom>
-          <a:noFill/>
-          <a:ln/>
-        </p:spPr>
-        <p:txBody>
-          <a:bodyPr wrap="square" lIns="0" tIns="0" rIns="0" bIns="0" rtlCol="0" anchor="t">
-            <a:normAutofit/>
-          </a:bodyPr>
-          <a:lstStyle/>
-          <a:p>
-            <a:pPr indent="0" marL="0">
-              <a:buNone/>
-            </a:pPr>
-            <a:r>
-              <a:rPr lang="en-US" sz="760" dirty="0">
+            <a:pPr indent="0" marL="0">
+              <a:buNone/>
+            </a:pPr>
+            <a:r>
+              <a:rPr lang="en-US" sz="800" dirty="0">
                 <a:solidFill>
                   <a:srgbClr val="6D756F"/>
                 </a:solidFill>
@@ -15163,15 +15357,15 @@
                 <a:ea typeface="Microsoft YaHei" pitchFamily="34" charset="-122"/>
                 <a:cs typeface="Microsoft YaHei" pitchFamily="34" charset="-120"/>
               </a:rPr>
-              <a:t>参考鱼骨图逻辑，只表达来源文本中的原因和影响。</a:t>
-            </a:r>
-            <a:endParaRPr lang="en-US" sz="760" dirty="0"/>
-          </a:p>
-        </p:txBody>
-      </p:sp>
-      <p:sp>
-        <p:nvSpPr>
-          <p:cNvPr id="40" name="Shape 38"/>
+              <a:t>阅读提示：仅按公开报道原文呈现；不同企业、时间和统计范围不可直接横向比较。</a:t>
+            </a:r>
+            <a:endParaRPr lang="en-US" sz="800" dirty="0"/>
+          </a:p>
+        </p:txBody>
+      </p:sp>
+      <p:sp>
+        <p:nvSpPr>
+          <p:cNvPr id="33" name="Shape 31"/>
           <p:cNvSpPr/>
           <p:nvPr/>
         </p:nvSpPr>
@@ -15196,7 +15390,7 @@
       </p:sp>
       <p:sp>
         <p:nvSpPr>
-          <p:cNvPr id="41" name="Text 39"/>
+          <p:cNvPr id="34" name="Text 32"/>
           <p:cNvSpPr/>
           <p:nvPr/>
         </p:nvSpPr>
@@ -15235,7 +15429,7 @@
       </p:sp>
       <p:sp>
         <p:nvSpPr>
-          <p:cNvPr id="42" name="Text 40"/>
+          <p:cNvPr id="35" name="Text 33"/>
           <p:cNvSpPr/>
           <p:nvPr/>
         </p:nvSpPr>
@@ -15268,7 +15462,7 @@
                 <a:ea typeface="Microsoft YaHei" pitchFamily="34" charset="-122"/>
                 <a:cs typeface="Microsoft YaHei" pitchFamily="34" charset="-120"/>
               </a:rPr>
-              <a:t>若碳酸锂价格维持高位且高压实产品溢价扩大，则具备高压实量产能力的企业毛利率可能环比改善，普通产品企业盈利继续承压</a:t>
+              <a:t>若出口退税下调导致新能源汽车出口增速放缓，则电池厂可能进一步压降磷酸铁锂采购价格，正极材料企业盈利承压</a:t>
             </a:r>
             <a:endParaRPr lang="en-US" sz="1020" dirty="0"/>
           </a:p>
@@ -15417,7 +15611,7 @@
                 <a:ea typeface="Aptos" pitchFamily="34" charset="-122"/>
                 <a:cs typeface="Aptos" pitchFamily="34" charset="-120"/>
               </a:rPr>
-              <a:t>2026-10-23</a:t>
+              <a:t>2026-10-26</a:t>
             </a:r>
             <a:endParaRPr lang="en-US" sz="800" dirty="0"/>
           </a:p>
@@ -15623,7 +15817,7 @@
                 <a:ea typeface="Microsoft YaHei" pitchFamily="34" charset="-122"/>
                 <a:cs typeface="Microsoft YaHei" pitchFamily="34" charset="-120"/>
               </a:rPr>
-              <a:t>2 条公开来源交叉验证｜事实、影响与后续研判</a:t>
+              <a:t>3 条公开来源交叉验证｜事实、影响与后续研判</a:t>
             </a:r>
             <a:endParaRPr lang="en-US" sz="860" dirty="0"/>
           </a:p>
@@ -15732,7 +15926,7 @@
                 <a:ea typeface="Microsoft YaHei" pitchFamily="34" charset="-122"/>
                 <a:cs typeface="Microsoft YaHei" pitchFamily="34" charset="-120"/>
               </a:rPr>
-              <a:t>动力电池出海面临合规与本土化新考题，海外回收产业体系建设成为关键；电池回收政策关注度提升，城市矿山与回收巨头齐聚陕西，回收体系建设加速。 [6][7]</a:t>
+              <a:t>新能源汽车出口退税率由13%降至9%，是今日最直接的政策变化，可能增加出海成本并影响电池及材料环节的海外订单定价；此外，废旧锂电池回收相关新闻显示回收体系在国内外持续推进，但尚未形成对磷酸铁锂生产的直接约束。 [2][5][6]</a:t>
             </a:r>
             <a:endParaRPr lang="en-US" sz="960" dirty="0"/>
           </a:p>
@@ -15773,7 +15967,7 @@
                 <a:ea typeface="Aptos" pitchFamily="34" charset="-122"/>
                 <a:cs typeface="Aptos" pitchFamily="34" charset="-120"/>
               </a:rPr>
-              <a:t>依据：[6][7]</a:t>
+              <a:t>依据：[2][5][6]</a:t>
             </a:r>
             <a:endParaRPr lang="en-US" sz="740" dirty="0"/>
           </a:p>
@@ -15882,7 +16076,7 @@
                 <a:ea typeface="Microsoft YaHei" pitchFamily="34" charset="-122"/>
                 <a:cs typeface="Microsoft YaHei" pitchFamily="34" charset="-120"/>
               </a:rPr>
-              <a:t>中国青年网报道合规与本土化成为动力电池出海新考题，海外回收产业体系建设成关键，意味着磷酸铁锂正极材料出口可能面临更严格的碳足迹与回收要求；电池回收产业会议显示回收体系建设加速，但政策具体细则与执行力度需跟踪；出海合规成本可能增加正极材料企业海外布局的复杂性，影响印尼等海外项目经济性。</a:t>
+              <a:t>出口退税下调属于贸易政策调整，直接影响新能源汽车出口盈利，电池厂可能将部分成本压力转嫁上游材料企业。电池回收新闻（吉尔吉斯斯坦设立回收箱、废旧锂电池破碎分选设备）反映全球对电池全生命周期管理关注度提升，长期可能对磷酸铁锂生产企业的回收责任提出更高要求。需调研：出口退税下调是否伴随其他出海支持政策；国内电池回收法规对磷酸铁锂生产企业的具体合规要求。</a:t>
             </a:r>
             <a:endParaRPr lang="en-US" sz="960" dirty="0"/>
           </a:p>
@@ -16016,7 +16210,7 @@
                 <a:ea typeface="Microsoft YaHei" pitchFamily="34" charset="-122"/>
                 <a:cs typeface="Microsoft YaHei" pitchFamily="34" charset="-120"/>
               </a:rPr>
-              <a:t>若海外回收合规要求进一步细化并提高准入门槛，则磷酸铁锂正极材料出海企业需增加回收配套投入，海外项目成本可能上升；若国内电池回收政策加码，则退役电池回收供给增加，可能对原生磷酸铁锂需求形成部分替代。跟踪指标：海外电池回收法规细则、国内电池回收白名单企业数量、退役电池回收量月度数据。</a:t>
+              <a:t>若出口退税下调后新能源汽车出口量明显下滑，则电池厂可能减少海外订单并向上游压价，磷酸铁锂需求承压；若回收政策趋严要求生产企业承担回收成本，则磷酸铁锂企业可能面临额外合规支出。跟踪指标：新能源汽车月度出口数据、国内电池回收法规草案、磷酸铁锂企业回收合作公告。证据边界：退税政策影响需等待出口数据验证；回收新闻多为行业动态，尚未形成对磷酸铁锂生产的直接约束。</a:t>
             </a:r>
             <a:endParaRPr lang="en-US" sz="960" dirty="0"/>
           </a:p>
@@ -16191,7 +16385,7 @@
                 <a:ea typeface="Microsoft YaHei" pitchFamily="34" charset="-122"/>
                 <a:cs typeface="Microsoft YaHei" pitchFamily="34" charset="-120"/>
               </a:rPr>
-              <a:t>动力电池出海面临合规与本土化新考题</a:t>
+              <a:t>新能源汽车出口退税率由13%降至9</a:t>
             </a:r>
             <a:endParaRPr lang="en-US" sz="660" dirty="0"/>
           </a:p>
@@ -16298,7 +16492,7 @@
                 <a:ea typeface="Microsoft YaHei" pitchFamily="34" charset="-122"/>
                 <a:cs typeface="Microsoft YaHei" pitchFamily="34" charset="-120"/>
               </a:rPr>
-              <a:t>电池回收政策关注度提升，城市矿山与</a:t>
+              <a:t>此外，废旧锂电池回收相关新闻显示回</a:t>
             </a:r>
             <a:endParaRPr lang="en-US" sz="660" dirty="0"/>
           </a:p>
@@ -16405,7 +16599,7 @@
                 <a:ea typeface="Microsoft YaHei" pitchFamily="34" charset="-122"/>
                 <a:cs typeface="Microsoft YaHei" pitchFamily="34" charset="-120"/>
               </a:rPr>
-              <a:t>[6][7] 中国青年网报道合规与</a:t>
+              <a:t>[2][5][6] 出口退税下调属</a:t>
             </a:r>
             <a:endParaRPr lang="en-US" sz="660" dirty="0"/>
           </a:p>
@@ -16510,7 +16704,7 @@
                 <a:ea typeface="Microsoft YaHei" pitchFamily="34" charset="-122"/>
                 <a:cs typeface="Microsoft YaHei" pitchFamily="34" charset="-120"/>
               </a:rPr>
-              <a:t>若海外回收合规要求进一步细化并提高准入门槛，则磷酸铁锂正极材料出海企业需增加回收配套投入，海外项目成本可能上升</a:t>
+              <a:t>若出口退税下调后新能源汽车出口量明显下滑，则电池厂可能减少海外订单并向上游压价，磷酸铁锂需求承压</a:t>
             </a:r>
             <a:endParaRPr lang="en-US" sz="1020" dirty="0"/>
           </a:p>
@@ -16659,7 +16853,7 @@
                 <a:ea typeface="Aptos" pitchFamily="34" charset="-122"/>
                 <a:cs typeface="Aptos" pitchFamily="34" charset="-120"/>
               </a:rPr>
-              <a:t>2026-10-23</a:t>
+              <a:t>2026-10-26</a:t>
             </a:r>
             <a:endParaRPr lang="en-US" sz="800" dirty="0"/>
           </a:p>
@@ -16865,7 +17059,7 @@
                 <a:ea typeface="Microsoft YaHei" pitchFamily="34" charset="-122"/>
                 <a:cs typeface="Microsoft YaHei" pitchFamily="34" charset="-120"/>
               </a:rPr>
-              <a:t>4 条公开来源交叉验证｜事实、影响与后续研判</a:t>
+              <a:t>2 条公开来源交叉验证｜事实、影响与后续研判</a:t>
             </a:r>
             <a:endParaRPr lang="en-US" sz="860" dirty="0"/>
           </a:p>
@@ -16974,7 +17168,7 @@
                 <a:ea typeface="Microsoft YaHei" pitchFamily="34" charset="-122"/>
                 <a:cs typeface="Microsoft YaHei" pitchFamily="34" charset="-120"/>
               </a:rPr>
-              <a:t>宝马第六代动力电池在沈阳下线，极狐阿尔法T7电池品牌受关注，长虹高倍率锂电池推进，固态电池项目投产，竞品技术路线多元化对磷酸铁锂需求结构产生影响。 [8][9][10][4]</a:t>
+              <a:t>清陶能源80亿元固态电池项目一期投产，固态电池产业化推进对磷酸铁锂长期技术路线构成潜在竞争；电摩锂电化趋势中，磷酸铁锂需与其他锂电路线竞争轻型动力市场，但今日信息未披露具体竞品份额变化。 [1][4]</a:t>
             </a:r>
             <a:endParaRPr lang="en-US" sz="960" dirty="0"/>
           </a:p>
@@ -17015,7 +17209,7 @@
                 <a:ea typeface="Aptos" pitchFamily="34" charset="-122"/>
                 <a:cs typeface="Aptos" pitchFamily="34" charset="-120"/>
               </a:rPr>
-              <a:t>依据：[8][9][10][4]</a:t>
+              <a:t>依据：[1][4]</a:t>
             </a:r>
             <a:endParaRPr lang="en-US" sz="740" dirty="0"/>
           </a:p>
@@ -17124,7 +17318,7 @@
                 <a:ea typeface="Microsoft YaHei" pitchFamily="34" charset="-122"/>
                 <a:cs typeface="Microsoft YaHei" pitchFamily="34" charset="-120"/>
               </a:rPr>
-              <a:t>宝马第六代动力电池下线可能采用更高能量密度体系，对磷酸铁锂在高端车型的应用份额形成竞争；极狐阿尔法T7电池品牌选择反映车企对电池兜底能力的关注，磷酸铁锂安全性优势仍存；长虹高倍率锂电池与清陶固态电池项目推进，表明细分场景技术路线分化，磷酸铁锂需在成本与安全之间保持平衡。竞品技术进展可能影响磷酸铁锂在动力与储能市场的渗透节奏。</a:t>
+              <a:t>固态电池项目投产是今日竞品观察的核心信号，若固态电池在高端电动汽车领域加速渗透，可能分流磷酸铁锂的部分增量需求。电摩锂电化新闻提到锂电化成为电摩起飞关键，但未明确磷酸铁锂与三元等其他路线的占比，磷酸铁锂在成本和安全上的优势可能使其在电摩市场具备竞争力。需验证：清陶固态电池项目的客户和装车计划；电摩用锂电池的正极材料路线分布。</a:t>
             </a:r>
             <a:endParaRPr lang="en-US" sz="960" dirty="0"/>
           </a:p>
@@ -17258,7 +17452,7 @@
                 <a:ea typeface="Microsoft YaHei" pitchFamily="34" charset="-122"/>
                 <a:cs typeface="Microsoft YaHei" pitchFamily="34" charset="-120"/>
               </a:rPr>
-              <a:t>若宝马第六代电池等高端竞品加速放量，则磷酸铁锂在高端乘用车市场份额可能受挤压，但在中低端车型与储能领域需求韧性仍存；若固态电池商业化进度超预期，则磷酸铁锂长期需求预期可能下修。跟踪指标：宝马第六代电池配套车型销量、固态电池装车量、磷酸铁锂在动力电池装机占比月度变化。</a:t>
+              <a:t>若固态电池在2027年前实现规模化装车且成本接近磷酸铁锂，则磷酸铁锂在高端电动汽车市场的份额可能被侵蚀；若电摩锂电化加速且磷酸铁锂成为主流选择，则磷酸铁锂在轻型动力领域可能获得新增量。跟踪指标：固态电池装车量和成本数据、电摩用锂电池出货量及正极材料类型占比。证据边界：固态电池项目刚投产，实际性能和成本尚未公开；电摩新闻未披露电池路线具体份额。</a:t>
             </a:r>
             <a:endParaRPr lang="en-US" sz="960" dirty="0"/>
           </a:p>
@@ -17504,7 +17698,7 @@
                 <a:ea typeface="Microsoft YaHei" pitchFamily="34" charset="-122"/>
                 <a:cs typeface="Microsoft YaHei" pitchFamily="34" charset="-120"/>
               </a:rPr>
-              <a:t>宝马第六代动力电池在沈阳下</a:t>
+              <a:t>清陶能源80亿元固态电池项</a:t>
             </a:r>
             <a:endParaRPr lang="en-US" sz="670" dirty="0"/>
           </a:p>
@@ -17611,7 +17805,7 @@
                 <a:ea typeface="Microsoft YaHei" pitchFamily="34" charset="-122"/>
                 <a:cs typeface="Microsoft YaHei" pitchFamily="34" charset="-120"/>
               </a:rPr>
-              <a:t>[8][9][10][4]</a:t>
+              <a:t>电摩锂电化趋势中，磷酸铁锂</a:t>
             </a:r>
             <a:endParaRPr lang="en-US" sz="670" dirty="0"/>
           </a:p>
@@ -17718,7 +17912,7 @@
                 <a:ea typeface="Microsoft YaHei" pitchFamily="34" charset="-122"/>
                 <a:cs typeface="Microsoft YaHei" pitchFamily="34" charset="-120"/>
               </a:rPr>
-              <a:t>极狐阿尔法T7电池品牌选择</a:t>
+              <a:t>[1][4] 固态电池项目</a:t>
             </a:r>
             <a:endParaRPr lang="en-US" sz="670" dirty="0"/>
           </a:p>
@@ -17825,7 +18019,7 @@
                 <a:ea typeface="Microsoft YaHei" pitchFamily="34" charset="-122"/>
                 <a:cs typeface="Microsoft YaHei" pitchFamily="34" charset="-120"/>
               </a:rPr>
-              <a:t>宝马第六代动力电池在沈阳下</a:t>
+              <a:t>清陶能源80亿元固态电池项</a:t>
             </a:r>
             <a:endParaRPr lang="en-US" sz="670" dirty="0"/>
           </a:p>
@@ -17971,7 +18165,7 @@
                 <a:ea typeface="Microsoft YaHei" pitchFamily="34" charset="-122"/>
                 <a:cs typeface="Microsoft YaHei" pitchFamily="34" charset="-120"/>
               </a:rPr>
-              <a:t>若宝马第六代电池等高端竞品加速放量，则磷酸铁锂在高端乘用车市场份额可能受挤压，但在中低端车型与储能领域需求韧性仍存</a:t>
+              <a:t>若固态电池在2027年前实现规模化装车且成本接近磷酸铁锂，则磷酸铁锂在高端电动汽车市场的份额可能被侵蚀</a:t>
             </a:r>
             <a:endParaRPr lang="en-US" sz="1020" dirty="0"/>
           </a:p>
@@ -18120,7 +18314,7 @@
                 <a:ea typeface="Aptos" pitchFamily="34" charset="-122"/>
                 <a:cs typeface="Aptos" pitchFamily="34" charset="-120"/>
               </a:rPr>
-              <a:t>2026-10-23</a:t>
+              <a:t>2026-10-26</a:t>
             </a:r>
             <a:endParaRPr lang="en-US" sz="800" dirty="0"/>
           </a:p>
@@ -18435,7 +18629,7 @@
                 <a:ea typeface="Microsoft YaHei" pitchFamily="34" charset="-122"/>
                 <a:cs typeface="Microsoft YaHei" pitchFamily="34" charset="-120"/>
               </a:rPr>
-              <a:t>风险方面，高压实产品吨试到量产验证周期不确定，龙蟠印尼项目股权出售或影响海外供给节奏，锂矿业绩分歧反映成本传导不畅；机会方面，高压实技术领先者可能获得结构性溢价，电池回收体系建设加速带来回收料供给增量；需观察高压实订单落地、海外项目股权交割及碳酸锂价格走势。 [2][3][5]</a:t>
+              <a:t>风险方面，磷酸铁锂龙头扩产延续叠加出口退税下调，供给压力和需求不确定性并存；机会方面，电摩锂电化和储能等非汽车领域可能为磷酸铁锂打开增量空间；观察重点是扩产项目投产节奏、出口退税政策实际影响和磷酸铁锂价格走势。 [1][2][4]</a:t>
             </a:r>
             <a:endParaRPr lang="en-US" sz="960" dirty="0"/>
           </a:p>
@@ -18476,7 +18670,7 @@
                 <a:ea typeface="Aptos" pitchFamily="34" charset="-122"/>
                 <a:cs typeface="Aptos" pitchFamily="34" charset="-120"/>
               </a:rPr>
-              <a:t>依据：[2][3][5]</a:t>
+              <a:t>依据：[1][2][4]</a:t>
             </a:r>
             <a:endParaRPr lang="en-US" sz="740" dirty="0"/>
           </a:p>
@@ -18585,7 +18779,7 @@
                 <a:ea typeface="Microsoft YaHei" pitchFamily="34" charset="-122"/>
                 <a:cs typeface="Microsoft YaHei" pitchFamily="34" charset="-120"/>
               </a:rPr>
-              <a:t>高压实技术迭代带来产品分化机会，但天原第五代从吨试到批量供货仍需客户验证，存在不及预期风险；龙蟠印尼项目股权出售可能降低其海外资本开支压力，但买方背景与后续建设进度不明，影响海外供给增量判断；锂矿业绩高增与预期分歧并存，中下游盈利压力可能持续；电池回收体系建设加速，长期可能改变原料供给结构。需综合跟踪订单、价格与政策信号。</a:t>
+              <a:t>当前行业信号多空交织：扩产新闻显示龙头对需求乐观，但出口退税下调可能抑制海外需求，两者共同作用决定磷酸铁锂价格和盈利方向。电摩锂电化新闻提示轻型动力领域可能成为磷酸铁锂的新增长点，但规模尚小。需持续调研：磷酸铁锂在储能领域的订单变化；扩产企业的资金和建设进度；出口退税下调后电池厂海外定价策略调整。</a:t>
             </a:r>
             <a:endParaRPr lang="en-US" sz="960" dirty="0"/>
           </a:p>
@@ -18719,7 +18913,7 @@
                 <a:ea typeface="Microsoft YaHei" pitchFamily="34" charset="-122"/>
                 <a:cs typeface="Microsoft YaHei" pitchFamily="34" charset="-120"/>
               </a:rPr>
-              <a:t>若天原第五代高压实产品在2026年底前未获批量订单，则市场对其技术兑现预期可能下修，高压实赛道估值分化；若龙蟠印尼项目股权出售后建设进度明确，则海外供给增量预期可重新评估；若碳酸锂价格持续高位，则中下游正极材料企业盈利压力难以缓解。跟踪指标：天原高压实订单公告、印尼项目股权交割及建设进度、碳酸锂现货价格、磷酸铁锂正极材料月度均价。</a:t>
+              <a:t>若扩产项目投产进度快于需求增速且出口退税下调抑制海外需求，则磷酸铁锂价格和加工费可能继续承压；若电摩和储能等非汽车领域需求超预期增长，则可能部分对冲汽车领域的需求波动。跟踪指标：磷酸铁锂周度价格、扩产项目投产公告、电摩和储能电池月度出货量、新能源汽车出口数据。证据边界：当前仅有扩产和退税政策新闻，实际供需变化需等待月度数据验证；电摩和储能领域对磷酸铁锂的具体需求规模尚未披露。</a:t>
             </a:r>
             <a:endParaRPr lang="en-US" sz="960" dirty="0"/>
           </a:p>
@@ -18965,7 +19159,7 @@
                 <a:ea typeface="Microsoft YaHei" pitchFamily="34" charset="-122"/>
                 <a:cs typeface="Microsoft YaHei" pitchFamily="34" charset="-120"/>
               </a:rPr>
-              <a:t>风险方面，高压实产品吨试到</a:t>
+              <a:t>风险方面，磷酸铁锂龙头扩产</a:t>
             </a:r>
             <a:endParaRPr lang="en-US" sz="670" dirty="0"/>
           </a:p>
@@ -19072,7 +19266,7 @@
                 <a:ea typeface="Microsoft YaHei" pitchFamily="34" charset="-122"/>
                 <a:cs typeface="Microsoft YaHei" pitchFamily="34" charset="-120"/>
               </a:rPr>
-              <a:t>机会方面，高压实技术领先者</a:t>
+              <a:t>机会方面，电摩锂电化和储能</a:t>
             </a:r>
             <a:endParaRPr lang="en-US" sz="670" dirty="0"/>
           </a:p>
@@ -19179,7 +19373,7 @@
                 <a:ea typeface="Microsoft YaHei" pitchFamily="34" charset="-122"/>
                 <a:cs typeface="Microsoft YaHei" pitchFamily="34" charset="-120"/>
               </a:rPr>
-              <a:t>需观察高压实订单落地、海外</a:t>
+              <a:t>观察重点是扩产项目投产节奏</a:t>
             </a:r>
             <a:endParaRPr lang="en-US" sz="670" dirty="0"/>
           </a:p>
@@ -19286,7 +19480,7 @@
                 <a:ea typeface="Microsoft YaHei" pitchFamily="34" charset="-122"/>
                 <a:cs typeface="Microsoft YaHei" pitchFamily="34" charset="-120"/>
               </a:rPr>
-              <a:t>风险方面，高压实产品吨试到</a:t>
+              <a:t>风险方面，磷酸铁锂龙头扩产</a:t>
             </a:r>
             <a:endParaRPr lang="en-US" sz="670" dirty="0"/>
           </a:p>
@@ -19432,7 +19626,7 @@
                 <a:ea typeface="Microsoft YaHei" pitchFamily="34" charset="-122"/>
                 <a:cs typeface="Microsoft YaHei" pitchFamily="34" charset="-120"/>
               </a:rPr>
-              <a:t>若天原第五代高压实产品在2026年底前未获批量订单，则市场对其技术兑现预期可能下修，高压实赛道估值分化</a:t>
+              <a:t>若扩产项目投产进度快于需求增速且出口退税下调抑制海外需求，则磷酸铁锂价格和加工费可能继续承压</a:t>
             </a:r>
             <a:endParaRPr lang="en-US" sz="1020" dirty="0"/>
           </a:p>

--- a/docs/reports/latest.pptx
+++ b/docs/reports/latest.pptx
@@ -1876,7 +1876,7 @@
                 <a:ea typeface="Aptos" pitchFamily="34" charset="-122"/>
                 <a:cs typeface="Aptos" pitchFamily="34" charset="-120"/>
               </a:rPr>
-              <a:t>2026-10-26</a:t>
+              <a:t>2026-10-27</a:t>
             </a:r>
             <a:endParaRPr lang="en-US" sz="800" dirty="0"/>
           </a:p>
@@ -2160,7 +2160,7 @@
                 <a:ea typeface="Microsoft YaHei" pitchFamily="34" charset="-122"/>
                 <a:cs typeface="Microsoft YaHei" pitchFamily="34" charset="-120"/>
               </a:rPr>
-              <a:t>今日磷酸铁锂行业信息以扩产和出海政策变化为主。湖南裕能、万华化学再度扩产磷酸铁锂，显示龙头对需求预期仍偏乐观；新能源汽车出口退税率从13%降至9%，可能抬高出海成本并倒逼电池环节降本。宁德时代三季报高增，机构关注盈利拐点，但需区分其磷酸铁锂业务贡献。整体看，供给扩张与出口政策收紧并存，行业盈利修复仍需观察产能消化和海外需求弹性。</a:t>
+              <a:t>今日磷酸铁锂行业信号集中在政策收紧与回收压力：国内新能源车政策收紧可能压制短期需求，而动力电池高值化利用被定性为淘汰赛，叠加首批电车脱保潮，回收与梯次利用环节的合规成本上升。供给端，湖南裕能拟20亿元扩产，万华化学二期开工，显示头部企业仍在加码磷酸铁锂正极产能，中期供给压力不减。需求端，零跑与海泰科服合作攻坚前沿电池技术，但未明确磷酸铁锂路线。整体看，政策与回收约束强化，产能扩张延续，行业盈利修复仍需观察需求增速与成本传导。</a:t>
             </a:r>
             <a:endParaRPr lang="en-US" sz="1400" dirty="0"/>
           </a:p>
@@ -2898,7 +2898,7 @@
                 <a:ea typeface="Microsoft YaHei" pitchFamily="34" charset="-122"/>
                 <a:cs typeface="Microsoft YaHei" pitchFamily="34" charset="-120"/>
               </a:rPr>
-              <a:t>今日磷酸铁锂行业信息以扩产和出海政策变化为主。湖南裕能、万华化学再度扩产磷酸铁锂，显示龙头对需求预期仍偏乐观；新能源汽车出口退税率从13%降至</a:t>
+              <a:t>今日磷酸铁锂行业信号集中在政策收紧与回收压力：国内新能源车政策收紧可能压制短期需求，而动力电池高值化利用被定性为淘汰赛，叠加首批电车脱保潮，回</a:t>
             </a:r>
             <a:endParaRPr lang="en-US" sz="1020" dirty="0"/>
           </a:p>
@@ -3047,7 +3047,7 @@
                 <a:ea typeface="Aptos" pitchFamily="34" charset="-122"/>
                 <a:cs typeface="Aptos" pitchFamily="34" charset="-120"/>
               </a:rPr>
-              <a:t>2026-10-26</a:t>
+              <a:t>2026-10-27</a:t>
             </a:r>
             <a:endParaRPr lang="en-US" sz="800" dirty="0"/>
           </a:p>
@@ -3612,7 +3612,7 @@
                 <a:ea typeface="Microsoft YaHei" pitchFamily="34" charset="-122"/>
                 <a:cs typeface="Microsoft YaHei" pitchFamily="34" charset="-120"/>
               </a:rPr>
-              <a:t>【一周投资热点】湖南裕能/万华化学再扩磷酸铁锂！清陶能源80亿元固态电</a:t>
+              <a:t>2026新能源车第四季度展望：国内政策收紧，海外冷热不均 - 电子工程</a:t>
             </a:r>
             <a:endParaRPr lang="en-US" sz="680" dirty="0"/>
           </a:p>
@@ -3653,7 +3653,7 @@
                 <a:ea typeface="Aptos" pitchFamily="34" charset="-122"/>
                 <a:cs typeface="Aptos" pitchFamily="34" charset="-120"/>
               </a:rPr>
-              <a:t>https://news.google.com/rss/articles/CBMiY0FVX3lxTE9kOGZ3VUJ5X0ZwWFF4QlNQUklDRndUZlBEQXVHZTludjJ3TlEzeHFkd2E5Nk9TdDMwQUFzcDFnQTdyRUhHaUhKUnR0YkFQUzRDeVlTQ3lYeGJSRFozaGxSTlFwbw?oc=5</a:t>
+              <a:t>https://www.eet-china.com/mp/a534030.html</a:t>
             </a:r>
             <a:endParaRPr lang="en-US" sz="580" dirty="0"/>
           </a:p>
@@ -3799,7 +3799,7 @@
                 <a:ea typeface="Microsoft YaHei" pitchFamily="34" charset="-122"/>
                 <a:cs typeface="Microsoft YaHei" pitchFamily="34" charset="-120"/>
               </a:rPr>
-              <a:t>从13%到9%，新能源汽车出海告别千亿退税红利_车市动态 - 中金在线</a:t>
+              <a:t>清华大学教授徐盛明：动力电池高值化利用产业是一场淘汰赛 - Sohu</a:t>
             </a:r>
             <a:endParaRPr lang="en-US" sz="680" dirty="0"/>
           </a:p>
@@ -3840,7 +3840,7 @@
                 <a:ea typeface="Aptos" pitchFamily="34" charset="-122"/>
                 <a:cs typeface="Aptos" pitchFamily="34" charset="-120"/>
               </a:rPr>
-              <a:t>http://auto.cnfol.com/cheshidongtai/20261026/32407513.shtml</a:t>
+              <a:t>https://news.google.com/rss/articles/CBMijwFBVV95cUxOZDUyUFNQSDdVMEN4WE5oWUoySHlEb2dWdU1xdGlud29YOUtGUGM1RFZrSV85bHVCUC1hOGVWNGJVN21zUTdfdDRtc1FjNFNSN3ppd28xUGlLR09xQVo4ZHRwOUV2eHZKZVpIdjVWTnpIaGFNSVo2UWluOHctU09vTlZqVi1hdVloX3dyYjRzWQ?oc=5</a:t>
             </a:r>
             <a:endParaRPr lang="en-US" sz="580" dirty="0"/>
           </a:p>
@@ -3986,7 +3986,7 @@
                 <a:ea typeface="Microsoft YaHei" pitchFamily="34" charset="-122"/>
                 <a:cs typeface="Microsoft YaHei" pitchFamily="34" charset="-120"/>
               </a:rPr>
-              <a:t>宁德时代三季报业绩高增 机构看好盈利拐点显现 - 手机新浪网</a:t>
+              <a:t>换电池8万残值仅3万，2000万辆电车脱保潮谁兜底 - 汽车之家</a:t>
             </a:r>
             <a:endParaRPr lang="en-US" sz="680" dirty="0"/>
           </a:p>
@@ -4027,7 +4027,7 @@
                 <a:ea typeface="Aptos" pitchFamily="34" charset="-122"/>
                 <a:cs typeface="Aptos" pitchFamily="34" charset="-120"/>
               </a:rPr>
-              <a:t>https://k.sina.com.cn/article_5953740931_162dee0830670435tw.html</a:t>
+              <a:t>https://chejiahao.autohome.com.cn/info/26742762</a:t>
             </a:r>
             <a:endParaRPr lang="en-US" sz="580" dirty="0"/>
           </a:p>
@@ -4173,7 +4173,7 @@
                 <a:ea typeface="Microsoft YaHei" pitchFamily="34" charset="-122"/>
                 <a:cs typeface="Microsoft YaHei" pitchFamily="34" charset="-120"/>
               </a:rPr>
-              <a:t>锂电化成为电摩起飞关键，但谁更值得渠道“押注”？ - 手机搜狐网</a:t>
+              <a:t>【正极材料周报】湖南裕能拟20亿元于湖南湘潭再建厂！万华化学山东莱州项</a:t>
             </a:r>
             <a:endParaRPr lang="en-US" sz="680" dirty="0"/>
           </a:p>
@@ -4214,7 +4214,7 @@
                 <a:ea typeface="Aptos" pitchFamily="34" charset="-122"/>
                 <a:cs typeface="Aptos" pitchFamily="34" charset="-120"/>
               </a:rPr>
-              <a:t>https://m.sohu.com/a/1092685047_121017563?scm=10001.325_13-325_13.0.0-0-0-0-0.5_1334</a:t>
+              <a:t>https://news.google.com/rss/articles/CBMiY0FVX3lxTFBRdENNOG1nNWcwTWZ6V1czSmM3R3BTYlVxX2NZeDZINzltWm9zZllkelJkNVlMMEwxT3FFM1c1eUIyUnJHSzFmSnJFbVhUcjZxVXg2M2xFZmI2bDVYVEx4RlBFYw?oc=5</a:t>
             </a:r>
             <a:endParaRPr lang="en-US" sz="580" dirty="0"/>
           </a:p>
@@ -4360,7 +4360,7 @@
                 <a:ea typeface="Microsoft YaHei" pitchFamily="34" charset="-122"/>
                 <a:cs typeface="Microsoft YaHei" pitchFamily="34" charset="-120"/>
               </a:rPr>
-              <a:t>吉尔吉斯斯坦将设立超850个废旧电池环保回收箱 - TV BRICS</a:t>
+              <a:t>投资成果｜签约零跑！海泰科服投资企业攻坚前沿电池技术 - 碳索储能网</a:t>
             </a:r>
             <a:endParaRPr lang="en-US" sz="680" dirty="0"/>
           </a:p>
@@ -4401,7 +4401,7 @@
                 <a:ea typeface="Aptos" pitchFamily="34" charset="-122"/>
                 <a:cs typeface="Aptos" pitchFamily="34" charset="-120"/>
               </a:rPr>
-              <a:t>https://tvbrics.com/cn/news/kyrgyzstan-to-install-over-850-eco-boxes-for-used-battery-collection/</a:t>
+              <a:t>https://mcn.solarbe.com/news/20261027/50030949.html</a:t>
             </a:r>
             <a:endParaRPr lang="en-US" sz="580" dirty="0"/>
           </a:p>
@@ -4547,7 +4547,7 @@
                 <a:ea typeface="Microsoft YaHei" pitchFamily="34" charset="-122"/>
                 <a:cs typeface="Microsoft YaHei" pitchFamily="34" charset="-120"/>
               </a:rPr>
-              <a:t>废旧锂电池如何变废为宝一套完整破碎分选设备全流程揭秘 - 手机网易网</a:t>
+              <a:t>江西拓智科技：以激光精焊技术守护动力电池安全防线 - 搜狐网</a:t>
             </a:r>
             <a:endParaRPr lang="en-US" sz="680" dirty="0"/>
           </a:p>
@@ -4588,7 +4588,7 @@
                 <a:ea typeface="Aptos" pitchFamily="34" charset="-122"/>
                 <a:cs typeface="Aptos" pitchFamily="34" charset="-120"/>
               </a:rPr>
-              <a:t>https://www.163.com/dy/article/LA34VCMF0553NYPG.html</a:t>
+              <a:t>https://news.google.com/rss/articles/CBMijAFBVV95cUxNWllXMFdycTQwSjV1ZWRTWTk2emh6NmtQUHZGRVJCeEF3RktxU1NENWpJa3V4MGhxZFdnNWtscTNxaFZoQUg5akdlMFhCMF9pVERob3VTY1FXVGwwZjNRXzhrR0JncDJZbEpkMnpKMTVaRzlZRy1BNjVYdnk5eUF5UmhMT2UyYkVHYVYtXw?oc=5</a:t>
             </a:r>
             <a:endParaRPr lang="en-US" sz="580" dirty="0"/>
           </a:p>
@@ -4693,7 +4693,7 @@
                 <a:ea typeface="Microsoft YaHei" pitchFamily="34" charset="-122"/>
                 <a:cs typeface="Microsoft YaHei" pitchFamily="34" charset="-120"/>
               </a:rPr>
-              <a:t>中国电池网</a:t>
+              <a:t>中国磷酸铁锂行业官方政策与</a:t>
             </a:r>
             <a:endParaRPr lang="en-US" sz="680" dirty="0"/>
           </a:p>
@@ -4734,7 +4734,7 @@
                 <a:ea typeface="Microsoft YaHei" pitchFamily="34" charset="-122"/>
                 <a:cs typeface="Microsoft YaHei" pitchFamily="34" charset="-120"/>
               </a:rPr>
-              <a:t>【正极材料周报】贵州一含60万吨磷酸铁锂项目传新进展！锂业巨头前三季度</a:t>
+              <a:t>坐标贵州台江！3万吨废旧锂电池回收项目有新进展 - 上海有色金属</a:t>
             </a:r>
             <a:endParaRPr lang="en-US" sz="680" dirty="0"/>
           </a:p>
@@ -4775,7 +4775,7 @@
                 <a:ea typeface="Aptos" pitchFamily="34" charset="-122"/>
                 <a:cs typeface="Aptos" pitchFamily="34" charset="-120"/>
               </a:rPr>
-              <a:t>https://www.itdcw.com/news/dczk/101915V592026.html</a:t>
+              <a:t>https://news.smm.cn/news/104179526</a:t>
             </a:r>
             <a:endParaRPr lang="en-US" sz="580" dirty="0"/>
           </a:p>
@@ -4921,7 +4921,7 @@
                 <a:ea typeface="Microsoft YaHei" pitchFamily="34" charset="-122"/>
                 <a:cs typeface="Microsoft YaHei" pitchFamily="34" charset="-120"/>
               </a:rPr>
-              <a:t>我国研发新型无钴高镍正极材料 显著提升快充效率与循环寿命_电池网</a:t>
+              <a:t>中国电池网</a:t>
             </a:r>
             <a:endParaRPr lang="en-US" sz="680" dirty="0"/>
           </a:p>
@@ -4962,7 +4962,7 @@
                 <a:ea typeface="Aptos" pitchFamily="34" charset="-122"/>
                 <a:cs typeface="Aptos" pitchFamily="34" charset="-120"/>
               </a:rPr>
-              <a:t>https://www.itdcw.com/news/focus/100415Rb2026.html</a:t>
+              <a:t>https://www.itdcw.com/</a:t>
             </a:r>
             <a:endParaRPr lang="en-US" sz="580" dirty="0"/>
           </a:p>
@@ -5067,7 +5067,7 @@
                 <a:ea typeface="Microsoft YaHei" pitchFamily="34" charset="-122"/>
                 <a:cs typeface="Microsoft YaHei" pitchFamily="34" charset="-120"/>
               </a:rPr>
-              <a:t>中国电池网</a:t>
+              <a:t>鑫椤锂电</a:t>
             </a:r>
             <a:endParaRPr lang="en-US" sz="680" dirty="0"/>
           </a:p>
@@ -5108,7 +5108,7 @@
                 <a:ea typeface="Microsoft YaHei" pitchFamily="34" charset="-122"/>
                 <a:cs typeface="Microsoft YaHei" pitchFamily="34" charset="-120"/>
               </a:rPr>
-              <a:t>同体积容量击穿行业纪录！多氟多两款大圆柱磷酸铁锂换电方案发布_电池网</a:t>
+              <a:t>鑫椤锂电</a:t>
             </a:r>
             <a:endParaRPr lang="en-US" sz="680" dirty="0"/>
           </a:p>
@@ -5149,7 +5149,7 @@
                 <a:ea typeface="Aptos" pitchFamily="34" charset="-122"/>
                 <a:cs typeface="Aptos" pitchFamily="34" charset="-120"/>
               </a:rPr>
-              <a:t>https://www.itdcw.com/news/chanpinxinwen/06251562M2026.html</a:t>
+              <a:t>https://www.icbattery.com/</a:t>
             </a:r>
             <a:endParaRPr lang="en-US" sz="580" dirty="0"/>
           </a:p>
@@ -5254,7 +5254,7 @@
                 <a:ea typeface="Microsoft YaHei" pitchFamily="34" charset="-122"/>
                 <a:cs typeface="Microsoft YaHei" pitchFamily="34" charset="-120"/>
               </a:rPr>
-              <a:t>中国电池网</a:t>
+              <a:t>高工锂电</a:t>
             </a:r>
             <a:endParaRPr lang="en-US" sz="680" dirty="0"/>
           </a:p>
@@ -5295,7 +5295,7 @@
                 <a:ea typeface="Microsoft YaHei" pitchFamily="34" charset="-122"/>
                 <a:cs typeface="Microsoft YaHei" pitchFamily="34" charset="-120"/>
               </a:rPr>
-              <a:t>磷酸铁锂动力型电池与磷酸铁锂储能型电池的区别分析_电池网</a:t>
+              <a:t>高工锂电</a:t>
             </a:r>
             <a:endParaRPr lang="en-US" sz="680" dirty="0"/>
           </a:p>
@@ -5336,7 +5336,7 @@
                 <a:ea typeface="Aptos" pitchFamily="34" charset="-122"/>
                 <a:cs typeface="Aptos" pitchFamily="34" charset="-120"/>
               </a:rPr>
-              <a:t>https://www.itdcw.com/news/dianchibaike/06301359262023.html</a:t>
+              <a:t>https://www.gg-lb.com/</a:t>
             </a:r>
             <a:endParaRPr lang="en-US" sz="580" dirty="0"/>
           </a:p>
@@ -5441,7 +5441,7 @@
                 <a:ea typeface="Microsoft YaHei" pitchFamily="34" charset="-122"/>
                 <a:cs typeface="Microsoft YaHei" pitchFamily="34" charset="-120"/>
               </a:rPr>
-              <a:t>鑫椤锂电</a:t>
+              <a:t>电池中国</a:t>
             </a:r>
             <a:endParaRPr lang="en-US" sz="680" dirty="0"/>
           </a:p>
@@ -5482,7 +5482,7 @@
                 <a:ea typeface="Microsoft YaHei" pitchFamily="34" charset="-122"/>
                 <a:cs typeface="Microsoft YaHei" pitchFamily="34" charset="-120"/>
               </a:rPr>
-              <a:t>鑫椤锂电</a:t>
+              <a:t>电池中国</a:t>
             </a:r>
             <a:endParaRPr lang="en-US" sz="680" dirty="0"/>
           </a:p>
@@ -5523,7 +5523,7 @@
                 <a:ea typeface="Aptos" pitchFamily="34" charset="-122"/>
                 <a:cs typeface="Aptos" pitchFamily="34" charset="-120"/>
               </a:rPr>
-              <a:t>https://www.icbattery.com/</a:t>
+              <a:t>https://www.cbea.com/</a:t>
             </a:r>
             <a:endParaRPr lang="en-US" sz="580" dirty="0"/>
           </a:p>
@@ -5628,7 +5628,7 @@
                 <a:ea typeface="Microsoft YaHei" pitchFamily="34" charset="-122"/>
                 <a:cs typeface="Microsoft YaHei" pitchFamily="34" charset="-120"/>
               </a:rPr>
-              <a:t>高工锂电</a:t>
+              <a:t>证券时报</a:t>
             </a:r>
             <a:endParaRPr lang="en-US" sz="680" dirty="0"/>
           </a:p>
@@ -5669,7 +5669,7 @@
                 <a:ea typeface="Microsoft YaHei" pitchFamily="34" charset="-122"/>
                 <a:cs typeface="Microsoft YaHei" pitchFamily="34" charset="-120"/>
               </a:rPr>
-              <a:t>高工锂电</a:t>
+              <a:t>证券时报</a:t>
             </a:r>
             <a:endParaRPr lang="en-US" sz="680" dirty="0"/>
           </a:p>
@@ -5710,7 +5710,7 @@
                 <a:ea typeface="Aptos" pitchFamily="34" charset="-122"/>
                 <a:cs typeface="Aptos" pitchFamily="34" charset="-120"/>
               </a:rPr>
-              <a:t>https://www.gg-lb.com/</a:t>
+              <a:t>https://www.stcn.com/</a:t>
             </a:r>
             <a:endParaRPr lang="en-US" sz="580" dirty="0"/>
           </a:p>
@@ -5964,7 +5964,7 @@
                 <a:ea typeface="Aptos" pitchFamily="34" charset="-122"/>
                 <a:cs typeface="Aptos" pitchFamily="34" charset="-120"/>
               </a:rPr>
-              <a:t>2026-10-26</a:t>
+              <a:t>2026-10-27</a:t>
             </a:r>
             <a:endParaRPr lang="en-US" sz="800" dirty="0"/>
           </a:p>
@@ -6488,7 +6488,7 @@
                 <a:ea typeface="Microsoft YaHei" pitchFamily="34" charset="-122"/>
                 <a:cs typeface="Microsoft YaHei" pitchFamily="34" charset="-120"/>
               </a:rPr>
-              <a:t>电池中国</a:t>
+              <a:t>界面新闻</a:t>
             </a:r>
             <a:endParaRPr lang="en-US" sz="680" dirty="0"/>
           </a:p>
@@ -6529,7 +6529,7 @@
                 <a:ea typeface="Microsoft YaHei" pitchFamily="34" charset="-122"/>
                 <a:cs typeface="Microsoft YaHei" pitchFamily="34" charset="-120"/>
               </a:rPr>
-              <a:t>电池中国</a:t>
+              <a:t>界面新闻</a:t>
             </a:r>
             <a:endParaRPr lang="en-US" sz="680" dirty="0"/>
           </a:p>
@@ -6570,7 +6570,7 @@
                 <a:ea typeface="Aptos" pitchFamily="34" charset="-122"/>
                 <a:cs typeface="Aptos" pitchFamily="34" charset="-120"/>
               </a:rPr>
-              <a:t>https://www.cbea.com/</a:t>
+              <a:t>https://www.jiemian.com/</a:t>
             </a:r>
             <a:endParaRPr lang="en-US" sz="580" dirty="0"/>
           </a:p>
@@ -6675,7 +6675,7 @@
                 <a:ea typeface="Microsoft YaHei" pitchFamily="34" charset="-122"/>
                 <a:cs typeface="Microsoft YaHei" pitchFamily="34" charset="-120"/>
               </a:rPr>
-              <a:t>证券时报</a:t>
+              <a:t>工业和信息化部</a:t>
             </a:r>
             <a:endParaRPr lang="en-US" sz="680" dirty="0"/>
           </a:p>
@@ -6716,7 +6716,7 @@
                 <a:ea typeface="Microsoft YaHei" pitchFamily="34" charset="-122"/>
                 <a:cs typeface="Microsoft YaHei" pitchFamily="34" charset="-120"/>
               </a:rPr>
-              <a:t>证券时报</a:t>
+              <a:t>国新办举行国务院政策例行吹风会 介绍加强中小企业回款难问题治理有关工作</a:t>
             </a:r>
             <a:endParaRPr lang="en-US" sz="680" dirty="0"/>
           </a:p>
@@ -6757,7 +6757,7 @@
                 <a:ea typeface="Aptos" pitchFamily="34" charset="-122"/>
                 <a:cs typeface="Aptos" pitchFamily="34" charset="-120"/>
               </a:rPr>
-              <a:t>https://www.stcn.com/</a:t>
+              <a:t>http://www.miit.gov.cn/xwfb/bldhd/art/2026/art_7285ee48244d4f20b0f127c7f013ec11.html</a:t>
             </a:r>
             <a:endParaRPr lang="en-US" sz="580" dirty="0"/>
           </a:p>
@@ -6862,7 +6862,7 @@
                 <a:ea typeface="Microsoft YaHei" pitchFamily="34" charset="-122"/>
                 <a:cs typeface="Microsoft YaHei" pitchFamily="34" charset="-120"/>
               </a:rPr>
-              <a:t>界面新闻</a:t>
+              <a:t>工业和信息化部</a:t>
             </a:r>
             <a:endParaRPr lang="en-US" sz="680" dirty="0"/>
           </a:p>
@@ -6903,7 +6903,7 @@
                 <a:ea typeface="Microsoft YaHei" pitchFamily="34" charset="-122"/>
                 <a:cs typeface="Microsoft YaHei" pitchFamily="34" charset="-120"/>
               </a:rPr>
-              <a:t>界面新闻</a:t>
+              <a:t>四部门关于开展2026年度享受增值税加计抵减政策的集成电路企业清单制定</a:t>
             </a:r>
             <a:endParaRPr lang="en-US" sz="680" dirty="0"/>
           </a:p>
@@ -6944,7 +6944,7 @@
                 <a:ea typeface="Aptos" pitchFamily="34" charset="-122"/>
                 <a:cs typeface="Aptos" pitchFamily="34" charset="-120"/>
               </a:rPr>
-              <a:t>https://www.jiemian.com/</a:t>
+              <a:t>http://www.miit.gov.cn/zwgk/zcwj/wjfb/tz/art/2026/art_7d2e760b4be94217b8f55caec840b30d.html</a:t>
             </a:r>
             <a:endParaRPr lang="en-US" sz="580" dirty="0"/>
           </a:p>
@@ -7090,7 +7090,7 @@
                 <a:ea typeface="Microsoft YaHei" pitchFamily="34" charset="-122"/>
                 <a:cs typeface="Microsoft YaHei" pitchFamily="34" charset="-120"/>
               </a:rPr>
-              <a:t>国新办举行国务院政策例行吹风会 介绍加强中小企业回款难问题治理有关工作</a:t>
+              <a:t>工业和信息化部政策文件库</a:t>
             </a:r>
             <a:endParaRPr lang="en-US" sz="680" dirty="0"/>
           </a:p>
@@ -7131,7 +7131,7 @@
                 <a:ea typeface="Aptos" pitchFamily="34" charset="-122"/>
                 <a:cs typeface="Aptos" pitchFamily="34" charset="-120"/>
               </a:rPr>
-              <a:t>http://www.miit.gov.cn/xwfb/bldhd/art/2026/art_7285ee48244d4f20b0f127c7f013ec11.html</a:t>
+              <a:t>https://www.miit.gov.cn/search/zcwjk.html?websiteid=110000000000000&amp;pg=&amp;p=&amp;tpl=14&amp;category=183&amp;q=</a:t>
             </a:r>
             <a:endParaRPr lang="en-US" sz="580" dirty="0"/>
           </a:p>
@@ -7277,7 +7277,7 @@
                 <a:ea typeface="Microsoft YaHei" pitchFamily="34" charset="-122"/>
                 <a:cs typeface="Microsoft YaHei" pitchFamily="34" charset="-120"/>
               </a:rPr>
-              <a:t>四部门关于开展2026年度享受增值税加计抵减政策的集成电路企业清单制定</a:t>
+              <a:t>最新政策</a:t>
             </a:r>
             <a:endParaRPr lang="en-US" sz="680" dirty="0"/>
           </a:p>
@@ -7318,7 +7318,7 @@
                 <a:ea typeface="Aptos" pitchFamily="34" charset="-122"/>
                 <a:cs typeface="Aptos" pitchFamily="34" charset="-120"/>
               </a:rPr>
-              <a:t>http://www.miit.gov.cn/zwgk/zcwj/wjfb/tz/art/2026/art_7d2e760b4be94217b8f55caec840b30d.html</a:t>
+              <a:t>https://www.miit.gov.cn/xwfb/zxzc/index.html</a:t>
             </a:r>
             <a:endParaRPr lang="en-US" sz="580" dirty="0"/>
           </a:p>
@@ -7423,7 +7423,7 @@
                 <a:ea typeface="Microsoft YaHei" pitchFamily="34" charset="-122"/>
                 <a:cs typeface="Microsoft YaHei" pitchFamily="34" charset="-120"/>
               </a:rPr>
-              <a:t>工业和信息化部</a:t>
+              <a:t>国家发展改革委</a:t>
             </a:r>
             <a:endParaRPr lang="en-US" sz="680" dirty="0"/>
           </a:p>
@@ -7464,7 +7464,7 @@
                 <a:ea typeface="Microsoft YaHei" pitchFamily="34" charset="-122"/>
                 <a:cs typeface="Microsoft YaHei" pitchFamily="34" charset="-120"/>
               </a:rPr>
-              <a:t>工业和信息化部政策文件库</a:t>
+              <a:t>国家发展改革委</a:t>
             </a:r>
             <a:endParaRPr lang="en-US" sz="680" dirty="0"/>
           </a:p>
@@ -7505,7 +7505,7 @@
                 <a:ea typeface="Aptos" pitchFamily="34" charset="-122"/>
                 <a:cs typeface="Aptos" pitchFamily="34" charset="-120"/>
               </a:rPr>
-              <a:t>https://www.miit.gov.cn/search/zcwjk.html?websiteid=110000000000000&amp;pg=&amp;p=&amp;tpl=14&amp;category=183&amp;q=</a:t>
+              <a:t>https://www.ndrc.gov.cn/</a:t>
             </a:r>
             <a:endParaRPr lang="en-US" sz="580" dirty="0"/>
           </a:p>
@@ -7610,7 +7610,7 @@
                 <a:ea typeface="Microsoft YaHei" pitchFamily="34" charset="-122"/>
                 <a:cs typeface="Microsoft YaHei" pitchFamily="34" charset="-120"/>
               </a:rPr>
-              <a:t>工业和信息化部</a:t>
+              <a:t>中华人民共和国中央人民政府</a:t>
             </a:r>
             <a:endParaRPr lang="en-US" sz="680" dirty="0"/>
           </a:p>
@@ -7651,7 +7651,7 @@
                 <a:ea typeface="Microsoft YaHei" pitchFamily="34" charset="-122"/>
                 <a:cs typeface="Microsoft YaHei" pitchFamily="34" charset="-120"/>
               </a:rPr>
-              <a:t>最新政策</a:t>
+              <a:t>中华人民共和国中央人民政府</a:t>
             </a:r>
             <a:endParaRPr lang="en-US" sz="680" dirty="0"/>
           </a:p>
@@ -7692,7 +7692,7 @@
                 <a:ea typeface="Aptos" pitchFamily="34" charset="-122"/>
                 <a:cs typeface="Aptos" pitchFamily="34" charset="-120"/>
               </a:rPr>
-              <a:t>https://www.miit.gov.cn/xwfb/zxzc/index.html</a:t>
+              <a:t>https://www.gov.cn/</a:t>
             </a:r>
             <a:endParaRPr lang="en-US" sz="580" dirty="0"/>
           </a:p>
@@ -7797,7 +7797,7 @@
                 <a:ea typeface="Microsoft YaHei" pitchFamily="34" charset="-122"/>
                 <a:cs typeface="Microsoft YaHei" pitchFamily="34" charset="-120"/>
               </a:rPr>
-              <a:t>国家发展改革委</a:t>
+              <a:t>生态环境部</a:t>
             </a:r>
             <a:endParaRPr lang="en-US" sz="680" dirty="0"/>
           </a:p>
@@ -7838,7 +7838,7 @@
                 <a:ea typeface="Microsoft YaHei" pitchFamily="34" charset="-122"/>
                 <a:cs typeface="Microsoft YaHei" pitchFamily="34" charset="-120"/>
               </a:rPr>
-              <a:t>国家发展改革委</a:t>
+              <a:t>生态环境部</a:t>
             </a:r>
             <a:endParaRPr lang="en-US" sz="680" dirty="0"/>
           </a:p>
@@ -7879,7 +7879,7 @@
                 <a:ea typeface="Aptos" pitchFamily="34" charset="-122"/>
                 <a:cs typeface="Aptos" pitchFamily="34" charset="-120"/>
               </a:rPr>
-              <a:t>https://www.ndrc.gov.cn/</a:t>
+              <a:t>https://www.mee.gov.cn/</a:t>
             </a:r>
             <a:endParaRPr lang="en-US" sz="580" dirty="0"/>
           </a:p>
@@ -7984,7 +7984,7 @@
                 <a:ea typeface="Microsoft YaHei" pitchFamily="34" charset="-122"/>
                 <a:cs typeface="Microsoft YaHei" pitchFamily="34" charset="-120"/>
               </a:rPr>
-              <a:t>中华人民共和国中央人民政府</a:t>
+              <a:t>万润新能源</a:t>
             </a:r>
             <a:endParaRPr lang="en-US" sz="680" dirty="0"/>
           </a:p>
@@ -8025,7 +8025,7 @@
                 <a:ea typeface="Microsoft YaHei" pitchFamily="34" charset="-122"/>
                 <a:cs typeface="Microsoft YaHei" pitchFamily="34" charset="-120"/>
               </a:rPr>
-              <a:t>中华人民共和国中央人民政府</a:t>
+              <a:t>磷酸铁锂-湖北万润新能源科技股份有限公司_动力电池材料_消费电池材料_</a:t>
             </a:r>
             <a:endParaRPr lang="en-US" sz="680" dirty="0"/>
           </a:p>
@@ -8066,7 +8066,7 @@
                 <a:ea typeface="Aptos" pitchFamily="34" charset="-122"/>
                 <a:cs typeface="Aptos" pitchFamily="34" charset="-120"/>
               </a:rPr>
-              <a:t>https://www.gov.cn/</a:t>
+              <a:t>https://www.hbwanrun.com/application_details/1.html</a:t>
             </a:r>
             <a:endParaRPr lang="en-US" sz="580" dirty="0"/>
           </a:p>
@@ -8171,7 +8171,7 @@
                 <a:ea typeface="Microsoft YaHei" pitchFamily="34" charset="-122"/>
                 <a:cs typeface="Microsoft YaHei" pitchFamily="34" charset="-120"/>
               </a:rPr>
-              <a:t>生态环境部</a:t>
+              <a:t>湖南裕能</a:t>
             </a:r>
             <a:endParaRPr lang="en-US" sz="680" dirty="0"/>
           </a:p>
@@ -8212,7 +8212,7 @@
                 <a:ea typeface="Microsoft YaHei" pitchFamily="34" charset="-122"/>
                 <a:cs typeface="Microsoft YaHei" pitchFamily="34" charset="-120"/>
               </a:rPr>
-              <a:t>生态环境部</a:t>
+              <a:t>湖南裕能</a:t>
             </a:r>
             <a:endParaRPr lang="en-US" sz="680" dirty="0"/>
           </a:p>
@@ -8253,7 +8253,7 @@
                 <a:ea typeface="Aptos" pitchFamily="34" charset="-122"/>
                 <a:cs typeface="Aptos" pitchFamily="34" charset="-120"/>
               </a:rPr>
-              <a:t>https://www.mee.gov.cn/</a:t>
+              <a:t>https://www.yunengchem.com/</a:t>
             </a:r>
             <a:endParaRPr lang="en-US" sz="580" dirty="0"/>
           </a:p>
@@ -8358,7 +8358,7 @@
                 <a:ea typeface="Microsoft YaHei" pitchFamily="34" charset="-122"/>
                 <a:cs typeface="Microsoft YaHei" pitchFamily="34" charset="-120"/>
               </a:rPr>
-              <a:t>万润新能源</a:t>
+              <a:t>友山科技</a:t>
             </a:r>
             <a:endParaRPr lang="en-US" sz="680" dirty="0"/>
           </a:p>
@@ -8399,7 +8399,7 @@
                 <a:ea typeface="Microsoft YaHei" pitchFamily="34" charset="-122"/>
                 <a:cs typeface="Microsoft YaHei" pitchFamily="34" charset="-120"/>
               </a:rPr>
-              <a:t>磷酸铁锂-湖北万润新能源科技股份有限公司_动力电池材料_消费电池材料_</a:t>
+              <a:t>友山科技</a:t>
             </a:r>
             <a:endParaRPr lang="en-US" sz="680" dirty="0"/>
           </a:p>
@@ -8440,7 +8440,7 @@
                 <a:ea typeface="Aptos" pitchFamily="34" charset="-122"/>
                 <a:cs typeface="Aptos" pitchFamily="34" charset="-120"/>
               </a:rPr>
-              <a:t>https://www.hbwanrun.com/application_details/1.html</a:t>
+              <a:t>https://www.youshan-tech.com/</a:t>
             </a:r>
             <a:endParaRPr lang="en-US" sz="580" dirty="0"/>
           </a:p>
@@ -8545,7 +8545,7 @@
                 <a:ea typeface="Microsoft YaHei" pitchFamily="34" charset="-122"/>
                 <a:cs typeface="Microsoft YaHei" pitchFamily="34" charset="-120"/>
               </a:rPr>
-              <a:t>湖南裕能</a:t>
+              <a:t>江西升华</a:t>
             </a:r>
             <a:endParaRPr lang="en-US" sz="680" dirty="0"/>
           </a:p>
@@ -8586,7 +8586,7 @@
                 <a:ea typeface="Microsoft YaHei" pitchFamily="34" charset="-122"/>
                 <a:cs typeface="Microsoft YaHei" pitchFamily="34" charset="-120"/>
               </a:rPr>
-              <a:t>湖南裕能</a:t>
+              <a:t>江西升华</a:t>
             </a:r>
             <a:endParaRPr lang="en-US" sz="680" dirty="0"/>
           </a:p>
@@ -8627,7 +8627,7 @@
                 <a:ea typeface="Aptos" pitchFamily="34" charset="-122"/>
                 <a:cs typeface="Aptos" pitchFamily="34" charset="-120"/>
               </a:rPr>
-              <a:t>https://www.yunengchem.com/</a:t>
+              <a:t>https://www.shenghuaxc.com/</a:t>
             </a:r>
             <a:endParaRPr lang="en-US" sz="580" dirty="0"/>
           </a:p>
@@ -8881,7 +8881,7 @@
                 <a:ea typeface="Aptos" pitchFamily="34" charset="-122"/>
                 <a:cs typeface="Aptos" pitchFamily="34" charset="-120"/>
               </a:rPr>
-              <a:t>2026-10-26</a:t>
+              <a:t>2026-10-27</a:t>
             </a:r>
             <a:endParaRPr lang="en-US" sz="800" dirty="0"/>
           </a:p>
@@ -9085,7 +9085,7 @@
                 <a:ea typeface="Microsoft YaHei" pitchFamily="34" charset="-122"/>
                 <a:cs typeface="Microsoft YaHei" pitchFamily="34" charset="-120"/>
               </a:rPr>
-              <a:t>今日磷酸铁锂行业信息以扩产和出海政策变化为主。湖南裕能、万华化学再度扩产磷酸铁锂，显示龙头对需求预期仍偏乐观；新能源汽车出口退税率从13%降至</a:t>
+              <a:t>今日磷酸铁锂行业信号集中在政策收紧与回收压力：国内新能源车政策收紧可能压制短期需求，而动力电池高值化利用被定性为淘汰赛，叠加首批电车脱保潮，回</a:t>
             </a:r>
             <a:endParaRPr lang="en-US" sz="940" dirty="0"/>
           </a:p>
@@ -9281,7 +9281,7 @@
                 <a:ea typeface="Microsoft YaHei" pitchFamily="34" charset="-122"/>
                 <a:cs typeface="Microsoft YaHei" pitchFamily="34" charset="-120"/>
               </a:rPr>
-              <a:t>湖南裕能、万华化学再扩磷酸铁锂产能，龙头扩产延续，供给端压力预期未消；新能源汽车出口退税率由13%降至9%，出海成本上升可能向上游电池材料传导；宁德时代三季报高增但机构对盈利</a:t>
+              <a:t>政策端国内新能源车政策收紧，可能压制四季度磷酸铁锂需求增速；回收端动力电池高值化利用被定性为淘汰赛，叠加脱保潮，合规与回收成本上升。供给端湖南裕能拟20亿元扩产、万华化学二期</a:t>
             </a:r>
             <a:endParaRPr lang="en-US" sz="920" dirty="0"/>
           </a:p>
@@ -9322,7 +9322,7 @@
                 <a:ea typeface="Aptos" pitchFamily="34" charset="-122"/>
                 <a:cs typeface="Aptos" pitchFamily="34" charset="-120"/>
               </a:rPr>
-              <a:t>[1][2][3]</a:t>
+              <a:t>[1][2][3][4]</a:t>
             </a:r>
             <a:endParaRPr lang="en-US" sz="750" dirty="0"/>
           </a:p>
@@ -9518,7 +9518,7 @@
                 <a:ea typeface="Microsoft YaHei" pitchFamily="34" charset="-122"/>
                 <a:cs typeface="Microsoft YaHei" pitchFamily="34" charset="-120"/>
               </a:rPr>
-              <a:t>今日信息未出现磷酸铁锂技术路线的直接突破，但清陶能源80亿元固态电池项目一期投产的新闻与磷酸铁锂扩产同周出现，显示固态电池产业化推进对磷酸铁锂长期技术路线构成潜在竞争；电摩锂</a:t>
+              <a:t>零跑与海泰科服投资企业签约攻坚前沿电池技术，但未明确磷酸铁锂路线；江西拓智科技以激光精焊技术守护动力电池安全，属于制造工艺改进。当前磷酸铁锂技术路线仍以成本与安全为核心，前沿</a:t>
             </a:r>
             <a:endParaRPr lang="en-US" sz="920" dirty="0"/>
           </a:p>
@@ -9559,7 +9559,7 @@
                 <a:ea typeface="Aptos" pitchFamily="34" charset="-122"/>
                 <a:cs typeface="Aptos" pitchFamily="34" charset="-120"/>
               </a:rPr>
-              <a:t>[1][4]</a:t>
+              <a:t>[5][6]</a:t>
             </a:r>
             <a:endParaRPr lang="en-US" sz="750" dirty="0"/>
           </a:p>
@@ -9704,7 +9704,7 @@
         <p:spPr>
           <a:xfrm>
             <a:off x="1188720" y="4005072"/>
-            <a:ext cx="1316736" cy="54864"/>
+            <a:ext cx="877824" cy="54864"/>
           </a:xfrm>
           <a:prstGeom prst="rect">
             <a:avLst/>
@@ -9755,7 +9755,7 @@
                 <a:ea typeface="Microsoft YaHei" pitchFamily="34" charset="-122"/>
                 <a:cs typeface="Microsoft YaHei" pitchFamily="34" charset="-120"/>
               </a:rPr>
-              <a:t>湖南裕能、万华化学再度扩产磷酸铁锂，龙头产能扩张延续，行业供给端压力预期不减；宁德时代三季报业绩高增，作为磷酸铁锂主要客户之一，其排产增长可能对正极材料订单形成支撑，但具体磷</a:t>
+              <a:t>湖南裕能拟20亿元在湖南湘潭再建厂，万华化学山东莱州项目二期开工，头部磷酸铁锂正极产能继续扩张。供给端增量明确，若需求增速不能同步匹配，中期行业开工率与加工费可能承压。客户与</a:t>
             </a:r>
             <a:endParaRPr lang="en-US" sz="920" dirty="0"/>
           </a:p>
@@ -9796,7 +9796,7 @@
                 <a:ea typeface="Aptos" pitchFamily="34" charset="-122"/>
                 <a:cs typeface="Aptos" pitchFamily="34" charset="-120"/>
               </a:rPr>
-              <a:t>[1][3]</a:t>
+              <a:t>[4]</a:t>
             </a:r>
             <a:endParaRPr lang="en-US" sz="750" dirty="0"/>
           </a:p>
@@ -9941,7 +9941,7 @@
         <p:spPr>
           <a:xfrm>
             <a:off x="6766560" y="4005072"/>
-            <a:ext cx="1316736" cy="54864"/>
+            <a:ext cx="2194560" cy="54864"/>
           </a:xfrm>
           <a:prstGeom prst="rect">
             <a:avLst/>
@@ -9992,7 +9992,7 @@
                 <a:ea typeface="Microsoft YaHei" pitchFamily="34" charset="-122"/>
                 <a:cs typeface="Microsoft YaHei" pitchFamily="34" charset="-120"/>
               </a:rPr>
-              <a:t>新能源汽车出口退税率从13%降至9%，可能抬高出海成本并压缩电池厂利润，进而向上游磷酸铁锂正极材料传导降价压力；宁德时代三季报业绩高增，机构看好盈利拐点，但磷酸铁锂环节盈利是</a:t>
+              <a:t>今日无直接磷酸铁锂价格报价，但政策收紧与产能扩张信号叠加，价格与盈利压力偏向下行。国内新能源车政策收紧可能削弱需求端对正极材料的拉动力，而裕能、万华扩产增加供给，供需天平向买</a:t>
             </a:r>
             <a:endParaRPr lang="en-US" sz="920" dirty="0"/>
           </a:p>
@@ -10033,7 +10033,7 @@
                 <a:ea typeface="Aptos" pitchFamily="34" charset="-122"/>
                 <a:cs typeface="Aptos" pitchFamily="34" charset="-120"/>
               </a:rPr>
-              <a:t>[2][3]</a:t>
+              <a:t>[1][4][3]</a:t>
             </a:r>
             <a:endParaRPr lang="en-US" sz="750" dirty="0"/>
           </a:p>
@@ -10138,7 +10138,7 @@
                 <a:ea typeface="Microsoft YaHei" pitchFamily="34" charset="-122"/>
                 <a:cs typeface="Microsoft YaHei" pitchFamily="34" charset="-120"/>
               </a:rPr>
-              <a:t>今日磷酸铁锂行业信息以扩产和出海政策变化为主。湖南裕能、万华化学再度扩产磷酸铁锂，显示龙头对需求预期仍偏乐观；新能源汽车出口退税率从13%降至</a:t>
+              <a:t>今日磷酸铁锂行业信号集中在政策收紧与回收压力：国内新能源车政策收紧可能压制短期需求，而动力电池高值化利用被定性为淘汰赛，叠加首批电车脱保潮，回</a:t>
             </a:r>
             <a:endParaRPr lang="en-US" sz="1020" dirty="0"/>
           </a:p>
@@ -10287,7 +10287,7 @@
                 <a:ea typeface="Aptos" pitchFamily="34" charset="-122"/>
                 <a:cs typeface="Aptos" pitchFamily="34" charset="-120"/>
               </a:rPr>
-              <a:t>2026-10-26</a:t>
+              <a:t>2026-10-27</a:t>
             </a:r>
             <a:endParaRPr lang="en-US" sz="800" dirty="0"/>
           </a:p>
@@ -10493,7 +10493,7 @@
                 <a:ea typeface="Microsoft YaHei" pitchFamily="34" charset="-122"/>
                 <a:cs typeface="Microsoft YaHei" pitchFamily="34" charset="-120"/>
               </a:rPr>
-              <a:t>3 条公开来源交叉验证｜事实、影响与后续研判</a:t>
+              <a:t>4 条公开来源交叉验证｜事实、影响与后续研判</a:t>
             </a:r>
             <a:endParaRPr lang="en-US" sz="860" dirty="0"/>
           </a:p>
@@ -10602,7 +10602,7 @@
                 <a:ea typeface="Microsoft YaHei" pitchFamily="34" charset="-122"/>
                 <a:cs typeface="Microsoft YaHei" pitchFamily="34" charset="-120"/>
               </a:rPr>
-              <a:t>湖南裕能、万华化学再扩磷酸铁锂产能，龙头扩产延续，供给端压力预期未消；新能源汽车出口退税率由13%降至9%，出海成本上升可能向上游电池材料传导；宁德时代三季报高增但机构对盈利拐点的判断仍需磷酸铁锂细分数据验证。短期行业核心矛盾仍是产能扩张与需求增速的匹配度。 [1][2][3]</a:t>
+              <a:t>政策端国内新能源车政策收紧，可能压制四季度磷酸铁锂需求增速；回收端动力电池高值化利用被定性为淘汰赛，叠加脱保潮，合规与回收成本上升。供给端湖南裕能拟20亿元扩产、万华化学二期开工，头部产能继续加码。短期供需矛盾未解，行业盈利修复依赖需求超预期与成本下行。 [1][2][3][4]</a:t>
             </a:r>
             <a:endParaRPr lang="en-US" sz="960" dirty="0"/>
           </a:p>
@@ -10643,7 +10643,7 @@
                 <a:ea typeface="Aptos" pitchFamily="34" charset="-122"/>
                 <a:cs typeface="Aptos" pitchFamily="34" charset="-120"/>
               </a:rPr>
-              <a:t>依据：[1][2][3]</a:t>
+              <a:t>依据：[1][2][3][4]</a:t>
             </a:r>
             <a:endParaRPr lang="en-US" sz="740" dirty="0"/>
           </a:p>
@@ -10752,7 +10752,7 @@
                 <a:ea typeface="Microsoft YaHei" pitchFamily="34" charset="-122"/>
                 <a:cs typeface="Microsoft YaHei" pitchFamily="34" charset="-120"/>
               </a:rPr>
-              <a:t>扩产新闻与出口退税下调形成对冲信号：一方面龙头扩产表明对中期需求有信心，另一方面出口政策收紧可能抑制海外新能源汽车增速，进而影响磷酸铁锂正极材料需求。宁德时代业绩高增更多反映其综合竞争力，不能直接等同于磷酸铁锂环节盈利改善。需继续调研：扩产项目的具体投产时间和产能规模；出口退税下调对电池厂海外定价和订单的实际影响；磷酸铁锂正极材料价格和加工费的最新走势。</a:t>
+              <a:t>电子工程专辑指出国内政策收紧、海外冷热不均，直接影响新能源车销量预期，进而传导至磷酸铁锂正极订单；徐盛明观点与脱保潮报道共同指向回收体系压力，可能推高电池全生命周期成本，间接影响新车定价与磷酸铁锂性价比。裕能扩产与万华二期开工则意味着中期供给增量明确，若需求增速放缓，价格竞争可能加剧。需验证政策收紧的具体力度、回收政策落地节奏及头部企业开工率。</a:t>
             </a:r>
             <a:endParaRPr lang="en-US" sz="960" dirty="0"/>
           </a:p>
@@ -10886,7 +10886,7 @@
                 <a:ea typeface="Microsoft YaHei" pitchFamily="34" charset="-122"/>
                 <a:cs typeface="Microsoft YaHei" pitchFamily="34" charset="-120"/>
               </a:rPr>
-              <a:t>若后续披露的扩产项目投产进度快于需求增速，则磷酸铁锂正极材料加工费可能继续承压；若出口退税下调导致新能源汽车海外销量增速放缓，则电池厂可能向上游压价。跟踪指标：磷酸铁锂正极材料周度价格、龙头扩产项目投产公告、新能源汽车月度出口数据。证据边界：当前仅有扩产和退税政策新闻，尚无具体产能释放和订单变化数据。</a:t>
+              <a:t>若四季度国内新能源车政策收紧导致销量增速低于预期，则磷酸铁锂正极订单可能环比走弱，加工费承压；若回收政策加速落地，则具备合规回收能力的企业可能获得成本优势。跟踪指标：新能源车月度销量、正极企业开工率、碳酸锂价格、回收白名单企业数量。证据边界：政策细则尚未公布，扩产项目投产时间不确定。</a:t>
             </a:r>
             <a:endParaRPr lang="en-US" sz="960" dirty="0"/>
           </a:p>
@@ -10954,7 +10954,7 @@
                 <a:ea typeface="Microsoft YaHei" pitchFamily="34" charset="-122"/>
                 <a:cs typeface="Microsoft YaHei" pitchFamily="34" charset="-120"/>
               </a:rPr>
-              <a:t>关键数据解读</a:t>
+              <a:t>对比矩阵</a:t>
             </a:r>
             <a:endParaRPr lang="en-US" sz="1200" dirty="0"/>
           </a:p>
@@ -10968,18 +10968,16 @@
         </p:nvSpPr>
         <p:spPr>
           <a:xfrm>
-            <a:off x="7772400" y="1993392"/>
-            <a:ext cx="2560320" cy="786384"/>
-          </a:xfrm>
-          <a:prstGeom prst="roundRect">
-            <a:avLst>
-              <a:gd name="adj" fmla="val 4651"/>
-            </a:avLst>
+            <a:off x="7818120" y="2176272"/>
+            <a:ext cx="2487168" cy="1609344"/>
+          </a:xfrm>
+          <a:prstGeom prst="rect">
+            <a:avLst/>
           </a:prstGeom>
           <a:solidFill>
-            <a:srgbClr val="F4FAF6"/>
+            <a:srgbClr val="FFFFFF"/>
           </a:solidFill>
-          <a:ln w="7620">
+          <a:ln w="10160">
             <a:solidFill>
               <a:srgbClr val="DADADA"/>
             </a:solidFill>
@@ -10989,147 +10987,20 @@
       </p:sp>
       <p:sp>
         <p:nvSpPr>
-          <p:cNvPr id="25" name="Text 23"/>
-          <p:cNvSpPr/>
-          <p:nvPr/>
-        </p:nvSpPr>
-        <p:spPr>
-          <a:xfrm>
-            <a:off x="7918704" y="2103120"/>
-            <a:ext cx="822960" cy="384048"/>
-          </a:xfrm>
-          <a:prstGeom prst="rect">
-            <a:avLst/>
-          </a:prstGeom>
-          <a:noFill/>
-          <a:ln/>
-        </p:spPr>
-        <p:txBody>
-          <a:bodyPr wrap="square" lIns="0" tIns="0" rIns="0" bIns="0" rtlCol="0" anchor="ctr">
-            <a:normAutofit/>
-          </a:bodyPr>
-          <a:lstStyle/>
-          <a:p>
-            <a:pPr indent="0" marL="0">
-              <a:buNone/>
-            </a:pPr>
-            <a:r>
-              <a:rPr lang="en-US" sz="1600" b="1" dirty="0">
-                <a:solidFill>
-                  <a:srgbClr val="487052"/>
-                </a:solidFill>
-                <a:latin typeface="Aptos" pitchFamily="34" charset="0"/>
-                <a:ea typeface="Aptos" pitchFamily="34" charset="-122"/>
-                <a:cs typeface="Aptos" pitchFamily="34" charset="-120"/>
-              </a:rPr>
-              <a:t>13%</a:t>
-            </a:r>
-            <a:endParaRPr lang="en-US" sz="1600" dirty="0"/>
-          </a:p>
-        </p:txBody>
-      </p:sp>
-      <p:sp>
-        <p:nvSpPr>
-          <p:cNvPr id="26" name="Text 24"/>
-          <p:cNvSpPr/>
-          <p:nvPr/>
-        </p:nvSpPr>
-        <p:spPr>
-          <a:xfrm>
-            <a:off x="8759952" y="2167128"/>
-            <a:ext cx="1371600" cy="201168"/>
-          </a:xfrm>
-          <a:prstGeom prst="rect">
-            <a:avLst/>
-          </a:prstGeom>
-          <a:noFill/>
-          <a:ln/>
-        </p:spPr>
-        <p:txBody>
-          <a:bodyPr wrap="square" lIns="0" tIns="0" rIns="0" bIns="0" rtlCol="0" anchor="ctr">
-            <a:normAutofit/>
-          </a:bodyPr>
-          <a:lstStyle/>
-          <a:p>
-            <a:pPr indent="0" marL="0">
-              <a:buNone/>
-            </a:pPr>
-            <a:r>
-              <a:rPr lang="en-US" sz="820" b="1" dirty="0">
-                <a:solidFill>
-                  <a:srgbClr val="121212"/>
-                </a:solidFill>
-                <a:latin typeface="Microsoft YaHei" pitchFamily="34" charset="0"/>
-                <a:ea typeface="Microsoft YaHei" pitchFamily="34" charset="-122"/>
-                <a:cs typeface="Microsoft YaHei" pitchFamily="34" charset="-120"/>
-              </a:rPr>
-              <a:t>降至</a:t>
-            </a:r>
-            <a:endParaRPr lang="en-US" sz="820" dirty="0"/>
-          </a:p>
-        </p:txBody>
-      </p:sp>
-      <p:sp>
-        <p:nvSpPr>
-          <p:cNvPr id="27" name="Text 25"/>
-          <p:cNvSpPr/>
-          <p:nvPr/>
-        </p:nvSpPr>
-        <p:spPr>
-          <a:xfrm>
-            <a:off x="7918704" y="2578608"/>
-            <a:ext cx="2176272" cy="201168"/>
-          </a:xfrm>
-          <a:prstGeom prst="rect">
-            <a:avLst/>
-          </a:prstGeom>
-          <a:noFill/>
-          <a:ln/>
-        </p:spPr>
-        <p:txBody>
-          <a:bodyPr wrap="square" lIns="0" tIns="0" rIns="0" bIns="0" rtlCol="0" anchor="t">
-            <a:normAutofit/>
-          </a:bodyPr>
-          <a:lstStyle/>
-          <a:p>
-            <a:pPr indent="0" marL="0">
-              <a:buNone/>
-            </a:pPr>
-            <a:r>
-              <a:rPr lang="en-US" sz="840" dirty="0">
-                <a:solidFill>
-                  <a:srgbClr val="121212"/>
-                </a:solidFill>
-                <a:latin typeface="Microsoft YaHei" pitchFamily="34" charset="0"/>
-                <a:ea typeface="Microsoft YaHei" pitchFamily="34" charset="-122"/>
-                <a:cs typeface="Microsoft YaHei" pitchFamily="34" charset="-120"/>
-              </a:rPr>
-              <a:t>公开信息：新能源汽车出口退税率由13%降至9%，出海成本上升可能向上</a:t>
-            </a:r>
-            <a:endParaRPr lang="en-US" sz="840" dirty="0"/>
-          </a:p>
-        </p:txBody>
-      </p:sp>
-      <p:sp>
-        <p:nvSpPr>
-          <p:cNvPr id="28" name="Shape 26"/>
-          <p:cNvSpPr/>
-          <p:nvPr/>
-        </p:nvSpPr>
-        <p:spPr>
-          <a:xfrm>
-            <a:off x="7772400" y="2926080"/>
-            <a:ext cx="2560320" cy="786384"/>
-          </a:xfrm>
-          <a:prstGeom prst="roundRect">
-            <a:avLst>
-              <a:gd name="adj" fmla="val 4651"/>
-            </a:avLst>
-          </a:prstGeom>
-          <a:solidFill>
-            <a:srgbClr val="FFFFFF"/>
-          </a:solidFill>
-          <a:ln w="7620">
+          <p:cNvPr id="25" name="Shape 23"/>
+          <p:cNvSpPr/>
+          <p:nvPr/>
+        </p:nvSpPr>
+        <p:spPr>
+          <a:xfrm>
+            <a:off x="9061704" y="2176272"/>
+            <a:ext cx="0" cy="1609344"/>
+          </a:xfrm>
+          <a:prstGeom prst="line">
+            <a:avLst/>
+          </a:prstGeom>
+          <a:noFill/>
+          <a:ln w="8890">
             <a:solidFill>
               <a:srgbClr val="DADADA"/>
             </a:solidFill>
@@ -11139,14 +11010,169 @@
       </p:sp>
       <p:sp>
         <p:nvSpPr>
+          <p:cNvPr id="26" name="Shape 24"/>
+          <p:cNvSpPr/>
+          <p:nvPr/>
+        </p:nvSpPr>
+        <p:spPr>
+          <a:xfrm>
+            <a:off x="7818120" y="2980944"/>
+            <a:ext cx="2487168" cy="0"/>
+          </a:xfrm>
+          <a:prstGeom prst="line">
+            <a:avLst/>
+          </a:prstGeom>
+          <a:noFill/>
+          <a:ln w="8890">
+            <a:solidFill>
+              <a:srgbClr val="DADADA"/>
+            </a:solidFill>
+            <a:prstDash val="solid"/>
+          </a:ln>
+        </p:spPr>
+      </p:sp>
+      <p:sp>
+        <p:nvSpPr>
+          <p:cNvPr id="27" name="Shape 25"/>
+          <p:cNvSpPr/>
+          <p:nvPr/>
+        </p:nvSpPr>
+        <p:spPr>
+          <a:xfrm>
+            <a:off x="7818120" y="2176272"/>
+            <a:ext cx="1243584" cy="804672"/>
+          </a:xfrm>
+          <a:prstGeom prst="rect">
+            <a:avLst/>
+          </a:prstGeom>
+          <a:solidFill>
+            <a:srgbClr val="DDEBE0"/>
+          </a:solidFill>
+          <a:ln w="3810">
+            <a:solidFill>
+              <a:srgbClr val="DADADA"/>
+            </a:solidFill>
+            <a:prstDash val="solid"/>
+          </a:ln>
+        </p:spPr>
+      </p:sp>
+      <p:sp>
+        <p:nvSpPr>
+          <p:cNvPr id="28" name="Text 26"/>
+          <p:cNvSpPr/>
+          <p:nvPr/>
+        </p:nvSpPr>
+        <p:spPr>
+          <a:xfrm>
+            <a:off x="7891272" y="2286000"/>
+            <a:ext cx="438912" cy="109728"/>
+          </a:xfrm>
+          <a:prstGeom prst="rect">
+            <a:avLst/>
+          </a:prstGeom>
+          <a:noFill/>
+          <a:ln/>
+        </p:spPr>
+        <p:txBody>
+          <a:bodyPr wrap="square" lIns="0" tIns="0" rIns="0" bIns="0" rtlCol="0" anchor="ctr">
+            <a:normAutofit/>
+          </a:bodyPr>
+          <a:lstStyle/>
+          <a:p>
+            <a:pPr indent="0" marL="0">
+              <a:buNone/>
+            </a:pPr>
+            <a:r>
+              <a:rPr lang="en-US" sz="710" b="1" dirty="0">
+                <a:solidFill>
+                  <a:srgbClr val="487052"/>
+                </a:solidFill>
+                <a:latin typeface="Microsoft YaHei" pitchFamily="34" charset="0"/>
+                <a:ea typeface="Microsoft YaHei" pitchFamily="34" charset="-122"/>
+                <a:cs typeface="Microsoft YaHei" pitchFamily="34" charset="-120"/>
+              </a:rPr>
+              <a:t>路线A</a:t>
+            </a:r>
+            <a:endParaRPr lang="en-US" sz="710" dirty="0"/>
+          </a:p>
+        </p:txBody>
+      </p:sp>
+      <p:sp>
+        <p:nvSpPr>
           <p:cNvPr id="29" name="Text 27"/>
           <p:cNvSpPr/>
           <p:nvPr/>
         </p:nvSpPr>
         <p:spPr>
           <a:xfrm>
-            <a:off x="7918704" y="3035808"/>
-            <a:ext cx="822960" cy="384048"/>
+            <a:off x="7891272" y="2505456"/>
+            <a:ext cx="1024128" cy="201168"/>
+          </a:xfrm>
+          <a:prstGeom prst="rect">
+            <a:avLst/>
+          </a:prstGeom>
+          <a:noFill/>
+          <a:ln/>
+        </p:spPr>
+        <p:txBody>
+          <a:bodyPr wrap="square" lIns="0" tIns="0" rIns="0" bIns="0" rtlCol="0" anchor="t">
+            <a:normAutofit/>
+          </a:bodyPr>
+          <a:lstStyle/>
+          <a:p>
+            <a:pPr indent="0" marL="0">
+              <a:buNone/>
+            </a:pPr>
+            <a:r>
+              <a:rPr lang="en-US" sz="670" dirty="0">
+                <a:solidFill>
+                  <a:srgbClr val="121212"/>
+                </a:solidFill>
+                <a:latin typeface="Microsoft YaHei" pitchFamily="34" charset="0"/>
+                <a:ea typeface="Microsoft YaHei" pitchFamily="34" charset="-122"/>
+                <a:cs typeface="Microsoft YaHei" pitchFamily="34" charset="-120"/>
+              </a:rPr>
+              <a:t>政策端国内新能源车政策收紧</a:t>
+            </a:r>
+            <a:endParaRPr lang="en-US" sz="670" dirty="0"/>
+          </a:p>
+        </p:txBody>
+      </p:sp>
+      <p:sp>
+        <p:nvSpPr>
+          <p:cNvPr id="30" name="Shape 28"/>
+          <p:cNvSpPr/>
+          <p:nvPr/>
+        </p:nvSpPr>
+        <p:spPr>
+          <a:xfrm>
+            <a:off x="9061704" y="2176272"/>
+            <a:ext cx="1243584" cy="804672"/>
+          </a:xfrm>
+          <a:prstGeom prst="rect">
+            <a:avLst/>
+          </a:prstGeom>
+          <a:solidFill>
+            <a:srgbClr val="FFFFFF"/>
+          </a:solidFill>
+          <a:ln w="3810">
+            <a:solidFill>
+              <a:srgbClr val="DADADA"/>
+            </a:solidFill>
+            <a:prstDash val="solid"/>
+          </a:ln>
+        </p:spPr>
+      </p:sp>
+      <p:sp>
+        <p:nvSpPr>
+          <p:cNvPr id="31" name="Text 29"/>
+          <p:cNvSpPr/>
+          <p:nvPr/>
+        </p:nvSpPr>
+        <p:spPr>
+          <a:xfrm>
+            <a:off x="9134856" y="2286000"/>
+            <a:ext cx="438912" cy="109728"/>
           </a:xfrm>
           <a:prstGeom prst="rect">
             <a:avLst/>
@@ -11164,30 +11190,96 @@
               <a:buNone/>
             </a:pPr>
             <a:r>
-              <a:rPr lang="en-US" sz="1600" b="1" dirty="0">
+              <a:rPr lang="en-US" sz="710" b="1" dirty="0">
                 <a:solidFill>
                   <a:srgbClr val="487052"/>
                 </a:solidFill>
-                <a:latin typeface="Aptos" pitchFamily="34" charset="0"/>
-                <a:ea typeface="Aptos" pitchFamily="34" charset="-122"/>
-                <a:cs typeface="Aptos" pitchFamily="34" charset="-120"/>
-              </a:rPr>
-              <a:t>9%</a:t>
-            </a:r>
-            <a:endParaRPr lang="en-US" sz="1600" dirty="0"/>
-          </a:p>
-        </p:txBody>
-      </p:sp>
-      <p:sp>
-        <p:nvSpPr>
-          <p:cNvPr id="30" name="Text 28"/>
-          <p:cNvSpPr/>
-          <p:nvPr/>
-        </p:nvSpPr>
-        <p:spPr>
-          <a:xfrm>
-            <a:off x="8759952" y="3099816"/>
-            <a:ext cx="1371600" cy="201168"/>
+                <a:latin typeface="Microsoft YaHei" pitchFamily="34" charset="0"/>
+                <a:ea typeface="Microsoft YaHei" pitchFamily="34" charset="-122"/>
+                <a:cs typeface="Microsoft YaHei" pitchFamily="34" charset="-120"/>
+              </a:rPr>
+              <a:t>路线B</a:t>
+            </a:r>
+            <a:endParaRPr lang="en-US" sz="710" dirty="0"/>
+          </a:p>
+        </p:txBody>
+      </p:sp>
+      <p:sp>
+        <p:nvSpPr>
+          <p:cNvPr id="32" name="Text 30"/>
+          <p:cNvSpPr/>
+          <p:nvPr/>
+        </p:nvSpPr>
+        <p:spPr>
+          <a:xfrm>
+            <a:off x="9134856" y="2505456"/>
+            <a:ext cx="1024128" cy="201168"/>
+          </a:xfrm>
+          <a:prstGeom prst="rect">
+            <a:avLst/>
+          </a:prstGeom>
+          <a:noFill/>
+          <a:ln/>
+        </p:spPr>
+        <p:txBody>
+          <a:bodyPr wrap="square" lIns="0" tIns="0" rIns="0" bIns="0" rtlCol="0" anchor="t">
+            <a:normAutofit/>
+          </a:bodyPr>
+          <a:lstStyle/>
+          <a:p>
+            <a:pPr indent="0" marL="0">
+              <a:buNone/>
+            </a:pPr>
+            <a:r>
+              <a:rPr lang="en-US" sz="670" dirty="0">
+                <a:solidFill>
+                  <a:srgbClr val="121212"/>
+                </a:solidFill>
+                <a:latin typeface="Microsoft YaHei" pitchFamily="34" charset="0"/>
+                <a:ea typeface="Microsoft YaHei" pitchFamily="34" charset="-122"/>
+                <a:cs typeface="Microsoft YaHei" pitchFamily="34" charset="-120"/>
+              </a:rPr>
+              <a:t>回收端动力电池高值化利用被</a:t>
+            </a:r>
+            <a:endParaRPr lang="en-US" sz="670" dirty="0"/>
+          </a:p>
+        </p:txBody>
+      </p:sp>
+      <p:sp>
+        <p:nvSpPr>
+          <p:cNvPr id="33" name="Shape 31"/>
+          <p:cNvSpPr/>
+          <p:nvPr/>
+        </p:nvSpPr>
+        <p:spPr>
+          <a:xfrm>
+            <a:off x="7818120" y="2980944"/>
+            <a:ext cx="1243584" cy="804672"/>
+          </a:xfrm>
+          <a:prstGeom prst="rect">
+            <a:avLst/>
+          </a:prstGeom>
+          <a:solidFill>
+            <a:srgbClr val="FFFFFF"/>
+          </a:solidFill>
+          <a:ln w="3810">
+            <a:solidFill>
+              <a:srgbClr val="DADADA"/>
+            </a:solidFill>
+            <a:prstDash val="solid"/>
+          </a:ln>
+        </p:spPr>
+      </p:sp>
+      <p:sp>
+        <p:nvSpPr>
+          <p:cNvPr id="34" name="Text 32"/>
+          <p:cNvSpPr/>
+          <p:nvPr/>
+        </p:nvSpPr>
+        <p:spPr>
+          <a:xfrm>
+            <a:off x="7891272" y="3090672"/>
+            <a:ext cx="438912" cy="109728"/>
           </a:xfrm>
           <a:prstGeom prst="rect">
             <a:avLst/>
@@ -11205,7 +11297,48 @@
               <a:buNone/>
             </a:pPr>
             <a:r>
-              <a:rPr lang="en-US" sz="820" b="1" dirty="0">
+              <a:rPr lang="en-US" sz="710" b="1" dirty="0">
+                <a:solidFill>
+                  <a:srgbClr val="487052"/>
+                </a:solidFill>
+                <a:latin typeface="Microsoft YaHei" pitchFamily="34" charset="0"/>
+                <a:ea typeface="Microsoft YaHei" pitchFamily="34" charset="-122"/>
+                <a:cs typeface="Microsoft YaHei" pitchFamily="34" charset="-120"/>
+              </a:rPr>
+              <a:t>机会</a:t>
+            </a:r>
+            <a:endParaRPr lang="en-US" sz="710" dirty="0"/>
+          </a:p>
+        </p:txBody>
+      </p:sp>
+      <p:sp>
+        <p:nvSpPr>
+          <p:cNvPr id="35" name="Text 33"/>
+          <p:cNvSpPr/>
+          <p:nvPr/>
+        </p:nvSpPr>
+        <p:spPr>
+          <a:xfrm>
+            <a:off x="7891272" y="3310128"/>
+            <a:ext cx="1024128" cy="201168"/>
+          </a:xfrm>
+          <a:prstGeom prst="rect">
+            <a:avLst/>
+          </a:prstGeom>
+          <a:noFill/>
+          <a:ln/>
+        </p:spPr>
+        <p:txBody>
+          <a:bodyPr wrap="square" lIns="0" tIns="0" rIns="0" bIns="0" rtlCol="0" anchor="t">
+            <a:normAutofit/>
+          </a:bodyPr>
+          <a:lstStyle/>
+          <a:p>
+            <a:pPr indent="0" marL="0">
+              <a:buNone/>
+            </a:pPr>
+            <a:r>
+              <a:rPr lang="en-US" sz="670" dirty="0">
                 <a:solidFill>
                   <a:srgbClr val="121212"/>
                 </a:solidFill>
@@ -11213,22 +11346,88 @@
                 <a:ea typeface="Microsoft YaHei" pitchFamily="34" charset="-122"/>
                 <a:cs typeface="Microsoft YaHei" pitchFamily="34" charset="-120"/>
               </a:rPr>
-              <a:t>源汽车出口退税率由13%降至</a:t>
-            </a:r>
-            <a:endParaRPr lang="en-US" sz="820" dirty="0"/>
-          </a:p>
-        </p:txBody>
-      </p:sp>
-      <p:sp>
-        <p:nvSpPr>
-          <p:cNvPr id="31" name="Text 29"/>
-          <p:cNvSpPr/>
-          <p:nvPr/>
-        </p:nvSpPr>
-        <p:spPr>
-          <a:xfrm>
-            <a:off x="7918704" y="3511296"/>
-            <a:ext cx="2176272" cy="201168"/>
+              <a:t>供给端湖南裕能拟20亿元扩</a:t>
+            </a:r>
+            <a:endParaRPr lang="en-US" sz="670" dirty="0"/>
+          </a:p>
+        </p:txBody>
+      </p:sp>
+      <p:sp>
+        <p:nvSpPr>
+          <p:cNvPr id="36" name="Shape 34"/>
+          <p:cNvSpPr/>
+          <p:nvPr/>
+        </p:nvSpPr>
+        <p:spPr>
+          <a:xfrm>
+            <a:off x="9061704" y="2980944"/>
+            <a:ext cx="1243584" cy="804672"/>
+          </a:xfrm>
+          <a:prstGeom prst="rect">
+            <a:avLst/>
+          </a:prstGeom>
+          <a:solidFill>
+            <a:srgbClr val="F4FAF6"/>
+          </a:solidFill>
+          <a:ln w="3810">
+            <a:solidFill>
+              <a:srgbClr val="DADADA"/>
+            </a:solidFill>
+            <a:prstDash val="solid"/>
+          </a:ln>
+        </p:spPr>
+      </p:sp>
+      <p:sp>
+        <p:nvSpPr>
+          <p:cNvPr id="37" name="Text 35"/>
+          <p:cNvSpPr/>
+          <p:nvPr/>
+        </p:nvSpPr>
+        <p:spPr>
+          <a:xfrm>
+            <a:off x="9134856" y="3090672"/>
+            <a:ext cx="438912" cy="109728"/>
+          </a:xfrm>
+          <a:prstGeom prst="rect">
+            <a:avLst/>
+          </a:prstGeom>
+          <a:noFill/>
+          <a:ln/>
+        </p:spPr>
+        <p:txBody>
+          <a:bodyPr wrap="square" lIns="0" tIns="0" rIns="0" bIns="0" rtlCol="0" anchor="ctr">
+            <a:normAutofit/>
+          </a:bodyPr>
+          <a:lstStyle/>
+          <a:p>
+            <a:pPr indent="0" marL="0">
+              <a:buNone/>
+            </a:pPr>
+            <a:r>
+              <a:rPr lang="en-US" sz="710" b="1" dirty="0">
+                <a:solidFill>
+                  <a:srgbClr val="487052"/>
+                </a:solidFill>
+                <a:latin typeface="Microsoft YaHei" pitchFamily="34" charset="0"/>
+                <a:ea typeface="Microsoft YaHei" pitchFamily="34" charset="-122"/>
+                <a:cs typeface="Microsoft YaHei" pitchFamily="34" charset="-120"/>
+              </a:rPr>
+              <a:t>约束</a:t>
+            </a:r>
+            <a:endParaRPr lang="en-US" sz="710" dirty="0"/>
+          </a:p>
+        </p:txBody>
+      </p:sp>
+      <p:sp>
+        <p:nvSpPr>
+          <p:cNvPr id="38" name="Text 36"/>
+          <p:cNvSpPr/>
+          <p:nvPr/>
+        </p:nvSpPr>
+        <p:spPr>
+          <a:xfrm>
+            <a:off x="9134856" y="3310128"/>
+            <a:ext cx="1024128" cy="201168"/>
           </a:xfrm>
           <a:prstGeom prst="rect">
             <a:avLst/>
@@ -11246,7 +11445,7 @@
               <a:buNone/>
             </a:pPr>
             <a:r>
-              <a:rPr lang="en-US" sz="840" dirty="0">
+              <a:rPr lang="en-US" sz="670" dirty="0">
                 <a:solidFill>
                   <a:srgbClr val="121212"/>
                 </a:solidFill>
@@ -11254,22 +11453,22 @@
                 <a:ea typeface="Microsoft YaHei" pitchFamily="34" charset="-122"/>
                 <a:cs typeface="Microsoft YaHei" pitchFamily="34" charset="-120"/>
               </a:rPr>
-              <a:t>公开信息：新能源汽车出口退税率由13%降至9%，出海成本上升可能向上</a:t>
-            </a:r>
-            <a:endParaRPr lang="en-US" sz="840" dirty="0"/>
-          </a:p>
-        </p:txBody>
-      </p:sp>
-      <p:sp>
-        <p:nvSpPr>
-          <p:cNvPr id="32" name="Text 30"/>
-          <p:cNvSpPr/>
-          <p:nvPr/>
-        </p:nvSpPr>
-        <p:spPr>
-          <a:xfrm>
-            <a:off x="7772400" y="4498848"/>
-            <a:ext cx="2560320" cy="384048"/>
+              <a:t>政策端国内新能源车政策收紧</a:t>
+            </a:r>
+            <a:endParaRPr lang="en-US" sz="670" dirty="0"/>
+          </a:p>
+        </p:txBody>
+      </p:sp>
+      <p:sp>
+        <p:nvSpPr>
+          <p:cNvPr id="39" name="Text 37"/>
+          <p:cNvSpPr/>
+          <p:nvPr/>
+        </p:nvSpPr>
+        <p:spPr>
+          <a:xfrm>
+            <a:off x="7726680" y="4187952"/>
+            <a:ext cx="2697480" cy="493776"/>
           </a:xfrm>
           <a:prstGeom prst="rect">
             <a:avLst/>
@@ -11287,7 +11486,7 @@
               <a:buNone/>
             </a:pPr>
             <a:r>
-              <a:rPr lang="en-US" sz="800" dirty="0">
+              <a:rPr lang="en-US" sz="760" dirty="0">
                 <a:solidFill>
                   <a:srgbClr val="6D756F"/>
                 </a:solidFill>
@@ -11295,15 +11494,15 @@
                 <a:ea typeface="Microsoft YaHei" pitchFamily="34" charset="-122"/>
                 <a:cs typeface="Microsoft YaHei" pitchFamily="34" charset="-120"/>
               </a:rPr>
-              <a:t>阅读提示：仅按公开报道原文呈现；不同企业、时间和统计范围不可直接横向比较。</a:t>
-            </a:r>
-            <a:endParaRPr lang="en-US" sz="800" dirty="0"/>
-          </a:p>
-        </p:txBody>
-      </p:sp>
-      <p:sp>
-        <p:nvSpPr>
-          <p:cNvPr id="33" name="Shape 31"/>
+              <a:t>检测到对比/分类信号，用矩阵压缩呈现，不新增外部判断。</a:t>
+            </a:r>
+            <a:endParaRPr lang="en-US" sz="760" dirty="0"/>
+          </a:p>
+        </p:txBody>
+      </p:sp>
+      <p:sp>
+        <p:nvSpPr>
+          <p:cNvPr id="40" name="Shape 38"/>
           <p:cNvSpPr/>
           <p:nvPr/>
         </p:nvSpPr>
@@ -11328,7 +11527,7 @@
       </p:sp>
       <p:sp>
         <p:nvSpPr>
-          <p:cNvPr id="34" name="Text 32"/>
+          <p:cNvPr id="41" name="Text 39"/>
           <p:cNvSpPr/>
           <p:nvPr/>
         </p:nvSpPr>
@@ -11367,7 +11566,7 @@
       </p:sp>
       <p:sp>
         <p:nvSpPr>
-          <p:cNvPr id="35" name="Text 33"/>
+          <p:cNvPr id="42" name="Text 40"/>
           <p:cNvSpPr/>
           <p:nvPr/>
         </p:nvSpPr>
@@ -11400,7 +11599,7 @@
                 <a:ea typeface="Microsoft YaHei" pitchFamily="34" charset="-122"/>
                 <a:cs typeface="Microsoft YaHei" pitchFamily="34" charset="-120"/>
               </a:rPr>
-              <a:t>若后续披露的扩产项目投产进度快于需求增速，则磷酸铁锂正极材料加工费可能继续承压</a:t>
+              <a:t>若四季度国内新能源车政策收紧导致销量增速低于预期，则磷酸铁锂正极订单可能环比走弱，加工费承压</a:t>
             </a:r>
             <a:endParaRPr lang="en-US" sz="1020" dirty="0"/>
           </a:p>
@@ -11549,7 +11748,7 @@
                 <a:ea typeface="Aptos" pitchFamily="34" charset="-122"/>
                 <a:cs typeface="Aptos" pitchFamily="34" charset="-120"/>
               </a:rPr>
-              <a:t>2026-10-26</a:t>
+              <a:t>2026-10-27</a:t>
             </a:r>
             <a:endParaRPr lang="en-US" sz="800" dirty="0"/>
           </a:p>
@@ -11864,7 +12063,7 @@
                 <a:ea typeface="Microsoft YaHei" pitchFamily="34" charset="-122"/>
                 <a:cs typeface="Microsoft YaHei" pitchFamily="34" charset="-120"/>
               </a:rPr>
-              <a:t>今日信息未出现磷酸铁锂技术路线的直接突破，但清陶能源80亿元固态电池项目一期投产的新闻与磷酸铁锂扩产同周出现，显示固态电池产业化推进对磷酸铁锂长期技术路线构成潜在竞争；电摩锂电化趋势则可能为磷酸铁锂在轻型动力领域打开增量应用场景。 [1][4]</a:t>
+              <a:t>零跑与海泰科服投资企业签约攻坚前沿电池技术，但未明确磷酸铁锂路线；江西拓智科技以激光精焊技术守护动力电池安全，属于制造工艺改进。当前磷酸铁锂技术路线仍以成本与安全为核心，前沿技术合作可能分散对磷酸铁锂的研发资源，但短期影响有限。 [5][6]</a:t>
             </a:r>
             <a:endParaRPr lang="en-US" sz="960" dirty="0"/>
           </a:p>
@@ -11905,7 +12104,7 @@
                 <a:ea typeface="Aptos" pitchFamily="34" charset="-122"/>
                 <a:cs typeface="Aptos" pitchFamily="34" charset="-120"/>
               </a:rPr>
-              <a:t>依据：[1][4]</a:t>
+              <a:t>依据：[5][6]</a:t>
             </a:r>
             <a:endParaRPr lang="en-US" sz="740" dirty="0"/>
           </a:p>
@@ -12014,7 +12213,7 @@
                 <a:ea typeface="Microsoft YaHei" pitchFamily="34" charset="-122"/>
                 <a:cs typeface="Microsoft YaHei" pitchFamily="34" charset="-120"/>
               </a:rPr>
-              <a:t>固态电池项目投产与磷酸铁锂扩产并存，反映电池技术路线多元化：短期磷酸铁锂仍是主流，但固态电池若加速量产可能分流高端需求。电摩锂电化新闻提到锂电化成为电摩起飞关键，磷酸铁锂因成本和安全优势可能受益于电摩市场增长。需验证：清陶固态电池项目的实际产能和客户导入情况；电摩用磷酸铁锂电池的渗透率和订单规模。</a:t>
+              <a:t>碳索储能网报道零跑合作聚焦前沿电池技术，若指向固态或高镍路线，可能在中长期削弱磷酸铁锂在部分车型的份额；搜狐网报道的激光精焊技术属于电池制造环节，对磷酸铁锂电池安全性和良率有正面意义，但未改变材料体系竞争格局。需进一步确认零跑合作的技术方向及量产时间表，以及激光精焊在磷酸铁锂产线的渗透率。</a:t>
             </a:r>
             <a:endParaRPr lang="en-US" sz="960" dirty="0"/>
           </a:p>
@@ -12148,7 +12347,7 @@
                 <a:ea typeface="Microsoft YaHei" pitchFamily="34" charset="-122"/>
                 <a:cs typeface="Microsoft YaHei" pitchFamily="34" charset="-120"/>
               </a:rPr>
-              <a:t>若固态电池项目投产进度超预期且成本快速下降，则磷酸铁锂在高端电动汽车领域的份额可能受到挤压；若电摩锂电化加速且磷酸铁锂成为主流选择，则轻型动力领域可能贡献新增需求。跟踪指标：清陶能源固态电池装车公告、电摩用锂电池出货量及正极材料类型占比。证据边界：固态电池项目刚投产，实际性能和成本数据尚未公开；电摩锂电化新闻未披露具体电池路线占比。</a:t>
+              <a:t>若零跑合作技术路线为非磷酸铁锂体系且2027年前量产，则磷酸铁锂在中低端车型的份额可能被部分替代；若激光精焊在磷酸铁锂产线快速推广，则电池安全性能提升可能降低质保成本。跟踪指标：零跑电池技术路线公告、激光精焊设备订单、磷酸铁锂车型占比。证据边界：合作技术细节未披露，量产时间不确定。</a:t>
             </a:r>
             <a:endParaRPr lang="en-US" sz="960" dirty="0"/>
           </a:p>
@@ -12394,7 +12593,7 @@
                 <a:ea typeface="Microsoft YaHei" pitchFamily="34" charset="-122"/>
                 <a:cs typeface="Microsoft YaHei" pitchFamily="34" charset="-120"/>
               </a:rPr>
-              <a:t>今日信息未出现磷酸铁锂技术</a:t>
+              <a:t>零跑与海泰科服投资企业签约</a:t>
             </a:r>
             <a:endParaRPr lang="en-US" sz="670" dirty="0"/>
           </a:p>
@@ -12501,7 +12700,7 @@
                 <a:ea typeface="Microsoft YaHei" pitchFamily="34" charset="-122"/>
                 <a:cs typeface="Microsoft YaHei" pitchFamily="34" charset="-120"/>
               </a:rPr>
-              <a:t>电摩锂电化趋势则可能为磷酸</a:t>
+              <a:t>江西拓智科技以激光精焊技术</a:t>
             </a:r>
             <a:endParaRPr lang="en-US" sz="670" dirty="0"/>
           </a:p>
@@ -12608,7 +12807,7 @@
                 <a:ea typeface="Microsoft YaHei" pitchFamily="34" charset="-122"/>
                 <a:cs typeface="Microsoft YaHei" pitchFamily="34" charset="-120"/>
               </a:rPr>
-              <a:t>[1][4] 固态电池项目</a:t>
+              <a:t>当前磷酸铁锂技术路线仍以成</a:t>
             </a:r>
             <a:endParaRPr lang="en-US" sz="670" dirty="0"/>
           </a:p>
@@ -12715,7 +12914,7 @@
                 <a:ea typeface="Microsoft YaHei" pitchFamily="34" charset="-122"/>
                 <a:cs typeface="Microsoft YaHei" pitchFamily="34" charset="-120"/>
               </a:rPr>
-              <a:t>今日信息未出现磷酸铁锂技术</a:t>
+              <a:t>零跑与海泰科服投资企业签约</a:t>
             </a:r>
             <a:endParaRPr lang="en-US" sz="670" dirty="0"/>
           </a:p>
@@ -12861,7 +13060,7 @@
                 <a:ea typeface="Microsoft YaHei" pitchFamily="34" charset="-122"/>
                 <a:cs typeface="Microsoft YaHei" pitchFamily="34" charset="-120"/>
               </a:rPr>
-              <a:t>若固态电池项目投产进度超预期且成本快速下降，则磷酸铁锂在高端电动汽车领域的份额可能受到挤压</a:t>
+              <a:t>若零跑合作技术路线为非磷酸铁锂体系且2027年前量产，则磷酸铁锂在中低端车型的份额可能被部分替代</a:t>
             </a:r>
             <a:endParaRPr lang="en-US" sz="1020" dirty="0"/>
           </a:p>
@@ -13010,7 +13209,7 @@
                 <a:ea typeface="Aptos" pitchFamily="34" charset="-122"/>
                 <a:cs typeface="Aptos" pitchFamily="34" charset="-120"/>
               </a:rPr>
-              <a:t>2026-10-26</a:t>
+              <a:t>2026-10-27</a:t>
             </a:r>
             <a:endParaRPr lang="en-US" sz="800" dirty="0"/>
           </a:p>
@@ -13216,7 +13415,7 @@
                 <a:ea typeface="Microsoft YaHei" pitchFamily="34" charset="-122"/>
                 <a:cs typeface="Microsoft YaHei" pitchFamily="34" charset="-120"/>
               </a:rPr>
-              <a:t>2 条公开来源交叉验证｜事实、影响与后续研判</a:t>
+              <a:t>1 条公开来源交叉验证｜事实、影响与后续研判</a:t>
             </a:r>
             <a:endParaRPr lang="en-US" sz="860" dirty="0"/>
           </a:p>
@@ -13325,7 +13524,7 @@
                 <a:ea typeface="Microsoft YaHei" pitchFamily="34" charset="-122"/>
                 <a:cs typeface="Microsoft YaHei" pitchFamily="34" charset="-120"/>
               </a:rPr>
-              <a:t>湖南裕能、万华化学再度扩产磷酸铁锂，龙头产能扩张延续，行业供给端压力预期不减；宁德时代三季报业绩高增，作为磷酸铁锂主要客户之一，其排产增长可能对正极材料订单形成支撑，但具体磷酸铁锂采购量未披露。 [1][3]</a:t>
+              <a:t>湖南裕能拟20亿元在湖南湘潭再建厂，万华化学山东莱州项目二期开工，头部磷酸铁锂正极产能继续扩张。供给端增量明确，若需求增速不能同步匹配，中期行业开工率与加工费可能承压。客户与订单方面，今日无直接磷酸铁锂大单披露。 [4]</a:t>
             </a:r>
             <a:endParaRPr lang="en-US" sz="960" dirty="0"/>
           </a:p>
@@ -13366,7 +13565,7 @@
                 <a:ea typeface="Aptos" pitchFamily="34" charset="-122"/>
                 <a:cs typeface="Aptos" pitchFamily="34" charset="-120"/>
               </a:rPr>
-              <a:t>依据：[1][3]</a:t>
+              <a:t>依据：[4]</a:t>
             </a:r>
             <a:endParaRPr lang="en-US" sz="740" dirty="0"/>
           </a:p>
@@ -13475,7 +13674,7 @@
                 <a:ea typeface="Microsoft YaHei" pitchFamily="34" charset="-122"/>
                 <a:cs typeface="Microsoft YaHei" pitchFamily="34" charset="-120"/>
               </a:rPr>
-              <a:t>扩产新闻与宁德时代业绩高增形成供需两端信号：龙头扩产表明对中期需求乐观，宁德时代业绩高增则暗示电池排产可能维持高位，对磷酸铁锂正极材料订单有支撑。但扩产项目从公告到投产有时滞，若多家企业同步扩产，未来供给集中释放可能加剧竞争。需调研：湖南裕能、万华化学扩产项目的具体产能规模和投产时间；宁德时代磷酸铁锂电池产量占比及供应商结构。</a:t>
+              <a:t>海融网报道裕能扩产与万华二期开工，两者均为磷酸铁锂正极材料环节，显示头部企业对中期需求仍有信心，但也意味着供给竞争加剧。裕能作为龙头，扩产可能巩固其规模成本优势，而万华化学跨界进入则加剧行业分化。需跟踪项目投产时间、产能爬坡节奏以及下游电池厂绑定情况，验证新增产能是否被提前锁定。</a:t>
             </a:r>
             <a:endParaRPr lang="en-US" sz="960" dirty="0"/>
           </a:p>
@@ -13609,7 +13808,7 @@
                 <a:ea typeface="Microsoft YaHei" pitchFamily="34" charset="-122"/>
                 <a:cs typeface="Microsoft YaHei" pitchFamily="34" charset="-120"/>
               </a:rPr>
-              <a:t>若湖南裕能、万华化学扩产项目在2027年集中投产，而需求增速未能同步匹配，则磷酸铁锂正极材料加工费可能进一步下行；若宁德时代等电池厂排产持续高增，则短期订单可能消化部分新增产能。跟踪指标：扩产项目环评和投产公告、宁德时代季度电池产量及磷酸铁锂采购比例、正极材料企业产能利用率。证据边界：扩产新闻未披露具体产能数字和投产时间；宁德时代财报未拆分磷酸铁锂采购数据。</a:t>
+              <a:t>若裕能湘潭项目与万华二期在2027年如期投产，则磷酸铁锂正极名义产能进一步过剩，加工费可能维持低位；若下游电池厂提前签订长单锁定产能，则头部企业开工率有支撑。跟踪指标：项目环评/能评进度、设备招标、电池厂长单公告、行业月度开工率。证据边界：项目投产时间及产能利用率尚未披露。</a:t>
             </a:r>
             <a:endParaRPr lang="en-US" sz="960" dirty="0"/>
           </a:p>
@@ -13677,7 +13876,7 @@
                 <a:ea typeface="Microsoft YaHei" pitchFamily="34" charset="-122"/>
                 <a:cs typeface="Microsoft YaHei" pitchFamily="34" charset="-120"/>
               </a:rPr>
-              <a:t>落地链路</a:t>
+              <a:t>对比矩阵</a:t>
             </a:r>
             <a:endParaRPr lang="en-US" sz="1200" dirty="0"/>
           </a:p>
@@ -13691,17 +13890,38 @@
         </p:nvSpPr>
         <p:spPr>
           <a:xfrm>
-            <a:off x="7882128" y="2029968"/>
-            <a:ext cx="2377440" cy="365760"/>
-          </a:xfrm>
-          <a:prstGeom prst="roundRect">
-            <a:avLst>
-              <a:gd name="adj" fmla="val 10000"/>
-            </a:avLst>
+            <a:off x="7818120" y="2176272"/>
+            <a:ext cx="2487168" cy="1609344"/>
+          </a:xfrm>
+          <a:prstGeom prst="rect">
+            <a:avLst/>
           </a:prstGeom>
           <a:solidFill>
-            <a:srgbClr val="F4FAF6"/>
+            <a:srgbClr val="FFFFFF"/>
           </a:solidFill>
+          <a:ln w="10160">
+            <a:solidFill>
+              <a:srgbClr val="DADADA"/>
+            </a:solidFill>
+            <a:prstDash val="solid"/>
+          </a:ln>
+        </p:spPr>
+      </p:sp>
+      <p:sp>
+        <p:nvSpPr>
+          <p:cNvPr id="25" name="Shape 23"/>
+          <p:cNvSpPr/>
+          <p:nvPr/>
+        </p:nvSpPr>
+        <p:spPr>
+          <a:xfrm>
+            <a:off x="9061704" y="2176272"/>
+            <a:ext cx="0" cy="1609344"/>
+          </a:xfrm>
+          <a:prstGeom prst="line">
+            <a:avLst/>
+          </a:prstGeom>
+          <a:noFill/>
           <a:ln w="8890">
             <a:solidFill>
               <a:srgbClr val="DADADA"/>
@@ -13712,130 +13932,19 @@
       </p:sp>
       <p:sp>
         <p:nvSpPr>
-          <p:cNvPr id="25" name="Text 23"/>
-          <p:cNvSpPr/>
-          <p:nvPr/>
-        </p:nvSpPr>
-        <p:spPr>
-          <a:xfrm>
-            <a:off x="8028432" y="2139696"/>
-            <a:ext cx="566928" cy="109728"/>
-          </a:xfrm>
-          <a:prstGeom prst="rect">
-            <a:avLst/>
-          </a:prstGeom>
-          <a:noFill/>
-          <a:ln/>
-        </p:spPr>
-        <p:txBody>
-          <a:bodyPr wrap="square" lIns="0" tIns="0" rIns="0" bIns="0" rtlCol="0" anchor="ctr">
-            <a:normAutofit/>
-          </a:bodyPr>
-          <a:lstStyle/>
-          <a:p>
-            <a:pPr indent="0" marL="0">
-              <a:buNone/>
-            </a:pPr>
-            <a:r>
-              <a:rPr lang="en-US" sz="720" b="1" dirty="0">
-                <a:solidFill>
-                  <a:srgbClr val="487052"/>
-                </a:solidFill>
-                <a:latin typeface="Microsoft YaHei" pitchFamily="34" charset="0"/>
-                <a:ea typeface="Microsoft YaHei" pitchFamily="34" charset="-122"/>
-                <a:cs typeface="Microsoft YaHei" pitchFamily="34" charset="-120"/>
-              </a:rPr>
-              <a:t>产能</a:t>
-            </a:r>
-            <a:endParaRPr lang="en-US" sz="720" dirty="0"/>
-          </a:p>
-        </p:txBody>
-      </p:sp>
-      <p:sp>
-        <p:nvSpPr>
-          <p:cNvPr id="26" name="Text 24"/>
-          <p:cNvSpPr/>
-          <p:nvPr/>
-        </p:nvSpPr>
-        <p:spPr>
-          <a:xfrm>
-            <a:off x="8613648" y="2139696"/>
-            <a:ext cx="1481328" cy="109728"/>
-          </a:xfrm>
-          <a:prstGeom prst="rect">
-            <a:avLst/>
-          </a:prstGeom>
-          <a:noFill/>
-          <a:ln/>
-        </p:spPr>
-        <p:txBody>
-          <a:bodyPr wrap="square" lIns="0" tIns="0" rIns="0" bIns="0" rtlCol="0" anchor="ctr">
-            <a:normAutofit/>
-          </a:bodyPr>
-          <a:lstStyle/>
-          <a:p>
-            <a:pPr indent="0" marL="0">
-              <a:buNone/>
-            </a:pPr>
-            <a:r>
-              <a:rPr lang="en-US" sz="700" dirty="0">
-                <a:solidFill>
-                  <a:srgbClr val="121212"/>
-                </a:solidFill>
-                <a:latin typeface="Microsoft YaHei" pitchFamily="34" charset="0"/>
-                <a:ea typeface="Microsoft YaHei" pitchFamily="34" charset="-122"/>
-                <a:cs typeface="Microsoft YaHei" pitchFamily="34" charset="-120"/>
-              </a:rPr>
-              <a:t>湖南裕能、万华化学再度扩产磷酸铁锂</a:t>
-            </a:r>
-            <a:endParaRPr lang="en-US" sz="700" dirty="0"/>
-          </a:p>
-        </p:txBody>
-      </p:sp>
-      <p:sp>
-        <p:nvSpPr>
-          <p:cNvPr id="27" name="Shape 25"/>
-          <p:cNvSpPr/>
-          <p:nvPr/>
-        </p:nvSpPr>
-        <p:spPr>
-          <a:xfrm>
-            <a:off x="8979408" y="2441448"/>
-            <a:ext cx="164592" cy="146304"/>
-          </a:xfrm>
-          <a:prstGeom prst="downArrow">
-            <a:avLst/>
-          </a:prstGeom>
-          <a:solidFill>
-            <a:srgbClr val="7F9D84"/>
-          </a:solidFill>
-          <a:ln w="12700">
-            <a:solidFill>
-              <a:srgbClr val="7F9D84"/>
-            </a:solidFill>
-            <a:prstDash val="solid"/>
-          </a:ln>
-        </p:spPr>
-      </p:sp>
-      <p:sp>
-        <p:nvSpPr>
-          <p:cNvPr id="28" name="Shape 26"/>
-          <p:cNvSpPr/>
-          <p:nvPr/>
-        </p:nvSpPr>
-        <p:spPr>
-          <a:xfrm>
-            <a:off x="7882128" y="2596896"/>
-            <a:ext cx="2377440" cy="365760"/>
-          </a:xfrm>
-          <a:prstGeom prst="roundRect">
-            <a:avLst>
-              <a:gd name="adj" fmla="val 10000"/>
-            </a:avLst>
-          </a:prstGeom>
-          <a:solidFill>
-            <a:srgbClr val="FFFFFF"/>
-          </a:solidFill>
+          <p:cNvPr id="26" name="Shape 24"/>
+          <p:cNvSpPr/>
+          <p:nvPr/>
+        </p:nvSpPr>
+        <p:spPr>
+          <a:xfrm>
+            <a:off x="7818120" y="2980944"/>
+            <a:ext cx="2487168" cy="0"/>
+          </a:xfrm>
+          <a:prstGeom prst="line">
+            <a:avLst/>
+          </a:prstGeom>
+          <a:noFill/>
           <a:ln w="8890">
             <a:solidFill>
               <a:srgbClr val="DADADA"/>
@@ -13846,131 +13955,22 @@
       </p:sp>
       <p:sp>
         <p:nvSpPr>
-          <p:cNvPr id="29" name="Text 27"/>
-          <p:cNvSpPr/>
-          <p:nvPr/>
-        </p:nvSpPr>
-        <p:spPr>
-          <a:xfrm>
-            <a:off x="8028432" y="2706624"/>
-            <a:ext cx="566928" cy="109728"/>
-          </a:xfrm>
-          <a:prstGeom prst="rect">
-            <a:avLst/>
-          </a:prstGeom>
-          <a:noFill/>
-          <a:ln/>
-        </p:spPr>
-        <p:txBody>
-          <a:bodyPr wrap="square" lIns="0" tIns="0" rIns="0" bIns="0" rtlCol="0" anchor="ctr">
-            <a:normAutofit/>
-          </a:bodyPr>
-          <a:lstStyle/>
-          <a:p>
-            <a:pPr indent="0" marL="0">
-              <a:buNone/>
-            </a:pPr>
-            <a:r>
-              <a:rPr lang="en-US" sz="720" b="1" dirty="0">
-                <a:solidFill>
-                  <a:srgbClr val="487052"/>
-                </a:solidFill>
-                <a:latin typeface="Microsoft YaHei" pitchFamily="34" charset="0"/>
-                <a:ea typeface="Microsoft YaHei" pitchFamily="34" charset="-122"/>
-                <a:cs typeface="Microsoft YaHei" pitchFamily="34" charset="-120"/>
-              </a:rPr>
-              <a:t>客户</a:t>
-            </a:r>
-            <a:endParaRPr lang="en-US" sz="720" dirty="0"/>
-          </a:p>
-        </p:txBody>
-      </p:sp>
-      <p:sp>
-        <p:nvSpPr>
-          <p:cNvPr id="30" name="Text 28"/>
-          <p:cNvSpPr/>
-          <p:nvPr/>
-        </p:nvSpPr>
-        <p:spPr>
-          <a:xfrm>
-            <a:off x="8613648" y="2706624"/>
-            <a:ext cx="1481328" cy="109728"/>
-          </a:xfrm>
-          <a:prstGeom prst="rect">
-            <a:avLst/>
-          </a:prstGeom>
-          <a:noFill/>
-          <a:ln/>
-        </p:spPr>
-        <p:txBody>
-          <a:bodyPr wrap="square" lIns="0" tIns="0" rIns="0" bIns="0" rtlCol="0" anchor="ctr">
-            <a:normAutofit/>
-          </a:bodyPr>
-          <a:lstStyle/>
-          <a:p>
-            <a:pPr indent="0" marL="0">
-              <a:buNone/>
-            </a:pPr>
-            <a:r>
-              <a:rPr lang="en-US" sz="700" dirty="0">
-                <a:solidFill>
-                  <a:srgbClr val="121212"/>
-                </a:solidFill>
-                <a:latin typeface="Microsoft YaHei" pitchFamily="34" charset="0"/>
-                <a:ea typeface="Microsoft YaHei" pitchFamily="34" charset="-122"/>
-                <a:cs typeface="Microsoft YaHei" pitchFamily="34" charset="-120"/>
-              </a:rPr>
-              <a:t>宁德时代三季报业绩高增，作为磷酸铁</a:t>
-            </a:r>
-            <a:endParaRPr lang="en-US" sz="700" dirty="0"/>
-          </a:p>
-        </p:txBody>
-      </p:sp>
-      <p:sp>
-        <p:nvSpPr>
-          <p:cNvPr id="31" name="Shape 29"/>
-          <p:cNvSpPr/>
-          <p:nvPr/>
-        </p:nvSpPr>
-        <p:spPr>
-          <a:xfrm>
-            <a:off x="8979408" y="3008376"/>
-            <a:ext cx="164592" cy="146304"/>
-          </a:xfrm>
-          <a:prstGeom prst="downArrow">
+          <p:cNvPr id="27" name="Shape 25"/>
+          <p:cNvSpPr/>
+          <p:nvPr/>
+        </p:nvSpPr>
+        <p:spPr>
+          <a:xfrm>
+            <a:off x="7818120" y="2176272"/>
+            <a:ext cx="1243584" cy="804672"/>
+          </a:xfrm>
+          <a:prstGeom prst="rect">
             <a:avLst/>
           </a:prstGeom>
           <a:solidFill>
-            <a:srgbClr val="7F9D84"/>
+            <a:srgbClr val="DDEBE0"/>
           </a:solidFill>
-          <a:ln w="12700">
-            <a:solidFill>
-              <a:srgbClr val="7F9D84"/>
-            </a:solidFill>
-            <a:prstDash val="solid"/>
-          </a:ln>
-        </p:spPr>
-      </p:sp>
-      <p:sp>
-        <p:nvSpPr>
-          <p:cNvPr id="32" name="Shape 30"/>
-          <p:cNvSpPr/>
-          <p:nvPr/>
-        </p:nvSpPr>
-        <p:spPr>
-          <a:xfrm>
-            <a:off x="7882128" y="3163824"/>
-            <a:ext cx="2377440" cy="365760"/>
-          </a:xfrm>
-          <a:prstGeom prst="roundRect">
-            <a:avLst>
-              <a:gd name="adj" fmla="val 10000"/>
-            </a:avLst>
-          </a:prstGeom>
-          <a:solidFill>
-            <a:srgbClr val="F4FAF6"/>
-          </a:solidFill>
-          <a:ln w="8890">
+          <a:ln w="3810">
             <a:solidFill>
               <a:srgbClr val="DADADA"/>
             </a:solidFill>
@@ -13980,14 +13980,14 @@
       </p:sp>
       <p:sp>
         <p:nvSpPr>
-          <p:cNvPr id="33" name="Text 31"/>
-          <p:cNvSpPr/>
-          <p:nvPr/>
-        </p:nvSpPr>
-        <p:spPr>
-          <a:xfrm>
-            <a:off x="8028432" y="3273552"/>
-            <a:ext cx="566928" cy="109728"/>
+          <p:cNvPr id="28" name="Text 26"/>
+          <p:cNvSpPr/>
+          <p:nvPr/>
+        </p:nvSpPr>
+        <p:spPr>
+          <a:xfrm>
+            <a:off x="7891272" y="2286000"/>
+            <a:ext cx="438912" cy="109728"/>
           </a:xfrm>
           <a:prstGeom prst="rect">
             <a:avLst/>
@@ -14005,7 +14005,7 @@
               <a:buNone/>
             </a:pPr>
             <a:r>
-              <a:rPr lang="en-US" sz="720" b="1" dirty="0">
+              <a:rPr lang="en-US" sz="710" b="1" dirty="0">
                 <a:solidFill>
                   <a:srgbClr val="487052"/>
                 </a:solidFill>
@@ -14013,11 +14013,184 @@
                 <a:ea typeface="Microsoft YaHei" pitchFamily="34" charset="-122"/>
                 <a:cs typeface="Microsoft YaHei" pitchFamily="34" charset="-120"/>
               </a:rPr>
-              <a:t>落地</a:t>
-            </a:r>
-            <a:endParaRPr lang="en-US" sz="720" dirty="0"/>
-          </a:p>
-        </p:txBody>
+              <a:t>路线A</a:t>
+            </a:r>
+            <a:endParaRPr lang="en-US" sz="710" dirty="0"/>
+          </a:p>
+        </p:txBody>
+      </p:sp>
+      <p:sp>
+        <p:nvSpPr>
+          <p:cNvPr id="29" name="Text 27"/>
+          <p:cNvSpPr/>
+          <p:nvPr/>
+        </p:nvSpPr>
+        <p:spPr>
+          <a:xfrm>
+            <a:off x="7891272" y="2505456"/>
+            <a:ext cx="1024128" cy="201168"/>
+          </a:xfrm>
+          <a:prstGeom prst="rect">
+            <a:avLst/>
+          </a:prstGeom>
+          <a:noFill/>
+          <a:ln/>
+        </p:spPr>
+        <p:txBody>
+          <a:bodyPr wrap="square" lIns="0" tIns="0" rIns="0" bIns="0" rtlCol="0" anchor="t">
+            <a:normAutofit/>
+          </a:bodyPr>
+          <a:lstStyle/>
+          <a:p>
+            <a:pPr indent="0" marL="0">
+              <a:buNone/>
+            </a:pPr>
+            <a:r>
+              <a:rPr lang="en-US" sz="670" dirty="0">
+                <a:solidFill>
+                  <a:srgbClr val="121212"/>
+                </a:solidFill>
+                <a:latin typeface="Microsoft YaHei" pitchFamily="34" charset="0"/>
+                <a:ea typeface="Microsoft YaHei" pitchFamily="34" charset="-122"/>
+                <a:cs typeface="Microsoft YaHei" pitchFamily="34" charset="-120"/>
+              </a:rPr>
+              <a:t>湖南裕能拟20亿元在湖南湘</a:t>
+            </a:r>
+            <a:endParaRPr lang="en-US" sz="670" dirty="0"/>
+          </a:p>
+        </p:txBody>
+      </p:sp>
+      <p:sp>
+        <p:nvSpPr>
+          <p:cNvPr id="30" name="Shape 28"/>
+          <p:cNvSpPr/>
+          <p:nvPr/>
+        </p:nvSpPr>
+        <p:spPr>
+          <a:xfrm>
+            <a:off x="9061704" y="2176272"/>
+            <a:ext cx="1243584" cy="804672"/>
+          </a:xfrm>
+          <a:prstGeom prst="rect">
+            <a:avLst/>
+          </a:prstGeom>
+          <a:solidFill>
+            <a:srgbClr val="FFFFFF"/>
+          </a:solidFill>
+          <a:ln w="3810">
+            <a:solidFill>
+              <a:srgbClr val="DADADA"/>
+            </a:solidFill>
+            <a:prstDash val="solid"/>
+          </a:ln>
+        </p:spPr>
+      </p:sp>
+      <p:sp>
+        <p:nvSpPr>
+          <p:cNvPr id="31" name="Text 29"/>
+          <p:cNvSpPr/>
+          <p:nvPr/>
+        </p:nvSpPr>
+        <p:spPr>
+          <a:xfrm>
+            <a:off x="9134856" y="2286000"/>
+            <a:ext cx="438912" cy="109728"/>
+          </a:xfrm>
+          <a:prstGeom prst="rect">
+            <a:avLst/>
+          </a:prstGeom>
+          <a:noFill/>
+          <a:ln/>
+        </p:spPr>
+        <p:txBody>
+          <a:bodyPr wrap="square" lIns="0" tIns="0" rIns="0" bIns="0" rtlCol="0" anchor="ctr">
+            <a:normAutofit/>
+          </a:bodyPr>
+          <a:lstStyle/>
+          <a:p>
+            <a:pPr indent="0" marL="0">
+              <a:buNone/>
+            </a:pPr>
+            <a:r>
+              <a:rPr lang="en-US" sz="710" b="1" dirty="0">
+                <a:solidFill>
+                  <a:srgbClr val="487052"/>
+                </a:solidFill>
+                <a:latin typeface="Microsoft YaHei" pitchFamily="34" charset="0"/>
+                <a:ea typeface="Microsoft YaHei" pitchFamily="34" charset="-122"/>
+                <a:cs typeface="Microsoft YaHei" pitchFamily="34" charset="-120"/>
+              </a:rPr>
+              <a:t>路线B</a:t>
+            </a:r>
+            <a:endParaRPr lang="en-US" sz="710" dirty="0"/>
+          </a:p>
+        </p:txBody>
+      </p:sp>
+      <p:sp>
+        <p:nvSpPr>
+          <p:cNvPr id="32" name="Text 30"/>
+          <p:cNvSpPr/>
+          <p:nvPr/>
+        </p:nvSpPr>
+        <p:spPr>
+          <a:xfrm>
+            <a:off x="9134856" y="2505456"/>
+            <a:ext cx="1024128" cy="201168"/>
+          </a:xfrm>
+          <a:prstGeom prst="rect">
+            <a:avLst/>
+          </a:prstGeom>
+          <a:noFill/>
+          <a:ln/>
+        </p:spPr>
+        <p:txBody>
+          <a:bodyPr wrap="square" lIns="0" tIns="0" rIns="0" bIns="0" rtlCol="0" anchor="t">
+            <a:normAutofit/>
+          </a:bodyPr>
+          <a:lstStyle/>
+          <a:p>
+            <a:pPr indent="0" marL="0">
+              <a:buNone/>
+            </a:pPr>
+            <a:r>
+              <a:rPr lang="en-US" sz="670" dirty="0">
+                <a:solidFill>
+                  <a:srgbClr val="121212"/>
+                </a:solidFill>
+                <a:latin typeface="Microsoft YaHei" pitchFamily="34" charset="0"/>
+                <a:ea typeface="Microsoft YaHei" pitchFamily="34" charset="-122"/>
+                <a:cs typeface="Microsoft YaHei" pitchFamily="34" charset="-120"/>
+              </a:rPr>
+              <a:t>供给端增量明确，若需求增速</a:t>
+            </a:r>
+            <a:endParaRPr lang="en-US" sz="670" dirty="0"/>
+          </a:p>
+        </p:txBody>
+      </p:sp>
+      <p:sp>
+        <p:nvSpPr>
+          <p:cNvPr id="33" name="Shape 31"/>
+          <p:cNvSpPr/>
+          <p:nvPr/>
+        </p:nvSpPr>
+        <p:spPr>
+          <a:xfrm>
+            <a:off x="7818120" y="2980944"/>
+            <a:ext cx="1243584" cy="804672"/>
+          </a:xfrm>
+          <a:prstGeom prst="rect">
+            <a:avLst/>
+          </a:prstGeom>
+          <a:solidFill>
+            <a:srgbClr val="FFFFFF"/>
+          </a:solidFill>
+          <a:ln w="3810">
+            <a:solidFill>
+              <a:srgbClr val="DADADA"/>
+            </a:solidFill>
+            <a:prstDash val="solid"/>
+          </a:ln>
+        </p:spPr>
       </p:sp>
       <p:sp>
         <p:nvSpPr>
@@ -14027,8 +14200,8 @@
         </p:nvSpPr>
         <p:spPr>
           <a:xfrm>
-            <a:off x="8613648" y="3273552"/>
-            <a:ext cx="1481328" cy="109728"/>
+            <a:off x="7891272" y="3090672"/>
+            <a:ext cx="438912" cy="109728"/>
           </a:xfrm>
           <a:prstGeom prst="rect">
             <a:avLst/>
@@ -14046,7 +14219,48 @@
               <a:buNone/>
             </a:pPr>
             <a:r>
-              <a:rPr lang="en-US" sz="700" dirty="0">
+              <a:rPr lang="en-US" sz="710" b="1" dirty="0">
+                <a:solidFill>
+                  <a:srgbClr val="487052"/>
+                </a:solidFill>
+                <a:latin typeface="Microsoft YaHei" pitchFamily="34" charset="0"/>
+                <a:ea typeface="Microsoft YaHei" pitchFamily="34" charset="-122"/>
+                <a:cs typeface="Microsoft YaHei" pitchFamily="34" charset="-120"/>
+              </a:rPr>
+              <a:t>机会</a:t>
+            </a:r>
+            <a:endParaRPr lang="en-US" sz="710" dirty="0"/>
+          </a:p>
+        </p:txBody>
+      </p:sp>
+      <p:sp>
+        <p:nvSpPr>
+          <p:cNvPr id="35" name="Text 33"/>
+          <p:cNvSpPr/>
+          <p:nvPr/>
+        </p:nvSpPr>
+        <p:spPr>
+          <a:xfrm>
+            <a:off x="7891272" y="3310128"/>
+            <a:ext cx="1024128" cy="201168"/>
+          </a:xfrm>
+          <a:prstGeom prst="rect">
+            <a:avLst/>
+          </a:prstGeom>
+          <a:noFill/>
+          <a:ln/>
+        </p:spPr>
+        <p:txBody>
+          <a:bodyPr wrap="square" lIns="0" tIns="0" rIns="0" bIns="0" rtlCol="0" anchor="t">
+            <a:normAutofit/>
+          </a:bodyPr>
+          <a:lstStyle/>
+          <a:p>
+            <a:pPr indent="0" marL="0">
+              <a:buNone/>
+            </a:pPr>
+            <a:r>
+              <a:rPr lang="en-US" sz="670" dirty="0">
                 <a:solidFill>
                   <a:srgbClr val="121212"/>
                 </a:solidFill>
@@ -14054,22 +14268,88 @@
                 <a:ea typeface="Microsoft YaHei" pitchFamily="34" charset="-122"/>
                 <a:cs typeface="Microsoft YaHei" pitchFamily="34" charset="-120"/>
               </a:rPr>
-              <a:t>[1][3] 扩产新闻与宁德时代业</a:t>
-            </a:r>
-            <a:endParaRPr lang="en-US" sz="700" dirty="0"/>
-          </a:p>
-        </p:txBody>
-      </p:sp>
-      <p:sp>
-        <p:nvSpPr>
-          <p:cNvPr id="35" name="Text 33"/>
-          <p:cNvSpPr/>
-          <p:nvPr/>
-        </p:nvSpPr>
-        <p:spPr>
-          <a:xfrm>
-            <a:off x="7726680" y="4535424"/>
-            <a:ext cx="2697480" cy="310896"/>
+              <a:t>客户与订单方面，今日无直接</a:t>
+            </a:r>
+            <a:endParaRPr lang="en-US" sz="670" dirty="0"/>
+          </a:p>
+        </p:txBody>
+      </p:sp>
+      <p:sp>
+        <p:nvSpPr>
+          <p:cNvPr id="36" name="Shape 34"/>
+          <p:cNvSpPr/>
+          <p:nvPr/>
+        </p:nvSpPr>
+        <p:spPr>
+          <a:xfrm>
+            <a:off x="9061704" y="2980944"/>
+            <a:ext cx="1243584" cy="804672"/>
+          </a:xfrm>
+          <a:prstGeom prst="rect">
+            <a:avLst/>
+          </a:prstGeom>
+          <a:solidFill>
+            <a:srgbClr val="F4FAF6"/>
+          </a:solidFill>
+          <a:ln w="3810">
+            <a:solidFill>
+              <a:srgbClr val="DADADA"/>
+            </a:solidFill>
+            <a:prstDash val="solid"/>
+          </a:ln>
+        </p:spPr>
+      </p:sp>
+      <p:sp>
+        <p:nvSpPr>
+          <p:cNvPr id="37" name="Text 35"/>
+          <p:cNvSpPr/>
+          <p:nvPr/>
+        </p:nvSpPr>
+        <p:spPr>
+          <a:xfrm>
+            <a:off x="9134856" y="3090672"/>
+            <a:ext cx="438912" cy="109728"/>
+          </a:xfrm>
+          <a:prstGeom prst="rect">
+            <a:avLst/>
+          </a:prstGeom>
+          <a:noFill/>
+          <a:ln/>
+        </p:spPr>
+        <p:txBody>
+          <a:bodyPr wrap="square" lIns="0" tIns="0" rIns="0" bIns="0" rtlCol="0" anchor="ctr">
+            <a:normAutofit/>
+          </a:bodyPr>
+          <a:lstStyle/>
+          <a:p>
+            <a:pPr indent="0" marL="0">
+              <a:buNone/>
+            </a:pPr>
+            <a:r>
+              <a:rPr lang="en-US" sz="710" b="1" dirty="0">
+                <a:solidFill>
+                  <a:srgbClr val="487052"/>
+                </a:solidFill>
+                <a:latin typeface="Microsoft YaHei" pitchFamily="34" charset="0"/>
+                <a:ea typeface="Microsoft YaHei" pitchFamily="34" charset="-122"/>
+                <a:cs typeface="Microsoft YaHei" pitchFamily="34" charset="-120"/>
+              </a:rPr>
+              <a:t>约束</a:t>
+            </a:r>
+            <a:endParaRPr lang="en-US" sz="710" dirty="0"/>
+          </a:p>
+        </p:txBody>
+      </p:sp>
+      <p:sp>
+        <p:nvSpPr>
+          <p:cNvPr id="38" name="Text 36"/>
+          <p:cNvSpPr/>
+          <p:nvPr/>
+        </p:nvSpPr>
+        <p:spPr>
+          <a:xfrm>
+            <a:off x="9134856" y="3310128"/>
+            <a:ext cx="1024128" cy="201168"/>
           </a:xfrm>
           <a:prstGeom prst="rect">
             <a:avLst/>
@@ -14087,6 +14367,47 @@
               <a:buNone/>
             </a:pPr>
             <a:r>
+              <a:rPr lang="en-US" sz="670" dirty="0">
+                <a:solidFill>
+                  <a:srgbClr val="121212"/>
+                </a:solidFill>
+                <a:latin typeface="Microsoft YaHei" pitchFamily="34" charset="0"/>
+                <a:ea typeface="Microsoft YaHei" pitchFamily="34" charset="-122"/>
+                <a:cs typeface="Microsoft YaHei" pitchFamily="34" charset="-120"/>
+              </a:rPr>
+              <a:t>湖南裕能拟20亿元在湖南湘</a:t>
+            </a:r>
+            <a:endParaRPr lang="en-US" sz="670" dirty="0"/>
+          </a:p>
+        </p:txBody>
+      </p:sp>
+      <p:sp>
+        <p:nvSpPr>
+          <p:cNvPr id="39" name="Text 37"/>
+          <p:cNvSpPr/>
+          <p:nvPr/>
+        </p:nvSpPr>
+        <p:spPr>
+          <a:xfrm>
+            <a:off x="7726680" y="4187952"/>
+            <a:ext cx="2697480" cy="493776"/>
+          </a:xfrm>
+          <a:prstGeom prst="rect">
+            <a:avLst/>
+          </a:prstGeom>
+          <a:noFill/>
+          <a:ln/>
+        </p:spPr>
+        <p:txBody>
+          <a:bodyPr wrap="square" lIns="0" tIns="0" rIns="0" bIns="0" rtlCol="0" anchor="t">
+            <a:normAutofit/>
+          </a:bodyPr>
+          <a:lstStyle/>
+          <a:p>
+            <a:pPr indent="0" marL="0">
+              <a:buNone/>
+            </a:pPr>
+            <a:r>
               <a:rPr lang="en-US" sz="760" dirty="0">
                 <a:solidFill>
                   <a:srgbClr val="6D756F"/>
@@ -14095,7 +14416,7 @@
                 <a:ea typeface="Microsoft YaHei" pitchFamily="34" charset="-122"/>
                 <a:cs typeface="Microsoft YaHei" pitchFamily="34" charset="-120"/>
               </a:rPr>
-              <a:t>用企业、项目、产能、客户的链路承接文字结论。</a:t>
+              <a:t>检测到对比/分类信号，用矩阵压缩呈现，不新增外部判断。</a:t>
             </a:r>
             <a:endParaRPr lang="en-US" sz="760" dirty="0"/>
           </a:p>
@@ -14103,7 +14424,7 @@
       </p:sp>
       <p:sp>
         <p:nvSpPr>
-          <p:cNvPr id="36" name="Shape 34"/>
+          <p:cNvPr id="40" name="Shape 38"/>
           <p:cNvSpPr/>
           <p:nvPr/>
         </p:nvSpPr>
@@ -14128,7 +14449,7 @@
       </p:sp>
       <p:sp>
         <p:nvSpPr>
-          <p:cNvPr id="37" name="Text 35"/>
+          <p:cNvPr id="41" name="Text 39"/>
           <p:cNvSpPr/>
           <p:nvPr/>
         </p:nvSpPr>
@@ -14167,7 +14488,7 @@
       </p:sp>
       <p:sp>
         <p:nvSpPr>
-          <p:cNvPr id="38" name="Text 36"/>
+          <p:cNvPr id="42" name="Text 40"/>
           <p:cNvSpPr/>
           <p:nvPr/>
         </p:nvSpPr>
@@ -14200,7 +14521,7 @@
                 <a:ea typeface="Microsoft YaHei" pitchFamily="34" charset="-122"/>
                 <a:cs typeface="Microsoft YaHei" pitchFamily="34" charset="-120"/>
               </a:rPr>
-              <a:t>若湖南裕能、万华化学扩产项目在2027年集中投产，而需求增速未能同步匹配，则磷酸铁锂正极材料加工费可能进一步下行</a:t>
+              <a:t>若裕能湘潭项目与万华二期在2027年如期投产，则磷酸铁锂正极名义产能进一步过剩，加工费可能维持低位</a:t>
             </a:r>
             <a:endParaRPr lang="en-US" sz="1020" dirty="0"/>
           </a:p>
@@ -14349,7 +14670,7 @@
                 <a:ea typeface="Aptos" pitchFamily="34" charset="-122"/>
                 <a:cs typeface="Aptos" pitchFamily="34" charset="-120"/>
               </a:rPr>
-              <a:t>2026-10-26</a:t>
+              <a:t>2026-10-27</a:t>
             </a:r>
             <a:endParaRPr lang="en-US" sz="800" dirty="0"/>
           </a:p>
@@ -14555,7 +14876,7 @@
                 <a:ea typeface="Microsoft YaHei" pitchFamily="34" charset="-122"/>
                 <a:cs typeface="Microsoft YaHei" pitchFamily="34" charset="-120"/>
               </a:rPr>
-              <a:t>2 条公开来源交叉验证｜事实、影响与后续研判</a:t>
+              <a:t>3 条公开来源交叉验证｜事实、影响与后续研判</a:t>
             </a:r>
             <a:endParaRPr lang="en-US" sz="860" dirty="0"/>
           </a:p>
@@ -14664,7 +14985,7 @@
                 <a:ea typeface="Microsoft YaHei" pitchFamily="34" charset="-122"/>
                 <a:cs typeface="Microsoft YaHei" pitchFamily="34" charset="-120"/>
               </a:rPr>
-              <a:t>新能源汽车出口退税率从13%降至9%，可能抬高出海成本并压缩电池厂利润，进而向上游磷酸铁锂正极材料传导降价压力；宁德时代三季报业绩高增，机构看好盈利拐点，但磷酸铁锂环节盈利是否同步改善尚缺乏直接证据。 [2][3]</a:t>
+              <a:t>今日无直接磷酸铁锂价格报价，但政策收紧与产能扩张信号叠加，价格与盈利压力偏向下行。国内新能源车政策收紧可能削弱需求端对正极材料的拉动力，而裕能、万华扩产增加供给，供需天平向买方倾斜。回收成本上升可能进一步压缩全产业链利润。 [1][4][3]</a:t>
             </a:r>
             <a:endParaRPr lang="en-US" sz="960" dirty="0"/>
           </a:p>
@@ -14705,7 +15026,7 @@
                 <a:ea typeface="Aptos" pitchFamily="34" charset="-122"/>
                 <a:cs typeface="Aptos" pitchFamily="34" charset="-120"/>
               </a:rPr>
-              <a:t>依据：[2][3]</a:t>
+              <a:t>依据：[1][4][3]</a:t>
             </a:r>
             <a:endParaRPr lang="en-US" sz="740" dirty="0"/>
           </a:p>
@@ -14814,7 +15135,7 @@
                 <a:ea typeface="Microsoft YaHei" pitchFamily="34" charset="-122"/>
                 <a:cs typeface="Microsoft YaHei" pitchFamily="34" charset="-120"/>
               </a:rPr>
-              <a:t>出口退税下调直接增加新能源汽车出口成本，电池厂可能通过压低上游材料采购价格来对冲，磷酸铁锂正极材料加工费面临压力。宁德时代业绩高增更多体现其规模和技术优势，不能简单推断磷酸铁锂环节盈利改善。需验证：出口退税下调后电池厂对正极材料采购价的调整幅度；磷酸铁锂正极材料行业平均毛利率变化；宁德时代磷酸铁锂电池的单位盈利趋势。</a:t>
+              <a:t>电子工程专辑的政策收紧判断与海融网的扩产报道形成供需两端压力：需求增速可能放缓，供给增量明确，磷酸铁锂正极加工费承压。脱保潮报道则提示电池售后与回收成本上升，可能间接影响电池厂对正极材料的采购定价。需验证碳酸锂价格走势、正极企业库存天数及电池厂压价幅度。</a:t>
             </a:r>
             <a:endParaRPr lang="en-US" sz="960" dirty="0"/>
           </a:p>
@@ -14948,7 +15269,7 @@
                 <a:ea typeface="Microsoft YaHei" pitchFamily="34" charset="-122"/>
                 <a:cs typeface="Microsoft YaHei" pitchFamily="34" charset="-120"/>
               </a:rPr>
-              <a:t>若出口退税下调导致新能源汽车出口增速放缓，则电池厂可能进一步压降磷酸铁锂采购价格，正极材料企业盈利承压；若电池厂通过技术降本消化退税影响，则磷酸铁锂价格压力可能小于预期。跟踪指标：磷酸铁锂正极材料周度价格、新能源汽车月度出口量、电池厂季度毛利率。证据边界：退税政策刚发布，实际影响需等待出口数据和采购合同变化验证；宁德时代财报未单独披露磷酸铁锂业务盈利。</a:t>
+              <a:t>若四季度新能源车销量增速放缓且正极产能利用率下降，则磷酸铁锂加工费可能进一步下探，中小厂商盈利压力加大；若碳酸锂价格企稳反弹，则正极成本支撑增强，加工费下行空间受限。跟踪指标：碳酸锂现货价、正极企业库存周转天数、电池厂采购价、行业开工率。证据边界：今日无实际成交价格数据，需以第三方报价验证。</a:t>
             </a:r>
             <a:endParaRPr lang="en-US" sz="960" dirty="0"/>
           </a:p>
@@ -15016,7 +15337,7 @@
                 <a:ea typeface="Microsoft YaHei" pitchFamily="34" charset="-122"/>
                 <a:cs typeface="Microsoft YaHei" pitchFamily="34" charset="-120"/>
               </a:rPr>
-              <a:t>关键数据解读</a:t>
+              <a:t>对比矩阵</a:t>
             </a:r>
             <a:endParaRPr lang="en-US" sz="1200" dirty="0"/>
           </a:p>
@@ -15030,18 +15351,16 @@
         </p:nvSpPr>
         <p:spPr>
           <a:xfrm>
-            <a:off x="7772400" y="1993392"/>
-            <a:ext cx="2560320" cy="786384"/>
-          </a:xfrm>
-          <a:prstGeom prst="roundRect">
-            <a:avLst>
-              <a:gd name="adj" fmla="val 4651"/>
-            </a:avLst>
+            <a:off x="7818120" y="2176272"/>
+            <a:ext cx="2487168" cy="1609344"/>
+          </a:xfrm>
+          <a:prstGeom prst="rect">
+            <a:avLst/>
           </a:prstGeom>
           <a:solidFill>
-            <a:srgbClr val="F4FAF6"/>
+            <a:srgbClr val="FFFFFF"/>
           </a:solidFill>
-          <a:ln w="7620">
+          <a:ln w="10160">
             <a:solidFill>
               <a:srgbClr val="DADADA"/>
             </a:solidFill>
@@ -15051,147 +15370,20 @@
       </p:sp>
       <p:sp>
         <p:nvSpPr>
-          <p:cNvPr id="25" name="Text 23"/>
-          <p:cNvSpPr/>
-          <p:nvPr/>
-        </p:nvSpPr>
-        <p:spPr>
-          <a:xfrm>
-            <a:off x="7918704" y="2103120"/>
-            <a:ext cx="822960" cy="384048"/>
-          </a:xfrm>
-          <a:prstGeom prst="rect">
-            <a:avLst/>
-          </a:prstGeom>
-          <a:noFill/>
-          <a:ln/>
-        </p:spPr>
-        <p:txBody>
-          <a:bodyPr wrap="square" lIns="0" tIns="0" rIns="0" bIns="0" rtlCol="0" anchor="ctr">
-            <a:normAutofit/>
-          </a:bodyPr>
-          <a:lstStyle/>
-          <a:p>
-            <a:pPr indent="0" marL="0">
-              <a:buNone/>
-            </a:pPr>
-            <a:r>
-              <a:rPr lang="en-US" sz="1600" b="1" dirty="0">
-                <a:solidFill>
-                  <a:srgbClr val="487052"/>
-                </a:solidFill>
-                <a:latin typeface="Aptos" pitchFamily="34" charset="0"/>
-                <a:ea typeface="Aptos" pitchFamily="34" charset="-122"/>
-                <a:cs typeface="Aptos" pitchFamily="34" charset="-120"/>
-              </a:rPr>
-              <a:t>13%</a:t>
-            </a:r>
-            <a:endParaRPr lang="en-US" sz="1600" dirty="0"/>
-          </a:p>
-        </p:txBody>
-      </p:sp>
-      <p:sp>
-        <p:nvSpPr>
-          <p:cNvPr id="26" name="Text 24"/>
-          <p:cNvSpPr/>
-          <p:nvPr/>
-        </p:nvSpPr>
-        <p:spPr>
-          <a:xfrm>
-            <a:off x="8759952" y="2167128"/>
-            <a:ext cx="1371600" cy="201168"/>
-          </a:xfrm>
-          <a:prstGeom prst="rect">
-            <a:avLst/>
-          </a:prstGeom>
-          <a:noFill/>
-          <a:ln/>
-        </p:spPr>
-        <p:txBody>
-          <a:bodyPr wrap="square" lIns="0" tIns="0" rIns="0" bIns="0" rtlCol="0" anchor="ctr">
-            <a:normAutofit/>
-          </a:bodyPr>
-          <a:lstStyle/>
-          <a:p>
-            <a:pPr indent="0" marL="0">
-              <a:buNone/>
-            </a:pPr>
-            <a:r>
-              <a:rPr lang="en-US" sz="820" b="1" dirty="0">
-                <a:solidFill>
-                  <a:srgbClr val="121212"/>
-                </a:solidFill>
-                <a:latin typeface="Microsoft YaHei" pitchFamily="34" charset="0"/>
-                <a:ea typeface="Microsoft YaHei" pitchFamily="34" charset="-122"/>
-                <a:cs typeface="Microsoft YaHei" pitchFamily="34" charset="-120"/>
-              </a:rPr>
-              <a:t>降至</a:t>
-            </a:r>
-            <a:endParaRPr lang="en-US" sz="820" dirty="0"/>
-          </a:p>
-        </p:txBody>
-      </p:sp>
-      <p:sp>
-        <p:nvSpPr>
-          <p:cNvPr id="27" name="Text 25"/>
-          <p:cNvSpPr/>
-          <p:nvPr/>
-        </p:nvSpPr>
-        <p:spPr>
-          <a:xfrm>
-            <a:off x="7918704" y="2578608"/>
-            <a:ext cx="2176272" cy="201168"/>
-          </a:xfrm>
-          <a:prstGeom prst="rect">
-            <a:avLst/>
-          </a:prstGeom>
-          <a:noFill/>
-          <a:ln/>
-        </p:spPr>
-        <p:txBody>
-          <a:bodyPr wrap="square" lIns="0" tIns="0" rIns="0" bIns="0" rtlCol="0" anchor="t">
-            <a:normAutofit/>
-          </a:bodyPr>
-          <a:lstStyle/>
-          <a:p>
-            <a:pPr indent="0" marL="0">
-              <a:buNone/>
-            </a:pPr>
-            <a:r>
-              <a:rPr lang="en-US" sz="840" dirty="0">
-                <a:solidFill>
-                  <a:srgbClr val="121212"/>
-                </a:solidFill>
-                <a:latin typeface="Microsoft YaHei" pitchFamily="34" charset="0"/>
-                <a:ea typeface="Microsoft YaHei" pitchFamily="34" charset="-122"/>
-                <a:cs typeface="Microsoft YaHei" pitchFamily="34" charset="-120"/>
-              </a:rPr>
-              <a:t>公开信息：新能源汽车出口退税率从13%降至9%，可能抬高出海成本并压</a:t>
-            </a:r>
-            <a:endParaRPr lang="en-US" sz="840" dirty="0"/>
-          </a:p>
-        </p:txBody>
-      </p:sp>
-      <p:sp>
-        <p:nvSpPr>
-          <p:cNvPr id="28" name="Shape 26"/>
-          <p:cNvSpPr/>
-          <p:nvPr/>
-        </p:nvSpPr>
-        <p:spPr>
-          <a:xfrm>
-            <a:off x="7772400" y="2926080"/>
-            <a:ext cx="2560320" cy="786384"/>
-          </a:xfrm>
-          <a:prstGeom prst="roundRect">
-            <a:avLst>
-              <a:gd name="adj" fmla="val 4651"/>
-            </a:avLst>
-          </a:prstGeom>
-          <a:solidFill>
-            <a:srgbClr val="FFFFFF"/>
-          </a:solidFill>
-          <a:ln w="7620">
+          <p:cNvPr id="25" name="Shape 23"/>
+          <p:cNvSpPr/>
+          <p:nvPr/>
+        </p:nvSpPr>
+        <p:spPr>
+          <a:xfrm>
+            <a:off x="9061704" y="2176272"/>
+            <a:ext cx="0" cy="1609344"/>
+          </a:xfrm>
+          <a:prstGeom prst="line">
+            <a:avLst/>
+          </a:prstGeom>
+          <a:noFill/>
+          <a:ln w="8890">
             <a:solidFill>
               <a:srgbClr val="DADADA"/>
             </a:solidFill>
@@ -15201,14 +15393,169 @@
       </p:sp>
       <p:sp>
         <p:nvSpPr>
+          <p:cNvPr id="26" name="Shape 24"/>
+          <p:cNvSpPr/>
+          <p:nvPr/>
+        </p:nvSpPr>
+        <p:spPr>
+          <a:xfrm>
+            <a:off x="7818120" y="2980944"/>
+            <a:ext cx="2487168" cy="0"/>
+          </a:xfrm>
+          <a:prstGeom prst="line">
+            <a:avLst/>
+          </a:prstGeom>
+          <a:noFill/>
+          <a:ln w="8890">
+            <a:solidFill>
+              <a:srgbClr val="DADADA"/>
+            </a:solidFill>
+            <a:prstDash val="solid"/>
+          </a:ln>
+        </p:spPr>
+      </p:sp>
+      <p:sp>
+        <p:nvSpPr>
+          <p:cNvPr id="27" name="Shape 25"/>
+          <p:cNvSpPr/>
+          <p:nvPr/>
+        </p:nvSpPr>
+        <p:spPr>
+          <a:xfrm>
+            <a:off x="7818120" y="2176272"/>
+            <a:ext cx="1243584" cy="804672"/>
+          </a:xfrm>
+          <a:prstGeom prst="rect">
+            <a:avLst/>
+          </a:prstGeom>
+          <a:solidFill>
+            <a:srgbClr val="DDEBE0"/>
+          </a:solidFill>
+          <a:ln w="3810">
+            <a:solidFill>
+              <a:srgbClr val="DADADA"/>
+            </a:solidFill>
+            <a:prstDash val="solid"/>
+          </a:ln>
+        </p:spPr>
+      </p:sp>
+      <p:sp>
+        <p:nvSpPr>
+          <p:cNvPr id="28" name="Text 26"/>
+          <p:cNvSpPr/>
+          <p:nvPr/>
+        </p:nvSpPr>
+        <p:spPr>
+          <a:xfrm>
+            <a:off x="7891272" y="2286000"/>
+            <a:ext cx="438912" cy="109728"/>
+          </a:xfrm>
+          <a:prstGeom prst="rect">
+            <a:avLst/>
+          </a:prstGeom>
+          <a:noFill/>
+          <a:ln/>
+        </p:spPr>
+        <p:txBody>
+          <a:bodyPr wrap="square" lIns="0" tIns="0" rIns="0" bIns="0" rtlCol="0" anchor="ctr">
+            <a:normAutofit/>
+          </a:bodyPr>
+          <a:lstStyle/>
+          <a:p>
+            <a:pPr indent="0" marL="0">
+              <a:buNone/>
+            </a:pPr>
+            <a:r>
+              <a:rPr lang="en-US" sz="710" b="1" dirty="0">
+                <a:solidFill>
+                  <a:srgbClr val="487052"/>
+                </a:solidFill>
+                <a:latin typeface="Microsoft YaHei" pitchFamily="34" charset="0"/>
+                <a:ea typeface="Microsoft YaHei" pitchFamily="34" charset="-122"/>
+                <a:cs typeface="Microsoft YaHei" pitchFamily="34" charset="-120"/>
+              </a:rPr>
+              <a:t>路线A</a:t>
+            </a:r>
+            <a:endParaRPr lang="en-US" sz="710" dirty="0"/>
+          </a:p>
+        </p:txBody>
+      </p:sp>
+      <p:sp>
+        <p:nvSpPr>
           <p:cNvPr id="29" name="Text 27"/>
           <p:cNvSpPr/>
           <p:nvPr/>
         </p:nvSpPr>
         <p:spPr>
           <a:xfrm>
-            <a:off x="7918704" y="3035808"/>
-            <a:ext cx="822960" cy="384048"/>
+            <a:off x="7891272" y="2505456"/>
+            <a:ext cx="1024128" cy="201168"/>
+          </a:xfrm>
+          <a:prstGeom prst="rect">
+            <a:avLst/>
+          </a:prstGeom>
+          <a:noFill/>
+          <a:ln/>
+        </p:spPr>
+        <p:txBody>
+          <a:bodyPr wrap="square" lIns="0" tIns="0" rIns="0" bIns="0" rtlCol="0" anchor="t">
+            <a:normAutofit/>
+          </a:bodyPr>
+          <a:lstStyle/>
+          <a:p>
+            <a:pPr indent="0" marL="0">
+              <a:buNone/>
+            </a:pPr>
+            <a:r>
+              <a:rPr lang="en-US" sz="670" dirty="0">
+                <a:solidFill>
+                  <a:srgbClr val="121212"/>
+                </a:solidFill>
+                <a:latin typeface="Microsoft YaHei" pitchFamily="34" charset="0"/>
+                <a:ea typeface="Microsoft YaHei" pitchFamily="34" charset="-122"/>
+                <a:cs typeface="Microsoft YaHei" pitchFamily="34" charset="-120"/>
+              </a:rPr>
+              <a:t>今日无直接磷酸铁锂价格报价</a:t>
+            </a:r>
+            <a:endParaRPr lang="en-US" sz="670" dirty="0"/>
+          </a:p>
+        </p:txBody>
+      </p:sp>
+      <p:sp>
+        <p:nvSpPr>
+          <p:cNvPr id="30" name="Shape 28"/>
+          <p:cNvSpPr/>
+          <p:nvPr/>
+        </p:nvSpPr>
+        <p:spPr>
+          <a:xfrm>
+            <a:off x="9061704" y="2176272"/>
+            <a:ext cx="1243584" cy="804672"/>
+          </a:xfrm>
+          <a:prstGeom prst="rect">
+            <a:avLst/>
+          </a:prstGeom>
+          <a:solidFill>
+            <a:srgbClr val="FFFFFF"/>
+          </a:solidFill>
+          <a:ln w="3810">
+            <a:solidFill>
+              <a:srgbClr val="DADADA"/>
+            </a:solidFill>
+            <a:prstDash val="solid"/>
+          </a:ln>
+        </p:spPr>
+      </p:sp>
+      <p:sp>
+        <p:nvSpPr>
+          <p:cNvPr id="31" name="Text 29"/>
+          <p:cNvSpPr/>
+          <p:nvPr/>
+        </p:nvSpPr>
+        <p:spPr>
+          <a:xfrm>
+            <a:off x="9134856" y="2286000"/>
+            <a:ext cx="438912" cy="109728"/>
           </a:xfrm>
           <a:prstGeom prst="rect">
             <a:avLst/>
@@ -15226,30 +15573,96 @@
               <a:buNone/>
             </a:pPr>
             <a:r>
-              <a:rPr lang="en-US" sz="1600" b="1" dirty="0">
+              <a:rPr lang="en-US" sz="710" b="1" dirty="0">
                 <a:solidFill>
                   <a:srgbClr val="487052"/>
                 </a:solidFill>
-                <a:latin typeface="Aptos" pitchFamily="34" charset="0"/>
-                <a:ea typeface="Aptos" pitchFamily="34" charset="-122"/>
-                <a:cs typeface="Aptos" pitchFamily="34" charset="-120"/>
-              </a:rPr>
-              <a:t>9%</a:t>
-            </a:r>
-            <a:endParaRPr lang="en-US" sz="1600" dirty="0"/>
-          </a:p>
-        </p:txBody>
-      </p:sp>
-      <p:sp>
-        <p:nvSpPr>
-          <p:cNvPr id="30" name="Text 28"/>
-          <p:cNvSpPr/>
-          <p:nvPr/>
-        </p:nvSpPr>
-        <p:spPr>
-          <a:xfrm>
-            <a:off x="8759952" y="3099816"/>
-            <a:ext cx="1371600" cy="201168"/>
+                <a:latin typeface="Microsoft YaHei" pitchFamily="34" charset="0"/>
+                <a:ea typeface="Microsoft YaHei" pitchFamily="34" charset="-122"/>
+                <a:cs typeface="Microsoft YaHei" pitchFamily="34" charset="-120"/>
+              </a:rPr>
+              <a:t>路线B</a:t>
+            </a:r>
+            <a:endParaRPr lang="en-US" sz="710" dirty="0"/>
+          </a:p>
+        </p:txBody>
+      </p:sp>
+      <p:sp>
+        <p:nvSpPr>
+          <p:cNvPr id="32" name="Text 30"/>
+          <p:cNvSpPr/>
+          <p:nvPr/>
+        </p:nvSpPr>
+        <p:spPr>
+          <a:xfrm>
+            <a:off x="9134856" y="2505456"/>
+            <a:ext cx="1024128" cy="201168"/>
+          </a:xfrm>
+          <a:prstGeom prst="rect">
+            <a:avLst/>
+          </a:prstGeom>
+          <a:noFill/>
+          <a:ln/>
+        </p:spPr>
+        <p:txBody>
+          <a:bodyPr wrap="square" lIns="0" tIns="0" rIns="0" bIns="0" rtlCol="0" anchor="t">
+            <a:normAutofit/>
+          </a:bodyPr>
+          <a:lstStyle/>
+          <a:p>
+            <a:pPr indent="0" marL="0">
+              <a:buNone/>
+            </a:pPr>
+            <a:r>
+              <a:rPr lang="en-US" sz="670" dirty="0">
+                <a:solidFill>
+                  <a:srgbClr val="121212"/>
+                </a:solidFill>
+                <a:latin typeface="Microsoft YaHei" pitchFamily="34" charset="0"/>
+                <a:ea typeface="Microsoft YaHei" pitchFamily="34" charset="-122"/>
+                <a:cs typeface="Microsoft YaHei" pitchFamily="34" charset="-120"/>
+              </a:rPr>
+              <a:t>国内新能源车政策收紧可能削</a:t>
+            </a:r>
+            <a:endParaRPr lang="en-US" sz="670" dirty="0"/>
+          </a:p>
+        </p:txBody>
+      </p:sp>
+      <p:sp>
+        <p:nvSpPr>
+          <p:cNvPr id="33" name="Shape 31"/>
+          <p:cNvSpPr/>
+          <p:nvPr/>
+        </p:nvSpPr>
+        <p:spPr>
+          <a:xfrm>
+            <a:off x="7818120" y="2980944"/>
+            <a:ext cx="1243584" cy="804672"/>
+          </a:xfrm>
+          <a:prstGeom prst="rect">
+            <a:avLst/>
+          </a:prstGeom>
+          <a:solidFill>
+            <a:srgbClr val="FFFFFF"/>
+          </a:solidFill>
+          <a:ln w="3810">
+            <a:solidFill>
+              <a:srgbClr val="DADADA"/>
+            </a:solidFill>
+            <a:prstDash val="solid"/>
+          </a:ln>
+        </p:spPr>
+      </p:sp>
+      <p:sp>
+        <p:nvSpPr>
+          <p:cNvPr id="34" name="Text 32"/>
+          <p:cNvSpPr/>
+          <p:nvPr/>
+        </p:nvSpPr>
+        <p:spPr>
+          <a:xfrm>
+            <a:off x="7891272" y="3090672"/>
+            <a:ext cx="438912" cy="109728"/>
           </a:xfrm>
           <a:prstGeom prst="rect">
             <a:avLst/>
@@ -15267,7 +15680,48 @@
               <a:buNone/>
             </a:pPr>
             <a:r>
-              <a:rPr lang="en-US" sz="820" b="1" dirty="0">
+              <a:rPr lang="en-US" sz="710" b="1" dirty="0">
+                <a:solidFill>
+                  <a:srgbClr val="487052"/>
+                </a:solidFill>
+                <a:latin typeface="Microsoft YaHei" pitchFamily="34" charset="0"/>
+                <a:ea typeface="Microsoft YaHei" pitchFamily="34" charset="-122"/>
+                <a:cs typeface="Microsoft YaHei" pitchFamily="34" charset="-120"/>
+              </a:rPr>
+              <a:t>机会</a:t>
+            </a:r>
+            <a:endParaRPr lang="en-US" sz="710" dirty="0"/>
+          </a:p>
+        </p:txBody>
+      </p:sp>
+      <p:sp>
+        <p:nvSpPr>
+          <p:cNvPr id="35" name="Text 33"/>
+          <p:cNvSpPr/>
+          <p:nvPr/>
+        </p:nvSpPr>
+        <p:spPr>
+          <a:xfrm>
+            <a:off x="7891272" y="3310128"/>
+            <a:ext cx="1024128" cy="201168"/>
+          </a:xfrm>
+          <a:prstGeom prst="rect">
+            <a:avLst/>
+          </a:prstGeom>
+          <a:noFill/>
+          <a:ln/>
+        </p:spPr>
+        <p:txBody>
+          <a:bodyPr wrap="square" lIns="0" tIns="0" rIns="0" bIns="0" rtlCol="0" anchor="t">
+            <a:normAutofit/>
+          </a:bodyPr>
+          <a:lstStyle/>
+          <a:p>
+            <a:pPr indent="0" marL="0">
+              <a:buNone/>
+            </a:pPr>
+            <a:r>
+              <a:rPr lang="en-US" sz="670" dirty="0">
                 <a:solidFill>
                   <a:srgbClr val="121212"/>
                 </a:solidFill>
@@ -15275,22 +15729,88 @@
                 <a:ea typeface="Microsoft YaHei" pitchFamily="34" charset="-122"/>
                 <a:cs typeface="Microsoft YaHei" pitchFamily="34" charset="-120"/>
               </a:rPr>
-              <a:t>源汽车出口退税率从13%降至</a:t>
-            </a:r>
-            <a:endParaRPr lang="en-US" sz="820" dirty="0"/>
-          </a:p>
-        </p:txBody>
-      </p:sp>
-      <p:sp>
-        <p:nvSpPr>
-          <p:cNvPr id="31" name="Text 29"/>
-          <p:cNvSpPr/>
-          <p:nvPr/>
-        </p:nvSpPr>
-        <p:spPr>
-          <a:xfrm>
-            <a:off x="7918704" y="3511296"/>
-            <a:ext cx="2176272" cy="201168"/>
+              <a:t>回收成本上升可能进一步压缩</a:t>
+            </a:r>
+            <a:endParaRPr lang="en-US" sz="670" dirty="0"/>
+          </a:p>
+        </p:txBody>
+      </p:sp>
+      <p:sp>
+        <p:nvSpPr>
+          <p:cNvPr id="36" name="Shape 34"/>
+          <p:cNvSpPr/>
+          <p:nvPr/>
+        </p:nvSpPr>
+        <p:spPr>
+          <a:xfrm>
+            <a:off x="9061704" y="2980944"/>
+            <a:ext cx="1243584" cy="804672"/>
+          </a:xfrm>
+          <a:prstGeom prst="rect">
+            <a:avLst/>
+          </a:prstGeom>
+          <a:solidFill>
+            <a:srgbClr val="F4FAF6"/>
+          </a:solidFill>
+          <a:ln w="3810">
+            <a:solidFill>
+              <a:srgbClr val="DADADA"/>
+            </a:solidFill>
+            <a:prstDash val="solid"/>
+          </a:ln>
+        </p:spPr>
+      </p:sp>
+      <p:sp>
+        <p:nvSpPr>
+          <p:cNvPr id="37" name="Text 35"/>
+          <p:cNvSpPr/>
+          <p:nvPr/>
+        </p:nvSpPr>
+        <p:spPr>
+          <a:xfrm>
+            <a:off x="9134856" y="3090672"/>
+            <a:ext cx="438912" cy="109728"/>
+          </a:xfrm>
+          <a:prstGeom prst="rect">
+            <a:avLst/>
+          </a:prstGeom>
+          <a:noFill/>
+          <a:ln/>
+        </p:spPr>
+        <p:txBody>
+          <a:bodyPr wrap="square" lIns="0" tIns="0" rIns="0" bIns="0" rtlCol="0" anchor="ctr">
+            <a:normAutofit/>
+          </a:bodyPr>
+          <a:lstStyle/>
+          <a:p>
+            <a:pPr indent="0" marL="0">
+              <a:buNone/>
+            </a:pPr>
+            <a:r>
+              <a:rPr lang="en-US" sz="710" b="1" dirty="0">
+                <a:solidFill>
+                  <a:srgbClr val="487052"/>
+                </a:solidFill>
+                <a:latin typeface="Microsoft YaHei" pitchFamily="34" charset="0"/>
+                <a:ea typeface="Microsoft YaHei" pitchFamily="34" charset="-122"/>
+                <a:cs typeface="Microsoft YaHei" pitchFamily="34" charset="-120"/>
+              </a:rPr>
+              <a:t>约束</a:t>
+            </a:r>
+            <a:endParaRPr lang="en-US" sz="710" dirty="0"/>
+          </a:p>
+        </p:txBody>
+      </p:sp>
+      <p:sp>
+        <p:nvSpPr>
+          <p:cNvPr id="38" name="Text 36"/>
+          <p:cNvSpPr/>
+          <p:nvPr/>
+        </p:nvSpPr>
+        <p:spPr>
+          <a:xfrm>
+            <a:off x="9134856" y="3310128"/>
+            <a:ext cx="1024128" cy="201168"/>
           </a:xfrm>
           <a:prstGeom prst="rect">
             <a:avLst/>
@@ -15308,7 +15828,7 @@
               <a:buNone/>
             </a:pPr>
             <a:r>
-              <a:rPr lang="en-US" sz="840" dirty="0">
+              <a:rPr lang="en-US" sz="670" dirty="0">
                 <a:solidFill>
                   <a:srgbClr val="121212"/>
                 </a:solidFill>
@@ -15316,22 +15836,22 @@
                 <a:ea typeface="Microsoft YaHei" pitchFamily="34" charset="-122"/>
                 <a:cs typeface="Microsoft YaHei" pitchFamily="34" charset="-120"/>
               </a:rPr>
-              <a:t>公开信息：新能源汽车出口退税率从13%降至9%，可能抬高出海成本并压</a:t>
-            </a:r>
-            <a:endParaRPr lang="en-US" sz="840" dirty="0"/>
-          </a:p>
-        </p:txBody>
-      </p:sp>
-      <p:sp>
-        <p:nvSpPr>
-          <p:cNvPr id="32" name="Text 30"/>
-          <p:cNvSpPr/>
-          <p:nvPr/>
-        </p:nvSpPr>
-        <p:spPr>
-          <a:xfrm>
-            <a:off x="7772400" y="4498848"/>
-            <a:ext cx="2560320" cy="384048"/>
+              <a:t>今日无直接磷酸铁锂价格报价</a:t>
+            </a:r>
+            <a:endParaRPr lang="en-US" sz="670" dirty="0"/>
+          </a:p>
+        </p:txBody>
+      </p:sp>
+      <p:sp>
+        <p:nvSpPr>
+          <p:cNvPr id="39" name="Text 37"/>
+          <p:cNvSpPr/>
+          <p:nvPr/>
+        </p:nvSpPr>
+        <p:spPr>
+          <a:xfrm>
+            <a:off x="7726680" y="4187952"/>
+            <a:ext cx="2697480" cy="493776"/>
           </a:xfrm>
           <a:prstGeom prst="rect">
             <a:avLst/>
@@ -15349,7 +15869,7 @@
               <a:buNone/>
             </a:pPr>
             <a:r>
-              <a:rPr lang="en-US" sz="800" dirty="0">
+              <a:rPr lang="en-US" sz="760" dirty="0">
                 <a:solidFill>
                   <a:srgbClr val="6D756F"/>
                 </a:solidFill>
@@ -15357,15 +15877,15 @@
                 <a:ea typeface="Microsoft YaHei" pitchFamily="34" charset="-122"/>
                 <a:cs typeface="Microsoft YaHei" pitchFamily="34" charset="-120"/>
               </a:rPr>
-              <a:t>阅读提示：仅按公开报道原文呈现；不同企业、时间和统计范围不可直接横向比较。</a:t>
-            </a:r>
-            <a:endParaRPr lang="en-US" sz="800" dirty="0"/>
-          </a:p>
-        </p:txBody>
-      </p:sp>
-      <p:sp>
-        <p:nvSpPr>
-          <p:cNvPr id="33" name="Shape 31"/>
+              <a:t>检测到对比/分类信号，用矩阵压缩呈现，不新增外部判断。</a:t>
+            </a:r>
+            <a:endParaRPr lang="en-US" sz="760" dirty="0"/>
+          </a:p>
+        </p:txBody>
+      </p:sp>
+      <p:sp>
+        <p:nvSpPr>
+          <p:cNvPr id="40" name="Shape 38"/>
           <p:cNvSpPr/>
           <p:nvPr/>
         </p:nvSpPr>
@@ -15390,7 +15910,7 @@
       </p:sp>
       <p:sp>
         <p:nvSpPr>
-          <p:cNvPr id="34" name="Text 32"/>
+          <p:cNvPr id="41" name="Text 39"/>
           <p:cNvSpPr/>
           <p:nvPr/>
         </p:nvSpPr>
@@ -15429,7 +15949,7 @@
       </p:sp>
       <p:sp>
         <p:nvSpPr>
-          <p:cNvPr id="35" name="Text 33"/>
+          <p:cNvPr id="42" name="Text 40"/>
           <p:cNvSpPr/>
           <p:nvPr/>
         </p:nvSpPr>
@@ -15462,7 +15982,7 @@
                 <a:ea typeface="Microsoft YaHei" pitchFamily="34" charset="-122"/>
                 <a:cs typeface="Microsoft YaHei" pitchFamily="34" charset="-120"/>
               </a:rPr>
-              <a:t>若出口退税下调导致新能源汽车出口增速放缓，则电池厂可能进一步压降磷酸铁锂采购价格，正极材料企业盈利承压</a:t>
+              <a:t>若四季度新能源车销量增速放缓且正极产能利用率下降，则磷酸铁锂加工费可能进一步下探，中小厂商盈利压力加大</a:t>
             </a:r>
             <a:endParaRPr lang="en-US" sz="1020" dirty="0"/>
           </a:p>
@@ -15611,7 +16131,7 @@
                 <a:ea typeface="Aptos" pitchFamily="34" charset="-122"/>
                 <a:cs typeface="Aptos" pitchFamily="34" charset="-120"/>
               </a:rPr>
-              <a:t>2026-10-26</a:t>
+              <a:t>2026-10-27</a:t>
             </a:r>
             <a:endParaRPr lang="en-US" sz="800" dirty="0"/>
           </a:p>
@@ -15817,7 +16337,7 @@
                 <a:ea typeface="Microsoft YaHei" pitchFamily="34" charset="-122"/>
                 <a:cs typeface="Microsoft YaHei" pitchFamily="34" charset="-120"/>
               </a:rPr>
-              <a:t>3 条公开来源交叉验证｜事实、影响与后续研判</a:t>
+              <a:t>4 条公开来源交叉验证｜事实、影响与后续研判</a:t>
             </a:r>
             <a:endParaRPr lang="en-US" sz="860" dirty="0"/>
           </a:p>
@@ -15926,7 +16446,7 @@
                 <a:ea typeface="Microsoft YaHei" pitchFamily="34" charset="-122"/>
                 <a:cs typeface="Microsoft YaHei" pitchFamily="34" charset="-120"/>
               </a:rPr>
-              <a:t>新能源汽车出口退税率由13%降至9%，是今日最直接的政策变化，可能增加出海成本并影响电池及材料环节的海外订单定价；此外，废旧锂电池回收相关新闻显示回收体系在国内外持续推进，但尚未形成对磷酸铁锂生产的直接约束。 [2][5][6]</a:t>
+              <a:t>国内新能源车政策收紧，可能提高购车门槛或减少补贴，压制短期需求；动力电池高值化利用被定性为淘汰赛，叠加首批电车脱保潮，回收与梯次利用合规要求趋严。电池回收项目（贵州台江3万吨）推进，显示合规产能建设加速，不合规小作坊面临退出压力。 [1][2][3][7]</a:t>
             </a:r>
             <a:endParaRPr lang="en-US" sz="960" dirty="0"/>
           </a:p>
@@ -15967,7 +16487,7 @@
                 <a:ea typeface="Aptos" pitchFamily="34" charset="-122"/>
                 <a:cs typeface="Aptos" pitchFamily="34" charset="-120"/>
               </a:rPr>
-              <a:t>依据：[2][5][6]</a:t>
+              <a:t>依据：[1][2][3][7]</a:t>
             </a:r>
             <a:endParaRPr lang="en-US" sz="740" dirty="0"/>
           </a:p>
@@ -16076,7 +16596,7 @@
                 <a:ea typeface="Microsoft YaHei" pitchFamily="34" charset="-122"/>
                 <a:cs typeface="Microsoft YaHei" pitchFamily="34" charset="-120"/>
               </a:rPr>
-              <a:t>出口退税下调属于贸易政策调整，直接影响新能源汽车出口盈利，电池厂可能将部分成本压力转嫁上游材料企业。电池回收新闻（吉尔吉斯斯坦设立回收箱、废旧锂电池破碎分选设备）反映全球对电池全生命周期管理关注度提升，长期可能对磷酸铁锂生产企业的回收责任提出更高要求。需调研：出口退税下调是否伴随其他出海支持政策；国内电池回收法规对磷酸铁锂生产企业的具体合规要求。</a:t>
+              <a:t>电子工程专辑的政策收紧信号直接影响新能源车销量预期，进而传导至磷酸铁锂正极订单；徐盛明观点与脱保潮报道共同指向回收体系压力，可能推高电池全生命周期成本。上海有色金属报道的贵州台江回收项目表明合规回收产能正在落地，但短期难以完全消化脱保电池量。需跟踪政策细则、回收白名单扩容及环保督查力度。</a:t>
             </a:r>
             <a:endParaRPr lang="en-US" sz="960" dirty="0"/>
           </a:p>
@@ -16210,7 +16730,7 @@
                 <a:ea typeface="Microsoft YaHei" pitchFamily="34" charset="-122"/>
                 <a:cs typeface="Microsoft YaHei" pitchFamily="34" charset="-120"/>
               </a:rPr>
-              <a:t>若出口退税下调后新能源汽车出口量明显下滑，则电池厂可能减少海外订单并向上游压价，磷酸铁锂需求承压；若回收政策趋严要求生产企业承担回收成本，则磷酸铁锂企业可能面临额外合规支出。跟踪指标：新能源汽车月度出口数据、国内电池回收法规草案、磷酸铁锂企业回收合作公告。证据边界：退税政策影响需等待出口数据验证；回收新闻多为行业动态，尚未形成对磷酸铁锂生产的直接约束。</a:t>
+              <a:t>若国内新能源车政策进一步收紧，则四季度磷酸铁锂需求可能不及预期，正极企业排产下调；若回收合规要求加速落地，则具备资质的回收企业可能获得原料成本优势，不合规产能出清。跟踪指标：新能源车补贴政策文件、回收白名单企业数量、环保督查通报、脱保电池流入合规渠道比例。证据边界：政策收紧的具体条款尚未公布，回收项目投产时间不确定。</a:t>
             </a:r>
             <a:endParaRPr lang="en-US" sz="960" dirty="0"/>
           </a:p>
@@ -16385,7 +16905,7 @@
                 <a:ea typeface="Microsoft YaHei" pitchFamily="34" charset="-122"/>
                 <a:cs typeface="Microsoft YaHei" pitchFamily="34" charset="-120"/>
               </a:rPr>
-              <a:t>新能源汽车出口退税率由13%降至9</a:t>
+              <a:t>国内新能源车政策收紧，可能提高购车</a:t>
             </a:r>
             <a:endParaRPr lang="en-US" sz="660" dirty="0"/>
           </a:p>
@@ -16492,7 +17012,7 @@
                 <a:ea typeface="Microsoft YaHei" pitchFamily="34" charset="-122"/>
                 <a:cs typeface="Microsoft YaHei" pitchFamily="34" charset="-120"/>
               </a:rPr>
-              <a:t>此外，废旧锂电池回收相关新闻显示回</a:t>
+              <a:t>动力电池高值化利用被定性为淘汰赛，</a:t>
             </a:r>
             <a:endParaRPr lang="en-US" sz="660" dirty="0"/>
           </a:p>
@@ -16599,7 +17119,7 @@
                 <a:ea typeface="Microsoft YaHei" pitchFamily="34" charset="-122"/>
                 <a:cs typeface="Microsoft YaHei" pitchFamily="34" charset="-120"/>
               </a:rPr>
-              <a:t>[2][5][6] 出口退税下调属</a:t>
+              <a:t>电池回收项目（贵州台江3万吨）推进</a:t>
             </a:r>
             <a:endParaRPr lang="en-US" sz="660" dirty="0"/>
           </a:p>
@@ -16704,7 +17224,7 @@
                 <a:ea typeface="Microsoft YaHei" pitchFamily="34" charset="-122"/>
                 <a:cs typeface="Microsoft YaHei" pitchFamily="34" charset="-120"/>
               </a:rPr>
-              <a:t>若出口退税下调后新能源汽车出口量明显下滑，则电池厂可能减少海外订单并向上游压价，磷酸铁锂需求承压</a:t>
+              <a:t>若国内新能源车政策进一步收紧，则四季度磷酸铁锂需求可能不及预期，正极企业排产下调</a:t>
             </a:r>
             <a:endParaRPr lang="en-US" sz="1020" dirty="0"/>
           </a:p>
@@ -16853,7 +17373,7 @@
                 <a:ea typeface="Aptos" pitchFamily="34" charset="-122"/>
                 <a:cs typeface="Aptos" pitchFamily="34" charset="-120"/>
               </a:rPr>
-              <a:t>2026-10-26</a:t>
+              <a:t>2026-10-27</a:t>
             </a:r>
             <a:endParaRPr lang="en-US" sz="800" dirty="0"/>
           </a:p>
@@ -17168,7 +17688,7 @@
                 <a:ea typeface="Microsoft YaHei" pitchFamily="34" charset="-122"/>
                 <a:cs typeface="Microsoft YaHei" pitchFamily="34" charset="-120"/>
               </a:rPr>
-              <a:t>清陶能源80亿元固态电池项目一期投产，固态电池产业化推进对磷酸铁锂长期技术路线构成潜在竞争；电摩锂电化趋势中，磷酸铁锂需与其他锂电路线竞争轻型动力市场，但今日信息未披露具体竞品份额变化。 [1][4]</a:t>
+              <a:t>零跑与海泰科服投资企业合作攻坚前沿电池技术，可能指向非磷酸铁锂路线，构成潜在竞品威胁；但技术细节未披露，短期对磷酸铁锂份额影响有限。激光精焊技术作为制造工艺改进，对磷酸铁锂安全性能有正面作用，不构成路线替代。 [5][6]</a:t>
             </a:r>
             <a:endParaRPr lang="en-US" sz="960" dirty="0"/>
           </a:p>
@@ -17209,7 +17729,7 @@
                 <a:ea typeface="Aptos" pitchFamily="34" charset="-122"/>
                 <a:cs typeface="Aptos" pitchFamily="34" charset="-120"/>
               </a:rPr>
-              <a:t>依据：[1][4]</a:t>
+              <a:t>依据：[5][6]</a:t>
             </a:r>
             <a:endParaRPr lang="en-US" sz="740" dirty="0"/>
           </a:p>
@@ -17318,7 +17838,7 @@
                 <a:ea typeface="Microsoft YaHei" pitchFamily="34" charset="-122"/>
                 <a:cs typeface="Microsoft YaHei" pitchFamily="34" charset="-120"/>
               </a:rPr>
-              <a:t>固态电池项目投产是今日竞品观察的核心信号，若固态电池在高端电动汽车领域加速渗透，可能分流磷酸铁锂的部分增量需求。电摩锂电化新闻提到锂电化成为电摩起飞关键，但未明确磷酸铁锂与三元等其他路线的占比，磷酸铁锂在成本和安全上的优势可能使其在电摩市场具备竞争力。需验证：清陶固态电池项目的客户和装车计划；电摩用锂电池的正极材料路线分布。</a:t>
+              <a:t>碳索储能网报道的零跑合作若涉及固态电池或高镍三元，则在中长期可能分流磷酸铁锂在高端车型的应用；但当前磷酸铁锂凭借成本与安全优势，在中低端车型和储能领域仍占主导。搜狐网报道的激光精焊属于电池制造环节，可提升磷酸铁锂电池良率与安全性，反而增强其竞争力。需确认零跑合作的技术路线及量产节点。</a:t>
             </a:r>
             <a:endParaRPr lang="en-US" sz="960" dirty="0"/>
           </a:p>
@@ -17452,7 +17972,7 @@
                 <a:ea typeface="Microsoft YaHei" pitchFamily="34" charset="-122"/>
                 <a:cs typeface="Microsoft YaHei" pitchFamily="34" charset="-120"/>
               </a:rPr>
-              <a:t>若固态电池在2027年前实现规模化装车且成本接近磷酸铁锂，则磷酸铁锂在高端电动汽车市场的份额可能被侵蚀；若电摩锂电化加速且磷酸铁锂成为主流选择，则磷酸铁锂在轻型动力领域可能获得新增量。跟踪指标：固态电池装车量和成本数据、电摩用锂电池出货量及正极材料类型占比。证据边界：固态电池项目刚投产，实际性能和成本尚未公开；电摩新闻未披露电池路线具体份额。</a:t>
+              <a:t>若零跑合作技术路线确认为非磷酸铁锂且计划2027年量产，则磷酸铁锂在零跑车型中的份额可能下降；若该技术仍处于早期研发阶段，则短期影响可忽略。跟踪指标：零跑电池供应商名单、新车型电池类型公告、固态电池量产时间表。证据边界：合作技术方向未公开，量产时间不确定。</a:t>
             </a:r>
             <a:endParaRPr lang="en-US" sz="960" dirty="0"/>
           </a:p>
@@ -17698,7 +18218,7 @@
                 <a:ea typeface="Microsoft YaHei" pitchFamily="34" charset="-122"/>
                 <a:cs typeface="Microsoft YaHei" pitchFamily="34" charset="-120"/>
               </a:rPr>
-              <a:t>清陶能源80亿元固态电池项</a:t>
+              <a:t>零跑与海泰科服投资企业合作</a:t>
             </a:r>
             <a:endParaRPr lang="en-US" sz="670" dirty="0"/>
           </a:p>
@@ -17805,7 +18325,7 @@
                 <a:ea typeface="Microsoft YaHei" pitchFamily="34" charset="-122"/>
                 <a:cs typeface="Microsoft YaHei" pitchFamily="34" charset="-120"/>
               </a:rPr>
-              <a:t>电摩锂电化趋势中，磷酸铁锂</a:t>
+              <a:t>但技术细节未披露，短期对磷</a:t>
             </a:r>
             <a:endParaRPr lang="en-US" sz="670" dirty="0"/>
           </a:p>
@@ -17912,7 +18432,7 @@
                 <a:ea typeface="Microsoft YaHei" pitchFamily="34" charset="-122"/>
                 <a:cs typeface="Microsoft YaHei" pitchFamily="34" charset="-120"/>
               </a:rPr>
-              <a:t>[1][4] 固态电池项目</a:t>
+              <a:t>激光精焊技术作为制造工艺改</a:t>
             </a:r>
             <a:endParaRPr lang="en-US" sz="670" dirty="0"/>
           </a:p>
@@ -18019,7 +18539,7 @@
                 <a:ea typeface="Microsoft YaHei" pitchFamily="34" charset="-122"/>
                 <a:cs typeface="Microsoft YaHei" pitchFamily="34" charset="-120"/>
               </a:rPr>
-              <a:t>清陶能源80亿元固态电池项</a:t>
+              <a:t>零跑与海泰科服投资企业合作</a:t>
             </a:r>
             <a:endParaRPr lang="en-US" sz="670" dirty="0"/>
           </a:p>
@@ -18165,7 +18685,7 @@
                 <a:ea typeface="Microsoft YaHei" pitchFamily="34" charset="-122"/>
                 <a:cs typeface="Microsoft YaHei" pitchFamily="34" charset="-120"/>
               </a:rPr>
-              <a:t>若固态电池在2027年前实现规模化装车且成本接近磷酸铁锂，则磷酸铁锂在高端电动汽车市场的份额可能被侵蚀</a:t>
+              <a:t>若零跑合作技术路线确认为非磷酸铁锂且计划2027年量产，则磷酸铁锂在零跑车型中的份额可能下降</a:t>
             </a:r>
             <a:endParaRPr lang="en-US" sz="1020" dirty="0"/>
           </a:p>
@@ -18314,7 +18834,7 @@
                 <a:ea typeface="Aptos" pitchFamily="34" charset="-122"/>
                 <a:cs typeface="Aptos" pitchFamily="34" charset="-120"/>
               </a:rPr>
-              <a:t>2026-10-26</a:t>
+              <a:t>2026-10-27</a:t>
             </a:r>
             <a:endParaRPr lang="en-US" sz="800" dirty="0"/>
           </a:p>
@@ -18520,7 +19040,7 @@
                 <a:ea typeface="Microsoft YaHei" pitchFamily="34" charset="-122"/>
                 <a:cs typeface="Microsoft YaHei" pitchFamily="34" charset="-120"/>
               </a:rPr>
-              <a:t>3 条公开来源交叉验证｜事实、影响与后续研判</a:t>
+              <a:t>4 条公开来源交叉验证｜事实、影响与后续研判</a:t>
             </a:r>
             <a:endParaRPr lang="en-US" sz="860" dirty="0"/>
           </a:p>
@@ -18629,7 +19149,7 @@
                 <a:ea typeface="Microsoft YaHei" pitchFamily="34" charset="-122"/>
                 <a:cs typeface="Microsoft YaHei" pitchFamily="34" charset="-120"/>
               </a:rPr>
-              <a:t>风险方面，磷酸铁锂龙头扩产延续叠加出口退税下调，供给压力和需求不确定性并存；机会方面，电摩锂电化和储能等非汽车领域可能为磷酸铁锂打开增量空间；观察重点是扩产项目投产节奏、出口退税政策实际影响和磷酸铁锂价格走势。 [1][2][4]</a:t>
+              <a:t>风险：国内政策收紧压制需求、产能扩张加剧供给过剩、回收合规成本上升。机会：头部企业扩产巩固成本优势、合规回收产能稀缺性凸显、激光精焊等工艺改进提升磷酸铁锂安全竞争力。观察：政策细则、项目投产进度、碳酸锂价格、零跑技术路线。 [1][4][7][5]</a:t>
             </a:r>
             <a:endParaRPr lang="en-US" sz="960" dirty="0"/>
           </a:p>
@@ -18670,7 +19190,7 @@
                 <a:ea typeface="Aptos" pitchFamily="34" charset="-122"/>
                 <a:cs typeface="Aptos" pitchFamily="34" charset="-120"/>
               </a:rPr>
-              <a:t>依据：[1][2][4]</a:t>
+              <a:t>依据：[1][4][7][5]</a:t>
             </a:r>
             <a:endParaRPr lang="en-US" sz="740" dirty="0"/>
           </a:p>
@@ -18779,7 +19299,7 @@
                 <a:ea typeface="Microsoft YaHei" pitchFamily="34" charset="-122"/>
                 <a:cs typeface="Microsoft YaHei" pitchFamily="34" charset="-120"/>
               </a:rPr>
-              <a:t>当前行业信号多空交织：扩产新闻显示龙头对需求乐观，但出口退税下调可能抑制海外需求，两者共同作用决定磷酸铁锂价格和盈利方向。电摩锂电化新闻提示轻型动力领域可能成为磷酸铁锂的新增长点，但规模尚小。需持续调研：磷酸铁锂在储能领域的订单变化；扩产企业的资金和建设进度；出口退税下调后电池厂海外定价策略调整。</a:t>
+              <a:t>综合今日信息，政策与供给两端压力并存，需求端不确定性增加，行业盈利修复需依赖成本下行或需求超预期。裕能、万华扩产显示头部企业对中期需求有信心，但中小厂商面临更大竞争压力。回收领域合规产能建设加速，可能形成新的进入壁垒。需持续跟踪政策落地节奏与项目投产验证。</a:t>
             </a:r>
             <a:endParaRPr lang="en-US" sz="960" dirty="0"/>
           </a:p>
@@ -18913,7 +19433,7 @@
                 <a:ea typeface="Microsoft YaHei" pitchFamily="34" charset="-122"/>
                 <a:cs typeface="Microsoft YaHei" pitchFamily="34" charset="-120"/>
               </a:rPr>
-              <a:t>若扩产项目投产进度快于需求增速且出口退税下调抑制海外需求，则磷酸铁锂价格和加工费可能继续承压；若电摩和储能等非汽车领域需求超预期增长，则可能部分对冲汽车领域的需求波动。跟踪指标：磷酸铁锂周度价格、扩产项目投产公告、电摩和储能电池月度出货量、新能源汽车出口数据。证据边界：当前仅有扩产和退税政策新闻，实际供需变化需等待月度数据验证；电摩和储能领域对磷酸铁锂的具体需求规模尚未披露。</a:t>
+              <a:t>若政策收紧与产能扩张同时兑现，则磷酸铁锂行业加工费可能进一步下行，中小厂商退出风险上升；若回收合规政策超预期，则具备回收资质的企业可能获得估值溢价。跟踪指标：新能源车月度销量、正极开工率、碳酸锂价格、回收白名单扩容、零跑技术路线公告。证据边界：政策细则与项目投产时间尚未明确，需以官方公告验证。</a:t>
             </a:r>
             <a:endParaRPr lang="en-US" sz="960" dirty="0"/>
           </a:p>
@@ -18981,7 +19501,7 @@
                 <a:ea typeface="Microsoft YaHei" pitchFamily="34" charset="-122"/>
                 <a:cs typeface="Microsoft YaHei" pitchFamily="34" charset="-120"/>
               </a:rPr>
-              <a:t>对比矩阵</a:t>
+              <a:t>路线图</a:t>
             </a:r>
             <a:endParaRPr lang="en-US" sz="1200" dirty="0"/>
           </a:p>
@@ -18995,18 +19515,84 @@
         </p:nvSpPr>
         <p:spPr>
           <a:xfrm>
-            <a:off x="7818120" y="2176272"/>
-            <a:ext cx="2487168" cy="1609344"/>
-          </a:xfrm>
-          <a:prstGeom prst="rect">
+            <a:off x="7754112" y="2249424"/>
+            <a:ext cx="612648" cy="402336"/>
+          </a:xfrm>
+          <a:prstGeom prst="chevron">
+            <a:avLst/>
+          </a:prstGeom>
+          <a:solidFill>
+            <a:srgbClr val="DDEBE0"/>
+          </a:solidFill>
+          <a:ln w="13970">
+            <a:solidFill>
+              <a:srgbClr val="487052"/>
+            </a:solidFill>
+            <a:prstDash val="solid"/>
+          </a:ln>
+        </p:spPr>
+      </p:sp>
+      <p:sp>
+        <p:nvSpPr>
+          <p:cNvPr id="25" name="Text 23"/>
+          <p:cNvSpPr/>
+          <p:nvPr/>
+        </p:nvSpPr>
+        <p:spPr>
+          <a:xfrm>
+            <a:off x="7827264" y="2386584"/>
+            <a:ext cx="448056" cy="109728"/>
+          </a:xfrm>
+          <a:prstGeom prst="rect">
+            <a:avLst/>
+          </a:prstGeom>
+          <a:noFill/>
+          <a:ln/>
+        </p:spPr>
+        <p:txBody>
+          <a:bodyPr wrap="square" lIns="0" tIns="0" rIns="0" bIns="0" rtlCol="0" anchor="ctr">
+            <a:normAutofit/>
+          </a:bodyPr>
+          <a:lstStyle/>
+          <a:p>
+            <a:pPr algn="ctr" indent="0" marL="0">
+              <a:buNone/>
+            </a:pPr>
+            <a:r>
+              <a:rPr lang="en-US" sz="670" b="1" dirty="0">
+                <a:solidFill>
+                  <a:srgbClr val="121212"/>
+                </a:solidFill>
+                <a:latin typeface="Microsoft YaHei" pitchFamily="34" charset="0"/>
+                <a:ea typeface="Microsoft YaHei" pitchFamily="34" charset="-122"/>
+                <a:cs typeface="Microsoft YaHei" pitchFamily="34" charset="-120"/>
+              </a:rPr>
+              <a:t>技术</a:t>
+            </a:r>
+            <a:endParaRPr lang="en-US" sz="670" dirty="0"/>
+          </a:p>
+        </p:txBody>
+      </p:sp>
+      <p:sp>
+        <p:nvSpPr>
+          <p:cNvPr id="26" name="Shape 24"/>
+          <p:cNvSpPr/>
+          <p:nvPr/>
+        </p:nvSpPr>
+        <p:spPr>
+          <a:xfrm>
+            <a:off x="8375904" y="2249424"/>
+            <a:ext cx="612648" cy="402336"/>
+          </a:xfrm>
+          <a:prstGeom prst="chevron">
             <a:avLst/>
           </a:prstGeom>
           <a:solidFill>
             <a:srgbClr val="FFFFFF"/>
           </a:solidFill>
-          <a:ln w="10160">
+          <a:ln w="13970">
             <a:solidFill>
-              <a:srgbClr val="DADADA"/>
+              <a:srgbClr val="487052"/>
             </a:solidFill>
             <a:prstDash val="solid"/>
           </a:ln>
@@ -19014,22 +19600,65 @@
       </p:sp>
       <p:sp>
         <p:nvSpPr>
-          <p:cNvPr id="25" name="Shape 23"/>
-          <p:cNvSpPr/>
-          <p:nvPr/>
-        </p:nvSpPr>
-        <p:spPr>
-          <a:xfrm>
-            <a:off x="9061704" y="2176272"/>
-            <a:ext cx="0" cy="1609344"/>
-          </a:xfrm>
-          <a:prstGeom prst="line">
-            <a:avLst/>
-          </a:prstGeom>
-          <a:noFill/>
-          <a:ln w="8890">
+          <p:cNvPr id="27" name="Text 25"/>
+          <p:cNvSpPr/>
+          <p:nvPr/>
+        </p:nvSpPr>
+        <p:spPr>
+          <a:xfrm>
+            <a:off x="8449056" y="2386584"/>
+            <a:ext cx="448056" cy="109728"/>
+          </a:xfrm>
+          <a:prstGeom prst="rect">
+            <a:avLst/>
+          </a:prstGeom>
+          <a:noFill/>
+          <a:ln/>
+        </p:spPr>
+        <p:txBody>
+          <a:bodyPr wrap="square" lIns="0" tIns="0" rIns="0" bIns="0" rtlCol="0" anchor="ctr">
+            <a:normAutofit/>
+          </a:bodyPr>
+          <a:lstStyle/>
+          <a:p>
+            <a:pPr algn="ctr" indent="0" marL="0">
+              <a:buNone/>
+            </a:pPr>
+            <a:r>
+              <a:rPr lang="en-US" sz="670" b="1" dirty="0">
+                <a:solidFill>
+                  <a:srgbClr val="121212"/>
+                </a:solidFill>
+                <a:latin typeface="Microsoft YaHei" pitchFamily="34" charset="0"/>
+                <a:ea typeface="Microsoft YaHei" pitchFamily="34" charset="-122"/>
+                <a:cs typeface="Microsoft YaHei" pitchFamily="34" charset="-120"/>
+              </a:rPr>
+              <a:t>产品</a:t>
+            </a:r>
+            <a:endParaRPr lang="en-US" sz="670" dirty="0"/>
+          </a:p>
+        </p:txBody>
+      </p:sp>
+      <p:sp>
+        <p:nvSpPr>
+          <p:cNvPr id="28" name="Shape 26"/>
+          <p:cNvSpPr/>
+          <p:nvPr/>
+        </p:nvSpPr>
+        <p:spPr>
+          <a:xfrm>
+            <a:off x="8997696" y="2249424"/>
+            <a:ext cx="612648" cy="402336"/>
+          </a:xfrm>
+          <a:prstGeom prst="chevron">
+            <a:avLst/>
+          </a:prstGeom>
+          <a:solidFill>
+            <a:srgbClr val="FFFFFF"/>
+          </a:solidFill>
+          <a:ln w="13970">
             <a:solidFill>
-              <a:srgbClr val="DADADA"/>
+              <a:srgbClr val="487052"/>
             </a:solidFill>
             <a:prstDash val="solid"/>
           </a:ln>
@@ -19037,22 +19666,65 @@
       </p:sp>
       <p:sp>
         <p:nvSpPr>
-          <p:cNvPr id="26" name="Shape 24"/>
-          <p:cNvSpPr/>
-          <p:nvPr/>
-        </p:nvSpPr>
-        <p:spPr>
-          <a:xfrm>
-            <a:off x="7818120" y="2980944"/>
-            <a:ext cx="2487168" cy="0"/>
-          </a:xfrm>
-          <a:prstGeom prst="line">
-            <a:avLst/>
-          </a:prstGeom>
-          <a:noFill/>
-          <a:ln w="8890">
+          <p:cNvPr id="29" name="Text 27"/>
+          <p:cNvSpPr/>
+          <p:nvPr/>
+        </p:nvSpPr>
+        <p:spPr>
+          <a:xfrm>
+            <a:off x="9070848" y="2386584"/>
+            <a:ext cx="448056" cy="109728"/>
+          </a:xfrm>
+          <a:prstGeom prst="rect">
+            <a:avLst/>
+          </a:prstGeom>
+          <a:noFill/>
+          <a:ln/>
+        </p:spPr>
+        <p:txBody>
+          <a:bodyPr wrap="square" lIns="0" tIns="0" rIns="0" bIns="0" rtlCol="0" anchor="ctr">
+            <a:normAutofit/>
+          </a:bodyPr>
+          <a:lstStyle/>
+          <a:p>
+            <a:pPr algn="ctr" indent="0" marL="0">
+              <a:buNone/>
+            </a:pPr>
+            <a:r>
+              <a:rPr lang="en-US" sz="670" b="1" dirty="0">
+                <a:solidFill>
+                  <a:srgbClr val="121212"/>
+                </a:solidFill>
+                <a:latin typeface="Microsoft YaHei" pitchFamily="34" charset="0"/>
+                <a:ea typeface="Microsoft YaHei" pitchFamily="34" charset="-122"/>
+                <a:cs typeface="Microsoft YaHei" pitchFamily="34" charset="-120"/>
+              </a:rPr>
+              <a:t>验证</a:t>
+            </a:r>
+            <a:endParaRPr lang="en-US" sz="670" dirty="0"/>
+          </a:p>
+        </p:txBody>
+      </p:sp>
+      <p:sp>
+        <p:nvSpPr>
+          <p:cNvPr id="30" name="Shape 28"/>
+          <p:cNvSpPr/>
+          <p:nvPr/>
+        </p:nvSpPr>
+        <p:spPr>
+          <a:xfrm>
+            <a:off x="9619488" y="2249424"/>
+            <a:ext cx="612648" cy="402336"/>
+          </a:xfrm>
+          <a:prstGeom prst="chevron">
+            <a:avLst/>
+          </a:prstGeom>
+          <a:solidFill>
+            <a:srgbClr val="FFFFFF"/>
+          </a:solidFill>
+          <a:ln w="13970">
             <a:solidFill>
-              <a:srgbClr val="DADADA"/>
+              <a:srgbClr val="487052"/>
             </a:solidFill>
             <a:prstDash val="solid"/>
           </a:ln>
@@ -19060,24 +19732,63 @@
       </p:sp>
       <p:sp>
         <p:nvSpPr>
-          <p:cNvPr id="27" name="Shape 25"/>
-          <p:cNvSpPr/>
-          <p:nvPr/>
-        </p:nvSpPr>
-        <p:spPr>
-          <a:xfrm>
-            <a:off x="7818120" y="2176272"/>
-            <a:ext cx="1243584" cy="804672"/>
-          </a:xfrm>
-          <a:prstGeom prst="rect">
-            <a:avLst/>
-          </a:prstGeom>
-          <a:solidFill>
-            <a:srgbClr val="DDEBE0"/>
-          </a:solidFill>
-          <a:ln w="3810">
+          <p:cNvPr id="31" name="Text 29"/>
+          <p:cNvSpPr/>
+          <p:nvPr/>
+        </p:nvSpPr>
+        <p:spPr>
+          <a:xfrm>
+            <a:off x="9692640" y="2386584"/>
+            <a:ext cx="448056" cy="109728"/>
+          </a:xfrm>
+          <a:prstGeom prst="rect">
+            <a:avLst/>
+          </a:prstGeom>
+          <a:noFill/>
+          <a:ln/>
+        </p:spPr>
+        <p:txBody>
+          <a:bodyPr wrap="square" lIns="0" tIns="0" rIns="0" bIns="0" rtlCol="0" anchor="ctr">
+            <a:normAutofit/>
+          </a:bodyPr>
+          <a:lstStyle/>
+          <a:p>
+            <a:pPr algn="ctr" indent="0" marL="0">
+              <a:buNone/>
+            </a:pPr>
+            <a:r>
+              <a:rPr lang="en-US" sz="670" b="1" dirty="0">
+                <a:solidFill>
+                  <a:srgbClr val="121212"/>
+                </a:solidFill>
+                <a:latin typeface="Microsoft YaHei" pitchFamily="34" charset="0"/>
+                <a:ea typeface="Microsoft YaHei" pitchFamily="34" charset="-122"/>
+                <a:cs typeface="Microsoft YaHei" pitchFamily="34" charset="-120"/>
+              </a:rPr>
+              <a:t>量产</a:t>
+            </a:r>
+            <a:endParaRPr lang="en-US" sz="670" dirty="0"/>
+          </a:p>
+        </p:txBody>
+      </p:sp>
+      <p:sp>
+        <p:nvSpPr>
+          <p:cNvPr id="32" name="Shape 30"/>
+          <p:cNvSpPr/>
+          <p:nvPr/>
+        </p:nvSpPr>
+        <p:spPr>
+          <a:xfrm>
+            <a:off x="7882128" y="3063240"/>
+            <a:ext cx="2331720" cy="0"/>
+          </a:xfrm>
+          <a:prstGeom prst="line">
+            <a:avLst/>
+          </a:prstGeom>
+          <a:noFill/>
+          <a:ln w="13970">
             <a:solidFill>
-              <a:srgbClr val="DADADA"/>
+              <a:srgbClr val="7F9D84"/>
             </a:solidFill>
             <a:prstDash val="solid"/>
           </a:ln>
@@ -19085,106 +19796,24 @@
       </p:sp>
       <p:sp>
         <p:nvSpPr>
-          <p:cNvPr id="28" name="Text 26"/>
-          <p:cNvSpPr/>
-          <p:nvPr/>
-        </p:nvSpPr>
-        <p:spPr>
-          <a:xfrm>
-            <a:off x="7891272" y="2286000"/>
-            <a:ext cx="438912" cy="109728"/>
-          </a:xfrm>
-          <a:prstGeom prst="rect">
-            <a:avLst/>
-          </a:prstGeom>
-          <a:noFill/>
-          <a:ln/>
-        </p:spPr>
-        <p:txBody>
-          <a:bodyPr wrap="square" lIns="0" tIns="0" rIns="0" bIns="0" rtlCol="0" anchor="ctr">
-            <a:normAutofit/>
-          </a:bodyPr>
-          <a:lstStyle/>
-          <a:p>
-            <a:pPr indent="0" marL="0">
-              <a:buNone/>
-            </a:pPr>
-            <a:r>
-              <a:rPr lang="en-US" sz="710" b="1" dirty="0">
-                <a:solidFill>
-                  <a:srgbClr val="487052"/>
-                </a:solidFill>
-                <a:latin typeface="Microsoft YaHei" pitchFamily="34" charset="0"/>
-                <a:ea typeface="Microsoft YaHei" pitchFamily="34" charset="-122"/>
-                <a:cs typeface="Microsoft YaHei" pitchFamily="34" charset="-120"/>
-              </a:rPr>
-              <a:t>路线A</a:t>
-            </a:r>
-            <a:endParaRPr lang="en-US" sz="710" dirty="0"/>
-          </a:p>
-        </p:txBody>
-      </p:sp>
-      <p:sp>
-        <p:nvSpPr>
-          <p:cNvPr id="29" name="Text 27"/>
-          <p:cNvSpPr/>
-          <p:nvPr/>
-        </p:nvSpPr>
-        <p:spPr>
-          <a:xfrm>
-            <a:off x="7891272" y="2505456"/>
-            <a:ext cx="1024128" cy="201168"/>
-          </a:xfrm>
-          <a:prstGeom prst="rect">
-            <a:avLst/>
-          </a:prstGeom>
-          <a:noFill/>
-          <a:ln/>
-        </p:spPr>
-        <p:txBody>
-          <a:bodyPr wrap="square" lIns="0" tIns="0" rIns="0" bIns="0" rtlCol="0" anchor="t">
-            <a:normAutofit/>
-          </a:bodyPr>
-          <a:lstStyle/>
-          <a:p>
-            <a:pPr indent="0" marL="0">
-              <a:buNone/>
-            </a:pPr>
-            <a:r>
-              <a:rPr lang="en-US" sz="670" dirty="0">
-                <a:solidFill>
-                  <a:srgbClr val="121212"/>
-                </a:solidFill>
-                <a:latin typeface="Microsoft YaHei" pitchFamily="34" charset="0"/>
-                <a:ea typeface="Microsoft YaHei" pitchFamily="34" charset="-122"/>
-                <a:cs typeface="Microsoft YaHei" pitchFamily="34" charset="-120"/>
-              </a:rPr>
-              <a:t>风险方面，磷酸铁锂龙头扩产</a:t>
-            </a:r>
-            <a:endParaRPr lang="en-US" sz="670" dirty="0"/>
-          </a:p>
-        </p:txBody>
-      </p:sp>
-      <p:sp>
-        <p:nvSpPr>
-          <p:cNvPr id="30" name="Shape 28"/>
-          <p:cNvSpPr/>
-          <p:nvPr/>
-        </p:nvSpPr>
-        <p:spPr>
-          <a:xfrm>
-            <a:off x="9061704" y="2176272"/>
-            <a:ext cx="1243584" cy="804672"/>
-          </a:xfrm>
-          <a:prstGeom prst="rect">
+          <p:cNvPr id="33" name="Shape 31"/>
+          <p:cNvSpPr/>
+          <p:nvPr/>
+        </p:nvSpPr>
+        <p:spPr>
+          <a:xfrm>
+            <a:off x="7845552" y="2962656"/>
+            <a:ext cx="164592" cy="164592"/>
+          </a:xfrm>
+          <a:prstGeom prst="ellipse">
             <a:avLst/>
           </a:prstGeom>
           <a:solidFill>
-            <a:srgbClr val="FFFFFF"/>
+            <a:srgbClr val="487052"/>
           </a:solidFill>
-          <a:ln w="3810">
+          <a:ln w="12700">
             <a:solidFill>
-              <a:srgbClr val="DADADA"/>
+              <a:srgbClr val="FFFFFF"/>
             </a:solidFill>
             <a:prstDash val="solid"/>
           </a:ln>
@@ -19192,55 +19821,14 @@
       </p:sp>
       <p:sp>
         <p:nvSpPr>
-          <p:cNvPr id="31" name="Text 29"/>
-          <p:cNvSpPr/>
-          <p:nvPr/>
-        </p:nvSpPr>
-        <p:spPr>
-          <a:xfrm>
-            <a:off x="9134856" y="2286000"/>
-            <a:ext cx="438912" cy="109728"/>
-          </a:xfrm>
-          <a:prstGeom prst="rect">
-            <a:avLst/>
-          </a:prstGeom>
-          <a:noFill/>
-          <a:ln/>
-        </p:spPr>
-        <p:txBody>
-          <a:bodyPr wrap="square" lIns="0" tIns="0" rIns="0" bIns="0" rtlCol="0" anchor="ctr">
-            <a:normAutofit/>
-          </a:bodyPr>
-          <a:lstStyle/>
-          <a:p>
-            <a:pPr indent="0" marL="0">
-              <a:buNone/>
-            </a:pPr>
-            <a:r>
-              <a:rPr lang="en-US" sz="710" b="1" dirty="0">
-                <a:solidFill>
-                  <a:srgbClr val="487052"/>
-                </a:solidFill>
-                <a:latin typeface="Microsoft YaHei" pitchFamily="34" charset="0"/>
-                <a:ea typeface="Microsoft YaHei" pitchFamily="34" charset="-122"/>
-                <a:cs typeface="Microsoft YaHei" pitchFamily="34" charset="-120"/>
-              </a:rPr>
-              <a:t>路线B</a:t>
-            </a:r>
-            <a:endParaRPr lang="en-US" sz="710" dirty="0"/>
-          </a:p>
-        </p:txBody>
-      </p:sp>
-      <p:sp>
-        <p:nvSpPr>
-          <p:cNvPr id="32" name="Text 30"/>
-          <p:cNvSpPr/>
-          <p:nvPr/>
-        </p:nvSpPr>
-        <p:spPr>
-          <a:xfrm>
-            <a:off x="9134856" y="2505456"/>
-            <a:ext cx="1024128" cy="201168"/>
+          <p:cNvPr id="34" name="Text 32"/>
+          <p:cNvSpPr/>
+          <p:nvPr/>
+        </p:nvSpPr>
+        <p:spPr>
+          <a:xfrm>
+            <a:off x="7754112" y="3291840"/>
+            <a:ext cx="603504" cy="310896"/>
           </a:xfrm>
           <a:prstGeom prst="rect">
             <a:avLst/>
@@ -19254,7 +19842,7 @@
           </a:bodyPr>
           <a:lstStyle/>
           <a:p>
-            <a:pPr indent="0" marL="0">
+            <a:pPr algn="ctr" indent="0" marL="0">
               <a:buNone/>
             </a:pPr>
             <a:r>
@@ -19266,7 +19854,7 @@
                 <a:ea typeface="Microsoft YaHei" pitchFamily="34" charset="-122"/>
                 <a:cs typeface="Microsoft YaHei" pitchFamily="34" charset="-120"/>
               </a:rPr>
-              <a:t>机会方面，电摩锂电化和储能</a:t>
+              <a:t>风险：国内政策收紧压制</a:t>
             </a:r>
             <a:endParaRPr lang="en-US" sz="670" dirty="0"/>
           </a:p>
@@ -19274,24 +19862,24 @@
       </p:sp>
       <p:sp>
         <p:nvSpPr>
-          <p:cNvPr id="33" name="Shape 31"/>
-          <p:cNvSpPr/>
-          <p:nvPr/>
-        </p:nvSpPr>
-        <p:spPr>
-          <a:xfrm>
-            <a:off x="7818120" y="2980944"/>
-            <a:ext cx="1243584" cy="804672"/>
-          </a:xfrm>
-          <a:prstGeom prst="rect">
+          <p:cNvPr id="35" name="Shape 33"/>
+          <p:cNvSpPr/>
+          <p:nvPr/>
+        </p:nvSpPr>
+        <p:spPr>
+          <a:xfrm>
+            <a:off x="8503920" y="2962656"/>
+            <a:ext cx="164592" cy="164592"/>
+          </a:xfrm>
+          <a:prstGeom prst="ellipse">
             <a:avLst/>
           </a:prstGeom>
           <a:solidFill>
-            <a:srgbClr val="FFFFFF"/>
+            <a:srgbClr val="487052"/>
           </a:solidFill>
-          <a:ln w="3810">
+          <a:ln w="12700">
             <a:solidFill>
-              <a:srgbClr val="DADADA"/>
+              <a:srgbClr val="FFFFFF"/>
             </a:solidFill>
             <a:prstDash val="solid"/>
           </a:ln>
@@ -19299,55 +19887,14 @@
       </p:sp>
       <p:sp>
         <p:nvSpPr>
-          <p:cNvPr id="34" name="Text 32"/>
-          <p:cNvSpPr/>
-          <p:nvPr/>
-        </p:nvSpPr>
-        <p:spPr>
-          <a:xfrm>
-            <a:off x="7891272" y="3090672"/>
-            <a:ext cx="438912" cy="109728"/>
-          </a:xfrm>
-          <a:prstGeom prst="rect">
-            <a:avLst/>
-          </a:prstGeom>
-          <a:noFill/>
-          <a:ln/>
-        </p:spPr>
-        <p:txBody>
-          <a:bodyPr wrap="square" lIns="0" tIns="0" rIns="0" bIns="0" rtlCol="0" anchor="ctr">
-            <a:normAutofit/>
-          </a:bodyPr>
-          <a:lstStyle/>
-          <a:p>
-            <a:pPr indent="0" marL="0">
-              <a:buNone/>
-            </a:pPr>
-            <a:r>
-              <a:rPr lang="en-US" sz="710" b="1" dirty="0">
-                <a:solidFill>
-                  <a:srgbClr val="487052"/>
-                </a:solidFill>
-                <a:latin typeface="Microsoft YaHei" pitchFamily="34" charset="0"/>
-                <a:ea typeface="Microsoft YaHei" pitchFamily="34" charset="-122"/>
-                <a:cs typeface="Microsoft YaHei" pitchFamily="34" charset="-120"/>
-              </a:rPr>
-              <a:t>机会</a:t>
-            </a:r>
-            <a:endParaRPr lang="en-US" sz="710" dirty="0"/>
-          </a:p>
-        </p:txBody>
-      </p:sp>
-      <p:sp>
-        <p:nvSpPr>
-          <p:cNvPr id="35" name="Text 33"/>
-          <p:cNvSpPr/>
-          <p:nvPr/>
-        </p:nvSpPr>
-        <p:spPr>
-          <a:xfrm>
-            <a:off x="7891272" y="3310128"/>
-            <a:ext cx="1024128" cy="201168"/>
+          <p:cNvPr id="36" name="Text 34"/>
+          <p:cNvSpPr/>
+          <p:nvPr/>
+        </p:nvSpPr>
+        <p:spPr>
+          <a:xfrm>
+            <a:off x="8412480" y="3291840"/>
+            <a:ext cx="603504" cy="310896"/>
           </a:xfrm>
           <a:prstGeom prst="rect">
             <a:avLst/>
@@ -19361,7 +19908,7 @@
           </a:bodyPr>
           <a:lstStyle/>
           <a:p>
-            <a:pPr indent="0" marL="0">
+            <a:pPr algn="ctr" indent="0" marL="0">
               <a:buNone/>
             </a:pPr>
             <a:r>
@@ -19373,7 +19920,7 @@
                 <a:ea typeface="Microsoft YaHei" pitchFamily="34" charset="-122"/>
                 <a:cs typeface="Microsoft YaHei" pitchFamily="34" charset="-120"/>
               </a:rPr>
-              <a:t>观察重点是扩产项目投产节奏</a:t>
+              <a:t>机会：头部企业扩产巩固</a:t>
             </a:r>
             <a:endParaRPr lang="en-US" sz="670" dirty="0"/>
           </a:p>
@@ -19381,24 +19928,24 @@
       </p:sp>
       <p:sp>
         <p:nvSpPr>
-          <p:cNvPr id="36" name="Shape 34"/>
-          <p:cNvSpPr/>
-          <p:nvPr/>
-        </p:nvSpPr>
-        <p:spPr>
-          <a:xfrm>
-            <a:off x="9061704" y="2980944"/>
-            <a:ext cx="1243584" cy="804672"/>
-          </a:xfrm>
-          <a:prstGeom prst="rect">
+          <p:cNvPr id="37" name="Shape 35"/>
+          <p:cNvSpPr/>
+          <p:nvPr/>
+        </p:nvSpPr>
+        <p:spPr>
+          <a:xfrm>
+            <a:off x="9162288" y="2962656"/>
+            <a:ext cx="164592" cy="164592"/>
+          </a:xfrm>
+          <a:prstGeom prst="ellipse">
             <a:avLst/>
           </a:prstGeom>
           <a:solidFill>
-            <a:srgbClr val="F4FAF6"/>
+            <a:srgbClr val="487052"/>
           </a:solidFill>
-          <a:ln w="3810">
+          <a:ln w="12700">
             <a:solidFill>
-              <a:srgbClr val="DADADA"/>
+              <a:srgbClr val="FFFFFF"/>
             </a:solidFill>
             <a:prstDash val="solid"/>
           </a:ln>
@@ -19406,55 +19953,14 @@
       </p:sp>
       <p:sp>
         <p:nvSpPr>
-          <p:cNvPr id="37" name="Text 35"/>
-          <p:cNvSpPr/>
-          <p:nvPr/>
-        </p:nvSpPr>
-        <p:spPr>
-          <a:xfrm>
-            <a:off x="9134856" y="3090672"/>
-            <a:ext cx="438912" cy="109728"/>
-          </a:xfrm>
-          <a:prstGeom prst="rect">
-            <a:avLst/>
-          </a:prstGeom>
-          <a:noFill/>
-          <a:ln/>
-        </p:spPr>
-        <p:txBody>
-          <a:bodyPr wrap="square" lIns="0" tIns="0" rIns="0" bIns="0" rtlCol="0" anchor="ctr">
-            <a:normAutofit/>
-          </a:bodyPr>
-          <a:lstStyle/>
-          <a:p>
-            <a:pPr indent="0" marL="0">
-              <a:buNone/>
-            </a:pPr>
-            <a:r>
-              <a:rPr lang="en-US" sz="710" b="1" dirty="0">
-                <a:solidFill>
-                  <a:srgbClr val="487052"/>
-                </a:solidFill>
-                <a:latin typeface="Microsoft YaHei" pitchFamily="34" charset="0"/>
-                <a:ea typeface="Microsoft YaHei" pitchFamily="34" charset="-122"/>
-                <a:cs typeface="Microsoft YaHei" pitchFamily="34" charset="-120"/>
-              </a:rPr>
-              <a:t>约束</a:t>
-            </a:r>
-            <a:endParaRPr lang="en-US" sz="710" dirty="0"/>
-          </a:p>
-        </p:txBody>
-      </p:sp>
-      <p:sp>
-        <p:nvSpPr>
           <p:cNvPr id="38" name="Text 36"/>
           <p:cNvSpPr/>
           <p:nvPr/>
         </p:nvSpPr>
         <p:spPr>
           <a:xfrm>
-            <a:off x="9134856" y="3310128"/>
-            <a:ext cx="1024128" cy="201168"/>
+            <a:off x="9070848" y="3291840"/>
+            <a:ext cx="603504" cy="310896"/>
           </a:xfrm>
           <a:prstGeom prst="rect">
             <a:avLst/>
@@ -19468,7 +19974,7 @@
           </a:bodyPr>
           <a:lstStyle/>
           <a:p>
-            <a:pPr indent="0" marL="0">
+            <a:pPr algn="ctr" indent="0" marL="0">
               <a:buNone/>
             </a:pPr>
             <a:r>
@@ -19480,7 +19986,7 @@
                 <a:ea typeface="Microsoft YaHei" pitchFamily="34" charset="-122"/>
                 <a:cs typeface="Microsoft YaHei" pitchFamily="34" charset="-120"/>
               </a:rPr>
-              <a:t>风险方面，磷酸铁锂龙头扩产</a:t>
+              <a:t>观察：政策细则、项目投</a:t>
             </a:r>
             <a:endParaRPr lang="en-US" sz="670" dirty="0"/>
           </a:p>
@@ -19488,14 +19994,39 @@
       </p:sp>
       <p:sp>
         <p:nvSpPr>
-          <p:cNvPr id="39" name="Text 37"/>
-          <p:cNvSpPr/>
-          <p:nvPr/>
-        </p:nvSpPr>
-        <p:spPr>
-          <a:xfrm>
-            <a:off x="7726680" y="4187952"/>
-            <a:ext cx="2697480" cy="493776"/>
+          <p:cNvPr id="39" name="Shape 37"/>
+          <p:cNvSpPr/>
+          <p:nvPr/>
+        </p:nvSpPr>
+        <p:spPr>
+          <a:xfrm>
+            <a:off x="9820656" y="2962656"/>
+            <a:ext cx="164592" cy="164592"/>
+          </a:xfrm>
+          <a:prstGeom prst="ellipse">
+            <a:avLst/>
+          </a:prstGeom>
+          <a:solidFill>
+            <a:srgbClr val="B85A4A"/>
+          </a:solidFill>
+          <a:ln w="12700">
+            <a:solidFill>
+              <a:srgbClr val="FFFFFF"/>
+            </a:solidFill>
+            <a:prstDash val="solid"/>
+          </a:ln>
+        </p:spPr>
+      </p:sp>
+      <p:sp>
+        <p:nvSpPr>
+          <p:cNvPr id="40" name="Text 38"/>
+          <p:cNvSpPr/>
+          <p:nvPr/>
+        </p:nvSpPr>
+        <p:spPr>
+          <a:xfrm>
+            <a:off x="9729216" y="3291840"/>
+            <a:ext cx="603504" cy="310896"/>
           </a:xfrm>
           <a:prstGeom prst="rect">
             <a:avLst/>
@@ -19509,6 +20040,47 @@
           </a:bodyPr>
           <a:lstStyle/>
           <a:p>
+            <a:pPr algn="ctr" indent="0" marL="0">
+              <a:buNone/>
+            </a:pPr>
+            <a:r>
+              <a:rPr lang="en-US" sz="670" dirty="0">
+                <a:solidFill>
+                  <a:srgbClr val="121212"/>
+                </a:solidFill>
+                <a:latin typeface="Microsoft YaHei" pitchFamily="34" charset="0"/>
+                <a:ea typeface="Microsoft YaHei" pitchFamily="34" charset="-122"/>
+                <a:cs typeface="Microsoft YaHei" pitchFamily="34" charset="-120"/>
+              </a:rPr>
+              <a:t>观察：政策细则、项目投</a:t>
+            </a:r>
+            <a:endParaRPr lang="en-US" sz="670" dirty="0"/>
+          </a:p>
+        </p:txBody>
+      </p:sp>
+      <p:sp>
+        <p:nvSpPr>
+          <p:cNvPr id="41" name="Text 39"/>
+          <p:cNvSpPr/>
+          <p:nvPr/>
+        </p:nvSpPr>
+        <p:spPr>
+          <a:xfrm>
+            <a:off x="7726680" y="4315968"/>
+            <a:ext cx="2697480" cy="384048"/>
+          </a:xfrm>
+          <a:prstGeom prst="rect">
+            <a:avLst/>
+          </a:prstGeom>
+          <a:noFill/>
+          <a:ln/>
+        </p:spPr>
+        <p:txBody>
+          <a:bodyPr wrap="square" lIns="0" tIns="0" rIns="0" bIns="0" rtlCol="0" anchor="t">
+            <a:normAutofit/>
+          </a:bodyPr>
+          <a:lstStyle/>
+          <a:p>
             <a:pPr indent="0" marL="0">
               <a:buNone/>
             </a:pPr>
@@ -19521,7 +20093,7 @@
                 <a:ea typeface="Microsoft YaHei" pitchFamily="34" charset="-122"/>
                 <a:cs typeface="Microsoft YaHei" pitchFamily="34" charset="-120"/>
               </a:rPr>
-              <a:t>检测到对比/分类信号，用矩阵压缩呈现，不新增外部判断。</a:t>
+              <a:t>参考培训 PPT 的阶段路线表达，按事件顺序拆成判断路径。</a:t>
             </a:r>
             <a:endParaRPr lang="en-US" sz="760" dirty="0"/>
           </a:p>
@@ -19529,7 +20101,7 @@
       </p:sp>
       <p:sp>
         <p:nvSpPr>
-          <p:cNvPr id="40" name="Shape 38"/>
+          <p:cNvPr id="42" name="Shape 40"/>
           <p:cNvSpPr/>
           <p:nvPr/>
         </p:nvSpPr>
@@ -19554,7 +20126,7 @@
       </p:sp>
       <p:sp>
         <p:nvSpPr>
-          <p:cNvPr id="41" name="Text 39"/>
+          <p:cNvPr id="43" name="Text 41"/>
           <p:cNvSpPr/>
           <p:nvPr/>
         </p:nvSpPr>
@@ -19593,7 +20165,7 @@
       </p:sp>
       <p:sp>
         <p:nvSpPr>
-          <p:cNvPr id="42" name="Text 40"/>
+          <p:cNvPr id="44" name="Text 42"/>
           <p:cNvSpPr/>
           <p:nvPr/>
         </p:nvSpPr>
@@ -19626,7 +20198,7 @@
                 <a:ea typeface="Microsoft YaHei" pitchFamily="34" charset="-122"/>
                 <a:cs typeface="Microsoft YaHei" pitchFamily="34" charset="-120"/>
               </a:rPr>
-              <a:t>若扩产项目投产进度快于需求增速且出口退税下调抑制海外需求，则磷酸铁锂价格和加工费可能继续承压</a:t>
+              <a:t>若政策收紧与产能扩张同时兑现，则磷酸铁锂行业加工费可能进一步下行，中小厂商退出风险上升</a:t>
             </a:r>
             <a:endParaRPr lang="en-US" sz="1020" dirty="0"/>
           </a:p>

--- a/docs/reports/latest.pptx
+++ b/docs/reports/latest.pptx
@@ -1876,7 +1876,7 @@
                 <a:ea typeface="Aptos" pitchFamily="34" charset="-122"/>
                 <a:cs typeface="Aptos" pitchFamily="34" charset="-120"/>
               </a:rPr>
-              <a:t>2026-10-27</a:t>
+              <a:t>2026-10-28</a:t>
             </a:r>
             <a:endParaRPr lang="en-US" sz="800" dirty="0"/>
           </a:p>
@@ -2160,7 +2160,7 @@
                 <a:ea typeface="Microsoft YaHei" pitchFamily="34" charset="-122"/>
                 <a:cs typeface="Microsoft YaHei" pitchFamily="34" charset="-120"/>
               </a:rPr>
-              <a:t>今日磷酸铁锂行业信号集中在政策收紧与回收压力：国内新能源车政策收紧可能压制短期需求，而动力电池高值化利用被定性为淘汰赛，叠加首批电车脱保潮，回收与梯次利用环节的合规成本上升。供给端，湖南裕能拟20亿元扩产，万华化学二期开工，显示头部企业仍在加码磷酸铁锂正极产能，中期供给压力不减。需求端，零跑与海泰科服合作攻坚前沿电池技术，但未明确磷酸铁锂路线。整体看，政策与回收约束强化，产能扩张延续，行业盈利修复仍需观察需求增速与成本传导。</a:t>
+              <a:t>今日磷酸铁锂行业核心信号是高压实产品供需缺口扩大：2026年高压实磷酸铁锂需求约169万吨，但稳定量产供给仅约120万吨，缺口吸引天赐材料终止三元项目转产16万吨高压实磷酸铁锂，容百科技、当升科技等三元头部企业也跨界入场；山东65万吨磷酸铁锂项目二期开工，显示产能扩张仍在加速。同时，退役电池回收进入规范化阶段，欧洲平价车推进难脱中国电池依赖，政策与回收端变化将影响铁锂长期需求结构和合规成本。需跟踪高压实产品实际量产爬坡进度、新进入者客户认证周期以及回收政策落地对材料成本的反向传导。</a:t>
             </a:r>
             <a:endParaRPr lang="en-US" sz="1400" dirty="0"/>
           </a:p>
@@ -2898,7 +2898,7 @@
                 <a:ea typeface="Microsoft YaHei" pitchFamily="34" charset="-122"/>
                 <a:cs typeface="Microsoft YaHei" pitchFamily="34" charset="-120"/>
               </a:rPr>
-              <a:t>今日磷酸铁锂行业信号集中在政策收紧与回收压力：国内新能源车政策收紧可能压制短期需求，而动力电池高值化利用被定性为淘汰赛，叠加首批电车脱保潮，回</a:t>
+              <a:t>今日磷酸铁锂行业核心信号是高压实产品供需缺口扩大：2026年高压实磷酸铁锂需求约169万吨，但稳定量产供给仅约120万吨，缺口吸引天赐材料终止</a:t>
             </a:r>
             <a:endParaRPr lang="en-US" sz="1020" dirty="0"/>
           </a:p>
@@ -3047,7 +3047,7 @@
                 <a:ea typeface="Aptos" pitchFamily="34" charset="-122"/>
                 <a:cs typeface="Aptos" pitchFamily="34" charset="-120"/>
               </a:rPr>
-              <a:t>2026-10-27</a:t>
+              <a:t>2026-10-28</a:t>
             </a:r>
             <a:endParaRPr lang="en-US" sz="800" dirty="0"/>
           </a:p>
@@ -3571,7 +3571,7 @@
                 <a:ea typeface="Microsoft YaHei" pitchFamily="34" charset="-122"/>
                 <a:cs typeface="Microsoft YaHei" pitchFamily="34" charset="-120"/>
               </a:rPr>
-              <a:t>中国磷酸铁锂行业官方政策与</a:t>
+              <a:t>磷酸铁锂材料与电芯公众号广</a:t>
             </a:r>
             <a:endParaRPr lang="en-US" sz="680" dirty="0"/>
           </a:p>
@@ -3612,7 +3612,7 @@
                 <a:ea typeface="Microsoft YaHei" pitchFamily="34" charset="-122"/>
                 <a:cs typeface="Microsoft YaHei" pitchFamily="34" charset="-120"/>
               </a:rPr>
-              <a:t>2026新能源车第四季度展望：国内政策收紧，海外冷热不均 - 电子工程</a:t>
+              <a:t>169万吨需求对120万吨供给:磷酸铁锂“高端缺口”为什么填不满?</a:t>
             </a:r>
             <a:endParaRPr lang="en-US" sz="680" dirty="0"/>
           </a:p>
@@ -3653,7 +3653,7 @@
                 <a:ea typeface="Aptos" pitchFamily="34" charset="-122"/>
                 <a:cs typeface="Aptos" pitchFamily="34" charset="-120"/>
               </a:rPr>
-              <a:t>https://www.eet-china.com/mp/a534030.html</a:t>
+              <a:t>https://weixin.sogou.com/link?url=dn9a_-gY295K0Rci_xozVXfdMkSQTLW6cwJThYulHEtVjXrGTiVgSyk1J_t_u4joCisrHMTPoiZUWQigGekC0lqXa8Fplpd9XfejurnmuLy7AxswCTESmIrvfCZoOfQS73VW3eAo5LSToQvCP_oKAemj-VEd2SaNgkfe0bA5zPkgzJlF6n6zVBxysYgdkJP9_SK9HpCKHRl7J_ON2Casuoa31MuncnLzYhU_sxTdkiO5g2-RjHbGAKL_dahev9yGrFKTlWrbGFbzAjcIGepUqA..&amp;type=2&amp;query=%E9%93%81%E9%94%82 %E9%AB%98%E5%8E%8B%E5%AE%9E %E6%AD%A3%E6%9E%81%E6%9D%90%E6%96%99 %E9%87%8F%E4%BA%A7&amp;token=A8214557AFFD00E2EAECB5361B22CB33EB9393FC6AE1683C</a:t>
             </a:r>
             <a:endParaRPr lang="en-US" sz="580" dirty="0"/>
           </a:p>
@@ -3758,7 +3758,7 @@
                 <a:ea typeface="Microsoft YaHei" pitchFamily="34" charset="-122"/>
                 <a:cs typeface="Microsoft YaHei" pitchFamily="34" charset="-120"/>
               </a:rPr>
-              <a:t>中国磷酸铁锂行业官方政策与</a:t>
+              <a:t>磷酸铁锂材料与电芯公众号广</a:t>
             </a:r>
             <a:endParaRPr lang="en-US" sz="680" dirty="0"/>
           </a:p>
@@ -3799,7 +3799,7 @@
                 <a:ea typeface="Microsoft YaHei" pitchFamily="34" charset="-122"/>
                 <a:cs typeface="Microsoft YaHei" pitchFamily="34" charset="-120"/>
               </a:rPr>
-              <a:t>清华大学教授徐盛明：动力电池高值化利用产业是一场淘汰赛 - Sohu</a:t>
+              <a:t>山东65万吨磷酸铁锂项目二期开工</a:t>
             </a:r>
             <a:endParaRPr lang="en-US" sz="680" dirty="0"/>
           </a:p>
@@ -3840,7 +3840,7 @@
                 <a:ea typeface="Aptos" pitchFamily="34" charset="-122"/>
                 <a:cs typeface="Aptos" pitchFamily="34" charset="-120"/>
               </a:rPr>
-              <a:t>https://news.google.com/rss/articles/CBMijwFBVV95cUxOZDUyUFNQSDdVMEN4WE5oWUoySHlEb2dWdU1xdGlud29YOUtGUGM1RFZrSV85bHVCUC1hOGVWNGJVN21zUTdfdDRtc1FjNFNSN3ppd28xUGlLR09xQVo4ZHRwOUV2eHZKZVpIdjVWTnpIaGFNSVo2UWluOHctU09vTlZqVi1hdVloX3dyYjRzWQ?oc=5</a:t>
+              <a:t>https://weixin.sogou.com/link?url=dn9a_-gY295K0Rci_xozVXfdMkSQTLW6cwJThYulHEtVjXrGTiVgSyk1J_t_u4jorRW_qzKVtORUWQigGekC0lqXa8Fplpd9ZdABQP4Q8m1g0KKD8XqcP3iP9k742mAib1s4UPAIcN6Fn44TIY2glkVolyPi6n7CBtfyqCvdefPQyjeUgCYpos8LFChDVY-ZMFgF1mprqy4gn1EBV6Pnd-HqHUQpOwnEj0A3pf1p9WkH7QMeVqMD549Gca3fBgi-XVQfHeLGiwD1AfaFW2DefQ..&amp;type=2&amp;query=%E9%93%81%E9%94%82 %E9%AB%98%E5%8E%8B%E5%AE%9E %E6%AD%A3%E6%9E%81%E6%9D%90%E6%96%99 %E9%87%8F%E4%BA%A7&amp;token=A8215585D7837E9A9392CA496473C2D3948F67566AE1683E</a:t>
             </a:r>
             <a:endParaRPr lang="en-US" sz="580" dirty="0"/>
           </a:p>
@@ -3986,7 +3986,7 @@
                 <a:ea typeface="Microsoft YaHei" pitchFamily="34" charset="-122"/>
                 <a:cs typeface="Microsoft YaHei" pitchFamily="34" charset="-120"/>
               </a:rPr>
-              <a:t>换电池8万残值仅3万，2000万辆电车脱保潮谁兜底 - 汽车之家</a:t>
+              <a:t>退役电池回收进入规范化阶段，流向管理决定资源价值 - 搜狐网</a:t>
             </a:r>
             <a:endParaRPr lang="en-US" sz="680" dirty="0"/>
           </a:p>
@@ -4027,7 +4027,7 @@
                 <a:ea typeface="Aptos" pitchFamily="34" charset="-122"/>
                 <a:cs typeface="Aptos" pitchFamily="34" charset="-120"/>
               </a:rPr>
-              <a:t>https://chejiahao.autohome.com.cn/info/26742762</a:t>
+              <a:t>https://m.sohu.com/a/1093750347_121925623?scm=10001.325_13-325_13.0.0-0-0-0-0.5_1334</a:t>
             </a:r>
             <a:endParaRPr lang="en-US" sz="580" dirty="0"/>
           </a:p>
@@ -4173,7 +4173,7 @@
                 <a:ea typeface="Microsoft YaHei" pitchFamily="34" charset="-122"/>
                 <a:cs typeface="Microsoft YaHei" pitchFamily="34" charset="-120"/>
               </a:rPr>
-              <a:t>【正极材料周报】湖南裕能拟20亿元于湖南湘潭再建厂！万华化学山东莱州项</a:t>
+              <a:t>2027年新能源渗透率不低于70% 海南2030年拟禁售燃油车 - 太</a:t>
             </a:r>
             <a:endParaRPr lang="en-US" sz="680" dirty="0"/>
           </a:p>
@@ -4214,7 +4214,7 @@
                 <a:ea typeface="Aptos" pitchFamily="34" charset="-122"/>
                 <a:cs typeface="Aptos" pitchFamily="34" charset="-120"/>
               </a:rPr>
-              <a:t>https://news.google.com/rss/articles/CBMiY0FVX3lxTFBRdENNOG1nNWcwTWZ6V1czSmM3R3BTYlVxX2NZeDZINzltWm9zZllkelJkNVlMMEwxT3FFM1c1eUIyUnJHSzFmSnJFbVhUcjZxVXg2M2xFZmI2bDVYVEx4RlBFYw?oc=5</a:t>
+              <a:t>https://www.pcauto.com.cn/news/5189/51899592.html</a:t>
             </a:r>
             <a:endParaRPr lang="en-US" sz="580" dirty="0"/>
           </a:p>
@@ -4360,7 +4360,7 @@
                 <a:ea typeface="Microsoft YaHei" pitchFamily="34" charset="-122"/>
                 <a:cs typeface="Microsoft YaHei" pitchFamily="34" charset="-120"/>
               </a:rPr>
-              <a:t>投资成果｜签约零跑！海泰科服投资企业攻坚前沿电池技术 - 碳索储能网</a:t>
+              <a:t>中国电池占七成，欧洲推平价车却难脱依赖 - 汽车之家</a:t>
             </a:r>
             <a:endParaRPr lang="en-US" sz="680" dirty="0"/>
           </a:p>
@@ -4401,7 +4401,7 @@
                 <a:ea typeface="Aptos" pitchFamily="34" charset="-122"/>
                 <a:cs typeface="Aptos" pitchFamily="34" charset="-120"/>
               </a:rPr>
-              <a:t>https://mcn.solarbe.com/news/20261027/50030949.html</a:t>
+              <a:t>https://chejiahao.autohome.com.cn/info/26744140?reply=reply</a:t>
             </a:r>
             <a:endParaRPr lang="en-US" sz="580" dirty="0"/>
           </a:p>
@@ -4547,7 +4547,7 @@
                 <a:ea typeface="Microsoft YaHei" pitchFamily="34" charset="-122"/>
                 <a:cs typeface="Microsoft YaHei" pitchFamily="34" charset="-120"/>
               </a:rPr>
-              <a:t>江西拓智科技：以激光精焊技术守护动力电池安全防线 - 搜狐网</a:t>
+              <a:t>思伊纳科技在科技新高度，让新型锂电池及固态电池绽放科技之花 - 36Kr</a:t>
             </a:r>
             <a:endParaRPr lang="en-US" sz="680" dirty="0"/>
           </a:p>
@@ -4588,7 +4588,7 @@
                 <a:ea typeface="Aptos" pitchFamily="34" charset="-122"/>
                 <a:cs typeface="Aptos" pitchFamily="34" charset="-120"/>
               </a:rPr>
-              <a:t>https://news.google.com/rss/articles/CBMijAFBVV95cUxNWllXMFdycTQwSjV1ZWRTWTk2emh6NmtQUHZGRVJCeEF3RktxU1NENWpJa3V4MGhxZFdnNWtscTNxaFZoQUg5akdlMFhCMF9pVERob3VTY1FXVGwwZjNRXzhrR0JncDJZbEpkMnpKMTVaRzlZRy1BNjVYdnk5eUF5UmhMT2UyYkVHYVYtXw?oc=5</a:t>
+              <a:t>https://www.36kr.com/p/4033696451417218</a:t>
             </a:r>
             <a:endParaRPr lang="en-US" sz="580" dirty="0"/>
           </a:p>
@@ -4693,7 +4693,7 @@
                 <a:ea typeface="Microsoft YaHei" pitchFamily="34" charset="-122"/>
                 <a:cs typeface="Microsoft YaHei" pitchFamily="34" charset="-120"/>
               </a:rPr>
-              <a:t>中国磷酸铁锂行业官方政策与</a:t>
+              <a:t>中国电池网</a:t>
             </a:r>
             <a:endParaRPr lang="en-US" sz="680" dirty="0"/>
           </a:p>
@@ -4734,7 +4734,7 @@
                 <a:ea typeface="Microsoft YaHei" pitchFamily="34" charset="-122"/>
                 <a:cs typeface="Microsoft YaHei" pitchFamily="34" charset="-120"/>
               </a:rPr>
-              <a:t>坐标贵州台江！3万吨废旧锂电池回收项目有新进展 - 上海有色金属</a:t>
+              <a:t>中国电池网</a:t>
             </a:r>
             <a:endParaRPr lang="en-US" sz="680" dirty="0"/>
           </a:p>
@@ -4775,7 +4775,7 @@
                 <a:ea typeface="Aptos" pitchFamily="34" charset="-122"/>
                 <a:cs typeface="Aptos" pitchFamily="34" charset="-120"/>
               </a:rPr>
-              <a:t>https://news.smm.cn/news/104179526</a:t>
+              <a:t>https://www.itdcw.com/</a:t>
             </a:r>
             <a:endParaRPr lang="en-US" sz="580" dirty="0"/>
           </a:p>
@@ -4880,7 +4880,7 @@
                 <a:ea typeface="Microsoft YaHei" pitchFamily="34" charset="-122"/>
                 <a:cs typeface="Microsoft YaHei" pitchFamily="34" charset="-120"/>
               </a:rPr>
-              <a:t>中国电池网</a:t>
+              <a:t>鑫椤锂电</a:t>
             </a:r>
             <a:endParaRPr lang="en-US" sz="680" dirty="0"/>
           </a:p>
@@ -4921,7 +4921,7 @@
                 <a:ea typeface="Microsoft YaHei" pitchFamily="34" charset="-122"/>
                 <a:cs typeface="Microsoft YaHei" pitchFamily="34" charset="-120"/>
               </a:rPr>
-              <a:t>中国电池网</a:t>
+              <a:t>鑫椤锂电</a:t>
             </a:r>
             <a:endParaRPr lang="en-US" sz="680" dirty="0"/>
           </a:p>
@@ -4962,7 +4962,7 @@
                 <a:ea typeface="Aptos" pitchFamily="34" charset="-122"/>
                 <a:cs typeface="Aptos" pitchFamily="34" charset="-120"/>
               </a:rPr>
-              <a:t>https://www.itdcw.com/</a:t>
+              <a:t>https://www.icbattery.com/</a:t>
             </a:r>
             <a:endParaRPr lang="en-US" sz="580" dirty="0"/>
           </a:p>
@@ -5067,7 +5067,7 @@
                 <a:ea typeface="Microsoft YaHei" pitchFamily="34" charset="-122"/>
                 <a:cs typeface="Microsoft YaHei" pitchFamily="34" charset="-120"/>
               </a:rPr>
-              <a:t>鑫椤锂电</a:t>
+              <a:t>高工锂电</a:t>
             </a:r>
             <a:endParaRPr lang="en-US" sz="680" dirty="0"/>
           </a:p>
@@ -5108,7 +5108,7 @@
                 <a:ea typeface="Microsoft YaHei" pitchFamily="34" charset="-122"/>
                 <a:cs typeface="Microsoft YaHei" pitchFamily="34" charset="-120"/>
               </a:rPr>
-              <a:t>鑫椤锂电</a:t>
+              <a:t>高工锂电</a:t>
             </a:r>
             <a:endParaRPr lang="en-US" sz="680" dirty="0"/>
           </a:p>
@@ -5149,7 +5149,7 @@
                 <a:ea typeface="Aptos" pitchFamily="34" charset="-122"/>
                 <a:cs typeface="Aptos" pitchFamily="34" charset="-120"/>
               </a:rPr>
-              <a:t>https://www.icbattery.com/</a:t>
+              <a:t>https://www.gg-lb.com/</a:t>
             </a:r>
             <a:endParaRPr lang="en-US" sz="580" dirty="0"/>
           </a:p>
@@ -5254,7 +5254,7 @@
                 <a:ea typeface="Microsoft YaHei" pitchFamily="34" charset="-122"/>
                 <a:cs typeface="Microsoft YaHei" pitchFamily="34" charset="-120"/>
               </a:rPr>
-              <a:t>高工锂电</a:t>
+              <a:t>电池中国</a:t>
             </a:r>
             <a:endParaRPr lang="en-US" sz="680" dirty="0"/>
           </a:p>
@@ -5295,7 +5295,7 @@
                 <a:ea typeface="Microsoft YaHei" pitchFamily="34" charset="-122"/>
                 <a:cs typeface="Microsoft YaHei" pitchFamily="34" charset="-120"/>
               </a:rPr>
-              <a:t>高工锂电</a:t>
+              <a:t>电池中国</a:t>
             </a:r>
             <a:endParaRPr lang="en-US" sz="680" dirty="0"/>
           </a:p>
@@ -5336,7 +5336,7 @@
                 <a:ea typeface="Aptos" pitchFamily="34" charset="-122"/>
                 <a:cs typeface="Aptos" pitchFamily="34" charset="-120"/>
               </a:rPr>
-              <a:t>https://www.gg-lb.com/</a:t>
+              <a:t>https://www.cbea.com/</a:t>
             </a:r>
             <a:endParaRPr lang="en-US" sz="580" dirty="0"/>
           </a:p>
@@ -5441,7 +5441,7 @@
                 <a:ea typeface="Microsoft YaHei" pitchFamily="34" charset="-122"/>
                 <a:cs typeface="Microsoft YaHei" pitchFamily="34" charset="-120"/>
               </a:rPr>
-              <a:t>电池中国</a:t>
+              <a:t>证券时报</a:t>
             </a:r>
             <a:endParaRPr lang="en-US" sz="680" dirty="0"/>
           </a:p>
@@ -5482,7 +5482,7 @@
                 <a:ea typeface="Microsoft YaHei" pitchFamily="34" charset="-122"/>
                 <a:cs typeface="Microsoft YaHei" pitchFamily="34" charset="-120"/>
               </a:rPr>
-              <a:t>电池中国</a:t>
+              <a:t>证券时报</a:t>
             </a:r>
             <a:endParaRPr lang="en-US" sz="680" dirty="0"/>
           </a:p>
@@ -5523,7 +5523,7 @@
                 <a:ea typeface="Aptos" pitchFamily="34" charset="-122"/>
                 <a:cs typeface="Aptos" pitchFamily="34" charset="-120"/>
               </a:rPr>
-              <a:t>https://www.cbea.com/</a:t>
+              <a:t>https://www.stcn.com/</a:t>
             </a:r>
             <a:endParaRPr lang="en-US" sz="580" dirty="0"/>
           </a:p>
@@ -5628,7 +5628,7 @@
                 <a:ea typeface="Microsoft YaHei" pitchFamily="34" charset="-122"/>
                 <a:cs typeface="Microsoft YaHei" pitchFamily="34" charset="-120"/>
               </a:rPr>
-              <a:t>证券时报</a:t>
+              <a:t>界面新闻</a:t>
             </a:r>
             <a:endParaRPr lang="en-US" sz="680" dirty="0"/>
           </a:p>
@@ -5669,7 +5669,7 @@
                 <a:ea typeface="Microsoft YaHei" pitchFamily="34" charset="-122"/>
                 <a:cs typeface="Microsoft YaHei" pitchFamily="34" charset="-120"/>
               </a:rPr>
-              <a:t>证券时报</a:t>
+              <a:t>界面新闻</a:t>
             </a:r>
             <a:endParaRPr lang="en-US" sz="680" dirty="0"/>
           </a:p>
@@ -5710,7 +5710,7 @@
                 <a:ea typeface="Aptos" pitchFamily="34" charset="-122"/>
                 <a:cs typeface="Aptos" pitchFamily="34" charset="-120"/>
               </a:rPr>
-              <a:t>https://www.stcn.com/</a:t>
+              <a:t>https://www.jiemian.com/</a:t>
             </a:r>
             <a:endParaRPr lang="en-US" sz="580" dirty="0"/>
           </a:p>
@@ -5964,7 +5964,7 @@
                 <a:ea typeface="Aptos" pitchFamily="34" charset="-122"/>
                 <a:cs typeface="Aptos" pitchFamily="34" charset="-120"/>
               </a:rPr>
-              <a:t>2026-10-27</a:t>
+              <a:t>2026-10-28</a:t>
             </a:r>
             <a:endParaRPr lang="en-US" sz="800" dirty="0"/>
           </a:p>
@@ -6488,7 +6488,7 @@
                 <a:ea typeface="Microsoft YaHei" pitchFamily="34" charset="-122"/>
                 <a:cs typeface="Microsoft YaHei" pitchFamily="34" charset="-120"/>
               </a:rPr>
-              <a:t>界面新闻</a:t>
+              <a:t>工业和信息化部</a:t>
             </a:r>
             <a:endParaRPr lang="en-US" sz="680" dirty="0"/>
           </a:p>
@@ -6529,7 +6529,7 @@
                 <a:ea typeface="Microsoft YaHei" pitchFamily="34" charset="-122"/>
                 <a:cs typeface="Microsoft YaHei" pitchFamily="34" charset="-120"/>
               </a:rPr>
-              <a:t>界面新闻</a:t>
+              <a:t>国新办举行国务院政策例行吹风会 介绍加强中小企业回款难问题治理有关工作</a:t>
             </a:r>
             <a:endParaRPr lang="en-US" sz="680" dirty="0"/>
           </a:p>
@@ -6570,7 +6570,7 @@
                 <a:ea typeface="Aptos" pitchFamily="34" charset="-122"/>
                 <a:cs typeface="Aptos" pitchFamily="34" charset="-120"/>
               </a:rPr>
-              <a:t>https://www.jiemian.com/</a:t>
+              <a:t>http://www.miit.gov.cn/xwfb/bldhd/art/2026/art_7285ee48244d4f20b0f127c7f013ec11.html</a:t>
             </a:r>
             <a:endParaRPr lang="en-US" sz="580" dirty="0"/>
           </a:p>
@@ -6716,7 +6716,7 @@
                 <a:ea typeface="Microsoft YaHei" pitchFamily="34" charset="-122"/>
                 <a:cs typeface="Microsoft YaHei" pitchFamily="34" charset="-120"/>
               </a:rPr>
-              <a:t>国新办举行国务院政策例行吹风会 介绍加强中小企业回款难问题治理有关工作</a:t>
+              <a:t>四部门关于开展2026年度享受增值税加计抵减政策的集成电路企业清单制定</a:t>
             </a:r>
             <a:endParaRPr lang="en-US" sz="680" dirty="0"/>
           </a:p>
@@ -6757,7 +6757,7 @@
                 <a:ea typeface="Aptos" pitchFamily="34" charset="-122"/>
                 <a:cs typeface="Aptos" pitchFamily="34" charset="-120"/>
               </a:rPr>
-              <a:t>http://www.miit.gov.cn/xwfb/bldhd/art/2026/art_7285ee48244d4f20b0f127c7f013ec11.html</a:t>
+              <a:t>http://www.miit.gov.cn/zwgk/zcwj/wjfb/tz/art/2026/art_7d2e760b4be94217b8f55caec840b30d.html</a:t>
             </a:r>
             <a:endParaRPr lang="en-US" sz="580" dirty="0"/>
           </a:p>
@@ -6903,7 +6903,7 @@
                 <a:ea typeface="Microsoft YaHei" pitchFamily="34" charset="-122"/>
                 <a:cs typeface="Microsoft YaHei" pitchFamily="34" charset="-120"/>
               </a:rPr>
-              <a:t>四部门关于开展2026年度享受增值税加计抵减政策的集成电路企业清单制定</a:t>
+              <a:t>工业和信息化部政策文件库</a:t>
             </a:r>
             <a:endParaRPr lang="en-US" sz="680" dirty="0"/>
           </a:p>
@@ -6944,7 +6944,7 @@
                 <a:ea typeface="Aptos" pitchFamily="34" charset="-122"/>
                 <a:cs typeface="Aptos" pitchFamily="34" charset="-120"/>
               </a:rPr>
-              <a:t>http://www.miit.gov.cn/zwgk/zcwj/wjfb/tz/art/2026/art_7d2e760b4be94217b8f55caec840b30d.html</a:t>
+              <a:t>https://www.miit.gov.cn/search/zcwjk.html?websiteid=110000000000000&amp;pg=&amp;p=&amp;tpl=14&amp;category=183&amp;q=</a:t>
             </a:r>
             <a:endParaRPr lang="en-US" sz="580" dirty="0"/>
           </a:p>
@@ -7090,7 +7090,7 @@
                 <a:ea typeface="Microsoft YaHei" pitchFamily="34" charset="-122"/>
                 <a:cs typeface="Microsoft YaHei" pitchFamily="34" charset="-120"/>
               </a:rPr>
-              <a:t>工业和信息化部政策文件库</a:t>
+              <a:t>最新政策</a:t>
             </a:r>
             <a:endParaRPr lang="en-US" sz="680" dirty="0"/>
           </a:p>
@@ -7131,7 +7131,7 @@
                 <a:ea typeface="Aptos" pitchFamily="34" charset="-122"/>
                 <a:cs typeface="Aptos" pitchFamily="34" charset="-120"/>
               </a:rPr>
-              <a:t>https://www.miit.gov.cn/search/zcwjk.html?websiteid=110000000000000&amp;pg=&amp;p=&amp;tpl=14&amp;category=183&amp;q=</a:t>
+              <a:t>https://www.miit.gov.cn/xwfb/zxzc/index.html</a:t>
             </a:r>
             <a:endParaRPr lang="en-US" sz="580" dirty="0"/>
           </a:p>
@@ -7236,7 +7236,7 @@
                 <a:ea typeface="Microsoft YaHei" pitchFamily="34" charset="-122"/>
                 <a:cs typeface="Microsoft YaHei" pitchFamily="34" charset="-120"/>
               </a:rPr>
-              <a:t>工业和信息化部</a:t>
+              <a:t>国家发展改革委</a:t>
             </a:r>
             <a:endParaRPr lang="en-US" sz="680" dirty="0"/>
           </a:p>
@@ -7277,7 +7277,7 @@
                 <a:ea typeface="Microsoft YaHei" pitchFamily="34" charset="-122"/>
                 <a:cs typeface="Microsoft YaHei" pitchFamily="34" charset="-120"/>
               </a:rPr>
-              <a:t>最新政策</a:t>
+              <a:t>国家发展改革委</a:t>
             </a:r>
             <a:endParaRPr lang="en-US" sz="680" dirty="0"/>
           </a:p>
@@ -7318,7 +7318,7 @@
                 <a:ea typeface="Aptos" pitchFamily="34" charset="-122"/>
                 <a:cs typeface="Aptos" pitchFamily="34" charset="-120"/>
               </a:rPr>
-              <a:t>https://www.miit.gov.cn/xwfb/zxzc/index.html</a:t>
+              <a:t>https://www.ndrc.gov.cn/</a:t>
             </a:r>
             <a:endParaRPr lang="en-US" sz="580" dirty="0"/>
           </a:p>
@@ -7423,7 +7423,7 @@
                 <a:ea typeface="Microsoft YaHei" pitchFamily="34" charset="-122"/>
                 <a:cs typeface="Microsoft YaHei" pitchFamily="34" charset="-120"/>
               </a:rPr>
-              <a:t>国家发展改革委</a:t>
+              <a:t>中华人民共和国中央人民政府</a:t>
             </a:r>
             <a:endParaRPr lang="en-US" sz="680" dirty="0"/>
           </a:p>
@@ -7464,7 +7464,7 @@
                 <a:ea typeface="Microsoft YaHei" pitchFamily="34" charset="-122"/>
                 <a:cs typeface="Microsoft YaHei" pitchFamily="34" charset="-120"/>
               </a:rPr>
-              <a:t>国家发展改革委</a:t>
+              <a:t>中华人民共和国中央人民政府</a:t>
             </a:r>
             <a:endParaRPr lang="en-US" sz="680" dirty="0"/>
           </a:p>
@@ -7505,7 +7505,7 @@
                 <a:ea typeface="Aptos" pitchFamily="34" charset="-122"/>
                 <a:cs typeface="Aptos" pitchFamily="34" charset="-120"/>
               </a:rPr>
-              <a:t>https://www.ndrc.gov.cn/</a:t>
+              <a:t>https://www.gov.cn/</a:t>
             </a:r>
             <a:endParaRPr lang="en-US" sz="580" dirty="0"/>
           </a:p>
@@ -7610,7 +7610,7 @@
                 <a:ea typeface="Microsoft YaHei" pitchFamily="34" charset="-122"/>
                 <a:cs typeface="Microsoft YaHei" pitchFamily="34" charset="-120"/>
               </a:rPr>
-              <a:t>中华人民共和国中央人民政府</a:t>
+              <a:t>生态环境部</a:t>
             </a:r>
             <a:endParaRPr lang="en-US" sz="680" dirty="0"/>
           </a:p>
@@ -7651,7 +7651,7 @@
                 <a:ea typeface="Microsoft YaHei" pitchFamily="34" charset="-122"/>
                 <a:cs typeface="Microsoft YaHei" pitchFamily="34" charset="-120"/>
               </a:rPr>
-              <a:t>中华人民共和国中央人民政府</a:t>
+              <a:t>生态环境部</a:t>
             </a:r>
             <a:endParaRPr lang="en-US" sz="680" dirty="0"/>
           </a:p>
@@ -7692,7 +7692,7 @@
                 <a:ea typeface="Aptos" pitchFamily="34" charset="-122"/>
                 <a:cs typeface="Aptos" pitchFamily="34" charset="-120"/>
               </a:rPr>
-              <a:t>https://www.gov.cn/</a:t>
+              <a:t>https://www.mee.gov.cn/</a:t>
             </a:r>
             <a:endParaRPr lang="en-US" sz="580" dirty="0"/>
           </a:p>
@@ -7797,7 +7797,7 @@
                 <a:ea typeface="Microsoft YaHei" pitchFamily="34" charset="-122"/>
                 <a:cs typeface="Microsoft YaHei" pitchFamily="34" charset="-120"/>
               </a:rPr>
-              <a:t>生态环境部</a:t>
+              <a:t>万润新能源</a:t>
             </a:r>
             <a:endParaRPr lang="en-US" sz="680" dirty="0"/>
           </a:p>
@@ -7838,7 +7838,7 @@
                 <a:ea typeface="Microsoft YaHei" pitchFamily="34" charset="-122"/>
                 <a:cs typeface="Microsoft YaHei" pitchFamily="34" charset="-120"/>
               </a:rPr>
-              <a:t>生态环境部</a:t>
+              <a:t>磷酸铁锂-湖北万润新能源科技股份有限公司_动力电池材料_消费电池材料_</a:t>
             </a:r>
             <a:endParaRPr lang="en-US" sz="680" dirty="0"/>
           </a:p>
@@ -7879,7 +7879,7 @@
                 <a:ea typeface="Aptos" pitchFamily="34" charset="-122"/>
                 <a:cs typeface="Aptos" pitchFamily="34" charset="-120"/>
               </a:rPr>
-              <a:t>https://www.mee.gov.cn/</a:t>
+              <a:t>https://www.hbwanrun.com/application_details/1.html</a:t>
             </a:r>
             <a:endParaRPr lang="en-US" sz="580" dirty="0"/>
           </a:p>
@@ -7984,7 +7984,7 @@
                 <a:ea typeface="Microsoft YaHei" pitchFamily="34" charset="-122"/>
                 <a:cs typeface="Microsoft YaHei" pitchFamily="34" charset="-120"/>
               </a:rPr>
-              <a:t>万润新能源</a:t>
+              <a:t>湖南裕能</a:t>
             </a:r>
             <a:endParaRPr lang="en-US" sz="680" dirty="0"/>
           </a:p>
@@ -8025,7 +8025,7 @@
                 <a:ea typeface="Microsoft YaHei" pitchFamily="34" charset="-122"/>
                 <a:cs typeface="Microsoft YaHei" pitchFamily="34" charset="-120"/>
               </a:rPr>
-              <a:t>磷酸铁锂-湖北万润新能源科技股份有限公司_动力电池材料_消费电池材料_</a:t>
+              <a:t>湖南裕能</a:t>
             </a:r>
             <a:endParaRPr lang="en-US" sz="680" dirty="0"/>
           </a:p>
@@ -8066,7 +8066,7 @@
                 <a:ea typeface="Aptos" pitchFamily="34" charset="-122"/>
                 <a:cs typeface="Aptos" pitchFamily="34" charset="-120"/>
               </a:rPr>
-              <a:t>https://www.hbwanrun.com/application_details/1.html</a:t>
+              <a:t>https://www.yunengchem.com/</a:t>
             </a:r>
             <a:endParaRPr lang="en-US" sz="580" dirty="0"/>
           </a:p>
@@ -8171,7 +8171,7 @@
                 <a:ea typeface="Microsoft YaHei" pitchFamily="34" charset="-122"/>
                 <a:cs typeface="Microsoft YaHei" pitchFamily="34" charset="-120"/>
               </a:rPr>
-              <a:t>湖南裕能</a:t>
+              <a:t>友山科技</a:t>
             </a:r>
             <a:endParaRPr lang="en-US" sz="680" dirty="0"/>
           </a:p>
@@ -8212,7 +8212,7 @@
                 <a:ea typeface="Microsoft YaHei" pitchFamily="34" charset="-122"/>
                 <a:cs typeface="Microsoft YaHei" pitchFamily="34" charset="-120"/>
               </a:rPr>
-              <a:t>湖南裕能</a:t>
+              <a:t>友山科技</a:t>
             </a:r>
             <a:endParaRPr lang="en-US" sz="680" dirty="0"/>
           </a:p>
@@ -8253,7 +8253,7 @@
                 <a:ea typeface="Aptos" pitchFamily="34" charset="-122"/>
                 <a:cs typeface="Aptos" pitchFamily="34" charset="-120"/>
               </a:rPr>
-              <a:t>https://www.yunengchem.com/</a:t>
+              <a:t>https://www.youshan-tech.com/</a:t>
             </a:r>
             <a:endParaRPr lang="en-US" sz="580" dirty="0"/>
           </a:p>
@@ -8358,7 +8358,7 @@
                 <a:ea typeface="Microsoft YaHei" pitchFamily="34" charset="-122"/>
                 <a:cs typeface="Microsoft YaHei" pitchFamily="34" charset="-120"/>
               </a:rPr>
-              <a:t>友山科技</a:t>
+              <a:t>江西升华</a:t>
             </a:r>
             <a:endParaRPr lang="en-US" sz="680" dirty="0"/>
           </a:p>
@@ -8399,7 +8399,7 @@
                 <a:ea typeface="Microsoft YaHei" pitchFamily="34" charset="-122"/>
                 <a:cs typeface="Microsoft YaHei" pitchFamily="34" charset="-120"/>
               </a:rPr>
-              <a:t>友山科技</a:t>
+              <a:t>江西升华</a:t>
             </a:r>
             <a:endParaRPr lang="en-US" sz="680" dirty="0"/>
           </a:p>
@@ -8440,7 +8440,7 @@
                 <a:ea typeface="Aptos" pitchFamily="34" charset="-122"/>
                 <a:cs typeface="Aptos" pitchFamily="34" charset="-120"/>
               </a:rPr>
-              <a:t>https://www.youshan-tech.com/</a:t>
+              <a:t>https://www.shenghuaxc.com/</a:t>
             </a:r>
             <a:endParaRPr lang="en-US" sz="580" dirty="0"/>
           </a:p>
@@ -8545,7 +8545,7 @@
                 <a:ea typeface="Microsoft YaHei" pitchFamily="34" charset="-122"/>
                 <a:cs typeface="Microsoft YaHei" pitchFamily="34" charset="-120"/>
               </a:rPr>
-              <a:t>江西升华</a:t>
+              <a:t>当升科技</a:t>
             </a:r>
             <a:endParaRPr lang="en-US" sz="680" dirty="0"/>
           </a:p>
@@ -8586,7 +8586,7 @@
                 <a:ea typeface="Microsoft YaHei" pitchFamily="34" charset="-122"/>
                 <a:cs typeface="Microsoft YaHei" pitchFamily="34" charset="-120"/>
               </a:rPr>
-              <a:t>江西升华</a:t>
+              <a:t>当升科技</a:t>
             </a:r>
             <a:endParaRPr lang="en-US" sz="680" dirty="0"/>
           </a:p>
@@ -8627,7 +8627,7 @@
                 <a:ea typeface="Aptos" pitchFamily="34" charset="-122"/>
                 <a:cs typeface="Aptos" pitchFamily="34" charset="-120"/>
               </a:rPr>
-              <a:t>https://www.shenghuaxc.com/</a:t>
+              <a:t>https://www.easpring.com/</a:t>
             </a:r>
             <a:endParaRPr lang="en-US" sz="580" dirty="0"/>
           </a:p>
@@ -8881,7 +8881,7 @@
                 <a:ea typeface="Aptos" pitchFamily="34" charset="-122"/>
                 <a:cs typeface="Aptos" pitchFamily="34" charset="-120"/>
               </a:rPr>
-              <a:t>2026-10-27</a:t>
+              <a:t>2026-10-28</a:t>
             </a:r>
             <a:endParaRPr lang="en-US" sz="800" dirty="0"/>
           </a:p>
@@ -9085,7 +9085,7 @@
                 <a:ea typeface="Microsoft YaHei" pitchFamily="34" charset="-122"/>
                 <a:cs typeface="Microsoft YaHei" pitchFamily="34" charset="-120"/>
               </a:rPr>
-              <a:t>今日磷酸铁锂行业信号集中在政策收紧与回收压力：国内新能源车政策收紧可能压制短期需求，而动力电池高值化利用被定性为淘汰赛，叠加首批电车脱保潮，回</a:t>
+              <a:t>今日磷酸铁锂行业核心信号是高压实产品供需缺口扩大：2026年高压实磷酸铁锂需求约169万吨，但稳定量产供给仅约120万吨，缺口吸引天赐材料终止</a:t>
             </a:r>
             <a:endParaRPr lang="en-US" sz="940" dirty="0"/>
           </a:p>
@@ -9230,7 +9230,7 @@
         <p:spPr>
           <a:xfrm>
             <a:off x="1188720" y="1883664"/>
-            <a:ext cx="2194560" cy="54864"/>
+            <a:ext cx="1316736" cy="54864"/>
           </a:xfrm>
           <a:prstGeom prst="rect">
             <a:avLst/>
@@ -9281,7 +9281,7 @@
                 <a:ea typeface="Microsoft YaHei" pitchFamily="34" charset="-122"/>
                 <a:cs typeface="Microsoft YaHei" pitchFamily="34" charset="-120"/>
               </a:rPr>
-              <a:t>政策端国内新能源车政策收紧，可能压制四季度磷酸铁锂需求增速；回收端动力电池高值化利用被定性为淘汰赛，叠加脱保潮，合规与回收成本上升。供给端湖南裕能拟20亿元扩产、万华化学二期</a:t>
+              <a:t>高压实磷酸铁锂供需缺口成为今日最明确信号：2026年需求约169万吨，稳定量产供给仅约120万吨，缺口约49万吨；天赐材料终止三元项目转向16万吨高压实磷酸铁锂且已完成中试量</a:t>
             </a:r>
             <a:endParaRPr lang="en-US" sz="920" dirty="0"/>
           </a:p>
@@ -9322,7 +9322,7 @@
                 <a:ea typeface="Aptos" pitchFamily="34" charset="-122"/>
                 <a:cs typeface="Aptos" pitchFamily="34" charset="-120"/>
               </a:rPr>
-              <a:t>[1][2][3][4]</a:t>
+              <a:t>[1][2]</a:t>
             </a:r>
             <a:endParaRPr lang="en-US" sz="750" dirty="0"/>
           </a:p>
@@ -9518,7 +9518,7 @@
                 <a:ea typeface="Microsoft YaHei" pitchFamily="34" charset="-122"/>
                 <a:cs typeface="Microsoft YaHei" pitchFamily="34" charset="-120"/>
               </a:rPr>
-              <a:t>零跑与海泰科服投资企业签约攻坚前沿电池技术，但未明确磷酸铁锂路线；江西拓智科技以激光精焊技术守护动力电池安全，属于制造工艺改进。当前磷酸铁锂技术路线仍以成本与安全为核心，前沿</a:t>
+              <a:t>高压实磷酸铁锂仍是技术升级主线：天赐材料16万吨高压实产品已完成中试量产，山东项目披露所得磷酸铁锂正极材料粉末压实密度达2.51~2.55g/cm³；容百科技、当升科技等三元</a:t>
             </a:r>
             <a:endParaRPr lang="en-US" sz="920" dirty="0"/>
           </a:p>
@@ -9559,7 +9559,7 @@
                 <a:ea typeface="Aptos" pitchFamily="34" charset="-122"/>
                 <a:cs typeface="Aptos" pitchFamily="34" charset="-120"/>
               </a:rPr>
-              <a:t>[5][6]</a:t>
+              <a:t>[1][2]</a:t>
             </a:r>
             <a:endParaRPr lang="en-US" sz="750" dirty="0"/>
           </a:p>
@@ -9704,7 +9704,7 @@
         <p:spPr>
           <a:xfrm>
             <a:off x="1188720" y="4005072"/>
-            <a:ext cx="877824" cy="54864"/>
+            <a:ext cx="1316736" cy="54864"/>
           </a:xfrm>
           <a:prstGeom prst="rect">
             <a:avLst/>
@@ -9755,7 +9755,7 @@
                 <a:ea typeface="Microsoft YaHei" pitchFamily="34" charset="-122"/>
                 <a:cs typeface="Microsoft YaHei" pitchFamily="34" charset="-120"/>
               </a:rPr>
-              <a:t>湖南裕能拟20亿元在湖南湘潭再建厂，万华化学山东莱州项目二期开工，头部磷酸铁锂正极产能继续扩张。供给端增量明确，若需求增速不能同步匹配，中期行业开工率与加工费可能承压。客户与</a:t>
+              <a:t>产能扩张与跨界入场并行：天赐材料终止三元项目转向16万吨高压实磷酸铁锂，容百科技、当升科技跨界入场；山东65万吨磷酸铁锂项目二期开工。判断铁锂产能仍在扩张，但高压实有效产能释</a:t>
             </a:r>
             <a:endParaRPr lang="en-US" sz="920" dirty="0"/>
           </a:p>
@@ -9796,7 +9796,7 @@
                 <a:ea typeface="Aptos" pitchFamily="34" charset="-122"/>
                 <a:cs typeface="Aptos" pitchFamily="34" charset="-120"/>
               </a:rPr>
-              <a:t>[4]</a:t>
+              <a:t>[1][2]</a:t>
             </a:r>
             <a:endParaRPr lang="en-US" sz="750" dirty="0"/>
           </a:p>
@@ -9941,7 +9941,7 @@
         <p:spPr>
           <a:xfrm>
             <a:off x="6766560" y="4005072"/>
-            <a:ext cx="2194560" cy="54864"/>
+            <a:ext cx="877824" cy="54864"/>
           </a:xfrm>
           <a:prstGeom prst="rect">
             <a:avLst/>
@@ -9992,7 +9992,7 @@
                 <a:ea typeface="Microsoft YaHei" pitchFamily="34" charset="-122"/>
                 <a:cs typeface="Microsoft YaHei" pitchFamily="34" charset="-120"/>
               </a:rPr>
-              <a:t>今日无直接磷酸铁锂价格报价，但政策收紧与产能扩张信号叠加，价格与盈利压力偏向下行。国内新能源车政策收紧可能削弱需求端对正极材料的拉动力，而裕能、万华扩产增加供给，供需天平向买</a:t>
+              <a:t>高压实产品供需缺口对价格形成支撑：2026年高压实磷酸铁锂需求约169万吨，稳定量产供给约120万吨，缺口约49万吨；天赐材料终止三元项目转产高压实铁锂，反映企业将资本开支向</a:t>
             </a:r>
             <a:endParaRPr lang="en-US" sz="920" dirty="0"/>
           </a:p>
@@ -10033,7 +10033,7 @@
                 <a:ea typeface="Aptos" pitchFamily="34" charset="-122"/>
                 <a:cs typeface="Aptos" pitchFamily="34" charset="-120"/>
               </a:rPr>
-              <a:t>[1][4][3]</a:t>
+              <a:t>[1]</a:t>
             </a:r>
             <a:endParaRPr lang="en-US" sz="750" dirty="0"/>
           </a:p>
@@ -10138,7 +10138,7 @@
                 <a:ea typeface="Microsoft YaHei" pitchFamily="34" charset="-122"/>
                 <a:cs typeface="Microsoft YaHei" pitchFamily="34" charset="-120"/>
               </a:rPr>
-              <a:t>今日磷酸铁锂行业信号集中在政策收紧与回收压力：国内新能源车政策收紧可能压制短期需求，而动力电池高值化利用被定性为淘汰赛，叠加首批电车脱保潮，回</a:t>
+              <a:t>今日磷酸铁锂行业核心信号是高压实产品供需缺口扩大：2026年高压实磷酸铁锂需求约169万吨，但稳定量产供给仅约120万吨，缺口吸引天赐材料终止</a:t>
             </a:r>
             <a:endParaRPr lang="en-US" sz="1020" dirty="0"/>
           </a:p>
@@ -10287,7 +10287,7 @@
                 <a:ea typeface="Aptos" pitchFamily="34" charset="-122"/>
                 <a:cs typeface="Aptos" pitchFamily="34" charset="-120"/>
               </a:rPr>
-              <a:t>2026-10-27</a:t>
+              <a:t>2026-10-28</a:t>
             </a:r>
             <a:endParaRPr lang="en-US" sz="800" dirty="0"/>
           </a:p>
@@ -10493,7 +10493,7 @@
                 <a:ea typeface="Microsoft YaHei" pitchFamily="34" charset="-122"/>
                 <a:cs typeface="Microsoft YaHei" pitchFamily="34" charset="-120"/>
               </a:rPr>
-              <a:t>4 条公开来源交叉验证｜事实、影响与后续研判</a:t>
+              <a:t>2 条公开来源交叉验证｜事实、影响与后续研判</a:t>
             </a:r>
             <a:endParaRPr lang="en-US" sz="860" dirty="0"/>
           </a:p>
@@ -10602,7 +10602,7 @@
                 <a:ea typeface="Microsoft YaHei" pitchFamily="34" charset="-122"/>
                 <a:cs typeface="Microsoft YaHei" pitchFamily="34" charset="-120"/>
               </a:rPr>
-              <a:t>政策端国内新能源车政策收紧，可能压制四季度磷酸铁锂需求增速；回收端动力电池高值化利用被定性为淘汰赛，叠加脱保潮，合规与回收成本上升。供给端湖南裕能拟20亿元扩产、万华化学二期开工，头部产能继续加码。短期供需矛盾未解，行业盈利修复依赖需求超预期与成本下行。 [1][2][3][4]</a:t>
+              <a:t>高压实磷酸铁锂供需缺口成为今日最明确信号：2026年需求约169万吨，稳定量产供给仅约120万吨，缺口约49万吨；天赐材料终止三元项目转向16万吨高压实磷酸铁锂且已完成中试量产，容百科技、当升科技跨界入场；山东65万吨磷酸铁锂项目二期开工。判断高压实产品仍是铁锂行业结构性景气主线，但新产能从开工到稳定量产存在时滞，短期缺口难以快速填补。 [1][2]</a:t>
             </a:r>
             <a:endParaRPr lang="en-US" sz="960" dirty="0"/>
           </a:p>
@@ -10643,7 +10643,7 @@
                 <a:ea typeface="Aptos" pitchFamily="34" charset="-122"/>
                 <a:cs typeface="Aptos" pitchFamily="34" charset="-120"/>
               </a:rPr>
-              <a:t>依据：[1][2][3][4]</a:t>
+              <a:t>依据：[1][2]</a:t>
             </a:r>
             <a:endParaRPr lang="en-US" sz="740" dirty="0"/>
           </a:p>
@@ -10752,7 +10752,7 @@
                 <a:ea typeface="Microsoft YaHei" pitchFamily="34" charset="-122"/>
                 <a:cs typeface="Microsoft YaHei" pitchFamily="34" charset="-120"/>
               </a:rPr>
-              <a:t>电子工程专辑指出国内政策收紧、海外冷热不均，直接影响新能源车销量预期，进而传导至磷酸铁锂正极订单；徐盛明观点与脱保潮报道共同指向回收体系压力，可能推高电池全生命周期成本，间接影响新车定价与磷酸铁锂性价比。裕能扩产与万华二期开工则意味着中期供给增量明确，若需求增速放缓，价格竞争可能加剧。需验证政策收紧的具体力度、回收政策落地节奏及头部企业开工率。</a:t>
+              <a:t>上述信号相互强化：需求测算缺口吸引三元企业跨界和原有企业转产，而山东项目二期开工代表供给端扩张，但高压实产品对工艺控制和客户认证要求更高，中试量产到大批量稳定供货仍有距离。需要继续调研天赐材料16万吨项目的客户认证进度、容百科技和当升科技高压实产品的量产时间表，以及山东项目二期具体投产节点，以验证供给缺口收敛速度。</a:t>
             </a:r>
             <a:endParaRPr lang="en-US" sz="960" dirty="0"/>
           </a:p>
@@ -10886,7 +10886,7 @@
                 <a:ea typeface="Microsoft YaHei" pitchFamily="34" charset="-122"/>
                 <a:cs typeface="Microsoft YaHei" pitchFamily="34" charset="-120"/>
               </a:rPr>
-              <a:t>若四季度国内新能源车政策收紧导致销量增速低于预期，则磷酸铁锂正极订单可能环比走弱，加工费承压；若回收政策加速落地，则具备合规回收能力的企业可能获得成本优势。跟踪指标：新能源车月度销量、正极企业开工率、碳酸锂价格、回收白名单企业数量。证据边界：政策细则尚未公布，扩产项目投产时间不确定。</a:t>
+              <a:t>若天赐材料16万吨高压实项目在2027年上半年完成客户认证并稳定量产，则高压实供给缺口可能边际收窄，加工费上行动力减弱；若认证周期拉长或良率爬坡不及预期，则缺口维持，具备稳定量产能力的企业议价权增强。跟踪指标：高压实产品月度出货量、新进入者客户公告、山东项目二期投产时间。证据边界：当前仅有中试量产和开工信息，缺乏实际月度出货数据。</a:t>
             </a:r>
             <a:endParaRPr lang="en-US" sz="960" dirty="0"/>
           </a:p>
@@ -11132,7 +11132,7 @@
                 <a:ea typeface="Microsoft YaHei" pitchFamily="34" charset="-122"/>
                 <a:cs typeface="Microsoft YaHei" pitchFamily="34" charset="-120"/>
               </a:rPr>
-              <a:t>政策端国内新能源车政策收紧</a:t>
+              <a:t>高压实磷酸铁锂供需缺口成为</a:t>
             </a:r>
             <a:endParaRPr lang="en-US" sz="670" dirty="0"/>
           </a:p>
@@ -11239,7 +11239,7 @@
                 <a:ea typeface="Microsoft YaHei" pitchFamily="34" charset="-122"/>
                 <a:cs typeface="Microsoft YaHei" pitchFamily="34" charset="-120"/>
               </a:rPr>
-              <a:t>回收端动力电池高值化利用被</a:t>
+              <a:t>天赐材料终止三元项目转向1</a:t>
             </a:r>
             <a:endParaRPr lang="en-US" sz="670" dirty="0"/>
           </a:p>
@@ -11346,7 +11346,7 @@
                 <a:ea typeface="Microsoft YaHei" pitchFamily="34" charset="-122"/>
                 <a:cs typeface="Microsoft YaHei" pitchFamily="34" charset="-120"/>
               </a:rPr>
-              <a:t>供给端湖南裕能拟20亿元扩</a:t>
+              <a:t>山东65万吨磷酸铁锂项目二</a:t>
             </a:r>
             <a:endParaRPr lang="en-US" sz="670" dirty="0"/>
           </a:p>
@@ -11453,7 +11453,7 @@
                 <a:ea typeface="Microsoft YaHei" pitchFamily="34" charset="-122"/>
                 <a:cs typeface="Microsoft YaHei" pitchFamily="34" charset="-120"/>
               </a:rPr>
-              <a:t>政策端国内新能源车政策收紧</a:t>
+              <a:t>高压实磷酸铁锂供需缺口成为</a:t>
             </a:r>
             <a:endParaRPr lang="en-US" sz="670" dirty="0"/>
           </a:p>
@@ -11599,7 +11599,7 @@
                 <a:ea typeface="Microsoft YaHei" pitchFamily="34" charset="-122"/>
                 <a:cs typeface="Microsoft YaHei" pitchFamily="34" charset="-120"/>
               </a:rPr>
-              <a:t>若四季度国内新能源车政策收紧导致销量增速低于预期，则磷酸铁锂正极订单可能环比走弱，加工费承压</a:t>
+              <a:t>若天赐材料16万吨高压实项目在2027年上半年完成客户认证并稳定量产，则高压实供给缺口可能边际收窄，加工费上行动力减弱</a:t>
             </a:r>
             <a:endParaRPr lang="en-US" sz="1020" dirty="0"/>
           </a:p>
@@ -11748,7 +11748,7 @@
                 <a:ea typeface="Aptos" pitchFamily="34" charset="-122"/>
                 <a:cs typeface="Aptos" pitchFamily="34" charset="-120"/>
               </a:rPr>
-              <a:t>2026-10-27</a:t>
+              <a:t>2026-10-28</a:t>
             </a:r>
             <a:endParaRPr lang="en-US" sz="800" dirty="0"/>
           </a:p>
@@ -12063,7 +12063,7 @@
                 <a:ea typeface="Microsoft YaHei" pitchFamily="34" charset="-122"/>
                 <a:cs typeface="Microsoft YaHei" pitchFamily="34" charset="-120"/>
               </a:rPr>
-              <a:t>零跑与海泰科服投资企业签约攻坚前沿电池技术，但未明确磷酸铁锂路线；江西拓智科技以激光精焊技术守护动力电池安全，属于制造工艺改进。当前磷酸铁锂技术路线仍以成本与安全为核心，前沿技术合作可能分散对磷酸铁锂的研发资源，但短期影响有限。 [5][6]</a:t>
+              <a:t>高压实磷酸铁锂仍是技术升级主线：天赐材料16万吨高压实产品已完成中试量产，山东项目披露所得磷酸铁锂正极材料粉末压实密度达2.51~2.55g/cm³；容百科技、当升科技等三元头部企业跨界入场，表明高压实路线对三元企业的技术吸引力上升。判断高压实密度是当前铁锂产品差异化核心指标，但中试量产不等于大批量稳定供货。 [1][2]</a:t>
             </a:r>
             <a:endParaRPr lang="en-US" sz="960" dirty="0"/>
           </a:p>
@@ -12104,7 +12104,7 @@
                 <a:ea typeface="Aptos" pitchFamily="34" charset="-122"/>
                 <a:cs typeface="Aptos" pitchFamily="34" charset="-120"/>
               </a:rPr>
-              <a:t>依据：[5][6]</a:t>
+              <a:t>依据：[1][2]</a:t>
             </a:r>
             <a:endParaRPr lang="en-US" sz="740" dirty="0"/>
           </a:p>
@@ -12213,7 +12213,7 @@
                 <a:ea typeface="Microsoft YaHei" pitchFamily="34" charset="-122"/>
                 <a:cs typeface="Microsoft YaHei" pitchFamily="34" charset="-120"/>
               </a:rPr>
-              <a:t>碳索储能网报道零跑合作聚焦前沿电池技术，若指向固态或高镍路线，可能在中长期削弱磷酸铁锂在部分车型的份额；搜狐网报道的激光精焊技术属于电池制造环节，对磷酸铁锂电池安全性和良率有正面意义，但未改变材料体系竞争格局。需进一步确认零跑合作的技术方向及量产时间表，以及激光精焊在磷酸铁锂产线的渗透率。</a:t>
+              <a:t>高压实产品需求缺口和三元企业跨界共同指向技术路线向高压实密度集中，这与动力电池对能量密度和成本的双重要求相关。天赐材料中试量产和山东项目压实密度数据提供了产品性能参照，但公众号来源未披露循环寿命、倍率性能和批次稳定性等关键指标。需要继续调研高压实产品在不同电芯体系中的验证进展，以及跨界企业原有三元产线改造为铁锂产线的资本开支和良率爬坡情况。</a:t>
             </a:r>
             <a:endParaRPr lang="en-US" sz="960" dirty="0"/>
           </a:p>
@@ -12347,7 +12347,7 @@
                 <a:ea typeface="Microsoft YaHei" pitchFamily="34" charset="-122"/>
                 <a:cs typeface="Microsoft YaHei" pitchFamily="34" charset="-120"/>
               </a:rPr>
-              <a:t>若零跑合作技术路线为非磷酸铁锂体系且2027年前量产，则磷酸铁锂在中低端车型的份额可能被部分替代；若激光精焊在磷酸铁锂产线快速推广，则电池安全性能提升可能降低质保成本。跟踪指标：零跑电池技术路线公告、激光精焊设备订单、磷酸铁锂车型占比。证据边界：合作技术细节未披露，量产时间不确定。</a:t>
+              <a:t>若高压实产品在2027年成为动力电池主流选择，则具备2.5g/cm³以上压实密度稳定量产能力的企业可能获得客户倾斜；若下游电芯厂对高压实产品的循环和倍率性能验证不通过，则技术路线可能分化。跟踪指标：高压实产品批次稳定性数据、下游电芯厂验证公告、压实密度与循环寿命的平衡进展。证据边界：当前压实密度数据来自项目披露，缺乏第三方检测和长期循环数据。</a:t>
             </a:r>
             <a:endParaRPr lang="en-US" sz="960" dirty="0"/>
           </a:p>
@@ -12593,7 +12593,7 @@
                 <a:ea typeface="Microsoft YaHei" pitchFamily="34" charset="-122"/>
                 <a:cs typeface="Microsoft YaHei" pitchFamily="34" charset="-120"/>
               </a:rPr>
-              <a:t>零跑与海泰科服投资企业签约</a:t>
+              <a:t>高压实磷酸铁锂仍是技术升级</a:t>
             </a:r>
             <a:endParaRPr lang="en-US" sz="670" dirty="0"/>
           </a:p>
@@ -12700,7 +12700,7 @@
                 <a:ea typeface="Microsoft YaHei" pitchFamily="34" charset="-122"/>
                 <a:cs typeface="Microsoft YaHei" pitchFamily="34" charset="-120"/>
               </a:rPr>
-              <a:t>江西拓智科技以激光精焊技术</a:t>
+              <a:t>容百科技、当升科技等三元头</a:t>
             </a:r>
             <a:endParaRPr lang="en-US" sz="670" dirty="0"/>
           </a:p>
@@ -12807,7 +12807,7 @@
                 <a:ea typeface="Microsoft YaHei" pitchFamily="34" charset="-122"/>
                 <a:cs typeface="Microsoft YaHei" pitchFamily="34" charset="-120"/>
               </a:rPr>
-              <a:t>当前磷酸铁锂技术路线仍以成</a:t>
+              <a:t>判断高压实密度是当前铁锂产</a:t>
             </a:r>
             <a:endParaRPr lang="en-US" sz="670" dirty="0"/>
           </a:p>
@@ -12914,7 +12914,7 @@
                 <a:ea typeface="Microsoft YaHei" pitchFamily="34" charset="-122"/>
                 <a:cs typeface="Microsoft YaHei" pitchFamily="34" charset="-120"/>
               </a:rPr>
-              <a:t>零跑与海泰科服投资企业签约</a:t>
+              <a:t>高压实磷酸铁锂仍是技术升级</a:t>
             </a:r>
             <a:endParaRPr lang="en-US" sz="670" dirty="0"/>
           </a:p>
@@ -13060,7 +13060,7 @@
                 <a:ea typeface="Microsoft YaHei" pitchFamily="34" charset="-122"/>
                 <a:cs typeface="Microsoft YaHei" pitchFamily="34" charset="-120"/>
               </a:rPr>
-              <a:t>若零跑合作技术路线为非磷酸铁锂体系且2027年前量产，则磷酸铁锂在中低端车型的份额可能被部分替代</a:t>
+              <a:t>若高压实产品在2027年成为动力电池主流选择，则具备2.5g/cm³以上压实密度稳定量产能力的企业可能获得客户倾斜</a:t>
             </a:r>
             <a:endParaRPr lang="en-US" sz="1020" dirty="0"/>
           </a:p>
@@ -13209,7 +13209,7 @@
                 <a:ea typeface="Aptos" pitchFamily="34" charset="-122"/>
                 <a:cs typeface="Aptos" pitchFamily="34" charset="-120"/>
               </a:rPr>
-              <a:t>2026-10-27</a:t>
+              <a:t>2026-10-28</a:t>
             </a:r>
             <a:endParaRPr lang="en-US" sz="800" dirty="0"/>
           </a:p>
@@ -13415,7 +13415,7 @@
                 <a:ea typeface="Microsoft YaHei" pitchFamily="34" charset="-122"/>
                 <a:cs typeface="Microsoft YaHei" pitchFamily="34" charset="-120"/>
               </a:rPr>
-              <a:t>1 条公开来源交叉验证｜事实、影响与后续研判</a:t>
+              <a:t>2 条公开来源交叉验证｜事实、影响与后续研判</a:t>
             </a:r>
             <a:endParaRPr lang="en-US" sz="860" dirty="0"/>
           </a:p>
@@ -13524,7 +13524,7 @@
                 <a:ea typeface="Microsoft YaHei" pitchFamily="34" charset="-122"/>
                 <a:cs typeface="Microsoft YaHei" pitchFamily="34" charset="-120"/>
               </a:rPr>
-              <a:t>湖南裕能拟20亿元在湖南湘潭再建厂，万华化学山东莱州项目二期开工，头部磷酸铁锂正极产能继续扩张。供给端增量明确，若需求增速不能同步匹配，中期行业开工率与加工费可能承压。客户与订单方面，今日无直接磷酸铁锂大单披露。 [4]</a:t>
+              <a:t>产能扩张与跨界入场并行：天赐材料终止三元项目转向16万吨高压实磷酸铁锂，容百科技、当升科技跨界入场；山东65万吨磷酸铁锂项目二期开工。判断铁锂产能仍在扩张，但高压实有效产能释放受客户认证和工艺爬坡约束，名义产能不等于稳定供货能力；跨界企业原有客户关系可能加速其铁锂产品导入。 [1][2]</a:t>
             </a:r>
             <a:endParaRPr lang="en-US" sz="960" dirty="0"/>
           </a:p>
@@ -13565,7 +13565,7 @@
                 <a:ea typeface="Aptos" pitchFamily="34" charset="-122"/>
                 <a:cs typeface="Aptos" pitchFamily="34" charset="-120"/>
               </a:rPr>
-              <a:t>依据：[4]</a:t>
+              <a:t>依据：[1][2]</a:t>
             </a:r>
             <a:endParaRPr lang="en-US" sz="740" dirty="0"/>
           </a:p>
@@ -13674,7 +13674,7 @@
                 <a:ea typeface="Microsoft YaHei" pitchFamily="34" charset="-122"/>
                 <a:cs typeface="Microsoft YaHei" pitchFamily="34" charset="-120"/>
               </a:rPr>
-              <a:t>海融网报道裕能扩产与万华二期开工，两者均为磷酸铁锂正极材料环节，显示头部企业对中期需求仍有信心，但也意味着供给竞争加剧。裕能作为龙头，扩产可能巩固其规模成本优势，而万华化学跨界进入则加剧行业分化。需跟踪项目投产时间、产能爬坡节奏以及下游电池厂绑定情况，验证新增产能是否被提前锁定。</a:t>
+              <a:t>天赐材料转产和三元企业跨界说明铁锂高压实产品的客户需求确定性较高，山东项目二期开工则代表地方产能继续加码。但公众号来源未披露天赐材料16万吨项目的具体客户名单和订单锁定情况，也未披露容百科技、当升科技铁锂产品的目标客户。需要继续调研这些新增产能对应的下游电芯厂定点情况、产能爬坡周期以及是否存在产能过剩风险从普通铁锂向高压实产品蔓延。</a:t>
             </a:r>
             <a:endParaRPr lang="en-US" sz="960" dirty="0"/>
           </a:p>
@@ -13808,7 +13808,7 @@
                 <a:ea typeface="Microsoft YaHei" pitchFamily="34" charset="-122"/>
                 <a:cs typeface="Microsoft YaHei" pitchFamily="34" charset="-120"/>
               </a:rPr>
-              <a:t>若裕能湘潭项目与万华二期在2027年如期投产，则磷酸铁锂正极名义产能进一步过剩，加工费可能维持低位；若下游电池厂提前签订长单锁定产能，则头部企业开工率有支撑。跟踪指标：项目环评/能评进度、设备招标、电池厂长单公告、行业月度开工率。证据边界：项目投产时间及产能利用率尚未披露。</a:t>
+              <a:t>若天赐材料16万吨项目和山东65万吨项目二期在2027年如期投产且下游订单锁定充分，则高压实供给缺口可能逐步收窄，行业加工费分化加剧；若客户认证进度慢于产能建设进度，则短期名义产能过剩与有效供给不足并存。跟踪指标：项目投产公告、下游电芯厂长协订单披露、产能利用率数据。证据边界：当前仅有开工和中试量产信息，缺乏订单和产能利用率数据。</a:t>
             </a:r>
             <a:endParaRPr lang="en-US" sz="960" dirty="0"/>
           </a:p>
@@ -14054,7 +14054,7 @@
                 <a:ea typeface="Microsoft YaHei" pitchFamily="34" charset="-122"/>
                 <a:cs typeface="Microsoft YaHei" pitchFamily="34" charset="-120"/>
               </a:rPr>
-              <a:t>湖南裕能拟20亿元在湖南湘</a:t>
+              <a:t>产能扩张与跨界入场并行：天</a:t>
             </a:r>
             <a:endParaRPr lang="en-US" sz="670" dirty="0"/>
           </a:p>
@@ -14161,7 +14161,7 @@
                 <a:ea typeface="Microsoft YaHei" pitchFamily="34" charset="-122"/>
                 <a:cs typeface="Microsoft YaHei" pitchFamily="34" charset="-120"/>
               </a:rPr>
-              <a:t>供给端增量明确，若需求增速</a:t>
+              <a:t>山东65万吨磷酸铁锂项目二</a:t>
             </a:r>
             <a:endParaRPr lang="en-US" sz="670" dirty="0"/>
           </a:p>
@@ -14268,7 +14268,7 @@
                 <a:ea typeface="Microsoft YaHei" pitchFamily="34" charset="-122"/>
                 <a:cs typeface="Microsoft YaHei" pitchFamily="34" charset="-120"/>
               </a:rPr>
-              <a:t>客户与订单方面，今日无直接</a:t>
+              <a:t>判断铁锂产能仍在扩张，但高</a:t>
             </a:r>
             <a:endParaRPr lang="en-US" sz="670" dirty="0"/>
           </a:p>
@@ -14375,7 +14375,7 @@
                 <a:ea typeface="Microsoft YaHei" pitchFamily="34" charset="-122"/>
                 <a:cs typeface="Microsoft YaHei" pitchFamily="34" charset="-120"/>
               </a:rPr>
-              <a:t>湖南裕能拟20亿元在湖南湘</a:t>
+              <a:t>产能扩张与跨界入场并行：天</a:t>
             </a:r>
             <a:endParaRPr lang="en-US" sz="670" dirty="0"/>
           </a:p>
@@ -14521,7 +14521,7 @@
                 <a:ea typeface="Microsoft YaHei" pitchFamily="34" charset="-122"/>
                 <a:cs typeface="Microsoft YaHei" pitchFamily="34" charset="-120"/>
               </a:rPr>
-              <a:t>若裕能湘潭项目与万华二期在2027年如期投产，则磷酸铁锂正极名义产能进一步过剩，加工费可能维持低位</a:t>
+              <a:t>若天赐材料16万吨项目和山东65万吨项目二期在2027年如期投产且下游订单锁定充分，则高压实供给缺口可能逐步收窄，行业加工费分化加剧</a:t>
             </a:r>
             <a:endParaRPr lang="en-US" sz="1020" dirty="0"/>
           </a:p>
@@ -14670,7 +14670,7 @@
                 <a:ea typeface="Aptos" pitchFamily="34" charset="-122"/>
                 <a:cs typeface="Aptos" pitchFamily="34" charset="-120"/>
               </a:rPr>
-              <a:t>2026-10-27</a:t>
+              <a:t>2026-10-28</a:t>
             </a:r>
             <a:endParaRPr lang="en-US" sz="800" dirty="0"/>
           </a:p>
@@ -14876,7 +14876,7 @@
                 <a:ea typeface="Microsoft YaHei" pitchFamily="34" charset="-122"/>
                 <a:cs typeface="Microsoft YaHei" pitchFamily="34" charset="-120"/>
               </a:rPr>
-              <a:t>3 条公开来源交叉验证｜事实、影响与后续研判</a:t>
+              <a:t>1 条公开来源交叉验证｜事实、影响与后续研判</a:t>
             </a:r>
             <a:endParaRPr lang="en-US" sz="860" dirty="0"/>
           </a:p>
@@ -14985,7 +14985,7 @@
                 <a:ea typeface="Microsoft YaHei" pitchFamily="34" charset="-122"/>
                 <a:cs typeface="Microsoft YaHei" pitchFamily="34" charset="-120"/>
               </a:rPr>
-              <a:t>今日无直接磷酸铁锂价格报价，但政策收紧与产能扩张信号叠加，价格与盈利压力偏向下行。国内新能源车政策收紧可能削弱需求端对正极材料的拉动力，而裕能、万华扩产增加供给，供需天平向买方倾斜。回收成本上升可能进一步压缩全产业链利润。 [1][4][3]</a:t>
+              <a:t>高压实产品供需缺口对价格形成支撑：2026年高压实磷酸铁锂需求约169万吨，稳定量产供给约120万吨，缺口约49万吨；天赐材料终止三元项目转产高压实铁锂，反映企业将资本开支向盈利确定性更高的产品倾斜。判断高压实产品加工费相对普通铁锂产品有溢价，但新产能释放后溢价可能收窄，普通铁锂产品盈利压力仍存。 [1]</a:t>
             </a:r>
             <a:endParaRPr lang="en-US" sz="960" dirty="0"/>
           </a:p>
@@ -15026,7 +15026,7 @@
                 <a:ea typeface="Aptos" pitchFamily="34" charset="-122"/>
                 <a:cs typeface="Aptos" pitchFamily="34" charset="-120"/>
               </a:rPr>
-              <a:t>依据：[1][4][3]</a:t>
+              <a:t>依据：[1]</a:t>
             </a:r>
             <a:endParaRPr lang="en-US" sz="740" dirty="0"/>
           </a:p>
@@ -15135,7 +15135,7 @@
                 <a:ea typeface="Microsoft YaHei" pitchFamily="34" charset="-122"/>
                 <a:cs typeface="Microsoft YaHei" pitchFamily="34" charset="-120"/>
               </a:rPr>
-              <a:t>电子工程专辑的政策收紧判断与海融网的扩产报道形成供需两端压力：需求增速可能放缓，供给增量明确，磷酸铁锂正极加工费承压。脱保潮报道则提示电池售后与回收成本上升，可能间接影响电池厂对正极材料的采购定价。需验证碳酸锂价格走势、正极企业库存天数及电池厂压价幅度。</a:t>
+              <a:t>供需缺口数据直接指向高压实产品价格支撑，天赐材料转产决策则从企业资本配置角度印证高压实产品盈利预期优于三元项目。但公众号来源未披露高压实产品当前加工费具体水平、与普通铁锂产品的价差以及原材料碳酸锂价格波动对成本的影响。需要继续调研高压实产品月度价格走势、新进入者报价策略以及下游电芯厂对加工费上涨的接受程度，以判断盈利压力是否从普通产品向高压实产品传导。</a:t>
             </a:r>
             <a:endParaRPr lang="en-US" sz="960" dirty="0"/>
           </a:p>
@@ -15269,7 +15269,7 @@
                 <a:ea typeface="Microsoft YaHei" pitchFamily="34" charset="-122"/>
                 <a:cs typeface="Microsoft YaHei" pitchFamily="34" charset="-120"/>
               </a:rPr>
-              <a:t>若四季度新能源车销量增速放缓且正极产能利用率下降，则磷酸铁锂加工费可能进一步下探，中小厂商盈利压力加大；若碳酸锂价格企稳反弹，则正极成本支撑增强，加工费下行空间受限。跟踪指标：碳酸锂现货价、正极企业库存周转天数、电池厂采购价、行业开工率。证据边界：今日无实际成交价格数据，需以第三方报价验证。</a:t>
+              <a:t>若高压实产品供给缺口在2027年上半年维持，则具备稳定量产能力的企业加工费有望保持溢价；若新产能集中释放且下游需求增速放缓，则高压实产品溢价可能收窄，行业盈利分化加剧。跟踪指标：高压实与普通铁锂产品价差、碳酸锂现货价格、电芯厂招标报价。证据边界：当前仅有供需缺口测算，缺乏实际成交价格数据。</a:t>
             </a:r>
             <a:endParaRPr lang="en-US" sz="960" dirty="0"/>
           </a:p>
@@ -15515,7 +15515,7 @@
                 <a:ea typeface="Microsoft YaHei" pitchFamily="34" charset="-122"/>
                 <a:cs typeface="Microsoft YaHei" pitchFamily="34" charset="-120"/>
               </a:rPr>
-              <a:t>今日无直接磷酸铁锂价格报价</a:t>
+              <a:t>高压实产品供需缺口对价格形</a:t>
             </a:r>
             <a:endParaRPr lang="en-US" sz="670" dirty="0"/>
           </a:p>
@@ -15622,7 +15622,7 @@
                 <a:ea typeface="Microsoft YaHei" pitchFamily="34" charset="-122"/>
                 <a:cs typeface="Microsoft YaHei" pitchFamily="34" charset="-120"/>
               </a:rPr>
-              <a:t>国内新能源车政策收紧可能削</a:t>
+              <a:t>天赐材料终止三元项目转产高</a:t>
             </a:r>
             <a:endParaRPr lang="en-US" sz="670" dirty="0"/>
           </a:p>
@@ -15729,7 +15729,7 @@
                 <a:ea typeface="Microsoft YaHei" pitchFamily="34" charset="-122"/>
                 <a:cs typeface="Microsoft YaHei" pitchFamily="34" charset="-120"/>
               </a:rPr>
-              <a:t>回收成本上升可能进一步压缩</a:t>
+              <a:t>判断高压实产品加工费相对普</a:t>
             </a:r>
             <a:endParaRPr lang="en-US" sz="670" dirty="0"/>
           </a:p>
@@ -15836,7 +15836,7 @@
                 <a:ea typeface="Microsoft YaHei" pitchFamily="34" charset="-122"/>
                 <a:cs typeface="Microsoft YaHei" pitchFamily="34" charset="-120"/>
               </a:rPr>
-              <a:t>今日无直接磷酸铁锂价格报价</a:t>
+              <a:t>高压实产品供需缺口对价格形</a:t>
             </a:r>
             <a:endParaRPr lang="en-US" sz="670" dirty="0"/>
           </a:p>
@@ -15982,7 +15982,7 @@
                 <a:ea typeface="Microsoft YaHei" pitchFamily="34" charset="-122"/>
                 <a:cs typeface="Microsoft YaHei" pitchFamily="34" charset="-120"/>
               </a:rPr>
-              <a:t>若四季度新能源车销量增速放缓且正极产能利用率下降，则磷酸铁锂加工费可能进一步下探，中小厂商盈利压力加大</a:t>
+              <a:t>若高压实产品供给缺口在2027年上半年维持，则具备稳定量产能力的企业加工费有望保持溢价</a:t>
             </a:r>
             <a:endParaRPr lang="en-US" sz="1020" dirty="0"/>
           </a:p>
@@ -16131,7 +16131,7 @@
                 <a:ea typeface="Aptos" pitchFamily="34" charset="-122"/>
                 <a:cs typeface="Aptos" pitchFamily="34" charset="-120"/>
               </a:rPr>
-              <a:t>2026-10-27</a:t>
+              <a:t>2026-10-28</a:t>
             </a:r>
             <a:endParaRPr lang="en-US" sz="800" dirty="0"/>
           </a:p>
@@ -16337,7 +16337,7 @@
                 <a:ea typeface="Microsoft YaHei" pitchFamily="34" charset="-122"/>
                 <a:cs typeface="Microsoft YaHei" pitchFamily="34" charset="-120"/>
               </a:rPr>
-              <a:t>4 条公开来源交叉验证｜事实、影响与后续研判</a:t>
+              <a:t>3 条公开来源交叉验证｜事实、影响与后续研判</a:t>
             </a:r>
             <a:endParaRPr lang="en-US" sz="860" dirty="0"/>
           </a:p>
@@ -16446,7 +16446,7 @@
                 <a:ea typeface="Microsoft YaHei" pitchFamily="34" charset="-122"/>
                 <a:cs typeface="Microsoft YaHei" pitchFamily="34" charset="-120"/>
               </a:rPr>
-              <a:t>国内新能源车政策收紧，可能提高购车门槛或减少补贴，压制短期需求；动力电池高值化利用被定性为淘汰赛，叠加首批电车脱保潮，回收与梯次利用合规要求趋严。电池回收项目（贵州台江3万吨）推进，显示合规产能建设加速，不合规小作坊面临退出压力。 [1][2][3][7]</a:t>
+              <a:t>退役电池回收进入规范化阶段，流向管理决定资源价值；海南提出2027年新能源渗透率不低于70%、2030年拟禁售燃油车；欧洲推平价车但难脱中国电池依赖。判断回收规范化短期可能增加材料企业合规成本，但长期有利于铁锂闭环回收和资源保障；海外平价车需求对铁锂出口形成支撑，但贸易政策不确定性仍是风险。 [3][4][5]</a:t>
             </a:r>
             <a:endParaRPr lang="en-US" sz="960" dirty="0"/>
           </a:p>
@@ -16487,7 +16487,7 @@
                 <a:ea typeface="Aptos" pitchFamily="34" charset="-122"/>
                 <a:cs typeface="Aptos" pitchFamily="34" charset="-120"/>
               </a:rPr>
-              <a:t>依据：[1][2][3][7]</a:t>
+              <a:t>依据：[3][4][5]</a:t>
             </a:r>
             <a:endParaRPr lang="en-US" sz="740" dirty="0"/>
           </a:p>
@@ -16596,7 +16596,7 @@
                 <a:ea typeface="Microsoft YaHei" pitchFamily="34" charset="-122"/>
                 <a:cs typeface="Microsoft YaHei" pitchFamily="34" charset="-120"/>
               </a:rPr>
-              <a:t>电子工程专辑的政策收紧信号直接影响新能源车销量预期，进而传导至磷酸铁锂正极订单；徐盛明观点与脱保潮报道共同指向回收体系压力，可能推高电池全生命周期成本。上海有色金属报道的贵州台江回收项目表明合规回收产能正在落地，但短期难以完全消化脱保电池量。需跟踪政策细则、回收白名单扩容及环保督查力度。</a:t>
+              <a:t>回收规范化政策与海南新能源渗透率目标共同影响铁锂需求结构：回收端规范化可能提高再生材料供给的合规门槛，但长期降低对原生锂资源的依赖；海南禁售燃油车时间表则强化国内铁锂需求预期。欧洲平价车难脱中国电池依赖的报道表明海外市场对铁锂的进口需求可能持续，但需关注欧盟贸易政策变化。需要继续调研回收规范化具体实施细则、再生材料在铁锂正极中的掺混比例要求以及欧洲对中国电池的贸易政策动向。</a:t>
             </a:r>
             <a:endParaRPr lang="en-US" sz="960" dirty="0"/>
           </a:p>
@@ -16730,7 +16730,7 @@
                 <a:ea typeface="Microsoft YaHei" pitchFamily="34" charset="-122"/>
                 <a:cs typeface="Microsoft YaHei" pitchFamily="34" charset="-120"/>
               </a:rPr>
-              <a:t>若国内新能源车政策进一步收紧，则四季度磷酸铁锂需求可能不及预期，正极企业排产下调；若回收合规要求加速落地，则具备资质的回收企业可能获得原料成本优势，不合规产能出清。跟踪指标：新能源车补贴政策文件、回收白名单企业数量、环保督查通报、脱保电池流入合规渠道比例。证据边界：政策收紧的具体条款尚未公布，回收项目投产时间不确定。</a:t>
+              <a:t>若回收规范化政策在2027年全面落地并明确再生材料掺混比例，则具备回收渠道和合规能力的企业可能获得成本优势；若欧洲对中国电池贸易政策收紧，则铁锂出口需求可能承压。跟踪指标：回收政策实施细则、再生材料掺混比例要求、欧盟电池法规执行进展。证据边界：当前回收政策仅为方向性报道，缺乏具体实施细则和掺混比例数据。</a:t>
             </a:r>
             <a:endParaRPr lang="en-US" sz="960" dirty="0"/>
           </a:p>
@@ -16905,7 +16905,7 @@
                 <a:ea typeface="Microsoft YaHei" pitchFamily="34" charset="-122"/>
                 <a:cs typeface="Microsoft YaHei" pitchFamily="34" charset="-120"/>
               </a:rPr>
-              <a:t>国内新能源车政策收紧，可能提高购车</a:t>
+              <a:t>退役电池回收进入规范化阶段，流向管</a:t>
             </a:r>
             <a:endParaRPr lang="en-US" sz="660" dirty="0"/>
           </a:p>
@@ -17012,7 +17012,7 @@
                 <a:ea typeface="Microsoft YaHei" pitchFamily="34" charset="-122"/>
                 <a:cs typeface="Microsoft YaHei" pitchFamily="34" charset="-120"/>
               </a:rPr>
-              <a:t>动力电池高值化利用被定性为淘汰赛，</a:t>
+              <a:t>海南提出2027年新能源渗透率不低</a:t>
             </a:r>
             <a:endParaRPr lang="en-US" sz="660" dirty="0"/>
           </a:p>
@@ -17119,7 +17119,7 @@
                 <a:ea typeface="Microsoft YaHei" pitchFamily="34" charset="-122"/>
                 <a:cs typeface="Microsoft YaHei" pitchFamily="34" charset="-120"/>
               </a:rPr>
-              <a:t>电池回收项目（贵州台江3万吨）推进</a:t>
+              <a:t>欧洲推平价车但难脱中国电池依赖</a:t>
             </a:r>
             <a:endParaRPr lang="en-US" sz="660" dirty="0"/>
           </a:p>
@@ -17224,7 +17224,7 @@
                 <a:ea typeface="Microsoft YaHei" pitchFamily="34" charset="-122"/>
                 <a:cs typeface="Microsoft YaHei" pitchFamily="34" charset="-120"/>
               </a:rPr>
-              <a:t>若国内新能源车政策进一步收紧，则四季度磷酸铁锂需求可能不及预期，正极企业排产下调</a:t>
+              <a:t>若回收规范化政策在2027年全面落地并明确再生材料掺混比例，则具备回收渠道和合规能力的企业可能获得成本优势</a:t>
             </a:r>
             <a:endParaRPr lang="en-US" sz="1020" dirty="0"/>
           </a:p>
@@ -17373,7 +17373,7 @@
                 <a:ea typeface="Aptos" pitchFamily="34" charset="-122"/>
                 <a:cs typeface="Aptos" pitchFamily="34" charset="-120"/>
               </a:rPr>
-              <a:t>2026-10-27</a:t>
+              <a:t>2026-10-28</a:t>
             </a:r>
             <a:endParaRPr lang="en-US" sz="800" dirty="0"/>
           </a:p>
@@ -17688,7 +17688,7 @@
                 <a:ea typeface="Microsoft YaHei" pitchFamily="34" charset="-122"/>
                 <a:cs typeface="Microsoft YaHei" pitchFamily="34" charset="-120"/>
               </a:rPr>
-              <a:t>零跑与海泰科服投资企业合作攻坚前沿电池技术，可能指向非磷酸铁锂路线，构成潜在竞品威胁；但技术细节未披露，短期对磷酸铁锂份额影响有限。激光精焊技术作为制造工艺改进，对磷酸铁锂安全性能有正面作用，不构成路线替代。 [5][6]</a:t>
+              <a:t>三元头部企业容百科技、当升科技跨界进入高压实磷酸铁锂，天赐材料终止三元项目转产铁锂，反映三元路线在铁锂成本优势下的竞争力相对弱化；同时固态电池等新技术路线仍在推进，但短期对铁锂的替代威胁有限。判断铁锂在动力和储能市场的主流地位稳固，但三元企业跨界将加剧高压实产品竞争。 [1][6]</a:t>
             </a:r>
             <a:endParaRPr lang="en-US" sz="960" dirty="0"/>
           </a:p>
@@ -17729,7 +17729,7 @@
                 <a:ea typeface="Aptos" pitchFamily="34" charset="-122"/>
                 <a:cs typeface="Aptos" pitchFamily="34" charset="-120"/>
               </a:rPr>
-              <a:t>依据：[5][6]</a:t>
+              <a:t>依据：[1][6]</a:t>
             </a:r>
             <a:endParaRPr lang="en-US" sz="740" dirty="0"/>
           </a:p>
@@ -17838,7 +17838,7 @@
                 <a:ea typeface="Microsoft YaHei" pitchFamily="34" charset="-122"/>
                 <a:cs typeface="Microsoft YaHei" pitchFamily="34" charset="-120"/>
               </a:rPr>
-              <a:t>碳索储能网报道的零跑合作若涉及固态电池或高镍三元，则在中长期可能分流磷酸铁锂在高端车型的应用；但当前磷酸铁锂凭借成本与安全优势，在中低端车型和储能领域仍占主导。搜狐网报道的激光精焊属于电池制造环节，可提升磷酸铁锂电池良率与安全性，反而增强其竞争力。需确认零跑合作的技术路线及量产节点。</a:t>
+              <a:t>容百科技、当升科技跨界和天赐材料转产共同表明三元路线对铁锂的竞争压力加大，三元企业试图通过铁锂产品线弥补市场份额。固态电池报道显示新技术路线仍在研发推进，但公众号来源未披露固态电池量产时间表和成本数据，短期难以对铁锂形成实质替代。需要继续调研跨界企业在铁锂领域的研发投入和客户拓展进度，以及固态电池中试线进展和成本下降路径。</a:t>
             </a:r>
             <a:endParaRPr lang="en-US" sz="960" dirty="0"/>
           </a:p>
@@ -17972,7 +17972,7 @@
                 <a:ea typeface="Microsoft YaHei" pitchFamily="34" charset="-122"/>
                 <a:cs typeface="Microsoft YaHei" pitchFamily="34" charset="-120"/>
               </a:rPr>
-              <a:t>若零跑合作技术路线确认为非磷酸铁锂且计划2027年量产，则磷酸铁锂在零跑车型中的份额可能下降；若该技术仍处于早期研发阶段，则短期影响可忽略。跟踪指标：零跑电池供应商名单、新车型电池类型公告、固态电池量产时间表。证据边界：合作技术方向未公开，量产时间不确定。</a:t>
+              <a:t>若容百科技、当升科技在2027年实现高压实铁锂批量供货并锁定下游客户，则高压实产品竞争加剧，原有企业份额可能被分流；若固态电池中试线在2027年取得成本突破，则铁锂长期需求预期可能边际下修。跟踪指标：跨界企业铁锂出货量、固态电池中试线进展、电芯厂技术路线选择公告。证据边界：当前跨界企业铁锂产品尚无量产数据，固态电池报道缺乏具体量产时间表。</a:t>
             </a:r>
             <a:endParaRPr lang="en-US" sz="960" dirty="0"/>
           </a:p>
@@ -18218,7 +18218,7 @@
                 <a:ea typeface="Microsoft YaHei" pitchFamily="34" charset="-122"/>
                 <a:cs typeface="Microsoft YaHei" pitchFamily="34" charset="-120"/>
               </a:rPr>
-              <a:t>零跑与海泰科服投资企业合作</a:t>
+              <a:t>三元头部企业容百科技、当升</a:t>
             </a:r>
             <a:endParaRPr lang="en-US" sz="670" dirty="0"/>
           </a:p>
@@ -18325,7 +18325,7 @@
                 <a:ea typeface="Microsoft YaHei" pitchFamily="34" charset="-122"/>
                 <a:cs typeface="Microsoft YaHei" pitchFamily="34" charset="-120"/>
               </a:rPr>
-              <a:t>但技术细节未披露，短期对磷</a:t>
+              <a:t>同时固态电池等新技术路线仍</a:t>
             </a:r>
             <a:endParaRPr lang="en-US" sz="670" dirty="0"/>
           </a:p>
@@ -18432,7 +18432,7 @@
                 <a:ea typeface="Microsoft YaHei" pitchFamily="34" charset="-122"/>
                 <a:cs typeface="Microsoft YaHei" pitchFamily="34" charset="-120"/>
               </a:rPr>
-              <a:t>激光精焊技术作为制造工艺改</a:t>
+              <a:t>判断铁锂在动力和储能市场的</a:t>
             </a:r>
             <a:endParaRPr lang="en-US" sz="670" dirty="0"/>
           </a:p>
@@ -18539,7 +18539,7 @@
                 <a:ea typeface="Microsoft YaHei" pitchFamily="34" charset="-122"/>
                 <a:cs typeface="Microsoft YaHei" pitchFamily="34" charset="-120"/>
               </a:rPr>
-              <a:t>零跑与海泰科服投资企业合作</a:t>
+              <a:t>三元头部企业容百科技、当升</a:t>
             </a:r>
             <a:endParaRPr lang="en-US" sz="670" dirty="0"/>
           </a:p>
@@ -18685,7 +18685,7 @@
                 <a:ea typeface="Microsoft YaHei" pitchFamily="34" charset="-122"/>
                 <a:cs typeface="Microsoft YaHei" pitchFamily="34" charset="-120"/>
               </a:rPr>
-              <a:t>若零跑合作技术路线确认为非磷酸铁锂且计划2027年量产，则磷酸铁锂在零跑车型中的份额可能下降</a:t>
+              <a:t>若容百科技、当升科技在2027年实现高压实铁锂批量供货并锁定下游客户，则高压实产品竞争加剧，原有企业份额可能被分流</a:t>
             </a:r>
             <a:endParaRPr lang="en-US" sz="1020" dirty="0"/>
           </a:p>
@@ -18834,7 +18834,7 @@
                 <a:ea typeface="Aptos" pitchFamily="34" charset="-122"/>
                 <a:cs typeface="Aptos" pitchFamily="34" charset="-120"/>
               </a:rPr>
-              <a:t>2026-10-27</a:t>
+              <a:t>2026-10-28</a:t>
             </a:r>
             <a:endParaRPr lang="en-US" sz="800" dirty="0"/>
           </a:p>
@@ -19040,7 +19040,7 @@
                 <a:ea typeface="Microsoft YaHei" pitchFamily="34" charset="-122"/>
                 <a:cs typeface="Microsoft YaHei" pitchFamily="34" charset="-120"/>
               </a:rPr>
-              <a:t>4 条公开来源交叉验证｜事实、影响与后续研判</a:t>
+              <a:t>3 条公开来源交叉验证｜事实、影响与后续研判</a:t>
             </a:r>
             <a:endParaRPr lang="en-US" sz="860" dirty="0"/>
           </a:p>
@@ -19149,7 +19149,7 @@
                 <a:ea typeface="Microsoft YaHei" pitchFamily="34" charset="-122"/>
                 <a:cs typeface="Microsoft YaHei" pitchFamily="34" charset="-120"/>
               </a:rPr>
-              <a:t>风险：国内政策收紧压制需求、产能扩张加剧供给过剩、回收合规成本上升。机会：头部企业扩产巩固成本优势、合规回收产能稀缺性凸显、激光精焊等工艺改进提升磷酸铁锂安全竞争力。观察：政策细则、项目投产进度、碳酸锂价格、零跑技术路线。 [1][4][7][5]</a:t>
+              <a:t>机会在于高压实产品供需缺口和海外平价车需求对铁锂的支撑；风险在于新产能集中释放后高压实溢价收窄、回收规范化增加合规成本、欧洲贸易政策不确定性；观察点是天赐材料16万吨项目客户认证进度、山东65万吨项目二期投产节点、回收政策实施细则。判断短期高压实景气延续，中期需警惕产能扩张与需求增速的匹配度。 [1][3][5]</a:t>
             </a:r>
             <a:endParaRPr lang="en-US" sz="960" dirty="0"/>
           </a:p>
@@ -19190,7 +19190,7 @@
                 <a:ea typeface="Aptos" pitchFamily="34" charset="-122"/>
                 <a:cs typeface="Aptos" pitchFamily="34" charset="-120"/>
               </a:rPr>
-              <a:t>依据：[1][4][7][5]</a:t>
+              <a:t>依据：[1][3][5]</a:t>
             </a:r>
             <a:endParaRPr lang="en-US" sz="740" dirty="0"/>
           </a:p>
@@ -19299,7 +19299,7 @@
                 <a:ea typeface="Microsoft YaHei" pitchFamily="34" charset="-122"/>
                 <a:cs typeface="Microsoft YaHei" pitchFamily="34" charset="-120"/>
               </a:rPr>
-              <a:t>综合今日信息，政策与供给两端压力并存，需求端不确定性增加，行业盈利修复需依赖成本下行或需求超预期。裕能、万华扩产显示头部企业对中期需求有信心，但中小厂商面临更大竞争压力。回收领域合规产能建设加速，可能形成新的进入壁垒。需持续跟踪政策落地节奏与项目投产验证。</a:t>
+              <a:t>高压实缺口和海外需求构成短期机会，但天赐材料转产、三元企业跨界和山东项目开工共同指向供给端加速扩张，若需求增速不及预期，高压实产品也可能面临溢价收窄压力。回收规范化和欧洲贸易政策则从合规和出口两端增加不确定性。需要继续调研高压实产品月度供需平衡表、新产能投产节奏与下游电芯厂扩产计划的匹配度，以及回收政策对材料成本的具体影响路径。</a:t>
             </a:r>
             <a:endParaRPr lang="en-US" sz="960" dirty="0"/>
           </a:p>
@@ -19433,7 +19433,7 @@
                 <a:ea typeface="Microsoft YaHei" pitchFamily="34" charset="-122"/>
                 <a:cs typeface="Microsoft YaHei" pitchFamily="34" charset="-120"/>
               </a:rPr>
-              <a:t>若政策收紧与产能扩张同时兑现，则磷酸铁锂行业加工费可能进一步下行，中小厂商退出风险上升；若回收合规政策超预期，则具备回收资质的企业可能获得估值溢价。跟踪指标：新能源车月度销量、正极开工率、碳酸锂价格、回收白名单扩容、零跑技术路线公告。证据边界：政策细则与项目投产时间尚未明确，需以官方公告验证。</a:t>
+              <a:t>若2027年上半年高压实新产能投产进度快于需求增速，则高压实产品溢价可能收窄，行业盈利分化加剧；若回收政策实施细则明确再生材料掺混比例且欧洲贸易政策保持稳定，则铁锂成本优势和出口需求有望延续。跟踪指标：高压实月度供需平衡、新产能投产公告、回收政策实施细则、欧盟电池法规执行进展。证据边界：当前供需缺口为年度测算，缺乏月度高频数据；回收政策仅为方向性报道。</a:t>
             </a:r>
             <a:endParaRPr lang="en-US" sz="960" dirty="0"/>
           </a:p>
@@ -19501,7 +19501,7 @@
                 <a:ea typeface="Microsoft YaHei" pitchFamily="34" charset="-122"/>
                 <a:cs typeface="Microsoft YaHei" pitchFamily="34" charset="-120"/>
               </a:rPr>
-              <a:t>路线图</a:t>
+              <a:t>对比矩阵</a:t>
             </a:r>
             <a:endParaRPr lang="en-US" sz="1200" dirty="0"/>
           </a:p>
@@ -19515,18 +19515,89 @@
         </p:nvSpPr>
         <p:spPr>
           <a:xfrm>
-            <a:off x="7754112" y="2249424"/>
-            <a:ext cx="612648" cy="402336"/>
-          </a:xfrm>
-          <a:prstGeom prst="chevron">
+            <a:off x="7818120" y="2176272"/>
+            <a:ext cx="2487168" cy="1609344"/>
+          </a:xfrm>
+          <a:prstGeom prst="rect">
+            <a:avLst/>
+          </a:prstGeom>
+          <a:solidFill>
+            <a:srgbClr val="FFFFFF"/>
+          </a:solidFill>
+          <a:ln w="10160">
+            <a:solidFill>
+              <a:srgbClr val="DADADA"/>
+            </a:solidFill>
+            <a:prstDash val="solid"/>
+          </a:ln>
+        </p:spPr>
+      </p:sp>
+      <p:sp>
+        <p:nvSpPr>
+          <p:cNvPr id="25" name="Shape 23"/>
+          <p:cNvSpPr/>
+          <p:nvPr/>
+        </p:nvSpPr>
+        <p:spPr>
+          <a:xfrm>
+            <a:off x="9061704" y="2176272"/>
+            <a:ext cx="0" cy="1609344"/>
+          </a:xfrm>
+          <a:prstGeom prst="line">
+            <a:avLst/>
+          </a:prstGeom>
+          <a:noFill/>
+          <a:ln w="8890">
+            <a:solidFill>
+              <a:srgbClr val="DADADA"/>
+            </a:solidFill>
+            <a:prstDash val="solid"/>
+          </a:ln>
+        </p:spPr>
+      </p:sp>
+      <p:sp>
+        <p:nvSpPr>
+          <p:cNvPr id="26" name="Shape 24"/>
+          <p:cNvSpPr/>
+          <p:nvPr/>
+        </p:nvSpPr>
+        <p:spPr>
+          <a:xfrm>
+            <a:off x="7818120" y="2980944"/>
+            <a:ext cx="2487168" cy="0"/>
+          </a:xfrm>
+          <a:prstGeom prst="line">
+            <a:avLst/>
+          </a:prstGeom>
+          <a:noFill/>
+          <a:ln w="8890">
+            <a:solidFill>
+              <a:srgbClr val="DADADA"/>
+            </a:solidFill>
+            <a:prstDash val="solid"/>
+          </a:ln>
+        </p:spPr>
+      </p:sp>
+      <p:sp>
+        <p:nvSpPr>
+          <p:cNvPr id="27" name="Shape 25"/>
+          <p:cNvSpPr/>
+          <p:nvPr/>
+        </p:nvSpPr>
+        <p:spPr>
+          <a:xfrm>
+            <a:off x="7818120" y="2176272"/>
+            <a:ext cx="1243584" cy="804672"/>
+          </a:xfrm>
+          <a:prstGeom prst="rect">
             <a:avLst/>
           </a:prstGeom>
           <a:solidFill>
             <a:srgbClr val="DDEBE0"/>
           </a:solidFill>
-          <a:ln w="13970">
+          <a:ln w="3810">
             <a:solidFill>
-              <a:srgbClr val="487052"/>
+              <a:srgbClr val="DADADA"/>
             </a:solidFill>
             <a:prstDash val="solid"/>
           </a:ln>
@@ -19534,14 +19605,14 @@
       </p:sp>
       <p:sp>
         <p:nvSpPr>
-          <p:cNvPr id="25" name="Text 23"/>
-          <p:cNvSpPr/>
-          <p:nvPr/>
-        </p:nvSpPr>
-        <p:spPr>
-          <a:xfrm>
-            <a:off x="7827264" y="2386584"/>
-            <a:ext cx="448056" cy="109728"/>
+          <p:cNvPr id="28" name="Text 26"/>
+          <p:cNvSpPr/>
+          <p:nvPr/>
+        </p:nvSpPr>
+        <p:spPr>
+          <a:xfrm>
+            <a:off x="7891272" y="2286000"/>
+            <a:ext cx="438912" cy="109728"/>
           </a:xfrm>
           <a:prstGeom prst="rect">
             <a:avLst/>
@@ -19555,11 +19626,52 @@
           </a:bodyPr>
           <a:lstStyle/>
           <a:p>
-            <a:pPr algn="ctr" indent="0" marL="0">
-              <a:buNone/>
-            </a:pPr>
-            <a:r>
-              <a:rPr lang="en-US" sz="670" b="1" dirty="0">
+            <a:pPr indent="0" marL="0">
+              <a:buNone/>
+            </a:pPr>
+            <a:r>
+              <a:rPr lang="en-US" sz="710" b="1" dirty="0">
+                <a:solidFill>
+                  <a:srgbClr val="487052"/>
+                </a:solidFill>
+                <a:latin typeface="Microsoft YaHei" pitchFamily="34" charset="0"/>
+                <a:ea typeface="Microsoft YaHei" pitchFamily="34" charset="-122"/>
+                <a:cs typeface="Microsoft YaHei" pitchFamily="34" charset="-120"/>
+              </a:rPr>
+              <a:t>路线A</a:t>
+            </a:r>
+            <a:endParaRPr lang="en-US" sz="710" dirty="0"/>
+          </a:p>
+        </p:txBody>
+      </p:sp>
+      <p:sp>
+        <p:nvSpPr>
+          <p:cNvPr id="29" name="Text 27"/>
+          <p:cNvSpPr/>
+          <p:nvPr/>
+        </p:nvSpPr>
+        <p:spPr>
+          <a:xfrm>
+            <a:off x="7891272" y="2505456"/>
+            <a:ext cx="1024128" cy="201168"/>
+          </a:xfrm>
+          <a:prstGeom prst="rect">
+            <a:avLst/>
+          </a:prstGeom>
+          <a:noFill/>
+          <a:ln/>
+        </p:spPr>
+        <p:txBody>
+          <a:bodyPr wrap="square" lIns="0" tIns="0" rIns="0" bIns="0" rtlCol="0" anchor="t">
+            <a:normAutofit/>
+          </a:bodyPr>
+          <a:lstStyle/>
+          <a:p>
+            <a:pPr indent="0" marL="0">
+              <a:buNone/>
+            </a:pPr>
+            <a:r>
+              <a:rPr lang="en-US" sz="670" dirty="0">
                 <a:solidFill>
                   <a:srgbClr val="121212"/>
                 </a:solidFill>
@@ -19567,7 +19679,7 @@
                 <a:ea typeface="Microsoft YaHei" pitchFamily="34" charset="-122"/>
                 <a:cs typeface="Microsoft YaHei" pitchFamily="34" charset="-120"/>
               </a:rPr>
-              <a:t>技术</a:t>
+              <a:t>机会在于高压实产品供需缺口</a:t>
             </a:r>
             <a:endParaRPr lang="en-US" sz="670" dirty="0"/>
           </a:p>
@@ -19575,24 +19687,24 @@
       </p:sp>
       <p:sp>
         <p:nvSpPr>
-          <p:cNvPr id="26" name="Shape 24"/>
-          <p:cNvSpPr/>
-          <p:nvPr/>
-        </p:nvSpPr>
-        <p:spPr>
-          <a:xfrm>
-            <a:off x="8375904" y="2249424"/>
-            <a:ext cx="612648" cy="402336"/>
-          </a:xfrm>
-          <a:prstGeom prst="chevron">
+          <p:cNvPr id="30" name="Shape 28"/>
+          <p:cNvSpPr/>
+          <p:nvPr/>
+        </p:nvSpPr>
+        <p:spPr>
+          <a:xfrm>
+            <a:off x="9061704" y="2176272"/>
+            <a:ext cx="1243584" cy="804672"/>
+          </a:xfrm>
+          <a:prstGeom prst="rect">
             <a:avLst/>
           </a:prstGeom>
           <a:solidFill>
             <a:srgbClr val="FFFFFF"/>
           </a:solidFill>
-          <a:ln w="13970">
+          <a:ln w="3810">
             <a:solidFill>
-              <a:srgbClr val="487052"/>
+              <a:srgbClr val="DADADA"/>
             </a:solidFill>
             <a:prstDash val="solid"/>
           </a:ln>
@@ -19600,14 +19712,14 @@
       </p:sp>
       <p:sp>
         <p:nvSpPr>
-          <p:cNvPr id="27" name="Text 25"/>
-          <p:cNvSpPr/>
-          <p:nvPr/>
-        </p:nvSpPr>
-        <p:spPr>
-          <a:xfrm>
-            <a:off x="8449056" y="2386584"/>
-            <a:ext cx="448056" cy="109728"/>
+          <p:cNvPr id="31" name="Text 29"/>
+          <p:cNvSpPr/>
+          <p:nvPr/>
+        </p:nvSpPr>
+        <p:spPr>
+          <a:xfrm>
+            <a:off x="9134856" y="2286000"/>
+            <a:ext cx="438912" cy="109728"/>
           </a:xfrm>
           <a:prstGeom prst="rect">
             <a:avLst/>
@@ -19621,11 +19733,52 @@
           </a:bodyPr>
           <a:lstStyle/>
           <a:p>
-            <a:pPr algn="ctr" indent="0" marL="0">
-              <a:buNone/>
-            </a:pPr>
-            <a:r>
-              <a:rPr lang="en-US" sz="670" b="1" dirty="0">
+            <a:pPr indent="0" marL="0">
+              <a:buNone/>
+            </a:pPr>
+            <a:r>
+              <a:rPr lang="en-US" sz="710" b="1" dirty="0">
+                <a:solidFill>
+                  <a:srgbClr val="487052"/>
+                </a:solidFill>
+                <a:latin typeface="Microsoft YaHei" pitchFamily="34" charset="0"/>
+                <a:ea typeface="Microsoft YaHei" pitchFamily="34" charset="-122"/>
+                <a:cs typeface="Microsoft YaHei" pitchFamily="34" charset="-120"/>
+              </a:rPr>
+              <a:t>路线B</a:t>
+            </a:r>
+            <a:endParaRPr lang="en-US" sz="710" dirty="0"/>
+          </a:p>
+        </p:txBody>
+      </p:sp>
+      <p:sp>
+        <p:nvSpPr>
+          <p:cNvPr id="32" name="Text 30"/>
+          <p:cNvSpPr/>
+          <p:nvPr/>
+        </p:nvSpPr>
+        <p:spPr>
+          <a:xfrm>
+            <a:off x="9134856" y="2505456"/>
+            <a:ext cx="1024128" cy="201168"/>
+          </a:xfrm>
+          <a:prstGeom prst="rect">
+            <a:avLst/>
+          </a:prstGeom>
+          <a:noFill/>
+          <a:ln/>
+        </p:spPr>
+        <p:txBody>
+          <a:bodyPr wrap="square" lIns="0" tIns="0" rIns="0" bIns="0" rtlCol="0" anchor="t">
+            <a:normAutofit/>
+          </a:bodyPr>
+          <a:lstStyle/>
+          <a:p>
+            <a:pPr indent="0" marL="0">
+              <a:buNone/>
+            </a:pPr>
+            <a:r>
+              <a:rPr lang="en-US" sz="670" dirty="0">
                 <a:solidFill>
                   <a:srgbClr val="121212"/>
                 </a:solidFill>
@@ -19633,7 +19786,7 @@
                 <a:ea typeface="Microsoft YaHei" pitchFamily="34" charset="-122"/>
                 <a:cs typeface="Microsoft YaHei" pitchFamily="34" charset="-120"/>
               </a:rPr>
-              <a:t>产品</a:t>
+              <a:t>风险在于新产能集中释放后高</a:t>
             </a:r>
             <a:endParaRPr lang="en-US" sz="670" dirty="0"/>
           </a:p>
@@ -19641,24 +19794,24 @@
       </p:sp>
       <p:sp>
         <p:nvSpPr>
-          <p:cNvPr id="28" name="Shape 26"/>
-          <p:cNvSpPr/>
-          <p:nvPr/>
-        </p:nvSpPr>
-        <p:spPr>
-          <a:xfrm>
-            <a:off x="8997696" y="2249424"/>
-            <a:ext cx="612648" cy="402336"/>
-          </a:xfrm>
-          <a:prstGeom prst="chevron">
+          <p:cNvPr id="33" name="Shape 31"/>
+          <p:cNvSpPr/>
+          <p:nvPr/>
+        </p:nvSpPr>
+        <p:spPr>
+          <a:xfrm>
+            <a:off x="7818120" y="2980944"/>
+            <a:ext cx="1243584" cy="804672"/>
+          </a:xfrm>
+          <a:prstGeom prst="rect">
             <a:avLst/>
           </a:prstGeom>
           <a:solidFill>
             <a:srgbClr val="FFFFFF"/>
           </a:solidFill>
-          <a:ln w="13970">
+          <a:ln w="3810">
             <a:solidFill>
-              <a:srgbClr val="487052"/>
+              <a:srgbClr val="DADADA"/>
             </a:solidFill>
             <a:prstDash val="solid"/>
           </a:ln>
@@ -19666,14 +19819,14 @@
       </p:sp>
       <p:sp>
         <p:nvSpPr>
-          <p:cNvPr id="29" name="Text 27"/>
-          <p:cNvSpPr/>
-          <p:nvPr/>
-        </p:nvSpPr>
-        <p:spPr>
-          <a:xfrm>
-            <a:off x="9070848" y="2386584"/>
-            <a:ext cx="448056" cy="109728"/>
+          <p:cNvPr id="34" name="Text 32"/>
+          <p:cNvSpPr/>
+          <p:nvPr/>
+        </p:nvSpPr>
+        <p:spPr>
+          <a:xfrm>
+            <a:off x="7891272" y="3090672"/>
+            <a:ext cx="438912" cy="109728"/>
           </a:xfrm>
           <a:prstGeom prst="rect">
             <a:avLst/>
@@ -19687,11 +19840,52 @@
           </a:bodyPr>
           <a:lstStyle/>
           <a:p>
-            <a:pPr algn="ctr" indent="0" marL="0">
-              <a:buNone/>
-            </a:pPr>
-            <a:r>
-              <a:rPr lang="en-US" sz="670" b="1" dirty="0">
+            <a:pPr indent="0" marL="0">
+              <a:buNone/>
+            </a:pPr>
+            <a:r>
+              <a:rPr lang="en-US" sz="710" b="1" dirty="0">
+                <a:solidFill>
+                  <a:srgbClr val="487052"/>
+                </a:solidFill>
+                <a:latin typeface="Microsoft YaHei" pitchFamily="34" charset="0"/>
+                <a:ea typeface="Microsoft YaHei" pitchFamily="34" charset="-122"/>
+                <a:cs typeface="Microsoft YaHei" pitchFamily="34" charset="-120"/>
+              </a:rPr>
+              <a:t>机会</a:t>
+            </a:r>
+            <a:endParaRPr lang="en-US" sz="710" dirty="0"/>
+          </a:p>
+        </p:txBody>
+      </p:sp>
+      <p:sp>
+        <p:nvSpPr>
+          <p:cNvPr id="35" name="Text 33"/>
+          <p:cNvSpPr/>
+          <p:nvPr/>
+        </p:nvSpPr>
+        <p:spPr>
+          <a:xfrm>
+            <a:off x="7891272" y="3310128"/>
+            <a:ext cx="1024128" cy="201168"/>
+          </a:xfrm>
+          <a:prstGeom prst="rect">
+            <a:avLst/>
+          </a:prstGeom>
+          <a:noFill/>
+          <a:ln/>
+        </p:spPr>
+        <p:txBody>
+          <a:bodyPr wrap="square" lIns="0" tIns="0" rIns="0" bIns="0" rtlCol="0" anchor="t">
+            <a:normAutofit/>
+          </a:bodyPr>
+          <a:lstStyle/>
+          <a:p>
+            <a:pPr indent="0" marL="0">
+              <a:buNone/>
+            </a:pPr>
+            <a:r>
+              <a:rPr lang="en-US" sz="670" dirty="0">
                 <a:solidFill>
                   <a:srgbClr val="121212"/>
                 </a:solidFill>
@@ -19699,7 +19893,7 @@
                 <a:ea typeface="Microsoft YaHei" pitchFamily="34" charset="-122"/>
                 <a:cs typeface="Microsoft YaHei" pitchFamily="34" charset="-120"/>
               </a:rPr>
-              <a:t>验证</a:t>
+              <a:t>观察点是天赐材料16万吨项</a:t>
             </a:r>
             <a:endParaRPr lang="en-US" sz="670" dirty="0"/>
           </a:p>
@@ -19707,24 +19901,24 @@
       </p:sp>
       <p:sp>
         <p:nvSpPr>
-          <p:cNvPr id="30" name="Shape 28"/>
-          <p:cNvSpPr/>
-          <p:nvPr/>
-        </p:nvSpPr>
-        <p:spPr>
-          <a:xfrm>
-            <a:off x="9619488" y="2249424"/>
-            <a:ext cx="612648" cy="402336"/>
-          </a:xfrm>
-          <a:prstGeom prst="chevron">
+          <p:cNvPr id="36" name="Shape 34"/>
+          <p:cNvSpPr/>
+          <p:nvPr/>
+        </p:nvSpPr>
+        <p:spPr>
+          <a:xfrm>
+            <a:off x="9061704" y="2980944"/>
+            <a:ext cx="1243584" cy="804672"/>
+          </a:xfrm>
+          <a:prstGeom prst="rect">
             <a:avLst/>
           </a:prstGeom>
           <a:solidFill>
-            <a:srgbClr val="FFFFFF"/>
+            <a:srgbClr val="F4FAF6"/>
           </a:solidFill>
-          <a:ln w="13970">
+          <a:ln w="3810">
             <a:solidFill>
-              <a:srgbClr val="487052"/>
+              <a:srgbClr val="DADADA"/>
             </a:solidFill>
             <a:prstDash val="solid"/>
           </a:ln>
@@ -19732,14 +19926,14 @@
       </p:sp>
       <p:sp>
         <p:nvSpPr>
-          <p:cNvPr id="31" name="Text 29"/>
-          <p:cNvSpPr/>
-          <p:nvPr/>
-        </p:nvSpPr>
-        <p:spPr>
-          <a:xfrm>
-            <a:off x="9692640" y="2386584"/>
-            <a:ext cx="448056" cy="109728"/>
+          <p:cNvPr id="37" name="Text 35"/>
+          <p:cNvSpPr/>
+          <p:nvPr/>
+        </p:nvSpPr>
+        <p:spPr>
+          <a:xfrm>
+            <a:off x="9134856" y="3090672"/>
+            <a:ext cx="438912" cy="109728"/>
           </a:xfrm>
           <a:prstGeom prst="rect">
             <a:avLst/>
@@ -19753,11 +19947,52 @@
           </a:bodyPr>
           <a:lstStyle/>
           <a:p>
-            <a:pPr algn="ctr" indent="0" marL="0">
-              <a:buNone/>
-            </a:pPr>
-            <a:r>
-              <a:rPr lang="en-US" sz="670" b="1" dirty="0">
+            <a:pPr indent="0" marL="0">
+              <a:buNone/>
+            </a:pPr>
+            <a:r>
+              <a:rPr lang="en-US" sz="710" b="1" dirty="0">
+                <a:solidFill>
+                  <a:srgbClr val="487052"/>
+                </a:solidFill>
+                <a:latin typeface="Microsoft YaHei" pitchFamily="34" charset="0"/>
+                <a:ea typeface="Microsoft YaHei" pitchFamily="34" charset="-122"/>
+                <a:cs typeface="Microsoft YaHei" pitchFamily="34" charset="-120"/>
+              </a:rPr>
+              <a:t>约束</a:t>
+            </a:r>
+            <a:endParaRPr lang="en-US" sz="710" dirty="0"/>
+          </a:p>
+        </p:txBody>
+      </p:sp>
+      <p:sp>
+        <p:nvSpPr>
+          <p:cNvPr id="38" name="Text 36"/>
+          <p:cNvSpPr/>
+          <p:nvPr/>
+        </p:nvSpPr>
+        <p:spPr>
+          <a:xfrm>
+            <a:off x="9134856" y="3310128"/>
+            <a:ext cx="1024128" cy="201168"/>
+          </a:xfrm>
+          <a:prstGeom prst="rect">
+            <a:avLst/>
+          </a:prstGeom>
+          <a:noFill/>
+          <a:ln/>
+        </p:spPr>
+        <p:txBody>
+          <a:bodyPr wrap="square" lIns="0" tIns="0" rIns="0" bIns="0" rtlCol="0" anchor="t">
+            <a:normAutofit/>
+          </a:bodyPr>
+          <a:lstStyle/>
+          <a:p>
+            <a:pPr indent="0" marL="0">
+              <a:buNone/>
+            </a:pPr>
+            <a:r>
+              <a:rPr lang="en-US" sz="670" dirty="0">
                 <a:solidFill>
                   <a:srgbClr val="121212"/>
                 </a:solidFill>
@@ -19765,7 +20000,7 @@
                 <a:ea typeface="Microsoft YaHei" pitchFamily="34" charset="-122"/>
                 <a:cs typeface="Microsoft YaHei" pitchFamily="34" charset="-120"/>
               </a:rPr>
-              <a:t>量产</a:t>
+              <a:t>机会在于高压实产品供需缺口</a:t>
             </a:r>
             <a:endParaRPr lang="en-US" sz="670" dirty="0"/>
           </a:p>
@@ -19773,62 +20008,14 @@
       </p:sp>
       <p:sp>
         <p:nvSpPr>
-          <p:cNvPr id="32" name="Shape 30"/>
-          <p:cNvSpPr/>
-          <p:nvPr/>
-        </p:nvSpPr>
-        <p:spPr>
-          <a:xfrm>
-            <a:off x="7882128" y="3063240"/>
-            <a:ext cx="2331720" cy="0"/>
-          </a:xfrm>
-          <a:prstGeom prst="line">
-            <a:avLst/>
-          </a:prstGeom>
-          <a:noFill/>
-          <a:ln w="13970">
-            <a:solidFill>
-              <a:srgbClr val="7F9D84"/>
-            </a:solidFill>
-            <a:prstDash val="solid"/>
-          </a:ln>
-        </p:spPr>
-      </p:sp>
-      <p:sp>
-        <p:nvSpPr>
-          <p:cNvPr id="33" name="Shape 31"/>
-          <p:cNvSpPr/>
-          <p:nvPr/>
-        </p:nvSpPr>
-        <p:spPr>
-          <a:xfrm>
-            <a:off x="7845552" y="2962656"/>
-            <a:ext cx="164592" cy="164592"/>
-          </a:xfrm>
-          <a:prstGeom prst="ellipse">
-            <a:avLst/>
-          </a:prstGeom>
-          <a:solidFill>
-            <a:srgbClr val="487052"/>
-          </a:solidFill>
-          <a:ln w="12700">
-            <a:solidFill>
-              <a:srgbClr val="FFFFFF"/>
-            </a:solidFill>
-            <a:prstDash val="solid"/>
-          </a:ln>
-        </p:spPr>
-      </p:sp>
-      <p:sp>
-        <p:nvSpPr>
-          <p:cNvPr id="34" name="Text 32"/>
-          <p:cNvSpPr/>
-          <p:nvPr/>
-        </p:nvSpPr>
-        <p:spPr>
-          <a:xfrm>
-            <a:off x="7754112" y="3291840"/>
-            <a:ext cx="603504" cy="310896"/>
+          <p:cNvPr id="39" name="Text 37"/>
+          <p:cNvSpPr/>
+          <p:nvPr/>
+        </p:nvSpPr>
+        <p:spPr>
+          <a:xfrm>
+            <a:off x="7726680" y="4187952"/>
+            <a:ext cx="2697480" cy="493776"/>
           </a:xfrm>
           <a:prstGeom prst="rect">
             <a:avLst/>
@@ -19842,245 +20029,6 @@
           </a:bodyPr>
           <a:lstStyle/>
           <a:p>
-            <a:pPr algn="ctr" indent="0" marL="0">
-              <a:buNone/>
-            </a:pPr>
-            <a:r>
-              <a:rPr lang="en-US" sz="670" dirty="0">
-                <a:solidFill>
-                  <a:srgbClr val="121212"/>
-                </a:solidFill>
-                <a:latin typeface="Microsoft YaHei" pitchFamily="34" charset="0"/>
-                <a:ea typeface="Microsoft YaHei" pitchFamily="34" charset="-122"/>
-                <a:cs typeface="Microsoft YaHei" pitchFamily="34" charset="-120"/>
-              </a:rPr>
-              <a:t>风险：国内政策收紧压制</a:t>
-            </a:r>
-            <a:endParaRPr lang="en-US" sz="670" dirty="0"/>
-          </a:p>
-        </p:txBody>
-      </p:sp>
-      <p:sp>
-        <p:nvSpPr>
-          <p:cNvPr id="35" name="Shape 33"/>
-          <p:cNvSpPr/>
-          <p:nvPr/>
-        </p:nvSpPr>
-        <p:spPr>
-          <a:xfrm>
-            <a:off x="8503920" y="2962656"/>
-            <a:ext cx="164592" cy="164592"/>
-          </a:xfrm>
-          <a:prstGeom prst="ellipse">
-            <a:avLst/>
-          </a:prstGeom>
-          <a:solidFill>
-            <a:srgbClr val="487052"/>
-          </a:solidFill>
-          <a:ln w="12700">
-            <a:solidFill>
-              <a:srgbClr val="FFFFFF"/>
-            </a:solidFill>
-            <a:prstDash val="solid"/>
-          </a:ln>
-        </p:spPr>
-      </p:sp>
-      <p:sp>
-        <p:nvSpPr>
-          <p:cNvPr id="36" name="Text 34"/>
-          <p:cNvSpPr/>
-          <p:nvPr/>
-        </p:nvSpPr>
-        <p:spPr>
-          <a:xfrm>
-            <a:off x="8412480" y="3291840"/>
-            <a:ext cx="603504" cy="310896"/>
-          </a:xfrm>
-          <a:prstGeom prst="rect">
-            <a:avLst/>
-          </a:prstGeom>
-          <a:noFill/>
-          <a:ln/>
-        </p:spPr>
-        <p:txBody>
-          <a:bodyPr wrap="square" lIns="0" tIns="0" rIns="0" bIns="0" rtlCol="0" anchor="t">
-            <a:normAutofit/>
-          </a:bodyPr>
-          <a:lstStyle/>
-          <a:p>
-            <a:pPr algn="ctr" indent="0" marL="0">
-              <a:buNone/>
-            </a:pPr>
-            <a:r>
-              <a:rPr lang="en-US" sz="670" dirty="0">
-                <a:solidFill>
-                  <a:srgbClr val="121212"/>
-                </a:solidFill>
-                <a:latin typeface="Microsoft YaHei" pitchFamily="34" charset="0"/>
-                <a:ea typeface="Microsoft YaHei" pitchFamily="34" charset="-122"/>
-                <a:cs typeface="Microsoft YaHei" pitchFamily="34" charset="-120"/>
-              </a:rPr>
-              <a:t>机会：头部企业扩产巩固</a:t>
-            </a:r>
-            <a:endParaRPr lang="en-US" sz="670" dirty="0"/>
-          </a:p>
-        </p:txBody>
-      </p:sp>
-      <p:sp>
-        <p:nvSpPr>
-          <p:cNvPr id="37" name="Shape 35"/>
-          <p:cNvSpPr/>
-          <p:nvPr/>
-        </p:nvSpPr>
-        <p:spPr>
-          <a:xfrm>
-            <a:off x="9162288" y="2962656"/>
-            <a:ext cx="164592" cy="164592"/>
-          </a:xfrm>
-          <a:prstGeom prst="ellipse">
-            <a:avLst/>
-          </a:prstGeom>
-          <a:solidFill>
-            <a:srgbClr val="487052"/>
-          </a:solidFill>
-          <a:ln w="12700">
-            <a:solidFill>
-              <a:srgbClr val="FFFFFF"/>
-            </a:solidFill>
-            <a:prstDash val="solid"/>
-          </a:ln>
-        </p:spPr>
-      </p:sp>
-      <p:sp>
-        <p:nvSpPr>
-          <p:cNvPr id="38" name="Text 36"/>
-          <p:cNvSpPr/>
-          <p:nvPr/>
-        </p:nvSpPr>
-        <p:spPr>
-          <a:xfrm>
-            <a:off x="9070848" y="3291840"/>
-            <a:ext cx="603504" cy="310896"/>
-          </a:xfrm>
-          <a:prstGeom prst="rect">
-            <a:avLst/>
-          </a:prstGeom>
-          <a:noFill/>
-          <a:ln/>
-        </p:spPr>
-        <p:txBody>
-          <a:bodyPr wrap="square" lIns="0" tIns="0" rIns="0" bIns="0" rtlCol="0" anchor="t">
-            <a:normAutofit/>
-          </a:bodyPr>
-          <a:lstStyle/>
-          <a:p>
-            <a:pPr algn="ctr" indent="0" marL="0">
-              <a:buNone/>
-            </a:pPr>
-            <a:r>
-              <a:rPr lang="en-US" sz="670" dirty="0">
-                <a:solidFill>
-                  <a:srgbClr val="121212"/>
-                </a:solidFill>
-                <a:latin typeface="Microsoft YaHei" pitchFamily="34" charset="0"/>
-                <a:ea typeface="Microsoft YaHei" pitchFamily="34" charset="-122"/>
-                <a:cs typeface="Microsoft YaHei" pitchFamily="34" charset="-120"/>
-              </a:rPr>
-              <a:t>观察：政策细则、项目投</a:t>
-            </a:r>
-            <a:endParaRPr lang="en-US" sz="670" dirty="0"/>
-          </a:p>
-        </p:txBody>
-      </p:sp>
-      <p:sp>
-        <p:nvSpPr>
-          <p:cNvPr id="39" name="Shape 37"/>
-          <p:cNvSpPr/>
-          <p:nvPr/>
-        </p:nvSpPr>
-        <p:spPr>
-          <a:xfrm>
-            <a:off x="9820656" y="2962656"/>
-            <a:ext cx="164592" cy="164592"/>
-          </a:xfrm>
-          <a:prstGeom prst="ellipse">
-            <a:avLst/>
-          </a:prstGeom>
-          <a:solidFill>
-            <a:srgbClr val="B85A4A"/>
-          </a:solidFill>
-          <a:ln w="12700">
-            <a:solidFill>
-              <a:srgbClr val="FFFFFF"/>
-            </a:solidFill>
-            <a:prstDash val="solid"/>
-          </a:ln>
-        </p:spPr>
-      </p:sp>
-      <p:sp>
-        <p:nvSpPr>
-          <p:cNvPr id="40" name="Text 38"/>
-          <p:cNvSpPr/>
-          <p:nvPr/>
-        </p:nvSpPr>
-        <p:spPr>
-          <a:xfrm>
-            <a:off x="9729216" y="3291840"/>
-            <a:ext cx="603504" cy="310896"/>
-          </a:xfrm>
-          <a:prstGeom prst="rect">
-            <a:avLst/>
-          </a:prstGeom>
-          <a:noFill/>
-          <a:ln/>
-        </p:spPr>
-        <p:txBody>
-          <a:bodyPr wrap="square" lIns="0" tIns="0" rIns="0" bIns="0" rtlCol="0" anchor="t">
-            <a:normAutofit/>
-          </a:bodyPr>
-          <a:lstStyle/>
-          <a:p>
-            <a:pPr algn="ctr" indent="0" marL="0">
-              <a:buNone/>
-            </a:pPr>
-            <a:r>
-              <a:rPr lang="en-US" sz="670" dirty="0">
-                <a:solidFill>
-                  <a:srgbClr val="121212"/>
-                </a:solidFill>
-                <a:latin typeface="Microsoft YaHei" pitchFamily="34" charset="0"/>
-                <a:ea typeface="Microsoft YaHei" pitchFamily="34" charset="-122"/>
-                <a:cs typeface="Microsoft YaHei" pitchFamily="34" charset="-120"/>
-              </a:rPr>
-              <a:t>观察：政策细则、项目投</a:t>
-            </a:r>
-            <a:endParaRPr lang="en-US" sz="670" dirty="0"/>
-          </a:p>
-        </p:txBody>
-      </p:sp>
-      <p:sp>
-        <p:nvSpPr>
-          <p:cNvPr id="41" name="Text 39"/>
-          <p:cNvSpPr/>
-          <p:nvPr/>
-        </p:nvSpPr>
-        <p:spPr>
-          <a:xfrm>
-            <a:off x="7726680" y="4315968"/>
-            <a:ext cx="2697480" cy="384048"/>
-          </a:xfrm>
-          <a:prstGeom prst="rect">
-            <a:avLst/>
-          </a:prstGeom>
-          <a:noFill/>
-          <a:ln/>
-        </p:spPr>
-        <p:txBody>
-          <a:bodyPr wrap="square" lIns="0" tIns="0" rIns="0" bIns="0" rtlCol="0" anchor="t">
-            <a:normAutofit/>
-          </a:bodyPr>
-          <a:lstStyle/>
-          <a:p>
             <a:pPr indent="0" marL="0">
               <a:buNone/>
             </a:pPr>
@@ -20093,7 +20041,7 @@
                 <a:ea typeface="Microsoft YaHei" pitchFamily="34" charset="-122"/>
                 <a:cs typeface="Microsoft YaHei" pitchFamily="34" charset="-120"/>
               </a:rPr>
-              <a:t>参考培训 PPT 的阶段路线表达，按事件顺序拆成判断路径。</a:t>
+              <a:t>检测到对比/分类信号，用矩阵压缩呈现，不新增外部判断。</a:t>
             </a:r>
             <a:endParaRPr lang="en-US" sz="760" dirty="0"/>
           </a:p>
@@ -20101,7 +20049,7 @@
       </p:sp>
       <p:sp>
         <p:nvSpPr>
-          <p:cNvPr id="42" name="Shape 40"/>
+          <p:cNvPr id="40" name="Shape 38"/>
           <p:cNvSpPr/>
           <p:nvPr/>
         </p:nvSpPr>
@@ -20126,7 +20074,7 @@
       </p:sp>
       <p:sp>
         <p:nvSpPr>
-          <p:cNvPr id="43" name="Text 41"/>
+          <p:cNvPr id="41" name="Text 39"/>
           <p:cNvSpPr/>
           <p:nvPr/>
         </p:nvSpPr>
@@ -20165,7 +20113,7 @@
       </p:sp>
       <p:sp>
         <p:nvSpPr>
-          <p:cNvPr id="44" name="Text 42"/>
+          <p:cNvPr id="42" name="Text 40"/>
           <p:cNvSpPr/>
           <p:nvPr/>
         </p:nvSpPr>
@@ -20198,7 +20146,7 @@
                 <a:ea typeface="Microsoft YaHei" pitchFamily="34" charset="-122"/>
                 <a:cs typeface="Microsoft YaHei" pitchFamily="34" charset="-120"/>
               </a:rPr>
-              <a:t>若政策收紧与产能扩张同时兑现，则磷酸铁锂行业加工费可能进一步下行，中小厂商退出风险上升</a:t>
+              <a:t>若2027年上半年高压实新产能投产进度快于需求增速，则高压实产品溢价可能收窄，行业盈利分化加剧</a:t>
             </a:r>
             <a:endParaRPr lang="en-US" sz="1020" dirty="0"/>
           </a:p>

--- a/docs/reports/latest.pptx
+++ b/docs/reports/latest.pptx
@@ -1876,7 +1876,7 @@
                 <a:ea typeface="Aptos" pitchFamily="34" charset="-122"/>
                 <a:cs typeface="Aptos" pitchFamily="34" charset="-120"/>
               </a:rPr>
-              <a:t>2026-10-28</a:t>
+              <a:t>2026-10-30</a:t>
             </a:r>
             <a:endParaRPr lang="en-US" sz="800" dirty="0"/>
           </a:p>
@@ -2160,7 +2160,7 @@
                 <a:ea typeface="Microsoft YaHei" pitchFamily="34" charset="-122"/>
                 <a:cs typeface="Microsoft YaHei" pitchFamily="34" charset="-120"/>
               </a:rPr>
-              <a:t>今日磷酸铁锂行业核心信号是高压实产品供需缺口扩大：2026年高压实磷酸铁锂需求约169万吨，但稳定量产供给仅约120万吨，缺口吸引天赐材料终止三元项目转产16万吨高压实磷酸铁锂，容百科技、当升科技等三元头部企业也跨界入场；山东65万吨磷酸铁锂项目二期开工，显示产能扩张仍在加速。同时，退役电池回收进入规范化阶段，欧洲平价车推进难脱中国电池依赖，政策与回收端变化将影响铁锂长期需求结构和合规成本。需跟踪高压实产品实际量产爬坡进度、新进入者客户认证周期以及回收政策落地对材料成本的反向传导。</a:t>
+              <a:t>今日磷酸铁锂行业核心信号是高压实正极材料的竞争前移至前驱体环节：10万吨磷酸二氢锂项目主体完工，指向磷酸铁锂路线补链；同时行业数据显示全年需求约169万吨而稳定量产供货仅120万至135万吨，存在刚性缺口。政策端，动力电池质量安全大会强调全链安全，铁路运输新规11月1日实施，利好规范企业。整体看，供给瓶颈与标准趋严并行，具备前驱体一体化能力的企业可能获得结构性优势。</a:t>
             </a:r>
             <a:endParaRPr lang="en-US" sz="1400" dirty="0"/>
           </a:p>
@@ -2898,7 +2898,7 @@
                 <a:ea typeface="Microsoft YaHei" pitchFamily="34" charset="-122"/>
                 <a:cs typeface="Microsoft YaHei" pitchFamily="34" charset="-120"/>
               </a:rPr>
-              <a:t>今日磷酸铁锂行业核心信号是高压实产品供需缺口扩大：2026年高压实磷酸铁锂需求约169万吨，但稳定量产供给仅约120万吨，缺口吸引天赐材料终止</a:t>
+              <a:t>今日磷酸铁锂行业核心信号是高压实正极材料的竞争前移至前驱体环节：10万吨磷酸二氢锂项目主体完工，指向磷酸铁锂路线补链；同时行业数据显示全年需求</a:t>
             </a:r>
             <a:endParaRPr lang="en-US" sz="1020" dirty="0"/>
           </a:p>
@@ -3047,7 +3047,7 @@
                 <a:ea typeface="Aptos" pitchFamily="34" charset="-122"/>
                 <a:cs typeface="Aptos" pitchFamily="34" charset="-120"/>
               </a:rPr>
-              <a:t>2026-10-28</a:t>
+              <a:t>2026-10-30</a:t>
             </a:r>
             <a:endParaRPr lang="en-US" sz="800" dirty="0"/>
           </a:p>
@@ -3612,7 +3612,7 @@
                 <a:ea typeface="Microsoft YaHei" pitchFamily="34" charset="-122"/>
                 <a:cs typeface="Microsoft YaHei" pitchFamily="34" charset="-120"/>
               </a:rPr>
-              <a:t>169万吨需求对120万吨供给:磷酸铁锂“高端缺口”为什么填不满?</a:t>
+              <a:t>10万吨磷酸二氢锂主体完工!高压实磷酸铁锂的“另一条路线”正在补链</a:t>
             </a:r>
             <a:endParaRPr lang="en-US" sz="680" dirty="0"/>
           </a:p>
@@ -3653,7 +3653,7 @@
                 <a:ea typeface="Aptos" pitchFamily="34" charset="-122"/>
                 <a:cs typeface="Aptos" pitchFamily="34" charset="-120"/>
               </a:rPr>
-              <a:t>https://weixin.sogou.com/link?url=dn9a_-gY295K0Rci_xozVXfdMkSQTLW6cwJThYulHEtVjXrGTiVgSyk1J_t_u4joCisrHMTPoiZUWQigGekC0lqXa8Fplpd9XfejurnmuLy7AxswCTESmIrvfCZoOfQS73VW3eAo5LSToQvCP_oKAemj-VEd2SaNgkfe0bA5zPkgzJlF6n6zVBxysYgdkJP9_SK9HpCKHRl7J_ON2Casuoa31MuncnLzYhU_sxTdkiO5g2-RjHbGAKL_dahev9yGrFKTlWrbGFbzAjcIGepUqA..&amp;type=2&amp;query=%E9%93%81%E9%94%82 %E9%AB%98%E5%8E%8B%E5%AE%9E %E6%AD%A3%E6%9E%81%E6%9D%90%E6%96%99 %E9%87%8F%E4%BA%A7&amp;token=A8214557AFFD00E2EAECB5361B22CB33EB9393FC6AE1683C</a:t>
+              <a:t>https://weixin.sogou.com/link?url=dn9a_-gY295K0Rci_xozVXfdMkSQTLW6cwJThYulHEtVjXrGTiVgS2TN2Gq0-dvXdW_GiwQuiceZ4YHbQDZR4lqXa8Fplpd9ERkSRS6AmNGJpepzRLRcx1tShTE6ckp2F9BFWGJMeXkqdPKR4bYjHSG_9tPEGeROFJgsgdCB0I93rCWC36sETt6gTFQDdTcG9RwMn-JOLVwQoU2k1ZYtFNpoPxUPxLUETrcfV7PKlN9_jJpkqcTP8Tjnb_IVdqwZJHjpuhPohw_y08OLTBhW0A..&amp;type=2&amp;query=%E9%93%81%E9%94%82 %E9%AB%98%E5%8E%8B%E5%AE%9E %E6%AD%A3%E6%9E%81%E6%9D%90%E6%96%99 %E9%87%8F%E4%BA%A7&amp;token=C0E9011E93870BB5A1A6FEA73058DD89A1FE1B256AE411E3</a:t>
             </a:r>
             <a:endParaRPr lang="en-US" sz="580" dirty="0"/>
           </a:p>
@@ -3758,7 +3758,7 @@
                 <a:ea typeface="Microsoft YaHei" pitchFamily="34" charset="-122"/>
                 <a:cs typeface="Microsoft YaHei" pitchFamily="34" charset="-120"/>
               </a:rPr>
-              <a:t>磷酸铁锂材料与电芯公众号广</a:t>
+              <a:t>中国磷酸铁锂行业官方政策与</a:t>
             </a:r>
             <a:endParaRPr lang="en-US" sz="680" dirty="0"/>
           </a:p>
@@ -3799,7 +3799,7 @@
                 <a:ea typeface="Microsoft YaHei" pitchFamily="34" charset="-122"/>
                 <a:cs typeface="Microsoft YaHei" pitchFamily="34" charset="-120"/>
               </a:rPr>
-              <a:t>山东65万吨磷酸铁锂项目二期开工</a:t>
+              <a:t>锂电池上铁路，有标准了！国家铁路局新规11月1日实施 - 京报网</a:t>
             </a:r>
             <a:endParaRPr lang="en-US" sz="680" dirty="0"/>
           </a:p>
@@ -3840,7 +3840,7 @@
                 <a:ea typeface="Aptos" pitchFamily="34" charset="-122"/>
                 <a:cs typeface="Aptos" pitchFamily="34" charset="-120"/>
               </a:rPr>
-              <a:t>https://weixin.sogou.com/link?url=dn9a_-gY295K0Rci_xozVXfdMkSQTLW6cwJThYulHEtVjXrGTiVgSyk1J_t_u4jorRW_qzKVtORUWQigGekC0lqXa8Fplpd9ZdABQP4Q8m1g0KKD8XqcP3iP9k742mAib1s4UPAIcN6Fn44TIY2glkVolyPi6n7CBtfyqCvdefPQyjeUgCYpos8LFChDVY-ZMFgF1mprqy4gn1EBV6Pnd-HqHUQpOwnEj0A3pf1p9WkH7QMeVqMD549Gca3fBgi-XVQfHeLGiwD1AfaFW2DefQ..&amp;type=2&amp;query=%E9%93%81%E9%94%82 %E9%AB%98%E5%8E%8B%E5%AE%9E %E6%AD%A3%E6%9E%81%E6%9D%90%E6%96%99 %E9%87%8F%E4%BA%A7&amp;token=A8215585D7837E9A9392CA496473C2D3948F67566AE1683E</a:t>
+              <a:t>https://news.bjd.com.cn/2026/10/29/12011097.shtml</a:t>
             </a:r>
             <a:endParaRPr lang="en-US" sz="580" dirty="0"/>
           </a:p>
@@ -3945,7 +3945,7 @@
                 <a:ea typeface="Microsoft YaHei" pitchFamily="34" charset="-122"/>
                 <a:cs typeface="Microsoft YaHei" pitchFamily="34" charset="-120"/>
               </a:rPr>
-              <a:t>中国磷酸铁锂行业官方政策与</a:t>
+              <a:t>磷酸铁锂材料与电芯公众号广</a:t>
             </a:r>
             <a:endParaRPr lang="en-US" sz="680" dirty="0"/>
           </a:p>
@@ -3986,7 +3986,7 @@
                 <a:ea typeface="Microsoft YaHei" pitchFamily="34" charset="-122"/>
                 <a:cs typeface="Microsoft YaHei" pitchFamily="34" charset="-120"/>
               </a:rPr>
-              <a:t>退役电池回收进入规范化阶段，流向管理决定资源价值 - 搜狐网</a:t>
+              <a:t>10万吨磷酸二氢锂主体完工!高压实磷酸铁锂的“另一条路线”正在补链</a:t>
             </a:r>
             <a:endParaRPr lang="en-US" sz="680" dirty="0"/>
           </a:p>
@@ -4027,7 +4027,7 @@
                 <a:ea typeface="Aptos" pitchFamily="34" charset="-122"/>
                 <a:cs typeface="Aptos" pitchFamily="34" charset="-120"/>
               </a:rPr>
-              <a:t>https://m.sohu.com/a/1093750347_121925623?scm=10001.325_13-325_13.0.0-0-0-0-0.5_1334</a:t>
+              <a:t>https://weixin.sogou.com/link?url=dn9a_-gY295K0Rci_xozVXfdMkSQTLW6cwJThYulHEtVjXrGTiVgS2TN2Gq0-dvXdW_GiwQuiceZ4YHbQDZR4lqXa8Fplpd9zGb_lbg8xz8l91Abygjvwqn7DCXqRrnjGnvvunIrUT0qQPc-Brud-52C-W50IO2l8c41W9hXUN9kH3V_50UREqFh5hRJAh6vP4VSq3jzEH74wZ98mp-T7KLT52hHlWYZGAnGXUmx7QtcTM7U1R8yqIjpXphHGvPGe-lEimZRQ7jdrgozfSg6bw..&amp;type=2&amp;query=%E9%93%81%E9%94%82 %E9%AB%98%E5%8E%8B%E5%AE%9E %E6%AD%A3%E6%9E%81%E6%9D%90%E6%96%99 %E9%87%8F%E4%BA%A7&amp;token=C0E9011E93870BB5A1A6FEA73058DD89A1FE1B256AE411E3</a:t>
             </a:r>
             <a:endParaRPr lang="en-US" sz="580" dirty="0"/>
           </a:p>
@@ -4173,7 +4173,7 @@
                 <a:ea typeface="Microsoft YaHei" pitchFamily="34" charset="-122"/>
                 <a:cs typeface="Microsoft YaHei" pitchFamily="34" charset="-120"/>
               </a:rPr>
-              <a:t>2027年新能源渗透率不低于70% 海南2030年拟禁售燃油车 - 太</a:t>
+              <a:t>全链向新 质领安全——第四届动力电池质量安全大会在郴州临武召开 - 新</a:t>
             </a:r>
             <a:endParaRPr lang="en-US" sz="680" dirty="0"/>
           </a:p>
@@ -4214,7 +4214,7 @@
                 <a:ea typeface="Aptos" pitchFamily="34" charset="-122"/>
                 <a:cs typeface="Aptos" pitchFamily="34" charset="-120"/>
               </a:rPr>
-              <a:t>https://www.pcauto.com.cn/news/5189/51899592.html</a:t>
+              <a:t>https://news.google.com/rss/articles/CBMigAFBVV95cUxOWDhZU2YxU2E0VkFKNmwzZndEUVIwbXA3MkpPU3QwRXItckdmcWloMS1WdzZic0pTbk5wd0RqZjBrWUFFMmlTd25oaDVvdjZCVGhYQUZMWS0tcEk3ZTU1UTNRLUt0RFBoRzk1ZDFTc2RxenZNM1lCSzFfVGYwUVlxUQ?oc=5</a:t>
             </a:r>
             <a:endParaRPr lang="en-US" sz="580" dirty="0"/>
           </a:p>
@@ -4360,7 +4360,7 @@
                 <a:ea typeface="Microsoft YaHei" pitchFamily="34" charset="-122"/>
                 <a:cs typeface="Microsoft YaHei" pitchFamily="34" charset="-120"/>
               </a:rPr>
-              <a:t>中国电池占七成，欧洲推平价车却难脱依赖 - 汽车之家</a:t>
+              <a:t>内河电动化，动力电池“新战场” - 搜狐网</a:t>
             </a:r>
             <a:endParaRPr lang="en-US" sz="680" dirty="0"/>
           </a:p>
@@ -4401,7 +4401,7 @@
                 <a:ea typeface="Aptos" pitchFamily="34" charset="-122"/>
                 <a:cs typeface="Aptos" pitchFamily="34" charset="-120"/>
               </a:rPr>
-              <a:t>https://chejiahao.autohome.com.cn/info/26744140?reply=reply</a:t>
+              <a:t>https://news.google.com/rss/articles/CBMijAFBVV95cUxPanRFMW1HbEZRUHRXaUNCdWRHdlg4ejlyN0o3cjF2anNiVW1HV0E4S0wzejNlYm1rZnBMQkx6SXd6QV9mZE9sOHluSnY3NGNmM1FMajY0V0l6STJwWWp0TmZDdTVVenZWRWE5ZTJDRHBVdGlJNU1KQWtTQkZnWWdiT19oYm1SVXR1LWNRSg?oc=5</a:t>
             </a:r>
             <a:endParaRPr lang="en-US" sz="580" dirty="0"/>
           </a:p>
@@ -4506,7 +4506,7 @@
                 <a:ea typeface="Microsoft YaHei" pitchFamily="34" charset="-122"/>
                 <a:cs typeface="Microsoft YaHei" pitchFamily="34" charset="-120"/>
               </a:rPr>
-              <a:t>中国磷酸铁锂行业官方政策与</a:t>
+              <a:t>中国电池网</a:t>
             </a:r>
             <a:endParaRPr lang="en-US" sz="680" dirty="0"/>
           </a:p>
@@ -4547,7 +4547,7 @@
                 <a:ea typeface="Microsoft YaHei" pitchFamily="34" charset="-122"/>
                 <a:cs typeface="Microsoft YaHei" pitchFamily="34" charset="-120"/>
               </a:rPr>
-              <a:t>思伊纳科技在科技新高度，让新型锂电池及固态电池绽放科技之花 - 36Kr</a:t>
+              <a:t>我国研发新型无钴高镍正极材料 显著提升快充效率与循环寿命_电池网</a:t>
             </a:r>
             <a:endParaRPr lang="en-US" sz="680" dirty="0"/>
           </a:p>
@@ -4588,7 +4588,7 @@
                 <a:ea typeface="Aptos" pitchFamily="34" charset="-122"/>
                 <a:cs typeface="Aptos" pitchFamily="34" charset="-120"/>
               </a:rPr>
-              <a:t>https://www.36kr.com/p/4033696451417218</a:t>
+              <a:t>https://www.itdcw.com/news/focus/100415Rb2026.html</a:t>
             </a:r>
             <a:endParaRPr lang="en-US" sz="580" dirty="0"/>
           </a:p>
@@ -4734,7 +4734,7 @@
                 <a:ea typeface="Microsoft YaHei" pitchFamily="34" charset="-122"/>
                 <a:cs typeface="Microsoft YaHei" pitchFamily="34" charset="-120"/>
               </a:rPr>
-              <a:t>中国电池网</a:t>
+              <a:t>同体积容量击穿行业纪录！多氟多两款大圆柱磷酸铁锂换电方案发布_电池网</a:t>
             </a:r>
             <a:endParaRPr lang="en-US" sz="680" dirty="0"/>
           </a:p>
@@ -4775,7 +4775,7 @@
                 <a:ea typeface="Aptos" pitchFamily="34" charset="-122"/>
                 <a:cs typeface="Aptos" pitchFamily="34" charset="-120"/>
               </a:rPr>
-              <a:t>https://www.itdcw.com/</a:t>
+              <a:t>https://www.itdcw.com/news/chanpinxinwen/06251562M2026.html</a:t>
             </a:r>
             <a:endParaRPr lang="en-US" sz="580" dirty="0"/>
           </a:p>
@@ -4880,7 +4880,7 @@
                 <a:ea typeface="Microsoft YaHei" pitchFamily="34" charset="-122"/>
                 <a:cs typeface="Microsoft YaHei" pitchFamily="34" charset="-120"/>
               </a:rPr>
-              <a:t>鑫椤锂电</a:t>
+              <a:t>中国电池网</a:t>
             </a:r>
             <a:endParaRPr lang="en-US" sz="680" dirty="0"/>
           </a:p>
@@ -4921,7 +4921,7 @@
                 <a:ea typeface="Microsoft YaHei" pitchFamily="34" charset="-122"/>
                 <a:cs typeface="Microsoft YaHei" pitchFamily="34" charset="-120"/>
               </a:rPr>
-              <a:t>鑫椤锂电</a:t>
+              <a:t>【正极材料周报】湖南裕能拟20亿元于湖南湘潭再建厂！万华化学山东莱州项</a:t>
             </a:r>
             <a:endParaRPr lang="en-US" sz="680" dirty="0"/>
           </a:p>
@@ -4962,7 +4962,7 @@
                 <a:ea typeface="Aptos" pitchFamily="34" charset="-122"/>
                 <a:cs typeface="Aptos" pitchFamily="34" charset="-120"/>
               </a:rPr>
-              <a:t>https://www.icbattery.com/</a:t>
+              <a:t>https://www.itdcw.com/news/dczk/102615X3H026.html</a:t>
             </a:r>
             <a:endParaRPr lang="en-US" sz="580" dirty="0"/>
           </a:p>
@@ -5067,7 +5067,7 @@
                 <a:ea typeface="Microsoft YaHei" pitchFamily="34" charset="-122"/>
                 <a:cs typeface="Microsoft YaHei" pitchFamily="34" charset="-120"/>
               </a:rPr>
-              <a:t>高工锂电</a:t>
+              <a:t>中国电池网</a:t>
             </a:r>
             <a:endParaRPr lang="en-US" sz="680" dirty="0"/>
           </a:p>
@@ -5108,7 +5108,7 @@
                 <a:ea typeface="Microsoft YaHei" pitchFamily="34" charset="-122"/>
                 <a:cs typeface="Microsoft YaHei" pitchFamily="34" charset="-120"/>
               </a:rPr>
-              <a:t>高工锂电</a:t>
+              <a:t>磷酸铁锂动力型电池与磷酸铁锂储能型电池的区别分析_电池网</a:t>
             </a:r>
             <a:endParaRPr lang="en-US" sz="680" dirty="0"/>
           </a:p>
@@ -5149,7 +5149,7 @@
                 <a:ea typeface="Aptos" pitchFamily="34" charset="-122"/>
                 <a:cs typeface="Aptos" pitchFamily="34" charset="-120"/>
               </a:rPr>
-              <a:t>https://www.gg-lb.com/</a:t>
+              <a:t>https://www.itdcw.com/news/dianchibaike/06301359262023.html</a:t>
             </a:r>
             <a:endParaRPr lang="en-US" sz="580" dirty="0"/>
           </a:p>
@@ -5254,7 +5254,7 @@
                 <a:ea typeface="Microsoft YaHei" pitchFamily="34" charset="-122"/>
                 <a:cs typeface="Microsoft YaHei" pitchFamily="34" charset="-120"/>
               </a:rPr>
-              <a:t>电池中国</a:t>
+              <a:t>鑫椤锂电</a:t>
             </a:r>
             <a:endParaRPr lang="en-US" sz="680" dirty="0"/>
           </a:p>
@@ -5295,7 +5295,7 @@
                 <a:ea typeface="Microsoft YaHei" pitchFamily="34" charset="-122"/>
                 <a:cs typeface="Microsoft YaHei" pitchFamily="34" charset="-120"/>
               </a:rPr>
-              <a:t>电池中国</a:t>
+              <a:t>鑫椤锂电</a:t>
             </a:r>
             <a:endParaRPr lang="en-US" sz="680" dirty="0"/>
           </a:p>
@@ -5336,7 +5336,7 @@
                 <a:ea typeface="Aptos" pitchFamily="34" charset="-122"/>
                 <a:cs typeface="Aptos" pitchFamily="34" charset="-120"/>
               </a:rPr>
-              <a:t>https://www.cbea.com/</a:t>
+              <a:t>https://www.icbattery.com/</a:t>
             </a:r>
             <a:endParaRPr lang="en-US" sz="580" dirty="0"/>
           </a:p>
@@ -5441,7 +5441,7 @@
                 <a:ea typeface="Microsoft YaHei" pitchFamily="34" charset="-122"/>
                 <a:cs typeface="Microsoft YaHei" pitchFamily="34" charset="-120"/>
               </a:rPr>
-              <a:t>证券时报</a:t>
+              <a:t>高工锂电</a:t>
             </a:r>
             <a:endParaRPr lang="en-US" sz="680" dirty="0"/>
           </a:p>
@@ -5482,7 +5482,7 @@
                 <a:ea typeface="Microsoft YaHei" pitchFamily="34" charset="-122"/>
                 <a:cs typeface="Microsoft YaHei" pitchFamily="34" charset="-120"/>
               </a:rPr>
-              <a:t>证券时报</a:t>
+              <a:t>高工锂电</a:t>
             </a:r>
             <a:endParaRPr lang="en-US" sz="680" dirty="0"/>
           </a:p>
@@ -5523,7 +5523,7 @@
                 <a:ea typeface="Aptos" pitchFamily="34" charset="-122"/>
                 <a:cs typeface="Aptos" pitchFamily="34" charset="-120"/>
               </a:rPr>
-              <a:t>https://www.stcn.com/</a:t>
+              <a:t>https://www.gg-lb.com/</a:t>
             </a:r>
             <a:endParaRPr lang="en-US" sz="580" dirty="0"/>
           </a:p>
@@ -5628,7 +5628,7 @@
                 <a:ea typeface="Microsoft YaHei" pitchFamily="34" charset="-122"/>
                 <a:cs typeface="Microsoft YaHei" pitchFamily="34" charset="-120"/>
               </a:rPr>
-              <a:t>界面新闻</a:t>
+              <a:t>电池中国</a:t>
             </a:r>
             <a:endParaRPr lang="en-US" sz="680" dirty="0"/>
           </a:p>
@@ -5669,7 +5669,7 @@
                 <a:ea typeface="Microsoft YaHei" pitchFamily="34" charset="-122"/>
                 <a:cs typeface="Microsoft YaHei" pitchFamily="34" charset="-120"/>
               </a:rPr>
-              <a:t>界面新闻</a:t>
+              <a:t>电池中国</a:t>
             </a:r>
             <a:endParaRPr lang="en-US" sz="680" dirty="0"/>
           </a:p>
@@ -5710,7 +5710,7 @@
                 <a:ea typeface="Aptos" pitchFamily="34" charset="-122"/>
                 <a:cs typeface="Aptos" pitchFamily="34" charset="-120"/>
               </a:rPr>
-              <a:t>https://www.jiemian.com/</a:t>
+              <a:t>https://www.cbea.com/</a:t>
             </a:r>
             <a:endParaRPr lang="en-US" sz="580" dirty="0"/>
           </a:p>
@@ -5964,7 +5964,7 @@
                 <a:ea typeface="Aptos" pitchFamily="34" charset="-122"/>
                 <a:cs typeface="Aptos" pitchFamily="34" charset="-120"/>
               </a:rPr>
-              <a:t>2026-10-28</a:t>
+              <a:t>2026-10-30</a:t>
             </a:r>
             <a:endParaRPr lang="en-US" sz="800" dirty="0"/>
           </a:p>
@@ -6488,7 +6488,7 @@
                 <a:ea typeface="Microsoft YaHei" pitchFamily="34" charset="-122"/>
                 <a:cs typeface="Microsoft YaHei" pitchFamily="34" charset="-120"/>
               </a:rPr>
-              <a:t>工业和信息化部</a:t>
+              <a:t>证券时报</a:t>
             </a:r>
             <a:endParaRPr lang="en-US" sz="680" dirty="0"/>
           </a:p>
@@ -6529,7 +6529,7 @@
                 <a:ea typeface="Microsoft YaHei" pitchFamily="34" charset="-122"/>
                 <a:cs typeface="Microsoft YaHei" pitchFamily="34" charset="-120"/>
               </a:rPr>
-              <a:t>国新办举行国务院政策例行吹风会 介绍加强中小企业回款难问题治理有关工作</a:t>
+              <a:t>证券时报</a:t>
             </a:r>
             <a:endParaRPr lang="en-US" sz="680" dirty="0"/>
           </a:p>
@@ -6570,7 +6570,7 @@
                 <a:ea typeface="Aptos" pitchFamily="34" charset="-122"/>
                 <a:cs typeface="Aptos" pitchFamily="34" charset="-120"/>
               </a:rPr>
-              <a:t>http://www.miit.gov.cn/xwfb/bldhd/art/2026/art_7285ee48244d4f20b0f127c7f013ec11.html</a:t>
+              <a:t>https://www.stcn.com/</a:t>
             </a:r>
             <a:endParaRPr lang="en-US" sz="580" dirty="0"/>
           </a:p>
@@ -6675,7 +6675,7 @@
                 <a:ea typeface="Microsoft YaHei" pitchFamily="34" charset="-122"/>
                 <a:cs typeface="Microsoft YaHei" pitchFamily="34" charset="-120"/>
               </a:rPr>
-              <a:t>工业和信息化部</a:t>
+              <a:t>界面新闻</a:t>
             </a:r>
             <a:endParaRPr lang="en-US" sz="680" dirty="0"/>
           </a:p>
@@ -6716,7 +6716,7 @@
                 <a:ea typeface="Microsoft YaHei" pitchFamily="34" charset="-122"/>
                 <a:cs typeface="Microsoft YaHei" pitchFamily="34" charset="-120"/>
               </a:rPr>
-              <a:t>四部门关于开展2026年度享受增值税加计抵减政策的集成电路企业清单制定</a:t>
+              <a:t>界面新闻</a:t>
             </a:r>
             <a:endParaRPr lang="en-US" sz="680" dirty="0"/>
           </a:p>
@@ -6757,7 +6757,7 @@
                 <a:ea typeface="Aptos" pitchFamily="34" charset="-122"/>
                 <a:cs typeface="Aptos" pitchFamily="34" charset="-120"/>
               </a:rPr>
-              <a:t>http://www.miit.gov.cn/zwgk/zcwj/wjfb/tz/art/2026/art_7d2e760b4be94217b8f55caec840b30d.html</a:t>
+              <a:t>https://www.jiemian.com/</a:t>
             </a:r>
             <a:endParaRPr lang="en-US" sz="580" dirty="0"/>
           </a:p>
@@ -6903,7 +6903,7 @@
                 <a:ea typeface="Microsoft YaHei" pitchFamily="34" charset="-122"/>
                 <a:cs typeface="Microsoft YaHei" pitchFamily="34" charset="-120"/>
               </a:rPr>
-              <a:t>工业和信息化部政策文件库</a:t>
+              <a:t>国新办举行国务院政策例行吹风会 介绍加强中小企业回款难问题治理有关工作</a:t>
             </a:r>
             <a:endParaRPr lang="en-US" sz="680" dirty="0"/>
           </a:p>
@@ -6944,7 +6944,7 @@
                 <a:ea typeface="Aptos" pitchFamily="34" charset="-122"/>
                 <a:cs typeface="Aptos" pitchFamily="34" charset="-120"/>
               </a:rPr>
-              <a:t>https://www.miit.gov.cn/search/zcwjk.html?websiteid=110000000000000&amp;pg=&amp;p=&amp;tpl=14&amp;category=183&amp;q=</a:t>
+              <a:t>http://www.miit.gov.cn/xwfb/bldhd/art/2026/art_7285ee48244d4f20b0f127c7f013ec11.html</a:t>
             </a:r>
             <a:endParaRPr lang="en-US" sz="580" dirty="0"/>
           </a:p>
@@ -7090,7 +7090,7 @@
                 <a:ea typeface="Microsoft YaHei" pitchFamily="34" charset="-122"/>
                 <a:cs typeface="Microsoft YaHei" pitchFamily="34" charset="-120"/>
               </a:rPr>
-              <a:t>最新政策</a:t>
+              <a:t>四部门关于开展2026年度享受增值税加计抵减政策的集成电路企业清单制定</a:t>
             </a:r>
             <a:endParaRPr lang="en-US" sz="680" dirty="0"/>
           </a:p>
@@ -7131,7 +7131,7 @@
                 <a:ea typeface="Aptos" pitchFamily="34" charset="-122"/>
                 <a:cs typeface="Aptos" pitchFamily="34" charset="-120"/>
               </a:rPr>
-              <a:t>https://www.miit.gov.cn/xwfb/zxzc/index.html</a:t>
+              <a:t>http://www.miit.gov.cn/zwgk/zcwj/wjfb/tz/art/2026/art_7d2e760b4be94217b8f55caec840b30d.html</a:t>
             </a:r>
             <a:endParaRPr lang="en-US" sz="580" dirty="0"/>
           </a:p>
@@ -7236,7 +7236,7 @@
                 <a:ea typeface="Microsoft YaHei" pitchFamily="34" charset="-122"/>
                 <a:cs typeface="Microsoft YaHei" pitchFamily="34" charset="-120"/>
               </a:rPr>
-              <a:t>国家发展改革委</a:t>
+              <a:t>工业和信息化部</a:t>
             </a:r>
             <a:endParaRPr lang="en-US" sz="680" dirty="0"/>
           </a:p>
@@ -7277,7 +7277,7 @@
                 <a:ea typeface="Microsoft YaHei" pitchFamily="34" charset="-122"/>
                 <a:cs typeface="Microsoft YaHei" pitchFamily="34" charset="-120"/>
               </a:rPr>
-              <a:t>国家发展改革委</a:t>
+              <a:t>工业和信息化部政策文件库</a:t>
             </a:r>
             <a:endParaRPr lang="en-US" sz="680" dirty="0"/>
           </a:p>
@@ -7318,7 +7318,7 @@
                 <a:ea typeface="Aptos" pitchFamily="34" charset="-122"/>
                 <a:cs typeface="Aptos" pitchFamily="34" charset="-120"/>
               </a:rPr>
-              <a:t>https://www.ndrc.gov.cn/</a:t>
+              <a:t>https://www.miit.gov.cn/search/zcwjk.html?websiteid=110000000000000&amp;pg=&amp;p=&amp;tpl=14&amp;category=183&amp;q=</a:t>
             </a:r>
             <a:endParaRPr lang="en-US" sz="580" dirty="0"/>
           </a:p>
@@ -7423,7 +7423,7 @@
                 <a:ea typeface="Microsoft YaHei" pitchFamily="34" charset="-122"/>
                 <a:cs typeface="Microsoft YaHei" pitchFamily="34" charset="-120"/>
               </a:rPr>
-              <a:t>中华人民共和国中央人民政府</a:t>
+              <a:t>工业和信息化部</a:t>
             </a:r>
             <a:endParaRPr lang="en-US" sz="680" dirty="0"/>
           </a:p>
@@ -7464,7 +7464,7 @@
                 <a:ea typeface="Microsoft YaHei" pitchFamily="34" charset="-122"/>
                 <a:cs typeface="Microsoft YaHei" pitchFamily="34" charset="-120"/>
               </a:rPr>
-              <a:t>中华人民共和国中央人民政府</a:t>
+              <a:t>最新政策</a:t>
             </a:r>
             <a:endParaRPr lang="en-US" sz="680" dirty="0"/>
           </a:p>
@@ -7505,7 +7505,7 @@
                 <a:ea typeface="Aptos" pitchFamily="34" charset="-122"/>
                 <a:cs typeface="Aptos" pitchFamily="34" charset="-120"/>
               </a:rPr>
-              <a:t>https://www.gov.cn/</a:t>
+              <a:t>https://www.miit.gov.cn/xwfb/zxzc/index.html</a:t>
             </a:r>
             <a:endParaRPr lang="en-US" sz="580" dirty="0"/>
           </a:p>
@@ -7610,7 +7610,7 @@
                 <a:ea typeface="Microsoft YaHei" pitchFamily="34" charset="-122"/>
                 <a:cs typeface="Microsoft YaHei" pitchFamily="34" charset="-120"/>
               </a:rPr>
-              <a:t>生态环境部</a:t>
+              <a:t>国家发展改革委</a:t>
             </a:r>
             <a:endParaRPr lang="en-US" sz="680" dirty="0"/>
           </a:p>
@@ -7651,7 +7651,7 @@
                 <a:ea typeface="Microsoft YaHei" pitchFamily="34" charset="-122"/>
                 <a:cs typeface="Microsoft YaHei" pitchFamily="34" charset="-120"/>
               </a:rPr>
-              <a:t>生态环境部</a:t>
+              <a:t>国家发展改革委</a:t>
             </a:r>
             <a:endParaRPr lang="en-US" sz="680" dirty="0"/>
           </a:p>
@@ -7692,7 +7692,7 @@
                 <a:ea typeface="Aptos" pitchFamily="34" charset="-122"/>
                 <a:cs typeface="Aptos" pitchFamily="34" charset="-120"/>
               </a:rPr>
-              <a:t>https://www.mee.gov.cn/</a:t>
+              <a:t>https://www.ndrc.gov.cn/</a:t>
             </a:r>
             <a:endParaRPr lang="en-US" sz="580" dirty="0"/>
           </a:p>
@@ -7797,7 +7797,7 @@
                 <a:ea typeface="Microsoft YaHei" pitchFamily="34" charset="-122"/>
                 <a:cs typeface="Microsoft YaHei" pitchFamily="34" charset="-120"/>
               </a:rPr>
-              <a:t>万润新能源</a:t>
+              <a:t>中华人民共和国中央人民政府</a:t>
             </a:r>
             <a:endParaRPr lang="en-US" sz="680" dirty="0"/>
           </a:p>
@@ -7838,7 +7838,7 @@
                 <a:ea typeface="Microsoft YaHei" pitchFamily="34" charset="-122"/>
                 <a:cs typeface="Microsoft YaHei" pitchFamily="34" charset="-120"/>
               </a:rPr>
-              <a:t>磷酸铁锂-湖北万润新能源科技股份有限公司_动力电池材料_消费电池材料_</a:t>
+              <a:t>中华人民共和国中央人民政府</a:t>
             </a:r>
             <a:endParaRPr lang="en-US" sz="680" dirty="0"/>
           </a:p>
@@ -7879,7 +7879,7 @@
                 <a:ea typeface="Aptos" pitchFamily="34" charset="-122"/>
                 <a:cs typeface="Aptos" pitchFamily="34" charset="-120"/>
               </a:rPr>
-              <a:t>https://www.hbwanrun.com/application_details/1.html</a:t>
+              <a:t>https://www.gov.cn/</a:t>
             </a:r>
             <a:endParaRPr lang="en-US" sz="580" dirty="0"/>
           </a:p>
@@ -7984,7 +7984,7 @@
                 <a:ea typeface="Microsoft YaHei" pitchFamily="34" charset="-122"/>
                 <a:cs typeface="Microsoft YaHei" pitchFamily="34" charset="-120"/>
               </a:rPr>
-              <a:t>湖南裕能</a:t>
+              <a:t>生态环境部</a:t>
             </a:r>
             <a:endParaRPr lang="en-US" sz="680" dirty="0"/>
           </a:p>
@@ -8025,7 +8025,7 @@
                 <a:ea typeface="Microsoft YaHei" pitchFamily="34" charset="-122"/>
                 <a:cs typeface="Microsoft YaHei" pitchFamily="34" charset="-120"/>
               </a:rPr>
-              <a:t>湖南裕能</a:t>
+              <a:t>生态环境部</a:t>
             </a:r>
             <a:endParaRPr lang="en-US" sz="680" dirty="0"/>
           </a:p>
@@ -8066,7 +8066,7 @@
                 <a:ea typeface="Aptos" pitchFamily="34" charset="-122"/>
                 <a:cs typeface="Aptos" pitchFamily="34" charset="-120"/>
               </a:rPr>
-              <a:t>https://www.yunengchem.com/</a:t>
+              <a:t>https://www.mee.gov.cn/</a:t>
             </a:r>
             <a:endParaRPr lang="en-US" sz="580" dirty="0"/>
           </a:p>
@@ -8171,7 +8171,7 @@
                 <a:ea typeface="Microsoft YaHei" pitchFamily="34" charset="-122"/>
                 <a:cs typeface="Microsoft YaHei" pitchFamily="34" charset="-120"/>
               </a:rPr>
-              <a:t>友山科技</a:t>
+              <a:t>万润新能源</a:t>
             </a:r>
             <a:endParaRPr lang="en-US" sz="680" dirty="0"/>
           </a:p>
@@ -8212,7 +8212,7 @@
                 <a:ea typeface="Microsoft YaHei" pitchFamily="34" charset="-122"/>
                 <a:cs typeface="Microsoft YaHei" pitchFamily="34" charset="-120"/>
               </a:rPr>
-              <a:t>友山科技</a:t>
+              <a:t>磷酸铁锂-湖北万润新能源科技股份有限公司_动力电池材料_消费电池材料_</a:t>
             </a:r>
             <a:endParaRPr lang="en-US" sz="680" dirty="0"/>
           </a:p>
@@ -8253,7 +8253,7 @@
                 <a:ea typeface="Aptos" pitchFamily="34" charset="-122"/>
                 <a:cs typeface="Aptos" pitchFamily="34" charset="-120"/>
               </a:rPr>
-              <a:t>https://www.youshan-tech.com/</a:t>
+              <a:t>https://www.hbwanrun.com/application_details/1.html</a:t>
             </a:r>
             <a:endParaRPr lang="en-US" sz="580" dirty="0"/>
           </a:p>
@@ -8358,7 +8358,7 @@
                 <a:ea typeface="Microsoft YaHei" pitchFamily="34" charset="-122"/>
                 <a:cs typeface="Microsoft YaHei" pitchFamily="34" charset="-120"/>
               </a:rPr>
-              <a:t>江西升华</a:t>
+              <a:t>湖南裕能</a:t>
             </a:r>
             <a:endParaRPr lang="en-US" sz="680" dirty="0"/>
           </a:p>
@@ -8399,7 +8399,7 @@
                 <a:ea typeface="Microsoft YaHei" pitchFamily="34" charset="-122"/>
                 <a:cs typeface="Microsoft YaHei" pitchFamily="34" charset="-120"/>
               </a:rPr>
-              <a:t>江西升华</a:t>
+              <a:t>湖南裕能</a:t>
             </a:r>
             <a:endParaRPr lang="en-US" sz="680" dirty="0"/>
           </a:p>
@@ -8440,7 +8440,7 @@
                 <a:ea typeface="Aptos" pitchFamily="34" charset="-122"/>
                 <a:cs typeface="Aptos" pitchFamily="34" charset="-120"/>
               </a:rPr>
-              <a:t>https://www.shenghuaxc.com/</a:t>
+              <a:t>https://www.yunengchem.com/</a:t>
             </a:r>
             <a:endParaRPr lang="en-US" sz="580" dirty="0"/>
           </a:p>
@@ -8545,7 +8545,7 @@
                 <a:ea typeface="Microsoft YaHei" pitchFamily="34" charset="-122"/>
                 <a:cs typeface="Microsoft YaHei" pitchFamily="34" charset="-120"/>
               </a:rPr>
-              <a:t>当升科技</a:t>
+              <a:t>友山科技</a:t>
             </a:r>
             <a:endParaRPr lang="en-US" sz="680" dirty="0"/>
           </a:p>
@@ -8586,7 +8586,7 @@
                 <a:ea typeface="Microsoft YaHei" pitchFamily="34" charset="-122"/>
                 <a:cs typeface="Microsoft YaHei" pitchFamily="34" charset="-120"/>
               </a:rPr>
-              <a:t>当升科技</a:t>
+              <a:t>友山科技</a:t>
             </a:r>
             <a:endParaRPr lang="en-US" sz="680" dirty="0"/>
           </a:p>
@@ -8627,7 +8627,7 @@
                 <a:ea typeface="Aptos" pitchFamily="34" charset="-122"/>
                 <a:cs typeface="Aptos" pitchFamily="34" charset="-120"/>
               </a:rPr>
-              <a:t>https://www.easpring.com/</a:t>
+              <a:t>https://www.youshan-tech.com/</a:t>
             </a:r>
             <a:endParaRPr lang="en-US" sz="580" dirty="0"/>
           </a:p>
@@ -8881,7 +8881,7 @@
                 <a:ea typeface="Aptos" pitchFamily="34" charset="-122"/>
                 <a:cs typeface="Aptos" pitchFamily="34" charset="-120"/>
               </a:rPr>
-              <a:t>2026-10-28</a:t>
+              <a:t>2026-10-30</a:t>
             </a:r>
             <a:endParaRPr lang="en-US" sz="800" dirty="0"/>
           </a:p>
@@ -9085,7 +9085,7 @@
                 <a:ea typeface="Microsoft YaHei" pitchFamily="34" charset="-122"/>
                 <a:cs typeface="Microsoft YaHei" pitchFamily="34" charset="-120"/>
               </a:rPr>
-              <a:t>今日磷酸铁锂行业核心信号是高压实产品供需缺口扩大：2026年高压实磷酸铁锂需求约169万吨，但稳定量产供给仅约120万吨，缺口吸引天赐材料终止</a:t>
+              <a:t>今日磷酸铁锂行业核心信号是高压实正极材料的竞争前移至前驱体环节：10万吨磷酸二氢锂项目主体完工，指向磷酸铁锂路线补链；同时行业数据显示全年需求</a:t>
             </a:r>
             <a:endParaRPr lang="en-US" sz="940" dirty="0"/>
           </a:p>
@@ -9281,7 +9281,7 @@
                 <a:ea typeface="Microsoft YaHei" pitchFamily="34" charset="-122"/>
                 <a:cs typeface="Microsoft YaHei" pitchFamily="34" charset="-120"/>
               </a:rPr>
-              <a:t>高压实磷酸铁锂供需缺口成为今日最明确信号：2026年需求约169万吨，稳定量产供给仅约120万吨，缺口约49万吨；天赐材料终止三元项目转向16万吨高压实磷酸铁锂且已完成中试量</a:t>
+              <a:t>高压实磷酸铁锂的竞争焦点正从正极材料产能向前驱体磷酸二氢锂延伸，10万吨项目主体完工是补链信号；行业需求约169万吨、稳定供货仅120万至135万吨的缺口意味着短期供给偏紧；</a:t>
             </a:r>
             <a:endParaRPr lang="en-US" sz="920" dirty="0"/>
           </a:p>
@@ -9467,7 +9467,7 @@
         <p:spPr>
           <a:xfrm>
             <a:off x="6766560" y="1883664"/>
-            <a:ext cx="1316736" cy="54864"/>
+            <a:ext cx="877824" cy="54864"/>
           </a:xfrm>
           <a:prstGeom prst="rect">
             <a:avLst/>
@@ -9518,7 +9518,7 @@
                 <a:ea typeface="Microsoft YaHei" pitchFamily="34" charset="-122"/>
                 <a:cs typeface="Microsoft YaHei" pitchFamily="34" charset="-120"/>
               </a:rPr>
-              <a:t>高压实磷酸铁锂仍是技术升级主线：天赐材料16万吨高压实产品已完成中试量产，山东项目披露所得磷酸铁锂正极材料粉末压实密度达2.51~2.55g/cm³；容百科技、当升科技等三元</a:t>
+              <a:t>高压实磷酸铁锂的技术路线出现分化：一条是正极材料环节的压实密度提升，另一条是向前驱体磷酸二氢锂延伸补链；10万吨磷酸二氢锂项目主体完工表明后一条路线正在获得产能支撑，可能降低</a:t>
             </a:r>
             <a:endParaRPr lang="en-US" sz="920" dirty="0"/>
           </a:p>
@@ -9559,7 +9559,7 @@
                 <a:ea typeface="Aptos" pitchFamily="34" charset="-122"/>
                 <a:cs typeface="Aptos" pitchFamily="34" charset="-120"/>
               </a:rPr>
-              <a:t>[1][2]</a:t>
+              <a:t>[3]</a:t>
             </a:r>
             <a:endParaRPr lang="en-US" sz="750" dirty="0"/>
           </a:p>
@@ -9704,7 +9704,7 @@
         <p:spPr>
           <a:xfrm>
             <a:off x="1188720" y="4005072"/>
-            <a:ext cx="1316736" cy="54864"/>
+            <a:ext cx="877824" cy="54864"/>
           </a:xfrm>
           <a:prstGeom prst="rect">
             <a:avLst/>
@@ -9755,7 +9755,7 @@
                 <a:ea typeface="Microsoft YaHei" pitchFamily="34" charset="-122"/>
                 <a:cs typeface="Microsoft YaHei" pitchFamily="34" charset="-120"/>
               </a:rPr>
-              <a:t>产能扩张与跨界入场并行：天赐材料终止三元项目转向16万吨高压实磷酸铁锂，容百科技、当升科技跨界入场；山东65万吨磷酸铁锂项目二期开工。判断铁锂产能仍在扩张，但高压实有效产能释</a:t>
+              <a:t>供给端出现补链动作：10万吨磷酸二氢锂项目主体完工，指向高压实铁锂前驱体产能扩张；需求端行业全年需求约169万吨而稳定量产供货仅120万至135万吨，缺口约34万至49万吨，</a:t>
             </a:r>
             <a:endParaRPr lang="en-US" sz="920" dirty="0"/>
           </a:p>
@@ -9796,7 +9796,7 @@
                 <a:ea typeface="Aptos" pitchFamily="34" charset="-122"/>
                 <a:cs typeface="Aptos" pitchFamily="34" charset="-120"/>
               </a:rPr>
-              <a:t>[1][2]</a:t>
+              <a:t>[1]</a:t>
             </a:r>
             <a:endParaRPr lang="en-US" sz="750" dirty="0"/>
           </a:p>
@@ -9992,7 +9992,7 @@
                 <a:ea typeface="Microsoft YaHei" pitchFamily="34" charset="-122"/>
                 <a:cs typeface="Microsoft YaHei" pitchFamily="34" charset="-120"/>
               </a:rPr>
-              <a:t>高压实产品供需缺口对价格形成支撑：2026年高压实磷酸铁锂需求约169万吨，稳定量产供给约120万吨，缺口约49万吨；天赐材料终止三元项目转产高压实铁锂，反映企业将资本开支向</a:t>
+              <a:t>供给缺口约34万至49万吨的格局下，高压实磷酸铁锂前驱体及正极材料价格存在支撑；但前驱体补链项目推进可能在中长期缓解紧张，价格上行空间受制于新增产能投放节奏，外购前驱体的正极</a:t>
             </a:r>
             <a:endParaRPr lang="en-US" sz="920" dirty="0"/>
           </a:p>
@@ -10138,7 +10138,7 @@
                 <a:ea typeface="Microsoft YaHei" pitchFamily="34" charset="-122"/>
                 <a:cs typeface="Microsoft YaHei" pitchFamily="34" charset="-120"/>
               </a:rPr>
-              <a:t>今日磷酸铁锂行业核心信号是高压实产品供需缺口扩大：2026年高压实磷酸铁锂需求约169万吨，但稳定量产供给仅约120万吨，缺口吸引天赐材料终止</a:t>
+              <a:t>今日磷酸铁锂行业核心信号是高压实正极材料的竞争前移至前驱体环节：10万吨磷酸二氢锂项目主体完工，指向磷酸铁锂路线补链；同时行业数据显示全年需求</a:t>
             </a:r>
             <a:endParaRPr lang="en-US" sz="1020" dirty="0"/>
           </a:p>
@@ -10287,7 +10287,7 @@
                 <a:ea typeface="Aptos" pitchFamily="34" charset="-122"/>
                 <a:cs typeface="Aptos" pitchFamily="34" charset="-120"/>
               </a:rPr>
-              <a:t>2026-10-28</a:t>
+              <a:t>2026-10-30</a:t>
             </a:r>
             <a:endParaRPr lang="en-US" sz="800" dirty="0"/>
           </a:p>
@@ -10602,7 +10602,7 @@
                 <a:ea typeface="Microsoft YaHei" pitchFamily="34" charset="-122"/>
                 <a:cs typeface="Microsoft YaHei" pitchFamily="34" charset="-120"/>
               </a:rPr>
-              <a:t>高压实磷酸铁锂供需缺口成为今日最明确信号：2026年需求约169万吨，稳定量产供给仅约120万吨，缺口约49万吨；天赐材料终止三元项目转向16万吨高压实磷酸铁锂且已完成中试量产，容百科技、当升科技跨界入场；山东65万吨磷酸铁锂项目二期开工。判断高压实产品仍是铁锂行业结构性景气主线，但新产能从开工到稳定量产存在时滞，短期缺口难以快速填补。 [1][2]</a:t>
+              <a:t>高压实磷酸铁锂的竞争焦点正从正极材料产能向前驱体磷酸二氢锂延伸，10万吨项目主体完工是补链信号；行业需求约169万吨、稳定供货仅120万至135万吨的缺口意味着短期供给偏紧；动力电池质量安全大会与铁路运输新规强化全链安全与合规要求，可能加速低端产能出清。 [1][2]</a:t>
             </a:r>
             <a:endParaRPr lang="en-US" sz="960" dirty="0"/>
           </a:p>
@@ -10752,7 +10752,7 @@
                 <a:ea typeface="Microsoft YaHei" pitchFamily="34" charset="-122"/>
                 <a:cs typeface="Microsoft YaHei" pitchFamily="34" charset="-120"/>
               </a:rPr>
-              <a:t>上述信号相互强化：需求测算缺口吸引三元企业跨界和原有企业转产，而山东项目二期开工代表供给端扩张，但高压实产品对工艺控制和客户认证要求更高，中试量产到大批量稳定供货仍有距离。需要继续调研天赐材料16万吨项目的客户认证进度、容百科技和当升科技高压实产品的量产时间表，以及山东项目二期具体投产节点，以验证供给缺口收敛速度。</a:t>
+              <a:t>上述信号相互关联：前驱体补链直接针对高压实铁锂的供给瓶颈，而质量安全大会和铁路新规从标准端抬高准入门槛，两者共同作用可能使具备一体化前驱体能力的企业在供给缺口期获得份额。需要继续调研的是：该10万吨磷酸二氢锂项目的投产时间表、实际配套的正极客户，以及铁路新规对电池运输成本的具体影响幅度。</a:t>
             </a:r>
             <a:endParaRPr lang="en-US" sz="960" dirty="0"/>
           </a:p>
@@ -10886,7 +10886,7 @@
                 <a:ea typeface="Microsoft YaHei" pitchFamily="34" charset="-122"/>
                 <a:cs typeface="Microsoft YaHei" pitchFamily="34" charset="-120"/>
               </a:rPr>
-              <a:t>若天赐材料16万吨高压实项目在2027年上半年完成客户认证并稳定量产，则高压实供给缺口可能边际收窄，加工费上行动力减弱；若认证周期拉长或良率爬坡不及预期，则缺口维持，具备稳定量产能力的企业议价权增强。跟踪指标：高压实产品月度出货量、新进入者客户公告、山东项目二期投产时间。证据边界：当前仅有中试量产和开工信息，缺乏实际月度出货数据。</a:t>
+              <a:t>若该磷酸二氢锂项目按预期投产且良率达标，则高压实铁锂前驱体供给缺口可能收窄，具备自供能力的企业成本优势显现；跟踪指标包括项目投产公告、月度磷酸二氢锂价格及高压实铁锂出货量；证据边界在于项目进度仅见主体完工，尚无试产数据。</a:t>
             </a:r>
             <a:endParaRPr lang="en-US" sz="960" dirty="0"/>
           </a:p>
@@ -11132,7 +11132,7 @@
                 <a:ea typeface="Microsoft YaHei" pitchFamily="34" charset="-122"/>
                 <a:cs typeface="Microsoft YaHei" pitchFamily="34" charset="-120"/>
               </a:rPr>
-              <a:t>高压实磷酸铁锂供需缺口成为</a:t>
+              <a:t>高压实磷酸铁锂的竞争焦点正</a:t>
             </a:r>
             <a:endParaRPr lang="en-US" sz="670" dirty="0"/>
           </a:p>
@@ -11239,7 +11239,7 @@
                 <a:ea typeface="Microsoft YaHei" pitchFamily="34" charset="-122"/>
                 <a:cs typeface="Microsoft YaHei" pitchFamily="34" charset="-120"/>
               </a:rPr>
-              <a:t>天赐材料终止三元项目转向1</a:t>
+              <a:t>行业需求约169万吨、稳定</a:t>
             </a:r>
             <a:endParaRPr lang="en-US" sz="670" dirty="0"/>
           </a:p>
@@ -11346,7 +11346,7 @@
                 <a:ea typeface="Microsoft YaHei" pitchFamily="34" charset="-122"/>
                 <a:cs typeface="Microsoft YaHei" pitchFamily="34" charset="-120"/>
               </a:rPr>
-              <a:t>山东65万吨磷酸铁锂项目二</a:t>
+              <a:t>动力电池质量安全大会与铁路</a:t>
             </a:r>
             <a:endParaRPr lang="en-US" sz="670" dirty="0"/>
           </a:p>
@@ -11453,7 +11453,7 @@
                 <a:ea typeface="Microsoft YaHei" pitchFamily="34" charset="-122"/>
                 <a:cs typeface="Microsoft YaHei" pitchFamily="34" charset="-120"/>
               </a:rPr>
-              <a:t>高压实磷酸铁锂供需缺口成为</a:t>
+              <a:t>高压实磷酸铁锂的竞争焦点正</a:t>
             </a:r>
             <a:endParaRPr lang="en-US" sz="670" dirty="0"/>
           </a:p>
@@ -11599,7 +11599,7 @@
                 <a:ea typeface="Microsoft YaHei" pitchFamily="34" charset="-122"/>
                 <a:cs typeface="Microsoft YaHei" pitchFamily="34" charset="-120"/>
               </a:rPr>
-              <a:t>若天赐材料16万吨高压实项目在2027年上半年完成客户认证并稳定量产，则高压实供给缺口可能边际收窄，加工费上行动力减弱</a:t>
+              <a:t>若该磷酸二氢锂项目按预期投产且良率达标，则高压实铁锂前驱体供给缺口可能收窄，具备自供能力的企业成本优势显现</a:t>
             </a:r>
             <a:endParaRPr lang="en-US" sz="1020" dirty="0"/>
           </a:p>
@@ -11748,7 +11748,7 @@
                 <a:ea typeface="Aptos" pitchFamily="34" charset="-122"/>
                 <a:cs typeface="Aptos" pitchFamily="34" charset="-120"/>
               </a:rPr>
-              <a:t>2026-10-28</a:t>
+              <a:t>2026-10-30</a:t>
             </a:r>
             <a:endParaRPr lang="en-US" sz="800" dirty="0"/>
           </a:p>
@@ -11954,7 +11954,7 @@
                 <a:ea typeface="Microsoft YaHei" pitchFamily="34" charset="-122"/>
                 <a:cs typeface="Microsoft YaHei" pitchFamily="34" charset="-120"/>
               </a:rPr>
-              <a:t>2 条公开来源交叉验证｜事实、影响与后续研判</a:t>
+              <a:t>1 条公开来源交叉验证｜事实、影响与后续研判</a:t>
             </a:r>
             <a:endParaRPr lang="en-US" sz="860" dirty="0"/>
           </a:p>
@@ -12063,7 +12063,7 @@
                 <a:ea typeface="Microsoft YaHei" pitchFamily="34" charset="-122"/>
                 <a:cs typeface="Microsoft YaHei" pitchFamily="34" charset="-120"/>
               </a:rPr>
-              <a:t>高压实磷酸铁锂仍是技术升级主线：天赐材料16万吨高压实产品已完成中试量产，山东项目披露所得磷酸铁锂正极材料粉末压实密度达2.51~2.55g/cm³；容百科技、当升科技等三元头部企业跨界入场，表明高压实路线对三元企业的技术吸引力上升。判断高压实密度是当前铁锂产品差异化核心指标，但中试量产不等于大批量稳定供货。 [1][2]</a:t>
+              <a:t>高压实磷酸铁锂的技术路线出现分化：一条是正极材料环节的压实密度提升，另一条是向前驱体磷酸二氢锂延伸补链；10万吨磷酸二氢锂项目主体完工表明后一条路线正在获得产能支撑，可能降低对进口或外购前驱体的依赖。 [3]</a:t>
             </a:r>
             <a:endParaRPr lang="en-US" sz="960" dirty="0"/>
           </a:p>
@@ -12104,7 +12104,7 @@
                 <a:ea typeface="Aptos" pitchFamily="34" charset="-122"/>
                 <a:cs typeface="Aptos" pitchFamily="34" charset="-120"/>
               </a:rPr>
-              <a:t>依据：[1][2]</a:t>
+              <a:t>依据：[3]</a:t>
             </a:r>
             <a:endParaRPr lang="en-US" sz="740" dirty="0"/>
           </a:p>
@@ -12213,7 +12213,7 @@
                 <a:ea typeface="Microsoft YaHei" pitchFamily="34" charset="-122"/>
                 <a:cs typeface="Microsoft YaHei" pitchFamily="34" charset="-120"/>
               </a:rPr>
-              <a:t>高压实产品需求缺口和三元企业跨界共同指向技术路线向高压实密度集中，这与动力电池对能量密度和成本的双重要求相关。天赐材料中试量产和山东项目压实密度数据提供了产品性能参照，但公众号来源未披露循环寿命、倍率性能和批次稳定性等关键指标。需要继续调研高压实产品在不同电芯体系中的验证进展，以及跨界企业原有三元产线改造为铁锂产线的资本开支和良率爬坡情况。</a:t>
+              <a:t>该信号与今日结论中的供给缺口直接相关：前驱体自供能力决定高压实铁锂的稳定量产上限。若磷酸二氢锂路线成熟，可能影响现有外购前驱体的正极厂商成本结构，并改变高压实产品的竞争格局。需要验证的是该路线的产品一致性数据、下游电芯厂认证进度，以及与传统磷酸铁路线的成本对比。</a:t>
             </a:r>
             <a:endParaRPr lang="en-US" sz="960" dirty="0"/>
           </a:p>
@@ -12347,7 +12347,7 @@
                 <a:ea typeface="Microsoft YaHei" pitchFamily="34" charset="-122"/>
                 <a:cs typeface="Microsoft YaHei" pitchFamily="34" charset="-120"/>
               </a:rPr>
-              <a:t>若高压实产品在2027年成为动力电池主流选择，则具备2.5g/cm³以上压实密度稳定量产能力的企业可能获得客户倾斜；若下游电芯厂对高压实产品的循环和倍率性能验证不通过，则技术路线可能分化。跟踪指标：高压实产品批次稳定性数据、下游电芯厂验证公告、压实密度与循环寿命的平衡进展。证据边界：当前压实密度数据来自项目披露，缺乏第三方检测和长期循环数据。</a:t>
+              <a:t>若磷酸二氢锂路线在2027年一季度前实现批量供货且压实密度达标，则高压实铁锂前驱体外购比例可能下降，拥有该路线的企业议价能力增强；跟踪指标为项目试产公告、下游电芯厂认证通过数量；证据边界在于当前仅有主体完工信息，无量产数据。</a:t>
             </a:r>
             <a:endParaRPr lang="en-US" sz="960" dirty="0"/>
           </a:p>
@@ -12593,7 +12593,7 @@
                 <a:ea typeface="Microsoft YaHei" pitchFamily="34" charset="-122"/>
                 <a:cs typeface="Microsoft YaHei" pitchFamily="34" charset="-120"/>
               </a:rPr>
-              <a:t>高压实磷酸铁锂仍是技术升级</a:t>
+              <a:t>高压实磷酸铁锂的技术路线出</a:t>
             </a:r>
             <a:endParaRPr lang="en-US" sz="670" dirty="0"/>
           </a:p>
@@ -12700,7 +12700,7 @@
                 <a:ea typeface="Microsoft YaHei" pitchFamily="34" charset="-122"/>
                 <a:cs typeface="Microsoft YaHei" pitchFamily="34" charset="-120"/>
               </a:rPr>
-              <a:t>容百科技、当升科技等三元头</a:t>
+              <a:t>10万吨磷酸二氢锂项目主体</a:t>
             </a:r>
             <a:endParaRPr lang="en-US" sz="670" dirty="0"/>
           </a:p>
@@ -12807,7 +12807,7 @@
                 <a:ea typeface="Microsoft YaHei" pitchFamily="34" charset="-122"/>
                 <a:cs typeface="Microsoft YaHei" pitchFamily="34" charset="-120"/>
               </a:rPr>
-              <a:t>判断高压实密度是当前铁锂产</a:t>
+              <a:t>[3] 该信号与今日结论中</a:t>
             </a:r>
             <a:endParaRPr lang="en-US" sz="670" dirty="0"/>
           </a:p>
@@ -12914,7 +12914,7 @@
                 <a:ea typeface="Microsoft YaHei" pitchFamily="34" charset="-122"/>
                 <a:cs typeface="Microsoft YaHei" pitchFamily="34" charset="-120"/>
               </a:rPr>
-              <a:t>高压实磷酸铁锂仍是技术升级</a:t>
+              <a:t>高压实磷酸铁锂的技术路线出</a:t>
             </a:r>
             <a:endParaRPr lang="en-US" sz="670" dirty="0"/>
           </a:p>
@@ -13060,7 +13060,7 @@
                 <a:ea typeface="Microsoft YaHei" pitchFamily="34" charset="-122"/>
                 <a:cs typeface="Microsoft YaHei" pitchFamily="34" charset="-120"/>
               </a:rPr>
-              <a:t>若高压实产品在2027年成为动力电池主流选择，则具备2.5g/cm³以上压实密度稳定量产能力的企业可能获得客户倾斜</a:t>
+              <a:t>若磷酸二氢锂路线在2027年一季度前实现批量供货且压实密度达标，则高压实铁锂前驱体外购比例可能下降，拥有该路线的企业议价能力增强</a:t>
             </a:r>
             <a:endParaRPr lang="en-US" sz="1020" dirty="0"/>
           </a:p>
@@ -13209,7 +13209,7 @@
                 <a:ea typeface="Aptos" pitchFamily="34" charset="-122"/>
                 <a:cs typeface="Aptos" pitchFamily="34" charset="-120"/>
               </a:rPr>
-              <a:t>2026-10-28</a:t>
+              <a:t>2026-10-30</a:t>
             </a:r>
             <a:endParaRPr lang="en-US" sz="800" dirty="0"/>
           </a:p>
@@ -13415,7 +13415,7 @@
                 <a:ea typeface="Microsoft YaHei" pitchFamily="34" charset="-122"/>
                 <a:cs typeface="Microsoft YaHei" pitchFamily="34" charset="-120"/>
               </a:rPr>
-              <a:t>2 条公开来源交叉验证｜事实、影响与后续研判</a:t>
+              <a:t>1 条公开来源交叉验证｜事实、影响与后续研判</a:t>
             </a:r>
             <a:endParaRPr lang="en-US" sz="860" dirty="0"/>
           </a:p>
@@ -13524,7 +13524,7 @@
                 <a:ea typeface="Microsoft YaHei" pitchFamily="34" charset="-122"/>
                 <a:cs typeface="Microsoft YaHei" pitchFamily="34" charset="-120"/>
               </a:rPr>
-              <a:t>产能扩张与跨界入场并行：天赐材料终止三元项目转向16万吨高压实磷酸铁锂，容百科技、当升科技跨界入场；山东65万吨磷酸铁锂项目二期开工。判断铁锂产能仍在扩张，但高压实有效产能释放受客户认证和工艺爬坡约束，名义产能不等于稳定供货能力；跨界企业原有客户关系可能加速其铁锂产品导入。 [1][2]</a:t>
+              <a:t>供给端出现补链动作：10万吨磷酸二氢锂项目主体完工，指向高压实铁锂前驱体产能扩张；需求端行业全年需求约169万吨而稳定量产供货仅120万至135万吨，缺口约34万至49万吨，短期供给偏紧格局延续。 [1]</a:t>
             </a:r>
             <a:endParaRPr lang="en-US" sz="960" dirty="0"/>
           </a:p>
@@ -13565,7 +13565,7 @@
                 <a:ea typeface="Aptos" pitchFamily="34" charset="-122"/>
                 <a:cs typeface="Aptos" pitchFamily="34" charset="-120"/>
               </a:rPr>
-              <a:t>依据：[1][2]</a:t>
+              <a:t>依据：[1]</a:t>
             </a:r>
             <a:endParaRPr lang="en-US" sz="740" dirty="0"/>
           </a:p>
@@ -13674,7 +13674,7 @@
                 <a:ea typeface="Microsoft YaHei" pitchFamily="34" charset="-122"/>
                 <a:cs typeface="Microsoft YaHei" pitchFamily="34" charset="-120"/>
               </a:rPr>
-              <a:t>天赐材料转产和三元企业跨界说明铁锂高压实产品的客户需求确定性较高，山东项目二期开工则代表地方产能继续加码。但公众号来源未披露天赐材料16万吨项目的具体客户名单和订单锁定情况，也未披露容百科技、当升科技铁锂产品的目标客户。需要继续调研这些新增产能对应的下游电芯厂定点情况、产能爬坡周期以及是否存在产能过剩风险从普通铁锂向高压实产品蔓延。</a:t>
+              <a:t>该产能信号与需求缺口形成对照：前驱体补链是缓解缺口的必要条件，但主体完工到稳定量产仍有时间差，短期缺口难以快速填补。可能影响具备前驱体自供能力或已锁定前驱体长协的正极厂商，使其在客户订单获取上更具优势。需要调研的是该10万吨项目的下游客户意向、投产节奏，以及其他前驱体项目的在建进度。</a:t>
             </a:r>
             <a:endParaRPr lang="en-US" sz="960" dirty="0"/>
           </a:p>
@@ -13808,7 +13808,7 @@
                 <a:ea typeface="Microsoft YaHei" pitchFamily="34" charset="-122"/>
                 <a:cs typeface="Microsoft YaHei" pitchFamily="34" charset="-120"/>
               </a:rPr>
-              <a:t>若天赐材料16万吨项目和山东65万吨项目二期在2027年如期投产且下游订单锁定充分，则高压实供给缺口可能逐步收窄，行业加工费分化加剧；若客户认证进度慢于产能建设进度，则短期名义产能过剩与有效供给不足并存。跟踪指标：项目投产公告、下游电芯厂长协订单披露、产能利用率数据。证据边界：当前仅有开工和中试量产信息，缺乏订单和产能利用率数据。</a:t>
+              <a:t>若前驱体缺口在2027年上半年仍未收窄，则高压实铁锂正极价格可能维持坚挺，拥有前驱体产能的企业订单份额提升；跟踪指标为月度前驱体产量、正极厂开工率、下游电芯厂招标价格；证据边界在于缺口数据来自单一行业搜索摘要，需交叉验证。</a:t>
             </a:r>
             <a:endParaRPr lang="en-US" sz="960" dirty="0"/>
           </a:p>
@@ -13876,7 +13876,7 @@
                 <a:ea typeface="Microsoft YaHei" pitchFamily="34" charset="-122"/>
                 <a:cs typeface="Microsoft YaHei" pitchFamily="34" charset="-120"/>
               </a:rPr>
-              <a:t>对比矩阵</a:t>
+              <a:t>落地链路</a:t>
             </a:r>
             <a:endParaRPr lang="en-US" sz="1200" dirty="0"/>
           </a:p>
@@ -13890,38 +13890,17 @@
         </p:nvSpPr>
         <p:spPr>
           <a:xfrm>
-            <a:off x="7818120" y="2176272"/>
-            <a:ext cx="2487168" cy="1609344"/>
-          </a:xfrm>
-          <a:prstGeom prst="rect">
-            <a:avLst/>
+            <a:off x="7882128" y="2029968"/>
+            <a:ext cx="2377440" cy="365760"/>
+          </a:xfrm>
+          <a:prstGeom prst="roundRect">
+            <a:avLst>
+              <a:gd name="adj" fmla="val 10000"/>
+            </a:avLst>
           </a:prstGeom>
           <a:solidFill>
-            <a:srgbClr val="FFFFFF"/>
+            <a:srgbClr val="F4FAF6"/>
           </a:solidFill>
-          <a:ln w="10160">
-            <a:solidFill>
-              <a:srgbClr val="DADADA"/>
-            </a:solidFill>
-            <a:prstDash val="solid"/>
-          </a:ln>
-        </p:spPr>
-      </p:sp>
-      <p:sp>
-        <p:nvSpPr>
-          <p:cNvPr id="25" name="Shape 23"/>
-          <p:cNvSpPr/>
-          <p:nvPr/>
-        </p:nvSpPr>
-        <p:spPr>
-          <a:xfrm>
-            <a:off x="9061704" y="2176272"/>
-            <a:ext cx="0" cy="1609344"/>
-          </a:xfrm>
-          <a:prstGeom prst="line">
-            <a:avLst/>
-          </a:prstGeom>
-          <a:noFill/>
           <a:ln w="8890">
             <a:solidFill>
               <a:srgbClr val="DADADA"/>
@@ -13932,19 +13911,130 @@
       </p:sp>
       <p:sp>
         <p:nvSpPr>
-          <p:cNvPr id="26" name="Shape 24"/>
-          <p:cNvSpPr/>
-          <p:nvPr/>
-        </p:nvSpPr>
-        <p:spPr>
-          <a:xfrm>
-            <a:off x="7818120" y="2980944"/>
-            <a:ext cx="2487168" cy="0"/>
-          </a:xfrm>
-          <a:prstGeom prst="line">
-            <a:avLst/>
-          </a:prstGeom>
-          <a:noFill/>
+          <p:cNvPr id="25" name="Text 23"/>
+          <p:cNvSpPr/>
+          <p:nvPr/>
+        </p:nvSpPr>
+        <p:spPr>
+          <a:xfrm>
+            <a:off x="8028432" y="2139696"/>
+            <a:ext cx="566928" cy="109728"/>
+          </a:xfrm>
+          <a:prstGeom prst="rect">
+            <a:avLst/>
+          </a:prstGeom>
+          <a:noFill/>
+          <a:ln/>
+        </p:spPr>
+        <p:txBody>
+          <a:bodyPr wrap="square" lIns="0" tIns="0" rIns="0" bIns="0" rtlCol="0" anchor="ctr">
+            <a:normAutofit/>
+          </a:bodyPr>
+          <a:lstStyle/>
+          <a:p>
+            <a:pPr indent="0" marL="0">
+              <a:buNone/>
+            </a:pPr>
+            <a:r>
+              <a:rPr lang="en-US" sz="720" b="1" dirty="0">
+                <a:solidFill>
+                  <a:srgbClr val="487052"/>
+                </a:solidFill>
+                <a:latin typeface="Microsoft YaHei" pitchFamily="34" charset="0"/>
+                <a:ea typeface="Microsoft YaHei" pitchFamily="34" charset="-122"/>
+                <a:cs typeface="Microsoft YaHei" pitchFamily="34" charset="-120"/>
+              </a:rPr>
+              <a:t>产能</a:t>
+            </a:r>
+            <a:endParaRPr lang="en-US" sz="720" dirty="0"/>
+          </a:p>
+        </p:txBody>
+      </p:sp>
+      <p:sp>
+        <p:nvSpPr>
+          <p:cNvPr id="26" name="Text 24"/>
+          <p:cNvSpPr/>
+          <p:nvPr/>
+        </p:nvSpPr>
+        <p:spPr>
+          <a:xfrm>
+            <a:off x="8613648" y="2139696"/>
+            <a:ext cx="1481328" cy="109728"/>
+          </a:xfrm>
+          <a:prstGeom prst="rect">
+            <a:avLst/>
+          </a:prstGeom>
+          <a:noFill/>
+          <a:ln/>
+        </p:spPr>
+        <p:txBody>
+          <a:bodyPr wrap="square" lIns="0" tIns="0" rIns="0" bIns="0" rtlCol="0" anchor="ctr">
+            <a:normAutofit/>
+          </a:bodyPr>
+          <a:lstStyle/>
+          <a:p>
+            <a:pPr indent="0" marL="0">
+              <a:buNone/>
+            </a:pPr>
+            <a:r>
+              <a:rPr lang="en-US" sz="700" dirty="0">
+                <a:solidFill>
+                  <a:srgbClr val="121212"/>
+                </a:solidFill>
+                <a:latin typeface="Microsoft YaHei" pitchFamily="34" charset="0"/>
+                <a:ea typeface="Microsoft YaHei" pitchFamily="34" charset="-122"/>
+                <a:cs typeface="Microsoft YaHei" pitchFamily="34" charset="-120"/>
+              </a:rPr>
+              <a:t>供给端出现补链动作：10万吨磷酸二</a:t>
+            </a:r>
+            <a:endParaRPr lang="en-US" sz="700" dirty="0"/>
+          </a:p>
+        </p:txBody>
+      </p:sp>
+      <p:sp>
+        <p:nvSpPr>
+          <p:cNvPr id="27" name="Shape 25"/>
+          <p:cNvSpPr/>
+          <p:nvPr/>
+        </p:nvSpPr>
+        <p:spPr>
+          <a:xfrm>
+            <a:off x="8979408" y="2441448"/>
+            <a:ext cx="164592" cy="146304"/>
+          </a:xfrm>
+          <a:prstGeom prst="downArrow">
+            <a:avLst/>
+          </a:prstGeom>
+          <a:solidFill>
+            <a:srgbClr val="7F9D84"/>
+          </a:solidFill>
+          <a:ln w="12700">
+            <a:solidFill>
+              <a:srgbClr val="7F9D84"/>
+            </a:solidFill>
+            <a:prstDash val="solid"/>
+          </a:ln>
+        </p:spPr>
+      </p:sp>
+      <p:sp>
+        <p:nvSpPr>
+          <p:cNvPr id="28" name="Shape 26"/>
+          <p:cNvSpPr/>
+          <p:nvPr/>
+        </p:nvSpPr>
+        <p:spPr>
+          <a:xfrm>
+            <a:off x="7882128" y="2596896"/>
+            <a:ext cx="2377440" cy="365760"/>
+          </a:xfrm>
+          <a:prstGeom prst="roundRect">
+            <a:avLst>
+              <a:gd name="adj" fmla="val 10000"/>
+            </a:avLst>
+          </a:prstGeom>
+          <a:solidFill>
+            <a:srgbClr val="FFFFFF"/>
+          </a:solidFill>
           <a:ln w="8890">
             <a:solidFill>
               <a:srgbClr val="DADADA"/>
@@ -13955,22 +14045,131 @@
       </p:sp>
       <p:sp>
         <p:nvSpPr>
-          <p:cNvPr id="27" name="Shape 25"/>
-          <p:cNvSpPr/>
-          <p:nvPr/>
-        </p:nvSpPr>
-        <p:spPr>
-          <a:xfrm>
-            <a:off x="7818120" y="2176272"/>
-            <a:ext cx="1243584" cy="804672"/>
-          </a:xfrm>
-          <a:prstGeom prst="rect">
+          <p:cNvPr id="29" name="Text 27"/>
+          <p:cNvSpPr/>
+          <p:nvPr/>
+        </p:nvSpPr>
+        <p:spPr>
+          <a:xfrm>
+            <a:off x="8028432" y="2706624"/>
+            <a:ext cx="566928" cy="109728"/>
+          </a:xfrm>
+          <a:prstGeom prst="rect">
+            <a:avLst/>
+          </a:prstGeom>
+          <a:noFill/>
+          <a:ln/>
+        </p:spPr>
+        <p:txBody>
+          <a:bodyPr wrap="square" lIns="0" tIns="0" rIns="0" bIns="0" rtlCol="0" anchor="ctr">
+            <a:normAutofit/>
+          </a:bodyPr>
+          <a:lstStyle/>
+          <a:p>
+            <a:pPr indent="0" marL="0">
+              <a:buNone/>
+            </a:pPr>
+            <a:r>
+              <a:rPr lang="en-US" sz="720" b="1" dirty="0">
+                <a:solidFill>
+                  <a:srgbClr val="487052"/>
+                </a:solidFill>
+                <a:latin typeface="Microsoft YaHei" pitchFamily="34" charset="0"/>
+                <a:ea typeface="Microsoft YaHei" pitchFamily="34" charset="-122"/>
+                <a:cs typeface="Microsoft YaHei" pitchFamily="34" charset="-120"/>
+              </a:rPr>
+              <a:t>客户</a:t>
+            </a:r>
+            <a:endParaRPr lang="en-US" sz="720" dirty="0"/>
+          </a:p>
+        </p:txBody>
+      </p:sp>
+      <p:sp>
+        <p:nvSpPr>
+          <p:cNvPr id="30" name="Text 28"/>
+          <p:cNvSpPr/>
+          <p:nvPr/>
+        </p:nvSpPr>
+        <p:spPr>
+          <a:xfrm>
+            <a:off x="8613648" y="2706624"/>
+            <a:ext cx="1481328" cy="109728"/>
+          </a:xfrm>
+          <a:prstGeom prst="rect">
+            <a:avLst/>
+          </a:prstGeom>
+          <a:noFill/>
+          <a:ln/>
+        </p:spPr>
+        <p:txBody>
+          <a:bodyPr wrap="square" lIns="0" tIns="0" rIns="0" bIns="0" rtlCol="0" anchor="ctr">
+            <a:normAutofit/>
+          </a:bodyPr>
+          <a:lstStyle/>
+          <a:p>
+            <a:pPr indent="0" marL="0">
+              <a:buNone/>
+            </a:pPr>
+            <a:r>
+              <a:rPr lang="en-US" sz="700" dirty="0">
+                <a:solidFill>
+                  <a:srgbClr val="121212"/>
+                </a:solidFill>
+                <a:latin typeface="Microsoft YaHei" pitchFamily="34" charset="0"/>
+                <a:ea typeface="Microsoft YaHei" pitchFamily="34" charset="-122"/>
+                <a:cs typeface="Microsoft YaHei" pitchFamily="34" charset="-120"/>
+              </a:rPr>
+              <a:t>需求端行业全年需求约169万吨而稳</a:t>
+            </a:r>
+            <a:endParaRPr lang="en-US" sz="700" dirty="0"/>
+          </a:p>
+        </p:txBody>
+      </p:sp>
+      <p:sp>
+        <p:nvSpPr>
+          <p:cNvPr id="31" name="Shape 29"/>
+          <p:cNvSpPr/>
+          <p:nvPr/>
+        </p:nvSpPr>
+        <p:spPr>
+          <a:xfrm>
+            <a:off x="8979408" y="3008376"/>
+            <a:ext cx="164592" cy="146304"/>
+          </a:xfrm>
+          <a:prstGeom prst="downArrow">
             <a:avLst/>
           </a:prstGeom>
           <a:solidFill>
-            <a:srgbClr val="DDEBE0"/>
+            <a:srgbClr val="7F9D84"/>
           </a:solidFill>
-          <a:ln w="3810">
+          <a:ln w="12700">
+            <a:solidFill>
+              <a:srgbClr val="7F9D84"/>
+            </a:solidFill>
+            <a:prstDash val="solid"/>
+          </a:ln>
+        </p:spPr>
+      </p:sp>
+      <p:sp>
+        <p:nvSpPr>
+          <p:cNvPr id="32" name="Shape 30"/>
+          <p:cNvSpPr/>
+          <p:nvPr/>
+        </p:nvSpPr>
+        <p:spPr>
+          <a:xfrm>
+            <a:off x="7882128" y="3163824"/>
+            <a:ext cx="2377440" cy="365760"/>
+          </a:xfrm>
+          <a:prstGeom prst="roundRect">
+            <a:avLst>
+              <a:gd name="adj" fmla="val 10000"/>
+            </a:avLst>
+          </a:prstGeom>
+          <a:solidFill>
+            <a:srgbClr val="F4FAF6"/>
+          </a:solidFill>
+          <a:ln w="8890">
             <a:solidFill>
               <a:srgbClr val="DADADA"/>
             </a:solidFill>
@@ -13980,14 +14179,14 @@
       </p:sp>
       <p:sp>
         <p:nvSpPr>
-          <p:cNvPr id="28" name="Text 26"/>
-          <p:cNvSpPr/>
-          <p:nvPr/>
-        </p:nvSpPr>
-        <p:spPr>
-          <a:xfrm>
-            <a:off x="7891272" y="2286000"/>
-            <a:ext cx="438912" cy="109728"/>
+          <p:cNvPr id="33" name="Text 31"/>
+          <p:cNvSpPr/>
+          <p:nvPr/>
+        </p:nvSpPr>
+        <p:spPr>
+          <a:xfrm>
+            <a:off x="8028432" y="3273552"/>
+            <a:ext cx="566928" cy="109728"/>
           </a:xfrm>
           <a:prstGeom prst="rect">
             <a:avLst/>
@@ -14005,7 +14204,7 @@
               <a:buNone/>
             </a:pPr>
             <a:r>
-              <a:rPr lang="en-US" sz="710" b="1" dirty="0">
+              <a:rPr lang="en-US" sz="720" b="1" dirty="0">
                 <a:solidFill>
                   <a:srgbClr val="487052"/>
                 </a:solidFill>
@@ -14013,22 +14212,63 @@
                 <a:ea typeface="Microsoft YaHei" pitchFamily="34" charset="-122"/>
                 <a:cs typeface="Microsoft YaHei" pitchFamily="34" charset="-120"/>
               </a:rPr>
-              <a:t>路线A</a:t>
-            </a:r>
-            <a:endParaRPr lang="en-US" sz="710" dirty="0"/>
-          </a:p>
-        </p:txBody>
-      </p:sp>
-      <p:sp>
-        <p:nvSpPr>
-          <p:cNvPr id="29" name="Text 27"/>
-          <p:cNvSpPr/>
-          <p:nvPr/>
-        </p:nvSpPr>
-        <p:spPr>
-          <a:xfrm>
-            <a:off x="7891272" y="2505456"/>
-            <a:ext cx="1024128" cy="201168"/>
+              <a:t>落地</a:t>
+            </a:r>
+            <a:endParaRPr lang="en-US" sz="720" dirty="0"/>
+          </a:p>
+        </p:txBody>
+      </p:sp>
+      <p:sp>
+        <p:nvSpPr>
+          <p:cNvPr id="34" name="Text 32"/>
+          <p:cNvSpPr/>
+          <p:nvPr/>
+        </p:nvSpPr>
+        <p:spPr>
+          <a:xfrm>
+            <a:off x="8613648" y="3273552"/>
+            <a:ext cx="1481328" cy="109728"/>
+          </a:xfrm>
+          <a:prstGeom prst="rect">
+            <a:avLst/>
+          </a:prstGeom>
+          <a:noFill/>
+          <a:ln/>
+        </p:spPr>
+        <p:txBody>
+          <a:bodyPr wrap="square" lIns="0" tIns="0" rIns="0" bIns="0" rtlCol="0" anchor="ctr">
+            <a:normAutofit/>
+          </a:bodyPr>
+          <a:lstStyle/>
+          <a:p>
+            <a:pPr indent="0" marL="0">
+              <a:buNone/>
+            </a:pPr>
+            <a:r>
+              <a:rPr lang="en-US" sz="700" dirty="0">
+                <a:solidFill>
+                  <a:srgbClr val="121212"/>
+                </a:solidFill>
+                <a:latin typeface="Microsoft YaHei" pitchFamily="34" charset="0"/>
+                <a:ea typeface="Microsoft YaHei" pitchFamily="34" charset="-122"/>
+                <a:cs typeface="Microsoft YaHei" pitchFamily="34" charset="-120"/>
+              </a:rPr>
+              <a:t>[1] 该产能信号与需求缺口形成对</a:t>
+            </a:r>
+            <a:endParaRPr lang="en-US" sz="700" dirty="0"/>
+          </a:p>
+        </p:txBody>
+      </p:sp>
+      <p:sp>
+        <p:nvSpPr>
+          <p:cNvPr id="35" name="Text 33"/>
+          <p:cNvSpPr/>
+          <p:nvPr/>
+        </p:nvSpPr>
+        <p:spPr>
+          <a:xfrm>
+            <a:off x="7726680" y="4535424"/>
+            <a:ext cx="2697480" cy="310896"/>
           </a:xfrm>
           <a:prstGeom prst="rect">
             <a:avLst/>
@@ -14046,385 +14286,23 @@
               <a:buNone/>
             </a:pPr>
             <a:r>
-              <a:rPr lang="en-US" sz="670" dirty="0">
-                <a:solidFill>
-                  <a:srgbClr val="121212"/>
-                </a:solidFill>
-                <a:latin typeface="Microsoft YaHei" pitchFamily="34" charset="0"/>
-                <a:ea typeface="Microsoft YaHei" pitchFamily="34" charset="-122"/>
-                <a:cs typeface="Microsoft YaHei" pitchFamily="34" charset="-120"/>
-              </a:rPr>
-              <a:t>产能扩张与跨界入场并行：天</a:t>
-            </a:r>
-            <a:endParaRPr lang="en-US" sz="670" dirty="0"/>
-          </a:p>
-        </p:txBody>
-      </p:sp>
-      <p:sp>
-        <p:nvSpPr>
-          <p:cNvPr id="30" name="Shape 28"/>
-          <p:cNvSpPr/>
-          <p:nvPr/>
-        </p:nvSpPr>
-        <p:spPr>
-          <a:xfrm>
-            <a:off x="9061704" y="2176272"/>
-            <a:ext cx="1243584" cy="804672"/>
-          </a:xfrm>
-          <a:prstGeom prst="rect">
-            <a:avLst/>
-          </a:prstGeom>
-          <a:solidFill>
-            <a:srgbClr val="FFFFFF"/>
-          </a:solidFill>
-          <a:ln w="3810">
-            <a:solidFill>
-              <a:srgbClr val="DADADA"/>
-            </a:solidFill>
-            <a:prstDash val="solid"/>
-          </a:ln>
-        </p:spPr>
-      </p:sp>
-      <p:sp>
-        <p:nvSpPr>
-          <p:cNvPr id="31" name="Text 29"/>
-          <p:cNvSpPr/>
-          <p:nvPr/>
-        </p:nvSpPr>
-        <p:spPr>
-          <a:xfrm>
-            <a:off x="9134856" y="2286000"/>
-            <a:ext cx="438912" cy="109728"/>
-          </a:xfrm>
-          <a:prstGeom prst="rect">
-            <a:avLst/>
-          </a:prstGeom>
-          <a:noFill/>
-          <a:ln/>
-        </p:spPr>
-        <p:txBody>
-          <a:bodyPr wrap="square" lIns="0" tIns="0" rIns="0" bIns="0" rtlCol="0" anchor="ctr">
-            <a:normAutofit/>
-          </a:bodyPr>
-          <a:lstStyle/>
-          <a:p>
-            <a:pPr indent="0" marL="0">
-              <a:buNone/>
-            </a:pPr>
-            <a:r>
-              <a:rPr lang="en-US" sz="710" b="1" dirty="0">
-                <a:solidFill>
-                  <a:srgbClr val="487052"/>
-                </a:solidFill>
-                <a:latin typeface="Microsoft YaHei" pitchFamily="34" charset="0"/>
-                <a:ea typeface="Microsoft YaHei" pitchFamily="34" charset="-122"/>
-                <a:cs typeface="Microsoft YaHei" pitchFamily="34" charset="-120"/>
-              </a:rPr>
-              <a:t>路线B</a:t>
-            </a:r>
-            <a:endParaRPr lang="en-US" sz="710" dirty="0"/>
-          </a:p>
-        </p:txBody>
-      </p:sp>
-      <p:sp>
-        <p:nvSpPr>
-          <p:cNvPr id="32" name="Text 30"/>
-          <p:cNvSpPr/>
-          <p:nvPr/>
-        </p:nvSpPr>
-        <p:spPr>
-          <a:xfrm>
-            <a:off x="9134856" y="2505456"/>
-            <a:ext cx="1024128" cy="201168"/>
-          </a:xfrm>
-          <a:prstGeom prst="rect">
-            <a:avLst/>
-          </a:prstGeom>
-          <a:noFill/>
-          <a:ln/>
-        </p:spPr>
-        <p:txBody>
-          <a:bodyPr wrap="square" lIns="0" tIns="0" rIns="0" bIns="0" rtlCol="0" anchor="t">
-            <a:normAutofit/>
-          </a:bodyPr>
-          <a:lstStyle/>
-          <a:p>
-            <a:pPr indent="0" marL="0">
-              <a:buNone/>
-            </a:pPr>
-            <a:r>
-              <a:rPr lang="en-US" sz="670" dirty="0">
-                <a:solidFill>
-                  <a:srgbClr val="121212"/>
-                </a:solidFill>
-                <a:latin typeface="Microsoft YaHei" pitchFamily="34" charset="0"/>
-                <a:ea typeface="Microsoft YaHei" pitchFamily="34" charset="-122"/>
-                <a:cs typeface="Microsoft YaHei" pitchFamily="34" charset="-120"/>
-              </a:rPr>
-              <a:t>山东65万吨磷酸铁锂项目二</a:t>
-            </a:r>
-            <a:endParaRPr lang="en-US" sz="670" dirty="0"/>
-          </a:p>
-        </p:txBody>
-      </p:sp>
-      <p:sp>
-        <p:nvSpPr>
-          <p:cNvPr id="33" name="Shape 31"/>
-          <p:cNvSpPr/>
-          <p:nvPr/>
-        </p:nvSpPr>
-        <p:spPr>
-          <a:xfrm>
-            <a:off x="7818120" y="2980944"/>
-            <a:ext cx="1243584" cy="804672"/>
-          </a:xfrm>
-          <a:prstGeom prst="rect">
-            <a:avLst/>
-          </a:prstGeom>
-          <a:solidFill>
-            <a:srgbClr val="FFFFFF"/>
-          </a:solidFill>
-          <a:ln w="3810">
-            <a:solidFill>
-              <a:srgbClr val="DADADA"/>
-            </a:solidFill>
-            <a:prstDash val="solid"/>
-          </a:ln>
-        </p:spPr>
-      </p:sp>
-      <p:sp>
-        <p:nvSpPr>
-          <p:cNvPr id="34" name="Text 32"/>
-          <p:cNvSpPr/>
-          <p:nvPr/>
-        </p:nvSpPr>
-        <p:spPr>
-          <a:xfrm>
-            <a:off x="7891272" y="3090672"/>
-            <a:ext cx="438912" cy="109728"/>
-          </a:xfrm>
-          <a:prstGeom prst="rect">
-            <a:avLst/>
-          </a:prstGeom>
-          <a:noFill/>
-          <a:ln/>
-        </p:spPr>
-        <p:txBody>
-          <a:bodyPr wrap="square" lIns="0" tIns="0" rIns="0" bIns="0" rtlCol="0" anchor="ctr">
-            <a:normAutofit/>
-          </a:bodyPr>
-          <a:lstStyle/>
-          <a:p>
-            <a:pPr indent="0" marL="0">
-              <a:buNone/>
-            </a:pPr>
-            <a:r>
-              <a:rPr lang="en-US" sz="710" b="1" dirty="0">
-                <a:solidFill>
-                  <a:srgbClr val="487052"/>
-                </a:solidFill>
-                <a:latin typeface="Microsoft YaHei" pitchFamily="34" charset="0"/>
-                <a:ea typeface="Microsoft YaHei" pitchFamily="34" charset="-122"/>
-                <a:cs typeface="Microsoft YaHei" pitchFamily="34" charset="-120"/>
-              </a:rPr>
-              <a:t>机会</a:t>
-            </a:r>
-            <a:endParaRPr lang="en-US" sz="710" dirty="0"/>
-          </a:p>
-        </p:txBody>
-      </p:sp>
-      <p:sp>
-        <p:nvSpPr>
-          <p:cNvPr id="35" name="Text 33"/>
-          <p:cNvSpPr/>
-          <p:nvPr/>
-        </p:nvSpPr>
-        <p:spPr>
-          <a:xfrm>
-            <a:off x="7891272" y="3310128"/>
-            <a:ext cx="1024128" cy="201168"/>
-          </a:xfrm>
-          <a:prstGeom prst="rect">
-            <a:avLst/>
-          </a:prstGeom>
-          <a:noFill/>
-          <a:ln/>
-        </p:spPr>
-        <p:txBody>
-          <a:bodyPr wrap="square" lIns="0" tIns="0" rIns="0" bIns="0" rtlCol="0" anchor="t">
-            <a:normAutofit/>
-          </a:bodyPr>
-          <a:lstStyle/>
-          <a:p>
-            <a:pPr indent="0" marL="0">
-              <a:buNone/>
-            </a:pPr>
-            <a:r>
-              <a:rPr lang="en-US" sz="670" dirty="0">
-                <a:solidFill>
-                  <a:srgbClr val="121212"/>
-                </a:solidFill>
-                <a:latin typeface="Microsoft YaHei" pitchFamily="34" charset="0"/>
-                <a:ea typeface="Microsoft YaHei" pitchFamily="34" charset="-122"/>
-                <a:cs typeface="Microsoft YaHei" pitchFamily="34" charset="-120"/>
-              </a:rPr>
-              <a:t>判断铁锂产能仍在扩张，但高</a:t>
-            </a:r>
-            <a:endParaRPr lang="en-US" sz="670" dirty="0"/>
+              <a:rPr lang="en-US" sz="760" dirty="0">
+                <a:solidFill>
+                  <a:srgbClr val="6D756F"/>
+                </a:solidFill>
+                <a:latin typeface="Microsoft YaHei" pitchFamily="34" charset="0"/>
+                <a:ea typeface="Microsoft YaHei" pitchFamily="34" charset="-122"/>
+                <a:cs typeface="Microsoft YaHei" pitchFamily="34" charset="-120"/>
+              </a:rPr>
+              <a:t>用企业、项目、产能、客户的链路承接文字结论。</a:t>
+            </a:r>
+            <a:endParaRPr lang="en-US" sz="760" dirty="0"/>
           </a:p>
         </p:txBody>
       </p:sp>
       <p:sp>
         <p:nvSpPr>
           <p:cNvPr id="36" name="Shape 34"/>
-          <p:cNvSpPr/>
-          <p:nvPr/>
-        </p:nvSpPr>
-        <p:spPr>
-          <a:xfrm>
-            <a:off x="9061704" y="2980944"/>
-            <a:ext cx="1243584" cy="804672"/>
-          </a:xfrm>
-          <a:prstGeom prst="rect">
-            <a:avLst/>
-          </a:prstGeom>
-          <a:solidFill>
-            <a:srgbClr val="F4FAF6"/>
-          </a:solidFill>
-          <a:ln w="3810">
-            <a:solidFill>
-              <a:srgbClr val="DADADA"/>
-            </a:solidFill>
-            <a:prstDash val="solid"/>
-          </a:ln>
-        </p:spPr>
-      </p:sp>
-      <p:sp>
-        <p:nvSpPr>
-          <p:cNvPr id="37" name="Text 35"/>
-          <p:cNvSpPr/>
-          <p:nvPr/>
-        </p:nvSpPr>
-        <p:spPr>
-          <a:xfrm>
-            <a:off x="9134856" y="3090672"/>
-            <a:ext cx="438912" cy="109728"/>
-          </a:xfrm>
-          <a:prstGeom prst="rect">
-            <a:avLst/>
-          </a:prstGeom>
-          <a:noFill/>
-          <a:ln/>
-        </p:spPr>
-        <p:txBody>
-          <a:bodyPr wrap="square" lIns="0" tIns="0" rIns="0" bIns="0" rtlCol="0" anchor="ctr">
-            <a:normAutofit/>
-          </a:bodyPr>
-          <a:lstStyle/>
-          <a:p>
-            <a:pPr indent="0" marL="0">
-              <a:buNone/>
-            </a:pPr>
-            <a:r>
-              <a:rPr lang="en-US" sz="710" b="1" dirty="0">
-                <a:solidFill>
-                  <a:srgbClr val="487052"/>
-                </a:solidFill>
-                <a:latin typeface="Microsoft YaHei" pitchFamily="34" charset="0"/>
-                <a:ea typeface="Microsoft YaHei" pitchFamily="34" charset="-122"/>
-                <a:cs typeface="Microsoft YaHei" pitchFamily="34" charset="-120"/>
-              </a:rPr>
-              <a:t>约束</a:t>
-            </a:r>
-            <a:endParaRPr lang="en-US" sz="710" dirty="0"/>
-          </a:p>
-        </p:txBody>
-      </p:sp>
-      <p:sp>
-        <p:nvSpPr>
-          <p:cNvPr id="38" name="Text 36"/>
-          <p:cNvSpPr/>
-          <p:nvPr/>
-        </p:nvSpPr>
-        <p:spPr>
-          <a:xfrm>
-            <a:off x="9134856" y="3310128"/>
-            <a:ext cx="1024128" cy="201168"/>
-          </a:xfrm>
-          <a:prstGeom prst="rect">
-            <a:avLst/>
-          </a:prstGeom>
-          <a:noFill/>
-          <a:ln/>
-        </p:spPr>
-        <p:txBody>
-          <a:bodyPr wrap="square" lIns="0" tIns="0" rIns="0" bIns="0" rtlCol="0" anchor="t">
-            <a:normAutofit/>
-          </a:bodyPr>
-          <a:lstStyle/>
-          <a:p>
-            <a:pPr indent="0" marL="0">
-              <a:buNone/>
-            </a:pPr>
-            <a:r>
-              <a:rPr lang="en-US" sz="670" dirty="0">
-                <a:solidFill>
-                  <a:srgbClr val="121212"/>
-                </a:solidFill>
-                <a:latin typeface="Microsoft YaHei" pitchFamily="34" charset="0"/>
-                <a:ea typeface="Microsoft YaHei" pitchFamily="34" charset="-122"/>
-                <a:cs typeface="Microsoft YaHei" pitchFamily="34" charset="-120"/>
-              </a:rPr>
-              <a:t>产能扩张与跨界入场并行：天</a:t>
-            </a:r>
-            <a:endParaRPr lang="en-US" sz="670" dirty="0"/>
-          </a:p>
-        </p:txBody>
-      </p:sp>
-      <p:sp>
-        <p:nvSpPr>
-          <p:cNvPr id="39" name="Text 37"/>
-          <p:cNvSpPr/>
-          <p:nvPr/>
-        </p:nvSpPr>
-        <p:spPr>
-          <a:xfrm>
-            <a:off x="7726680" y="4187952"/>
-            <a:ext cx="2697480" cy="493776"/>
-          </a:xfrm>
-          <a:prstGeom prst="rect">
-            <a:avLst/>
-          </a:prstGeom>
-          <a:noFill/>
-          <a:ln/>
-        </p:spPr>
-        <p:txBody>
-          <a:bodyPr wrap="square" lIns="0" tIns="0" rIns="0" bIns="0" rtlCol="0" anchor="t">
-            <a:normAutofit/>
-          </a:bodyPr>
-          <a:lstStyle/>
-          <a:p>
-            <a:pPr indent="0" marL="0">
-              <a:buNone/>
-            </a:pPr>
-            <a:r>
-              <a:rPr lang="en-US" sz="760" dirty="0">
-                <a:solidFill>
-                  <a:srgbClr val="6D756F"/>
-                </a:solidFill>
-                <a:latin typeface="Microsoft YaHei" pitchFamily="34" charset="0"/>
-                <a:ea typeface="Microsoft YaHei" pitchFamily="34" charset="-122"/>
-                <a:cs typeface="Microsoft YaHei" pitchFamily="34" charset="-120"/>
-              </a:rPr>
-              <a:t>检测到对比/分类信号，用矩阵压缩呈现，不新增外部判断。</a:t>
-            </a:r>
-            <a:endParaRPr lang="en-US" sz="760" dirty="0"/>
-          </a:p>
-        </p:txBody>
-      </p:sp>
-      <p:sp>
-        <p:nvSpPr>
-          <p:cNvPr id="40" name="Shape 38"/>
           <p:cNvSpPr/>
           <p:nvPr/>
         </p:nvSpPr>
@@ -14449,7 +14327,7 @@
       </p:sp>
       <p:sp>
         <p:nvSpPr>
-          <p:cNvPr id="41" name="Text 39"/>
+          <p:cNvPr id="37" name="Text 35"/>
           <p:cNvSpPr/>
           <p:nvPr/>
         </p:nvSpPr>
@@ -14488,7 +14366,7 @@
       </p:sp>
       <p:sp>
         <p:nvSpPr>
-          <p:cNvPr id="42" name="Text 40"/>
+          <p:cNvPr id="38" name="Text 36"/>
           <p:cNvSpPr/>
           <p:nvPr/>
         </p:nvSpPr>
@@ -14521,7 +14399,7 @@
                 <a:ea typeface="Microsoft YaHei" pitchFamily="34" charset="-122"/>
                 <a:cs typeface="Microsoft YaHei" pitchFamily="34" charset="-120"/>
               </a:rPr>
-              <a:t>若天赐材料16万吨项目和山东65万吨项目二期在2027年如期投产且下游订单锁定充分，则高压实供给缺口可能逐步收窄，行业加工费分化加剧</a:t>
+              <a:t>若前驱体缺口在2027年上半年仍未收窄，则高压实铁锂正极价格可能维持坚挺，拥有前驱体产能的企业订单份额提升</a:t>
             </a:r>
             <a:endParaRPr lang="en-US" sz="1020" dirty="0"/>
           </a:p>
@@ -14670,7 +14548,7 @@
                 <a:ea typeface="Aptos" pitchFamily="34" charset="-122"/>
                 <a:cs typeface="Aptos" pitchFamily="34" charset="-120"/>
               </a:rPr>
-              <a:t>2026-10-28</a:t>
+              <a:t>2026-10-30</a:t>
             </a:r>
             <a:endParaRPr lang="en-US" sz="800" dirty="0"/>
           </a:p>
@@ -14985,7 +14863,7 @@
                 <a:ea typeface="Microsoft YaHei" pitchFamily="34" charset="-122"/>
                 <a:cs typeface="Microsoft YaHei" pitchFamily="34" charset="-120"/>
               </a:rPr>
-              <a:t>高压实产品供需缺口对价格形成支撑：2026年高压实磷酸铁锂需求约169万吨，稳定量产供给约120万吨，缺口约49万吨；天赐材料终止三元项目转产高压实铁锂，反映企业将资本开支向盈利确定性更高的产品倾斜。判断高压实产品加工费相对普通铁锂产品有溢价，但新产能释放后溢价可能收窄，普通铁锂产品盈利压力仍存。 [1]</a:t>
+              <a:t>供给缺口约34万至49万吨的格局下，高压实磷酸铁锂前驱体及正极材料价格存在支撑；但前驱体补链项目推进可能在中长期缓解紧张，价格上行空间受制于新增产能投放节奏，外购前驱体的正极厂商短期盈利压力相对更大。 [1]</a:t>
             </a:r>
             <a:endParaRPr lang="en-US" sz="960" dirty="0"/>
           </a:p>
@@ -15135,7 +15013,7 @@
                 <a:ea typeface="Microsoft YaHei" pitchFamily="34" charset="-122"/>
                 <a:cs typeface="Microsoft YaHei" pitchFamily="34" charset="-120"/>
               </a:rPr>
-              <a:t>供需缺口数据直接指向高压实产品价格支撑，天赐材料转产决策则从企业资本配置角度印证高压实产品盈利预期优于三元项目。但公众号来源未披露高压实产品当前加工费具体水平、与普通铁锂产品的价差以及原材料碳酸锂价格波动对成本的影响。需要继续调研高压实产品月度价格走势、新进入者报价策略以及下游电芯厂对加工费上涨的接受程度，以判断盈利压力是否从普通产品向高压实产品传导。</a:t>
+              <a:t>价格信号与产能信号互为因果：缺口支撑价格，而补链项目是价格回落的潜在变量。当前主体完工尚未形成实际供给，因此短期价格支撑逻辑强于回落逻辑。可能影响外购前驱体比例高的正极企业毛利率，而一体化企业相对受益。需要跟踪磷酸二氢锂现货报价、前驱体加工费以及正极厂库存天数。</a:t>
             </a:r>
             <a:endParaRPr lang="en-US" sz="960" dirty="0"/>
           </a:p>
@@ -15269,7 +15147,7 @@
                 <a:ea typeface="Microsoft YaHei" pitchFamily="34" charset="-122"/>
                 <a:cs typeface="Microsoft YaHei" pitchFamily="34" charset="-120"/>
               </a:rPr>
-              <a:t>若高压实产品供给缺口在2027年上半年维持，则具备稳定量产能力的企业加工费有望保持溢价；若新产能集中释放且下游需求增速放缓，则高压实产品溢价可能收窄，行业盈利分化加剧。跟踪指标：高压实与普通铁锂产品价差、碳酸锂现货价格、电芯厂招标报价。证据边界：当前仅有供需缺口测算，缺乏实际成交价格数据。</a:t>
+              <a:t>若前驱体新增产能于2027年下半年集中释放，则高压实铁锂前驱体价格可能承压，外购厂商成本压力缓解但一体化厂商溢价收窄；跟踪指标为季度前驱体产能投放量、磷酸二氢锂市场均价；证据边界在于当前仅有主体完工信息，实际产出时间不确定。</a:t>
             </a:r>
             <a:endParaRPr lang="en-US" sz="960" dirty="0"/>
           </a:p>
@@ -15337,7 +15215,7 @@
                 <a:ea typeface="Microsoft YaHei" pitchFamily="34" charset="-122"/>
                 <a:cs typeface="Microsoft YaHei" pitchFamily="34" charset="-120"/>
               </a:rPr>
-              <a:t>对比矩阵</a:t>
+              <a:t>因果图</a:t>
             </a:r>
             <a:endParaRPr lang="en-US" sz="1200" dirty="0"/>
           </a:p>
@@ -15351,16 +15229,128 @@
         </p:nvSpPr>
         <p:spPr>
           <a:xfrm>
-            <a:off x="7818120" y="2176272"/>
-            <a:ext cx="2487168" cy="1609344"/>
-          </a:xfrm>
-          <a:prstGeom prst="rect">
+            <a:off x="7845552" y="3063240"/>
+            <a:ext cx="2432304" cy="0"/>
+          </a:xfrm>
+          <a:prstGeom prst="line">
+            <a:avLst/>
+          </a:prstGeom>
+          <a:noFill/>
+          <a:ln w="15240">
+            <a:solidFill>
+              <a:srgbClr val="487052"/>
+            </a:solidFill>
+            <a:prstDash val="solid"/>
+          </a:ln>
+        </p:spPr>
+      </p:sp>
+      <p:sp>
+        <p:nvSpPr>
+          <p:cNvPr id="25" name="Shape 23"/>
+          <p:cNvSpPr/>
+          <p:nvPr/>
+        </p:nvSpPr>
+        <p:spPr>
+          <a:xfrm>
+            <a:off x="10012680" y="2889504"/>
+            <a:ext cx="384048" cy="347472"/>
+          </a:xfrm>
+          <a:prstGeom prst="rightArrow">
             <a:avLst/>
           </a:prstGeom>
           <a:solidFill>
-            <a:srgbClr val="FFFFFF"/>
+            <a:srgbClr val="487052"/>
           </a:solidFill>
-          <a:ln w="10160">
+          <a:ln w="12700">
+            <a:solidFill>
+              <a:srgbClr val="487052"/>
+            </a:solidFill>
+            <a:prstDash val="solid"/>
+          </a:ln>
+        </p:spPr>
+      </p:sp>
+      <p:sp>
+        <p:nvSpPr>
+          <p:cNvPr id="26" name="Text 24"/>
+          <p:cNvSpPr/>
+          <p:nvPr/>
+        </p:nvSpPr>
+        <p:spPr>
+          <a:xfrm>
+            <a:off x="9893808" y="3310128"/>
+            <a:ext cx="475488" cy="146304"/>
+          </a:xfrm>
+          <a:prstGeom prst="rect">
+            <a:avLst/>
+          </a:prstGeom>
+          <a:noFill/>
+          <a:ln/>
+        </p:spPr>
+        <p:txBody>
+          <a:bodyPr wrap="square" lIns="0" tIns="0" rIns="0" bIns="0" rtlCol="0" anchor="ctr"/>
+          <a:lstStyle/>
+          <a:p>
+            <a:pPr algn="ctr" indent="0" marL="0">
+              <a:buNone/>
+            </a:pPr>
+            <a:r>
+              <a:rPr lang="en-US" sz="740" b="1" dirty="0">
+                <a:solidFill>
+                  <a:srgbClr val="487052"/>
+                </a:solidFill>
+                <a:latin typeface="Microsoft YaHei" pitchFamily="34" charset="0"/>
+                <a:ea typeface="Microsoft YaHei" pitchFamily="34" charset="-122"/>
+                <a:cs typeface="Microsoft YaHei" pitchFamily="34" charset="-120"/>
+              </a:rPr>
+              <a:t>影响</a:t>
+            </a:r>
+            <a:endParaRPr lang="en-US" sz="740" dirty="0"/>
+          </a:p>
+        </p:txBody>
+      </p:sp>
+      <p:sp>
+        <p:nvSpPr>
+          <p:cNvPr id="27" name="Shape 25"/>
+          <p:cNvSpPr/>
+          <p:nvPr/>
+        </p:nvSpPr>
+        <p:spPr>
+          <a:xfrm>
+            <a:off x="8028432" y="2359152"/>
+            <a:ext cx="402336" cy="704088"/>
+          </a:xfrm>
+          <a:prstGeom prst="line">
+            <a:avLst/>
+          </a:prstGeom>
+          <a:noFill/>
+          <a:ln w="11430">
+            <a:solidFill>
+              <a:srgbClr val="7F9D84"/>
+            </a:solidFill>
+            <a:prstDash val="solid"/>
+          </a:ln>
+        </p:spPr>
+      </p:sp>
+      <p:sp>
+        <p:nvSpPr>
+          <p:cNvPr id="28" name="Shape 26"/>
+          <p:cNvSpPr/>
+          <p:nvPr/>
+        </p:nvSpPr>
+        <p:spPr>
+          <a:xfrm>
+            <a:off x="7882128" y="2249424"/>
+            <a:ext cx="786384" cy="310896"/>
+          </a:xfrm>
+          <a:prstGeom prst="roundRect">
+            <a:avLst>
+              <a:gd name="adj" fmla="val 11765"/>
+            </a:avLst>
+          </a:prstGeom>
+          <a:solidFill>
+            <a:srgbClr val="F4FAF6"/>
+          </a:solidFill>
+          <a:ln w="7620">
             <a:solidFill>
               <a:srgbClr val="DADADA"/>
             </a:solidFill>
@@ -15370,20 +15360,129 @@
       </p:sp>
       <p:sp>
         <p:nvSpPr>
-          <p:cNvPr id="25" name="Shape 23"/>
-          <p:cNvSpPr/>
-          <p:nvPr/>
-        </p:nvSpPr>
-        <p:spPr>
-          <a:xfrm>
-            <a:off x="9061704" y="2176272"/>
-            <a:ext cx="0" cy="1609344"/>
+          <p:cNvPr id="29" name="Text 27"/>
+          <p:cNvSpPr/>
+          <p:nvPr/>
+        </p:nvSpPr>
+        <p:spPr>
+          <a:xfrm>
+            <a:off x="7973568" y="2350008"/>
+            <a:ext cx="603504" cy="91440"/>
+          </a:xfrm>
+          <a:prstGeom prst="rect">
+            <a:avLst/>
+          </a:prstGeom>
+          <a:noFill/>
+          <a:ln/>
+        </p:spPr>
+        <p:txBody>
+          <a:bodyPr wrap="square" lIns="0" tIns="0" rIns="0" bIns="0" rtlCol="0" anchor="ctr">
+            <a:normAutofit/>
+          </a:bodyPr>
+          <a:lstStyle/>
+          <a:p>
+            <a:pPr algn="ctr" indent="0" marL="0">
+              <a:buNone/>
+            </a:pPr>
+            <a:r>
+              <a:rPr lang="en-US" sz="680" b="1" dirty="0">
+                <a:solidFill>
+                  <a:srgbClr val="487052"/>
+                </a:solidFill>
+                <a:latin typeface="Microsoft YaHei" pitchFamily="34" charset="0"/>
+                <a:ea typeface="Microsoft YaHei" pitchFamily="34" charset="-122"/>
+                <a:cs typeface="Microsoft YaHei" pitchFamily="34" charset="-120"/>
+              </a:rPr>
+              <a:t>价格</a:t>
+            </a:r>
+            <a:endParaRPr lang="en-US" sz="680" dirty="0"/>
+          </a:p>
+        </p:txBody>
+      </p:sp>
+      <p:sp>
+        <p:nvSpPr>
+          <p:cNvPr id="30" name="Text 28"/>
+          <p:cNvSpPr/>
+          <p:nvPr/>
+        </p:nvSpPr>
+        <p:spPr>
+          <a:xfrm>
+            <a:off x="7863840" y="1956816"/>
+            <a:ext cx="822960" cy="219456"/>
+          </a:xfrm>
+          <a:prstGeom prst="rect">
+            <a:avLst/>
+          </a:prstGeom>
+          <a:noFill/>
+          <a:ln/>
+        </p:spPr>
+        <p:txBody>
+          <a:bodyPr wrap="square" lIns="0" tIns="0" rIns="0" bIns="0" rtlCol="0" anchor="t">
+            <a:normAutofit/>
+          </a:bodyPr>
+          <a:lstStyle/>
+          <a:p>
+            <a:pPr algn="ctr" indent="0" marL="0">
+              <a:buNone/>
+            </a:pPr>
+            <a:r>
+              <a:rPr lang="en-US" sz="640" dirty="0">
+                <a:solidFill>
+                  <a:srgbClr val="121212"/>
+                </a:solidFill>
+                <a:latin typeface="Microsoft YaHei" pitchFamily="34" charset="0"/>
+                <a:ea typeface="Microsoft YaHei" pitchFamily="34" charset="-122"/>
+                <a:cs typeface="Microsoft YaHei" pitchFamily="34" charset="-120"/>
+              </a:rPr>
+              <a:t>供给缺口约34万至</a:t>
+            </a:r>
+            <a:endParaRPr lang="en-US" sz="640" dirty="0"/>
+          </a:p>
+        </p:txBody>
+      </p:sp>
+      <p:sp>
+        <p:nvSpPr>
+          <p:cNvPr id="31" name="Shape 29"/>
+          <p:cNvSpPr/>
+          <p:nvPr/>
+        </p:nvSpPr>
+        <p:spPr>
+          <a:xfrm>
+            <a:off x="8686800" y="3063240"/>
+            <a:ext cx="402336" cy="685800"/>
           </a:xfrm>
           <a:prstGeom prst="line">
             <a:avLst/>
           </a:prstGeom>
           <a:noFill/>
-          <a:ln w="8890">
+          <a:ln w="11430">
+            <a:solidFill>
+              <a:srgbClr val="7F9D84"/>
+            </a:solidFill>
+            <a:prstDash val="solid"/>
+          </a:ln>
+        </p:spPr>
+      </p:sp>
+      <p:sp>
+        <p:nvSpPr>
+          <p:cNvPr id="32" name="Shape 30"/>
+          <p:cNvSpPr/>
+          <p:nvPr/>
+        </p:nvSpPr>
+        <p:spPr>
+          <a:xfrm>
+            <a:off x="8540496" y="3639312"/>
+            <a:ext cx="786384" cy="310896"/>
+          </a:xfrm>
+          <a:prstGeom prst="roundRect">
+            <a:avLst>
+              <a:gd name="adj" fmla="val 11765"/>
+            </a:avLst>
+          </a:prstGeom>
+          <a:solidFill>
+            <a:srgbClr val="F4FAF6"/>
+          </a:solidFill>
+          <a:ln w="7620">
             <a:solidFill>
               <a:srgbClr val="DADADA"/>
             </a:solidFill>
@@ -15393,20 +15492,129 @@
       </p:sp>
       <p:sp>
         <p:nvSpPr>
-          <p:cNvPr id="26" name="Shape 24"/>
-          <p:cNvSpPr/>
-          <p:nvPr/>
-        </p:nvSpPr>
-        <p:spPr>
-          <a:xfrm>
-            <a:off x="7818120" y="2980944"/>
-            <a:ext cx="2487168" cy="0"/>
+          <p:cNvPr id="33" name="Text 31"/>
+          <p:cNvSpPr/>
+          <p:nvPr/>
+        </p:nvSpPr>
+        <p:spPr>
+          <a:xfrm>
+            <a:off x="8631936" y="3739896"/>
+            <a:ext cx="603504" cy="91440"/>
+          </a:xfrm>
+          <a:prstGeom prst="rect">
+            <a:avLst/>
+          </a:prstGeom>
+          <a:noFill/>
+          <a:ln/>
+        </p:spPr>
+        <p:txBody>
+          <a:bodyPr wrap="square" lIns="0" tIns="0" rIns="0" bIns="0" rtlCol="0" anchor="ctr">
+            <a:normAutofit/>
+          </a:bodyPr>
+          <a:lstStyle/>
+          <a:p>
+            <a:pPr algn="ctr" indent="0" marL="0">
+              <a:buNone/>
+            </a:pPr>
+            <a:r>
+              <a:rPr lang="en-US" sz="680" b="1" dirty="0">
+                <a:solidFill>
+                  <a:srgbClr val="487052"/>
+                </a:solidFill>
+                <a:latin typeface="Microsoft YaHei" pitchFamily="34" charset="0"/>
+                <a:ea typeface="Microsoft YaHei" pitchFamily="34" charset="-122"/>
+                <a:cs typeface="Microsoft YaHei" pitchFamily="34" charset="-120"/>
+              </a:rPr>
+              <a:t>成本</a:t>
+            </a:r>
+            <a:endParaRPr lang="en-US" sz="680" dirty="0"/>
+          </a:p>
+        </p:txBody>
+      </p:sp>
+      <p:sp>
+        <p:nvSpPr>
+          <p:cNvPr id="34" name="Text 32"/>
+          <p:cNvSpPr/>
+          <p:nvPr/>
+        </p:nvSpPr>
+        <p:spPr>
+          <a:xfrm>
+            <a:off x="8522208" y="4005072"/>
+            <a:ext cx="822960" cy="219456"/>
+          </a:xfrm>
+          <a:prstGeom prst="rect">
+            <a:avLst/>
+          </a:prstGeom>
+          <a:noFill/>
+          <a:ln/>
+        </p:spPr>
+        <p:txBody>
+          <a:bodyPr wrap="square" lIns="0" tIns="0" rIns="0" bIns="0" rtlCol="0" anchor="t">
+            <a:normAutofit/>
+          </a:bodyPr>
+          <a:lstStyle/>
+          <a:p>
+            <a:pPr algn="ctr" indent="0" marL="0">
+              <a:buNone/>
+            </a:pPr>
+            <a:r>
+              <a:rPr lang="en-US" sz="640" dirty="0">
+                <a:solidFill>
+                  <a:srgbClr val="121212"/>
+                </a:solidFill>
+                <a:latin typeface="Microsoft YaHei" pitchFamily="34" charset="0"/>
+                <a:ea typeface="Microsoft YaHei" pitchFamily="34" charset="-122"/>
+                <a:cs typeface="Microsoft YaHei" pitchFamily="34" charset="-120"/>
+              </a:rPr>
+              <a:t>但前驱体补链项目推</a:t>
+            </a:r>
+            <a:endParaRPr lang="en-US" sz="640" dirty="0"/>
+          </a:p>
+        </p:txBody>
+      </p:sp>
+      <p:sp>
+        <p:nvSpPr>
+          <p:cNvPr id="35" name="Shape 33"/>
+          <p:cNvSpPr/>
+          <p:nvPr/>
+        </p:nvSpPr>
+        <p:spPr>
+          <a:xfrm>
+            <a:off x="9345168" y="2359152"/>
+            <a:ext cx="402336" cy="704088"/>
           </a:xfrm>
           <a:prstGeom prst="line">
             <a:avLst/>
           </a:prstGeom>
           <a:noFill/>
-          <a:ln w="8890">
+          <a:ln w="11430">
+            <a:solidFill>
+              <a:srgbClr val="7F9D84"/>
+            </a:solidFill>
+            <a:prstDash val="solid"/>
+          </a:ln>
+        </p:spPr>
+      </p:sp>
+      <p:sp>
+        <p:nvSpPr>
+          <p:cNvPr id="36" name="Shape 34"/>
+          <p:cNvSpPr/>
+          <p:nvPr/>
+        </p:nvSpPr>
+        <p:spPr>
+          <a:xfrm>
+            <a:off x="9198864" y="2249424"/>
+            <a:ext cx="786384" cy="310896"/>
+          </a:xfrm>
+          <a:prstGeom prst="roundRect">
+            <a:avLst>
+              <a:gd name="adj" fmla="val 11765"/>
+            </a:avLst>
+          </a:prstGeom>
+          <a:solidFill>
+            <a:srgbClr val="F4FAF6"/>
+          </a:solidFill>
+          <a:ln w="7620">
             <a:solidFill>
               <a:srgbClr val="DADADA"/>
             </a:solidFill>
@@ -15416,39 +15624,14 @@
       </p:sp>
       <p:sp>
         <p:nvSpPr>
-          <p:cNvPr id="27" name="Shape 25"/>
-          <p:cNvSpPr/>
-          <p:nvPr/>
-        </p:nvSpPr>
-        <p:spPr>
-          <a:xfrm>
-            <a:off x="7818120" y="2176272"/>
-            <a:ext cx="1243584" cy="804672"/>
-          </a:xfrm>
-          <a:prstGeom prst="rect">
-            <a:avLst/>
-          </a:prstGeom>
-          <a:solidFill>
-            <a:srgbClr val="DDEBE0"/>
-          </a:solidFill>
-          <a:ln w="3810">
-            <a:solidFill>
-              <a:srgbClr val="DADADA"/>
-            </a:solidFill>
-            <a:prstDash val="solid"/>
-          </a:ln>
-        </p:spPr>
-      </p:sp>
-      <p:sp>
-        <p:nvSpPr>
-          <p:cNvPr id="28" name="Text 26"/>
-          <p:cNvSpPr/>
-          <p:nvPr/>
-        </p:nvSpPr>
-        <p:spPr>
-          <a:xfrm>
-            <a:off x="7891272" y="2286000"/>
-            <a:ext cx="438912" cy="109728"/>
+          <p:cNvPr id="37" name="Text 35"/>
+          <p:cNvSpPr/>
+          <p:nvPr/>
+        </p:nvSpPr>
+        <p:spPr>
+          <a:xfrm>
+            <a:off x="9290304" y="2350008"/>
+            <a:ext cx="603504" cy="91440"/>
           </a:xfrm>
           <a:prstGeom prst="rect">
             <a:avLst/>
@@ -15462,11 +15645,11 @@
           </a:bodyPr>
           <a:lstStyle/>
           <a:p>
-            <a:pPr indent="0" marL="0">
-              <a:buNone/>
-            </a:pPr>
-            <a:r>
-              <a:rPr lang="en-US" sz="710" b="1" dirty="0">
+            <a:pPr algn="ctr" indent="0" marL="0">
+              <a:buNone/>
+            </a:pPr>
+            <a:r>
+              <a:rPr lang="en-US" sz="680" b="1" dirty="0">
                 <a:solidFill>
                   <a:srgbClr val="487052"/>
                 </a:solidFill>
@@ -15474,22 +15657,22 @@
                 <a:ea typeface="Microsoft YaHei" pitchFamily="34" charset="-122"/>
                 <a:cs typeface="Microsoft YaHei" pitchFamily="34" charset="-120"/>
               </a:rPr>
-              <a:t>路线A</a:t>
-            </a:r>
-            <a:endParaRPr lang="en-US" sz="710" dirty="0"/>
-          </a:p>
-        </p:txBody>
-      </p:sp>
-      <p:sp>
-        <p:nvSpPr>
-          <p:cNvPr id="29" name="Text 27"/>
-          <p:cNvSpPr/>
-          <p:nvPr/>
-        </p:nvSpPr>
-        <p:spPr>
-          <a:xfrm>
-            <a:off x="7891272" y="2505456"/>
-            <a:ext cx="1024128" cy="201168"/>
+              <a:t>利润</a:t>
+            </a:r>
+            <a:endParaRPr lang="en-US" sz="680" dirty="0"/>
+          </a:p>
+        </p:txBody>
+      </p:sp>
+      <p:sp>
+        <p:nvSpPr>
+          <p:cNvPr id="38" name="Text 36"/>
+          <p:cNvSpPr/>
+          <p:nvPr/>
+        </p:nvSpPr>
+        <p:spPr>
+          <a:xfrm>
+            <a:off x="9180576" y="1956816"/>
+            <a:ext cx="822960" cy="219456"/>
           </a:xfrm>
           <a:prstGeom prst="rect">
             <a:avLst/>
@@ -15503,11 +15686,11 @@
           </a:bodyPr>
           <a:lstStyle/>
           <a:p>
-            <a:pPr indent="0" marL="0">
-              <a:buNone/>
-            </a:pPr>
-            <a:r>
-              <a:rPr lang="en-US" sz="670" dirty="0">
+            <a:pPr algn="ctr" indent="0" marL="0">
+              <a:buNone/>
+            </a:pPr>
+            <a:r>
+              <a:rPr lang="en-US" sz="640" dirty="0">
                 <a:solidFill>
                   <a:srgbClr val="121212"/>
                 </a:solidFill>
@@ -15515,88 +15698,22 @@
                 <a:ea typeface="Microsoft YaHei" pitchFamily="34" charset="-122"/>
                 <a:cs typeface="Microsoft YaHei" pitchFamily="34" charset="-120"/>
               </a:rPr>
-              <a:t>高压实产品供需缺口对价格形</a:t>
-            </a:r>
-            <a:endParaRPr lang="en-US" sz="670" dirty="0"/>
-          </a:p>
-        </p:txBody>
-      </p:sp>
-      <p:sp>
-        <p:nvSpPr>
-          <p:cNvPr id="30" name="Shape 28"/>
-          <p:cNvSpPr/>
-          <p:nvPr/>
-        </p:nvSpPr>
-        <p:spPr>
-          <a:xfrm>
-            <a:off x="9061704" y="2176272"/>
-            <a:ext cx="1243584" cy="804672"/>
-          </a:xfrm>
-          <a:prstGeom prst="rect">
-            <a:avLst/>
-          </a:prstGeom>
-          <a:solidFill>
-            <a:srgbClr val="FFFFFF"/>
-          </a:solidFill>
-          <a:ln w="3810">
-            <a:solidFill>
-              <a:srgbClr val="DADADA"/>
-            </a:solidFill>
-            <a:prstDash val="solid"/>
-          </a:ln>
-        </p:spPr>
-      </p:sp>
-      <p:sp>
-        <p:nvSpPr>
-          <p:cNvPr id="31" name="Text 29"/>
-          <p:cNvSpPr/>
-          <p:nvPr/>
-        </p:nvSpPr>
-        <p:spPr>
-          <a:xfrm>
-            <a:off x="9134856" y="2286000"/>
-            <a:ext cx="438912" cy="109728"/>
-          </a:xfrm>
-          <a:prstGeom prst="rect">
-            <a:avLst/>
-          </a:prstGeom>
-          <a:noFill/>
-          <a:ln/>
-        </p:spPr>
-        <p:txBody>
-          <a:bodyPr wrap="square" lIns="0" tIns="0" rIns="0" bIns="0" rtlCol="0" anchor="ctr">
-            <a:normAutofit/>
-          </a:bodyPr>
-          <a:lstStyle/>
-          <a:p>
-            <a:pPr indent="0" marL="0">
-              <a:buNone/>
-            </a:pPr>
-            <a:r>
-              <a:rPr lang="en-US" sz="710" b="1" dirty="0">
-                <a:solidFill>
-                  <a:srgbClr val="487052"/>
-                </a:solidFill>
-                <a:latin typeface="Microsoft YaHei" pitchFamily="34" charset="0"/>
-                <a:ea typeface="Microsoft YaHei" pitchFamily="34" charset="-122"/>
-                <a:cs typeface="Microsoft YaHei" pitchFamily="34" charset="-120"/>
-              </a:rPr>
-              <a:t>路线B</a:t>
-            </a:r>
-            <a:endParaRPr lang="en-US" sz="710" dirty="0"/>
-          </a:p>
-        </p:txBody>
-      </p:sp>
-      <p:sp>
-        <p:nvSpPr>
-          <p:cNvPr id="32" name="Text 30"/>
-          <p:cNvSpPr/>
-          <p:nvPr/>
-        </p:nvSpPr>
-        <p:spPr>
-          <a:xfrm>
-            <a:off x="9134856" y="2505456"/>
-            <a:ext cx="1024128" cy="201168"/>
+              <a:t>[1] 价格信号与</a:t>
+            </a:r>
+            <a:endParaRPr lang="en-US" sz="640" dirty="0"/>
+          </a:p>
+        </p:txBody>
+      </p:sp>
+      <p:sp>
+        <p:nvSpPr>
+          <p:cNvPr id="39" name="Text 37"/>
+          <p:cNvSpPr/>
+          <p:nvPr/>
+        </p:nvSpPr>
+        <p:spPr>
+          <a:xfrm>
+            <a:off x="7726680" y="4517136"/>
+            <a:ext cx="2697480" cy="310896"/>
           </a:xfrm>
           <a:prstGeom prst="rect">
             <a:avLst/>
@@ -15614,261 +15731,6 @@
               <a:buNone/>
             </a:pPr>
             <a:r>
-              <a:rPr lang="en-US" sz="670" dirty="0">
-                <a:solidFill>
-                  <a:srgbClr val="121212"/>
-                </a:solidFill>
-                <a:latin typeface="Microsoft YaHei" pitchFamily="34" charset="0"/>
-                <a:ea typeface="Microsoft YaHei" pitchFamily="34" charset="-122"/>
-                <a:cs typeface="Microsoft YaHei" pitchFamily="34" charset="-120"/>
-              </a:rPr>
-              <a:t>天赐材料终止三元项目转产高</a:t>
-            </a:r>
-            <a:endParaRPr lang="en-US" sz="670" dirty="0"/>
-          </a:p>
-        </p:txBody>
-      </p:sp>
-      <p:sp>
-        <p:nvSpPr>
-          <p:cNvPr id="33" name="Shape 31"/>
-          <p:cNvSpPr/>
-          <p:nvPr/>
-        </p:nvSpPr>
-        <p:spPr>
-          <a:xfrm>
-            <a:off x="7818120" y="2980944"/>
-            <a:ext cx="1243584" cy="804672"/>
-          </a:xfrm>
-          <a:prstGeom prst="rect">
-            <a:avLst/>
-          </a:prstGeom>
-          <a:solidFill>
-            <a:srgbClr val="FFFFFF"/>
-          </a:solidFill>
-          <a:ln w="3810">
-            <a:solidFill>
-              <a:srgbClr val="DADADA"/>
-            </a:solidFill>
-            <a:prstDash val="solid"/>
-          </a:ln>
-        </p:spPr>
-      </p:sp>
-      <p:sp>
-        <p:nvSpPr>
-          <p:cNvPr id="34" name="Text 32"/>
-          <p:cNvSpPr/>
-          <p:nvPr/>
-        </p:nvSpPr>
-        <p:spPr>
-          <a:xfrm>
-            <a:off x="7891272" y="3090672"/>
-            <a:ext cx="438912" cy="109728"/>
-          </a:xfrm>
-          <a:prstGeom prst="rect">
-            <a:avLst/>
-          </a:prstGeom>
-          <a:noFill/>
-          <a:ln/>
-        </p:spPr>
-        <p:txBody>
-          <a:bodyPr wrap="square" lIns="0" tIns="0" rIns="0" bIns="0" rtlCol="0" anchor="ctr">
-            <a:normAutofit/>
-          </a:bodyPr>
-          <a:lstStyle/>
-          <a:p>
-            <a:pPr indent="0" marL="0">
-              <a:buNone/>
-            </a:pPr>
-            <a:r>
-              <a:rPr lang="en-US" sz="710" b="1" dirty="0">
-                <a:solidFill>
-                  <a:srgbClr val="487052"/>
-                </a:solidFill>
-                <a:latin typeface="Microsoft YaHei" pitchFamily="34" charset="0"/>
-                <a:ea typeface="Microsoft YaHei" pitchFamily="34" charset="-122"/>
-                <a:cs typeface="Microsoft YaHei" pitchFamily="34" charset="-120"/>
-              </a:rPr>
-              <a:t>机会</a:t>
-            </a:r>
-            <a:endParaRPr lang="en-US" sz="710" dirty="0"/>
-          </a:p>
-        </p:txBody>
-      </p:sp>
-      <p:sp>
-        <p:nvSpPr>
-          <p:cNvPr id="35" name="Text 33"/>
-          <p:cNvSpPr/>
-          <p:nvPr/>
-        </p:nvSpPr>
-        <p:spPr>
-          <a:xfrm>
-            <a:off x="7891272" y="3310128"/>
-            <a:ext cx="1024128" cy="201168"/>
-          </a:xfrm>
-          <a:prstGeom prst="rect">
-            <a:avLst/>
-          </a:prstGeom>
-          <a:noFill/>
-          <a:ln/>
-        </p:spPr>
-        <p:txBody>
-          <a:bodyPr wrap="square" lIns="0" tIns="0" rIns="0" bIns="0" rtlCol="0" anchor="t">
-            <a:normAutofit/>
-          </a:bodyPr>
-          <a:lstStyle/>
-          <a:p>
-            <a:pPr indent="0" marL="0">
-              <a:buNone/>
-            </a:pPr>
-            <a:r>
-              <a:rPr lang="en-US" sz="670" dirty="0">
-                <a:solidFill>
-                  <a:srgbClr val="121212"/>
-                </a:solidFill>
-                <a:latin typeface="Microsoft YaHei" pitchFamily="34" charset="0"/>
-                <a:ea typeface="Microsoft YaHei" pitchFamily="34" charset="-122"/>
-                <a:cs typeface="Microsoft YaHei" pitchFamily="34" charset="-120"/>
-              </a:rPr>
-              <a:t>判断高压实产品加工费相对普</a:t>
-            </a:r>
-            <a:endParaRPr lang="en-US" sz="670" dirty="0"/>
-          </a:p>
-        </p:txBody>
-      </p:sp>
-      <p:sp>
-        <p:nvSpPr>
-          <p:cNvPr id="36" name="Shape 34"/>
-          <p:cNvSpPr/>
-          <p:nvPr/>
-        </p:nvSpPr>
-        <p:spPr>
-          <a:xfrm>
-            <a:off x="9061704" y="2980944"/>
-            <a:ext cx="1243584" cy="804672"/>
-          </a:xfrm>
-          <a:prstGeom prst="rect">
-            <a:avLst/>
-          </a:prstGeom>
-          <a:solidFill>
-            <a:srgbClr val="F4FAF6"/>
-          </a:solidFill>
-          <a:ln w="3810">
-            <a:solidFill>
-              <a:srgbClr val="DADADA"/>
-            </a:solidFill>
-            <a:prstDash val="solid"/>
-          </a:ln>
-        </p:spPr>
-      </p:sp>
-      <p:sp>
-        <p:nvSpPr>
-          <p:cNvPr id="37" name="Text 35"/>
-          <p:cNvSpPr/>
-          <p:nvPr/>
-        </p:nvSpPr>
-        <p:spPr>
-          <a:xfrm>
-            <a:off x="9134856" y="3090672"/>
-            <a:ext cx="438912" cy="109728"/>
-          </a:xfrm>
-          <a:prstGeom prst="rect">
-            <a:avLst/>
-          </a:prstGeom>
-          <a:noFill/>
-          <a:ln/>
-        </p:spPr>
-        <p:txBody>
-          <a:bodyPr wrap="square" lIns="0" tIns="0" rIns="0" bIns="0" rtlCol="0" anchor="ctr">
-            <a:normAutofit/>
-          </a:bodyPr>
-          <a:lstStyle/>
-          <a:p>
-            <a:pPr indent="0" marL="0">
-              <a:buNone/>
-            </a:pPr>
-            <a:r>
-              <a:rPr lang="en-US" sz="710" b="1" dirty="0">
-                <a:solidFill>
-                  <a:srgbClr val="487052"/>
-                </a:solidFill>
-                <a:latin typeface="Microsoft YaHei" pitchFamily="34" charset="0"/>
-                <a:ea typeface="Microsoft YaHei" pitchFamily="34" charset="-122"/>
-                <a:cs typeface="Microsoft YaHei" pitchFamily="34" charset="-120"/>
-              </a:rPr>
-              <a:t>约束</a:t>
-            </a:r>
-            <a:endParaRPr lang="en-US" sz="710" dirty="0"/>
-          </a:p>
-        </p:txBody>
-      </p:sp>
-      <p:sp>
-        <p:nvSpPr>
-          <p:cNvPr id="38" name="Text 36"/>
-          <p:cNvSpPr/>
-          <p:nvPr/>
-        </p:nvSpPr>
-        <p:spPr>
-          <a:xfrm>
-            <a:off x="9134856" y="3310128"/>
-            <a:ext cx="1024128" cy="201168"/>
-          </a:xfrm>
-          <a:prstGeom prst="rect">
-            <a:avLst/>
-          </a:prstGeom>
-          <a:noFill/>
-          <a:ln/>
-        </p:spPr>
-        <p:txBody>
-          <a:bodyPr wrap="square" lIns="0" tIns="0" rIns="0" bIns="0" rtlCol="0" anchor="t">
-            <a:normAutofit/>
-          </a:bodyPr>
-          <a:lstStyle/>
-          <a:p>
-            <a:pPr indent="0" marL="0">
-              <a:buNone/>
-            </a:pPr>
-            <a:r>
-              <a:rPr lang="en-US" sz="670" dirty="0">
-                <a:solidFill>
-                  <a:srgbClr val="121212"/>
-                </a:solidFill>
-                <a:latin typeface="Microsoft YaHei" pitchFamily="34" charset="0"/>
-                <a:ea typeface="Microsoft YaHei" pitchFamily="34" charset="-122"/>
-                <a:cs typeface="Microsoft YaHei" pitchFamily="34" charset="-120"/>
-              </a:rPr>
-              <a:t>高压实产品供需缺口对价格形</a:t>
-            </a:r>
-            <a:endParaRPr lang="en-US" sz="670" dirty="0"/>
-          </a:p>
-        </p:txBody>
-      </p:sp>
-      <p:sp>
-        <p:nvSpPr>
-          <p:cNvPr id="39" name="Text 37"/>
-          <p:cNvSpPr/>
-          <p:nvPr/>
-        </p:nvSpPr>
-        <p:spPr>
-          <a:xfrm>
-            <a:off x="7726680" y="4187952"/>
-            <a:ext cx="2697480" cy="493776"/>
-          </a:xfrm>
-          <a:prstGeom prst="rect">
-            <a:avLst/>
-          </a:prstGeom>
-          <a:noFill/>
-          <a:ln/>
-        </p:spPr>
-        <p:txBody>
-          <a:bodyPr wrap="square" lIns="0" tIns="0" rIns="0" bIns="0" rtlCol="0" anchor="t">
-            <a:normAutofit/>
-          </a:bodyPr>
-          <a:lstStyle/>
-          <a:p>
-            <a:pPr indent="0" marL="0">
-              <a:buNone/>
-            </a:pPr>
-            <a:r>
               <a:rPr lang="en-US" sz="760" dirty="0">
                 <a:solidFill>
                   <a:srgbClr val="6D756F"/>
@@ -15877,7 +15739,7 @@
                 <a:ea typeface="Microsoft YaHei" pitchFamily="34" charset="-122"/>
                 <a:cs typeface="Microsoft YaHei" pitchFamily="34" charset="-120"/>
               </a:rPr>
-              <a:t>检测到对比/分类信号，用矩阵压缩呈现，不新增外部判断。</a:t>
+              <a:t>参考鱼骨图逻辑，只表达来源文本中的原因和影响。</a:t>
             </a:r>
             <a:endParaRPr lang="en-US" sz="760" dirty="0"/>
           </a:p>
@@ -15982,7 +15844,7 @@
                 <a:ea typeface="Microsoft YaHei" pitchFamily="34" charset="-122"/>
                 <a:cs typeface="Microsoft YaHei" pitchFamily="34" charset="-120"/>
               </a:rPr>
-              <a:t>若高压实产品供给缺口在2027年上半年维持，则具备稳定量产能力的企业加工费有望保持溢价</a:t>
+              <a:t>若前驱体新增产能于2027年下半年集中释放，则高压实铁锂前驱体价格可能承压，外购厂商成本压力缓解但一体化厂商溢价收窄</a:t>
             </a:r>
             <a:endParaRPr lang="en-US" sz="1020" dirty="0"/>
           </a:p>
@@ -16131,7 +15993,7 @@
                 <a:ea typeface="Aptos" pitchFamily="34" charset="-122"/>
                 <a:cs typeface="Aptos" pitchFamily="34" charset="-120"/>
               </a:rPr>
-              <a:t>2026-10-28</a:t>
+              <a:t>2026-10-30</a:t>
             </a:r>
             <a:endParaRPr lang="en-US" sz="800" dirty="0"/>
           </a:p>
@@ -16337,7 +16199,7 @@
                 <a:ea typeface="Microsoft YaHei" pitchFamily="34" charset="-122"/>
                 <a:cs typeface="Microsoft YaHei" pitchFamily="34" charset="-120"/>
               </a:rPr>
-              <a:t>3 条公开来源交叉验证｜事实、影响与后续研判</a:t>
+              <a:t>2 条公开来源交叉验证｜事实、影响与后续研判</a:t>
             </a:r>
             <a:endParaRPr lang="en-US" sz="860" dirty="0"/>
           </a:p>
@@ -16446,7 +16308,7 @@
                 <a:ea typeface="Microsoft YaHei" pitchFamily="34" charset="-122"/>
                 <a:cs typeface="Microsoft YaHei" pitchFamily="34" charset="-120"/>
               </a:rPr>
-              <a:t>退役电池回收进入规范化阶段，流向管理决定资源价值；海南提出2027年新能源渗透率不低于70%、2030年拟禁售燃油车；欧洲推平价车但难脱中国电池依赖。判断回收规范化短期可能增加材料企业合规成本，但长期有利于铁锂闭环回收和资源保障；海外平价车需求对铁锂出口形成支撑，但贸易政策不确定性仍是风险。 [3][4][5]</a:t>
+              <a:t>政策端双线推进：第四届动力电池质量安全大会强调全链安全与质量，国家铁路局锂电池铁路运输新规11月1日实施；两者共同抬高生产与运输环节的合规门槛，可能加速低质产能出清，规范企业相对受益。 [2][4]</a:t>
             </a:r>
             <a:endParaRPr lang="en-US" sz="960" dirty="0"/>
           </a:p>
@@ -16487,7 +16349,7 @@
                 <a:ea typeface="Aptos" pitchFamily="34" charset="-122"/>
                 <a:cs typeface="Aptos" pitchFamily="34" charset="-120"/>
               </a:rPr>
-              <a:t>依据：[3][4][5]</a:t>
+              <a:t>依据：[2][4]</a:t>
             </a:r>
             <a:endParaRPr lang="en-US" sz="740" dirty="0"/>
           </a:p>
@@ -16596,7 +16458,7 @@
                 <a:ea typeface="Microsoft YaHei" pitchFamily="34" charset="-122"/>
                 <a:cs typeface="Microsoft YaHei" pitchFamily="34" charset="-120"/>
               </a:rPr>
-              <a:t>回收规范化政策与海南新能源渗透率目标共同影响铁锂需求结构：回收端规范化可能提高再生材料供给的合规门槛，但长期降低对原生锂资源的依赖；海南禁售燃油车时间表则强化国内铁锂需求预期。欧洲平价车难脱中国电池依赖的报道表明海外市场对铁锂的进口需求可能持续，但需关注欧盟贸易政策变化。需要继续调研回收规范化具体实施细则、再生材料在铁锂正极中的掺混比例要求以及欧洲对中国电池的贸易政策动向。</a:t>
+              <a:t>质量安全大会与铁路新规形成政策组合：前者从生产端强调全链质量，后者从运输端规范锂电池流通，可能增加不合规企业的运营成本。对磷酸铁锂行业而言，运输规范可能影响电池及材料的物流成本结构，而质量安全要求可能推动下游电芯厂提高对正极材料一致性的要求。需要调研铁路新规的具体运输条件、成本变化，以及质量安全大会是否形成新的行业标准草案。</a:t>
             </a:r>
             <a:endParaRPr lang="en-US" sz="960" dirty="0"/>
           </a:p>
@@ -16730,7 +16592,7 @@
                 <a:ea typeface="Microsoft YaHei" pitchFamily="34" charset="-122"/>
                 <a:cs typeface="Microsoft YaHei" pitchFamily="34" charset="-120"/>
               </a:rPr>
-              <a:t>若回收规范化政策在2027年全面落地并明确再生材料掺混比例，则具备回收渠道和合规能力的企业可能获得成本优势；若欧洲对中国电池贸易政策收紧，则铁锂出口需求可能承压。跟踪指标：回收政策实施细则、再生材料掺混比例要求、欧盟电池法规执行进展。证据边界：当前回收政策仅为方向性报道，缺乏具体实施细则和掺混比例数据。</a:t>
+              <a:t>若铁路新规实施后锂电池运输成本上升或审批趋严，则依赖铁路运输的材料企业物流成本可能增加，靠近客户布局产能的企业优势显现；跟踪指标为新规实施后首月锂电池铁路运量、运输报价变化；证据边界在于新规具体条款尚未见全文，影响幅度待评估。</a:t>
             </a:r>
             <a:endParaRPr lang="en-US" sz="960" dirty="0"/>
           </a:p>
@@ -16905,7 +16767,7 @@
                 <a:ea typeface="Microsoft YaHei" pitchFamily="34" charset="-122"/>
                 <a:cs typeface="Microsoft YaHei" pitchFamily="34" charset="-120"/>
               </a:rPr>
-              <a:t>退役电池回收进入规范化阶段，流向管</a:t>
+              <a:t>政策端双线推进：第四届动力电池质量</a:t>
             </a:r>
             <a:endParaRPr lang="en-US" sz="660" dirty="0"/>
           </a:p>
@@ -17012,7 +16874,7 @@
                 <a:ea typeface="Microsoft YaHei" pitchFamily="34" charset="-122"/>
                 <a:cs typeface="Microsoft YaHei" pitchFamily="34" charset="-120"/>
               </a:rPr>
-              <a:t>海南提出2027年新能源渗透率不低</a:t>
+              <a:t>两者共同抬高生产与运输环节的合规门</a:t>
             </a:r>
             <a:endParaRPr lang="en-US" sz="660" dirty="0"/>
           </a:p>
@@ -17119,7 +16981,7 @@
                 <a:ea typeface="Microsoft YaHei" pitchFamily="34" charset="-122"/>
                 <a:cs typeface="Microsoft YaHei" pitchFamily="34" charset="-120"/>
               </a:rPr>
-              <a:t>欧洲推平价车但难脱中国电池依赖</a:t>
+              <a:t>[2][4] 质量安全大会与铁路新</a:t>
             </a:r>
             <a:endParaRPr lang="en-US" sz="660" dirty="0"/>
           </a:p>
@@ -17224,7 +17086,7 @@
                 <a:ea typeface="Microsoft YaHei" pitchFamily="34" charset="-122"/>
                 <a:cs typeface="Microsoft YaHei" pitchFamily="34" charset="-120"/>
               </a:rPr>
-              <a:t>若回收规范化政策在2027年全面落地并明确再生材料掺混比例，则具备回收渠道和合规能力的企业可能获得成本优势</a:t>
+              <a:t>若铁路新规实施后锂电池运输成本上升或审批趋严，则依赖铁路运输的材料企业物流成本可能增加，靠近客户布局产能的企业优势显现</a:t>
             </a:r>
             <a:endParaRPr lang="en-US" sz="1020" dirty="0"/>
           </a:p>
@@ -17373,7 +17235,7 @@
                 <a:ea typeface="Aptos" pitchFamily="34" charset="-122"/>
                 <a:cs typeface="Aptos" pitchFamily="34" charset="-120"/>
               </a:rPr>
-              <a:t>2026-10-28</a:t>
+              <a:t>2026-10-30</a:t>
             </a:r>
             <a:endParaRPr lang="en-US" sz="800" dirty="0"/>
           </a:p>
@@ -17688,7 +17550,7 @@
                 <a:ea typeface="Microsoft YaHei" pitchFamily="34" charset="-122"/>
                 <a:cs typeface="Microsoft YaHei" pitchFamily="34" charset="-120"/>
               </a:rPr>
-              <a:t>三元头部企业容百科技、当升科技跨界进入高压实磷酸铁锂，天赐材料终止三元项目转产铁锂，反映三元路线在铁锂成本优势下的竞争力相对弱化；同时固态电池等新技术路线仍在推进，但短期对铁锂的替代威胁有限。判断铁锂在动力和储能市场的主流地位稳固，但三元企业跨界将加剧高压实产品竞争。 [1][6]</a:t>
+              <a:t>竞品路线方面，磷酸铁锂与三元等其他路线在动力电池质量安全大会同台讨论，全链安全成为共同议题；同时内河电动化被提及为动力电池新战场，可能为磷酸铁锂打开船舶等新应用场景，但当前信号尚处早期。 [5][4]</a:t>
             </a:r>
             <a:endParaRPr lang="en-US" sz="960" dirty="0"/>
           </a:p>
@@ -17729,7 +17591,7 @@
                 <a:ea typeface="Aptos" pitchFamily="34" charset="-122"/>
                 <a:cs typeface="Aptos" pitchFamily="34" charset="-120"/>
               </a:rPr>
-              <a:t>依据：[1][6]</a:t>
+              <a:t>依据：[5][4]</a:t>
             </a:r>
             <a:endParaRPr lang="en-US" sz="740" dirty="0"/>
           </a:p>
@@ -17838,7 +17700,7 @@
                 <a:ea typeface="Microsoft YaHei" pitchFamily="34" charset="-122"/>
                 <a:cs typeface="Microsoft YaHei" pitchFamily="34" charset="-120"/>
               </a:rPr>
-              <a:t>容百科技、当升科技跨界和天赐材料转产共同表明三元路线对铁锂的竞争压力加大，三元企业试图通过铁锂产品线弥补市场份额。固态电池报道显示新技术路线仍在研发推进，但公众号来源未披露固态电池量产时间表和成本数据，短期难以对铁锂形成实质替代。需要继续调研跨界企业在铁锂领域的研发投入和客户拓展进度，以及固态电池中试线进展和成本下降路径。</a:t>
+              <a:t>竞品观察需关注两条线：一是质量安全大会是否推动不同技术路线在安全标准上的统一，从而削弱磷酸铁锂的安全叙事优势；二是内河电动化若形成规模，可能为磷酸铁锂带来增量需求，但船用电池对循环寿命和成本的要求与车用不同。需要调研内河电动化的电池技术选型倾向、船用磷酸铁锂的认证进展，以及大会是否形成跨路线的安全共识文件。</a:t>
             </a:r>
             <a:endParaRPr lang="en-US" sz="960" dirty="0"/>
           </a:p>
@@ -17972,7 +17834,7 @@
                 <a:ea typeface="Microsoft YaHei" pitchFamily="34" charset="-122"/>
                 <a:cs typeface="Microsoft YaHei" pitchFamily="34" charset="-120"/>
               </a:rPr>
-              <a:t>若容百科技、当升科技在2027年实现高压实铁锂批量供货并锁定下游客户，则高压实产品竞争加剧，原有企业份额可能被分流；若固态电池中试线在2027年取得成本突破，则铁锂长期需求预期可能边际下修。跟踪指标：跨界企业铁锂出货量、固态电池中试线进展、电芯厂技术路线选择公告。证据边界：当前跨界企业铁锂产品尚无量产数据，固态电池报道缺乏具体量产时间表。</a:t>
+              <a:t>若内河电动化在2027年形成批量订单且技术选型倾向磷酸铁锂，则磷酸铁锂需求增量可能超出车用市场预期；跟踪指标为内河船舶电动化项目招标数量、船用电池技术路线公告；证据边界在于当前仅为行业会议提及，无具体订单数据。</a:t>
             </a:r>
             <a:endParaRPr lang="en-US" sz="960" dirty="0"/>
           </a:p>
@@ -18218,7 +18080,7 @@
                 <a:ea typeface="Microsoft YaHei" pitchFamily="34" charset="-122"/>
                 <a:cs typeface="Microsoft YaHei" pitchFamily="34" charset="-120"/>
               </a:rPr>
-              <a:t>三元头部企业容百科技、当升</a:t>
+              <a:t>竞品路线方面，磷酸铁锂与三</a:t>
             </a:r>
             <a:endParaRPr lang="en-US" sz="670" dirty="0"/>
           </a:p>
@@ -18325,7 +18187,7 @@
                 <a:ea typeface="Microsoft YaHei" pitchFamily="34" charset="-122"/>
                 <a:cs typeface="Microsoft YaHei" pitchFamily="34" charset="-120"/>
               </a:rPr>
-              <a:t>同时固态电池等新技术路线仍</a:t>
+              <a:t>同时内河电动化被提及为动力</a:t>
             </a:r>
             <a:endParaRPr lang="en-US" sz="670" dirty="0"/>
           </a:p>
@@ -18432,7 +18294,7 @@
                 <a:ea typeface="Microsoft YaHei" pitchFamily="34" charset="-122"/>
                 <a:cs typeface="Microsoft YaHei" pitchFamily="34" charset="-120"/>
               </a:rPr>
-              <a:t>判断铁锂在动力和储能市场的</a:t>
+              <a:t>[5][4] 竞品观察需关</a:t>
             </a:r>
             <a:endParaRPr lang="en-US" sz="670" dirty="0"/>
           </a:p>
@@ -18539,7 +18401,7 @@
                 <a:ea typeface="Microsoft YaHei" pitchFamily="34" charset="-122"/>
                 <a:cs typeface="Microsoft YaHei" pitchFamily="34" charset="-120"/>
               </a:rPr>
-              <a:t>三元头部企业容百科技、当升</a:t>
+              <a:t>竞品路线方面，磷酸铁锂与三</a:t>
             </a:r>
             <a:endParaRPr lang="en-US" sz="670" dirty="0"/>
           </a:p>
@@ -18685,7 +18547,7 @@
                 <a:ea typeface="Microsoft YaHei" pitchFamily="34" charset="-122"/>
                 <a:cs typeface="Microsoft YaHei" pitchFamily="34" charset="-120"/>
               </a:rPr>
-              <a:t>若容百科技、当升科技在2027年实现高压实铁锂批量供货并锁定下游客户，则高压实产品竞争加剧，原有企业份额可能被分流</a:t>
+              <a:t>若内河电动化在2027年形成批量订单且技术选型倾向磷酸铁锂，则磷酸铁锂需求增量可能超出车用市场预期</a:t>
             </a:r>
             <a:endParaRPr lang="en-US" sz="1020" dirty="0"/>
           </a:p>
@@ -18834,7 +18696,7 @@
                 <a:ea typeface="Aptos" pitchFamily="34" charset="-122"/>
                 <a:cs typeface="Aptos" pitchFamily="34" charset="-120"/>
               </a:rPr>
-              <a:t>2026-10-28</a:t>
+              <a:t>2026-10-30</a:t>
             </a:r>
             <a:endParaRPr lang="en-US" sz="800" dirty="0"/>
           </a:p>
@@ -19040,7 +18902,7 @@
                 <a:ea typeface="Microsoft YaHei" pitchFamily="34" charset="-122"/>
                 <a:cs typeface="Microsoft YaHei" pitchFamily="34" charset="-120"/>
               </a:rPr>
-              <a:t>3 条公开来源交叉验证｜事实、影响与后续研判</a:t>
+              <a:t>2 条公开来源交叉验证｜事实、影响与后续研判</a:t>
             </a:r>
             <a:endParaRPr lang="en-US" sz="860" dirty="0"/>
           </a:p>
@@ -19149,7 +19011,7 @@
                 <a:ea typeface="Microsoft YaHei" pitchFamily="34" charset="-122"/>
                 <a:cs typeface="Microsoft YaHei" pitchFamily="34" charset="-120"/>
               </a:rPr>
-              <a:t>机会在于高压实产品供需缺口和海外平价车需求对铁锂的支撑；风险在于新产能集中释放后高压实溢价收窄、回收规范化增加合规成本、欧洲贸易政策不确定性；观察点是天赐材料16万吨项目客户认证进度、山东65万吨项目二期投产节点、回收政策实施细则。判断短期高压实景气延续，中期需警惕产能扩张与需求增速的匹配度。 [1][3][5]</a:t>
+              <a:t>机会在于前驱体补链与供给缺口并存，具备一体化能力的企业可能获得结构性优势；风险在于补链项目投产不及预期或质量安全标准执行趋严带来合规成本上升；需观察铁路新规实施效果、前驱体项目试产进度及下游电芯厂认证节奏。 [1][2]</a:t>
             </a:r>
             <a:endParaRPr lang="en-US" sz="960" dirty="0"/>
           </a:p>
@@ -19190,7 +19052,7 @@
                 <a:ea typeface="Aptos" pitchFamily="34" charset="-122"/>
                 <a:cs typeface="Aptos" pitchFamily="34" charset="-120"/>
               </a:rPr>
-              <a:t>依据：[1][3][5]</a:t>
+              <a:t>依据：[1][2]</a:t>
             </a:r>
             <a:endParaRPr lang="en-US" sz="740" dirty="0"/>
           </a:p>
@@ -19299,7 +19161,7 @@
                 <a:ea typeface="Microsoft YaHei" pitchFamily="34" charset="-122"/>
                 <a:cs typeface="Microsoft YaHei" pitchFamily="34" charset="-120"/>
               </a:rPr>
-              <a:t>高压实缺口和海外需求构成短期机会，但天赐材料转产、三元企业跨界和山东项目开工共同指向供给端加速扩张，若需求增速不及预期，高压实产品也可能面临溢价收窄压力。回收规范化和欧洲贸易政策则从合规和出口两端增加不确定性。需要继续调研高压实产品月度供需平衡表、新产能投产节奏与下游电芯厂扩产计划的匹配度，以及回收政策对材料成本的具体影响路径。</a:t>
+              <a:t>风险与机会同源：供给缺口是机会，但补链项目进度是变量；政策趋严是风险，但也是低端产能出清的机会。两者传导路径均指向行业集中度可能提升。需要持续调研的是：10万吨磷酸二氢锂项目的试产时间与良率、铁路新规对运输成本的实际影响、以及质量安全大会后续是否出台具体标准文件。</a:t>
             </a:r>
             <a:endParaRPr lang="en-US" sz="960" dirty="0"/>
           </a:p>
@@ -19433,7 +19295,7 @@
                 <a:ea typeface="Microsoft YaHei" pitchFamily="34" charset="-122"/>
                 <a:cs typeface="Microsoft YaHei" pitchFamily="34" charset="-120"/>
               </a:rPr>
-              <a:t>若2027年上半年高压实新产能投产进度快于需求增速，则高压实产品溢价可能收窄，行业盈利分化加剧；若回收政策实施细则明确再生材料掺混比例且欧洲贸易政策保持稳定，则铁锂成本优势和出口需求有望延续。跟踪指标：高压实月度供需平衡、新产能投产公告、回收政策实施细则、欧盟电池法规执行进展。证据边界：当前供需缺口为年度测算，缺乏月度高频数据；回收政策仅为方向性报道。</a:t>
+              <a:t>若前驱体项目试产良率低于预期且铁路新规推高运输成本，则高压实铁锂供给缺口可能延长，价格支撑增强但下游电池成本压力上升；跟踪指标为项目试产公告、铁路锂电池运价、电芯厂采购价格；证据边界在于试产数据尚未披露，运输成本影响待新规实施后评估。</a:t>
             </a:r>
             <a:endParaRPr lang="en-US" sz="960" dirty="0"/>
           </a:p>
@@ -19501,7 +19363,7 @@
                 <a:ea typeface="Microsoft YaHei" pitchFamily="34" charset="-122"/>
                 <a:cs typeface="Microsoft YaHei" pitchFamily="34" charset="-120"/>
               </a:rPr>
-              <a:t>对比矩阵</a:t>
+              <a:t>路线图</a:t>
             </a:r>
             <a:endParaRPr lang="en-US" sz="1200" dirty="0"/>
           </a:p>
@@ -19515,18 +19377,84 @@
         </p:nvSpPr>
         <p:spPr>
           <a:xfrm>
-            <a:off x="7818120" y="2176272"/>
-            <a:ext cx="2487168" cy="1609344"/>
-          </a:xfrm>
-          <a:prstGeom prst="rect">
+            <a:off x="7754112" y="2249424"/>
+            <a:ext cx="612648" cy="402336"/>
+          </a:xfrm>
+          <a:prstGeom prst="chevron">
+            <a:avLst/>
+          </a:prstGeom>
+          <a:solidFill>
+            <a:srgbClr val="DDEBE0"/>
+          </a:solidFill>
+          <a:ln w="13970">
+            <a:solidFill>
+              <a:srgbClr val="487052"/>
+            </a:solidFill>
+            <a:prstDash val="solid"/>
+          </a:ln>
+        </p:spPr>
+      </p:sp>
+      <p:sp>
+        <p:nvSpPr>
+          <p:cNvPr id="25" name="Text 23"/>
+          <p:cNvSpPr/>
+          <p:nvPr/>
+        </p:nvSpPr>
+        <p:spPr>
+          <a:xfrm>
+            <a:off x="7827264" y="2386584"/>
+            <a:ext cx="448056" cy="109728"/>
+          </a:xfrm>
+          <a:prstGeom prst="rect">
+            <a:avLst/>
+          </a:prstGeom>
+          <a:noFill/>
+          <a:ln/>
+        </p:spPr>
+        <p:txBody>
+          <a:bodyPr wrap="square" lIns="0" tIns="0" rIns="0" bIns="0" rtlCol="0" anchor="ctr">
+            <a:normAutofit/>
+          </a:bodyPr>
+          <a:lstStyle/>
+          <a:p>
+            <a:pPr algn="ctr" indent="0" marL="0">
+              <a:buNone/>
+            </a:pPr>
+            <a:r>
+              <a:rPr lang="en-US" sz="670" b="1" dirty="0">
+                <a:solidFill>
+                  <a:srgbClr val="121212"/>
+                </a:solidFill>
+                <a:latin typeface="Microsoft YaHei" pitchFamily="34" charset="0"/>
+                <a:ea typeface="Microsoft YaHei" pitchFamily="34" charset="-122"/>
+                <a:cs typeface="Microsoft YaHei" pitchFamily="34" charset="-120"/>
+              </a:rPr>
+              <a:t>技术</a:t>
+            </a:r>
+            <a:endParaRPr lang="en-US" sz="670" dirty="0"/>
+          </a:p>
+        </p:txBody>
+      </p:sp>
+      <p:sp>
+        <p:nvSpPr>
+          <p:cNvPr id="26" name="Shape 24"/>
+          <p:cNvSpPr/>
+          <p:nvPr/>
+        </p:nvSpPr>
+        <p:spPr>
+          <a:xfrm>
+            <a:off x="8375904" y="2249424"/>
+            <a:ext cx="612648" cy="402336"/>
+          </a:xfrm>
+          <a:prstGeom prst="chevron">
             <a:avLst/>
           </a:prstGeom>
           <a:solidFill>
             <a:srgbClr val="FFFFFF"/>
           </a:solidFill>
-          <a:ln w="10160">
+          <a:ln w="13970">
             <a:solidFill>
-              <a:srgbClr val="DADADA"/>
+              <a:srgbClr val="487052"/>
             </a:solidFill>
             <a:prstDash val="solid"/>
           </a:ln>
@@ -19534,22 +19462,65 @@
       </p:sp>
       <p:sp>
         <p:nvSpPr>
-          <p:cNvPr id="25" name="Shape 23"/>
-          <p:cNvSpPr/>
-          <p:nvPr/>
-        </p:nvSpPr>
-        <p:spPr>
-          <a:xfrm>
-            <a:off x="9061704" y="2176272"/>
-            <a:ext cx="0" cy="1609344"/>
-          </a:xfrm>
-          <a:prstGeom prst="line">
-            <a:avLst/>
-          </a:prstGeom>
-          <a:noFill/>
-          <a:ln w="8890">
+          <p:cNvPr id="27" name="Text 25"/>
+          <p:cNvSpPr/>
+          <p:nvPr/>
+        </p:nvSpPr>
+        <p:spPr>
+          <a:xfrm>
+            <a:off x="8449056" y="2386584"/>
+            <a:ext cx="448056" cy="109728"/>
+          </a:xfrm>
+          <a:prstGeom prst="rect">
+            <a:avLst/>
+          </a:prstGeom>
+          <a:noFill/>
+          <a:ln/>
+        </p:spPr>
+        <p:txBody>
+          <a:bodyPr wrap="square" lIns="0" tIns="0" rIns="0" bIns="0" rtlCol="0" anchor="ctr">
+            <a:normAutofit/>
+          </a:bodyPr>
+          <a:lstStyle/>
+          <a:p>
+            <a:pPr algn="ctr" indent="0" marL="0">
+              <a:buNone/>
+            </a:pPr>
+            <a:r>
+              <a:rPr lang="en-US" sz="670" b="1" dirty="0">
+                <a:solidFill>
+                  <a:srgbClr val="121212"/>
+                </a:solidFill>
+                <a:latin typeface="Microsoft YaHei" pitchFamily="34" charset="0"/>
+                <a:ea typeface="Microsoft YaHei" pitchFamily="34" charset="-122"/>
+                <a:cs typeface="Microsoft YaHei" pitchFamily="34" charset="-120"/>
+              </a:rPr>
+              <a:t>产品</a:t>
+            </a:r>
+            <a:endParaRPr lang="en-US" sz="670" dirty="0"/>
+          </a:p>
+        </p:txBody>
+      </p:sp>
+      <p:sp>
+        <p:nvSpPr>
+          <p:cNvPr id="28" name="Shape 26"/>
+          <p:cNvSpPr/>
+          <p:nvPr/>
+        </p:nvSpPr>
+        <p:spPr>
+          <a:xfrm>
+            <a:off x="8997696" y="2249424"/>
+            <a:ext cx="612648" cy="402336"/>
+          </a:xfrm>
+          <a:prstGeom prst="chevron">
+            <a:avLst/>
+          </a:prstGeom>
+          <a:solidFill>
+            <a:srgbClr val="FFFFFF"/>
+          </a:solidFill>
+          <a:ln w="13970">
             <a:solidFill>
-              <a:srgbClr val="DADADA"/>
+              <a:srgbClr val="487052"/>
             </a:solidFill>
             <a:prstDash val="solid"/>
           </a:ln>
@@ -19557,22 +19528,65 @@
       </p:sp>
       <p:sp>
         <p:nvSpPr>
-          <p:cNvPr id="26" name="Shape 24"/>
-          <p:cNvSpPr/>
-          <p:nvPr/>
-        </p:nvSpPr>
-        <p:spPr>
-          <a:xfrm>
-            <a:off x="7818120" y="2980944"/>
-            <a:ext cx="2487168" cy="0"/>
-          </a:xfrm>
-          <a:prstGeom prst="line">
-            <a:avLst/>
-          </a:prstGeom>
-          <a:noFill/>
-          <a:ln w="8890">
+          <p:cNvPr id="29" name="Text 27"/>
+          <p:cNvSpPr/>
+          <p:nvPr/>
+        </p:nvSpPr>
+        <p:spPr>
+          <a:xfrm>
+            <a:off x="9070848" y="2386584"/>
+            <a:ext cx="448056" cy="109728"/>
+          </a:xfrm>
+          <a:prstGeom prst="rect">
+            <a:avLst/>
+          </a:prstGeom>
+          <a:noFill/>
+          <a:ln/>
+        </p:spPr>
+        <p:txBody>
+          <a:bodyPr wrap="square" lIns="0" tIns="0" rIns="0" bIns="0" rtlCol="0" anchor="ctr">
+            <a:normAutofit/>
+          </a:bodyPr>
+          <a:lstStyle/>
+          <a:p>
+            <a:pPr algn="ctr" indent="0" marL="0">
+              <a:buNone/>
+            </a:pPr>
+            <a:r>
+              <a:rPr lang="en-US" sz="670" b="1" dirty="0">
+                <a:solidFill>
+                  <a:srgbClr val="121212"/>
+                </a:solidFill>
+                <a:latin typeface="Microsoft YaHei" pitchFamily="34" charset="0"/>
+                <a:ea typeface="Microsoft YaHei" pitchFamily="34" charset="-122"/>
+                <a:cs typeface="Microsoft YaHei" pitchFamily="34" charset="-120"/>
+              </a:rPr>
+              <a:t>验证</a:t>
+            </a:r>
+            <a:endParaRPr lang="en-US" sz="670" dirty="0"/>
+          </a:p>
+        </p:txBody>
+      </p:sp>
+      <p:sp>
+        <p:nvSpPr>
+          <p:cNvPr id="30" name="Shape 28"/>
+          <p:cNvSpPr/>
+          <p:nvPr/>
+        </p:nvSpPr>
+        <p:spPr>
+          <a:xfrm>
+            <a:off x="9619488" y="2249424"/>
+            <a:ext cx="612648" cy="402336"/>
+          </a:xfrm>
+          <a:prstGeom prst="chevron">
+            <a:avLst/>
+          </a:prstGeom>
+          <a:solidFill>
+            <a:srgbClr val="FFFFFF"/>
+          </a:solidFill>
+          <a:ln w="13970">
             <a:solidFill>
-              <a:srgbClr val="DADADA"/>
+              <a:srgbClr val="487052"/>
             </a:solidFill>
             <a:prstDash val="solid"/>
           </a:ln>
@@ -19580,24 +19594,63 @@
       </p:sp>
       <p:sp>
         <p:nvSpPr>
-          <p:cNvPr id="27" name="Shape 25"/>
-          <p:cNvSpPr/>
-          <p:nvPr/>
-        </p:nvSpPr>
-        <p:spPr>
-          <a:xfrm>
-            <a:off x="7818120" y="2176272"/>
-            <a:ext cx="1243584" cy="804672"/>
-          </a:xfrm>
-          <a:prstGeom prst="rect">
-            <a:avLst/>
-          </a:prstGeom>
-          <a:solidFill>
-            <a:srgbClr val="DDEBE0"/>
-          </a:solidFill>
-          <a:ln w="3810">
+          <p:cNvPr id="31" name="Text 29"/>
+          <p:cNvSpPr/>
+          <p:nvPr/>
+        </p:nvSpPr>
+        <p:spPr>
+          <a:xfrm>
+            <a:off x="9692640" y="2386584"/>
+            <a:ext cx="448056" cy="109728"/>
+          </a:xfrm>
+          <a:prstGeom prst="rect">
+            <a:avLst/>
+          </a:prstGeom>
+          <a:noFill/>
+          <a:ln/>
+        </p:spPr>
+        <p:txBody>
+          <a:bodyPr wrap="square" lIns="0" tIns="0" rIns="0" bIns="0" rtlCol="0" anchor="ctr">
+            <a:normAutofit/>
+          </a:bodyPr>
+          <a:lstStyle/>
+          <a:p>
+            <a:pPr algn="ctr" indent="0" marL="0">
+              <a:buNone/>
+            </a:pPr>
+            <a:r>
+              <a:rPr lang="en-US" sz="670" b="1" dirty="0">
+                <a:solidFill>
+                  <a:srgbClr val="121212"/>
+                </a:solidFill>
+                <a:latin typeface="Microsoft YaHei" pitchFamily="34" charset="0"/>
+                <a:ea typeface="Microsoft YaHei" pitchFamily="34" charset="-122"/>
+                <a:cs typeface="Microsoft YaHei" pitchFamily="34" charset="-120"/>
+              </a:rPr>
+              <a:t>量产</a:t>
+            </a:r>
+            <a:endParaRPr lang="en-US" sz="670" dirty="0"/>
+          </a:p>
+        </p:txBody>
+      </p:sp>
+      <p:sp>
+        <p:nvSpPr>
+          <p:cNvPr id="32" name="Shape 30"/>
+          <p:cNvSpPr/>
+          <p:nvPr/>
+        </p:nvSpPr>
+        <p:spPr>
+          <a:xfrm>
+            <a:off x="7882128" y="3063240"/>
+            <a:ext cx="2331720" cy="0"/>
+          </a:xfrm>
+          <a:prstGeom prst="line">
+            <a:avLst/>
+          </a:prstGeom>
+          <a:noFill/>
+          <a:ln w="13970">
             <a:solidFill>
-              <a:srgbClr val="DADADA"/>
+              <a:srgbClr val="7F9D84"/>
             </a:solidFill>
             <a:prstDash val="solid"/>
           </a:ln>
@@ -19605,106 +19658,24 @@
       </p:sp>
       <p:sp>
         <p:nvSpPr>
-          <p:cNvPr id="28" name="Text 26"/>
-          <p:cNvSpPr/>
-          <p:nvPr/>
-        </p:nvSpPr>
-        <p:spPr>
-          <a:xfrm>
-            <a:off x="7891272" y="2286000"/>
-            <a:ext cx="438912" cy="109728"/>
-          </a:xfrm>
-          <a:prstGeom prst="rect">
-            <a:avLst/>
-          </a:prstGeom>
-          <a:noFill/>
-          <a:ln/>
-        </p:spPr>
-        <p:txBody>
-          <a:bodyPr wrap="square" lIns="0" tIns="0" rIns="0" bIns="0" rtlCol="0" anchor="ctr">
-            <a:normAutofit/>
-          </a:bodyPr>
-          <a:lstStyle/>
-          <a:p>
-            <a:pPr indent="0" marL="0">
-              <a:buNone/>
-            </a:pPr>
-            <a:r>
-              <a:rPr lang="en-US" sz="710" b="1" dirty="0">
-                <a:solidFill>
-                  <a:srgbClr val="487052"/>
-                </a:solidFill>
-                <a:latin typeface="Microsoft YaHei" pitchFamily="34" charset="0"/>
-                <a:ea typeface="Microsoft YaHei" pitchFamily="34" charset="-122"/>
-                <a:cs typeface="Microsoft YaHei" pitchFamily="34" charset="-120"/>
-              </a:rPr>
-              <a:t>路线A</a:t>
-            </a:r>
-            <a:endParaRPr lang="en-US" sz="710" dirty="0"/>
-          </a:p>
-        </p:txBody>
-      </p:sp>
-      <p:sp>
-        <p:nvSpPr>
-          <p:cNvPr id="29" name="Text 27"/>
-          <p:cNvSpPr/>
-          <p:nvPr/>
-        </p:nvSpPr>
-        <p:spPr>
-          <a:xfrm>
-            <a:off x="7891272" y="2505456"/>
-            <a:ext cx="1024128" cy="201168"/>
-          </a:xfrm>
-          <a:prstGeom prst="rect">
-            <a:avLst/>
-          </a:prstGeom>
-          <a:noFill/>
-          <a:ln/>
-        </p:spPr>
-        <p:txBody>
-          <a:bodyPr wrap="square" lIns="0" tIns="0" rIns="0" bIns="0" rtlCol="0" anchor="t">
-            <a:normAutofit/>
-          </a:bodyPr>
-          <a:lstStyle/>
-          <a:p>
-            <a:pPr indent="0" marL="0">
-              <a:buNone/>
-            </a:pPr>
-            <a:r>
-              <a:rPr lang="en-US" sz="670" dirty="0">
-                <a:solidFill>
-                  <a:srgbClr val="121212"/>
-                </a:solidFill>
-                <a:latin typeface="Microsoft YaHei" pitchFamily="34" charset="0"/>
-                <a:ea typeface="Microsoft YaHei" pitchFamily="34" charset="-122"/>
-                <a:cs typeface="Microsoft YaHei" pitchFamily="34" charset="-120"/>
-              </a:rPr>
-              <a:t>机会在于高压实产品供需缺口</a:t>
-            </a:r>
-            <a:endParaRPr lang="en-US" sz="670" dirty="0"/>
-          </a:p>
-        </p:txBody>
-      </p:sp>
-      <p:sp>
-        <p:nvSpPr>
-          <p:cNvPr id="30" name="Shape 28"/>
-          <p:cNvSpPr/>
-          <p:nvPr/>
-        </p:nvSpPr>
-        <p:spPr>
-          <a:xfrm>
-            <a:off x="9061704" y="2176272"/>
-            <a:ext cx="1243584" cy="804672"/>
-          </a:xfrm>
-          <a:prstGeom prst="rect">
+          <p:cNvPr id="33" name="Shape 31"/>
+          <p:cNvSpPr/>
+          <p:nvPr/>
+        </p:nvSpPr>
+        <p:spPr>
+          <a:xfrm>
+            <a:off x="7845552" y="2962656"/>
+            <a:ext cx="164592" cy="164592"/>
+          </a:xfrm>
+          <a:prstGeom prst="ellipse">
             <a:avLst/>
           </a:prstGeom>
           <a:solidFill>
-            <a:srgbClr val="FFFFFF"/>
+            <a:srgbClr val="487052"/>
           </a:solidFill>
-          <a:ln w="3810">
+          <a:ln w="12700">
             <a:solidFill>
-              <a:srgbClr val="DADADA"/>
+              <a:srgbClr val="FFFFFF"/>
             </a:solidFill>
             <a:prstDash val="solid"/>
           </a:ln>
@@ -19712,55 +19683,14 @@
       </p:sp>
       <p:sp>
         <p:nvSpPr>
-          <p:cNvPr id="31" name="Text 29"/>
-          <p:cNvSpPr/>
-          <p:nvPr/>
-        </p:nvSpPr>
-        <p:spPr>
-          <a:xfrm>
-            <a:off x="9134856" y="2286000"/>
-            <a:ext cx="438912" cy="109728"/>
-          </a:xfrm>
-          <a:prstGeom prst="rect">
-            <a:avLst/>
-          </a:prstGeom>
-          <a:noFill/>
-          <a:ln/>
-        </p:spPr>
-        <p:txBody>
-          <a:bodyPr wrap="square" lIns="0" tIns="0" rIns="0" bIns="0" rtlCol="0" anchor="ctr">
-            <a:normAutofit/>
-          </a:bodyPr>
-          <a:lstStyle/>
-          <a:p>
-            <a:pPr indent="0" marL="0">
-              <a:buNone/>
-            </a:pPr>
-            <a:r>
-              <a:rPr lang="en-US" sz="710" b="1" dirty="0">
-                <a:solidFill>
-                  <a:srgbClr val="487052"/>
-                </a:solidFill>
-                <a:latin typeface="Microsoft YaHei" pitchFamily="34" charset="0"/>
-                <a:ea typeface="Microsoft YaHei" pitchFamily="34" charset="-122"/>
-                <a:cs typeface="Microsoft YaHei" pitchFamily="34" charset="-120"/>
-              </a:rPr>
-              <a:t>路线B</a:t>
-            </a:r>
-            <a:endParaRPr lang="en-US" sz="710" dirty="0"/>
-          </a:p>
-        </p:txBody>
-      </p:sp>
-      <p:sp>
-        <p:nvSpPr>
-          <p:cNvPr id="32" name="Text 30"/>
-          <p:cNvSpPr/>
-          <p:nvPr/>
-        </p:nvSpPr>
-        <p:spPr>
-          <a:xfrm>
-            <a:off x="9134856" y="2505456"/>
-            <a:ext cx="1024128" cy="201168"/>
+          <p:cNvPr id="34" name="Text 32"/>
+          <p:cNvSpPr/>
+          <p:nvPr/>
+        </p:nvSpPr>
+        <p:spPr>
+          <a:xfrm>
+            <a:off x="7754112" y="3291840"/>
+            <a:ext cx="603504" cy="310896"/>
           </a:xfrm>
           <a:prstGeom prst="rect">
             <a:avLst/>
@@ -19774,7 +19704,7 @@
           </a:bodyPr>
           <a:lstStyle/>
           <a:p>
-            <a:pPr indent="0" marL="0">
+            <a:pPr algn="ctr" indent="0" marL="0">
               <a:buNone/>
             </a:pPr>
             <a:r>
@@ -19786,7 +19716,7 @@
                 <a:ea typeface="Microsoft YaHei" pitchFamily="34" charset="-122"/>
                 <a:cs typeface="Microsoft YaHei" pitchFamily="34" charset="-120"/>
               </a:rPr>
-              <a:t>风险在于新产能集中释放后高</a:t>
+              <a:t>机会在于前驱体补链与供</a:t>
             </a:r>
             <a:endParaRPr lang="en-US" sz="670" dirty="0"/>
           </a:p>
@@ -19794,24 +19724,24 @@
       </p:sp>
       <p:sp>
         <p:nvSpPr>
-          <p:cNvPr id="33" name="Shape 31"/>
-          <p:cNvSpPr/>
-          <p:nvPr/>
-        </p:nvSpPr>
-        <p:spPr>
-          <a:xfrm>
-            <a:off x="7818120" y="2980944"/>
-            <a:ext cx="1243584" cy="804672"/>
-          </a:xfrm>
-          <a:prstGeom prst="rect">
+          <p:cNvPr id="35" name="Shape 33"/>
+          <p:cNvSpPr/>
+          <p:nvPr/>
+        </p:nvSpPr>
+        <p:spPr>
+          <a:xfrm>
+            <a:off x="8503920" y="2962656"/>
+            <a:ext cx="164592" cy="164592"/>
+          </a:xfrm>
+          <a:prstGeom prst="ellipse">
             <a:avLst/>
           </a:prstGeom>
           <a:solidFill>
-            <a:srgbClr val="FFFFFF"/>
+            <a:srgbClr val="487052"/>
           </a:solidFill>
-          <a:ln w="3810">
+          <a:ln w="12700">
             <a:solidFill>
-              <a:srgbClr val="DADADA"/>
+              <a:srgbClr val="FFFFFF"/>
             </a:solidFill>
             <a:prstDash val="solid"/>
           </a:ln>
@@ -19819,55 +19749,14 @@
       </p:sp>
       <p:sp>
         <p:nvSpPr>
-          <p:cNvPr id="34" name="Text 32"/>
-          <p:cNvSpPr/>
-          <p:nvPr/>
-        </p:nvSpPr>
-        <p:spPr>
-          <a:xfrm>
-            <a:off x="7891272" y="3090672"/>
-            <a:ext cx="438912" cy="109728"/>
-          </a:xfrm>
-          <a:prstGeom prst="rect">
-            <a:avLst/>
-          </a:prstGeom>
-          <a:noFill/>
-          <a:ln/>
-        </p:spPr>
-        <p:txBody>
-          <a:bodyPr wrap="square" lIns="0" tIns="0" rIns="0" bIns="0" rtlCol="0" anchor="ctr">
-            <a:normAutofit/>
-          </a:bodyPr>
-          <a:lstStyle/>
-          <a:p>
-            <a:pPr indent="0" marL="0">
-              <a:buNone/>
-            </a:pPr>
-            <a:r>
-              <a:rPr lang="en-US" sz="710" b="1" dirty="0">
-                <a:solidFill>
-                  <a:srgbClr val="487052"/>
-                </a:solidFill>
-                <a:latin typeface="Microsoft YaHei" pitchFamily="34" charset="0"/>
-                <a:ea typeface="Microsoft YaHei" pitchFamily="34" charset="-122"/>
-                <a:cs typeface="Microsoft YaHei" pitchFamily="34" charset="-120"/>
-              </a:rPr>
-              <a:t>机会</a:t>
-            </a:r>
-            <a:endParaRPr lang="en-US" sz="710" dirty="0"/>
-          </a:p>
-        </p:txBody>
-      </p:sp>
-      <p:sp>
-        <p:nvSpPr>
-          <p:cNvPr id="35" name="Text 33"/>
-          <p:cNvSpPr/>
-          <p:nvPr/>
-        </p:nvSpPr>
-        <p:spPr>
-          <a:xfrm>
-            <a:off x="7891272" y="3310128"/>
-            <a:ext cx="1024128" cy="201168"/>
+          <p:cNvPr id="36" name="Text 34"/>
+          <p:cNvSpPr/>
+          <p:nvPr/>
+        </p:nvSpPr>
+        <p:spPr>
+          <a:xfrm>
+            <a:off x="8412480" y="3291840"/>
+            <a:ext cx="603504" cy="310896"/>
           </a:xfrm>
           <a:prstGeom prst="rect">
             <a:avLst/>
@@ -19881,7 +19770,7 @@
           </a:bodyPr>
           <a:lstStyle/>
           <a:p>
-            <a:pPr indent="0" marL="0">
+            <a:pPr algn="ctr" indent="0" marL="0">
               <a:buNone/>
             </a:pPr>
             <a:r>
@@ -19893,7 +19782,7 @@
                 <a:ea typeface="Microsoft YaHei" pitchFamily="34" charset="-122"/>
                 <a:cs typeface="Microsoft YaHei" pitchFamily="34" charset="-120"/>
               </a:rPr>
-              <a:t>观察点是天赐材料16万吨项</a:t>
+              <a:t>风险在于补链项目投产不</a:t>
             </a:r>
             <a:endParaRPr lang="en-US" sz="670" dirty="0"/>
           </a:p>
@@ -19901,24 +19790,24 @@
       </p:sp>
       <p:sp>
         <p:nvSpPr>
-          <p:cNvPr id="36" name="Shape 34"/>
-          <p:cNvSpPr/>
-          <p:nvPr/>
-        </p:nvSpPr>
-        <p:spPr>
-          <a:xfrm>
-            <a:off x="9061704" y="2980944"/>
-            <a:ext cx="1243584" cy="804672"/>
-          </a:xfrm>
-          <a:prstGeom prst="rect">
+          <p:cNvPr id="37" name="Shape 35"/>
+          <p:cNvSpPr/>
+          <p:nvPr/>
+        </p:nvSpPr>
+        <p:spPr>
+          <a:xfrm>
+            <a:off x="9162288" y="2962656"/>
+            <a:ext cx="164592" cy="164592"/>
+          </a:xfrm>
+          <a:prstGeom prst="ellipse">
             <a:avLst/>
           </a:prstGeom>
           <a:solidFill>
-            <a:srgbClr val="F4FAF6"/>
+            <a:srgbClr val="487052"/>
           </a:solidFill>
-          <a:ln w="3810">
+          <a:ln w="12700">
             <a:solidFill>
-              <a:srgbClr val="DADADA"/>
+              <a:srgbClr val="FFFFFF"/>
             </a:solidFill>
             <a:prstDash val="solid"/>
           </a:ln>
@@ -19926,55 +19815,14 @@
       </p:sp>
       <p:sp>
         <p:nvSpPr>
-          <p:cNvPr id="37" name="Text 35"/>
-          <p:cNvSpPr/>
-          <p:nvPr/>
-        </p:nvSpPr>
-        <p:spPr>
-          <a:xfrm>
-            <a:off x="9134856" y="3090672"/>
-            <a:ext cx="438912" cy="109728"/>
-          </a:xfrm>
-          <a:prstGeom prst="rect">
-            <a:avLst/>
-          </a:prstGeom>
-          <a:noFill/>
-          <a:ln/>
-        </p:spPr>
-        <p:txBody>
-          <a:bodyPr wrap="square" lIns="0" tIns="0" rIns="0" bIns="0" rtlCol="0" anchor="ctr">
-            <a:normAutofit/>
-          </a:bodyPr>
-          <a:lstStyle/>
-          <a:p>
-            <a:pPr indent="0" marL="0">
-              <a:buNone/>
-            </a:pPr>
-            <a:r>
-              <a:rPr lang="en-US" sz="710" b="1" dirty="0">
-                <a:solidFill>
-                  <a:srgbClr val="487052"/>
-                </a:solidFill>
-                <a:latin typeface="Microsoft YaHei" pitchFamily="34" charset="0"/>
-                <a:ea typeface="Microsoft YaHei" pitchFamily="34" charset="-122"/>
-                <a:cs typeface="Microsoft YaHei" pitchFamily="34" charset="-120"/>
-              </a:rPr>
-              <a:t>约束</a:t>
-            </a:r>
-            <a:endParaRPr lang="en-US" sz="710" dirty="0"/>
-          </a:p>
-        </p:txBody>
-      </p:sp>
-      <p:sp>
-        <p:nvSpPr>
           <p:cNvPr id="38" name="Text 36"/>
           <p:cNvSpPr/>
           <p:nvPr/>
         </p:nvSpPr>
         <p:spPr>
           <a:xfrm>
-            <a:off x="9134856" y="3310128"/>
-            <a:ext cx="1024128" cy="201168"/>
+            <a:off x="9070848" y="3291840"/>
+            <a:ext cx="603504" cy="310896"/>
           </a:xfrm>
           <a:prstGeom prst="rect">
             <a:avLst/>
@@ -19988,7 +19836,7 @@
           </a:bodyPr>
           <a:lstStyle/>
           <a:p>
-            <a:pPr indent="0" marL="0">
+            <a:pPr algn="ctr" indent="0" marL="0">
               <a:buNone/>
             </a:pPr>
             <a:r>
@@ -20000,7 +19848,7 @@
                 <a:ea typeface="Microsoft YaHei" pitchFamily="34" charset="-122"/>
                 <a:cs typeface="Microsoft YaHei" pitchFamily="34" charset="-120"/>
               </a:rPr>
-              <a:t>机会在于高压实产品供需缺口</a:t>
+              <a:t>需观察铁路新规实施效果</a:t>
             </a:r>
             <a:endParaRPr lang="en-US" sz="670" dirty="0"/>
           </a:p>
@@ -20008,14 +19856,39 @@
       </p:sp>
       <p:sp>
         <p:nvSpPr>
-          <p:cNvPr id="39" name="Text 37"/>
-          <p:cNvSpPr/>
-          <p:nvPr/>
-        </p:nvSpPr>
-        <p:spPr>
-          <a:xfrm>
-            <a:off x="7726680" y="4187952"/>
-            <a:ext cx="2697480" cy="493776"/>
+          <p:cNvPr id="39" name="Shape 37"/>
+          <p:cNvSpPr/>
+          <p:nvPr/>
+        </p:nvSpPr>
+        <p:spPr>
+          <a:xfrm>
+            <a:off x="9820656" y="2962656"/>
+            <a:ext cx="164592" cy="164592"/>
+          </a:xfrm>
+          <a:prstGeom prst="ellipse">
+            <a:avLst/>
+          </a:prstGeom>
+          <a:solidFill>
+            <a:srgbClr val="B85A4A"/>
+          </a:solidFill>
+          <a:ln w="12700">
+            <a:solidFill>
+              <a:srgbClr val="FFFFFF"/>
+            </a:solidFill>
+            <a:prstDash val="solid"/>
+          </a:ln>
+        </p:spPr>
+      </p:sp>
+      <p:sp>
+        <p:nvSpPr>
+          <p:cNvPr id="40" name="Text 38"/>
+          <p:cNvSpPr/>
+          <p:nvPr/>
+        </p:nvSpPr>
+        <p:spPr>
+          <a:xfrm>
+            <a:off x="9729216" y="3291840"/>
+            <a:ext cx="603504" cy="310896"/>
           </a:xfrm>
           <a:prstGeom prst="rect">
             <a:avLst/>
@@ -20029,6 +19902,47 @@
           </a:bodyPr>
           <a:lstStyle/>
           <a:p>
+            <a:pPr algn="ctr" indent="0" marL="0">
+              <a:buNone/>
+            </a:pPr>
+            <a:r>
+              <a:rPr lang="en-US" sz="670" dirty="0">
+                <a:solidFill>
+                  <a:srgbClr val="121212"/>
+                </a:solidFill>
+                <a:latin typeface="Microsoft YaHei" pitchFamily="34" charset="0"/>
+                <a:ea typeface="Microsoft YaHei" pitchFamily="34" charset="-122"/>
+                <a:cs typeface="Microsoft YaHei" pitchFamily="34" charset="-120"/>
+              </a:rPr>
+              <a:t>需观察铁路新规实施效果</a:t>
+            </a:r>
+            <a:endParaRPr lang="en-US" sz="670" dirty="0"/>
+          </a:p>
+        </p:txBody>
+      </p:sp>
+      <p:sp>
+        <p:nvSpPr>
+          <p:cNvPr id="41" name="Text 39"/>
+          <p:cNvSpPr/>
+          <p:nvPr/>
+        </p:nvSpPr>
+        <p:spPr>
+          <a:xfrm>
+            <a:off x="7726680" y="4315968"/>
+            <a:ext cx="2697480" cy="384048"/>
+          </a:xfrm>
+          <a:prstGeom prst="rect">
+            <a:avLst/>
+          </a:prstGeom>
+          <a:noFill/>
+          <a:ln/>
+        </p:spPr>
+        <p:txBody>
+          <a:bodyPr wrap="square" lIns="0" tIns="0" rIns="0" bIns="0" rtlCol="0" anchor="t">
+            <a:normAutofit/>
+          </a:bodyPr>
+          <a:lstStyle/>
+          <a:p>
             <a:pPr indent="0" marL="0">
               <a:buNone/>
             </a:pPr>
@@ -20041,7 +19955,7 @@
                 <a:ea typeface="Microsoft YaHei" pitchFamily="34" charset="-122"/>
                 <a:cs typeface="Microsoft YaHei" pitchFamily="34" charset="-120"/>
               </a:rPr>
-              <a:t>检测到对比/分类信号，用矩阵压缩呈现，不新增外部判断。</a:t>
+              <a:t>参考培训 PPT 的阶段路线表达，按事件顺序拆成判断路径。</a:t>
             </a:r>
             <a:endParaRPr lang="en-US" sz="760" dirty="0"/>
           </a:p>
@@ -20049,7 +19963,7 @@
       </p:sp>
       <p:sp>
         <p:nvSpPr>
-          <p:cNvPr id="40" name="Shape 38"/>
+          <p:cNvPr id="42" name="Shape 40"/>
           <p:cNvSpPr/>
           <p:nvPr/>
         </p:nvSpPr>
@@ -20074,7 +19988,7 @@
       </p:sp>
       <p:sp>
         <p:nvSpPr>
-          <p:cNvPr id="41" name="Text 39"/>
+          <p:cNvPr id="43" name="Text 41"/>
           <p:cNvSpPr/>
           <p:nvPr/>
         </p:nvSpPr>
@@ -20113,7 +20027,7 @@
       </p:sp>
       <p:sp>
         <p:nvSpPr>
-          <p:cNvPr id="42" name="Text 40"/>
+          <p:cNvPr id="44" name="Text 42"/>
           <p:cNvSpPr/>
           <p:nvPr/>
         </p:nvSpPr>
@@ -20146,7 +20060,7 @@
                 <a:ea typeface="Microsoft YaHei" pitchFamily="34" charset="-122"/>
                 <a:cs typeface="Microsoft YaHei" pitchFamily="34" charset="-120"/>
               </a:rPr>
-              <a:t>若2027年上半年高压实新产能投产进度快于需求增速，则高压实产品溢价可能收窄，行业盈利分化加剧</a:t>
+              <a:t>若前驱体项目试产良率低于预期且铁路新规推高运输成本，则高压实铁锂供给缺口可能延长，价格支撑增强但下游电池成本压力上升</a:t>
             </a:r>
             <a:endParaRPr lang="en-US" sz="1020" dirty="0"/>
           </a:p>
